--- a/CdBd 기능 문서 구조 설계.pptx
+++ b/CdBd 기능 문서 구조 설계.pptx
@@ -4548,7 +4548,7 @@
                 <a:ea typeface="Pretendard Medium" pitchFamily="34" charset="-122"/>
                 <a:cs typeface="Pretendard Medium" pitchFamily="34" charset="-120"/>
               </a:rPr>
-              <a:t>실제 파일의 일부입니다 — 전체 96개 기능을 이렇게 한 줄씩. 내용은 복제하지 않고 ‘위치’만 가리킵니다.</a:t>
+              <a:t>실제 파일의 일부입니다 — CdBd 페이지 기능 약 40개(카드 15종 포함)를 이렇게 한 줄씩. 내용은 복제하지 않고 ‘위치’만 가리킵니다.</a:t>
             </a:r>
             <a:endParaRPr lang="en-US" sz="1150" dirty="0"/>
           </a:p>
@@ -4739,7 +4739,7 @@
                 <a:ea typeface="Pretendard" pitchFamily="34" charset="-122"/>
                 <a:cs typeface="Pretendard" pitchFamily="34" charset="-120"/>
               </a:rPr>
-              <a:t>목록이 가리키는 실제 볼트는 이렇게 생겼습니다.</a:t>
+              <a:t>‘4. 카드 기능 정의’ 폴더 안엔 카드 15종이 낱개 파일(4-3~4-17)로 들어 있습니다.</a:t>
             </a:r>
             <a:endParaRPr lang="en-US" sz="1500" dirty="0"/>
           </a:p>
@@ -4832,7 +4832,7 @@
         <p:spPr>
           <a:xfrm>
             <a:off x="777240" y="2377440"/>
-            <a:ext cx="6126480" cy="3611880"/>
+            <a:ext cx="4937760" cy="3611880"/>
           </a:xfrm>
           <a:prstGeom prst="roundRect">
             <a:avLst>
@@ -4858,8 +4858,8 @@
         </p:nvSpPr>
         <p:spPr>
           <a:xfrm>
-            <a:off x="1069848" y="2578608"/>
-            <a:ext cx="3593592" cy="301752"/>
+            <a:off x="1051560" y="2578608"/>
+            <a:ext cx="2697480" cy="310896"/>
           </a:xfrm>
           <a:prstGeom prst="rect">
             <a:avLst/>
@@ -4878,7 +4878,7 @@
               <a:buNone/>
             </a:pPr>
             <a:r>
-              <a:rPr lang="en-US" sz="1150" dirty="0">
+              <a:rPr lang="en-US" sz="1100" dirty="0">
                 <a:solidFill>
                   <a:srgbClr val="1D1D1F"/>
                 </a:solidFill>
@@ -4888,7 +4888,7 @@
               </a:rPr>
               <a:t>cdbd-design-system/</a:t>
             </a:r>
-            <a:endParaRPr lang="en-US" sz="1150" dirty="0"/>
+            <a:endParaRPr lang="en-US" sz="1100" dirty="0"/>
           </a:p>
         </p:txBody>
       </p:sp>
@@ -4900,8 +4900,8 @@
         </p:nvSpPr>
         <p:spPr>
           <a:xfrm>
-            <a:off x="1069848" y="2880360"/>
-            <a:ext cx="3593592" cy="301752"/>
+            <a:off x="1051560" y="2889504"/>
+            <a:ext cx="2697480" cy="310896"/>
           </a:xfrm>
           <a:prstGeom prst="rect">
             <a:avLst/>
@@ -4920,7 +4920,7 @@
               <a:buNone/>
             </a:pPr>
             <a:r>
-              <a:rPr lang="en-US" sz="1150" dirty="0">
+              <a:rPr lang="en-US" sz="1100" dirty="0">
                 <a:solidFill>
                   <a:srgbClr val="1D1D1F"/>
                 </a:solidFill>
@@ -4930,7 +4930,7 @@
               </a:rPr>
               <a:t>├─ CLAUDE.md</a:t>
             </a:r>
-            <a:endParaRPr lang="en-US" sz="1150" dirty="0"/>
+            <a:endParaRPr lang="en-US" sz="1100" dirty="0"/>
           </a:p>
         </p:txBody>
       </p:sp>
@@ -4942,8 +4942,8 @@
         </p:nvSpPr>
         <p:spPr>
           <a:xfrm>
-            <a:off x="4754880" y="2880360"/>
-            <a:ext cx="2075688" cy="301752"/>
+            <a:off x="3840480" y="2889504"/>
+            <a:ext cx="1783080" cy="310896"/>
           </a:xfrm>
           <a:prstGeom prst="rect">
             <a:avLst/>
@@ -4962,7 +4962,7 @@
               <a:buNone/>
             </a:pPr>
             <a:r>
-              <a:rPr lang="en-US" sz="1100" dirty="0">
+              <a:rPr lang="en-US" sz="1050" dirty="0">
                 <a:solidFill>
                   <a:srgbClr val="6C4CFF"/>
                 </a:solidFill>
@@ -4970,9 +4970,9 @@
                 <a:ea typeface="Pretendard" pitchFamily="34" charset="-122"/>
                 <a:cs typeface="Pretendard" pitchFamily="34" charset="-120"/>
               </a:rPr>
-              <a:t>@_기능별 경로 가이드.md</a:t>
-            </a:r>
-            <a:endParaRPr lang="en-US" sz="1100" dirty="0"/>
+              <a:t>@경로 가이드</a:t>
+            </a:r>
+            <a:endParaRPr lang="en-US" sz="1050" dirty="0"/>
           </a:p>
         </p:txBody>
       </p:sp>
@@ -4984,8 +4984,8 @@
         </p:nvSpPr>
         <p:spPr>
           <a:xfrm>
-            <a:off x="1069848" y="3182112"/>
-            <a:ext cx="3593592" cy="301752"/>
+            <a:off x="1051560" y="3200400"/>
+            <a:ext cx="2697480" cy="310896"/>
           </a:xfrm>
           <a:prstGeom prst="rect">
             <a:avLst/>
@@ -5004,7 +5004,7 @@
               <a:buNone/>
             </a:pPr>
             <a:r>
-              <a:rPr lang="en-US" sz="1150" dirty="0">
+              <a:rPr lang="en-US" sz="1100" dirty="0">
                 <a:solidFill>
                   <a:srgbClr val="6C4CFF"/>
                 </a:solidFill>
@@ -5014,7 +5014,7 @@
               </a:rPr>
               <a:t>├─ _기능별 경로 가이드.md</a:t>
             </a:r>
-            <a:endParaRPr lang="en-US" sz="1150" dirty="0"/>
+            <a:endParaRPr lang="en-US" sz="1100" dirty="0"/>
           </a:p>
         </p:txBody>
       </p:sp>
@@ -5026,8 +5026,8 @@
         </p:nvSpPr>
         <p:spPr>
           <a:xfrm>
-            <a:off x="4754880" y="3182112"/>
-            <a:ext cx="2075688" cy="301752"/>
+            <a:off x="3840480" y="3200400"/>
+            <a:ext cx="1783080" cy="310896"/>
           </a:xfrm>
           <a:prstGeom prst="rect">
             <a:avLst/>
@@ -5046,7 +5046,7 @@
               <a:buNone/>
             </a:pPr>
             <a:r>
-              <a:rPr lang="en-US" sz="1100" dirty="0">
+              <a:rPr lang="en-US" sz="1050" dirty="0">
                 <a:solidFill>
                   <a:srgbClr val="6C4CFF"/>
                 </a:solidFill>
@@ -5054,9 +5054,9 @@
                 <a:ea typeface="Pretendard" pitchFamily="34" charset="-122"/>
                 <a:cs typeface="Pretendard" pitchFamily="34" charset="-120"/>
               </a:rPr>
-              <a:t>이 볼트 기능 목록</a:t>
-            </a:r>
-            <a:endParaRPr lang="en-US" sz="1100" dirty="0"/>
+              <a:t>기능 목록</a:t>
+            </a:r>
+            <a:endParaRPr lang="en-US" sz="1050" dirty="0"/>
           </a:p>
         </p:txBody>
       </p:sp>
@@ -5068,8 +5068,8 @@
         </p:nvSpPr>
         <p:spPr>
           <a:xfrm>
-            <a:off x="1069848" y="3483864"/>
-            <a:ext cx="3593592" cy="301752"/>
+            <a:off x="1051560" y="3511296"/>
+            <a:ext cx="2697480" cy="310896"/>
           </a:xfrm>
           <a:prstGeom prst="rect">
             <a:avLst/>
@@ -5088,7 +5088,7 @@
               <a:buNone/>
             </a:pPr>
             <a:r>
-              <a:rPr lang="en-US" sz="1150" dirty="0">
+              <a:rPr lang="en-US" sz="1100" dirty="0">
                 <a:solidFill>
                   <a:srgbClr val="1D1D1F"/>
                 </a:solidFill>
@@ -5098,7 +5098,7 @@
               </a:rPr>
               <a:t>├─ .claude/skills/</a:t>
             </a:r>
-            <a:endParaRPr lang="en-US" sz="1150" dirty="0"/>
+            <a:endParaRPr lang="en-US" sz="1100" dirty="0"/>
           </a:p>
         </p:txBody>
       </p:sp>
@@ -5110,8 +5110,8 @@
         </p:nvSpPr>
         <p:spPr>
           <a:xfrm>
-            <a:off x="1069848" y="3785616"/>
-            <a:ext cx="3593592" cy="301752"/>
+            <a:off x="1051560" y="3822192"/>
+            <a:ext cx="2697480" cy="310896"/>
           </a:xfrm>
           <a:prstGeom prst="rect">
             <a:avLst/>
@@ -5130,7 +5130,7 @@
               <a:buNone/>
             </a:pPr>
             <a:r>
-              <a:rPr lang="en-US" sz="1150" dirty="0">
+              <a:rPr lang="en-US" sz="1100" dirty="0">
                 <a:solidFill>
                   <a:srgbClr val="1D1D1F"/>
                 </a:solidFill>
@@ -5138,9 +5138,9 @@
                 <a:ea typeface="Pretendard Medium" pitchFamily="34" charset="-122"/>
                 <a:cs typeface="Pretendard Medium" pitchFamily="34" charset="-120"/>
               </a:rPr>
-              <a:t>│    ├─ cdbd-icon-use/</a:t>
-            </a:r>
-            <a:endParaRPr lang="en-US" sz="1150" dirty="0"/>
+              <a:t>│   ├─ cdbd-icon-use/</a:t>
+            </a:r>
+            <a:endParaRPr lang="en-US" sz="1100" dirty="0"/>
           </a:p>
         </p:txBody>
       </p:sp>
@@ -5152,8 +5152,8 @@
         </p:nvSpPr>
         <p:spPr>
           <a:xfrm>
-            <a:off x="4754880" y="3785616"/>
-            <a:ext cx="2075688" cy="301752"/>
+            <a:off x="3840480" y="3822192"/>
+            <a:ext cx="1783080" cy="310896"/>
           </a:xfrm>
           <a:prstGeom prst="rect">
             <a:avLst/>
@@ -5172,7 +5172,7 @@
               <a:buNone/>
             </a:pPr>
             <a:r>
-              <a:rPr lang="en-US" sz="1100" dirty="0">
+              <a:rPr lang="en-US" sz="1050" dirty="0">
                 <a:solidFill>
                   <a:srgbClr val="6C4CFF"/>
                 </a:solidFill>
@@ -5180,9 +5180,9 @@
                 <a:ea typeface="Pretendard" pitchFamily="34" charset="-122"/>
                 <a:cs typeface="Pretendard" pitchFamily="34" charset="-120"/>
               </a:rPr>
-              <a:t>아이콘 배치·교체</a:t>
-            </a:r>
-            <a:endParaRPr lang="en-US" sz="1100" dirty="0"/>
+              <a:t>아이콘 배치</a:t>
+            </a:r>
+            <a:endParaRPr lang="en-US" sz="1050" dirty="0"/>
           </a:p>
         </p:txBody>
       </p:sp>
@@ -5194,8 +5194,8 @@
         </p:nvSpPr>
         <p:spPr>
           <a:xfrm>
-            <a:off x="1069848" y="4087368"/>
-            <a:ext cx="3593592" cy="301752"/>
+            <a:off x="1051560" y="4133088"/>
+            <a:ext cx="2697480" cy="310896"/>
           </a:xfrm>
           <a:prstGeom prst="rect">
             <a:avLst/>
@@ -5214,7 +5214,7 @@
               <a:buNone/>
             </a:pPr>
             <a:r>
-              <a:rPr lang="en-US" sz="1150" dirty="0">
+              <a:rPr lang="en-US" sz="1100" dirty="0">
                 <a:solidFill>
                   <a:srgbClr val="1D1D1F"/>
                 </a:solidFill>
@@ -5222,9 +5222,9 @@
                 <a:ea typeface="Pretendard Medium" pitchFamily="34" charset="-122"/>
                 <a:cs typeface="Pretendard Medium" pitchFamily="34" charset="-120"/>
               </a:rPr>
-              <a:t>│    └─ cdbd-icon-creation/</a:t>
-            </a:r>
-            <a:endParaRPr lang="en-US" sz="1150" dirty="0"/>
+              <a:t>│   └─ cdbd-icon-creation/</a:t>
+            </a:r>
+            <a:endParaRPr lang="en-US" sz="1100" dirty="0"/>
           </a:p>
         </p:txBody>
       </p:sp>
@@ -5236,8 +5236,8 @@
         </p:nvSpPr>
         <p:spPr>
           <a:xfrm>
-            <a:off x="4754880" y="4087368"/>
-            <a:ext cx="2075688" cy="301752"/>
+            <a:off x="3840480" y="4133088"/>
+            <a:ext cx="1783080" cy="310896"/>
           </a:xfrm>
           <a:prstGeom prst="rect">
             <a:avLst/>
@@ -5256,7 +5256,7 @@
               <a:buNone/>
             </a:pPr>
             <a:r>
-              <a:rPr lang="en-US" sz="1100" dirty="0">
+              <a:rPr lang="en-US" sz="1050" dirty="0">
                 <a:solidFill>
                   <a:srgbClr val="6C4CFF"/>
                 </a:solidFill>
@@ -5264,9 +5264,9 @@
                 <a:ea typeface="Pretendard" pitchFamily="34" charset="-122"/>
                 <a:cs typeface="Pretendard" pitchFamily="34" charset="-120"/>
               </a:rPr>
-              <a:t>신규 아이콘 제작</a:t>
-            </a:r>
-            <a:endParaRPr lang="en-US" sz="1100" dirty="0"/>
+              <a:t>아이콘 제작</a:t>
+            </a:r>
+            <a:endParaRPr lang="en-US" sz="1050" dirty="0"/>
           </a:p>
         </p:txBody>
       </p:sp>
@@ -5278,8 +5278,8 @@
         </p:nvSpPr>
         <p:spPr>
           <a:xfrm>
-            <a:off x="1069848" y="4389120"/>
-            <a:ext cx="3593592" cy="301752"/>
+            <a:off x="1051560" y="4443984"/>
+            <a:ext cx="2697480" cy="310896"/>
           </a:xfrm>
           <a:prstGeom prst="rect">
             <a:avLst/>
@@ -5298,7 +5298,7 @@
               <a:buNone/>
             </a:pPr>
             <a:r>
-              <a:rPr lang="en-US" sz="1150" dirty="0">
+              <a:rPr lang="en-US" sz="1100" dirty="0">
                 <a:solidFill>
                   <a:srgbClr val="1D1D1F"/>
                 </a:solidFill>
@@ -5308,7 +5308,7 @@
               </a:rPr>
               <a:t>└─ 디자인 시스템/</a:t>
             </a:r>
-            <a:endParaRPr lang="en-US" sz="1150" dirty="0"/>
+            <a:endParaRPr lang="en-US" sz="1100" dirty="0"/>
           </a:p>
         </p:txBody>
       </p:sp>
@@ -5320,8 +5320,8 @@
         </p:nvSpPr>
         <p:spPr>
           <a:xfrm>
-            <a:off x="1069848" y="4690872"/>
-            <a:ext cx="3593592" cy="301752"/>
+            <a:off x="1051560" y="4754880"/>
+            <a:ext cx="2697480" cy="310896"/>
           </a:xfrm>
           <a:prstGeom prst="rect">
             <a:avLst/>
@@ -5340,7 +5340,7 @@
               <a:buNone/>
             </a:pPr>
             <a:r>
-              <a:rPr lang="en-US" sz="1150" dirty="0">
+              <a:rPr lang="en-US" sz="1100" dirty="0">
                 <a:solidFill>
                   <a:srgbClr val="1D1D1F"/>
                 </a:solidFill>
@@ -5348,9 +5348,9 @@
                 <a:ea typeface="Pretendard Medium" pitchFamily="34" charset="-122"/>
                 <a:cs typeface="Pretendard Medium" pitchFamily="34" charset="-120"/>
               </a:rPr>
-              <a:t>     ├─ 1. 스타일/</a:t>
-            </a:r>
-            <a:endParaRPr lang="en-US" sz="1150" dirty="0"/>
+              <a:t>    ├─ 1. 스타일/</a:t>
+            </a:r>
+            <a:endParaRPr lang="en-US" sz="1100" dirty="0"/>
           </a:p>
         </p:txBody>
       </p:sp>
@@ -5362,8 +5362,8 @@
         </p:nvSpPr>
         <p:spPr>
           <a:xfrm>
-            <a:off x="4754880" y="4690872"/>
-            <a:ext cx="2075688" cy="301752"/>
+            <a:off x="3840480" y="4754880"/>
+            <a:ext cx="1783080" cy="310896"/>
           </a:xfrm>
           <a:prstGeom prst="rect">
             <a:avLst/>
@@ -5382,7 +5382,7 @@
               <a:buNone/>
             </a:pPr>
             <a:r>
-              <a:rPr lang="en-US" sz="1100" dirty="0">
+              <a:rPr lang="en-US" sz="1050" dirty="0">
                 <a:solidFill>
                   <a:srgbClr val="6C4CFF"/>
                 </a:solidFill>
@@ -5390,7 +5390,49 @@
                 <a:ea typeface="Pretendard" pitchFamily="34" charset="-122"/>
                 <a:cs typeface="Pretendard" pitchFamily="34" charset="-120"/>
               </a:rPr>
-              <a:t>컬러 · 폰트</a:t>
+              <a:t>컬러·폰트</a:t>
+            </a:r>
+            <a:endParaRPr lang="en-US" sz="1050" dirty="0"/>
+          </a:p>
+        </p:txBody>
+      </p:sp>
+      <p:sp>
+        <p:nvSpPr>
+          <p:cNvPr id="22" name="Text 20"/>
+          <p:cNvSpPr/>
+          <p:nvPr/>
+        </p:nvSpPr>
+        <p:spPr>
+          <a:xfrm>
+            <a:off x="1051560" y="5065776"/>
+            <a:ext cx="2697480" cy="310896"/>
+          </a:xfrm>
+          <a:prstGeom prst="rect">
+            <a:avLst/>
+          </a:prstGeom>
+          <a:noFill/>
+          <a:ln/>
+        </p:spPr>
+        <p:txBody>
+          <a:bodyPr wrap="square" lIns="0" tIns="0" rIns="0" bIns="0" rtlCol="0" anchor="ctr"/>
+          <a:lstStyle/>
+          <a:p>
+            <a:pPr algn="l" indent="0" marL="0">
+              <a:lnSpc>
+                <a:spcPct val="100000"/>
+              </a:lnSpc>
+              <a:buNone/>
+            </a:pPr>
+            <a:r>
+              <a:rPr lang="en-US" sz="1100" dirty="0">
+                <a:solidFill>
+                  <a:srgbClr val="6C4CFF"/>
+                </a:solidFill>
+                <a:latin typeface="Pretendard SemiBold" pitchFamily="34" charset="0"/>
+                <a:ea typeface="Pretendard SemiBold" pitchFamily="34" charset="-122"/>
+                <a:cs typeface="Pretendard SemiBold" pitchFamily="34" charset="-120"/>
+              </a:rPr>
+              <a:t>    ├─ 4. 카드 기능 정의/</a:t>
             </a:r>
             <a:endParaRPr lang="en-US" sz="1100" dirty="0"/>
           </a:p>
@@ -5398,14 +5440,14 @@
       </p:sp>
       <p:sp>
         <p:nvSpPr>
-          <p:cNvPr id="22" name="Text 20"/>
-          <p:cNvSpPr/>
-          <p:nvPr/>
-        </p:nvSpPr>
-        <p:spPr>
-          <a:xfrm>
-            <a:off x="1069848" y="4992624"/>
-            <a:ext cx="3593592" cy="301752"/>
+          <p:cNvPr id="23" name="Text 21"/>
+          <p:cNvSpPr/>
+          <p:nvPr/>
+        </p:nvSpPr>
+        <p:spPr>
+          <a:xfrm>
+            <a:off x="3840480" y="5065776"/>
+            <a:ext cx="1783080" cy="310896"/>
           </a:xfrm>
           <a:prstGeom prst="rect">
             <a:avLst/>
@@ -5424,7 +5466,49 @@
               <a:buNone/>
             </a:pPr>
             <a:r>
-              <a:rPr lang="en-US" sz="1150" dirty="0">
+              <a:rPr lang="en-US" sz="1050" dirty="0">
+                <a:solidFill>
+                  <a:srgbClr val="6C4CFF"/>
+                </a:solidFill>
+                <a:latin typeface="Pretendard" pitchFamily="34" charset="0"/>
+                <a:ea typeface="Pretendard" pitchFamily="34" charset="-122"/>
+                <a:cs typeface="Pretendard" pitchFamily="34" charset="-120"/>
+              </a:rPr>
+              <a:t>카드 15종 →</a:t>
+            </a:r>
+            <a:endParaRPr lang="en-US" sz="1050" dirty="0"/>
+          </a:p>
+        </p:txBody>
+      </p:sp>
+      <p:sp>
+        <p:nvSpPr>
+          <p:cNvPr id="24" name="Text 22"/>
+          <p:cNvSpPr/>
+          <p:nvPr/>
+        </p:nvSpPr>
+        <p:spPr>
+          <a:xfrm>
+            <a:off x="1051560" y="5376672"/>
+            <a:ext cx="2697480" cy="310896"/>
+          </a:xfrm>
+          <a:prstGeom prst="rect">
+            <a:avLst/>
+          </a:prstGeom>
+          <a:noFill/>
+          <a:ln/>
+        </p:spPr>
+        <p:txBody>
+          <a:bodyPr wrap="square" lIns="0" tIns="0" rIns="0" bIns="0" rtlCol="0" anchor="ctr"/>
+          <a:lstStyle/>
+          <a:p>
+            <a:pPr algn="l" indent="0" marL="0">
+              <a:lnSpc>
+                <a:spcPct val="100000"/>
+              </a:lnSpc>
+              <a:buNone/>
+            </a:pPr>
+            <a:r>
+              <a:rPr lang="en-US" sz="1100" dirty="0">
                 <a:solidFill>
                   <a:srgbClr val="1D1D1F"/>
                 </a:solidFill>
@@ -5432,22 +5516,22 @@
                 <a:ea typeface="Pretendard Medium" pitchFamily="34" charset="-122"/>
                 <a:cs typeface="Pretendard Medium" pitchFamily="34" charset="-120"/>
               </a:rPr>
-              <a:t>     ├─ 4. 카드 기능 정의/</a:t>
-            </a:r>
-            <a:endParaRPr lang="en-US" sz="1150" dirty="0"/>
-          </a:p>
-        </p:txBody>
-      </p:sp>
-      <p:sp>
-        <p:nvSpPr>
-          <p:cNvPr id="23" name="Text 21"/>
-          <p:cNvSpPr/>
-          <p:nvPr/>
-        </p:nvSpPr>
-        <p:spPr>
-          <a:xfrm>
-            <a:off x="4754880" y="4992624"/>
-            <a:ext cx="2075688" cy="301752"/>
+              <a:t>    └─ 5. 신규 기획 가이드/</a:t>
+            </a:r>
+            <a:endParaRPr lang="en-US" sz="1100" dirty="0"/>
+          </a:p>
+        </p:txBody>
+      </p:sp>
+      <p:sp>
+        <p:nvSpPr>
+          <p:cNvPr id="25" name="Text 23"/>
+          <p:cNvSpPr/>
+          <p:nvPr/>
+        </p:nvSpPr>
+        <p:spPr>
+          <a:xfrm>
+            <a:off x="3840480" y="5376672"/>
+            <a:ext cx="1783080" cy="310896"/>
           </a:xfrm>
           <a:prstGeom prst="rect">
             <a:avLst/>
@@ -5466,7 +5550,7 @@
               <a:buNone/>
             </a:pPr>
             <a:r>
-              <a:rPr lang="en-US" sz="1100" dirty="0">
+              <a:rPr lang="en-US" sz="1050" dirty="0">
                 <a:solidFill>
                   <a:srgbClr val="6C4CFF"/>
                 </a:solidFill>
@@ -5474,156 +5558,30 @@
                 <a:ea typeface="Pretendard" pitchFamily="34" charset="-122"/>
                 <a:cs typeface="Pretendard" pitchFamily="34" charset="-120"/>
               </a:rPr>
-              <a:t>4-1 ~ 4-17</a:t>
-            </a:r>
-            <a:endParaRPr lang="en-US" sz="1100" dirty="0"/>
-          </a:p>
-        </p:txBody>
-      </p:sp>
-      <p:sp>
-        <p:nvSpPr>
-          <p:cNvPr id="24" name="Text 22"/>
-          <p:cNvSpPr/>
-          <p:nvPr/>
-        </p:nvSpPr>
-        <p:spPr>
-          <a:xfrm>
-            <a:off x="1069848" y="5294376"/>
-            <a:ext cx="3593592" cy="301752"/>
-          </a:xfrm>
-          <a:prstGeom prst="rect">
-            <a:avLst/>
-          </a:prstGeom>
-          <a:noFill/>
-          <a:ln/>
-        </p:spPr>
-        <p:txBody>
-          <a:bodyPr wrap="square" lIns="0" tIns="0" rIns="0" bIns="0" rtlCol="0" anchor="ctr"/>
-          <a:lstStyle/>
-          <a:p>
-            <a:pPr algn="l" indent="0" marL="0">
-              <a:lnSpc>
-                <a:spcPct val="100000"/>
-              </a:lnSpc>
-              <a:buNone/>
-            </a:pPr>
-            <a:r>
-              <a:rPr lang="en-US" sz="1150" dirty="0">
-                <a:solidFill>
-                  <a:srgbClr val="1D1D1F"/>
-                </a:solidFill>
-                <a:latin typeface="Pretendard Medium" pitchFamily="34" charset="0"/>
-                <a:ea typeface="Pretendard Medium" pitchFamily="34" charset="-122"/>
-                <a:cs typeface="Pretendard Medium" pitchFamily="34" charset="-120"/>
-              </a:rPr>
-              <a:t>     └─ 5. 신규 기획 가이드/</a:t>
-            </a:r>
-            <a:endParaRPr lang="en-US" sz="1150" dirty="0"/>
-          </a:p>
-        </p:txBody>
-      </p:sp>
-      <p:sp>
-        <p:nvSpPr>
-          <p:cNvPr id="25" name="Text 23"/>
-          <p:cNvSpPr/>
-          <p:nvPr/>
-        </p:nvSpPr>
-        <p:spPr>
-          <a:xfrm>
-            <a:off x="4754880" y="5294376"/>
-            <a:ext cx="2075688" cy="301752"/>
-          </a:xfrm>
-          <a:prstGeom prst="rect">
-            <a:avLst/>
-          </a:prstGeom>
-          <a:noFill/>
-          <a:ln/>
-        </p:spPr>
-        <p:txBody>
-          <a:bodyPr wrap="square" lIns="0" tIns="0" rIns="0" bIns="0" rtlCol="0" anchor="ctr"/>
-          <a:lstStyle/>
-          <a:p>
-            <a:pPr algn="l" indent="0" marL="0">
-              <a:lnSpc>
-                <a:spcPct val="100000"/>
-              </a:lnSpc>
-              <a:buNone/>
-            </a:pPr>
-            <a:r>
-              <a:rPr lang="en-US" sz="1100" dirty="0">
-                <a:solidFill>
-                  <a:srgbClr val="6C4CFF"/>
-                </a:solidFill>
-                <a:latin typeface="Pretendard" pitchFamily="34" charset="0"/>
-                <a:ea typeface="Pretendard" pitchFamily="34" charset="-122"/>
-                <a:cs typeface="Pretendard" pitchFamily="34" charset="-120"/>
-              </a:rPr>
-              <a:t>5-1 ~ 5-5</a:t>
-            </a:r>
-            <a:endParaRPr lang="en-US" sz="1100" dirty="0"/>
-          </a:p>
-        </p:txBody>
-      </p:sp>
-      <p:sp>
-        <p:nvSpPr>
-          <p:cNvPr id="26" name="Text 24"/>
-          <p:cNvSpPr/>
-          <p:nvPr/>
-        </p:nvSpPr>
-        <p:spPr>
-          <a:xfrm>
-            <a:off x="7360920" y="2395728"/>
-            <a:ext cx="4053535" cy="274320"/>
-          </a:xfrm>
-          <a:prstGeom prst="rect">
-            <a:avLst/>
-          </a:prstGeom>
-          <a:noFill/>
-          <a:ln/>
-        </p:spPr>
-        <p:txBody>
-          <a:bodyPr wrap="square" lIns="0" tIns="0" rIns="0" bIns="0" rtlCol="0" anchor="t"/>
-          <a:lstStyle/>
-          <a:p>
-            <a:pPr algn="l" indent="0" marL="0">
-              <a:lnSpc>
-                <a:spcPct val="130000"/>
-              </a:lnSpc>
-              <a:buNone/>
-            </a:pPr>
-            <a:r>
-              <a:rPr lang="en-US" sz="1300" dirty="0">
-                <a:solidFill>
-                  <a:srgbClr val="6C4CFF"/>
-                </a:solidFill>
-                <a:latin typeface="Pretendard SemiBold" pitchFamily="34" charset="0"/>
-                <a:ea typeface="Pretendard SemiBold" pitchFamily="34" charset="-122"/>
-                <a:cs typeface="Pretendard SemiBold" pitchFamily="34" charset="-120"/>
-              </a:rPr>
-              <a:t>이 볼트에서 이렇게 말하면</a:t>
-            </a:r>
-            <a:endParaRPr lang="en-US" sz="1300" dirty="0"/>
-          </a:p>
-        </p:txBody>
-      </p:sp>
-      <p:sp>
-        <p:nvSpPr>
-          <p:cNvPr id="27" name="Shape 25"/>
-          <p:cNvSpPr/>
-          <p:nvPr/>
-        </p:nvSpPr>
-        <p:spPr>
-          <a:xfrm>
-            <a:off x="7360920" y="2834640"/>
-            <a:ext cx="4053535" cy="896112"/>
+              <a:t>제작 5종</a:t>
+            </a:r>
+            <a:endParaRPr lang="en-US" sz="1050" dirty="0"/>
+          </a:p>
+        </p:txBody>
+      </p:sp>
+      <p:sp>
+        <p:nvSpPr>
+          <p:cNvPr id="26" name="Shape 24"/>
+          <p:cNvSpPr/>
+          <p:nvPr/>
+        </p:nvSpPr>
+        <p:spPr>
+          <a:xfrm>
+            <a:off x="5989320" y="2377440"/>
+            <a:ext cx="5425135" cy="3611880"/>
           </a:xfrm>
           <a:prstGeom prst="roundRect">
             <a:avLst>
-              <a:gd name="adj" fmla="val 10204"/>
+              <a:gd name="adj" fmla="val 3038"/>
             </a:avLst>
           </a:prstGeom>
           <a:solidFill>
-            <a:srgbClr val="FFFFFF"/>
+            <a:srgbClr val="F5F5F7"/>
           </a:solidFill>
           <a:ln w="12700">
             <a:solidFill>
@@ -5635,14 +5593,14 @@
       </p:sp>
       <p:sp>
         <p:nvSpPr>
-          <p:cNvPr id="28" name="Text 26"/>
-          <p:cNvSpPr/>
-          <p:nvPr/>
-        </p:nvSpPr>
-        <p:spPr>
-          <a:xfrm>
-            <a:off x="7580376" y="2999232"/>
-            <a:ext cx="3614623" cy="274320"/>
+          <p:cNvPr id="27" name="Text 25"/>
+          <p:cNvSpPr/>
+          <p:nvPr/>
+        </p:nvSpPr>
+        <p:spPr>
+          <a:xfrm>
+            <a:off x="6263640" y="2578608"/>
+            <a:ext cx="4876495" cy="274320"/>
           </a:xfrm>
           <a:prstGeom prst="rect">
             <a:avLst/>
@@ -5661,108 +5619,39 @@
               <a:buNone/>
             </a:pPr>
             <a:r>
-              <a:rPr lang="en-US" sz="1250" dirty="0">
-                <a:solidFill>
-                  <a:srgbClr val="1D1D1F"/>
-                </a:solidFill>
-                <a:latin typeface="Pretendard SemiBold" pitchFamily="34" charset="0"/>
-                <a:ea typeface="Pretendard SemiBold" pitchFamily="34" charset="-122"/>
-                <a:cs typeface="Pretendard SemiBold" pitchFamily="34" charset="-120"/>
-              </a:rPr>
-              <a:t>“아이콘 바꿔줘”</a:t>
-            </a:r>
-            <a:endParaRPr lang="en-US" sz="1250" dirty="0"/>
-          </a:p>
-        </p:txBody>
-      </p:sp>
-      <p:sp>
-        <p:nvSpPr>
-          <p:cNvPr id="29" name="Text 27"/>
-          <p:cNvSpPr/>
-          <p:nvPr/>
-        </p:nvSpPr>
-        <p:spPr>
-          <a:xfrm>
-            <a:off x="7580376" y="3328416"/>
-            <a:ext cx="3614623" cy="274320"/>
-          </a:xfrm>
-          <a:prstGeom prst="rect">
-            <a:avLst/>
-          </a:prstGeom>
-          <a:noFill/>
-          <a:ln/>
-        </p:spPr>
-        <p:txBody>
-          <a:bodyPr wrap="square" lIns="0" tIns="0" rIns="0" bIns="0" rtlCol="0" anchor="t"/>
-          <a:lstStyle/>
-          <a:p>
-            <a:pPr algn="l" indent="0" marL="0">
-              <a:lnSpc>
-                <a:spcPct val="130000"/>
-              </a:lnSpc>
-              <a:buNone/>
-            </a:pPr>
-            <a:r>
-              <a:rPr lang="en-US" sz="1100" dirty="0">
-                <a:solidFill>
-                  <a:srgbClr val="55555A"/>
+              <a:rPr lang="en-US" sz="1350" b="1" dirty="0">
+                <a:solidFill>
+                  <a:srgbClr val="6C4CFF"/>
                 </a:solidFill>
                 <a:latin typeface="Pretendard" pitchFamily="34" charset="0"/>
                 <a:ea typeface="Pretendard" pitchFamily="34" charset="-122"/>
                 <a:cs typeface="Pretendard" pitchFamily="34" charset="-120"/>
               </a:rPr>
-              <a:t>→ skills/cdbd-icon-use/</a:t>
-            </a:r>
-            <a:endParaRPr lang="en-US" sz="1100" dirty="0"/>
-          </a:p>
-        </p:txBody>
-      </p:sp>
-      <p:sp>
-        <p:nvSpPr>
-          <p:cNvPr id="30" name="Shape 28"/>
-          <p:cNvSpPr/>
-          <p:nvPr/>
-        </p:nvSpPr>
-        <p:spPr>
-          <a:xfrm>
-            <a:off x="7360920" y="3867912"/>
-            <a:ext cx="4053535" cy="896112"/>
-          </a:xfrm>
-          <a:prstGeom prst="roundRect">
-            <a:avLst>
-              <a:gd name="adj" fmla="val 10204"/>
-            </a:avLst>
-          </a:prstGeom>
-          <a:solidFill>
-            <a:srgbClr val="FFFFFF"/>
-          </a:solidFill>
-          <a:ln w="12700">
-            <a:solidFill>
-              <a:srgbClr val="E5E7EB"/>
-            </a:solidFill>
-            <a:prstDash val="solid"/>
-          </a:ln>
-        </p:spPr>
-      </p:sp>
-      <p:sp>
-        <p:nvSpPr>
-          <p:cNvPr id="31" name="Text 29"/>
-          <p:cNvSpPr/>
-          <p:nvPr/>
-        </p:nvSpPr>
-        <p:spPr>
-          <a:xfrm>
-            <a:off x="7580376" y="4032504"/>
-            <a:ext cx="3614623" cy="274320"/>
-          </a:xfrm>
-          <a:prstGeom prst="rect">
-            <a:avLst/>
-          </a:prstGeom>
-          <a:noFill/>
-          <a:ln/>
-        </p:spPr>
-        <p:txBody>
-          <a:bodyPr wrap="square" lIns="0" tIns="0" rIns="0" bIns="0" rtlCol="0" anchor="t"/>
+              <a:t>4. 카드 기능 정의/ — 카드 15종</a:t>
+            </a:r>
+            <a:endParaRPr lang="en-US" sz="1350" dirty="0"/>
+          </a:p>
+        </p:txBody>
+      </p:sp>
+      <p:sp>
+        <p:nvSpPr>
+          <p:cNvPr id="28" name="Text 26"/>
+          <p:cNvSpPr/>
+          <p:nvPr/>
+        </p:nvSpPr>
+        <p:spPr>
+          <a:xfrm>
+            <a:off x="6263640" y="3127248"/>
+            <a:ext cx="457200" cy="274320"/>
+          </a:xfrm>
+          <a:prstGeom prst="rect">
+            <a:avLst/>
+          </a:prstGeom>
+          <a:noFill/>
+          <a:ln/>
+        </p:spPr>
+        <p:txBody>
+          <a:bodyPr wrap="square" lIns="0" tIns="0" rIns="0" bIns="0" rtlCol="0" anchor="ctr"/>
           <a:lstStyle/>
           <a:p>
             <a:pPr algn="l" indent="0" marL="0">
@@ -5772,108 +5661,39 @@
               <a:buNone/>
             </a:pPr>
             <a:r>
-              <a:rPr lang="en-US" sz="1250" dirty="0">
-                <a:solidFill>
-                  <a:srgbClr val="1D1D1F"/>
-                </a:solidFill>
-                <a:latin typeface="Pretendard SemiBold" pitchFamily="34" charset="0"/>
-                <a:ea typeface="Pretendard SemiBold" pitchFamily="34" charset="-122"/>
-                <a:cs typeface="Pretendard SemiBold" pitchFamily="34" charset="-120"/>
-              </a:rPr>
-              <a:t>“카드 스펙 알려줘”</a:t>
-            </a:r>
-            <a:endParaRPr lang="en-US" sz="1250" dirty="0"/>
-          </a:p>
-        </p:txBody>
-      </p:sp>
-      <p:sp>
-        <p:nvSpPr>
-          <p:cNvPr id="32" name="Text 30"/>
-          <p:cNvSpPr/>
-          <p:nvPr/>
-        </p:nvSpPr>
-        <p:spPr>
-          <a:xfrm>
-            <a:off x="7580376" y="4361688"/>
-            <a:ext cx="3614623" cy="274320"/>
-          </a:xfrm>
-          <a:prstGeom prst="rect">
-            <a:avLst/>
-          </a:prstGeom>
-          <a:noFill/>
-          <a:ln/>
-        </p:spPr>
-        <p:txBody>
-          <a:bodyPr wrap="square" lIns="0" tIns="0" rIns="0" bIns="0" rtlCol="0" anchor="t"/>
-          <a:lstStyle/>
-          <a:p>
-            <a:pPr algn="l" indent="0" marL="0">
-              <a:lnSpc>
-                <a:spcPct val="130000"/>
-              </a:lnSpc>
-              <a:buNone/>
-            </a:pPr>
-            <a:r>
-              <a:rPr lang="en-US" sz="1100" dirty="0">
-                <a:solidFill>
-                  <a:srgbClr val="55555A"/>
+              <a:rPr lang="en-US" sz="1050" b="1" dirty="0">
+                <a:solidFill>
+                  <a:srgbClr val="6C4CFF"/>
                 </a:solidFill>
                 <a:latin typeface="Pretendard" pitchFamily="34" charset="0"/>
                 <a:ea typeface="Pretendard" pitchFamily="34" charset="-122"/>
                 <a:cs typeface="Pretendard" pitchFamily="34" charset="-120"/>
               </a:rPr>
-              <a:t>→ 4. 카드 기능 정의/</a:t>
-            </a:r>
-            <a:endParaRPr lang="en-US" sz="1100" dirty="0"/>
-          </a:p>
-        </p:txBody>
-      </p:sp>
-      <p:sp>
-        <p:nvSpPr>
-          <p:cNvPr id="33" name="Shape 31"/>
-          <p:cNvSpPr/>
-          <p:nvPr/>
-        </p:nvSpPr>
-        <p:spPr>
-          <a:xfrm>
-            <a:off x="7360920" y="4901184"/>
-            <a:ext cx="4053535" cy="896112"/>
-          </a:xfrm>
-          <a:prstGeom prst="roundRect">
-            <a:avLst>
-              <a:gd name="adj" fmla="val 10204"/>
-            </a:avLst>
-          </a:prstGeom>
-          <a:solidFill>
-            <a:srgbClr val="FFFFFF"/>
-          </a:solidFill>
-          <a:ln w="12700">
-            <a:solidFill>
-              <a:srgbClr val="E5E7EB"/>
-            </a:solidFill>
-            <a:prstDash val="solid"/>
-          </a:ln>
-        </p:spPr>
-      </p:sp>
-      <p:sp>
-        <p:nvSpPr>
-          <p:cNvPr id="34" name="Text 32"/>
-          <p:cNvSpPr/>
-          <p:nvPr/>
-        </p:nvSpPr>
-        <p:spPr>
-          <a:xfrm>
-            <a:off x="7580376" y="5065776"/>
-            <a:ext cx="3614623" cy="274320"/>
-          </a:xfrm>
-          <a:prstGeom prst="rect">
-            <a:avLst/>
-          </a:prstGeom>
-          <a:noFill/>
-          <a:ln/>
-        </p:spPr>
-        <p:txBody>
-          <a:bodyPr wrap="square" lIns="0" tIns="0" rIns="0" bIns="0" rtlCol="0" anchor="t"/>
+              <a:t>4-3</a:t>
+            </a:r>
+            <a:endParaRPr lang="en-US" sz="1050" dirty="0"/>
+          </a:p>
+        </p:txBody>
+      </p:sp>
+      <p:sp>
+        <p:nvSpPr>
+          <p:cNvPr id="29" name="Text 27"/>
+          <p:cNvSpPr/>
+          <p:nvPr/>
+        </p:nvSpPr>
+        <p:spPr>
+          <a:xfrm>
+            <a:off x="6720840" y="3127248"/>
+            <a:ext cx="1168298" cy="274320"/>
+          </a:xfrm>
+          <a:prstGeom prst="rect">
+            <a:avLst/>
+          </a:prstGeom>
+          <a:noFill/>
+          <a:ln/>
+        </p:spPr>
+        <p:txBody>
+          <a:bodyPr wrap="square" lIns="0" tIns="0" rIns="0" bIns="0" rtlCol="0" anchor="ctr"/>
           <a:lstStyle/>
           <a:p>
             <a:pPr algn="l" indent="0" marL="0">
@@ -5883,39 +5703,39 @@
               <a:buNone/>
             </a:pPr>
             <a:r>
-              <a:rPr lang="en-US" sz="1250" dirty="0">
+              <a:rPr lang="en-US" sz="1150" dirty="0">
                 <a:solidFill>
                   <a:srgbClr val="1D1D1F"/>
                 </a:solidFill>
-                <a:latin typeface="Pretendard SemiBold" pitchFamily="34" charset="0"/>
-                <a:ea typeface="Pretendard SemiBold" pitchFamily="34" charset="-122"/>
-                <a:cs typeface="Pretendard SemiBold" pitchFamily="34" charset="-120"/>
-              </a:rPr>
-              <a:t>“개발 문서 만들어줘”</a:t>
-            </a:r>
-            <a:endParaRPr lang="en-US" sz="1250" dirty="0"/>
-          </a:p>
-        </p:txBody>
-      </p:sp>
-      <p:sp>
-        <p:nvSpPr>
-          <p:cNvPr id="35" name="Text 33"/>
-          <p:cNvSpPr/>
-          <p:nvPr/>
-        </p:nvSpPr>
-        <p:spPr>
-          <a:xfrm>
-            <a:off x="7580376" y="5394960"/>
-            <a:ext cx="3614623" cy="274320"/>
-          </a:xfrm>
-          <a:prstGeom prst="rect">
-            <a:avLst/>
-          </a:prstGeom>
-          <a:noFill/>
-          <a:ln/>
-        </p:spPr>
-        <p:txBody>
-          <a:bodyPr wrap="square" lIns="0" tIns="0" rIns="0" bIns="0" rtlCol="0" anchor="t"/>
+                <a:latin typeface="Pretendard Medium" pitchFamily="34" charset="0"/>
+                <a:ea typeface="Pretendard Medium" pitchFamily="34" charset="-122"/>
+                <a:cs typeface="Pretendard Medium" pitchFamily="34" charset="-120"/>
+              </a:rPr>
+              <a:t>메뉴</a:t>
+            </a:r>
+            <a:endParaRPr lang="en-US" sz="1150" dirty="0"/>
+          </a:p>
+        </p:txBody>
+      </p:sp>
+      <p:sp>
+        <p:nvSpPr>
+          <p:cNvPr id="30" name="Text 28"/>
+          <p:cNvSpPr/>
+          <p:nvPr/>
+        </p:nvSpPr>
+        <p:spPr>
+          <a:xfrm>
+            <a:off x="7889138" y="3127248"/>
+            <a:ext cx="457200" cy="274320"/>
+          </a:xfrm>
+          <a:prstGeom prst="rect">
+            <a:avLst/>
+          </a:prstGeom>
+          <a:noFill/>
+          <a:ln/>
+        </p:spPr>
+        <p:txBody>
+          <a:bodyPr wrap="square" lIns="0" tIns="0" rIns="0" bIns="0" rtlCol="0" anchor="ctr"/>
           <a:lstStyle/>
           <a:p>
             <a:pPr algn="l" indent="0" marL="0">
@@ -5925,17 +5745,1193 @@
               <a:buNone/>
             </a:pPr>
             <a:r>
-              <a:rPr lang="en-US" sz="1100" dirty="0">
-                <a:solidFill>
-                  <a:srgbClr val="55555A"/>
+              <a:rPr lang="en-US" sz="1050" b="1" dirty="0">
+                <a:solidFill>
+                  <a:srgbClr val="6C4CFF"/>
                 </a:solidFill>
                 <a:latin typeface="Pretendard" pitchFamily="34" charset="0"/>
                 <a:ea typeface="Pretendard" pitchFamily="34" charset="-122"/>
                 <a:cs typeface="Pretendard" pitchFamily="34" charset="-120"/>
               </a:rPr>
-              <a:t>→ 5-5. 개발 문서 제작 가이드.md</a:t>
-            </a:r>
-            <a:endParaRPr lang="en-US" sz="1100" dirty="0"/>
+              <a:t>4-4</a:t>
+            </a:r>
+            <a:endParaRPr lang="en-US" sz="1050" dirty="0"/>
+          </a:p>
+        </p:txBody>
+      </p:sp>
+      <p:sp>
+        <p:nvSpPr>
+          <p:cNvPr id="31" name="Text 29"/>
+          <p:cNvSpPr/>
+          <p:nvPr/>
+        </p:nvSpPr>
+        <p:spPr>
+          <a:xfrm>
+            <a:off x="8346338" y="3127248"/>
+            <a:ext cx="1168298" cy="274320"/>
+          </a:xfrm>
+          <a:prstGeom prst="rect">
+            <a:avLst/>
+          </a:prstGeom>
+          <a:noFill/>
+          <a:ln/>
+        </p:spPr>
+        <p:txBody>
+          <a:bodyPr wrap="square" lIns="0" tIns="0" rIns="0" bIns="0" rtlCol="0" anchor="ctr"/>
+          <a:lstStyle/>
+          <a:p>
+            <a:pPr algn="l" indent="0" marL="0">
+              <a:lnSpc>
+                <a:spcPct val="130000"/>
+              </a:lnSpc>
+              <a:buNone/>
+            </a:pPr>
+            <a:r>
+              <a:rPr lang="en-US" sz="1150" dirty="0">
+                <a:solidFill>
+                  <a:srgbClr val="1D1D1F"/>
+                </a:solidFill>
+                <a:latin typeface="Pretendard Medium" pitchFamily="34" charset="0"/>
+                <a:ea typeface="Pretendard Medium" pitchFamily="34" charset="-122"/>
+                <a:cs typeface="Pretendard Medium" pitchFamily="34" charset="-120"/>
+              </a:rPr>
+              <a:t>프로필</a:t>
+            </a:r>
+            <a:endParaRPr lang="en-US" sz="1150" dirty="0"/>
+          </a:p>
+        </p:txBody>
+      </p:sp>
+      <p:sp>
+        <p:nvSpPr>
+          <p:cNvPr id="32" name="Text 30"/>
+          <p:cNvSpPr/>
+          <p:nvPr/>
+        </p:nvSpPr>
+        <p:spPr>
+          <a:xfrm>
+            <a:off x="9514637" y="3127248"/>
+            <a:ext cx="457200" cy="274320"/>
+          </a:xfrm>
+          <a:prstGeom prst="rect">
+            <a:avLst/>
+          </a:prstGeom>
+          <a:noFill/>
+          <a:ln/>
+        </p:spPr>
+        <p:txBody>
+          <a:bodyPr wrap="square" lIns="0" tIns="0" rIns="0" bIns="0" rtlCol="0" anchor="ctr"/>
+          <a:lstStyle/>
+          <a:p>
+            <a:pPr algn="l" indent="0" marL="0">
+              <a:lnSpc>
+                <a:spcPct val="130000"/>
+              </a:lnSpc>
+              <a:buNone/>
+            </a:pPr>
+            <a:r>
+              <a:rPr lang="en-US" sz="1050" b="1" dirty="0">
+                <a:solidFill>
+                  <a:srgbClr val="6C4CFF"/>
+                </a:solidFill>
+                <a:latin typeface="Pretendard" pitchFamily="34" charset="0"/>
+                <a:ea typeface="Pretendard" pitchFamily="34" charset="-122"/>
+                <a:cs typeface="Pretendard" pitchFamily="34" charset="-120"/>
+              </a:rPr>
+              <a:t>4-5</a:t>
+            </a:r>
+            <a:endParaRPr lang="en-US" sz="1050" dirty="0"/>
+          </a:p>
+        </p:txBody>
+      </p:sp>
+      <p:sp>
+        <p:nvSpPr>
+          <p:cNvPr id="33" name="Text 31"/>
+          <p:cNvSpPr/>
+          <p:nvPr/>
+        </p:nvSpPr>
+        <p:spPr>
+          <a:xfrm>
+            <a:off x="9971837" y="3127248"/>
+            <a:ext cx="1168298" cy="274320"/>
+          </a:xfrm>
+          <a:prstGeom prst="rect">
+            <a:avLst/>
+          </a:prstGeom>
+          <a:noFill/>
+          <a:ln/>
+        </p:spPr>
+        <p:txBody>
+          <a:bodyPr wrap="square" lIns="0" tIns="0" rIns="0" bIns="0" rtlCol="0" anchor="ctr"/>
+          <a:lstStyle/>
+          <a:p>
+            <a:pPr algn="l" indent="0" marL="0">
+              <a:lnSpc>
+                <a:spcPct val="130000"/>
+              </a:lnSpc>
+              <a:buNone/>
+            </a:pPr>
+            <a:r>
+              <a:rPr lang="en-US" sz="1150" dirty="0">
+                <a:solidFill>
+                  <a:srgbClr val="1D1D1F"/>
+                </a:solidFill>
+                <a:latin typeface="Pretendard Medium" pitchFamily="34" charset="0"/>
+                <a:ea typeface="Pretendard Medium" pitchFamily="34" charset="-122"/>
+                <a:cs typeface="Pretendard Medium" pitchFamily="34" charset="-120"/>
+              </a:rPr>
+              <a:t>텍스트</a:t>
+            </a:r>
+            <a:endParaRPr lang="en-US" sz="1150" dirty="0"/>
+          </a:p>
+        </p:txBody>
+      </p:sp>
+      <p:sp>
+        <p:nvSpPr>
+          <p:cNvPr id="34" name="Text 32"/>
+          <p:cNvSpPr/>
+          <p:nvPr/>
+        </p:nvSpPr>
+        <p:spPr>
+          <a:xfrm>
+            <a:off x="6263640" y="3630168"/>
+            <a:ext cx="457200" cy="274320"/>
+          </a:xfrm>
+          <a:prstGeom prst="rect">
+            <a:avLst/>
+          </a:prstGeom>
+          <a:noFill/>
+          <a:ln/>
+        </p:spPr>
+        <p:txBody>
+          <a:bodyPr wrap="square" lIns="0" tIns="0" rIns="0" bIns="0" rtlCol="0" anchor="ctr"/>
+          <a:lstStyle/>
+          <a:p>
+            <a:pPr algn="l" indent="0" marL="0">
+              <a:lnSpc>
+                <a:spcPct val="130000"/>
+              </a:lnSpc>
+              <a:buNone/>
+            </a:pPr>
+            <a:r>
+              <a:rPr lang="en-US" sz="1050" b="1" dirty="0">
+                <a:solidFill>
+                  <a:srgbClr val="6C4CFF"/>
+                </a:solidFill>
+                <a:latin typeface="Pretendard" pitchFamily="34" charset="0"/>
+                <a:ea typeface="Pretendard" pitchFamily="34" charset="-122"/>
+                <a:cs typeface="Pretendard" pitchFamily="34" charset="-120"/>
+              </a:rPr>
+              <a:t>4-6</a:t>
+            </a:r>
+            <a:endParaRPr lang="en-US" sz="1050" dirty="0"/>
+          </a:p>
+        </p:txBody>
+      </p:sp>
+      <p:sp>
+        <p:nvSpPr>
+          <p:cNvPr id="35" name="Text 33"/>
+          <p:cNvSpPr/>
+          <p:nvPr/>
+        </p:nvSpPr>
+        <p:spPr>
+          <a:xfrm>
+            <a:off x="6720840" y="3630168"/>
+            <a:ext cx="1168298" cy="274320"/>
+          </a:xfrm>
+          <a:prstGeom prst="rect">
+            <a:avLst/>
+          </a:prstGeom>
+          <a:noFill/>
+          <a:ln/>
+        </p:spPr>
+        <p:txBody>
+          <a:bodyPr wrap="square" lIns="0" tIns="0" rIns="0" bIns="0" rtlCol="0" anchor="ctr"/>
+          <a:lstStyle/>
+          <a:p>
+            <a:pPr algn="l" indent="0" marL="0">
+              <a:lnSpc>
+                <a:spcPct val="130000"/>
+              </a:lnSpc>
+              <a:buNone/>
+            </a:pPr>
+            <a:r>
+              <a:rPr lang="en-US" sz="1150" dirty="0">
+                <a:solidFill>
+                  <a:srgbClr val="1D1D1F"/>
+                </a:solidFill>
+                <a:latin typeface="Pretendard Medium" pitchFamily="34" charset="0"/>
+                <a:ea typeface="Pretendard Medium" pitchFamily="34" charset="-122"/>
+                <a:cs typeface="Pretendard Medium" pitchFamily="34" charset="-120"/>
+              </a:rPr>
+              <a:t>이미지</a:t>
+            </a:r>
+            <a:endParaRPr lang="en-US" sz="1150" dirty="0"/>
+          </a:p>
+        </p:txBody>
+      </p:sp>
+      <p:sp>
+        <p:nvSpPr>
+          <p:cNvPr id="36" name="Text 34"/>
+          <p:cNvSpPr/>
+          <p:nvPr/>
+        </p:nvSpPr>
+        <p:spPr>
+          <a:xfrm>
+            <a:off x="7889138" y="3630168"/>
+            <a:ext cx="457200" cy="274320"/>
+          </a:xfrm>
+          <a:prstGeom prst="rect">
+            <a:avLst/>
+          </a:prstGeom>
+          <a:noFill/>
+          <a:ln/>
+        </p:spPr>
+        <p:txBody>
+          <a:bodyPr wrap="square" lIns="0" tIns="0" rIns="0" bIns="0" rtlCol="0" anchor="ctr"/>
+          <a:lstStyle/>
+          <a:p>
+            <a:pPr algn="l" indent="0" marL="0">
+              <a:lnSpc>
+                <a:spcPct val="130000"/>
+              </a:lnSpc>
+              <a:buNone/>
+            </a:pPr>
+            <a:r>
+              <a:rPr lang="en-US" sz="1050" b="1" dirty="0">
+                <a:solidFill>
+                  <a:srgbClr val="6C4CFF"/>
+                </a:solidFill>
+                <a:latin typeface="Pretendard" pitchFamily="34" charset="0"/>
+                <a:ea typeface="Pretendard" pitchFamily="34" charset="-122"/>
+                <a:cs typeface="Pretendard" pitchFamily="34" charset="-120"/>
+              </a:rPr>
+              <a:t>4-7</a:t>
+            </a:r>
+            <a:endParaRPr lang="en-US" sz="1050" dirty="0"/>
+          </a:p>
+        </p:txBody>
+      </p:sp>
+      <p:sp>
+        <p:nvSpPr>
+          <p:cNvPr id="37" name="Text 35"/>
+          <p:cNvSpPr/>
+          <p:nvPr/>
+        </p:nvSpPr>
+        <p:spPr>
+          <a:xfrm>
+            <a:off x="8346338" y="3630168"/>
+            <a:ext cx="1168298" cy="274320"/>
+          </a:xfrm>
+          <a:prstGeom prst="rect">
+            <a:avLst/>
+          </a:prstGeom>
+          <a:noFill/>
+          <a:ln/>
+        </p:spPr>
+        <p:txBody>
+          <a:bodyPr wrap="square" lIns="0" tIns="0" rIns="0" bIns="0" rtlCol="0" anchor="ctr"/>
+          <a:lstStyle/>
+          <a:p>
+            <a:pPr algn="l" indent="0" marL="0">
+              <a:lnSpc>
+                <a:spcPct val="130000"/>
+              </a:lnSpc>
+              <a:buNone/>
+            </a:pPr>
+            <a:r>
+              <a:rPr lang="en-US" sz="1150" dirty="0">
+                <a:solidFill>
+                  <a:srgbClr val="1D1D1F"/>
+                </a:solidFill>
+                <a:latin typeface="Pretendard Medium" pitchFamily="34" charset="0"/>
+                <a:ea typeface="Pretendard Medium" pitchFamily="34" charset="-122"/>
+                <a:cs typeface="Pretendard Medium" pitchFamily="34" charset="-120"/>
+              </a:rPr>
+              <a:t>갤러리</a:t>
+            </a:r>
+            <a:endParaRPr lang="en-US" sz="1150" dirty="0"/>
+          </a:p>
+        </p:txBody>
+      </p:sp>
+      <p:sp>
+        <p:nvSpPr>
+          <p:cNvPr id="38" name="Text 36"/>
+          <p:cNvSpPr/>
+          <p:nvPr/>
+        </p:nvSpPr>
+        <p:spPr>
+          <a:xfrm>
+            <a:off x="9514637" y="3630168"/>
+            <a:ext cx="457200" cy="274320"/>
+          </a:xfrm>
+          <a:prstGeom prst="rect">
+            <a:avLst/>
+          </a:prstGeom>
+          <a:noFill/>
+          <a:ln/>
+        </p:spPr>
+        <p:txBody>
+          <a:bodyPr wrap="square" lIns="0" tIns="0" rIns="0" bIns="0" rtlCol="0" anchor="ctr"/>
+          <a:lstStyle/>
+          <a:p>
+            <a:pPr algn="l" indent="0" marL="0">
+              <a:lnSpc>
+                <a:spcPct val="130000"/>
+              </a:lnSpc>
+              <a:buNone/>
+            </a:pPr>
+            <a:r>
+              <a:rPr lang="en-US" sz="1050" b="1" dirty="0">
+                <a:solidFill>
+                  <a:srgbClr val="6C4CFF"/>
+                </a:solidFill>
+                <a:latin typeface="Pretendard" pitchFamily="34" charset="0"/>
+                <a:ea typeface="Pretendard" pitchFamily="34" charset="-122"/>
+                <a:cs typeface="Pretendard" pitchFamily="34" charset="-120"/>
+              </a:rPr>
+              <a:t>4-8</a:t>
+            </a:r>
+            <a:endParaRPr lang="en-US" sz="1050" dirty="0"/>
+          </a:p>
+        </p:txBody>
+      </p:sp>
+      <p:sp>
+        <p:nvSpPr>
+          <p:cNvPr id="39" name="Text 37"/>
+          <p:cNvSpPr/>
+          <p:nvPr/>
+        </p:nvSpPr>
+        <p:spPr>
+          <a:xfrm>
+            <a:off x="9971837" y="3630168"/>
+            <a:ext cx="1168298" cy="274320"/>
+          </a:xfrm>
+          <a:prstGeom prst="rect">
+            <a:avLst/>
+          </a:prstGeom>
+          <a:noFill/>
+          <a:ln/>
+        </p:spPr>
+        <p:txBody>
+          <a:bodyPr wrap="square" lIns="0" tIns="0" rIns="0" bIns="0" rtlCol="0" anchor="ctr"/>
+          <a:lstStyle/>
+          <a:p>
+            <a:pPr algn="l" indent="0" marL="0">
+              <a:lnSpc>
+                <a:spcPct val="130000"/>
+              </a:lnSpc>
+              <a:buNone/>
+            </a:pPr>
+            <a:r>
+              <a:rPr lang="en-US" sz="1150" dirty="0">
+                <a:solidFill>
+                  <a:srgbClr val="1D1D1F"/>
+                </a:solidFill>
+                <a:latin typeface="Pretendard Medium" pitchFamily="34" charset="0"/>
+                <a:ea typeface="Pretendard Medium" pitchFamily="34" charset="-122"/>
+                <a:cs typeface="Pretendard Medium" pitchFamily="34" charset="-120"/>
+              </a:rPr>
+              <a:t>유튜브</a:t>
+            </a:r>
+            <a:endParaRPr lang="en-US" sz="1150" dirty="0"/>
+          </a:p>
+        </p:txBody>
+      </p:sp>
+      <p:sp>
+        <p:nvSpPr>
+          <p:cNvPr id="40" name="Text 38"/>
+          <p:cNvSpPr/>
+          <p:nvPr/>
+        </p:nvSpPr>
+        <p:spPr>
+          <a:xfrm>
+            <a:off x="6263640" y="4133088"/>
+            <a:ext cx="457200" cy="274320"/>
+          </a:xfrm>
+          <a:prstGeom prst="rect">
+            <a:avLst/>
+          </a:prstGeom>
+          <a:noFill/>
+          <a:ln/>
+        </p:spPr>
+        <p:txBody>
+          <a:bodyPr wrap="square" lIns="0" tIns="0" rIns="0" bIns="0" rtlCol="0" anchor="ctr"/>
+          <a:lstStyle/>
+          <a:p>
+            <a:pPr algn="l" indent="0" marL="0">
+              <a:lnSpc>
+                <a:spcPct val="130000"/>
+              </a:lnSpc>
+              <a:buNone/>
+            </a:pPr>
+            <a:r>
+              <a:rPr lang="en-US" sz="1050" b="1" dirty="0">
+                <a:solidFill>
+                  <a:srgbClr val="6C4CFF"/>
+                </a:solidFill>
+                <a:latin typeface="Pretendard" pitchFamily="34" charset="0"/>
+                <a:ea typeface="Pretendard" pitchFamily="34" charset="-122"/>
+                <a:cs typeface="Pretendard" pitchFamily="34" charset="-120"/>
+              </a:rPr>
+              <a:t>4-9</a:t>
+            </a:r>
+            <a:endParaRPr lang="en-US" sz="1050" dirty="0"/>
+          </a:p>
+        </p:txBody>
+      </p:sp>
+      <p:sp>
+        <p:nvSpPr>
+          <p:cNvPr id="41" name="Text 39"/>
+          <p:cNvSpPr/>
+          <p:nvPr/>
+        </p:nvSpPr>
+        <p:spPr>
+          <a:xfrm>
+            <a:off x="6720840" y="4133088"/>
+            <a:ext cx="1168298" cy="274320"/>
+          </a:xfrm>
+          <a:prstGeom prst="rect">
+            <a:avLst/>
+          </a:prstGeom>
+          <a:noFill/>
+          <a:ln/>
+        </p:spPr>
+        <p:txBody>
+          <a:bodyPr wrap="square" lIns="0" tIns="0" rIns="0" bIns="0" rtlCol="0" anchor="ctr"/>
+          <a:lstStyle/>
+          <a:p>
+            <a:pPr algn="l" indent="0" marL="0">
+              <a:lnSpc>
+                <a:spcPct val="130000"/>
+              </a:lnSpc>
+              <a:buNone/>
+            </a:pPr>
+            <a:r>
+              <a:rPr lang="en-US" sz="1150" dirty="0">
+                <a:solidFill>
+                  <a:srgbClr val="1D1D1F"/>
+                </a:solidFill>
+                <a:latin typeface="Pretendard Medium" pitchFamily="34" charset="0"/>
+                <a:ea typeface="Pretendard Medium" pitchFamily="34" charset="-122"/>
+                <a:cs typeface="Pretendard Medium" pitchFamily="34" charset="-120"/>
+              </a:rPr>
+              <a:t>버튼</a:t>
+            </a:r>
+            <a:endParaRPr lang="en-US" sz="1150" dirty="0"/>
+          </a:p>
+        </p:txBody>
+      </p:sp>
+      <p:sp>
+        <p:nvSpPr>
+          <p:cNvPr id="42" name="Text 40"/>
+          <p:cNvSpPr/>
+          <p:nvPr/>
+        </p:nvSpPr>
+        <p:spPr>
+          <a:xfrm>
+            <a:off x="7889138" y="4133088"/>
+            <a:ext cx="457200" cy="274320"/>
+          </a:xfrm>
+          <a:prstGeom prst="rect">
+            <a:avLst/>
+          </a:prstGeom>
+          <a:noFill/>
+          <a:ln/>
+        </p:spPr>
+        <p:txBody>
+          <a:bodyPr wrap="square" lIns="0" tIns="0" rIns="0" bIns="0" rtlCol="0" anchor="ctr"/>
+          <a:lstStyle/>
+          <a:p>
+            <a:pPr algn="l" indent="0" marL="0">
+              <a:lnSpc>
+                <a:spcPct val="130000"/>
+              </a:lnSpc>
+              <a:buNone/>
+            </a:pPr>
+            <a:r>
+              <a:rPr lang="en-US" sz="1050" b="1" dirty="0">
+                <a:solidFill>
+                  <a:srgbClr val="6C4CFF"/>
+                </a:solidFill>
+                <a:latin typeface="Pretendard" pitchFamily="34" charset="0"/>
+                <a:ea typeface="Pretendard" pitchFamily="34" charset="-122"/>
+                <a:cs typeface="Pretendard" pitchFamily="34" charset="-120"/>
+              </a:rPr>
+              <a:t>4-10</a:t>
+            </a:r>
+            <a:endParaRPr lang="en-US" sz="1050" dirty="0"/>
+          </a:p>
+        </p:txBody>
+      </p:sp>
+      <p:sp>
+        <p:nvSpPr>
+          <p:cNvPr id="43" name="Text 41"/>
+          <p:cNvSpPr/>
+          <p:nvPr/>
+        </p:nvSpPr>
+        <p:spPr>
+          <a:xfrm>
+            <a:off x="8346338" y="4133088"/>
+            <a:ext cx="1168298" cy="274320"/>
+          </a:xfrm>
+          <a:prstGeom prst="rect">
+            <a:avLst/>
+          </a:prstGeom>
+          <a:noFill/>
+          <a:ln/>
+        </p:spPr>
+        <p:txBody>
+          <a:bodyPr wrap="square" lIns="0" tIns="0" rIns="0" bIns="0" rtlCol="0" anchor="ctr"/>
+          <a:lstStyle/>
+          <a:p>
+            <a:pPr algn="l" indent="0" marL="0">
+              <a:lnSpc>
+                <a:spcPct val="130000"/>
+              </a:lnSpc>
+              <a:buNone/>
+            </a:pPr>
+            <a:r>
+              <a:rPr lang="en-US" sz="1150" dirty="0">
+                <a:solidFill>
+                  <a:srgbClr val="1D1D1F"/>
+                </a:solidFill>
+                <a:latin typeface="Pretendard Medium" pitchFamily="34" charset="0"/>
+                <a:ea typeface="Pretendard Medium" pitchFamily="34" charset="-122"/>
+                <a:cs typeface="Pretendard Medium" pitchFamily="34" charset="-120"/>
+              </a:rPr>
+              <a:t>질문·답변</a:t>
+            </a:r>
+            <a:endParaRPr lang="en-US" sz="1150" dirty="0"/>
+          </a:p>
+        </p:txBody>
+      </p:sp>
+      <p:sp>
+        <p:nvSpPr>
+          <p:cNvPr id="44" name="Text 42"/>
+          <p:cNvSpPr/>
+          <p:nvPr/>
+        </p:nvSpPr>
+        <p:spPr>
+          <a:xfrm>
+            <a:off x="9514637" y="4133088"/>
+            <a:ext cx="457200" cy="274320"/>
+          </a:xfrm>
+          <a:prstGeom prst="rect">
+            <a:avLst/>
+          </a:prstGeom>
+          <a:noFill/>
+          <a:ln/>
+        </p:spPr>
+        <p:txBody>
+          <a:bodyPr wrap="square" lIns="0" tIns="0" rIns="0" bIns="0" rtlCol="0" anchor="ctr"/>
+          <a:lstStyle/>
+          <a:p>
+            <a:pPr algn="l" indent="0" marL="0">
+              <a:lnSpc>
+                <a:spcPct val="130000"/>
+              </a:lnSpc>
+              <a:buNone/>
+            </a:pPr>
+            <a:r>
+              <a:rPr lang="en-US" sz="1050" b="1" dirty="0">
+                <a:solidFill>
+                  <a:srgbClr val="6C4CFF"/>
+                </a:solidFill>
+                <a:latin typeface="Pretendard" pitchFamily="34" charset="0"/>
+                <a:ea typeface="Pretendard" pitchFamily="34" charset="-122"/>
+                <a:cs typeface="Pretendard" pitchFamily="34" charset="-120"/>
+              </a:rPr>
+              <a:t>4-11</a:t>
+            </a:r>
+            <a:endParaRPr lang="en-US" sz="1050" dirty="0"/>
+          </a:p>
+        </p:txBody>
+      </p:sp>
+      <p:sp>
+        <p:nvSpPr>
+          <p:cNvPr id="45" name="Text 43"/>
+          <p:cNvSpPr/>
+          <p:nvPr/>
+        </p:nvSpPr>
+        <p:spPr>
+          <a:xfrm>
+            <a:off x="9971837" y="4133088"/>
+            <a:ext cx="1168298" cy="274320"/>
+          </a:xfrm>
+          <a:prstGeom prst="rect">
+            <a:avLst/>
+          </a:prstGeom>
+          <a:noFill/>
+          <a:ln/>
+        </p:spPr>
+        <p:txBody>
+          <a:bodyPr wrap="square" lIns="0" tIns="0" rIns="0" bIns="0" rtlCol="0" anchor="ctr"/>
+          <a:lstStyle/>
+          <a:p>
+            <a:pPr algn="l" indent="0" marL="0">
+              <a:lnSpc>
+                <a:spcPct val="130000"/>
+              </a:lnSpc>
+              <a:buNone/>
+            </a:pPr>
+            <a:r>
+              <a:rPr lang="en-US" sz="1150" dirty="0">
+                <a:solidFill>
+                  <a:srgbClr val="1D1D1F"/>
+                </a:solidFill>
+                <a:latin typeface="Pretendard Medium" pitchFamily="34" charset="0"/>
+                <a:ea typeface="Pretendard Medium" pitchFamily="34" charset="-122"/>
+                <a:cs typeface="Pretendard Medium" pitchFamily="34" charset="-120"/>
+              </a:rPr>
+              <a:t>예약</a:t>
+            </a:r>
+            <a:endParaRPr lang="en-US" sz="1150" dirty="0"/>
+          </a:p>
+        </p:txBody>
+      </p:sp>
+      <p:sp>
+        <p:nvSpPr>
+          <p:cNvPr id="46" name="Text 44"/>
+          <p:cNvSpPr/>
+          <p:nvPr/>
+        </p:nvSpPr>
+        <p:spPr>
+          <a:xfrm>
+            <a:off x="6263640" y="4636008"/>
+            <a:ext cx="457200" cy="274320"/>
+          </a:xfrm>
+          <a:prstGeom prst="rect">
+            <a:avLst/>
+          </a:prstGeom>
+          <a:noFill/>
+          <a:ln/>
+        </p:spPr>
+        <p:txBody>
+          <a:bodyPr wrap="square" lIns="0" tIns="0" rIns="0" bIns="0" rtlCol="0" anchor="ctr"/>
+          <a:lstStyle/>
+          <a:p>
+            <a:pPr algn="l" indent="0" marL="0">
+              <a:lnSpc>
+                <a:spcPct val="130000"/>
+              </a:lnSpc>
+              <a:buNone/>
+            </a:pPr>
+            <a:r>
+              <a:rPr lang="en-US" sz="1050" b="1" dirty="0">
+                <a:solidFill>
+                  <a:srgbClr val="6C4CFF"/>
+                </a:solidFill>
+                <a:latin typeface="Pretendard" pitchFamily="34" charset="0"/>
+                <a:ea typeface="Pretendard" pitchFamily="34" charset="-122"/>
+                <a:cs typeface="Pretendard" pitchFamily="34" charset="-120"/>
+              </a:rPr>
+              <a:t>4-12</a:t>
+            </a:r>
+            <a:endParaRPr lang="en-US" sz="1050" dirty="0"/>
+          </a:p>
+        </p:txBody>
+      </p:sp>
+      <p:sp>
+        <p:nvSpPr>
+          <p:cNvPr id="47" name="Text 45"/>
+          <p:cNvSpPr/>
+          <p:nvPr/>
+        </p:nvSpPr>
+        <p:spPr>
+          <a:xfrm>
+            <a:off x="6720840" y="4636008"/>
+            <a:ext cx="1168298" cy="274320"/>
+          </a:xfrm>
+          <a:prstGeom prst="rect">
+            <a:avLst/>
+          </a:prstGeom>
+          <a:noFill/>
+          <a:ln/>
+        </p:spPr>
+        <p:txBody>
+          <a:bodyPr wrap="square" lIns="0" tIns="0" rIns="0" bIns="0" rtlCol="0" anchor="ctr"/>
+          <a:lstStyle/>
+          <a:p>
+            <a:pPr algn="l" indent="0" marL="0">
+              <a:lnSpc>
+                <a:spcPct val="130000"/>
+              </a:lnSpc>
+              <a:buNone/>
+            </a:pPr>
+            <a:r>
+              <a:rPr lang="en-US" sz="1150" dirty="0">
+                <a:solidFill>
+                  <a:srgbClr val="1D1D1F"/>
+                </a:solidFill>
+                <a:latin typeface="Pretendard Medium" pitchFamily="34" charset="0"/>
+                <a:ea typeface="Pretendard Medium" pitchFamily="34" charset="-122"/>
+                <a:cs typeface="Pretendard Medium" pitchFamily="34" charset="-120"/>
+              </a:rPr>
+              <a:t>상품</a:t>
+            </a:r>
+            <a:endParaRPr lang="en-US" sz="1150" dirty="0"/>
+          </a:p>
+        </p:txBody>
+      </p:sp>
+      <p:sp>
+        <p:nvSpPr>
+          <p:cNvPr id="48" name="Text 46"/>
+          <p:cNvSpPr/>
+          <p:nvPr/>
+        </p:nvSpPr>
+        <p:spPr>
+          <a:xfrm>
+            <a:off x="7889138" y="4636008"/>
+            <a:ext cx="457200" cy="274320"/>
+          </a:xfrm>
+          <a:prstGeom prst="rect">
+            <a:avLst/>
+          </a:prstGeom>
+          <a:noFill/>
+          <a:ln/>
+        </p:spPr>
+        <p:txBody>
+          <a:bodyPr wrap="square" lIns="0" tIns="0" rIns="0" bIns="0" rtlCol="0" anchor="ctr"/>
+          <a:lstStyle/>
+          <a:p>
+            <a:pPr algn="l" indent="0" marL="0">
+              <a:lnSpc>
+                <a:spcPct val="130000"/>
+              </a:lnSpc>
+              <a:buNone/>
+            </a:pPr>
+            <a:r>
+              <a:rPr lang="en-US" sz="1050" b="1" dirty="0">
+                <a:solidFill>
+                  <a:srgbClr val="6C4CFF"/>
+                </a:solidFill>
+                <a:latin typeface="Pretendard" pitchFamily="34" charset="0"/>
+                <a:ea typeface="Pretendard" pitchFamily="34" charset="-122"/>
+                <a:cs typeface="Pretendard" pitchFamily="34" charset="-120"/>
+              </a:rPr>
+              <a:t>4-13</a:t>
+            </a:r>
+            <a:endParaRPr lang="en-US" sz="1050" dirty="0"/>
+          </a:p>
+        </p:txBody>
+      </p:sp>
+      <p:sp>
+        <p:nvSpPr>
+          <p:cNvPr id="49" name="Text 47"/>
+          <p:cNvSpPr/>
+          <p:nvPr/>
+        </p:nvSpPr>
+        <p:spPr>
+          <a:xfrm>
+            <a:off x="8346338" y="4636008"/>
+            <a:ext cx="1168298" cy="274320"/>
+          </a:xfrm>
+          <a:prstGeom prst="rect">
+            <a:avLst/>
+          </a:prstGeom>
+          <a:noFill/>
+          <a:ln/>
+        </p:spPr>
+        <p:txBody>
+          <a:bodyPr wrap="square" lIns="0" tIns="0" rIns="0" bIns="0" rtlCol="0" anchor="ctr"/>
+          <a:lstStyle/>
+          <a:p>
+            <a:pPr algn="l" indent="0" marL="0">
+              <a:lnSpc>
+                <a:spcPct val="130000"/>
+              </a:lnSpc>
+              <a:buNone/>
+            </a:pPr>
+            <a:r>
+              <a:rPr lang="en-US" sz="1150" dirty="0">
+                <a:solidFill>
+                  <a:srgbClr val="1D1D1F"/>
+                </a:solidFill>
+                <a:latin typeface="Pretendard Medium" pitchFamily="34" charset="0"/>
+                <a:ea typeface="Pretendard Medium" pitchFamily="34" charset="-122"/>
+                <a:cs typeface="Pretendard Medium" pitchFamily="34" charset="-120"/>
+              </a:rPr>
+              <a:t>위치 안내</a:t>
+            </a:r>
+            <a:endParaRPr lang="en-US" sz="1150" dirty="0"/>
+          </a:p>
+        </p:txBody>
+      </p:sp>
+      <p:sp>
+        <p:nvSpPr>
+          <p:cNvPr id="50" name="Text 48"/>
+          <p:cNvSpPr/>
+          <p:nvPr/>
+        </p:nvSpPr>
+        <p:spPr>
+          <a:xfrm>
+            <a:off x="9514637" y="4636008"/>
+            <a:ext cx="457200" cy="274320"/>
+          </a:xfrm>
+          <a:prstGeom prst="rect">
+            <a:avLst/>
+          </a:prstGeom>
+          <a:noFill/>
+          <a:ln/>
+        </p:spPr>
+        <p:txBody>
+          <a:bodyPr wrap="square" lIns="0" tIns="0" rIns="0" bIns="0" rtlCol="0" anchor="ctr"/>
+          <a:lstStyle/>
+          <a:p>
+            <a:pPr algn="l" indent="0" marL="0">
+              <a:lnSpc>
+                <a:spcPct val="130000"/>
+              </a:lnSpc>
+              <a:buNone/>
+            </a:pPr>
+            <a:r>
+              <a:rPr lang="en-US" sz="1050" b="1" dirty="0">
+                <a:solidFill>
+                  <a:srgbClr val="6C4CFF"/>
+                </a:solidFill>
+                <a:latin typeface="Pretendard" pitchFamily="34" charset="0"/>
+                <a:ea typeface="Pretendard" pitchFamily="34" charset="-122"/>
+                <a:cs typeface="Pretendard" pitchFamily="34" charset="-120"/>
+              </a:rPr>
+              <a:t>4-14</a:t>
+            </a:r>
+            <a:endParaRPr lang="en-US" sz="1050" dirty="0"/>
+          </a:p>
+        </p:txBody>
+      </p:sp>
+      <p:sp>
+        <p:nvSpPr>
+          <p:cNvPr id="51" name="Text 49"/>
+          <p:cNvSpPr/>
+          <p:nvPr/>
+        </p:nvSpPr>
+        <p:spPr>
+          <a:xfrm>
+            <a:off x="9971837" y="4636008"/>
+            <a:ext cx="1168298" cy="274320"/>
+          </a:xfrm>
+          <a:prstGeom prst="rect">
+            <a:avLst/>
+          </a:prstGeom>
+          <a:noFill/>
+          <a:ln/>
+        </p:spPr>
+        <p:txBody>
+          <a:bodyPr wrap="square" lIns="0" tIns="0" rIns="0" bIns="0" rtlCol="0" anchor="ctr"/>
+          <a:lstStyle/>
+          <a:p>
+            <a:pPr algn="l" indent="0" marL="0">
+              <a:lnSpc>
+                <a:spcPct val="130000"/>
+              </a:lnSpc>
+              <a:buNone/>
+            </a:pPr>
+            <a:r>
+              <a:rPr lang="en-US" sz="1150" dirty="0">
+                <a:solidFill>
+                  <a:srgbClr val="1D1D1F"/>
+                </a:solidFill>
+                <a:latin typeface="Pretendard Medium" pitchFamily="34" charset="0"/>
+                <a:ea typeface="Pretendard Medium" pitchFamily="34" charset="-122"/>
+                <a:cs typeface="Pretendard Medium" pitchFamily="34" charset="-120"/>
+              </a:rPr>
+              <a:t>SNS</a:t>
+            </a:r>
+            <a:endParaRPr lang="en-US" sz="1150" dirty="0"/>
+          </a:p>
+        </p:txBody>
+      </p:sp>
+      <p:sp>
+        <p:nvSpPr>
+          <p:cNvPr id="52" name="Text 50"/>
+          <p:cNvSpPr/>
+          <p:nvPr/>
+        </p:nvSpPr>
+        <p:spPr>
+          <a:xfrm>
+            <a:off x="6263640" y="5138928"/>
+            <a:ext cx="457200" cy="274320"/>
+          </a:xfrm>
+          <a:prstGeom prst="rect">
+            <a:avLst/>
+          </a:prstGeom>
+          <a:noFill/>
+          <a:ln/>
+        </p:spPr>
+        <p:txBody>
+          <a:bodyPr wrap="square" lIns="0" tIns="0" rIns="0" bIns="0" rtlCol="0" anchor="ctr"/>
+          <a:lstStyle/>
+          <a:p>
+            <a:pPr algn="l" indent="0" marL="0">
+              <a:lnSpc>
+                <a:spcPct val="130000"/>
+              </a:lnSpc>
+              <a:buNone/>
+            </a:pPr>
+            <a:r>
+              <a:rPr lang="en-US" sz="1050" b="1" dirty="0">
+                <a:solidFill>
+                  <a:srgbClr val="6C4CFF"/>
+                </a:solidFill>
+                <a:latin typeface="Pretendard" pitchFamily="34" charset="0"/>
+                <a:ea typeface="Pretendard" pitchFamily="34" charset="-122"/>
+                <a:cs typeface="Pretendard" pitchFamily="34" charset="-120"/>
+              </a:rPr>
+              <a:t>4-15</a:t>
+            </a:r>
+            <a:endParaRPr lang="en-US" sz="1050" dirty="0"/>
+          </a:p>
+        </p:txBody>
+      </p:sp>
+      <p:sp>
+        <p:nvSpPr>
+          <p:cNvPr id="53" name="Text 51"/>
+          <p:cNvSpPr/>
+          <p:nvPr/>
+        </p:nvSpPr>
+        <p:spPr>
+          <a:xfrm>
+            <a:off x="6720840" y="5138928"/>
+            <a:ext cx="1168298" cy="274320"/>
+          </a:xfrm>
+          <a:prstGeom prst="rect">
+            <a:avLst/>
+          </a:prstGeom>
+          <a:noFill/>
+          <a:ln/>
+        </p:spPr>
+        <p:txBody>
+          <a:bodyPr wrap="square" lIns="0" tIns="0" rIns="0" bIns="0" rtlCol="0" anchor="ctr"/>
+          <a:lstStyle/>
+          <a:p>
+            <a:pPr algn="l" indent="0" marL="0">
+              <a:lnSpc>
+                <a:spcPct val="130000"/>
+              </a:lnSpc>
+              <a:buNone/>
+            </a:pPr>
+            <a:r>
+              <a:rPr lang="en-US" sz="1150" dirty="0">
+                <a:solidFill>
+                  <a:srgbClr val="1D1D1F"/>
+                </a:solidFill>
+                <a:latin typeface="Pretendard Medium" pitchFamily="34" charset="0"/>
+                <a:ea typeface="Pretendard Medium" pitchFamily="34" charset="-122"/>
+                <a:cs typeface="Pretendard Medium" pitchFamily="34" charset="-120"/>
+              </a:rPr>
+              <a:t>구분선</a:t>
+            </a:r>
+            <a:endParaRPr lang="en-US" sz="1150" dirty="0"/>
+          </a:p>
+        </p:txBody>
+      </p:sp>
+      <p:sp>
+        <p:nvSpPr>
+          <p:cNvPr id="54" name="Text 52"/>
+          <p:cNvSpPr/>
+          <p:nvPr/>
+        </p:nvSpPr>
+        <p:spPr>
+          <a:xfrm>
+            <a:off x="7889138" y="5138928"/>
+            <a:ext cx="457200" cy="274320"/>
+          </a:xfrm>
+          <a:prstGeom prst="rect">
+            <a:avLst/>
+          </a:prstGeom>
+          <a:noFill/>
+          <a:ln/>
+        </p:spPr>
+        <p:txBody>
+          <a:bodyPr wrap="square" lIns="0" tIns="0" rIns="0" bIns="0" rtlCol="0" anchor="ctr"/>
+          <a:lstStyle/>
+          <a:p>
+            <a:pPr algn="l" indent="0" marL="0">
+              <a:lnSpc>
+                <a:spcPct val="130000"/>
+              </a:lnSpc>
+              <a:buNone/>
+            </a:pPr>
+            <a:r>
+              <a:rPr lang="en-US" sz="1050" b="1" dirty="0">
+                <a:solidFill>
+                  <a:srgbClr val="6C4CFF"/>
+                </a:solidFill>
+                <a:latin typeface="Pretendard" pitchFamily="34" charset="0"/>
+                <a:ea typeface="Pretendard" pitchFamily="34" charset="-122"/>
+                <a:cs typeface="Pretendard" pitchFamily="34" charset="-120"/>
+              </a:rPr>
+              <a:t>4-16</a:t>
+            </a:r>
+            <a:endParaRPr lang="en-US" sz="1050" dirty="0"/>
+          </a:p>
+        </p:txBody>
+      </p:sp>
+      <p:sp>
+        <p:nvSpPr>
+          <p:cNvPr id="55" name="Text 53"/>
+          <p:cNvSpPr/>
+          <p:nvPr/>
+        </p:nvSpPr>
+        <p:spPr>
+          <a:xfrm>
+            <a:off x="8346338" y="5138928"/>
+            <a:ext cx="1168298" cy="274320"/>
+          </a:xfrm>
+          <a:prstGeom prst="rect">
+            <a:avLst/>
+          </a:prstGeom>
+          <a:noFill/>
+          <a:ln/>
+        </p:spPr>
+        <p:txBody>
+          <a:bodyPr wrap="square" lIns="0" tIns="0" rIns="0" bIns="0" rtlCol="0" anchor="ctr"/>
+          <a:lstStyle/>
+          <a:p>
+            <a:pPr algn="l" indent="0" marL="0">
+              <a:lnSpc>
+                <a:spcPct val="130000"/>
+              </a:lnSpc>
+              <a:buNone/>
+            </a:pPr>
+            <a:r>
+              <a:rPr lang="en-US" sz="1150" dirty="0">
+                <a:solidFill>
+                  <a:srgbClr val="1D1D1F"/>
+                </a:solidFill>
+                <a:latin typeface="Pretendard Medium" pitchFamily="34" charset="0"/>
+                <a:ea typeface="Pretendard Medium" pitchFamily="34" charset="-122"/>
+                <a:cs typeface="Pretendard Medium" pitchFamily="34" charset="-120"/>
+              </a:rPr>
+              <a:t>코드</a:t>
+            </a:r>
+            <a:endParaRPr lang="en-US" sz="1150" dirty="0"/>
+          </a:p>
+        </p:txBody>
+      </p:sp>
+      <p:sp>
+        <p:nvSpPr>
+          <p:cNvPr id="56" name="Text 54"/>
+          <p:cNvSpPr/>
+          <p:nvPr/>
+        </p:nvSpPr>
+        <p:spPr>
+          <a:xfrm>
+            <a:off x="9514637" y="5138928"/>
+            <a:ext cx="457200" cy="274320"/>
+          </a:xfrm>
+          <a:prstGeom prst="rect">
+            <a:avLst/>
+          </a:prstGeom>
+          <a:noFill/>
+          <a:ln/>
+        </p:spPr>
+        <p:txBody>
+          <a:bodyPr wrap="square" lIns="0" tIns="0" rIns="0" bIns="0" rtlCol="0" anchor="ctr"/>
+          <a:lstStyle/>
+          <a:p>
+            <a:pPr algn="l" indent="0" marL="0">
+              <a:lnSpc>
+                <a:spcPct val="130000"/>
+              </a:lnSpc>
+              <a:buNone/>
+            </a:pPr>
+            <a:r>
+              <a:rPr lang="en-US" sz="1050" b="1" dirty="0">
+                <a:solidFill>
+                  <a:srgbClr val="6C4CFF"/>
+                </a:solidFill>
+                <a:latin typeface="Pretendard" pitchFamily="34" charset="0"/>
+                <a:ea typeface="Pretendard" pitchFamily="34" charset="-122"/>
+                <a:cs typeface="Pretendard" pitchFamily="34" charset="-120"/>
+              </a:rPr>
+              <a:t>4-17</a:t>
+            </a:r>
+            <a:endParaRPr lang="en-US" sz="1050" dirty="0"/>
+          </a:p>
+        </p:txBody>
+      </p:sp>
+      <p:sp>
+        <p:nvSpPr>
+          <p:cNvPr id="57" name="Text 55"/>
+          <p:cNvSpPr/>
+          <p:nvPr/>
+        </p:nvSpPr>
+        <p:spPr>
+          <a:xfrm>
+            <a:off x="9971837" y="5138928"/>
+            <a:ext cx="1168298" cy="274320"/>
+          </a:xfrm>
+          <a:prstGeom prst="rect">
+            <a:avLst/>
+          </a:prstGeom>
+          <a:noFill/>
+          <a:ln/>
+        </p:spPr>
+        <p:txBody>
+          <a:bodyPr wrap="square" lIns="0" tIns="0" rIns="0" bIns="0" rtlCol="0" anchor="ctr"/>
+          <a:lstStyle/>
+          <a:p>
+            <a:pPr algn="l" indent="0" marL="0">
+              <a:lnSpc>
+                <a:spcPct val="130000"/>
+              </a:lnSpc>
+              <a:buNone/>
+            </a:pPr>
+            <a:r>
+              <a:rPr lang="en-US" sz="1150" dirty="0">
+                <a:solidFill>
+                  <a:srgbClr val="1D1D1F"/>
+                </a:solidFill>
+                <a:latin typeface="Pretendard Medium" pitchFamily="34" charset="0"/>
+                <a:ea typeface="Pretendard Medium" pitchFamily="34" charset="-122"/>
+                <a:cs typeface="Pretendard Medium" pitchFamily="34" charset="-120"/>
+              </a:rPr>
+              <a:t>2단</a:t>
+            </a:r>
+            <a:endParaRPr lang="en-US" sz="1150" dirty="0"/>
+          </a:p>
+        </p:txBody>
+      </p:sp>
+      <p:sp>
+        <p:nvSpPr>
+          <p:cNvPr id="58" name="Text 56"/>
+          <p:cNvSpPr/>
+          <p:nvPr/>
+        </p:nvSpPr>
+        <p:spPr>
+          <a:xfrm>
+            <a:off x="6263640" y="5650992"/>
+            <a:ext cx="4876495" cy="274320"/>
+          </a:xfrm>
+          <a:prstGeom prst="rect">
+            <a:avLst/>
+          </a:prstGeom>
+          <a:noFill/>
+          <a:ln/>
+        </p:spPr>
+        <p:txBody>
+          <a:bodyPr wrap="square" lIns="0" tIns="0" rIns="0" bIns="0" rtlCol="0" anchor="t"/>
+          <a:lstStyle/>
+          <a:p>
+            <a:pPr algn="l" indent="0" marL="0">
+              <a:lnSpc>
+                <a:spcPct val="130000"/>
+              </a:lnSpc>
+              <a:buNone/>
+            </a:pPr>
+            <a:r>
+              <a:rPr lang="en-US" sz="1000" dirty="0">
+                <a:solidFill>
+                  <a:srgbClr val="6E6E73"/>
+                </a:solidFill>
+                <a:latin typeface="Pretendard" pitchFamily="34" charset="0"/>
+                <a:ea typeface="Pretendard" pitchFamily="34" charset="-122"/>
+                <a:cs typeface="Pretendard" pitchFamily="34" charset="-120"/>
+              </a:rPr>
+              <a:t>예: “상품 카드 만들어줘” → 4-12. 상품 카드.md   ·   “메뉴 카드” → 4-3. 메뉴 카드.md</a:t>
+            </a:r>
+            <a:endParaRPr lang="en-US" sz="1000" dirty="0"/>
           </a:p>
         </p:txBody>
       </p:sp>
@@ -20354,7 +21350,7 @@
               <a:buNone/>
             </a:pPr>
             <a:r>
-              <a:rPr lang="en-US" sz="1400" b="1" dirty="0">
+              <a:rPr lang="en-US" sz="1350" b="1" dirty="0">
                 <a:solidFill>
                   <a:srgbClr val="6C4CFF"/>
                 </a:solidFill>
@@ -20362,9 +21358,9 @@
                 <a:ea typeface="Pretendard" pitchFamily="34" charset="-122"/>
                 <a:cs typeface="Pretendard" pitchFamily="34" charset="-120"/>
               </a:rPr>
-              <a:t>① 허브 목록</a:t>
-            </a:r>
-            <a:endParaRPr lang="en-US" sz="1400" dirty="0"/>
+              <a:t>① 허브 목록 — 왜 design에?</a:t>
+            </a:r>
+            <a:endParaRPr lang="en-US" sz="1350" dirty="0"/>
           </a:p>
         </p:txBody>
       </p:sp>
@@ -20376,8 +21372,8 @@
         </p:nvSpPr>
         <p:spPr>
           <a:xfrm>
-            <a:off x="7616952" y="2907792"/>
-            <a:ext cx="3541471" cy="1005840"/>
+            <a:off x="7616952" y="2889504"/>
+            <a:ext cx="3541471" cy="1097280"/>
           </a:xfrm>
           <a:prstGeom prst="rect">
             <a:avLst/>
@@ -20404,7 +21400,7 @@
                 <a:ea typeface="Pretendard" pitchFamily="34" charset="-122"/>
                 <a:cs typeface="Pretendard" pitchFamily="34" charset="-120"/>
               </a:rPr>
-              <a:t>맨 위 1장에 전 볼트 기능을 ‘가리키기만’. 사람이 어디서든 전체를 한눈에 봅니다.</a:t>
+              <a:t>design은 모든 볼트의 상위 폴더 — 볼트를 가로지르는 목록은 여기에만 둘 수 있습니다. 한 볼트에 넣으면 다른 볼트에선 안 보입니다.</a:t>
             </a:r>
             <a:endParaRPr lang="en-US" sz="1200" dirty="0"/>
           </a:p>

--- a/CdBd 기능 문서 구조 설계.pptx
+++ b/CdBd 기능 문서 구조 설계.pptx
@@ -20,9 +20,10 @@
     <p:sldId id="268" r:id="rId14"/>
     <p:sldId id="269" r:id="rId15"/>
     <p:sldId id="270" r:id="rId16"/>
+    <p:sldId id="271" r:id="rId17"/>
   </p:sldIdLst>
   <p:notesMasterIdLst>
-    <p:notesMasterId r:id="rId17"/>
+    <p:notesMasterId r:id="rId18"/>
   </p:notesMasterIdLst>
   <p:sldSz cx="12191695" cy="6858000"/>
   <p:notesSz cx="6858000" cy="12191695"/>
@@ -1068,6 +1069,94 @@
             <a:fld id="{F7021451-1387-4CA6-816F-3879F97B5CBC}" type="slidenum">
               <a:rPr lang="en-US"/>
               <a:t>15</a:t>
+            </a:fld>
+            <a:endParaRPr lang="en-US"/>
+          </a:p>
+        </p:txBody>
+      </p:sp>
+    </p:spTree>
+    <p:extLst>
+      <p:ext uri="{BB962C8B-B14F-4D97-AF65-F5344CB8AC3E}">
+        <p14:creationId xmlns:p14="http://schemas.microsoft.com/office/powerpoint/2010/main" val="1024086991"/>
+      </p:ext>
+    </p:extLst>
+  </p:cSld>
+  <p:clrMapOvr>
+    <a:masterClrMapping/>
+  </p:clrMapOvr>
+</p:notes>
+</file>
+
+<file path=ppt/notesSlides/notesSlide16.xml><?xml version="1.0" encoding="utf-8"?>
+<p:notes xmlns:a="http://schemas.openxmlformats.org/drawingml/2006/main" xmlns:r="http://schemas.openxmlformats.org/officeDocument/2006/relationships" xmlns:p="http://schemas.openxmlformats.org/presentationml/2006/main">
+  <p:cSld>
+    <p:spTree>
+      <p:nvGrpSpPr>
+        <p:cNvPr id="1" name=""/>
+        <p:cNvGrpSpPr/>
+        <p:nvPr/>
+      </p:nvGrpSpPr>
+      <p:grpSpPr>
+        <a:xfrm>
+          <a:off x="0" y="0"/>
+          <a:ext cx="0" cy="0"/>
+          <a:chOff x="0" y="0"/>
+          <a:chExt cx="0" cy="0"/>
+        </a:xfrm>
+      </p:grpSpPr>
+      <p:sp>
+        <p:nvSpPr>
+          <p:cNvPr id="2" name="Slide Image Placeholder 1"/>
+          <p:cNvSpPr>
+            <a:spLocks noGrp="1" noRot="1" noChangeAspect="1"/>
+          </p:cNvSpPr>
+          <p:nvPr>
+            <p:ph type="sldImg"/>
+          </p:nvPr>
+        </p:nvSpPr>
+        <p:spPr/>
+      </p:sp>
+      <p:sp>
+        <p:nvSpPr>
+          <p:cNvPr id="3" name="Notes Placeholder 2"/>
+          <p:cNvSpPr>
+            <a:spLocks noGrp="1"/>
+          </p:cNvSpPr>
+          <p:nvPr>
+            <p:ph type="body" idx="1"/>
+          </p:nvPr>
+        </p:nvSpPr>
+        <p:spPr/>
+        <p:txBody>
+          <a:bodyPr/>
+          <a:lstStyle/>
+          <a:p>
+            <a:r>
+              <a:rPr lang="en-US" dirty="0"/>
+              <a:t/>
+            </a:r>
+            <a:endParaRPr lang="en-US" dirty="0"/>
+          </a:p>
+        </p:txBody>
+      </p:sp>
+      <p:sp>
+        <p:nvSpPr>
+          <p:cNvPr id="4" name="Slide Number Placeholder 3"/>
+          <p:cNvSpPr>
+            <a:spLocks noGrp="1"/>
+          </p:cNvSpPr>
+          <p:nvPr>
+            <p:ph type="sldNum" sz="quarter" idx="10"/>
+          </p:nvPr>
+        </p:nvSpPr>
+        <p:spPr/>
+        <p:txBody>
+          <a:bodyPr/>
+          <a:lstStyle/>
+          <a:p>
+            <a:fld id="{F7021451-1387-4CA6-816F-3879F97B5CBC}" type="slidenum">
+              <a:rPr lang="en-US"/>
+              <a:t>16</a:t>
             </a:fld>
             <a:endParaRPr lang="en-US"/>
           </a:p>
@@ -2896,7 +2985,7 @@
                 <a:ea typeface="Pretendard" pitchFamily="34" charset="-122"/>
                 <a:cs typeface="Pretendard" pitchFamily="34" charset="-120"/>
               </a:rPr>
-              <a:t>맞습니다 — 어떤 기능이 있고, 그 기능이 어느 볼트·어느 파일에 있는지 적은 ‘목록’입니다.</a:t>
+              <a:t>기능마다 상태(●◐○) · 볼트 · 정본 파일을 한 줄씩. 실제 내용의 일부입니다.</a:t>
             </a:r>
             <a:endParaRPr lang="en-US" sz="1500" dirty="0"/>
           </a:p>
@@ -2982,30 +3071,45 @@
       </p:sp>
       <p:sp>
         <p:nvSpPr>
-          <p:cNvPr id="8" name="Shape 6"/>
-          <p:cNvSpPr/>
-          <p:nvPr/>
-        </p:nvSpPr>
-        <p:spPr>
-          <a:xfrm>
-            <a:off x="777240" y="2359152"/>
-            <a:ext cx="10637215" cy="3383280"/>
-          </a:xfrm>
-          <a:prstGeom prst="roundRect">
-            <a:avLst>
-              <a:gd name="adj" fmla="val 3243"/>
-            </a:avLst>
-          </a:prstGeom>
-          <a:solidFill>
-            <a:srgbClr val="FFFFFF"/>
-          </a:solidFill>
-          <a:ln w="12700">
-            <a:solidFill>
-              <a:srgbClr val="E5E7EB"/>
-            </a:solidFill>
-            <a:prstDash val="solid"/>
-          </a:ln>
-        </p:spPr>
+          <p:cNvPr id="8" name="Text 6"/>
+          <p:cNvSpPr/>
+          <p:nvPr/>
+        </p:nvSpPr>
+        <p:spPr>
+          <a:xfrm>
+            <a:off x="7756855" y="1847088"/>
+            <a:ext cx="3657600" cy="256032"/>
+          </a:xfrm>
+          <a:prstGeom prst="rect">
+            <a:avLst/>
+          </a:prstGeom>
+          <a:noFill/>
+          <a:ln/>
+        </p:spPr>
+        <p:txBody>
+          <a:bodyPr wrap="square" lIns="0" tIns="0" rIns="0" bIns="0" rtlCol="0" anchor="ctr"/>
+          <a:lstStyle/>
+          <a:p>
+            <a:pPr algn="r" indent="0" marL="0">
+              <a:lnSpc>
+                <a:spcPct val="130000"/>
+              </a:lnSpc>
+              <a:buNone/>
+            </a:pPr>
+            <a:r>
+              <a:rPr lang="en-US" sz="1100" dirty="0">
+                <a:solidFill>
+                  <a:srgbClr val="6E6E73"/>
+                </a:solidFill>
+                <a:latin typeface="Pretendard Medium" pitchFamily="34" charset="0"/>
+                <a:ea typeface="Pretendard Medium" pitchFamily="34" charset="-122"/>
+                <a:cs typeface="Pretendard Medium" pitchFamily="34" charset="-120"/>
+              </a:rPr>
+              <a:t>● 문서 있음   ◐ 부분   ○ 없음</a:t>
+            </a:r>
+            <a:endParaRPr lang="en-US" sz="1100" dirty="0"/>
+          </a:p>
+        </p:txBody>
       </p:sp>
       <p:sp>
         <p:nvSpPr>
@@ -3015,8 +3119,8 @@
         </p:nvSpPr>
         <p:spPr>
           <a:xfrm>
-            <a:off x="1069848" y="2505456"/>
-            <a:ext cx="2743200" cy="274320"/>
+            <a:off x="777240" y="2286000"/>
+            <a:ext cx="5074920" cy="274320"/>
           </a:xfrm>
           <a:prstGeom prst="rect">
             <a:avLst/>
@@ -3035,7 +3139,7 @@
               <a:buNone/>
             </a:pPr>
             <a:r>
-              <a:rPr lang="en-US" sz="1200" dirty="0">
+              <a:rPr lang="en-US" sz="1250" dirty="0">
                 <a:solidFill>
                   <a:srgbClr val="6C4CFF"/>
                 </a:solidFill>
@@ -3043,148 +3147,22 @@
                 <a:ea typeface="Pretendard SemiBold" pitchFamily="34" charset="-122"/>
                 <a:cs typeface="Pretendard SemiBold" pitchFamily="34" charset="-120"/>
               </a:rPr>
-              <a:t>기능</a:t>
-            </a:r>
-            <a:endParaRPr lang="en-US" sz="1200" dirty="0"/>
-          </a:p>
-        </p:txBody>
-      </p:sp>
-      <p:sp>
-        <p:nvSpPr>
-          <p:cNvPr id="10" name="Text 8"/>
-          <p:cNvSpPr/>
-          <p:nvPr/>
-        </p:nvSpPr>
-        <p:spPr>
-          <a:xfrm>
-            <a:off x="3977640" y="2505456"/>
-            <a:ext cx="731520" cy="274320"/>
-          </a:xfrm>
-          <a:prstGeom prst="rect">
-            <a:avLst/>
-          </a:prstGeom>
-          <a:noFill/>
-          <a:ln/>
-        </p:spPr>
-        <p:txBody>
-          <a:bodyPr wrap="square" lIns="0" tIns="0" rIns="0" bIns="0" rtlCol="0" anchor="t"/>
-          <a:lstStyle/>
-          <a:p>
-            <a:pPr algn="l" indent="0" marL="0">
-              <a:lnSpc>
-                <a:spcPct val="130000"/>
-              </a:lnSpc>
-              <a:buNone/>
-            </a:pPr>
-            <a:r>
-              <a:rPr lang="en-US" sz="1200" dirty="0">
-                <a:solidFill>
-                  <a:srgbClr val="6C4CFF"/>
-                </a:solidFill>
-                <a:latin typeface="Pretendard SemiBold" pitchFamily="34" charset="0"/>
-                <a:ea typeface="Pretendard SemiBold" pitchFamily="34" charset="-122"/>
-                <a:cs typeface="Pretendard SemiBold" pitchFamily="34" charset="-120"/>
-              </a:rPr>
-              <a:t>상태</a:t>
-            </a:r>
-            <a:endParaRPr lang="en-US" sz="1200" dirty="0"/>
-          </a:p>
-        </p:txBody>
-      </p:sp>
-      <p:sp>
-        <p:nvSpPr>
-          <p:cNvPr id="11" name="Text 9"/>
-          <p:cNvSpPr/>
-          <p:nvPr/>
-        </p:nvSpPr>
-        <p:spPr>
-          <a:xfrm>
-            <a:off x="4800600" y="2505456"/>
-            <a:ext cx="2286000" cy="274320"/>
-          </a:xfrm>
-          <a:prstGeom prst="rect">
-            <a:avLst/>
-          </a:prstGeom>
-          <a:noFill/>
-          <a:ln/>
-        </p:spPr>
-        <p:txBody>
-          <a:bodyPr wrap="square" lIns="0" tIns="0" rIns="0" bIns="0" rtlCol="0" anchor="t"/>
-          <a:lstStyle/>
-          <a:p>
-            <a:pPr algn="l" indent="0" marL="0">
-              <a:lnSpc>
-                <a:spcPct val="130000"/>
-              </a:lnSpc>
-              <a:buNone/>
-            </a:pPr>
-            <a:r>
-              <a:rPr lang="en-US" sz="1200" dirty="0">
-                <a:solidFill>
-                  <a:srgbClr val="6C4CFF"/>
-                </a:solidFill>
-                <a:latin typeface="Pretendard SemiBold" pitchFamily="34" charset="0"/>
-                <a:ea typeface="Pretendard SemiBold" pitchFamily="34" charset="-122"/>
-                <a:cs typeface="Pretendard SemiBold" pitchFamily="34" charset="-120"/>
-              </a:rPr>
-              <a:t>볼트</a:t>
-            </a:r>
-            <a:endParaRPr lang="en-US" sz="1200" dirty="0"/>
-          </a:p>
-        </p:txBody>
-      </p:sp>
-      <p:sp>
-        <p:nvSpPr>
-          <p:cNvPr id="12" name="Text 10"/>
-          <p:cNvSpPr/>
-          <p:nvPr/>
-        </p:nvSpPr>
-        <p:spPr>
-          <a:xfrm>
-            <a:off x="7178040" y="2505456"/>
-            <a:ext cx="3943807" cy="274320"/>
-          </a:xfrm>
-          <a:prstGeom prst="rect">
-            <a:avLst/>
-          </a:prstGeom>
-          <a:noFill/>
-          <a:ln/>
-        </p:spPr>
-        <p:txBody>
-          <a:bodyPr wrap="square" lIns="0" tIns="0" rIns="0" bIns="0" rtlCol="0" anchor="t"/>
-          <a:lstStyle/>
-          <a:p>
-            <a:pPr algn="l" indent="0" marL="0">
-              <a:lnSpc>
-                <a:spcPct val="130000"/>
-              </a:lnSpc>
-              <a:buNone/>
-            </a:pPr>
-            <a:r>
-              <a:rPr lang="en-US" sz="1200" dirty="0">
-                <a:solidFill>
-                  <a:srgbClr val="6C4CFF"/>
-                </a:solidFill>
-                <a:latin typeface="Pretendard SemiBold" pitchFamily="34" charset="0"/>
-                <a:ea typeface="Pretendard SemiBold" pitchFamily="34" charset="-122"/>
-                <a:cs typeface="Pretendard SemiBold" pitchFamily="34" charset="-120"/>
-              </a:rPr>
-              <a:t>정본 파일</a:t>
-            </a:r>
-            <a:endParaRPr lang="en-US" sz="1200" dirty="0"/>
-          </a:p>
-        </p:txBody>
-      </p:sp>
-      <p:sp>
-        <p:nvSpPr>
-          <p:cNvPr id="13" name="Shape 11"/>
-          <p:cNvSpPr/>
-          <p:nvPr/>
-        </p:nvSpPr>
-        <p:spPr>
-          <a:xfrm>
-            <a:off x="1069848" y="2834640"/>
-            <a:ext cx="10051999" cy="0"/>
+              <a:t>에디터 · 어드민</a:t>
+            </a:r>
+            <a:endParaRPr lang="en-US" sz="1250" dirty="0"/>
+          </a:p>
+        </p:txBody>
+      </p:sp>
+      <p:sp>
+        <p:nvSpPr>
+          <p:cNvPr id="10" name="Shape 8"/>
+          <p:cNvSpPr/>
+          <p:nvPr/>
+        </p:nvSpPr>
+        <p:spPr>
+          <a:xfrm>
+            <a:off x="777240" y="2615184"/>
+            <a:ext cx="5074920" cy="0"/>
           </a:xfrm>
           <a:prstGeom prst="line">
             <a:avLst/>
@@ -3200,14 +3178,14 @@
       </p:sp>
       <p:sp>
         <p:nvSpPr>
-          <p:cNvPr id="14" name="Text 12"/>
-          <p:cNvSpPr/>
-          <p:nvPr/>
-        </p:nvSpPr>
-        <p:spPr>
-          <a:xfrm>
-            <a:off x="1069848" y="2926080"/>
-            <a:ext cx="2743200" cy="320040"/>
+          <p:cNvPr id="11" name="Text 9"/>
+          <p:cNvSpPr/>
+          <p:nvPr/>
+        </p:nvSpPr>
+        <p:spPr>
+          <a:xfrm>
+            <a:off x="777240" y="2706624"/>
+            <a:ext cx="2194560" cy="320040"/>
           </a:xfrm>
           <a:prstGeom prst="rect">
             <a:avLst/>
@@ -3226,7 +3204,7 @@
               <a:buNone/>
             </a:pPr>
             <a:r>
-              <a:rPr lang="en-US" sz="1200" dirty="0">
+              <a:rPr lang="en-US" sz="1150" dirty="0">
                 <a:solidFill>
                   <a:srgbClr val="1D1D1F"/>
                 </a:solidFill>
@@ -3236,20 +3214,20 @@
               </a:rPr>
               <a:t>카드 15종</a:t>
             </a:r>
-            <a:endParaRPr lang="en-US" sz="1200" dirty="0"/>
-          </a:p>
-        </p:txBody>
-      </p:sp>
-      <p:sp>
-        <p:nvSpPr>
-          <p:cNvPr id="15" name="Text 13"/>
-          <p:cNvSpPr/>
-          <p:nvPr/>
-        </p:nvSpPr>
-        <p:spPr>
-          <a:xfrm>
-            <a:off x="3977640" y="2926080"/>
-            <a:ext cx="731520" cy="320040"/>
+            <a:endParaRPr lang="en-US" sz="1150" dirty="0"/>
+          </a:p>
+        </p:txBody>
+      </p:sp>
+      <p:sp>
+        <p:nvSpPr>
+          <p:cNvPr id="12" name="Text 10"/>
+          <p:cNvSpPr/>
+          <p:nvPr/>
+        </p:nvSpPr>
+        <p:spPr>
+          <a:xfrm>
+            <a:off x="3017520" y="2706624"/>
+            <a:ext cx="365760" cy="320040"/>
           </a:xfrm>
           <a:prstGeom prst="rect">
             <a:avLst/>
@@ -3268,7 +3246,7 @@
               <a:buNone/>
             </a:pPr>
             <a:r>
-              <a:rPr lang="en-US" sz="1200" dirty="0">
+              <a:rPr lang="en-US" sz="1150" dirty="0">
                 <a:solidFill>
                   <a:srgbClr val="6C4CFF"/>
                 </a:solidFill>
@@ -3278,20 +3256,20 @@
               </a:rPr>
               <a:t>●</a:t>
             </a:r>
-            <a:endParaRPr lang="en-US" sz="1200" dirty="0"/>
-          </a:p>
-        </p:txBody>
-      </p:sp>
-      <p:sp>
-        <p:nvSpPr>
-          <p:cNvPr id="16" name="Text 14"/>
-          <p:cNvSpPr/>
-          <p:nvPr/>
-        </p:nvSpPr>
-        <p:spPr>
-          <a:xfrm>
-            <a:off x="4800600" y="2926080"/>
-            <a:ext cx="2286000" cy="320040"/>
+            <a:endParaRPr lang="en-US" sz="1150" dirty="0"/>
+          </a:p>
+        </p:txBody>
+      </p:sp>
+      <p:sp>
+        <p:nvSpPr>
+          <p:cNvPr id="13" name="Text 11"/>
+          <p:cNvSpPr/>
+          <p:nvPr/>
+        </p:nvSpPr>
+        <p:spPr>
+          <a:xfrm>
+            <a:off x="3474720" y="2706624"/>
+            <a:ext cx="2377440" cy="320040"/>
           </a:xfrm>
           <a:prstGeom prst="rect">
             <a:avLst/>
@@ -3310,7 +3288,7 @@
               <a:buNone/>
             </a:pPr>
             <a:r>
-              <a:rPr lang="en-US" sz="1150" dirty="0">
+              <a:rPr lang="en-US" sz="1050" dirty="0">
                 <a:solidFill>
                   <a:srgbClr val="55555A"/>
                 </a:solidFill>
@@ -3318,64 +3296,22 @@
                 <a:ea typeface="Pretendard" pitchFamily="34" charset="-122"/>
                 <a:cs typeface="Pretendard" pitchFamily="34" charset="-120"/>
               </a:rPr>
-              <a:t>templates</a:t>
-            </a:r>
-            <a:endParaRPr lang="en-US" sz="1150" dirty="0"/>
-          </a:p>
-        </p:txBody>
-      </p:sp>
-      <p:sp>
-        <p:nvSpPr>
-          <p:cNvPr id="17" name="Text 15"/>
-          <p:cNvSpPr/>
-          <p:nvPr/>
-        </p:nvSpPr>
-        <p:spPr>
-          <a:xfrm>
-            <a:off x="7178040" y="2926080"/>
-            <a:ext cx="3943807" cy="320040"/>
-          </a:xfrm>
-          <a:prstGeom prst="rect">
-            <a:avLst/>
-          </a:prstGeom>
-          <a:noFill/>
-          <a:ln/>
-        </p:spPr>
-        <p:txBody>
-          <a:bodyPr wrap="square" lIns="0" tIns="0" rIns="0" bIns="0" rtlCol="0" anchor="ctr"/>
-          <a:lstStyle/>
-          <a:p>
-            <a:pPr algn="l" indent="0" marL="0">
-              <a:lnSpc>
-                <a:spcPct val="130000"/>
-              </a:lnSpc>
-              <a:buNone/>
-            </a:pPr>
-            <a:r>
-              <a:rPr lang="en-US" sz="1150" dirty="0">
-                <a:solidFill>
-                  <a:srgbClr val="55555A"/>
-                </a:solidFill>
-                <a:latin typeface="Pretendard" pitchFamily="34" charset="0"/>
-                <a:ea typeface="Pretendard" pitchFamily="34" charset="-122"/>
-                <a:cs typeface="Pretendard" pitchFamily="34" charset="-120"/>
-              </a:rPr>
-              <a:t>1-6-2. CdBd 카드 기능.md</a:t>
-            </a:r>
-            <a:endParaRPr lang="en-US" sz="1150" dirty="0"/>
-          </a:p>
-        </p:txBody>
-      </p:sp>
-      <p:sp>
-        <p:nvSpPr>
-          <p:cNvPr id="18" name="Shape 16"/>
-          <p:cNvSpPr/>
-          <p:nvPr/>
-        </p:nvSpPr>
-        <p:spPr>
-          <a:xfrm>
-            <a:off x="1069848" y="3310128"/>
-            <a:ext cx="10051999" cy="0"/>
+              <a:t>[T] 1-6-2</a:t>
+            </a:r>
+            <a:endParaRPr lang="en-US" sz="1050" dirty="0"/>
+          </a:p>
+        </p:txBody>
+      </p:sp>
+      <p:sp>
+        <p:nvSpPr>
+          <p:cNvPr id="14" name="Shape 12"/>
+          <p:cNvSpPr/>
+          <p:nvPr/>
+        </p:nvSpPr>
+        <p:spPr>
+          <a:xfrm>
+            <a:off x="777240" y="3054096"/>
+            <a:ext cx="5074920" cy="0"/>
           </a:xfrm>
           <a:prstGeom prst="line">
             <a:avLst/>
@@ -3391,14 +3327,14 @@
       </p:sp>
       <p:sp>
         <p:nvSpPr>
-          <p:cNvPr id="19" name="Text 17"/>
-          <p:cNvSpPr/>
-          <p:nvPr/>
-        </p:nvSpPr>
-        <p:spPr>
-          <a:xfrm>
-            <a:off x="1069848" y="3328416"/>
-            <a:ext cx="2743200" cy="320040"/>
+          <p:cNvPr id="15" name="Text 13"/>
+          <p:cNvSpPr/>
+          <p:nvPr/>
+        </p:nvSpPr>
+        <p:spPr>
+          <a:xfrm>
+            <a:off x="777240" y="3072384"/>
+            <a:ext cx="2194560" cy="320040"/>
           </a:xfrm>
           <a:prstGeom prst="rect">
             <a:avLst/>
@@ -3417,7 +3353,7 @@
               <a:buNone/>
             </a:pPr>
             <a:r>
-              <a:rPr lang="en-US" sz="1200" dirty="0">
+              <a:rPr lang="en-US" sz="1150" dirty="0">
                 <a:solidFill>
                   <a:srgbClr val="1D1D1F"/>
                 </a:solidFill>
@@ -3425,22 +3361,22 @@
                 <a:ea typeface="Pretendard Medium" pitchFamily="34" charset="-122"/>
                 <a:cs typeface="Pretendard Medium" pitchFamily="34" charset="-120"/>
               </a:rPr>
-              <a:t>카드 자동화</a:t>
-            </a:r>
-            <a:endParaRPr lang="en-US" sz="1200" dirty="0"/>
-          </a:p>
-        </p:txBody>
-      </p:sp>
-      <p:sp>
-        <p:nvSpPr>
-          <p:cNvPr id="20" name="Text 18"/>
-          <p:cNvSpPr/>
-          <p:nvPr/>
-        </p:nvSpPr>
-        <p:spPr>
-          <a:xfrm>
-            <a:off x="3977640" y="3328416"/>
-            <a:ext cx="731520" cy="320040"/>
+              <a:t>카드 상품·코드</a:t>
+            </a:r>
+            <a:endParaRPr lang="en-US" sz="1150" dirty="0"/>
+          </a:p>
+        </p:txBody>
+      </p:sp>
+      <p:sp>
+        <p:nvSpPr>
+          <p:cNvPr id="16" name="Text 14"/>
+          <p:cNvSpPr/>
+          <p:nvPr/>
+        </p:nvSpPr>
+        <p:spPr>
+          <a:xfrm>
+            <a:off x="3017520" y="3072384"/>
+            <a:ext cx="365760" cy="320040"/>
           </a:xfrm>
           <a:prstGeom prst="rect">
             <a:avLst/>
@@ -3459,30 +3395,30 @@
               <a:buNone/>
             </a:pPr>
             <a:r>
-              <a:rPr lang="en-US" sz="1200" dirty="0">
-                <a:solidFill>
-                  <a:srgbClr val="6C4CFF"/>
+              <a:rPr lang="en-US" sz="1150" dirty="0">
+                <a:solidFill>
+                  <a:srgbClr val="6E6E73"/>
                 </a:solidFill>
                 <a:latin typeface="Pretendard SemiBold" pitchFamily="34" charset="0"/>
                 <a:ea typeface="Pretendard SemiBold" pitchFamily="34" charset="-122"/>
                 <a:cs typeface="Pretendard SemiBold" pitchFamily="34" charset="-120"/>
               </a:rPr>
-              <a:t>●</a:t>
-            </a:r>
-            <a:endParaRPr lang="en-US" sz="1200" dirty="0"/>
-          </a:p>
-        </p:txBody>
-      </p:sp>
-      <p:sp>
-        <p:nvSpPr>
-          <p:cNvPr id="21" name="Text 19"/>
-          <p:cNvSpPr/>
-          <p:nvPr/>
-        </p:nvSpPr>
-        <p:spPr>
-          <a:xfrm>
-            <a:off x="4800600" y="3328416"/>
-            <a:ext cx="2286000" cy="320040"/>
+              <a:t>◐</a:t>
+            </a:r>
+            <a:endParaRPr lang="en-US" sz="1150" dirty="0"/>
+          </a:p>
+        </p:txBody>
+      </p:sp>
+      <p:sp>
+        <p:nvSpPr>
+          <p:cNvPr id="17" name="Text 15"/>
+          <p:cNvSpPr/>
+          <p:nvPr/>
+        </p:nvSpPr>
+        <p:spPr>
+          <a:xfrm>
+            <a:off x="3474720" y="3072384"/>
+            <a:ext cx="2377440" cy="320040"/>
           </a:xfrm>
           <a:prstGeom prst="rect">
             <a:avLst/>
@@ -3501,7 +3437,7 @@
               <a:buNone/>
             </a:pPr>
             <a:r>
-              <a:rPr lang="en-US" sz="1150" dirty="0">
+              <a:rPr lang="en-US" sz="1050" dirty="0">
                 <a:solidFill>
                   <a:srgbClr val="55555A"/>
                 </a:solidFill>
@@ -3509,64 +3445,22 @@
                 <a:ea typeface="Pretendard" pitchFamily="34" charset="-122"/>
                 <a:cs typeface="Pretendard" pitchFamily="34" charset="-120"/>
               </a:rPr>
-              <a:t>templates</a:t>
-            </a:r>
-            <a:endParaRPr lang="en-US" sz="1150" dirty="0"/>
-          </a:p>
-        </p:txBody>
-      </p:sp>
-      <p:sp>
-        <p:nvSpPr>
-          <p:cNvPr id="22" name="Text 20"/>
-          <p:cNvSpPr/>
-          <p:nvPr/>
-        </p:nvSpPr>
-        <p:spPr>
-          <a:xfrm>
-            <a:off x="7178040" y="3328416"/>
-            <a:ext cx="3943807" cy="320040"/>
-          </a:xfrm>
-          <a:prstGeom prst="rect">
-            <a:avLst/>
-          </a:prstGeom>
-          <a:noFill/>
-          <a:ln/>
-        </p:spPr>
-        <p:txBody>
-          <a:bodyPr wrap="square" lIns="0" tIns="0" rIns="0" bIns="0" rtlCol="0" anchor="ctr"/>
-          <a:lstStyle/>
-          <a:p>
-            <a:pPr algn="l" indent="0" marL="0">
-              <a:lnSpc>
-                <a:spcPct val="130000"/>
-              </a:lnSpc>
-              <a:buNone/>
-            </a:pPr>
-            <a:r>
-              <a:rPr lang="en-US" sz="1150" dirty="0">
-                <a:solidFill>
-                  <a:srgbClr val="55555A"/>
-                </a:solidFill>
-                <a:latin typeface="Pretendard" pitchFamily="34" charset="0"/>
-                <a:ea typeface="Pretendard" pitchFamily="34" charset="-122"/>
-                <a:cs typeface="Pretendard" pitchFamily="34" charset="-120"/>
-              </a:rPr>
-              <a:t>skills/cdbd-card-automation/</a:t>
-            </a:r>
-            <a:endParaRPr lang="en-US" sz="1150" dirty="0"/>
-          </a:p>
-        </p:txBody>
-      </p:sp>
-      <p:sp>
-        <p:nvSpPr>
-          <p:cNvPr id="23" name="Shape 21"/>
-          <p:cNvSpPr/>
-          <p:nvPr/>
-        </p:nvSpPr>
-        <p:spPr>
-          <a:xfrm>
-            <a:off x="1069848" y="3712464"/>
-            <a:ext cx="10051999" cy="0"/>
+              <a:t>[T] 1-6-2 (정의만)</a:t>
+            </a:r>
+            <a:endParaRPr lang="en-US" sz="1050" dirty="0"/>
+          </a:p>
+        </p:txBody>
+      </p:sp>
+      <p:sp>
+        <p:nvSpPr>
+          <p:cNvPr id="18" name="Shape 16"/>
+          <p:cNvSpPr/>
+          <p:nvPr/>
+        </p:nvSpPr>
+        <p:spPr>
+          <a:xfrm>
+            <a:off x="777240" y="3419856"/>
+            <a:ext cx="5074920" cy="0"/>
           </a:xfrm>
           <a:prstGeom prst="line">
             <a:avLst/>
@@ -3582,14 +3476,14 @@
       </p:sp>
       <p:sp>
         <p:nvSpPr>
-          <p:cNvPr id="24" name="Text 22"/>
-          <p:cNvSpPr/>
-          <p:nvPr/>
-        </p:nvSpPr>
-        <p:spPr>
-          <a:xfrm>
-            <a:off x="1069848" y="3730752"/>
-            <a:ext cx="2743200" cy="320040"/>
+          <p:cNvPr id="19" name="Text 17"/>
+          <p:cNvSpPr/>
+          <p:nvPr/>
+        </p:nvSpPr>
+        <p:spPr>
+          <a:xfrm>
+            <a:off x="777240" y="3438144"/>
+            <a:ext cx="2194560" cy="320040"/>
           </a:xfrm>
           <a:prstGeom prst="rect">
             <a:avLst/>
@@ -3608,7 +3502,7 @@
               <a:buNone/>
             </a:pPr>
             <a:r>
-              <a:rPr lang="en-US" sz="1200" dirty="0">
+              <a:rPr lang="en-US" sz="1150" dirty="0">
                 <a:solidFill>
                   <a:srgbClr val="1D1D1F"/>
                 </a:solidFill>
@@ -3616,22 +3510,22 @@
                 <a:ea typeface="Pretendard Medium" pitchFamily="34" charset="-122"/>
                 <a:cs typeface="Pretendard Medium" pitchFamily="34" charset="-120"/>
               </a:rPr>
-              <a:t>URL 게시 · OG</a:t>
-            </a:r>
-            <a:endParaRPr lang="en-US" sz="1200" dirty="0"/>
-          </a:p>
-        </p:txBody>
-      </p:sp>
-      <p:sp>
-        <p:nvSpPr>
-          <p:cNvPr id="25" name="Text 23"/>
-          <p:cNvSpPr/>
-          <p:nvPr/>
-        </p:nvSpPr>
-        <p:spPr>
-          <a:xfrm>
-            <a:off x="3977640" y="3730752"/>
-            <a:ext cx="731520" cy="320040"/>
+              <a:t>카드 자동화</a:t>
+            </a:r>
+            <a:endParaRPr lang="en-US" sz="1150" dirty="0"/>
+          </a:p>
+        </p:txBody>
+      </p:sp>
+      <p:sp>
+        <p:nvSpPr>
+          <p:cNvPr id="20" name="Text 18"/>
+          <p:cNvSpPr/>
+          <p:nvPr/>
+        </p:nvSpPr>
+        <p:spPr>
+          <a:xfrm>
+            <a:off x="3017520" y="3438144"/>
+            <a:ext cx="365760" cy="320040"/>
           </a:xfrm>
           <a:prstGeom prst="rect">
             <a:avLst/>
@@ -3650,7 +3544,7 @@
               <a:buNone/>
             </a:pPr>
             <a:r>
-              <a:rPr lang="en-US" sz="1200" dirty="0">
+              <a:rPr lang="en-US" sz="1150" dirty="0">
                 <a:solidFill>
                   <a:srgbClr val="6C4CFF"/>
                 </a:solidFill>
@@ -3660,20 +3554,20 @@
               </a:rPr>
               <a:t>●</a:t>
             </a:r>
-            <a:endParaRPr lang="en-US" sz="1200" dirty="0"/>
-          </a:p>
-        </p:txBody>
-      </p:sp>
-      <p:sp>
-        <p:nvSpPr>
-          <p:cNvPr id="26" name="Text 24"/>
-          <p:cNvSpPr/>
-          <p:nvPr/>
-        </p:nvSpPr>
-        <p:spPr>
-          <a:xfrm>
-            <a:off x="4800600" y="3730752"/>
-            <a:ext cx="2286000" cy="320040"/>
+            <a:endParaRPr lang="en-US" sz="1150" dirty="0"/>
+          </a:p>
+        </p:txBody>
+      </p:sp>
+      <p:sp>
+        <p:nvSpPr>
+          <p:cNvPr id="21" name="Text 19"/>
+          <p:cNvSpPr/>
+          <p:nvPr/>
+        </p:nvSpPr>
+        <p:spPr>
+          <a:xfrm>
+            <a:off x="3474720" y="3438144"/>
+            <a:ext cx="2377440" cy="320040"/>
           </a:xfrm>
           <a:prstGeom prst="rect">
             <a:avLst/>
@@ -3692,7 +3586,7 @@
               <a:buNone/>
             </a:pPr>
             <a:r>
-              <a:rPr lang="en-US" sz="1150" dirty="0">
+              <a:rPr lang="en-US" sz="1050" dirty="0">
                 <a:solidFill>
                   <a:srgbClr val="55555A"/>
                 </a:solidFill>
@@ -3700,64 +3594,22 @@
                 <a:ea typeface="Pretendard" pitchFamily="34" charset="-122"/>
                 <a:cs typeface="Pretendard" pitchFamily="34" charset="-120"/>
               </a:rPr>
-              <a:t>design-service</a:t>
-            </a:r>
-            <a:endParaRPr lang="en-US" sz="1150" dirty="0"/>
-          </a:p>
-        </p:txBody>
-      </p:sp>
-      <p:sp>
-        <p:nvSpPr>
-          <p:cNvPr id="27" name="Text 25"/>
-          <p:cNvSpPr/>
-          <p:nvPr/>
-        </p:nvSpPr>
-        <p:spPr>
-          <a:xfrm>
-            <a:off x="7178040" y="3730752"/>
-            <a:ext cx="3943807" cy="320040"/>
-          </a:xfrm>
-          <a:prstGeom prst="rect">
-            <a:avLst/>
-          </a:prstGeom>
-          <a:noFill/>
-          <a:ln/>
-        </p:spPr>
-        <p:txBody>
-          <a:bodyPr wrap="square" lIns="0" tIns="0" rIns="0" bIns="0" rtlCol="0" anchor="ctr"/>
-          <a:lstStyle/>
-          <a:p>
-            <a:pPr algn="l" indent="0" marL="0">
-              <a:lnSpc>
-                <a:spcPct val="130000"/>
-              </a:lnSpc>
-              <a:buNone/>
-            </a:pPr>
-            <a:r>
-              <a:rPr lang="en-US" sz="1150" dirty="0">
-                <a:solidFill>
-                  <a:srgbClr val="55555A"/>
-                </a:solidFill>
-                <a:latin typeface="Pretendard" pitchFamily="34" charset="0"/>
-                <a:ea typeface="Pretendard" pitchFamily="34" charset="-122"/>
-                <a:cs typeface="Pretendard" pitchFamily="34" charset="-120"/>
-              </a:rPr>
-              <a:t>1-4. CdBd 콘텐츠.md §URL 게시</a:t>
-            </a:r>
-            <a:endParaRPr lang="en-US" sz="1150" dirty="0"/>
-          </a:p>
-        </p:txBody>
-      </p:sp>
-      <p:sp>
-        <p:nvSpPr>
-          <p:cNvPr id="28" name="Shape 26"/>
-          <p:cNvSpPr/>
-          <p:nvPr/>
-        </p:nvSpPr>
-        <p:spPr>
-          <a:xfrm>
-            <a:off x="1069848" y="4114800"/>
-            <a:ext cx="10051999" cy="0"/>
+              <a:t>[T] skills/card-automation</a:t>
+            </a:r>
+            <a:endParaRPr lang="en-US" sz="1050" dirty="0"/>
+          </a:p>
+        </p:txBody>
+      </p:sp>
+      <p:sp>
+        <p:nvSpPr>
+          <p:cNvPr id="22" name="Shape 20"/>
+          <p:cNvSpPr/>
+          <p:nvPr/>
+        </p:nvSpPr>
+        <p:spPr>
+          <a:xfrm>
+            <a:off x="777240" y="3785616"/>
+            <a:ext cx="5074920" cy="0"/>
           </a:xfrm>
           <a:prstGeom prst="line">
             <a:avLst/>
@@ -3773,14 +3625,14 @@
       </p:sp>
       <p:sp>
         <p:nvSpPr>
-          <p:cNvPr id="29" name="Text 27"/>
-          <p:cNvSpPr/>
-          <p:nvPr/>
-        </p:nvSpPr>
-        <p:spPr>
-          <a:xfrm>
-            <a:off x="1069848" y="4133088"/>
-            <a:ext cx="2743200" cy="320040"/>
+          <p:cNvPr id="23" name="Text 21"/>
+          <p:cNvSpPr/>
+          <p:nvPr/>
+        </p:nvSpPr>
+        <p:spPr>
+          <a:xfrm>
+            <a:off x="777240" y="3803904"/>
+            <a:ext cx="2194560" cy="320040"/>
           </a:xfrm>
           <a:prstGeom prst="rect">
             <a:avLst/>
@@ -3799,7 +3651,7 @@
               <a:buNone/>
             </a:pPr>
             <a:r>
-              <a:rPr lang="en-US" sz="1200" dirty="0">
+              <a:rPr lang="en-US" sz="1150" dirty="0">
                 <a:solidFill>
                   <a:srgbClr val="1D1D1F"/>
                 </a:solidFill>
@@ -3807,22 +3659,22 @@
                 <a:ea typeface="Pretendard Medium" pitchFamily="34" charset="-122"/>
                 <a:cs typeface="Pretendard Medium" pitchFamily="34" charset="-120"/>
               </a:rPr>
-              <a:t>이미지 라이브러리</a:t>
-            </a:r>
-            <a:endParaRPr lang="en-US" sz="1200" dirty="0"/>
-          </a:p>
-        </p:txBody>
-      </p:sp>
-      <p:sp>
-        <p:nvSpPr>
-          <p:cNvPr id="30" name="Text 28"/>
-          <p:cNvSpPr/>
-          <p:nvPr/>
-        </p:nvSpPr>
-        <p:spPr>
-          <a:xfrm>
-            <a:off x="3977640" y="4133088"/>
-            <a:ext cx="731520" cy="320040"/>
+              <a:t>에디터 구성</a:t>
+            </a:r>
+            <a:endParaRPr lang="en-US" sz="1150" dirty="0"/>
+          </a:p>
+        </p:txBody>
+      </p:sp>
+      <p:sp>
+        <p:nvSpPr>
+          <p:cNvPr id="24" name="Text 22"/>
+          <p:cNvSpPr/>
+          <p:nvPr/>
+        </p:nvSpPr>
+        <p:spPr>
+          <a:xfrm>
+            <a:off x="3017520" y="3803904"/>
+            <a:ext cx="365760" cy="320040"/>
           </a:xfrm>
           <a:prstGeom prst="rect">
             <a:avLst/>
@@ -3841,30 +3693,30 @@
               <a:buNone/>
             </a:pPr>
             <a:r>
-              <a:rPr lang="en-US" sz="1200" dirty="0">
-                <a:solidFill>
-                  <a:srgbClr val="6C4CFF"/>
+              <a:rPr lang="en-US" sz="1150" dirty="0">
+                <a:solidFill>
+                  <a:srgbClr val="6E6E73"/>
                 </a:solidFill>
                 <a:latin typeface="Pretendard SemiBold" pitchFamily="34" charset="0"/>
                 <a:ea typeface="Pretendard SemiBold" pitchFamily="34" charset="-122"/>
                 <a:cs typeface="Pretendard SemiBold" pitchFamily="34" charset="-120"/>
               </a:rPr>
-              <a:t>●</a:t>
-            </a:r>
-            <a:endParaRPr lang="en-US" sz="1200" dirty="0"/>
-          </a:p>
-        </p:txBody>
-      </p:sp>
-      <p:sp>
-        <p:nvSpPr>
-          <p:cNvPr id="31" name="Text 29"/>
-          <p:cNvSpPr/>
-          <p:nvPr/>
-        </p:nvSpPr>
-        <p:spPr>
-          <a:xfrm>
-            <a:off x="4800600" y="4133088"/>
-            <a:ext cx="2286000" cy="320040"/>
+              <a:t>◐</a:t>
+            </a:r>
+            <a:endParaRPr lang="en-US" sz="1150" dirty="0"/>
+          </a:p>
+        </p:txBody>
+      </p:sp>
+      <p:sp>
+        <p:nvSpPr>
+          <p:cNvPr id="25" name="Text 23"/>
+          <p:cNvSpPr/>
+          <p:nvPr/>
+        </p:nvSpPr>
+        <p:spPr>
+          <a:xfrm>
+            <a:off x="3474720" y="3803904"/>
+            <a:ext cx="2377440" cy="320040"/>
           </a:xfrm>
           <a:prstGeom prst="rect">
             <a:avLst/>
@@ -3883,7 +3735,7 @@
               <a:buNone/>
             </a:pPr>
             <a:r>
-              <a:rPr lang="en-US" sz="1150" dirty="0">
+              <a:rPr lang="en-US" sz="1050" dirty="0">
                 <a:solidFill>
                   <a:srgbClr val="55555A"/>
                 </a:solidFill>
@@ -3891,64 +3743,22 @@
                 <a:ea typeface="Pretendard" pitchFamily="34" charset="-122"/>
                 <a:cs typeface="Pretendard" pitchFamily="34" charset="-120"/>
               </a:rPr>
-              <a:t>design-service</a:t>
-            </a:r>
-            <a:endParaRPr lang="en-US" sz="1150" dirty="0"/>
-          </a:p>
-        </p:txBody>
-      </p:sp>
-      <p:sp>
-        <p:nvSpPr>
-          <p:cNvPr id="32" name="Text 30"/>
-          <p:cNvSpPr/>
-          <p:nvPr/>
-        </p:nvSpPr>
-        <p:spPr>
-          <a:xfrm>
-            <a:off x="7178040" y="4133088"/>
-            <a:ext cx="3943807" cy="320040"/>
-          </a:xfrm>
-          <a:prstGeom prst="rect">
-            <a:avLst/>
-          </a:prstGeom>
-          <a:noFill/>
-          <a:ln/>
-        </p:spPr>
-        <p:txBody>
-          <a:bodyPr wrap="square" lIns="0" tIns="0" rIns="0" bIns="0" rtlCol="0" anchor="ctr"/>
-          <a:lstStyle/>
-          <a:p>
-            <a:pPr algn="l" indent="0" marL="0">
-              <a:lnSpc>
-                <a:spcPct val="130000"/>
-              </a:lnSpc>
-              <a:buNone/>
-            </a:pPr>
-            <a:r>
-              <a:rPr lang="en-US" sz="1150" dirty="0">
-                <a:solidFill>
-                  <a:srgbClr val="55555A"/>
-                </a:solidFill>
-                <a:latin typeface="Pretendard" pitchFamily="34" charset="0"/>
-                <a:ea typeface="Pretendard" pitchFamily="34" charset="-122"/>
-                <a:cs typeface="Pretendard" pitchFamily="34" charset="-120"/>
-              </a:rPr>
-              <a:t>CLAUDE.md §이미지 라이브러리</a:t>
-            </a:r>
-            <a:endParaRPr lang="en-US" sz="1150" dirty="0"/>
-          </a:p>
-        </p:txBody>
-      </p:sp>
-      <p:sp>
-        <p:nvSpPr>
-          <p:cNvPr id="33" name="Shape 31"/>
-          <p:cNvSpPr/>
-          <p:nvPr/>
-        </p:nvSpPr>
-        <p:spPr>
-          <a:xfrm>
-            <a:off x="1069848" y="4517136"/>
-            <a:ext cx="10051999" cy="0"/>
+              <a:t>[T] 1-6-1</a:t>
+            </a:r>
+            <a:endParaRPr lang="en-US" sz="1050" dirty="0"/>
+          </a:p>
+        </p:txBody>
+      </p:sp>
+      <p:sp>
+        <p:nvSpPr>
+          <p:cNvPr id="26" name="Shape 24"/>
+          <p:cNvSpPr/>
+          <p:nvPr/>
+        </p:nvSpPr>
+        <p:spPr>
+          <a:xfrm>
+            <a:off x="777240" y="4151376"/>
+            <a:ext cx="5074920" cy="0"/>
           </a:xfrm>
           <a:prstGeom prst="line">
             <a:avLst/>
@@ -3964,14 +3774,14 @@
       </p:sp>
       <p:sp>
         <p:nvSpPr>
-          <p:cNvPr id="34" name="Text 32"/>
-          <p:cNvSpPr/>
-          <p:nvPr/>
-        </p:nvSpPr>
-        <p:spPr>
-          <a:xfrm>
-            <a:off x="1069848" y="4535424"/>
-            <a:ext cx="2743200" cy="320040"/>
+          <p:cNvPr id="27" name="Text 25"/>
+          <p:cNvSpPr/>
+          <p:nvPr/>
+        </p:nvSpPr>
+        <p:spPr>
+          <a:xfrm>
+            <a:off x="777240" y="4169664"/>
+            <a:ext cx="2194560" cy="320040"/>
           </a:xfrm>
           <a:prstGeom prst="rect">
             <a:avLst/>
@@ -3990,7 +3800,7 @@
               <a:buNone/>
             </a:pPr>
             <a:r>
-              <a:rPr lang="en-US" sz="1200" dirty="0">
+              <a:rPr lang="en-US" sz="1150" dirty="0">
                 <a:solidFill>
                   <a:srgbClr val="1D1D1F"/>
                 </a:solidFill>
@@ -3998,22 +3808,22 @@
                 <a:ea typeface="Pretendard Medium" pitchFamily="34" charset="-122"/>
                 <a:cs typeface="Pretendard Medium" pitchFamily="34" charset="-120"/>
               </a:rPr>
-              <a:t>카드 스펙 조회</a:t>
-            </a:r>
-            <a:endParaRPr lang="en-US" sz="1200" dirty="0"/>
-          </a:p>
-        </p:txBody>
-      </p:sp>
-      <p:sp>
-        <p:nvSpPr>
-          <p:cNvPr id="35" name="Text 33"/>
-          <p:cNvSpPr/>
-          <p:nvPr/>
-        </p:nvSpPr>
-        <p:spPr>
-          <a:xfrm>
-            <a:off x="3977640" y="4535424"/>
-            <a:ext cx="731520" cy="320040"/>
+              <a:t>URL 게시 · OG</a:t>
+            </a:r>
+            <a:endParaRPr lang="en-US" sz="1150" dirty="0"/>
+          </a:p>
+        </p:txBody>
+      </p:sp>
+      <p:sp>
+        <p:nvSpPr>
+          <p:cNvPr id="28" name="Text 26"/>
+          <p:cNvSpPr/>
+          <p:nvPr/>
+        </p:nvSpPr>
+        <p:spPr>
+          <a:xfrm>
+            <a:off x="3017520" y="4169664"/>
+            <a:ext cx="365760" cy="320040"/>
           </a:xfrm>
           <a:prstGeom prst="rect">
             <a:avLst/>
@@ -4032,30 +3842,30 @@
               <a:buNone/>
             </a:pPr>
             <a:r>
-              <a:rPr lang="en-US" sz="1200" dirty="0">
-                <a:solidFill>
-                  <a:srgbClr val="6E6E73"/>
+              <a:rPr lang="en-US" sz="1150" dirty="0">
+                <a:solidFill>
+                  <a:srgbClr val="6C4CFF"/>
                 </a:solidFill>
                 <a:latin typeface="Pretendard SemiBold" pitchFamily="34" charset="0"/>
                 <a:ea typeface="Pretendard SemiBold" pitchFamily="34" charset="-122"/>
                 <a:cs typeface="Pretendard SemiBold" pitchFamily="34" charset="-120"/>
               </a:rPr>
-              <a:t>참조</a:t>
-            </a:r>
-            <a:endParaRPr lang="en-US" sz="1200" dirty="0"/>
-          </a:p>
-        </p:txBody>
-      </p:sp>
-      <p:sp>
-        <p:nvSpPr>
-          <p:cNvPr id="36" name="Text 34"/>
-          <p:cNvSpPr/>
-          <p:nvPr/>
-        </p:nvSpPr>
-        <p:spPr>
-          <a:xfrm>
-            <a:off x="4800600" y="4535424"/>
-            <a:ext cx="2286000" cy="320040"/>
+              <a:t>●</a:t>
+            </a:r>
+            <a:endParaRPr lang="en-US" sz="1150" dirty="0"/>
+          </a:p>
+        </p:txBody>
+      </p:sp>
+      <p:sp>
+        <p:nvSpPr>
+          <p:cNvPr id="29" name="Text 27"/>
+          <p:cNvSpPr/>
+          <p:nvPr/>
+        </p:nvSpPr>
+        <p:spPr>
+          <a:xfrm>
+            <a:off x="3474720" y="4169664"/>
+            <a:ext cx="2377440" cy="320040"/>
           </a:xfrm>
           <a:prstGeom prst="rect">
             <a:avLst/>
@@ -4074,7 +3884,7 @@
               <a:buNone/>
             </a:pPr>
             <a:r>
-              <a:rPr lang="en-US" sz="1150" dirty="0">
+              <a:rPr lang="en-US" sz="1050" dirty="0">
                 <a:solidFill>
                   <a:srgbClr val="55555A"/>
                 </a:solidFill>
@@ -4082,64 +3892,22 @@
                 <a:ea typeface="Pretendard" pitchFamily="34" charset="-122"/>
                 <a:cs typeface="Pretendard" pitchFamily="34" charset="-120"/>
               </a:rPr>
-              <a:t>design-system</a:t>
-            </a:r>
-            <a:endParaRPr lang="en-US" sz="1150" dirty="0"/>
-          </a:p>
-        </p:txBody>
-      </p:sp>
-      <p:sp>
-        <p:nvSpPr>
-          <p:cNvPr id="37" name="Text 35"/>
-          <p:cNvSpPr/>
-          <p:nvPr/>
-        </p:nvSpPr>
-        <p:spPr>
-          <a:xfrm>
-            <a:off x="7178040" y="4535424"/>
-            <a:ext cx="3943807" cy="320040"/>
-          </a:xfrm>
-          <a:prstGeom prst="rect">
-            <a:avLst/>
-          </a:prstGeom>
-          <a:noFill/>
-          <a:ln/>
-        </p:spPr>
-        <p:txBody>
-          <a:bodyPr wrap="square" lIns="0" tIns="0" rIns="0" bIns="0" rtlCol="0" anchor="ctr"/>
-          <a:lstStyle/>
-          <a:p>
-            <a:pPr algn="l" indent="0" marL="0">
-              <a:lnSpc>
-                <a:spcPct val="130000"/>
-              </a:lnSpc>
-              <a:buNone/>
-            </a:pPr>
-            <a:r>
-              <a:rPr lang="en-US" sz="1150" dirty="0">
-                <a:solidFill>
-                  <a:srgbClr val="55555A"/>
-                </a:solidFill>
-                <a:latin typeface="Pretendard" pitchFamily="34" charset="0"/>
-                <a:ea typeface="Pretendard" pitchFamily="34" charset="-122"/>
-                <a:cs typeface="Pretendard" pitchFamily="34" charset="-120"/>
-              </a:rPr>
-              <a:t>5-4. 카드 기획 가이드.md</a:t>
-            </a:r>
-            <a:endParaRPr lang="en-US" sz="1150" dirty="0"/>
-          </a:p>
-        </p:txBody>
-      </p:sp>
-      <p:sp>
-        <p:nvSpPr>
-          <p:cNvPr id="38" name="Shape 36"/>
-          <p:cNvSpPr/>
-          <p:nvPr/>
-        </p:nvSpPr>
-        <p:spPr>
-          <a:xfrm>
-            <a:off x="1069848" y="4919472"/>
-            <a:ext cx="10051999" cy="0"/>
+              <a:t>[SV] 1-4 §URL 게시</a:t>
+            </a:r>
+            <a:endParaRPr lang="en-US" sz="1050" dirty="0"/>
+          </a:p>
+        </p:txBody>
+      </p:sp>
+      <p:sp>
+        <p:nvSpPr>
+          <p:cNvPr id="30" name="Shape 28"/>
+          <p:cNvSpPr/>
+          <p:nvPr/>
+        </p:nvSpPr>
+        <p:spPr>
+          <a:xfrm>
+            <a:off x="777240" y="4517136"/>
+            <a:ext cx="5074920" cy="0"/>
           </a:xfrm>
           <a:prstGeom prst="line">
             <a:avLst/>
@@ -4155,14 +3923,14 @@
       </p:sp>
       <p:sp>
         <p:nvSpPr>
-          <p:cNvPr id="39" name="Text 37"/>
-          <p:cNvSpPr/>
-          <p:nvPr/>
-        </p:nvSpPr>
-        <p:spPr>
-          <a:xfrm>
-            <a:off x="1069848" y="4937760"/>
-            <a:ext cx="2743200" cy="320040"/>
+          <p:cNvPr id="31" name="Text 29"/>
+          <p:cNvSpPr/>
+          <p:nvPr/>
+        </p:nvSpPr>
+        <p:spPr>
+          <a:xfrm>
+            <a:off x="777240" y="4535424"/>
+            <a:ext cx="2194560" cy="320040"/>
           </a:xfrm>
           <a:prstGeom prst="rect">
             <a:avLst/>
@@ -4181,7 +3949,7 @@
               <a:buNone/>
             </a:pPr>
             <a:r>
-              <a:rPr lang="en-US" sz="1200" dirty="0">
+              <a:rPr lang="en-US" sz="1150" dirty="0">
                 <a:solidFill>
                   <a:srgbClr val="1D1D1F"/>
                 </a:solidFill>
@@ -4189,22 +3957,22 @@
                 <a:ea typeface="Pretendard Medium" pitchFamily="34" charset="-122"/>
                 <a:cs typeface="Pretendard Medium" pitchFamily="34" charset="-120"/>
               </a:rPr>
-              <a:t>데이터 연결</a:t>
-            </a:r>
-            <a:endParaRPr lang="en-US" sz="1200" dirty="0"/>
-          </a:p>
-        </p:txBody>
-      </p:sp>
-      <p:sp>
-        <p:nvSpPr>
-          <p:cNvPr id="40" name="Text 38"/>
-          <p:cNvSpPr/>
-          <p:nvPr/>
-        </p:nvSpPr>
-        <p:spPr>
-          <a:xfrm>
-            <a:off x="3977640" y="4937760"/>
-            <a:ext cx="731520" cy="320040"/>
+              <a:t>게시 자동화</a:t>
+            </a:r>
+            <a:endParaRPr lang="en-US" sz="1150" dirty="0"/>
+          </a:p>
+        </p:txBody>
+      </p:sp>
+      <p:sp>
+        <p:nvSpPr>
+          <p:cNvPr id="32" name="Text 30"/>
+          <p:cNvSpPr/>
+          <p:nvPr/>
+        </p:nvSpPr>
+        <p:spPr>
+          <a:xfrm>
+            <a:off x="3017520" y="4535424"/>
+            <a:ext cx="365760" cy="320040"/>
           </a:xfrm>
           <a:prstGeom prst="rect">
             <a:avLst/>
@@ -4223,30 +3991,30 @@
               <a:buNone/>
             </a:pPr>
             <a:r>
-              <a:rPr lang="en-US" sz="1200" dirty="0">
-                <a:solidFill>
-                  <a:srgbClr val="6E6E73"/>
+              <a:rPr lang="en-US" sz="1150" dirty="0">
+                <a:solidFill>
+                  <a:srgbClr val="6C4CFF"/>
                 </a:solidFill>
                 <a:latin typeface="Pretendard SemiBold" pitchFamily="34" charset="0"/>
                 <a:ea typeface="Pretendard SemiBold" pitchFamily="34" charset="-122"/>
                 <a:cs typeface="Pretendard SemiBold" pitchFamily="34" charset="-120"/>
               </a:rPr>
-              <a:t>○</a:t>
-            </a:r>
-            <a:endParaRPr lang="en-US" sz="1200" dirty="0"/>
-          </a:p>
-        </p:txBody>
-      </p:sp>
-      <p:sp>
-        <p:nvSpPr>
-          <p:cNvPr id="41" name="Text 39"/>
-          <p:cNvSpPr/>
-          <p:nvPr/>
-        </p:nvSpPr>
-        <p:spPr>
-          <a:xfrm>
-            <a:off x="4800600" y="4937760"/>
-            <a:ext cx="2286000" cy="320040"/>
+              <a:t>●</a:t>
+            </a:r>
+            <a:endParaRPr lang="en-US" sz="1150" dirty="0"/>
+          </a:p>
+        </p:txBody>
+      </p:sp>
+      <p:sp>
+        <p:nvSpPr>
+          <p:cNvPr id="33" name="Text 31"/>
+          <p:cNvSpPr/>
+          <p:nvPr/>
+        </p:nvSpPr>
+        <p:spPr>
+          <a:xfrm>
+            <a:off x="3474720" y="4535424"/>
+            <a:ext cx="2377440" cy="320040"/>
           </a:xfrm>
           <a:prstGeom prst="rect">
             <a:avLst/>
@@ -4265,7 +4033,7 @@
               <a:buNone/>
             </a:pPr>
             <a:r>
-              <a:rPr lang="en-US" sz="1150" dirty="0">
+              <a:rPr lang="en-US" sz="1050" dirty="0">
                 <a:solidFill>
                   <a:srgbClr val="55555A"/>
                 </a:solidFill>
@@ -4273,64 +4041,22 @@
                 <a:ea typeface="Pretendard" pitchFamily="34" charset="-122"/>
                 <a:cs typeface="Pretendard" pitchFamily="34" charset="-120"/>
               </a:rPr>
-              <a:t>—</a:t>
-            </a:r>
-            <a:endParaRPr lang="en-US" sz="1150" dirty="0"/>
-          </a:p>
-        </p:txBody>
-      </p:sp>
-      <p:sp>
-        <p:nvSpPr>
-          <p:cNvPr id="42" name="Text 40"/>
-          <p:cNvSpPr/>
-          <p:nvPr/>
-        </p:nvSpPr>
-        <p:spPr>
-          <a:xfrm>
-            <a:off x="7178040" y="4937760"/>
-            <a:ext cx="3943807" cy="320040"/>
-          </a:xfrm>
-          <a:prstGeom prst="rect">
-            <a:avLst/>
-          </a:prstGeom>
-          <a:noFill/>
-          <a:ln/>
-        </p:spPr>
-        <p:txBody>
-          <a:bodyPr wrap="square" lIns="0" tIns="0" rIns="0" bIns="0" rtlCol="0" anchor="ctr"/>
-          <a:lstStyle/>
-          <a:p>
-            <a:pPr algn="l" indent="0" marL="0">
-              <a:lnSpc>
-                <a:spcPct val="130000"/>
-              </a:lnSpc>
-              <a:buNone/>
-            </a:pPr>
-            <a:r>
-              <a:rPr lang="en-US" sz="1150" dirty="0">
-                <a:solidFill>
-                  <a:srgbClr val="55555A"/>
-                </a:solidFill>
-                <a:latin typeface="Pretendard" pitchFamily="34" charset="0"/>
-                <a:ea typeface="Pretendard" pitchFamily="34" charset="-122"/>
-                <a:cs typeface="Pretendard" pitchFamily="34" charset="-120"/>
-              </a:rPr>
-              <a:t>없음 (문서 없음)</a:t>
-            </a:r>
-            <a:endParaRPr lang="en-US" sz="1150" dirty="0"/>
-          </a:p>
-        </p:txBody>
-      </p:sp>
-      <p:sp>
-        <p:nvSpPr>
-          <p:cNvPr id="43" name="Shape 41"/>
-          <p:cNvSpPr/>
-          <p:nvPr/>
-        </p:nvSpPr>
-        <p:spPr>
-          <a:xfrm>
-            <a:off x="1069848" y="5321808"/>
-            <a:ext cx="10051999" cy="0"/>
+              <a:t>[SV] 1-4 §Supabase</a:t>
+            </a:r>
+            <a:endParaRPr lang="en-US" sz="1050" dirty="0"/>
+          </a:p>
+        </p:txBody>
+      </p:sp>
+      <p:sp>
+        <p:nvSpPr>
+          <p:cNvPr id="34" name="Shape 32"/>
+          <p:cNvSpPr/>
+          <p:nvPr/>
+        </p:nvSpPr>
+        <p:spPr>
+          <a:xfrm>
+            <a:off x="777240" y="4882896"/>
+            <a:ext cx="5074920" cy="0"/>
           </a:xfrm>
           <a:prstGeom prst="line">
             <a:avLst/>
@@ -4346,14 +4072,14 @@
       </p:sp>
       <p:sp>
         <p:nvSpPr>
-          <p:cNvPr id="44" name="Text 42"/>
-          <p:cNvSpPr/>
-          <p:nvPr/>
-        </p:nvSpPr>
-        <p:spPr>
-          <a:xfrm>
-            <a:off x="1069848" y="5340096"/>
-            <a:ext cx="2743200" cy="320040"/>
+          <p:cNvPr id="35" name="Text 33"/>
+          <p:cNvSpPr/>
+          <p:nvPr/>
+        </p:nvSpPr>
+        <p:spPr>
+          <a:xfrm>
+            <a:off x="777240" y="4901184"/>
+            <a:ext cx="2194560" cy="320040"/>
           </a:xfrm>
           <a:prstGeom prst="rect">
             <a:avLst/>
@@ -4372,7 +4098,7 @@
               <a:buNone/>
             </a:pPr>
             <a:r>
-              <a:rPr lang="en-US" sz="1200" dirty="0">
+              <a:rPr lang="en-US" sz="1150" dirty="0">
                 <a:solidFill>
                   <a:srgbClr val="1D1D1F"/>
                 </a:solidFill>
@@ -4380,22 +4106,22 @@
                 <a:ea typeface="Pretendard Medium" pitchFamily="34" charset="-122"/>
                 <a:cs typeface="Pretendard Medium" pitchFamily="34" charset="-120"/>
               </a:rPr>
-              <a:t>페이지 통계</a:t>
-            </a:r>
-            <a:endParaRPr lang="en-US" sz="1200" dirty="0"/>
-          </a:p>
-        </p:txBody>
-      </p:sp>
-      <p:sp>
-        <p:nvSpPr>
-          <p:cNvPr id="45" name="Text 43"/>
-          <p:cNvSpPr/>
-          <p:nvPr/>
-        </p:nvSpPr>
-        <p:spPr>
-          <a:xfrm>
-            <a:off x="3977640" y="5340096"/>
-            <a:ext cx="731520" cy="320040"/>
+              <a:t>이미지 라이브러리</a:t>
+            </a:r>
+            <a:endParaRPr lang="en-US" sz="1150" dirty="0"/>
+          </a:p>
+        </p:txBody>
+      </p:sp>
+      <p:sp>
+        <p:nvSpPr>
+          <p:cNvPr id="36" name="Text 34"/>
+          <p:cNvSpPr/>
+          <p:nvPr/>
+        </p:nvSpPr>
+        <p:spPr>
+          <a:xfrm>
+            <a:off x="3017520" y="4901184"/>
+            <a:ext cx="365760" cy="320040"/>
           </a:xfrm>
           <a:prstGeom prst="rect">
             <a:avLst/>
@@ -4414,30 +4140,30 @@
               <a:buNone/>
             </a:pPr>
             <a:r>
-              <a:rPr lang="en-US" sz="1200" dirty="0">
-                <a:solidFill>
-                  <a:srgbClr val="6E6E73"/>
+              <a:rPr lang="en-US" sz="1150" dirty="0">
+                <a:solidFill>
+                  <a:srgbClr val="6C4CFF"/>
                 </a:solidFill>
                 <a:latin typeface="Pretendard SemiBold" pitchFamily="34" charset="0"/>
                 <a:ea typeface="Pretendard SemiBold" pitchFamily="34" charset="-122"/>
                 <a:cs typeface="Pretendard SemiBold" pitchFamily="34" charset="-120"/>
               </a:rPr>
-              <a:t>○</a:t>
-            </a:r>
-            <a:endParaRPr lang="en-US" sz="1200" dirty="0"/>
-          </a:p>
-        </p:txBody>
-      </p:sp>
-      <p:sp>
-        <p:nvSpPr>
-          <p:cNvPr id="46" name="Text 44"/>
-          <p:cNvSpPr/>
-          <p:nvPr/>
-        </p:nvSpPr>
-        <p:spPr>
-          <a:xfrm>
-            <a:off x="4800600" y="5340096"/>
-            <a:ext cx="2286000" cy="320040"/>
+              <a:t>●</a:t>
+            </a:r>
+            <a:endParaRPr lang="en-US" sz="1150" dirty="0"/>
+          </a:p>
+        </p:txBody>
+      </p:sp>
+      <p:sp>
+        <p:nvSpPr>
+          <p:cNvPr id="37" name="Text 35"/>
+          <p:cNvSpPr/>
+          <p:nvPr/>
+        </p:nvSpPr>
+        <p:spPr>
+          <a:xfrm>
+            <a:off x="3474720" y="4901184"/>
+            <a:ext cx="2377440" cy="320040"/>
           </a:xfrm>
           <a:prstGeom prst="rect">
             <a:avLst/>
@@ -4456,7 +4182,7 @@
               <a:buNone/>
             </a:pPr>
             <a:r>
-              <a:rPr lang="en-US" sz="1150" dirty="0">
+              <a:rPr lang="en-US" sz="1050" dirty="0">
                 <a:solidFill>
                   <a:srgbClr val="55555A"/>
                 </a:solidFill>
@@ -4464,7 +4190,72 @@
                 <a:ea typeface="Pretendard" pitchFamily="34" charset="-122"/>
                 <a:cs typeface="Pretendard" pitchFamily="34" charset="-120"/>
               </a:rPr>
-              <a:t>—</a:t>
+              <a:t>[SV] CLAUDE §이미지</a:t>
+            </a:r>
+            <a:endParaRPr lang="en-US" sz="1050" dirty="0"/>
+          </a:p>
+        </p:txBody>
+      </p:sp>
+      <p:sp>
+        <p:nvSpPr>
+          <p:cNvPr id="38" name="Shape 36"/>
+          <p:cNvSpPr/>
+          <p:nvPr/>
+        </p:nvSpPr>
+        <p:spPr>
+          <a:xfrm>
+            <a:off x="777240" y="5248656"/>
+            <a:ext cx="5074920" cy="0"/>
+          </a:xfrm>
+          <a:prstGeom prst="line">
+            <a:avLst/>
+          </a:prstGeom>
+          <a:noFill/>
+          <a:ln w="6350">
+            <a:solidFill>
+              <a:srgbClr val="F0F0F0"/>
+            </a:solidFill>
+            <a:prstDash val="solid"/>
+          </a:ln>
+        </p:spPr>
+      </p:sp>
+      <p:sp>
+        <p:nvSpPr>
+          <p:cNvPr id="39" name="Text 37"/>
+          <p:cNvSpPr/>
+          <p:nvPr/>
+        </p:nvSpPr>
+        <p:spPr>
+          <a:xfrm>
+            <a:off x="777240" y="5266944"/>
+            <a:ext cx="2194560" cy="320040"/>
+          </a:xfrm>
+          <a:prstGeom prst="rect">
+            <a:avLst/>
+          </a:prstGeom>
+          <a:noFill/>
+          <a:ln/>
+        </p:spPr>
+        <p:txBody>
+          <a:bodyPr wrap="square" lIns="0" tIns="0" rIns="0" bIns="0" rtlCol="0" anchor="ctr"/>
+          <a:lstStyle/>
+          <a:p>
+            <a:pPr algn="l" indent="0" marL="0">
+              <a:lnSpc>
+                <a:spcPct val="130000"/>
+              </a:lnSpc>
+              <a:buNone/>
+            </a:pPr>
+            <a:r>
+              <a:rPr lang="en-US" sz="1150" dirty="0">
+                <a:solidFill>
+                  <a:srgbClr val="1D1D1F"/>
+                </a:solidFill>
+                <a:latin typeface="Pretendard Medium" pitchFamily="34" charset="0"/>
+                <a:ea typeface="Pretendard Medium" pitchFamily="34" charset="-122"/>
+                <a:cs typeface="Pretendard Medium" pitchFamily="34" charset="-120"/>
+              </a:rPr>
+              <a:t>템플릿 상세페이지</a:t>
             </a:r>
             <a:endParaRPr lang="en-US" sz="1150" dirty="0"/>
           </a:p>
@@ -4472,14 +4263,14 @@
       </p:sp>
       <p:sp>
         <p:nvSpPr>
-          <p:cNvPr id="47" name="Text 45"/>
-          <p:cNvSpPr/>
-          <p:nvPr/>
-        </p:nvSpPr>
-        <p:spPr>
-          <a:xfrm>
-            <a:off x="7178040" y="5340096"/>
-            <a:ext cx="3943807" cy="320040"/>
+          <p:cNvPr id="40" name="Text 38"/>
+          <p:cNvSpPr/>
+          <p:nvPr/>
+        </p:nvSpPr>
+        <p:spPr>
+          <a:xfrm>
+            <a:off x="3017520" y="5266944"/>
+            <a:ext cx="365760" cy="320040"/>
           </a:xfrm>
           <a:prstGeom prst="rect">
             <a:avLst/>
@@ -4499,6 +4290,48 @@
             </a:pPr>
             <a:r>
               <a:rPr lang="en-US" sz="1150" dirty="0">
+                <a:solidFill>
+                  <a:srgbClr val="6C4CFF"/>
+                </a:solidFill>
+                <a:latin typeface="Pretendard SemiBold" pitchFamily="34" charset="0"/>
+                <a:ea typeface="Pretendard SemiBold" pitchFamily="34" charset="-122"/>
+                <a:cs typeface="Pretendard SemiBold" pitchFamily="34" charset="-120"/>
+              </a:rPr>
+              <a:t>●</a:t>
+            </a:r>
+            <a:endParaRPr lang="en-US" sz="1150" dirty="0"/>
+          </a:p>
+        </p:txBody>
+      </p:sp>
+      <p:sp>
+        <p:nvSpPr>
+          <p:cNvPr id="41" name="Text 39"/>
+          <p:cNvSpPr/>
+          <p:nvPr/>
+        </p:nvSpPr>
+        <p:spPr>
+          <a:xfrm>
+            <a:off x="3474720" y="5266944"/>
+            <a:ext cx="2377440" cy="320040"/>
+          </a:xfrm>
+          <a:prstGeom prst="rect">
+            <a:avLst/>
+          </a:prstGeom>
+          <a:noFill/>
+          <a:ln/>
+        </p:spPr>
+        <p:txBody>
+          <a:bodyPr wrap="square" lIns="0" tIns="0" rIns="0" bIns="0" rtlCol="0" anchor="ctr"/>
+          <a:lstStyle/>
+          <a:p>
+            <a:pPr algn="l" indent="0" marL="0">
+              <a:lnSpc>
+                <a:spcPct val="130000"/>
+              </a:lnSpc>
+              <a:buNone/>
+            </a:pPr>
+            <a:r>
+              <a:rPr lang="en-US" sz="1050" dirty="0">
                 <a:solidFill>
                   <a:srgbClr val="55555A"/>
                 </a:solidFill>
@@ -4506,22 +4339,22 @@
                 <a:ea typeface="Pretendard" pitchFamily="34" charset="-122"/>
                 <a:cs typeface="Pretendard" pitchFamily="34" charset="-120"/>
               </a:rPr>
-              <a:t>없음 (문서 없음)</a:t>
-            </a:r>
-            <a:endParaRPr lang="en-US" sz="1150" dirty="0"/>
-          </a:p>
-        </p:txBody>
-      </p:sp>
-      <p:sp>
-        <p:nvSpPr>
-          <p:cNvPr id="48" name="Text 46"/>
-          <p:cNvSpPr/>
-          <p:nvPr/>
-        </p:nvSpPr>
-        <p:spPr>
-          <a:xfrm>
-            <a:off x="777240" y="5888736"/>
-            <a:ext cx="10637215" cy="274320"/>
+              <a:t>[T] 1-7</a:t>
+            </a:r>
+            <a:endParaRPr lang="en-US" sz="1050" dirty="0"/>
+          </a:p>
+        </p:txBody>
+      </p:sp>
+      <p:sp>
+        <p:nvSpPr>
+          <p:cNvPr id="42" name="Text 40"/>
+          <p:cNvSpPr/>
+          <p:nvPr/>
+        </p:nvSpPr>
+        <p:spPr>
+          <a:xfrm>
+            <a:off x="6336792" y="2286000"/>
+            <a:ext cx="5074920" cy="274320"/>
           </a:xfrm>
           <a:prstGeom prst="rect">
             <a:avLst/>
@@ -4540,17 +4373,1251 @@
               <a:buNone/>
             </a:pPr>
             <a:r>
+              <a:rPr lang="en-US" sz="1250" dirty="0">
+                <a:solidFill>
+                  <a:srgbClr val="6C4CFF"/>
+                </a:solidFill>
+                <a:latin typeface="Pretendard SemiBold" pitchFamily="34" charset="0"/>
+                <a:ea typeface="Pretendard SemiBold" pitchFamily="34" charset="-122"/>
+                <a:cs typeface="Pretendard SemiBold" pitchFamily="34" charset="-120"/>
+              </a:rPr>
+              <a:t>홈페이지 · 시작</a:t>
+            </a:r>
+            <a:endParaRPr lang="en-US" sz="1250" dirty="0"/>
+          </a:p>
+        </p:txBody>
+      </p:sp>
+      <p:sp>
+        <p:nvSpPr>
+          <p:cNvPr id="43" name="Shape 41"/>
+          <p:cNvSpPr/>
+          <p:nvPr/>
+        </p:nvSpPr>
+        <p:spPr>
+          <a:xfrm>
+            <a:off x="6336792" y="2615184"/>
+            <a:ext cx="5074920" cy="0"/>
+          </a:xfrm>
+          <a:prstGeom prst="line">
+            <a:avLst/>
+          </a:prstGeom>
+          <a:noFill/>
+          <a:ln w="9525">
+            <a:solidFill>
+              <a:srgbClr val="E5E7EB"/>
+            </a:solidFill>
+            <a:prstDash val="solid"/>
+          </a:ln>
+        </p:spPr>
+      </p:sp>
+      <p:sp>
+        <p:nvSpPr>
+          <p:cNvPr id="44" name="Text 42"/>
+          <p:cNvSpPr/>
+          <p:nvPr/>
+        </p:nvSpPr>
+        <p:spPr>
+          <a:xfrm>
+            <a:off x="6336792" y="2706624"/>
+            <a:ext cx="2194560" cy="320040"/>
+          </a:xfrm>
+          <a:prstGeom prst="rect">
+            <a:avLst/>
+          </a:prstGeom>
+          <a:noFill/>
+          <a:ln/>
+        </p:spPr>
+        <p:txBody>
+          <a:bodyPr wrap="square" lIns="0" tIns="0" rIns="0" bIns="0" rtlCol="0" anchor="ctr"/>
+          <a:lstStyle/>
+          <a:p>
+            <a:pPr algn="l" indent="0" marL="0">
+              <a:lnSpc>
+                <a:spcPct val="130000"/>
+              </a:lnSpc>
+              <a:buNone/>
+            </a:pPr>
+            <a:r>
               <a:rPr lang="en-US" sz="1150" dirty="0">
                 <a:solidFill>
-                  <a:srgbClr val="6E6E73"/>
+                  <a:srgbClr val="1D1D1F"/>
                 </a:solidFill>
                 <a:latin typeface="Pretendard Medium" pitchFamily="34" charset="0"/>
                 <a:ea typeface="Pretendard Medium" pitchFamily="34" charset="-122"/>
                 <a:cs typeface="Pretendard Medium" pitchFamily="34" charset="-120"/>
               </a:rPr>
-              <a:t>실제 파일의 일부입니다 — CdBd 페이지 기능 약 40개(카드 15종 포함)를 이렇게 한 줄씩. 내용은 복제하지 않고 ‘위치’만 가리킵니다.</a:t>
+              <a:t>페이지 · URL 통계</a:t>
             </a:r>
             <a:endParaRPr lang="en-US" sz="1150" dirty="0"/>
+          </a:p>
+        </p:txBody>
+      </p:sp>
+      <p:sp>
+        <p:nvSpPr>
+          <p:cNvPr id="45" name="Text 43"/>
+          <p:cNvSpPr/>
+          <p:nvPr/>
+        </p:nvSpPr>
+        <p:spPr>
+          <a:xfrm>
+            <a:off x="8577072" y="2706624"/>
+            <a:ext cx="365760" cy="320040"/>
+          </a:xfrm>
+          <a:prstGeom prst="rect">
+            <a:avLst/>
+          </a:prstGeom>
+          <a:noFill/>
+          <a:ln/>
+        </p:spPr>
+        <p:txBody>
+          <a:bodyPr wrap="square" lIns="0" tIns="0" rIns="0" bIns="0" rtlCol="0" anchor="ctr"/>
+          <a:lstStyle/>
+          <a:p>
+            <a:pPr algn="l" indent="0" marL="0">
+              <a:lnSpc>
+                <a:spcPct val="130000"/>
+              </a:lnSpc>
+              <a:buNone/>
+            </a:pPr>
+            <a:r>
+              <a:rPr lang="en-US" sz="1150" dirty="0">
+                <a:solidFill>
+                  <a:srgbClr val="6E6E73"/>
+                </a:solidFill>
+                <a:latin typeface="Pretendard SemiBold" pitchFamily="34" charset="0"/>
+                <a:ea typeface="Pretendard SemiBold" pitchFamily="34" charset="-122"/>
+                <a:cs typeface="Pretendard SemiBold" pitchFamily="34" charset="-120"/>
+              </a:rPr>
+              <a:t>○</a:t>
+            </a:r>
+            <a:endParaRPr lang="en-US" sz="1150" dirty="0"/>
+          </a:p>
+        </p:txBody>
+      </p:sp>
+      <p:sp>
+        <p:nvSpPr>
+          <p:cNvPr id="46" name="Text 44"/>
+          <p:cNvSpPr/>
+          <p:nvPr/>
+        </p:nvSpPr>
+        <p:spPr>
+          <a:xfrm>
+            <a:off x="9034272" y="2706624"/>
+            <a:ext cx="2377440" cy="320040"/>
+          </a:xfrm>
+          <a:prstGeom prst="rect">
+            <a:avLst/>
+          </a:prstGeom>
+          <a:noFill/>
+          <a:ln/>
+        </p:spPr>
+        <p:txBody>
+          <a:bodyPr wrap="square" lIns="0" tIns="0" rIns="0" bIns="0" rtlCol="0" anchor="ctr"/>
+          <a:lstStyle/>
+          <a:p>
+            <a:pPr algn="l" indent="0" marL="0">
+              <a:lnSpc>
+                <a:spcPct val="130000"/>
+              </a:lnSpc>
+              <a:buNone/>
+            </a:pPr>
+            <a:r>
+              <a:rPr lang="en-US" sz="1050" dirty="0">
+                <a:solidFill>
+                  <a:srgbClr val="55555A"/>
+                </a:solidFill>
+                <a:latin typeface="Pretendard" pitchFamily="34" charset="0"/>
+                <a:ea typeface="Pretendard" pitchFamily="34" charset="-122"/>
+                <a:cs typeface="Pretendard" pitchFamily="34" charset="-120"/>
+              </a:rPr>
+              <a:t>— 없음</a:t>
+            </a:r>
+            <a:endParaRPr lang="en-US" sz="1050" dirty="0"/>
+          </a:p>
+        </p:txBody>
+      </p:sp>
+      <p:sp>
+        <p:nvSpPr>
+          <p:cNvPr id="47" name="Shape 45"/>
+          <p:cNvSpPr/>
+          <p:nvPr/>
+        </p:nvSpPr>
+        <p:spPr>
+          <a:xfrm>
+            <a:off x="6336792" y="3054096"/>
+            <a:ext cx="5074920" cy="0"/>
+          </a:xfrm>
+          <a:prstGeom prst="line">
+            <a:avLst/>
+          </a:prstGeom>
+          <a:noFill/>
+          <a:ln w="6350">
+            <a:solidFill>
+              <a:srgbClr val="F0F0F0"/>
+            </a:solidFill>
+            <a:prstDash val="solid"/>
+          </a:ln>
+        </p:spPr>
+      </p:sp>
+      <p:sp>
+        <p:nvSpPr>
+          <p:cNvPr id="48" name="Text 46"/>
+          <p:cNvSpPr/>
+          <p:nvPr/>
+        </p:nvSpPr>
+        <p:spPr>
+          <a:xfrm>
+            <a:off x="6336792" y="3072384"/>
+            <a:ext cx="2194560" cy="320040"/>
+          </a:xfrm>
+          <a:prstGeom prst="rect">
+            <a:avLst/>
+          </a:prstGeom>
+          <a:noFill/>
+          <a:ln/>
+        </p:spPr>
+        <p:txBody>
+          <a:bodyPr wrap="square" lIns="0" tIns="0" rIns="0" bIns="0" rtlCol="0" anchor="ctr"/>
+          <a:lstStyle/>
+          <a:p>
+            <a:pPr algn="l" indent="0" marL="0">
+              <a:lnSpc>
+                <a:spcPct val="130000"/>
+              </a:lnSpc>
+              <a:buNone/>
+            </a:pPr>
+            <a:r>
+              <a:rPr lang="en-US" sz="1150" dirty="0">
+                <a:solidFill>
+                  <a:srgbClr val="1D1D1F"/>
+                </a:solidFill>
+                <a:latin typeface="Pretendard Medium" pitchFamily="34" charset="0"/>
+                <a:ea typeface="Pretendard Medium" pitchFamily="34" charset="-122"/>
+                <a:cs typeface="Pretendard Medium" pitchFamily="34" charset="-120"/>
+              </a:rPr>
+              <a:t>버전 · 공유 · 홈</a:t>
+            </a:r>
+            <a:endParaRPr lang="en-US" sz="1150" dirty="0"/>
+          </a:p>
+        </p:txBody>
+      </p:sp>
+      <p:sp>
+        <p:nvSpPr>
+          <p:cNvPr id="49" name="Text 47"/>
+          <p:cNvSpPr/>
+          <p:nvPr/>
+        </p:nvSpPr>
+        <p:spPr>
+          <a:xfrm>
+            <a:off x="8577072" y="3072384"/>
+            <a:ext cx="365760" cy="320040"/>
+          </a:xfrm>
+          <a:prstGeom prst="rect">
+            <a:avLst/>
+          </a:prstGeom>
+          <a:noFill/>
+          <a:ln/>
+        </p:spPr>
+        <p:txBody>
+          <a:bodyPr wrap="square" lIns="0" tIns="0" rIns="0" bIns="0" rtlCol="0" anchor="ctr"/>
+          <a:lstStyle/>
+          <a:p>
+            <a:pPr algn="l" indent="0" marL="0">
+              <a:lnSpc>
+                <a:spcPct val="130000"/>
+              </a:lnSpc>
+              <a:buNone/>
+            </a:pPr>
+            <a:r>
+              <a:rPr lang="en-US" sz="1150" dirty="0">
+                <a:solidFill>
+                  <a:srgbClr val="6E6E73"/>
+                </a:solidFill>
+                <a:latin typeface="Pretendard SemiBold" pitchFamily="34" charset="0"/>
+                <a:ea typeface="Pretendard SemiBold" pitchFamily="34" charset="-122"/>
+                <a:cs typeface="Pretendard SemiBold" pitchFamily="34" charset="-120"/>
+              </a:rPr>
+              <a:t>○</a:t>
+            </a:r>
+            <a:endParaRPr lang="en-US" sz="1150" dirty="0"/>
+          </a:p>
+        </p:txBody>
+      </p:sp>
+      <p:sp>
+        <p:nvSpPr>
+          <p:cNvPr id="50" name="Text 48"/>
+          <p:cNvSpPr/>
+          <p:nvPr/>
+        </p:nvSpPr>
+        <p:spPr>
+          <a:xfrm>
+            <a:off x="9034272" y="3072384"/>
+            <a:ext cx="2377440" cy="320040"/>
+          </a:xfrm>
+          <a:prstGeom prst="rect">
+            <a:avLst/>
+          </a:prstGeom>
+          <a:noFill/>
+          <a:ln/>
+        </p:spPr>
+        <p:txBody>
+          <a:bodyPr wrap="square" lIns="0" tIns="0" rIns="0" bIns="0" rtlCol="0" anchor="ctr"/>
+          <a:lstStyle/>
+          <a:p>
+            <a:pPr algn="l" indent="0" marL="0">
+              <a:lnSpc>
+                <a:spcPct val="130000"/>
+              </a:lnSpc>
+              <a:buNone/>
+            </a:pPr>
+            <a:r>
+              <a:rPr lang="en-US" sz="1050" dirty="0">
+                <a:solidFill>
+                  <a:srgbClr val="55555A"/>
+                </a:solidFill>
+                <a:latin typeface="Pretendard" pitchFamily="34" charset="0"/>
+                <a:ea typeface="Pretendard" pitchFamily="34" charset="-122"/>
+                <a:cs typeface="Pretendard" pitchFamily="34" charset="-120"/>
+              </a:rPr>
+              <a:t>— 없음</a:t>
+            </a:r>
+            <a:endParaRPr lang="en-US" sz="1050" dirty="0"/>
+          </a:p>
+        </p:txBody>
+      </p:sp>
+      <p:sp>
+        <p:nvSpPr>
+          <p:cNvPr id="51" name="Shape 49"/>
+          <p:cNvSpPr/>
+          <p:nvPr/>
+        </p:nvSpPr>
+        <p:spPr>
+          <a:xfrm>
+            <a:off x="6336792" y="3419856"/>
+            <a:ext cx="5074920" cy="0"/>
+          </a:xfrm>
+          <a:prstGeom prst="line">
+            <a:avLst/>
+          </a:prstGeom>
+          <a:noFill/>
+          <a:ln w="6350">
+            <a:solidFill>
+              <a:srgbClr val="F0F0F0"/>
+            </a:solidFill>
+            <a:prstDash val="solid"/>
+          </a:ln>
+        </p:spPr>
+      </p:sp>
+      <p:sp>
+        <p:nvSpPr>
+          <p:cNvPr id="52" name="Text 50"/>
+          <p:cNvSpPr/>
+          <p:nvPr/>
+        </p:nvSpPr>
+        <p:spPr>
+          <a:xfrm>
+            <a:off x="6336792" y="3438144"/>
+            <a:ext cx="2194560" cy="320040"/>
+          </a:xfrm>
+          <a:prstGeom prst="rect">
+            <a:avLst/>
+          </a:prstGeom>
+          <a:noFill/>
+          <a:ln/>
+        </p:spPr>
+        <p:txBody>
+          <a:bodyPr wrap="square" lIns="0" tIns="0" rIns="0" bIns="0" rtlCol="0" anchor="ctr"/>
+          <a:lstStyle/>
+          <a:p>
+            <a:pPr algn="l" indent="0" marL="0">
+              <a:lnSpc>
+                <a:spcPct val="130000"/>
+              </a:lnSpc>
+              <a:buNone/>
+            </a:pPr>
+            <a:r>
+              <a:rPr lang="en-US" sz="1150" dirty="0">
+                <a:solidFill>
+                  <a:srgbClr val="1D1D1F"/>
+                </a:solidFill>
+                <a:latin typeface="Pretendard Medium" pitchFamily="34" charset="0"/>
+                <a:ea typeface="Pretendard Medium" pitchFamily="34" charset="-122"/>
+                <a:cs typeface="Pretendard Medium" pitchFamily="34" charset="-120"/>
+              </a:rPr>
+              <a:t>계정 · 주소 · 권한</a:t>
+            </a:r>
+            <a:endParaRPr lang="en-US" sz="1150" dirty="0"/>
+          </a:p>
+        </p:txBody>
+      </p:sp>
+      <p:sp>
+        <p:nvSpPr>
+          <p:cNvPr id="53" name="Text 51"/>
+          <p:cNvSpPr/>
+          <p:nvPr/>
+        </p:nvSpPr>
+        <p:spPr>
+          <a:xfrm>
+            <a:off x="8577072" y="3438144"/>
+            <a:ext cx="365760" cy="320040"/>
+          </a:xfrm>
+          <a:prstGeom prst="rect">
+            <a:avLst/>
+          </a:prstGeom>
+          <a:noFill/>
+          <a:ln/>
+        </p:spPr>
+        <p:txBody>
+          <a:bodyPr wrap="square" lIns="0" tIns="0" rIns="0" bIns="0" rtlCol="0" anchor="ctr"/>
+          <a:lstStyle/>
+          <a:p>
+            <a:pPr algn="l" indent="0" marL="0">
+              <a:lnSpc>
+                <a:spcPct val="130000"/>
+              </a:lnSpc>
+              <a:buNone/>
+            </a:pPr>
+            <a:r>
+              <a:rPr lang="en-US" sz="1150" dirty="0">
+                <a:solidFill>
+                  <a:srgbClr val="6E6E73"/>
+                </a:solidFill>
+                <a:latin typeface="Pretendard SemiBold" pitchFamily="34" charset="0"/>
+                <a:ea typeface="Pretendard SemiBold" pitchFamily="34" charset="-122"/>
+                <a:cs typeface="Pretendard SemiBold" pitchFamily="34" charset="-120"/>
+              </a:rPr>
+              <a:t>○</a:t>
+            </a:r>
+            <a:endParaRPr lang="en-US" sz="1150" dirty="0"/>
+          </a:p>
+        </p:txBody>
+      </p:sp>
+      <p:sp>
+        <p:nvSpPr>
+          <p:cNvPr id="54" name="Text 52"/>
+          <p:cNvSpPr/>
+          <p:nvPr/>
+        </p:nvSpPr>
+        <p:spPr>
+          <a:xfrm>
+            <a:off x="9034272" y="3438144"/>
+            <a:ext cx="2377440" cy="320040"/>
+          </a:xfrm>
+          <a:prstGeom prst="rect">
+            <a:avLst/>
+          </a:prstGeom>
+          <a:noFill/>
+          <a:ln/>
+        </p:spPr>
+        <p:txBody>
+          <a:bodyPr wrap="square" lIns="0" tIns="0" rIns="0" bIns="0" rtlCol="0" anchor="ctr"/>
+          <a:lstStyle/>
+          <a:p>
+            <a:pPr algn="l" indent="0" marL="0">
+              <a:lnSpc>
+                <a:spcPct val="130000"/>
+              </a:lnSpc>
+              <a:buNone/>
+            </a:pPr>
+            <a:r>
+              <a:rPr lang="en-US" sz="1050" dirty="0">
+                <a:solidFill>
+                  <a:srgbClr val="55555A"/>
+                </a:solidFill>
+                <a:latin typeface="Pretendard" pitchFamily="34" charset="0"/>
+                <a:ea typeface="Pretendard" pitchFamily="34" charset="-122"/>
+                <a:cs typeface="Pretendard" pitchFamily="34" charset="-120"/>
+              </a:rPr>
+              <a:t>— 없음</a:t>
+            </a:r>
+            <a:endParaRPr lang="en-US" sz="1050" dirty="0"/>
+          </a:p>
+        </p:txBody>
+      </p:sp>
+      <p:sp>
+        <p:nvSpPr>
+          <p:cNvPr id="55" name="Shape 53"/>
+          <p:cNvSpPr/>
+          <p:nvPr/>
+        </p:nvSpPr>
+        <p:spPr>
+          <a:xfrm>
+            <a:off x="6336792" y="3785616"/>
+            <a:ext cx="5074920" cy="0"/>
+          </a:xfrm>
+          <a:prstGeom prst="line">
+            <a:avLst/>
+          </a:prstGeom>
+          <a:noFill/>
+          <a:ln w="6350">
+            <a:solidFill>
+              <a:srgbClr val="F0F0F0"/>
+            </a:solidFill>
+            <a:prstDash val="solid"/>
+          </a:ln>
+        </p:spPr>
+      </p:sp>
+      <p:sp>
+        <p:nvSpPr>
+          <p:cNvPr id="56" name="Text 54"/>
+          <p:cNvSpPr/>
+          <p:nvPr/>
+        </p:nvSpPr>
+        <p:spPr>
+          <a:xfrm>
+            <a:off x="6336792" y="3803904"/>
+            <a:ext cx="2194560" cy="320040"/>
+          </a:xfrm>
+          <a:prstGeom prst="rect">
+            <a:avLst/>
+          </a:prstGeom>
+          <a:noFill/>
+          <a:ln/>
+        </p:spPr>
+        <p:txBody>
+          <a:bodyPr wrap="square" lIns="0" tIns="0" rIns="0" bIns="0" rtlCol="0" anchor="ctr"/>
+          <a:lstStyle/>
+          <a:p>
+            <a:pPr algn="l" indent="0" marL="0">
+              <a:lnSpc>
+                <a:spcPct val="130000"/>
+              </a:lnSpc>
+              <a:buNone/>
+            </a:pPr>
+            <a:r>
+              <a:rPr lang="en-US" sz="1150" dirty="0">
+                <a:solidFill>
+                  <a:srgbClr val="1D1D1F"/>
+                </a:solidFill>
+                <a:latin typeface="Pretendard Medium" pitchFamily="34" charset="0"/>
+                <a:ea typeface="Pretendard Medium" pitchFamily="34" charset="-122"/>
+                <a:cs typeface="Pretendard Medium" pitchFamily="34" charset="-120"/>
+              </a:rPr>
+              <a:t>요금 · 결제</a:t>
+            </a:r>
+            <a:endParaRPr lang="en-US" sz="1150" dirty="0"/>
+          </a:p>
+        </p:txBody>
+      </p:sp>
+      <p:sp>
+        <p:nvSpPr>
+          <p:cNvPr id="57" name="Text 55"/>
+          <p:cNvSpPr/>
+          <p:nvPr/>
+        </p:nvSpPr>
+        <p:spPr>
+          <a:xfrm>
+            <a:off x="8577072" y="3803904"/>
+            <a:ext cx="365760" cy="320040"/>
+          </a:xfrm>
+          <a:prstGeom prst="rect">
+            <a:avLst/>
+          </a:prstGeom>
+          <a:noFill/>
+          <a:ln/>
+        </p:spPr>
+        <p:txBody>
+          <a:bodyPr wrap="square" lIns="0" tIns="0" rIns="0" bIns="0" rtlCol="0" anchor="ctr"/>
+          <a:lstStyle/>
+          <a:p>
+            <a:pPr algn="l" indent="0" marL="0">
+              <a:lnSpc>
+                <a:spcPct val="130000"/>
+              </a:lnSpc>
+              <a:buNone/>
+            </a:pPr>
+            <a:r>
+              <a:rPr lang="en-US" sz="1150" dirty="0">
+                <a:solidFill>
+                  <a:srgbClr val="6E6E73"/>
+                </a:solidFill>
+                <a:latin typeface="Pretendard SemiBold" pitchFamily="34" charset="0"/>
+                <a:ea typeface="Pretendard SemiBold" pitchFamily="34" charset="-122"/>
+                <a:cs typeface="Pretendard SemiBold" pitchFamily="34" charset="-120"/>
+              </a:rPr>
+              <a:t>◐</a:t>
+            </a:r>
+            <a:endParaRPr lang="en-US" sz="1150" dirty="0"/>
+          </a:p>
+        </p:txBody>
+      </p:sp>
+      <p:sp>
+        <p:nvSpPr>
+          <p:cNvPr id="58" name="Text 56"/>
+          <p:cNvSpPr/>
+          <p:nvPr/>
+        </p:nvSpPr>
+        <p:spPr>
+          <a:xfrm>
+            <a:off x="9034272" y="3803904"/>
+            <a:ext cx="2377440" cy="320040"/>
+          </a:xfrm>
+          <a:prstGeom prst="rect">
+            <a:avLst/>
+          </a:prstGeom>
+          <a:noFill/>
+          <a:ln/>
+        </p:spPr>
+        <p:txBody>
+          <a:bodyPr wrap="square" lIns="0" tIns="0" rIns="0" bIns="0" rtlCol="0" anchor="ctr"/>
+          <a:lstStyle/>
+          <a:p>
+            <a:pPr algn="l" indent="0" marL="0">
+              <a:lnSpc>
+                <a:spcPct val="130000"/>
+              </a:lnSpc>
+              <a:buNone/>
+            </a:pPr>
+            <a:r>
+              <a:rPr lang="en-US" sz="1050" dirty="0">
+                <a:solidFill>
+                  <a:srgbClr val="55555A"/>
+                </a:solidFill>
+                <a:latin typeface="Pretendard" pitchFamily="34" charset="0"/>
+                <a:ea typeface="Pretendard" pitchFamily="34" charset="-122"/>
+                <a:cs typeface="Pretendard" pitchFamily="34" charset="-120"/>
+              </a:rPr>
+              <a:t>[SV] quota 실측</a:t>
+            </a:r>
+            <a:endParaRPr lang="en-US" sz="1050" dirty="0"/>
+          </a:p>
+        </p:txBody>
+      </p:sp>
+      <p:sp>
+        <p:nvSpPr>
+          <p:cNvPr id="59" name="Shape 57"/>
+          <p:cNvSpPr/>
+          <p:nvPr/>
+        </p:nvSpPr>
+        <p:spPr>
+          <a:xfrm>
+            <a:off x="6336792" y="4151376"/>
+            <a:ext cx="5074920" cy="0"/>
+          </a:xfrm>
+          <a:prstGeom prst="line">
+            <a:avLst/>
+          </a:prstGeom>
+          <a:noFill/>
+          <a:ln w="6350">
+            <a:solidFill>
+              <a:srgbClr val="F0F0F0"/>
+            </a:solidFill>
+            <a:prstDash val="solid"/>
+          </a:ln>
+        </p:spPr>
+      </p:sp>
+      <p:sp>
+        <p:nvSpPr>
+          <p:cNvPr id="60" name="Text 58"/>
+          <p:cNvSpPr/>
+          <p:nvPr/>
+        </p:nvSpPr>
+        <p:spPr>
+          <a:xfrm>
+            <a:off x="6336792" y="4169664"/>
+            <a:ext cx="2194560" cy="320040"/>
+          </a:xfrm>
+          <a:prstGeom prst="rect">
+            <a:avLst/>
+          </a:prstGeom>
+          <a:noFill/>
+          <a:ln/>
+        </p:spPr>
+        <p:txBody>
+          <a:bodyPr wrap="square" lIns="0" tIns="0" rIns="0" bIns="0" rtlCol="0" anchor="ctr"/>
+          <a:lstStyle/>
+          <a:p>
+            <a:pPr algn="l" indent="0" marL="0">
+              <a:lnSpc>
+                <a:spcPct val="130000"/>
+              </a:lnSpc>
+              <a:buNone/>
+            </a:pPr>
+            <a:r>
+              <a:rPr lang="en-US" sz="1150" dirty="0">
+                <a:solidFill>
+                  <a:srgbClr val="1D1D1F"/>
+                </a:solidFill>
+                <a:latin typeface="Pretendard Medium" pitchFamily="34" charset="0"/>
+                <a:ea typeface="Pretendard Medium" pitchFamily="34" charset="-122"/>
+                <a:cs typeface="Pretendard Medium" pitchFamily="34" charset="-120"/>
+              </a:rPr>
+              <a:t>페이지 비밀번호</a:t>
+            </a:r>
+            <a:endParaRPr lang="en-US" sz="1150" dirty="0"/>
+          </a:p>
+        </p:txBody>
+      </p:sp>
+      <p:sp>
+        <p:nvSpPr>
+          <p:cNvPr id="61" name="Text 59"/>
+          <p:cNvSpPr/>
+          <p:nvPr/>
+        </p:nvSpPr>
+        <p:spPr>
+          <a:xfrm>
+            <a:off x="8577072" y="4169664"/>
+            <a:ext cx="365760" cy="320040"/>
+          </a:xfrm>
+          <a:prstGeom prst="rect">
+            <a:avLst/>
+          </a:prstGeom>
+          <a:noFill/>
+          <a:ln/>
+        </p:spPr>
+        <p:txBody>
+          <a:bodyPr wrap="square" lIns="0" tIns="0" rIns="0" bIns="0" rtlCol="0" anchor="ctr"/>
+          <a:lstStyle/>
+          <a:p>
+            <a:pPr algn="l" indent="0" marL="0">
+              <a:lnSpc>
+                <a:spcPct val="130000"/>
+              </a:lnSpc>
+              <a:buNone/>
+            </a:pPr>
+            <a:r>
+              <a:rPr lang="en-US" sz="1150" dirty="0">
+                <a:solidFill>
+                  <a:srgbClr val="6E6E73"/>
+                </a:solidFill>
+                <a:latin typeface="Pretendard SemiBold" pitchFamily="34" charset="0"/>
+                <a:ea typeface="Pretendard SemiBold" pitchFamily="34" charset="-122"/>
+                <a:cs typeface="Pretendard SemiBold" pitchFamily="34" charset="-120"/>
+              </a:rPr>
+              <a:t>◐</a:t>
+            </a:r>
+            <a:endParaRPr lang="en-US" sz="1150" dirty="0"/>
+          </a:p>
+        </p:txBody>
+      </p:sp>
+      <p:sp>
+        <p:nvSpPr>
+          <p:cNvPr id="62" name="Text 60"/>
+          <p:cNvSpPr/>
+          <p:nvPr/>
+        </p:nvSpPr>
+        <p:spPr>
+          <a:xfrm>
+            <a:off x="9034272" y="4169664"/>
+            <a:ext cx="2377440" cy="320040"/>
+          </a:xfrm>
+          <a:prstGeom prst="rect">
+            <a:avLst/>
+          </a:prstGeom>
+          <a:noFill/>
+          <a:ln/>
+        </p:spPr>
+        <p:txBody>
+          <a:bodyPr wrap="square" lIns="0" tIns="0" rIns="0" bIns="0" rtlCol="0" anchor="ctr"/>
+          <a:lstStyle/>
+          <a:p>
+            <a:pPr algn="l" indent="0" marL="0">
+              <a:lnSpc>
+                <a:spcPct val="130000"/>
+              </a:lnSpc>
+              <a:buNone/>
+            </a:pPr>
+            <a:r>
+              <a:rPr lang="en-US" sz="1050" dirty="0">
+                <a:solidFill>
+                  <a:srgbClr val="55555A"/>
+                </a:solidFill>
+                <a:latin typeface="Pretendard" pitchFamily="34" charset="0"/>
+                <a:ea typeface="Pretendard" pitchFamily="34" charset="-122"/>
+                <a:cs typeface="Pretendard" pitchFamily="34" charset="-120"/>
+              </a:rPr>
+              <a:t>[SV] 1-4 모달</a:t>
+            </a:r>
+            <a:endParaRPr lang="en-US" sz="1050" dirty="0"/>
+          </a:p>
+        </p:txBody>
+      </p:sp>
+      <p:sp>
+        <p:nvSpPr>
+          <p:cNvPr id="63" name="Shape 61"/>
+          <p:cNvSpPr/>
+          <p:nvPr/>
+        </p:nvSpPr>
+        <p:spPr>
+          <a:xfrm>
+            <a:off x="6336792" y="4517136"/>
+            <a:ext cx="5074920" cy="0"/>
+          </a:xfrm>
+          <a:prstGeom prst="line">
+            <a:avLst/>
+          </a:prstGeom>
+          <a:noFill/>
+          <a:ln w="6350">
+            <a:solidFill>
+              <a:srgbClr val="F0F0F0"/>
+            </a:solidFill>
+            <a:prstDash val="solid"/>
+          </a:ln>
+        </p:spPr>
+      </p:sp>
+      <p:sp>
+        <p:nvSpPr>
+          <p:cNvPr id="64" name="Text 62"/>
+          <p:cNvSpPr/>
+          <p:nvPr/>
+        </p:nvSpPr>
+        <p:spPr>
+          <a:xfrm>
+            <a:off x="6336792" y="4535424"/>
+            <a:ext cx="2194560" cy="320040"/>
+          </a:xfrm>
+          <a:prstGeom prst="rect">
+            <a:avLst/>
+          </a:prstGeom>
+          <a:noFill/>
+          <a:ln/>
+        </p:spPr>
+        <p:txBody>
+          <a:bodyPr wrap="square" lIns="0" tIns="0" rIns="0" bIns="0" rtlCol="0" anchor="ctr"/>
+          <a:lstStyle/>
+          <a:p>
+            <a:pPr algn="l" indent="0" marL="0">
+              <a:lnSpc>
+                <a:spcPct val="130000"/>
+              </a:lnSpc>
+              <a:buNone/>
+            </a:pPr>
+            <a:r>
+              <a:rPr lang="en-US" sz="1150" dirty="0">
+                <a:solidFill>
+                  <a:srgbClr val="1D1D1F"/>
+                </a:solidFill>
+                <a:latin typeface="Pretendard Medium" pitchFamily="34" charset="0"/>
+                <a:ea typeface="Pretendard Medium" pitchFamily="34" charset="-122"/>
+                <a:cs typeface="Pretendard Medium" pitchFamily="34" charset="-120"/>
+              </a:rPr>
+              <a:t>데이터 연결</a:t>
+            </a:r>
+            <a:endParaRPr lang="en-US" sz="1150" dirty="0"/>
+          </a:p>
+        </p:txBody>
+      </p:sp>
+      <p:sp>
+        <p:nvSpPr>
+          <p:cNvPr id="65" name="Text 63"/>
+          <p:cNvSpPr/>
+          <p:nvPr/>
+        </p:nvSpPr>
+        <p:spPr>
+          <a:xfrm>
+            <a:off x="8577072" y="4535424"/>
+            <a:ext cx="365760" cy="320040"/>
+          </a:xfrm>
+          <a:prstGeom prst="rect">
+            <a:avLst/>
+          </a:prstGeom>
+          <a:noFill/>
+          <a:ln/>
+        </p:spPr>
+        <p:txBody>
+          <a:bodyPr wrap="square" lIns="0" tIns="0" rIns="0" bIns="0" rtlCol="0" anchor="ctr"/>
+          <a:lstStyle/>
+          <a:p>
+            <a:pPr algn="l" indent="0" marL="0">
+              <a:lnSpc>
+                <a:spcPct val="130000"/>
+              </a:lnSpc>
+              <a:buNone/>
+            </a:pPr>
+            <a:r>
+              <a:rPr lang="en-US" sz="1150" dirty="0">
+                <a:solidFill>
+                  <a:srgbClr val="6E6E73"/>
+                </a:solidFill>
+                <a:latin typeface="Pretendard SemiBold" pitchFamily="34" charset="0"/>
+                <a:ea typeface="Pretendard SemiBold" pitchFamily="34" charset="-122"/>
+                <a:cs typeface="Pretendard SemiBold" pitchFamily="34" charset="-120"/>
+              </a:rPr>
+              <a:t>○</a:t>
+            </a:r>
+            <a:endParaRPr lang="en-US" sz="1150" dirty="0"/>
+          </a:p>
+        </p:txBody>
+      </p:sp>
+      <p:sp>
+        <p:nvSpPr>
+          <p:cNvPr id="66" name="Text 64"/>
+          <p:cNvSpPr/>
+          <p:nvPr/>
+        </p:nvSpPr>
+        <p:spPr>
+          <a:xfrm>
+            <a:off x="9034272" y="4535424"/>
+            <a:ext cx="2377440" cy="320040"/>
+          </a:xfrm>
+          <a:prstGeom prst="rect">
+            <a:avLst/>
+          </a:prstGeom>
+          <a:noFill/>
+          <a:ln/>
+        </p:spPr>
+        <p:txBody>
+          <a:bodyPr wrap="square" lIns="0" tIns="0" rIns="0" bIns="0" rtlCol="0" anchor="ctr"/>
+          <a:lstStyle/>
+          <a:p>
+            <a:pPr algn="l" indent="0" marL="0">
+              <a:lnSpc>
+                <a:spcPct val="130000"/>
+              </a:lnSpc>
+              <a:buNone/>
+            </a:pPr>
+            <a:r>
+              <a:rPr lang="en-US" sz="1050" dirty="0">
+                <a:solidFill>
+                  <a:srgbClr val="55555A"/>
+                </a:solidFill>
+                <a:latin typeface="Pretendard" pitchFamily="34" charset="0"/>
+                <a:ea typeface="Pretendard" pitchFamily="34" charset="-122"/>
+                <a:cs typeface="Pretendard" pitchFamily="34" charset="-120"/>
+              </a:rPr>
+              <a:t>— 없음</a:t>
+            </a:r>
+            <a:endParaRPr lang="en-US" sz="1050" dirty="0"/>
+          </a:p>
+        </p:txBody>
+      </p:sp>
+      <p:sp>
+        <p:nvSpPr>
+          <p:cNvPr id="67" name="Shape 65"/>
+          <p:cNvSpPr/>
+          <p:nvPr/>
+        </p:nvSpPr>
+        <p:spPr>
+          <a:xfrm>
+            <a:off x="6336792" y="4882896"/>
+            <a:ext cx="5074920" cy="0"/>
+          </a:xfrm>
+          <a:prstGeom prst="line">
+            <a:avLst/>
+          </a:prstGeom>
+          <a:noFill/>
+          <a:ln w="6350">
+            <a:solidFill>
+              <a:srgbClr val="F0F0F0"/>
+            </a:solidFill>
+            <a:prstDash val="solid"/>
+          </a:ln>
+        </p:spPr>
+      </p:sp>
+      <p:sp>
+        <p:nvSpPr>
+          <p:cNvPr id="68" name="Text 66"/>
+          <p:cNvSpPr/>
+          <p:nvPr/>
+        </p:nvSpPr>
+        <p:spPr>
+          <a:xfrm>
+            <a:off x="6336792" y="4901184"/>
+            <a:ext cx="2194560" cy="320040"/>
+          </a:xfrm>
+          <a:prstGeom prst="rect">
+            <a:avLst/>
+          </a:prstGeom>
+          <a:noFill/>
+          <a:ln/>
+        </p:spPr>
+        <p:txBody>
+          <a:bodyPr wrap="square" lIns="0" tIns="0" rIns="0" bIns="0" rtlCol="0" anchor="ctr"/>
+          <a:lstStyle/>
+          <a:p>
+            <a:pPr algn="l" indent="0" marL="0">
+              <a:lnSpc>
+                <a:spcPct val="130000"/>
+              </a:lnSpc>
+              <a:buNone/>
+            </a:pPr>
+            <a:r>
+              <a:rPr lang="en-US" sz="1150" dirty="0">
+                <a:solidFill>
+                  <a:srgbClr val="1D1D1F"/>
+                </a:solidFill>
+                <a:latin typeface="Pretendard Medium" pitchFamily="34" charset="0"/>
+                <a:ea typeface="Pretendard Medium" pitchFamily="34" charset="-122"/>
+                <a:cs typeface="Pretendard Medium" pitchFamily="34" charset="-120"/>
+              </a:rPr>
+              <a:t>회원가입</a:t>
+            </a:r>
+            <a:endParaRPr lang="en-US" sz="1150" dirty="0"/>
+          </a:p>
+        </p:txBody>
+      </p:sp>
+      <p:sp>
+        <p:nvSpPr>
+          <p:cNvPr id="69" name="Text 67"/>
+          <p:cNvSpPr/>
+          <p:nvPr/>
+        </p:nvSpPr>
+        <p:spPr>
+          <a:xfrm>
+            <a:off x="8577072" y="4901184"/>
+            <a:ext cx="365760" cy="320040"/>
+          </a:xfrm>
+          <a:prstGeom prst="rect">
+            <a:avLst/>
+          </a:prstGeom>
+          <a:noFill/>
+          <a:ln/>
+        </p:spPr>
+        <p:txBody>
+          <a:bodyPr wrap="square" lIns="0" tIns="0" rIns="0" bIns="0" rtlCol="0" anchor="ctr"/>
+          <a:lstStyle/>
+          <a:p>
+            <a:pPr algn="l" indent="0" marL="0">
+              <a:lnSpc>
+                <a:spcPct val="130000"/>
+              </a:lnSpc>
+              <a:buNone/>
+            </a:pPr>
+            <a:r>
+              <a:rPr lang="en-US" sz="1150" dirty="0">
+                <a:solidFill>
+                  <a:srgbClr val="6E6E73"/>
+                </a:solidFill>
+                <a:latin typeface="Pretendard SemiBold" pitchFamily="34" charset="0"/>
+                <a:ea typeface="Pretendard SemiBold" pitchFamily="34" charset="-122"/>
+                <a:cs typeface="Pretendard SemiBold" pitchFamily="34" charset="-120"/>
+              </a:rPr>
+              <a:t>○</a:t>
+            </a:r>
+            <a:endParaRPr lang="en-US" sz="1150" dirty="0"/>
+          </a:p>
+        </p:txBody>
+      </p:sp>
+      <p:sp>
+        <p:nvSpPr>
+          <p:cNvPr id="70" name="Text 68"/>
+          <p:cNvSpPr/>
+          <p:nvPr/>
+        </p:nvSpPr>
+        <p:spPr>
+          <a:xfrm>
+            <a:off x="9034272" y="4901184"/>
+            <a:ext cx="2377440" cy="320040"/>
+          </a:xfrm>
+          <a:prstGeom prst="rect">
+            <a:avLst/>
+          </a:prstGeom>
+          <a:noFill/>
+          <a:ln/>
+        </p:spPr>
+        <p:txBody>
+          <a:bodyPr wrap="square" lIns="0" tIns="0" rIns="0" bIns="0" rtlCol="0" anchor="ctr"/>
+          <a:lstStyle/>
+          <a:p>
+            <a:pPr algn="l" indent="0" marL="0">
+              <a:lnSpc>
+                <a:spcPct val="130000"/>
+              </a:lnSpc>
+              <a:buNone/>
+            </a:pPr>
+            <a:r>
+              <a:rPr lang="en-US" sz="1050" dirty="0">
+                <a:solidFill>
+                  <a:srgbClr val="55555A"/>
+                </a:solidFill>
+                <a:latin typeface="Pretendard" pitchFamily="34" charset="0"/>
+                <a:ea typeface="Pretendard" pitchFamily="34" charset="-122"/>
+                <a:cs typeface="Pretendard" pitchFamily="34" charset="-120"/>
+              </a:rPr>
+              <a:t>— 없음</a:t>
+            </a:r>
+            <a:endParaRPr lang="en-US" sz="1050" dirty="0"/>
+          </a:p>
+        </p:txBody>
+      </p:sp>
+      <p:sp>
+        <p:nvSpPr>
+          <p:cNvPr id="71" name="Shape 69"/>
+          <p:cNvSpPr/>
+          <p:nvPr/>
+        </p:nvSpPr>
+        <p:spPr>
+          <a:xfrm>
+            <a:off x="6336792" y="5248656"/>
+            <a:ext cx="5074920" cy="0"/>
+          </a:xfrm>
+          <a:prstGeom prst="line">
+            <a:avLst/>
+          </a:prstGeom>
+          <a:noFill/>
+          <a:ln w="6350">
+            <a:solidFill>
+              <a:srgbClr val="F0F0F0"/>
+            </a:solidFill>
+            <a:prstDash val="solid"/>
+          </a:ln>
+        </p:spPr>
+      </p:sp>
+      <p:sp>
+        <p:nvSpPr>
+          <p:cNvPr id="72" name="Text 70"/>
+          <p:cNvSpPr/>
+          <p:nvPr/>
+        </p:nvSpPr>
+        <p:spPr>
+          <a:xfrm>
+            <a:off x="6336792" y="5266944"/>
+            <a:ext cx="2194560" cy="320040"/>
+          </a:xfrm>
+          <a:prstGeom prst="rect">
+            <a:avLst/>
+          </a:prstGeom>
+          <a:noFill/>
+          <a:ln/>
+        </p:spPr>
+        <p:txBody>
+          <a:bodyPr wrap="square" lIns="0" tIns="0" rIns="0" bIns="0" rtlCol="0" anchor="ctr"/>
+          <a:lstStyle/>
+          <a:p>
+            <a:pPr algn="l" indent="0" marL="0">
+              <a:lnSpc>
+                <a:spcPct val="130000"/>
+              </a:lnSpc>
+              <a:buNone/>
+            </a:pPr>
+            <a:r>
+              <a:rPr lang="en-US" sz="1150" dirty="0">
+                <a:solidFill>
+                  <a:srgbClr val="1D1D1F"/>
+                </a:solidFill>
+                <a:latin typeface="Pretendard Medium" pitchFamily="34" charset="0"/>
+                <a:ea typeface="Pretendard Medium" pitchFamily="34" charset="-122"/>
+                <a:cs typeface="Pretendard Medium" pitchFamily="34" charset="-120"/>
+              </a:rPr>
+              <a:t>템플릿 페이지 생성</a:t>
+            </a:r>
+            <a:endParaRPr lang="en-US" sz="1150" dirty="0"/>
+          </a:p>
+        </p:txBody>
+      </p:sp>
+      <p:sp>
+        <p:nvSpPr>
+          <p:cNvPr id="73" name="Text 71"/>
+          <p:cNvSpPr/>
+          <p:nvPr/>
+        </p:nvSpPr>
+        <p:spPr>
+          <a:xfrm>
+            <a:off x="8577072" y="5266944"/>
+            <a:ext cx="365760" cy="320040"/>
+          </a:xfrm>
+          <a:prstGeom prst="rect">
+            <a:avLst/>
+          </a:prstGeom>
+          <a:noFill/>
+          <a:ln/>
+        </p:spPr>
+        <p:txBody>
+          <a:bodyPr wrap="square" lIns="0" tIns="0" rIns="0" bIns="0" rtlCol="0" anchor="ctr"/>
+          <a:lstStyle/>
+          <a:p>
+            <a:pPr algn="l" indent="0" marL="0">
+              <a:lnSpc>
+                <a:spcPct val="130000"/>
+              </a:lnSpc>
+              <a:buNone/>
+            </a:pPr>
+            <a:r>
+              <a:rPr lang="en-US" sz="1150" dirty="0">
+                <a:solidFill>
+                  <a:srgbClr val="6E6E73"/>
+                </a:solidFill>
+                <a:latin typeface="Pretendard SemiBold" pitchFamily="34" charset="0"/>
+                <a:ea typeface="Pretendard SemiBold" pitchFamily="34" charset="-122"/>
+                <a:cs typeface="Pretendard SemiBold" pitchFamily="34" charset="-120"/>
+              </a:rPr>
+              <a:t>◐</a:t>
+            </a:r>
+            <a:endParaRPr lang="en-US" sz="1150" dirty="0"/>
+          </a:p>
+        </p:txBody>
+      </p:sp>
+      <p:sp>
+        <p:nvSpPr>
+          <p:cNvPr id="74" name="Text 72"/>
+          <p:cNvSpPr/>
+          <p:nvPr/>
+        </p:nvSpPr>
+        <p:spPr>
+          <a:xfrm>
+            <a:off x="9034272" y="5266944"/>
+            <a:ext cx="2377440" cy="320040"/>
+          </a:xfrm>
+          <a:prstGeom prst="rect">
+            <a:avLst/>
+          </a:prstGeom>
+          <a:noFill/>
+          <a:ln/>
+        </p:spPr>
+        <p:txBody>
+          <a:bodyPr wrap="square" lIns="0" tIns="0" rIns="0" bIns="0" rtlCol="0" anchor="ctr"/>
+          <a:lstStyle/>
+          <a:p>
+            <a:pPr algn="l" indent="0" marL="0">
+              <a:lnSpc>
+                <a:spcPct val="130000"/>
+              </a:lnSpc>
+              <a:buNone/>
+            </a:pPr>
+            <a:r>
+              <a:rPr lang="en-US" sz="1050" dirty="0">
+                <a:solidFill>
+                  <a:srgbClr val="55555A"/>
+                </a:solidFill>
+                <a:latin typeface="Pretendard" pitchFamily="34" charset="0"/>
+                <a:ea typeface="Pretendard" pitchFamily="34" charset="-122"/>
+                <a:cs typeface="Pretendard" pitchFamily="34" charset="-120"/>
+              </a:rPr>
+              <a:t>[T] 1-1 워크플로우</a:t>
+            </a:r>
+            <a:endParaRPr lang="en-US" sz="1050" dirty="0"/>
+          </a:p>
+        </p:txBody>
+      </p:sp>
+      <p:sp>
+        <p:nvSpPr>
+          <p:cNvPr id="75" name="Text 73"/>
+          <p:cNvSpPr/>
+          <p:nvPr/>
+        </p:nvSpPr>
+        <p:spPr>
+          <a:xfrm>
+            <a:off x="777240" y="5870448"/>
+            <a:ext cx="10637215" cy="274320"/>
+          </a:xfrm>
+          <a:prstGeom prst="rect">
+            <a:avLst/>
+          </a:prstGeom>
+          <a:noFill/>
+          <a:ln/>
+        </p:spPr>
+        <p:txBody>
+          <a:bodyPr wrap="square" lIns="0" tIns="0" rIns="0" bIns="0" rtlCol="0" anchor="t"/>
+          <a:lstStyle/>
+          <a:p>
+            <a:pPr algn="l" indent="0" marL="0">
+              <a:lnSpc>
+                <a:spcPct val="130000"/>
+              </a:lnSpc>
+              <a:buNone/>
+            </a:pPr>
+            <a:r>
+              <a:rPr lang="en-US" sz="1050" dirty="0">
+                <a:solidFill>
+                  <a:srgbClr val="6E6E73"/>
+                </a:solidFill>
+                <a:latin typeface="Pretendard Medium" pitchFamily="34" charset="0"/>
+                <a:ea typeface="Pretendard Medium" pitchFamily="34" charset="-122"/>
+                <a:cs typeface="Pretendard Medium" pitchFamily="34" charset="-120"/>
+              </a:rPr>
+              <a:t>[T] cdbd-templates · [SV] cdbd-design-service · 내용은 복제하지 않고 ‘위치’만 가리킴 · 전체 약 40개 중 일부</a:t>
+            </a:r>
+            <a:endParaRPr lang="en-US" sz="1050" dirty="0"/>
           </a:p>
         </p:txBody>
       </p:sp>
@@ -4739,7 +5806,7 @@
                 <a:ea typeface="Pretendard" pitchFamily="34" charset="-122"/>
                 <a:cs typeface="Pretendard" pitchFamily="34" charset="-120"/>
               </a:rPr>
-              <a:t>‘4. 카드 기능 정의’ 폴더 안엔 카드 15종이 낱개 파일(4-3~4-17)로 들어 있습니다.</a:t>
+              <a:t>이 볼트의 _기능별 경로 가이드.md 안엔 ‘이렇게 말하면 → 이 파일’이 이렇게 들어갑니다.</a:t>
             </a:r>
             <a:endParaRPr lang="en-US" sz="1500" dirty="0"/>
           </a:p>
@@ -5054,7 +6121,7 @@
                 <a:ea typeface="Pretendard" pitchFamily="34" charset="-122"/>
                 <a:cs typeface="Pretendard" pitchFamily="34" charset="-120"/>
               </a:rPr>
-              <a:t>기능 목록</a:t>
+              <a:t>→ 오른쪽</a:t>
             </a:r>
             <a:endParaRPr lang="en-US" sz="1050" dirty="0"/>
           </a:p>
@@ -5426,11 +6493,11 @@
             <a:r>
               <a:rPr lang="en-US" sz="1100" dirty="0">
                 <a:solidFill>
-                  <a:srgbClr val="6C4CFF"/>
-                </a:solidFill>
-                <a:latin typeface="Pretendard SemiBold" pitchFamily="34" charset="0"/>
-                <a:ea typeface="Pretendard SemiBold" pitchFamily="34" charset="-122"/>
-                <a:cs typeface="Pretendard SemiBold" pitchFamily="34" charset="-120"/>
+                  <a:srgbClr val="1D1D1F"/>
+                </a:solidFill>
+                <a:latin typeface="Pretendard Medium" pitchFamily="34" charset="0"/>
+                <a:ea typeface="Pretendard Medium" pitchFamily="34" charset="-122"/>
+                <a:cs typeface="Pretendard Medium" pitchFamily="34" charset="-120"/>
               </a:rPr>
               <a:t>    ├─ 4. 카드 기능 정의/</a:t>
             </a:r>
@@ -5474,7 +6541,7 @@
                 <a:ea typeface="Pretendard" pitchFamily="34" charset="-122"/>
                 <a:cs typeface="Pretendard" pitchFamily="34" charset="-120"/>
               </a:rPr>
-              <a:t>카드 15종 →</a:t>
+              <a:t>카드 15종</a:t>
             </a:r>
             <a:endParaRPr lang="en-US" sz="1050" dirty="0"/>
           </a:p>
@@ -5599,7 +6666,7 @@
         </p:nvSpPr>
         <p:spPr>
           <a:xfrm>
-            <a:off x="6263640" y="2578608"/>
+            <a:off x="6263640" y="2560320"/>
             <a:ext cx="4876495" cy="274320"/>
           </a:xfrm>
           <a:prstGeom prst="rect">
@@ -5627,7 +6694,7 @@
                 <a:ea typeface="Pretendard" pitchFamily="34" charset="-122"/>
                 <a:cs typeface="Pretendard" pitchFamily="34" charset="-120"/>
               </a:rPr>
-              <a:t>4. 카드 기능 정의/ — 카드 15종</a:t>
+              <a:t>_기능별 경로 가이드.md</a:t>
             </a:r>
             <a:endParaRPr lang="en-US" sz="1350" dirty="0"/>
           </a:p>
@@ -5641,17 +6708,17 @@
         </p:nvSpPr>
         <p:spPr>
           <a:xfrm>
-            <a:off x="6263640" y="3127248"/>
-            <a:ext cx="457200" cy="274320"/>
-          </a:xfrm>
-          <a:prstGeom prst="rect">
-            <a:avLst/>
-          </a:prstGeom>
-          <a:noFill/>
-          <a:ln/>
-        </p:spPr>
-        <p:txBody>
-          <a:bodyPr wrap="square" lIns="0" tIns="0" rIns="0" bIns="0" rtlCol="0" anchor="ctr"/>
+            <a:off x="6263640" y="2871216"/>
+            <a:ext cx="4876495" cy="256032"/>
+          </a:xfrm>
+          <a:prstGeom prst="rect">
+            <a:avLst/>
+          </a:prstGeom>
+          <a:noFill/>
+          <a:ln/>
+        </p:spPr>
+        <p:txBody>
+          <a:bodyPr wrap="square" lIns="0" tIns="0" rIns="0" bIns="0" rtlCol="0" anchor="t"/>
           <a:lstStyle/>
           <a:p>
             <a:pPr algn="l" indent="0" marL="0">
@@ -5661,17 +6728,17 @@
               <a:buNone/>
             </a:pPr>
             <a:r>
-              <a:rPr lang="en-US" sz="1050" b="1" dirty="0">
-                <a:solidFill>
-                  <a:srgbClr val="6C4CFF"/>
+              <a:rPr lang="en-US" sz="1000" dirty="0">
+                <a:solidFill>
+                  <a:srgbClr val="6E6E73"/>
                 </a:solidFill>
                 <a:latin typeface="Pretendard" pitchFamily="34" charset="0"/>
                 <a:ea typeface="Pretendard" pitchFamily="34" charset="-122"/>
                 <a:cs typeface="Pretendard" pitchFamily="34" charset="-120"/>
               </a:rPr>
-              <a:t>4-3</a:t>
-            </a:r>
-            <a:endParaRPr lang="en-US" sz="1050" dirty="0"/>
+              <a:t>이 볼트의 기능 → 정본 파일 (내용은 복제하지 않고 가리킴)</a:t>
+            </a:r>
+            <a:endParaRPr lang="en-US" sz="1000" dirty="0"/>
           </a:p>
         </p:txBody>
       </p:sp>
@@ -5683,17 +6750,17 @@
         </p:nvSpPr>
         <p:spPr>
           <a:xfrm>
-            <a:off x="6720840" y="3127248"/>
-            <a:ext cx="1168298" cy="274320"/>
-          </a:xfrm>
-          <a:prstGeom prst="rect">
-            <a:avLst/>
-          </a:prstGeom>
-          <a:noFill/>
-          <a:ln/>
-        </p:spPr>
-        <p:txBody>
-          <a:bodyPr wrap="square" lIns="0" tIns="0" rIns="0" bIns="0" rtlCol="0" anchor="ctr"/>
+            <a:off x="6263640" y="3246120"/>
+            <a:ext cx="4876495" cy="256032"/>
+          </a:xfrm>
+          <a:prstGeom prst="rect">
+            <a:avLst/>
+          </a:prstGeom>
+          <a:noFill/>
+          <a:ln/>
+        </p:spPr>
+        <p:txBody>
+          <a:bodyPr wrap="square" lIns="0" tIns="0" rIns="0" bIns="0" rtlCol="0" anchor="t"/>
           <a:lstStyle/>
           <a:p>
             <a:pPr algn="l" indent="0" marL="0">
@@ -5707,11 +6774,11 @@
                 <a:solidFill>
                   <a:srgbClr val="1D1D1F"/>
                 </a:solidFill>
-                <a:latin typeface="Pretendard Medium" pitchFamily="34" charset="0"/>
-                <a:ea typeface="Pretendard Medium" pitchFamily="34" charset="-122"/>
-                <a:cs typeface="Pretendard Medium" pitchFamily="34" charset="-120"/>
-              </a:rPr>
-              <a:t>메뉴</a:t>
+                <a:latin typeface="Pretendard SemiBold" pitchFamily="34" charset="0"/>
+                <a:ea typeface="Pretendard SemiBold" pitchFamily="34" charset="-122"/>
+                <a:cs typeface="Pretendard SemiBold" pitchFamily="34" charset="-120"/>
+              </a:rPr>
+              <a:t>“아이콘 바꿔줘”</a:t>
             </a:r>
             <a:endParaRPr lang="en-US" sz="1150" dirty="0"/>
           </a:p>
@@ -5725,17 +6792,17 @@
         </p:nvSpPr>
         <p:spPr>
           <a:xfrm>
-            <a:off x="7889138" y="3127248"/>
-            <a:ext cx="457200" cy="274320"/>
-          </a:xfrm>
-          <a:prstGeom prst="rect">
-            <a:avLst/>
-          </a:prstGeom>
-          <a:noFill/>
-          <a:ln/>
-        </p:spPr>
-        <p:txBody>
-          <a:bodyPr wrap="square" lIns="0" tIns="0" rIns="0" bIns="0" rtlCol="0" anchor="ctr"/>
+            <a:off x="6391656" y="3465576"/>
+            <a:ext cx="4748479" cy="256032"/>
+          </a:xfrm>
+          <a:prstGeom prst="rect">
+            <a:avLst/>
+          </a:prstGeom>
+          <a:noFill/>
+          <a:ln/>
+        </p:spPr>
+        <p:txBody>
+          <a:bodyPr wrap="square" lIns="0" tIns="0" rIns="0" bIns="0" rtlCol="0" anchor="t"/>
           <a:lstStyle/>
           <a:p>
             <a:pPr algn="l" indent="0" marL="0">
@@ -5745,15 +6812,15 @@
               <a:buNone/>
             </a:pPr>
             <a:r>
-              <a:rPr lang="en-US" sz="1050" b="1" dirty="0">
-                <a:solidFill>
-                  <a:srgbClr val="6C4CFF"/>
+              <a:rPr lang="en-US" sz="1050" dirty="0">
+                <a:solidFill>
+                  <a:srgbClr val="55555A"/>
                 </a:solidFill>
                 <a:latin typeface="Pretendard" pitchFamily="34" charset="0"/>
                 <a:ea typeface="Pretendard" pitchFamily="34" charset="-122"/>
                 <a:cs typeface="Pretendard" pitchFamily="34" charset="-120"/>
               </a:rPr>
-              <a:t>4-4</a:t>
+              <a:t>→ skills/cdbd-icon-use/ · 2-1 아이콘</a:t>
             </a:r>
             <a:endParaRPr lang="en-US" sz="1050" dirty="0"/>
           </a:p>
@@ -5767,17 +6834,17 @@
         </p:nvSpPr>
         <p:spPr>
           <a:xfrm>
-            <a:off x="8346338" y="3127248"/>
-            <a:ext cx="1168298" cy="274320"/>
-          </a:xfrm>
-          <a:prstGeom prst="rect">
-            <a:avLst/>
-          </a:prstGeom>
-          <a:noFill/>
-          <a:ln/>
-        </p:spPr>
-        <p:txBody>
-          <a:bodyPr wrap="square" lIns="0" tIns="0" rIns="0" bIns="0" rtlCol="0" anchor="ctr"/>
+            <a:off x="6263640" y="3703320"/>
+            <a:ext cx="4876495" cy="256032"/>
+          </a:xfrm>
+          <a:prstGeom prst="rect">
+            <a:avLst/>
+          </a:prstGeom>
+          <a:noFill/>
+          <a:ln/>
+        </p:spPr>
+        <p:txBody>
+          <a:bodyPr wrap="square" lIns="0" tIns="0" rIns="0" bIns="0" rtlCol="0" anchor="t"/>
           <a:lstStyle/>
           <a:p>
             <a:pPr algn="l" indent="0" marL="0">
@@ -5791,11 +6858,11 @@
                 <a:solidFill>
                   <a:srgbClr val="1D1D1F"/>
                 </a:solidFill>
-                <a:latin typeface="Pretendard Medium" pitchFamily="34" charset="0"/>
-                <a:ea typeface="Pretendard Medium" pitchFamily="34" charset="-122"/>
-                <a:cs typeface="Pretendard Medium" pitchFamily="34" charset="-120"/>
-              </a:rPr>
-              <a:t>프로필</a:t>
+                <a:latin typeface="Pretendard SemiBold" pitchFamily="34" charset="0"/>
+                <a:ea typeface="Pretendard SemiBold" pitchFamily="34" charset="-122"/>
+                <a:cs typeface="Pretendard SemiBold" pitchFamily="34" charset="-120"/>
+              </a:rPr>
+              <a:t>“신규 아이콘 제작”</a:t>
             </a:r>
             <a:endParaRPr lang="en-US" sz="1150" dirty="0"/>
           </a:p>
@@ -5809,17 +6876,17 @@
         </p:nvSpPr>
         <p:spPr>
           <a:xfrm>
-            <a:off x="9514637" y="3127248"/>
-            <a:ext cx="457200" cy="274320"/>
-          </a:xfrm>
-          <a:prstGeom prst="rect">
-            <a:avLst/>
-          </a:prstGeom>
-          <a:noFill/>
-          <a:ln/>
-        </p:spPr>
-        <p:txBody>
-          <a:bodyPr wrap="square" lIns="0" tIns="0" rIns="0" bIns="0" rtlCol="0" anchor="ctr"/>
+            <a:off x="6391656" y="3922776"/>
+            <a:ext cx="4748479" cy="256032"/>
+          </a:xfrm>
+          <a:prstGeom prst="rect">
+            <a:avLst/>
+          </a:prstGeom>
+          <a:noFill/>
+          <a:ln/>
+        </p:spPr>
+        <p:txBody>
+          <a:bodyPr wrap="square" lIns="0" tIns="0" rIns="0" bIns="0" rtlCol="0" anchor="t"/>
           <a:lstStyle/>
           <a:p>
             <a:pPr algn="l" indent="0" marL="0">
@@ -5829,15 +6896,15 @@
               <a:buNone/>
             </a:pPr>
             <a:r>
-              <a:rPr lang="en-US" sz="1050" b="1" dirty="0">
-                <a:solidFill>
-                  <a:srgbClr val="6C4CFF"/>
+              <a:rPr lang="en-US" sz="1050" dirty="0">
+                <a:solidFill>
+                  <a:srgbClr val="55555A"/>
                 </a:solidFill>
                 <a:latin typeface="Pretendard" pitchFamily="34" charset="0"/>
                 <a:ea typeface="Pretendard" pitchFamily="34" charset="-122"/>
                 <a:cs typeface="Pretendard" pitchFamily="34" charset="-120"/>
               </a:rPr>
-              <a:t>4-5</a:t>
+              <a:t>→ skills/cdbd-icon-creation/ · 5-1</a:t>
             </a:r>
             <a:endParaRPr lang="en-US" sz="1050" dirty="0"/>
           </a:p>
@@ -5851,17 +6918,17 @@
         </p:nvSpPr>
         <p:spPr>
           <a:xfrm>
-            <a:off x="9971837" y="3127248"/>
-            <a:ext cx="1168298" cy="274320"/>
-          </a:xfrm>
-          <a:prstGeom prst="rect">
-            <a:avLst/>
-          </a:prstGeom>
-          <a:noFill/>
-          <a:ln/>
-        </p:spPr>
-        <p:txBody>
-          <a:bodyPr wrap="square" lIns="0" tIns="0" rIns="0" bIns="0" rtlCol="0" anchor="ctr"/>
+            <a:off x="6263640" y="4160520"/>
+            <a:ext cx="4876495" cy="256032"/>
+          </a:xfrm>
+          <a:prstGeom prst="rect">
+            <a:avLst/>
+          </a:prstGeom>
+          <a:noFill/>
+          <a:ln/>
+        </p:spPr>
+        <p:txBody>
+          <a:bodyPr wrap="square" lIns="0" tIns="0" rIns="0" bIns="0" rtlCol="0" anchor="t"/>
           <a:lstStyle/>
           <a:p>
             <a:pPr algn="l" indent="0" marL="0">
@@ -5875,11 +6942,11 @@
                 <a:solidFill>
                   <a:srgbClr val="1D1D1F"/>
                 </a:solidFill>
-                <a:latin typeface="Pretendard Medium" pitchFamily="34" charset="0"/>
-                <a:ea typeface="Pretendard Medium" pitchFamily="34" charset="-122"/>
-                <a:cs typeface="Pretendard Medium" pitchFamily="34" charset="-120"/>
-              </a:rPr>
-              <a:t>텍스트</a:t>
+                <a:latin typeface="Pretendard SemiBold" pitchFamily="34" charset="0"/>
+                <a:ea typeface="Pretendard SemiBold" pitchFamily="34" charset="-122"/>
+                <a:cs typeface="Pretendard SemiBold" pitchFamily="34" charset="-120"/>
+              </a:rPr>
+              <a:t>“카드 스펙 알려줘”</a:t>
             </a:r>
             <a:endParaRPr lang="en-US" sz="1150" dirty="0"/>
           </a:p>
@@ -5893,17 +6960,17 @@
         </p:nvSpPr>
         <p:spPr>
           <a:xfrm>
-            <a:off x="6263640" y="3630168"/>
-            <a:ext cx="457200" cy="274320"/>
-          </a:xfrm>
-          <a:prstGeom prst="rect">
-            <a:avLst/>
-          </a:prstGeom>
-          <a:noFill/>
-          <a:ln/>
-        </p:spPr>
-        <p:txBody>
-          <a:bodyPr wrap="square" lIns="0" tIns="0" rIns="0" bIns="0" rtlCol="0" anchor="ctr"/>
+            <a:off x="6391656" y="4379976"/>
+            <a:ext cx="4748479" cy="256032"/>
+          </a:xfrm>
+          <a:prstGeom prst="rect">
+            <a:avLst/>
+          </a:prstGeom>
+          <a:noFill/>
+          <a:ln/>
+        </p:spPr>
+        <p:txBody>
+          <a:bodyPr wrap="square" lIns="0" tIns="0" rIns="0" bIns="0" rtlCol="0" anchor="t"/>
           <a:lstStyle/>
           <a:p>
             <a:pPr algn="l" indent="0" marL="0">
@@ -5913,15 +6980,15 @@
               <a:buNone/>
             </a:pPr>
             <a:r>
-              <a:rPr lang="en-US" sz="1050" b="1" dirty="0">
-                <a:solidFill>
-                  <a:srgbClr val="6C4CFF"/>
+              <a:rPr lang="en-US" sz="1050" dirty="0">
+                <a:solidFill>
+                  <a:srgbClr val="55555A"/>
                 </a:solidFill>
                 <a:latin typeface="Pretendard" pitchFamily="34" charset="0"/>
                 <a:ea typeface="Pretendard" pitchFamily="34" charset="-122"/>
                 <a:cs typeface="Pretendard" pitchFamily="34" charset="-120"/>
               </a:rPr>
-              <a:t>4-6</a:t>
+              <a:t>→ 4. 카드 기능 정의/ (4-3~4-17)</a:t>
             </a:r>
             <a:endParaRPr lang="en-US" sz="1050" dirty="0"/>
           </a:p>
@@ -5935,17 +7002,17 @@
         </p:nvSpPr>
         <p:spPr>
           <a:xfrm>
-            <a:off x="6720840" y="3630168"/>
-            <a:ext cx="1168298" cy="274320"/>
-          </a:xfrm>
-          <a:prstGeom prst="rect">
-            <a:avLst/>
-          </a:prstGeom>
-          <a:noFill/>
-          <a:ln/>
-        </p:spPr>
-        <p:txBody>
-          <a:bodyPr wrap="square" lIns="0" tIns="0" rIns="0" bIns="0" rtlCol="0" anchor="ctr"/>
+            <a:off x="6263640" y="4617720"/>
+            <a:ext cx="4876495" cy="256032"/>
+          </a:xfrm>
+          <a:prstGeom prst="rect">
+            <a:avLst/>
+          </a:prstGeom>
+          <a:noFill/>
+          <a:ln/>
+        </p:spPr>
+        <p:txBody>
+          <a:bodyPr wrap="square" lIns="0" tIns="0" rIns="0" bIns="0" rtlCol="0" anchor="t"/>
           <a:lstStyle/>
           <a:p>
             <a:pPr algn="l" indent="0" marL="0">
@@ -5959,11 +7026,11 @@
                 <a:solidFill>
                   <a:srgbClr val="1D1D1F"/>
                 </a:solidFill>
-                <a:latin typeface="Pretendard Medium" pitchFamily="34" charset="0"/>
-                <a:ea typeface="Pretendard Medium" pitchFamily="34" charset="-122"/>
-                <a:cs typeface="Pretendard Medium" pitchFamily="34" charset="-120"/>
-              </a:rPr>
-              <a:t>이미지</a:t>
+                <a:latin typeface="Pretendard SemiBold" pitchFamily="34" charset="0"/>
+                <a:ea typeface="Pretendard SemiBold" pitchFamily="34" charset="-122"/>
+                <a:cs typeface="Pretendard SemiBold" pitchFamily="34" charset="-120"/>
+              </a:rPr>
+              <a:t>“컬러·폰트 토큰”</a:t>
             </a:r>
             <a:endParaRPr lang="en-US" sz="1150" dirty="0"/>
           </a:p>
@@ -5977,17 +7044,17 @@
         </p:nvSpPr>
         <p:spPr>
           <a:xfrm>
-            <a:off x="7889138" y="3630168"/>
-            <a:ext cx="457200" cy="274320"/>
-          </a:xfrm>
-          <a:prstGeom prst="rect">
-            <a:avLst/>
-          </a:prstGeom>
-          <a:noFill/>
-          <a:ln/>
-        </p:spPr>
-        <p:txBody>
-          <a:bodyPr wrap="square" lIns="0" tIns="0" rIns="0" bIns="0" rtlCol="0" anchor="ctr"/>
+            <a:off x="6391656" y="4837176"/>
+            <a:ext cx="4748479" cy="256032"/>
+          </a:xfrm>
+          <a:prstGeom prst="rect">
+            <a:avLst/>
+          </a:prstGeom>
+          <a:noFill/>
+          <a:ln/>
+        </p:spPr>
+        <p:txBody>
+          <a:bodyPr wrap="square" lIns="0" tIns="0" rIns="0" bIns="0" rtlCol="0" anchor="t"/>
           <a:lstStyle/>
           <a:p>
             <a:pPr algn="l" indent="0" marL="0">
@@ -5997,15 +7064,15 @@
               <a:buNone/>
             </a:pPr>
             <a:r>
-              <a:rPr lang="en-US" sz="1050" b="1" dirty="0">
-                <a:solidFill>
-                  <a:srgbClr val="6C4CFF"/>
+              <a:rPr lang="en-US" sz="1050" dirty="0">
+                <a:solidFill>
+                  <a:srgbClr val="55555A"/>
                 </a:solidFill>
                 <a:latin typeface="Pretendard" pitchFamily="34" charset="0"/>
                 <a:ea typeface="Pretendard" pitchFamily="34" charset="-122"/>
                 <a:cs typeface="Pretendard" pitchFamily="34" charset="-120"/>
               </a:rPr>
-              <a:t>4-7</a:t>
+              <a:t>→ 1-1 컬러 · 1-2 폰트</a:t>
             </a:r>
             <a:endParaRPr lang="en-US" sz="1050" dirty="0"/>
           </a:p>
@@ -6019,17 +7086,17 @@
         </p:nvSpPr>
         <p:spPr>
           <a:xfrm>
-            <a:off x="8346338" y="3630168"/>
-            <a:ext cx="1168298" cy="274320"/>
-          </a:xfrm>
-          <a:prstGeom prst="rect">
-            <a:avLst/>
-          </a:prstGeom>
-          <a:noFill/>
-          <a:ln/>
-        </p:spPr>
-        <p:txBody>
-          <a:bodyPr wrap="square" lIns="0" tIns="0" rIns="0" bIns="0" rtlCol="0" anchor="ctr"/>
+            <a:off x="6263640" y="5074920"/>
+            <a:ext cx="4876495" cy="256032"/>
+          </a:xfrm>
+          <a:prstGeom prst="rect">
+            <a:avLst/>
+          </a:prstGeom>
+          <a:noFill/>
+          <a:ln/>
+        </p:spPr>
+        <p:txBody>
+          <a:bodyPr wrap="square" lIns="0" tIns="0" rIns="0" bIns="0" rtlCol="0" anchor="t"/>
           <a:lstStyle/>
           <a:p>
             <a:pPr algn="l" indent="0" marL="0">
@@ -6043,11 +7110,11 @@
                 <a:solidFill>
                   <a:srgbClr val="1D1D1F"/>
                 </a:solidFill>
-                <a:latin typeface="Pretendard Medium" pitchFamily="34" charset="0"/>
-                <a:ea typeface="Pretendard Medium" pitchFamily="34" charset="-122"/>
-                <a:cs typeface="Pretendard Medium" pitchFamily="34" charset="-120"/>
-              </a:rPr>
-              <a:t>갤러리</a:t>
+                <a:latin typeface="Pretendard SemiBold" pitchFamily="34" charset="0"/>
+                <a:ea typeface="Pretendard SemiBold" pitchFamily="34" charset="-122"/>
+                <a:cs typeface="Pretendard SemiBold" pitchFamily="34" charset="-120"/>
+              </a:rPr>
+              <a:t>“컴포넌트 일괄 교체”</a:t>
             </a:r>
             <a:endParaRPr lang="en-US" sz="1150" dirty="0"/>
           </a:p>
@@ -6061,17 +7128,17 @@
         </p:nvSpPr>
         <p:spPr>
           <a:xfrm>
-            <a:off x="9514637" y="3630168"/>
-            <a:ext cx="457200" cy="274320"/>
-          </a:xfrm>
-          <a:prstGeom prst="rect">
-            <a:avLst/>
-          </a:prstGeom>
-          <a:noFill/>
-          <a:ln/>
-        </p:spPr>
-        <p:txBody>
-          <a:bodyPr wrap="square" lIns="0" tIns="0" rIns="0" bIns="0" rtlCol="0" anchor="ctr"/>
+            <a:off x="6391656" y="5294376"/>
+            <a:ext cx="4748479" cy="256032"/>
+          </a:xfrm>
+          <a:prstGeom prst="rect">
+            <a:avLst/>
+          </a:prstGeom>
+          <a:noFill/>
+          <a:ln/>
+        </p:spPr>
+        <p:txBody>
+          <a:bodyPr wrap="square" lIns="0" tIns="0" rIns="0" bIns="0" rtlCol="0" anchor="t"/>
           <a:lstStyle/>
           <a:p>
             <a:pPr algn="l" indent="0" marL="0">
@@ -6081,15 +7148,15 @@
               <a:buNone/>
             </a:pPr>
             <a:r>
-              <a:rPr lang="en-US" sz="1050" b="1" dirty="0">
-                <a:solidFill>
-                  <a:srgbClr val="6C4CFF"/>
+              <a:rPr lang="en-US" sz="1050" dirty="0">
+                <a:solidFill>
+                  <a:srgbClr val="55555A"/>
                 </a:solidFill>
                 <a:latin typeface="Pretendard" pitchFamily="34" charset="0"/>
                 <a:ea typeface="Pretendard" pitchFamily="34" charset="-122"/>
                 <a:cs typeface="Pretendard" pitchFamily="34" charset="-120"/>
               </a:rPr>
-              <a:t>4-8</a:t>
+              <a:t>→ 컴포넌트 교체 작업/</a:t>
             </a:r>
             <a:endParaRPr lang="en-US" sz="1050" dirty="0"/>
           </a:p>
@@ -6103,17 +7170,17 @@
         </p:nvSpPr>
         <p:spPr>
           <a:xfrm>
-            <a:off x="9971837" y="3630168"/>
-            <a:ext cx="1168298" cy="274320"/>
-          </a:xfrm>
-          <a:prstGeom prst="rect">
-            <a:avLst/>
-          </a:prstGeom>
-          <a:noFill/>
-          <a:ln/>
-        </p:spPr>
-        <p:txBody>
-          <a:bodyPr wrap="square" lIns="0" tIns="0" rIns="0" bIns="0" rtlCol="0" anchor="ctr"/>
+            <a:off x="6263640" y="5532120"/>
+            <a:ext cx="4876495" cy="256032"/>
+          </a:xfrm>
+          <a:prstGeom prst="rect">
+            <a:avLst/>
+          </a:prstGeom>
+          <a:noFill/>
+          <a:ln/>
+        </p:spPr>
+        <p:txBody>
+          <a:bodyPr wrap="square" lIns="0" tIns="0" rIns="0" bIns="0" rtlCol="0" anchor="t"/>
           <a:lstStyle/>
           <a:p>
             <a:pPr algn="l" indent="0" marL="0">
@@ -6127,11 +7194,11 @@
                 <a:solidFill>
                   <a:srgbClr val="1D1D1F"/>
                 </a:solidFill>
-                <a:latin typeface="Pretendard Medium" pitchFamily="34" charset="0"/>
-                <a:ea typeface="Pretendard Medium" pitchFamily="34" charset="-122"/>
-                <a:cs typeface="Pretendard Medium" pitchFamily="34" charset="-120"/>
-              </a:rPr>
-              <a:t>유튜브</a:t>
+                <a:latin typeface="Pretendard SemiBold" pitchFamily="34" charset="0"/>
+                <a:ea typeface="Pretendard SemiBold" pitchFamily="34" charset="-122"/>
+                <a:cs typeface="Pretendard SemiBold" pitchFamily="34" charset="-120"/>
+              </a:rPr>
+              <a:t>“개발 핸드오프 문서”</a:t>
             </a:r>
             <a:endParaRPr lang="en-US" sz="1150" dirty="0"/>
           </a:p>
@@ -6145,17 +7212,17 @@
         </p:nvSpPr>
         <p:spPr>
           <a:xfrm>
-            <a:off x="6263640" y="4133088"/>
-            <a:ext cx="457200" cy="274320"/>
-          </a:xfrm>
-          <a:prstGeom prst="rect">
-            <a:avLst/>
-          </a:prstGeom>
-          <a:noFill/>
-          <a:ln/>
-        </p:spPr>
-        <p:txBody>
-          <a:bodyPr wrap="square" lIns="0" tIns="0" rIns="0" bIns="0" rtlCol="0" anchor="ctr"/>
+            <a:off x="6391656" y="5751576"/>
+            <a:ext cx="4748479" cy="256032"/>
+          </a:xfrm>
+          <a:prstGeom prst="rect">
+            <a:avLst/>
+          </a:prstGeom>
+          <a:noFill/>
+          <a:ln/>
+        </p:spPr>
+        <p:txBody>
+          <a:bodyPr wrap="square" lIns="0" tIns="0" rIns="0" bIns="0" rtlCol="0" anchor="t"/>
           <a:lstStyle/>
           <a:p>
             <a:pPr algn="l" indent="0" marL="0">
@@ -6165,773 +7232,17 @@
               <a:buNone/>
             </a:pPr>
             <a:r>
-              <a:rPr lang="en-US" sz="1050" b="1" dirty="0">
-                <a:solidFill>
-                  <a:srgbClr val="6C4CFF"/>
+              <a:rPr lang="en-US" sz="1050" dirty="0">
+                <a:solidFill>
+                  <a:srgbClr val="55555A"/>
                 </a:solidFill>
                 <a:latin typeface="Pretendard" pitchFamily="34" charset="0"/>
                 <a:ea typeface="Pretendard" pitchFamily="34" charset="-122"/>
                 <a:cs typeface="Pretendard" pitchFamily="34" charset="-120"/>
               </a:rPr>
-              <a:t>4-9</a:t>
+              <a:t>→ 5-5 개발 문서 제작 가이드</a:t>
             </a:r>
             <a:endParaRPr lang="en-US" sz="1050" dirty="0"/>
-          </a:p>
-        </p:txBody>
-      </p:sp>
-      <p:sp>
-        <p:nvSpPr>
-          <p:cNvPr id="41" name="Text 39"/>
-          <p:cNvSpPr/>
-          <p:nvPr/>
-        </p:nvSpPr>
-        <p:spPr>
-          <a:xfrm>
-            <a:off x="6720840" y="4133088"/>
-            <a:ext cx="1168298" cy="274320"/>
-          </a:xfrm>
-          <a:prstGeom prst="rect">
-            <a:avLst/>
-          </a:prstGeom>
-          <a:noFill/>
-          <a:ln/>
-        </p:spPr>
-        <p:txBody>
-          <a:bodyPr wrap="square" lIns="0" tIns="0" rIns="0" bIns="0" rtlCol="0" anchor="ctr"/>
-          <a:lstStyle/>
-          <a:p>
-            <a:pPr algn="l" indent="0" marL="0">
-              <a:lnSpc>
-                <a:spcPct val="130000"/>
-              </a:lnSpc>
-              <a:buNone/>
-            </a:pPr>
-            <a:r>
-              <a:rPr lang="en-US" sz="1150" dirty="0">
-                <a:solidFill>
-                  <a:srgbClr val="1D1D1F"/>
-                </a:solidFill>
-                <a:latin typeface="Pretendard Medium" pitchFamily="34" charset="0"/>
-                <a:ea typeface="Pretendard Medium" pitchFamily="34" charset="-122"/>
-                <a:cs typeface="Pretendard Medium" pitchFamily="34" charset="-120"/>
-              </a:rPr>
-              <a:t>버튼</a:t>
-            </a:r>
-            <a:endParaRPr lang="en-US" sz="1150" dirty="0"/>
-          </a:p>
-        </p:txBody>
-      </p:sp>
-      <p:sp>
-        <p:nvSpPr>
-          <p:cNvPr id="42" name="Text 40"/>
-          <p:cNvSpPr/>
-          <p:nvPr/>
-        </p:nvSpPr>
-        <p:spPr>
-          <a:xfrm>
-            <a:off x="7889138" y="4133088"/>
-            <a:ext cx="457200" cy="274320"/>
-          </a:xfrm>
-          <a:prstGeom prst="rect">
-            <a:avLst/>
-          </a:prstGeom>
-          <a:noFill/>
-          <a:ln/>
-        </p:spPr>
-        <p:txBody>
-          <a:bodyPr wrap="square" lIns="0" tIns="0" rIns="0" bIns="0" rtlCol="0" anchor="ctr"/>
-          <a:lstStyle/>
-          <a:p>
-            <a:pPr algn="l" indent="0" marL="0">
-              <a:lnSpc>
-                <a:spcPct val="130000"/>
-              </a:lnSpc>
-              <a:buNone/>
-            </a:pPr>
-            <a:r>
-              <a:rPr lang="en-US" sz="1050" b="1" dirty="0">
-                <a:solidFill>
-                  <a:srgbClr val="6C4CFF"/>
-                </a:solidFill>
-                <a:latin typeface="Pretendard" pitchFamily="34" charset="0"/>
-                <a:ea typeface="Pretendard" pitchFamily="34" charset="-122"/>
-                <a:cs typeface="Pretendard" pitchFamily="34" charset="-120"/>
-              </a:rPr>
-              <a:t>4-10</a:t>
-            </a:r>
-            <a:endParaRPr lang="en-US" sz="1050" dirty="0"/>
-          </a:p>
-        </p:txBody>
-      </p:sp>
-      <p:sp>
-        <p:nvSpPr>
-          <p:cNvPr id="43" name="Text 41"/>
-          <p:cNvSpPr/>
-          <p:nvPr/>
-        </p:nvSpPr>
-        <p:spPr>
-          <a:xfrm>
-            <a:off x="8346338" y="4133088"/>
-            <a:ext cx="1168298" cy="274320"/>
-          </a:xfrm>
-          <a:prstGeom prst="rect">
-            <a:avLst/>
-          </a:prstGeom>
-          <a:noFill/>
-          <a:ln/>
-        </p:spPr>
-        <p:txBody>
-          <a:bodyPr wrap="square" lIns="0" tIns="0" rIns="0" bIns="0" rtlCol="0" anchor="ctr"/>
-          <a:lstStyle/>
-          <a:p>
-            <a:pPr algn="l" indent="0" marL="0">
-              <a:lnSpc>
-                <a:spcPct val="130000"/>
-              </a:lnSpc>
-              <a:buNone/>
-            </a:pPr>
-            <a:r>
-              <a:rPr lang="en-US" sz="1150" dirty="0">
-                <a:solidFill>
-                  <a:srgbClr val="1D1D1F"/>
-                </a:solidFill>
-                <a:latin typeface="Pretendard Medium" pitchFamily="34" charset="0"/>
-                <a:ea typeface="Pretendard Medium" pitchFamily="34" charset="-122"/>
-                <a:cs typeface="Pretendard Medium" pitchFamily="34" charset="-120"/>
-              </a:rPr>
-              <a:t>질문·답변</a:t>
-            </a:r>
-            <a:endParaRPr lang="en-US" sz="1150" dirty="0"/>
-          </a:p>
-        </p:txBody>
-      </p:sp>
-      <p:sp>
-        <p:nvSpPr>
-          <p:cNvPr id="44" name="Text 42"/>
-          <p:cNvSpPr/>
-          <p:nvPr/>
-        </p:nvSpPr>
-        <p:spPr>
-          <a:xfrm>
-            <a:off x="9514637" y="4133088"/>
-            <a:ext cx="457200" cy="274320"/>
-          </a:xfrm>
-          <a:prstGeom prst="rect">
-            <a:avLst/>
-          </a:prstGeom>
-          <a:noFill/>
-          <a:ln/>
-        </p:spPr>
-        <p:txBody>
-          <a:bodyPr wrap="square" lIns="0" tIns="0" rIns="0" bIns="0" rtlCol="0" anchor="ctr"/>
-          <a:lstStyle/>
-          <a:p>
-            <a:pPr algn="l" indent="0" marL="0">
-              <a:lnSpc>
-                <a:spcPct val="130000"/>
-              </a:lnSpc>
-              <a:buNone/>
-            </a:pPr>
-            <a:r>
-              <a:rPr lang="en-US" sz="1050" b="1" dirty="0">
-                <a:solidFill>
-                  <a:srgbClr val="6C4CFF"/>
-                </a:solidFill>
-                <a:latin typeface="Pretendard" pitchFamily="34" charset="0"/>
-                <a:ea typeface="Pretendard" pitchFamily="34" charset="-122"/>
-                <a:cs typeface="Pretendard" pitchFamily="34" charset="-120"/>
-              </a:rPr>
-              <a:t>4-11</a:t>
-            </a:r>
-            <a:endParaRPr lang="en-US" sz="1050" dirty="0"/>
-          </a:p>
-        </p:txBody>
-      </p:sp>
-      <p:sp>
-        <p:nvSpPr>
-          <p:cNvPr id="45" name="Text 43"/>
-          <p:cNvSpPr/>
-          <p:nvPr/>
-        </p:nvSpPr>
-        <p:spPr>
-          <a:xfrm>
-            <a:off x="9971837" y="4133088"/>
-            <a:ext cx="1168298" cy="274320"/>
-          </a:xfrm>
-          <a:prstGeom prst="rect">
-            <a:avLst/>
-          </a:prstGeom>
-          <a:noFill/>
-          <a:ln/>
-        </p:spPr>
-        <p:txBody>
-          <a:bodyPr wrap="square" lIns="0" tIns="0" rIns="0" bIns="0" rtlCol="0" anchor="ctr"/>
-          <a:lstStyle/>
-          <a:p>
-            <a:pPr algn="l" indent="0" marL="0">
-              <a:lnSpc>
-                <a:spcPct val="130000"/>
-              </a:lnSpc>
-              <a:buNone/>
-            </a:pPr>
-            <a:r>
-              <a:rPr lang="en-US" sz="1150" dirty="0">
-                <a:solidFill>
-                  <a:srgbClr val="1D1D1F"/>
-                </a:solidFill>
-                <a:latin typeface="Pretendard Medium" pitchFamily="34" charset="0"/>
-                <a:ea typeface="Pretendard Medium" pitchFamily="34" charset="-122"/>
-                <a:cs typeface="Pretendard Medium" pitchFamily="34" charset="-120"/>
-              </a:rPr>
-              <a:t>예약</a:t>
-            </a:r>
-            <a:endParaRPr lang="en-US" sz="1150" dirty="0"/>
-          </a:p>
-        </p:txBody>
-      </p:sp>
-      <p:sp>
-        <p:nvSpPr>
-          <p:cNvPr id="46" name="Text 44"/>
-          <p:cNvSpPr/>
-          <p:nvPr/>
-        </p:nvSpPr>
-        <p:spPr>
-          <a:xfrm>
-            <a:off x="6263640" y="4636008"/>
-            <a:ext cx="457200" cy="274320"/>
-          </a:xfrm>
-          <a:prstGeom prst="rect">
-            <a:avLst/>
-          </a:prstGeom>
-          <a:noFill/>
-          <a:ln/>
-        </p:spPr>
-        <p:txBody>
-          <a:bodyPr wrap="square" lIns="0" tIns="0" rIns="0" bIns="0" rtlCol="0" anchor="ctr"/>
-          <a:lstStyle/>
-          <a:p>
-            <a:pPr algn="l" indent="0" marL="0">
-              <a:lnSpc>
-                <a:spcPct val="130000"/>
-              </a:lnSpc>
-              <a:buNone/>
-            </a:pPr>
-            <a:r>
-              <a:rPr lang="en-US" sz="1050" b="1" dirty="0">
-                <a:solidFill>
-                  <a:srgbClr val="6C4CFF"/>
-                </a:solidFill>
-                <a:latin typeface="Pretendard" pitchFamily="34" charset="0"/>
-                <a:ea typeface="Pretendard" pitchFamily="34" charset="-122"/>
-                <a:cs typeface="Pretendard" pitchFamily="34" charset="-120"/>
-              </a:rPr>
-              <a:t>4-12</a:t>
-            </a:r>
-            <a:endParaRPr lang="en-US" sz="1050" dirty="0"/>
-          </a:p>
-        </p:txBody>
-      </p:sp>
-      <p:sp>
-        <p:nvSpPr>
-          <p:cNvPr id="47" name="Text 45"/>
-          <p:cNvSpPr/>
-          <p:nvPr/>
-        </p:nvSpPr>
-        <p:spPr>
-          <a:xfrm>
-            <a:off x="6720840" y="4636008"/>
-            <a:ext cx="1168298" cy="274320"/>
-          </a:xfrm>
-          <a:prstGeom prst="rect">
-            <a:avLst/>
-          </a:prstGeom>
-          <a:noFill/>
-          <a:ln/>
-        </p:spPr>
-        <p:txBody>
-          <a:bodyPr wrap="square" lIns="0" tIns="0" rIns="0" bIns="0" rtlCol="0" anchor="ctr"/>
-          <a:lstStyle/>
-          <a:p>
-            <a:pPr algn="l" indent="0" marL="0">
-              <a:lnSpc>
-                <a:spcPct val="130000"/>
-              </a:lnSpc>
-              <a:buNone/>
-            </a:pPr>
-            <a:r>
-              <a:rPr lang="en-US" sz="1150" dirty="0">
-                <a:solidFill>
-                  <a:srgbClr val="1D1D1F"/>
-                </a:solidFill>
-                <a:latin typeface="Pretendard Medium" pitchFamily="34" charset="0"/>
-                <a:ea typeface="Pretendard Medium" pitchFamily="34" charset="-122"/>
-                <a:cs typeface="Pretendard Medium" pitchFamily="34" charset="-120"/>
-              </a:rPr>
-              <a:t>상품</a:t>
-            </a:r>
-            <a:endParaRPr lang="en-US" sz="1150" dirty="0"/>
-          </a:p>
-        </p:txBody>
-      </p:sp>
-      <p:sp>
-        <p:nvSpPr>
-          <p:cNvPr id="48" name="Text 46"/>
-          <p:cNvSpPr/>
-          <p:nvPr/>
-        </p:nvSpPr>
-        <p:spPr>
-          <a:xfrm>
-            <a:off x="7889138" y="4636008"/>
-            <a:ext cx="457200" cy="274320"/>
-          </a:xfrm>
-          <a:prstGeom prst="rect">
-            <a:avLst/>
-          </a:prstGeom>
-          <a:noFill/>
-          <a:ln/>
-        </p:spPr>
-        <p:txBody>
-          <a:bodyPr wrap="square" lIns="0" tIns="0" rIns="0" bIns="0" rtlCol="0" anchor="ctr"/>
-          <a:lstStyle/>
-          <a:p>
-            <a:pPr algn="l" indent="0" marL="0">
-              <a:lnSpc>
-                <a:spcPct val="130000"/>
-              </a:lnSpc>
-              <a:buNone/>
-            </a:pPr>
-            <a:r>
-              <a:rPr lang="en-US" sz="1050" b="1" dirty="0">
-                <a:solidFill>
-                  <a:srgbClr val="6C4CFF"/>
-                </a:solidFill>
-                <a:latin typeface="Pretendard" pitchFamily="34" charset="0"/>
-                <a:ea typeface="Pretendard" pitchFamily="34" charset="-122"/>
-                <a:cs typeface="Pretendard" pitchFamily="34" charset="-120"/>
-              </a:rPr>
-              <a:t>4-13</a:t>
-            </a:r>
-            <a:endParaRPr lang="en-US" sz="1050" dirty="0"/>
-          </a:p>
-        </p:txBody>
-      </p:sp>
-      <p:sp>
-        <p:nvSpPr>
-          <p:cNvPr id="49" name="Text 47"/>
-          <p:cNvSpPr/>
-          <p:nvPr/>
-        </p:nvSpPr>
-        <p:spPr>
-          <a:xfrm>
-            <a:off x="8346338" y="4636008"/>
-            <a:ext cx="1168298" cy="274320"/>
-          </a:xfrm>
-          <a:prstGeom prst="rect">
-            <a:avLst/>
-          </a:prstGeom>
-          <a:noFill/>
-          <a:ln/>
-        </p:spPr>
-        <p:txBody>
-          <a:bodyPr wrap="square" lIns="0" tIns="0" rIns="0" bIns="0" rtlCol="0" anchor="ctr"/>
-          <a:lstStyle/>
-          <a:p>
-            <a:pPr algn="l" indent="0" marL="0">
-              <a:lnSpc>
-                <a:spcPct val="130000"/>
-              </a:lnSpc>
-              <a:buNone/>
-            </a:pPr>
-            <a:r>
-              <a:rPr lang="en-US" sz="1150" dirty="0">
-                <a:solidFill>
-                  <a:srgbClr val="1D1D1F"/>
-                </a:solidFill>
-                <a:latin typeface="Pretendard Medium" pitchFamily="34" charset="0"/>
-                <a:ea typeface="Pretendard Medium" pitchFamily="34" charset="-122"/>
-                <a:cs typeface="Pretendard Medium" pitchFamily="34" charset="-120"/>
-              </a:rPr>
-              <a:t>위치 안내</a:t>
-            </a:r>
-            <a:endParaRPr lang="en-US" sz="1150" dirty="0"/>
-          </a:p>
-        </p:txBody>
-      </p:sp>
-      <p:sp>
-        <p:nvSpPr>
-          <p:cNvPr id="50" name="Text 48"/>
-          <p:cNvSpPr/>
-          <p:nvPr/>
-        </p:nvSpPr>
-        <p:spPr>
-          <a:xfrm>
-            <a:off x="9514637" y="4636008"/>
-            <a:ext cx="457200" cy="274320"/>
-          </a:xfrm>
-          <a:prstGeom prst="rect">
-            <a:avLst/>
-          </a:prstGeom>
-          <a:noFill/>
-          <a:ln/>
-        </p:spPr>
-        <p:txBody>
-          <a:bodyPr wrap="square" lIns="0" tIns="0" rIns="0" bIns="0" rtlCol="0" anchor="ctr"/>
-          <a:lstStyle/>
-          <a:p>
-            <a:pPr algn="l" indent="0" marL="0">
-              <a:lnSpc>
-                <a:spcPct val="130000"/>
-              </a:lnSpc>
-              <a:buNone/>
-            </a:pPr>
-            <a:r>
-              <a:rPr lang="en-US" sz="1050" b="1" dirty="0">
-                <a:solidFill>
-                  <a:srgbClr val="6C4CFF"/>
-                </a:solidFill>
-                <a:latin typeface="Pretendard" pitchFamily="34" charset="0"/>
-                <a:ea typeface="Pretendard" pitchFamily="34" charset="-122"/>
-                <a:cs typeface="Pretendard" pitchFamily="34" charset="-120"/>
-              </a:rPr>
-              <a:t>4-14</a:t>
-            </a:r>
-            <a:endParaRPr lang="en-US" sz="1050" dirty="0"/>
-          </a:p>
-        </p:txBody>
-      </p:sp>
-      <p:sp>
-        <p:nvSpPr>
-          <p:cNvPr id="51" name="Text 49"/>
-          <p:cNvSpPr/>
-          <p:nvPr/>
-        </p:nvSpPr>
-        <p:spPr>
-          <a:xfrm>
-            <a:off x="9971837" y="4636008"/>
-            <a:ext cx="1168298" cy="274320"/>
-          </a:xfrm>
-          <a:prstGeom prst="rect">
-            <a:avLst/>
-          </a:prstGeom>
-          <a:noFill/>
-          <a:ln/>
-        </p:spPr>
-        <p:txBody>
-          <a:bodyPr wrap="square" lIns="0" tIns="0" rIns="0" bIns="0" rtlCol="0" anchor="ctr"/>
-          <a:lstStyle/>
-          <a:p>
-            <a:pPr algn="l" indent="0" marL="0">
-              <a:lnSpc>
-                <a:spcPct val="130000"/>
-              </a:lnSpc>
-              <a:buNone/>
-            </a:pPr>
-            <a:r>
-              <a:rPr lang="en-US" sz="1150" dirty="0">
-                <a:solidFill>
-                  <a:srgbClr val="1D1D1F"/>
-                </a:solidFill>
-                <a:latin typeface="Pretendard Medium" pitchFamily="34" charset="0"/>
-                <a:ea typeface="Pretendard Medium" pitchFamily="34" charset="-122"/>
-                <a:cs typeface="Pretendard Medium" pitchFamily="34" charset="-120"/>
-              </a:rPr>
-              <a:t>SNS</a:t>
-            </a:r>
-            <a:endParaRPr lang="en-US" sz="1150" dirty="0"/>
-          </a:p>
-        </p:txBody>
-      </p:sp>
-      <p:sp>
-        <p:nvSpPr>
-          <p:cNvPr id="52" name="Text 50"/>
-          <p:cNvSpPr/>
-          <p:nvPr/>
-        </p:nvSpPr>
-        <p:spPr>
-          <a:xfrm>
-            <a:off x="6263640" y="5138928"/>
-            <a:ext cx="457200" cy="274320"/>
-          </a:xfrm>
-          <a:prstGeom prst="rect">
-            <a:avLst/>
-          </a:prstGeom>
-          <a:noFill/>
-          <a:ln/>
-        </p:spPr>
-        <p:txBody>
-          <a:bodyPr wrap="square" lIns="0" tIns="0" rIns="0" bIns="0" rtlCol="0" anchor="ctr"/>
-          <a:lstStyle/>
-          <a:p>
-            <a:pPr algn="l" indent="0" marL="0">
-              <a:lnSpc>
-                <a:spcPct val="130000"/>
-              </a:lnSpc>
-              <a:buNone/>
-            </a:pPr>
-            <a:r>
-              <a:rPr lang="en-US" sz="1050" b="1" dirty="0">
-                <a:solidFill>
-                  <a:srgbClr val="6C4CFF"/>
-                </a:solidFill>
-                <a:latin typeface="Pretendard" pitchFamily="34" charset="0"/>
-                <a:ea typeface="Pretendard" pitchFamily="34" charset="-122"/>
-                <a:cs typeface="Pretendard" pitchFamily="34" charset="-120"/>
-              </a:rPr>
-              <a:t>4-15</a:t>
-            </a:r>
-            <a:endParaRPr lang="en-US" sz="1050" dirty="0"/>
-          </a:p>
-        </p:txBody>
-      </p:sp>
-      <p:sp>
-        <p:nvSpPr>
-          <p:cNvPr id="53" name="Text 51"/>
-          <p:cNvSpPr/>
-          <p:nvPr/>
-        </p:nvSpPr>
-        <p:spPr>
-          <a:xfrm>
-            <a:off x="6720840" y="5138928"/>
-            <a:ext cx="1168298" cy="274320"/>
-          </a:xfrm>
-          <a:prstGeom prst="rect">
-            <a:avLst/>
-          </a:prstGeom>
-          <a:noFill/>
-          <a:ln/>
-        </p:spPr>
-        <p:txBody>
-          <a:bodyPr wrap="square" lIns="0" tIns="0" rIns="0" bIns="0" rtlCol="0" anchor="ctr"/>
-          <a:lstStyle/>
-          <a:p>
-            <a:pPr algn="l" indent="0" marL="0">
-              <a:lnSpc>
-                <a:spcPct val="130000"/>
-              </a:lnSpc>
-              <a:buNone/>
-            </a:pPr>
-            <a:r>
-              <a:rPr lang="en-US" sz="1150" dirty="0">
-                <a:solidFill>
-                  <a:srgbClr val="1D1D1F"/>
-                </a:solidFill>
-                <a:latin typeface="Pretendard Medium" pitchFamily="34" charset="0"/>
-                <a:ea typeface="Pretendard Medium" pitchFamily="34" charset="-122"/>
-                <a:cs typeface="Pretendard Medium" pitchFamily="34" charset="-120"/>
-              </a:rPr>
-              <a:t>구분선</a:t>
-            </a:r>
-            <a:endParaRPr lang="en-US" sz="1150" dirty="0"/>
-          </a:p>
-        </p:txBody>
-      </p:sp>
-      <p:sp>
-        <p:nvSpPr>
-          <p:cNvPr id="54" name="Text 52"/>
-          <p:cNvSpPr/>
-          <p:nvPr/>
-        </p:nvSpPr>
-        <p:spPr>
-          <a:xfrm>
-            <a:off x="7889138" y="5138928"/>
-            <a:ext cx="457200" cy="274320"/>
-          </a:xfrm>
-          <a:prstGeom prst="rect">
-            <a:avLst/>
-          </a:prstGeom>
-          <a:noFill/>
-          <a:ln/>
-        </p:spPr>
-        <p:txBody>
-          <a:bodyPr wrap="square" lIns="0" tIns="0" rIns="0" bIns="0" rtlCol="0" anchor="ctr"/>
-          <a:lstStyle/>
-          <a:p>
-            <a:pPr algn="l" indent="0" marL="0">
-              <a:lnSpc>
-                <a:spcPct val="130000"/>
-              </a:lnSpc>
-              <a:buNone/>
-            </a:pPr>
-            <a:r>
-              <a:rPr lang="en-US" sz="1050" b="1" dirty="0">
-                <a:solidFill>
-                  <a:srgbClr val="6C4CFF"/>
-                </a:solidFill>
-                <a:latin typeface="Pretendard" pitchFamily="34" charset="0"/>
-                <a:ea typeface="Pretendard" pitchFamily="34" charset="-122"/>
-                <a:cs typeface="Pretendard" pitchFamily="34" charset="-120"/>
-              </a:rPr>
-              <a:t>4-16</a:t>
-            </a:r>
-            <a:endParaRPr lang="en-US" sz="1050" dirty="0"/>
-          </a:p>
-        </p:txBody>
-      </p:sp>
-      <p:sp>
-        <p:nvSpPr>
-          <p:cNvPr id="55" name="Text 53"/>
-          <p:cNvSpPr/>
-          <p:nvPr/>
-        </p:nvSpPr>
-        <p:spPr>
-          <a:xfrm>
-            <a:off x="8346338" y="5138928"/>
-            <a:ext cx="1168298" cy="274320"/>
-          </a:xfrm>
-          <a:prstGeom prst="rect">
-            <a:avLst/>
-          </a:prstGeom>
-          <a:noFill/>
-          <a:ln/>
-        </p:spPr>
-        <p:txBody>
-          <a:bodyPr wrap="square" lIns="0" tIns="0" rIns="0" bIns="0" rtlCol="0" anchor="ctr"/>
-          <a:lstStyle/>
-          <a:p>
-            <a:pPr algn="l" indent="0" marL="0">
-              <a:lnSpc>
-                <a:spcPct val="130000"/>
-              </a:lnSpc>
-              <a:buNone/>
-            </a:pPr>
-            <a:r>
-              <a:rPr lang="en-US" sz="1150" dirty="0">
-                <a:solidFill>
-                  <a:srgbClr val="1D1D1F"/>
-                </a:solidFill>
-                <a:latin typeface="Pretendard Medium" pitchFamily="34" charset="0"/>
-                <a:ea typeface="Pretendard Medium" pitchFamily="34" charset="-122"/>
-                <a:cs typeface="Pretendard Medium" pitchFamily="34" charset="-120"/>
-              </a:rPr>
-              <a:t>코드</a:t>
-            </a:r>
-            <a:endParaRPr lang="en-US" sz="1150" dirty="0"/>
-          </a:p>
-        </p:txBody>
-      </p:sp>
-      <p:sp>
-        <p:nvSpPr>
-          <p:cNvPr id="56" name="Text 54"/>
-          <p:cNvSpPr/>
-          <p:nvPr/>
-        </p:nvSpPr>
-        <p:spPr>
-          <a:xfrm>
-            <a:off x="9514637" y="5138928"/>
-            <a:ext cx="457200" cy="274320"/>
-          </a:xfrm>
-          <a:prstGeom prst="rect">
-            <a:avLst/>
-          </a:prstGeom>
-          <a:noFill/>
-          <a:ln/>
-        </p:spPr>
-        <p:txBody>
-          <a:bodyPr wrap="square" lIns="0" tIns="0" rIns="0" bIns="0" rtlCol="0" anchor="ctr"/>
-          <a:lstStyle/>
-          <a:p>
-            <a:pPr algn="l" indent="0" marL="0">
-              <a:lnSpc>
-                <a:spcPct val="130000"/>
-              </a:lnSpc>
-              <a:buNone/>
-            </a:pPr>
-            <a:r>
-              <a:rPr lang="en-US" sz="1050" b="1" dirty="0">
-                <a:solidFill>
-                  <a:srgbClr val="6C4CFF"/>
-                </a:solidFill>
-                <a:latin typeface="Pretendard" pitchFamily="34" charset="0"/>
-                <a:ea typeface="Pretendard" pitchFamily="34" charset="-122"/>
-                <a:cs typeface="Pretendard" pitchFamily="34" charset="-120"/>
-              </a:rPr>
-              <a:t>4-17</a:t>
-            </a:r>
-            <a:endParaRPr lang="en-US" sz="1050" dirty="0"/>
-          </a:p>
-        </p:txBody>
-      </p:sp>
-      <p:sp>
-        <p:nvSpPr>
-          <p:cNvPr id="57" name="Text 55"/>
-          <p:cNvSpPr/>
-          <p:nvPr/>
-        </p:nvSpPr>
-        <p:spPr>
-          <a:xfrm>
-            <a:off x="9971837" y="5138928"/>
-            <a:ext cx="1168298" cy="274320"/>
-          </a:xfrm>
-          <a:prstGeom prst="rect">
-            <a:avLst/>
-          </a:prstGeom>
-          <a:noFill/>
-          <a:ln/>
-        </p:spPr>
-        <p:txBody>
-          <a:bodyPr wrap="square" lIns="0" tIns="0" rIns="0" bIns="0" rtlCol="0" anchor="ctr"/>
-          <a:lstStyle/>
-          <a:p>
-            <a:pPr algn="l" indent="0" marL="0">
-              <a:lnSpc>
-                <a:spcPct val="130000"/>
-              </a:lnSpc>
-              <a:buNone/>
-            </a:pPr>
-            <a:r>
-              <a:rPr lang="en-US" sz="1150" dirty="0">
-                <a:solidFill>
-                  <a:srgbClr val="1D1D1F"/>
-                </a:solidFill>
-                <a:latin typeface="Pretendard Medium" pitchFamily="34" charset="0"/>
-                <a:ea typeface="Pretendard Medium" pitchFamily="34" charset="-122"/>
-                <a:cs typeface="Pretendard Medium" pitchFamily="34" charset="-120"/>
-              </a:rPr>
-              <a:t>2단</a:t>
-            </a:r>
-            <a:endParaRPr lang="en-US" sz="1150" dirty="0"/>
-          </a:p>
-        </p:txBody>
-      </p:sp>
-      <p:sp>
-        <p:nvSpPr>
-          <p:cNvPr id="58" name="Text 56"/>
-          <p:cNvSpPr/>
-          <p:nvPr/>
-        </p:nvSpPr>
-        <p:spPr>
-          <a:xfrm>
-            <a:off x="6263640" y="5650992"/>
-            <a:ext cx="4876495" cy="274320"/>
-          </a:xfrm>
-          <a:prstGeom prst="rect">
-            <a:avLst/>
-          </a:prstGeom>
-          <a:noFill/>
-          <a:ln/>
-        </p:spPr>
-        <p:txBody>
-          <a:bodyPr wrap="square" lIns="0" tIns="0" rIns="0" bIns="0" rtlCol="0" anchor="t"/>
-          <a:lstStyle/>
-          <a:p>
-            <a:pPr algn="l" indent="0" marL="0">
-              <a:lnSpc>
-                <a:spcPct val="130000"/>
-              </a:lnSpc>
-              <a:buNone/>
-            </a:pPr>
-            <a:r>
-              <a:rPr lang="en-US" sz="1000" dirty="0">
-                <a:solidFill>
-                  <a:srgbClr val="6E6E73"/>
-                </a:solidFill>
-                <a:latin typeface="Pretendard" pitchFamily="34" charset="0"/>
-                <a:ea typeface="Pretendard" pitchFamily="34" charset="-122"/>
-                <a:cs typeface="Pretendard" pitchFamily="34" charset="-120"/>
-              </a:rPr>
-              <a:t>예: “상품 카드 만들어줘” → 4-12. 상품 카드.md   ·   “메뉴 카드” → 4-3. 메뉴 카드.md</a:t>
-            </a:r>
-            <a:endParaRPr lang="en-US" sz="1000" dirty="0"/>
           </a:p>
         </p:txBody>
       </p:sp>
@@ -8261,7 +8572,7 @@
                 <a:ea typeface="Pretendard SemiBold" pitchFamily="34" charset="-122"/>
                 <a:cs typeface="Pretendard SemiBold" pitchFamily="34" charset="-120"/>
               </a:rPr>
-              <a:t>일정</a:t>
+              <a:t>⑤ 플러그인</a:t>
             </a:r>
             <a:endParaRPr lang="en-US" sz="1200" dirty="0"/>
           </a:p>
@@ -8342,7 +8653,7 @@
                 <a:ea typeface="Pretendard" pitchFamily="34" charset="-122"/>
                 <a:cs typeface="Pretendard" pitchFamily="34" charset="-120"/>
               </a:rPr>
-              <a:t>얼마나 걸리나</a:t>
+              <a:t>파일 구조만으론 남는 게 있다</a:t>
             </a:r>
             <a:endParaRPr lang="en-US" sz="2600" dirty="0"/>
           </a:p>
@@ -8381,7 +8692,7 @@
                 <a:ea typeface="Pretendard" pitchFamily="34" charset="-122"/>
                 <a:cs typeface="Pretendard" pitchFamily="34" charset="-120"/>
               </a:rPr>
-              <a:t>문서 구조만이면 약 1주, ○ 공백 기능을 영상으로 채우면 약 2주. (추정치)</a:t>
+              <a:t>목록+경로 문서는 ‘그 볼트 안’ 발견을 보장합니다. 볼트 경계를 넘는 건 플러그인 몫.</a:t>
             </a:r>
             <a:endParaRPr lang="en-US" sz="1500" dirty="0"/>
           </a:p>
@@ -8474,11 +8785,11 @@
         <p:spPr>
           <a:xfrm>
             <a:off x="777240" y="2487168"/>
-            <a:ext cx="5120640" cy="2788920"/>
+            <a:ext cx="5120640" cy="2697480"/>
           </a:xfrm>
           <a:prstGeom prst="roundRect">
             <a:avLst>
-              <a:gd name="adj" fmla="val 4590"/>
+              <a:gd name="adj" fmla="val 4746"/>
             </a:avLst>
           </a:prstGeom>
           <a:solidFill>
@@ -8501,7 +8812,7 @@
         <p:spPr>
           <a:xfrm>
             <a:off x="1088136" y="2743200"/>
-            <a:ext cx="4498848" cy="320040"/>
+            <a:ext cx="4498848" cy="274320"/>
           </a:xfrm>
           <a:prstGeom prst="rect">
             <a:avLst/>
@@ -8520,7 +8831,7 @@
               <a:buNone/>
             </a:pPr>
             <a:r>
-              <a:rPr lang="en-US" sz="1600" dirty="0">
+              <a:rPr lang="en-US" sz="1500" dirty="0">
                 <a:solidFill>
                   <a:srgbClr val="1D1D1F"/>
                 </a:solidFill>
@@ -8528,9 +8839,9 @@
                 <a:ea typeface="Pretendard SemiBold" pitchFamily="34" charset="-122"/>
                 <a:cs typeface="Pretendard SemiBold" pitchFamily="34" charset="-120"/>
               </a:rPr>
-              <a:t>문서 구조 구축</a:t>
-            </a:r>
-            <a:endParaRPr lang="en-US" sz="1600" dirty="0"/>
+              <a:t>파일 구조가 하는 일</a:t>
+            </a:r>
+            <a:endParaRPr lang="en-US" sz="1500" dirty="0"/>
           </a:p>
         </p:txBody>
       </p:sp>
@@ -8542,8 +8853,8 @@
         </p:nvSpPr>
         <p:spPr>
           <a:xfrm>
-            <a:off x="1088136" y="3264408"/>
-            <a:ext cx="3291840" cy="320040"/>
+            <a:off x="1088136" y="3236976"/>
+            <a:ext cx="274320" cy="274320"/>
           </a:xfrm>
           <a:prstGeom prst="rect">
             <a:avLst/>
@@ -8562,15 +8873,15 @@
               <a:buNone/>
             </a:pPr>
             <a:r>
-              <a:rPr lang="en-US" sz="1300" dirty="0">
-                <a:solidFill>
-                  <a:srgbClr val="55555A"/>
+              <a:rPr lang="en-US" sz="1300" b="1" dirty="0">
+                <a:solidFill>
+                  <a:srgbClr val="6E6E73"/>
                 </a:solidFill>
                 <a:latin typeface="Pretendard" pitchFamily="34" charset="0"/>
                 <a:ea typeface="Pretendard" pitchFamily="34" charset="-122"/>
                 <a:cs typeface="Pretendard" pitchFamily="34" charset="-120"/>
               </a:rPr>
-              <a:t>첫 볼트 경로 문서</a:t>
+              <a:t>✓</a:t>
             </a:r>
             <a:endParaRPr lang="en-US" sz="1300" dirty="0"/>
           </a:p>
@@ -8584,8 +8895,8 @@
         </p:nvSpPr>
         <p:spPr>
           <a:xfrm>
-            <a:off x="4343400" y="3264408"/>
-            <a:ext cx="1280160" cy="320040"/>
+            <a:off x="1435608" y="3218688"/>
+            <a:ext cx="4206240" cy="457200"/>
           </a:xfrm>
           <a:prstGeom prst="rect">
             <a:avLst/>
@@ -8597,400 +8908,251 @@
           <a:bodyPr wrap="square" lIns="0" tIns="0" rIns="0" bIns="0" rtlCol="0" anchor="t"/>
           <a:lstStyle/>
           <a:p>
-            <a:pPr algn="r" indent="0" marL="0">
+            <a:pPr algn="l" indent="0" marL="0">
+              <a:lnSpc>
+                <a:spcPct val="125000"/>
+              </a:lnSpc>
+              <a:buNone/>
+            </a:pPr>
+            <a:r>
+              <a:rPr lang="en-US" sz="1250" dirty="0">
+                <a:solidFill>
+                  <a:srgbClr val="55555A"/>
+                </a:solidFill>
+                <a:latin typeface="Pretendard" pitchFamily="34" charset="0"/>
+                <a:ea typeface="Pretendard" pitchFamily="34" charset="-122"/>
+                <a:cs typeface="Pretendard" pitchFamily="34" charset="-120"/>
+              </a:rPr>
+              <a:t>그 볼트를 켜면 그 볼트 기능을 다 앎</a:t>
+            </a:r>
+            <a:endParaRPr lang="en-US" sz="1250" dirty="0"/>
+          </a:p>
+        </p:txBody>
+      </p:sp>
+      <p:sp>
+        <p:nvSpPr>
+          <p:cNvPr id="12" name="Text 10"/>
+          <p:cNvSpPr/>
+          <p:nvPr/>
+        </p:nvSpPr>
+        <p:spPr>
+          <a:xfrm>
+            <a:off x="1088136" y="3739896"/>
+            <a:ext cx="274320" cy="274320"/>
+          </a:xfrm>
+          <a:prstGeom prst="rect">
+            <a:avLst/>
+          </a:prstGeom>
+          <a:noFill/>
+          <a:ln/>
+        </p:spPr>
+        <p:txBody>
+          <a:bodyPr wrap="square" lIns="0" tIns="0" rIns="0" bIns="0" rtlCol="0" anchor="t"/>
+          <a:lstStyle/>
+          <a:p>
+            <a:pPr algn="l" indent="0" marL="0">
               <a:lnSpc>
                 <a:spcPct val="130000"/>
               </a:lnSpc>
               <a:buNone/>
             </a:pPr>
             <a:r>
-              <a:rPr lang="en-US" sz="1300" dirty="0">
-                <a:solidFill>
-                  <a:srgbClr val="1D1D1F"/>
+              <a:rPr lang="en-US" sz="1300" b="1" dirty="0">
+                <a:solidFill>
+                  <a:srgbClr val="6E6E73"/>
+                </a:solidFill>
+                <a:latin typeface="Pretendard" pitchFamily="34" charset="0"/>
+                <a:ea typeface="Pretendard" pitchFamily="34" charset="-122"/>
+                <a:cs typeface="Pretendard" pitchFamily="34" charset="-120"/>
+              </a:rPr>
+              <a:t>✓</a:t>
+            </a:r>
+            <a:endParaRPr lang="en-US" sz="1300" dirty="0"/>
+          </a:p>
+        </p:txBody>
+      </p:sp>
+      <p:sp>
+        <p:nvSpPr>
+          <p:cNvPr id="13" name="Text 11"/>
+          <p:cNvSpPr/>
+          <p:nvPr/>
+        </p:nvSpPr>
+        <p:spPr>
+          <a:xfrm>
+            <a:off x="1435608" y="3721608"/>
+            <a:ext cx="4206240" cy="457200"/>
+          </a:xfrm>
+          <a:prstGeom prst="rect">
+            <a:avLst/>
+          </a:prstGeom>
+          <a:noFill/>
+          <a:ln/>
+        </p:spPr>
+        <p:txBody>
+          <a:bodyPr wrap="square" lIns="0" tIns="0" rIns="0" bIns="0" rtlCol="0" anchor="t"/>
+          <a:lstStyle/>
+          <a:p>
+            <a:pPr algn="l" indent="0" marL="0">
+              <a:lnSpc>
+                <a:spcPct val="125000"/>
+              </a:lnSpc>
+              <a:buNone/>
+            </a:pPr>
+            <a:r>
+              <a:rPr lang="en-US" sz="1250" dirty="0">
+                <a:solidFill>
+                  <a:srgbClr val="55555A"/>
+                </a:solidFill>
+                <a:latin typeface="Pretendard" pitchFamily="34" charset="0"/>
+                <a:ea typeface="Pretendard" pitchFamily="34" charset="-122"/>
+                <a:cs typeface="Pretendard" pitchFamily="34" charset="-120"/>
+              </a:rPr>
+              <a:t>@import로 매 세션 강제 로드</a:t>
+            </a:r>
+            <a:endParaRPr lang="en-US" sz="1250" dirty="0"/>
+          </a:p>
+        </p:txBody>
+      </p:sp>
+      <p:sp>
+        <p:nvSpPr>
+          <p:cNvPr id="14" name="Text 12"/>
+          <p:cNvSpPr/>
+          <p:nvPr/>
+        </p:nvSpPr>
+        <p:spPr>
+          <a:xfrm>
+            <a:off x="1088136" y="4242816"/>
+            <a:ext cx="274320" cy="274320"/>
+          </a:xfrm>
+          <a:prstGeom prst="rect">
+            <a:avLst/>
+          </a:prstGeom>
+          <a:noFill/>
+          <a:ln/>
+        </p:spPr>
+        <p:txBody>
+          <a:bodyPr wrap="square" lIns="0" tIns="0" rIns="0" bIns="0" rtlCol="0" anchor="t"/>
+          <a:lstStyle/>
+          <a:p>
+            <a:pPr algn="l" indent="0" marL="0">
+              <a:lnSpc>
+                <a:spcPct val="130000"/>
+              </a:lnSpc>
+              <a:buNone/>
+            </a:pPr>
+            <a:r>
+              <a:rPr lang="en-US" sz="1300" b="1" dirty="0">
+                <a:solidFill>
+                  <a:srgbClr val="6E6E73"/>
+                </a:solidFill>
+                <a:latin typeface="Pretendard" pitchFamily="34" charset="0"/>
+                <a:ea typeface="Pretendard" pitchFamily="34" charset="-122"/>
+                <a:cs typeface="Pretendard" pitchFamily="34" charset="-120"/>
+              </a:rPr>
+              <a:t>✓</a:t>
+            </a:r>
+            <a:endParaRPr lang="en-US" sz="1300" dirty="0"/>
+          </a:p>
+        </p:txBody>
+      </p:sp>
+      <p:sp>
+        <p:nvSpPr>
+          <p:cNvPr id="15" name="Text 13"/>
+          <p:cNvSpPr/>
+          <p:nvPr/>
+        </p:nvSpPr>
+        <p:spPr>
+          <a:xfrm>
+            <a:off x="1435608" y="4224528"/>
+            <a:ext cx="4206240" cy="457200"/>
+          </a:xfrm>
+          <a:prstGeom prst="rect">
+            <a:avLst/>
+          </a:prstGeom>
+          <a:noFill/>
+          <a:ln/>
+        </p:spPr>
+        <p:txBody>
+          <a:bodyPr wrap="square" lIns="0" tIns="0" rIns="0" bIns="0" rtlCol="0" anchor="t"/>
+          <a:lstStyle/>
+          <a:p>
+            <a:pPr algn="l" indent="0" marL="0">
+              <a:lnSpc>
+                <a:spcPct val="125000"/>
+              </a:lnSpc>
+              <a:buNone/>
+            </a:pPr>
+            <a:r>
+              <a:rPr lang="en-US" sz="1250" dirty="0">
+                <a:solidFill>
+                  <a:srgbClr val="55555A"/>
+                </a:solidFill>
+                <a:latin typeface="Pretendard" pitchFamily="34" charset="0"/>
+                <a:ea typeface="Pretendard" pitchFamily="34" charset="-122"/>
+                <a:cs typeface="Pretendard" pitchFamily="34" charset="-120"/>
+              </a:rPr>
+              <a:t>사람이 허브 목록으로 전체를 봄</a:t>
+            </a:r>
+            <a:endParaRPr lang="en-US" sz="1250" dirty="0"/>
+          </a:p>
+        </p:txBody>
+      </p:sp>
+      <p:sp>
+        <p:nvSpPr>
+          <p:cNvPr id="16" name="Text 14"/>
+          <p:cNvSpPr/>
+          <p:nvPr/>
+        </p:nvSpPr>
+        <p:spPr>
+          <a:xfrm>
+            <a:off x="1088136" y="4745736"/>
+            <a:ext cx="4498848" cy="274320"/>
+          </a:xfrm>
+          <a:prstGeom prst="rect">
+            <a:avLst/>
+          </a:prstGeom>
+          <a:noFill/>
+          <a:ln/>
+        </p:spPr>
+        <p:txBody>
+          <a:bodyPr wrap="square" lIns="0" tIns="0" rIns="0" bIns="0" rtlCol="0" anchor="t"/>
+          <a:lstStyle/>
+          <a:p>
+            <a:pPr algn="l" indent="0" marL="0">
+              <a:lnSpc>
+                <a:spcPct val="130000"/>
+              </a:lnSpc>
+              <a:buNone/>
+            </a:pPr>
+            <a:r>
+              <a:rPr lang="en-US" sz="1150" dirty="0">
+                <a:solidFill>
+                  <a:srgbClr val="6E6E73"/>
                 </a:solidFill>
                 <a:latin typeface="Pretendard Medium" pitchFamily="34" charset="0"/>
                 <a:ea typeface="Pretendard Medium" pitchFamily="34" charset="-122"/>
                 <a:cs typeface="Pretendard Medium" pitchFamily="34" charset="-120"/>
               </a:rPr>
-              <a:t>0.5~1일</a:t>
-            </a:r>
-            <a:endParaRPr lang="en-US" sz="1300" dirty="0"/>
-          </a:p>
-        </p:txBody>
-      </p:sp>
-      <p:sp>
-        <p:nvSpPr>
-          <p:cNvPr id="12" name="Text 10"/>
-          <p:cNvSpPr/>
-          <p:nvPr/>
-        </p:nvSpPr>
-        <p:spPr>
-          <a:xfrm>
-            <a:off x="1088136" y="3666744"/>
-            <a:ext cx="3291840" cy="320040"/>
-          </a:xfrm>
-          <a:prstGeom prst="rect">
-            <a:avLst/>
-          </a:prstGeom>
-          <a:noFill/>
-          <a:ln/>
-        </p:spPr>
-        <p:txBody>
-          <a:bodyPr wrap="square" lIns="0" tIns="0" rIns="0" bIns="0" rtlCol="0" anchor="t"/>
-          <a:lstStyle/>
-          <a:p>
-            <a:pPr algn="l" indent="0" marL="0">
-              <a:lnSpc>
-                <a:spcPct val="130000"/>
-              </a:lnSpc>
-              <a:buNone/>
-            </a:pPr>
-            <a:r>
-              <a:rPr lang="en-US" sz="1300" dirty="0">
-                <a:solidFill>
-                  <a:srgbClr val="55555A"/>
-                </a:solidFill>
-                <a:latin typeface="Pretendard" pitchFamily="34" charset="0"/>
-                <a:ea typeface="Pretendard" pitchFamily="34" charset="-122"/>
-                <a:cs typeface="Pretendard" pitchFamily="34" charset="-120"/>
-              </a:rPr>
-              <a:t>나머지 4볼트 확산</a:t>
-            </a:r>
-            <a:endParaRPr lang="en-US" sz="1300" dirty="0"/>
-          </a:p>
-        </p:txBody>
-      </p:sp>
-      <p:sp>
-        <p:nvSpPr>
-          <p:cNvPr id="13" name="Text 11"/>
-          <p:cNvSpPr/>
-          <p:nvPr/>
-        </p:nvSpPr>
-        <p:spPr>
-          <a:xfrm>
-            <a:off x="4343400" y="3666744"/>
-            <a:ext cx="1280160" cy="320040"/>
-          </a:xfrm>
-          <a:prstGeom prst="rect">
-            <a:avLst/>
-          </a:prstGeom>
-          <a:noFill/>
-          <a:ln/>
-        </p:spPr>
-        <p:txBody>
-          <a:bodyPr wrap="square" lIns="0" tIns="0" rIns="0" bIns="0" rtlCol="0" anchor="t"/>
-          <a:lstStyle/>
-          <a:p>
-            <a:pPr algn="r" indent="0" marL="0">
-              <a:lnSpc>
-                <a:spcPct val="130000"/>
-              </a:lnSpc>
-              <a:buNone/>
-            </a:pPr>
-            <a:r>
-              <a:rPr lang="en-US" sz="1300" dirty="0">
-                <a:solidFill>
-                  <a:srgbClr val="1D1D1F"/>
-                </a:solidFill>
-                <a:latin typeface="Pretendard Medium" pitchFamily="34" charset="0"/>
-                <a:ea typeface="Pretendard Medium" pitchFamily="34" charset="-122"/>
-                <a:cs typeface="Pretendard Medium" pitchFamily="34" charset="-120"/>
-              </a:rPr>
-              <a:t>2~3일</a:t>
-            </a:r>
-            <a:endParaRPr lang="en-US" sz="1300" dirty="0"/>
-          </a:p>
-        </p:txBody>
-      </p:sp>
-      <p:sp>
-        <p:nvSpPr>
-          <p:cNvPr id="14" name="Text 12"/>
-          <p:cNvSpPr/>
-          <p:nvPr/>
-        </p:nvSpPr>
-        <p:spPr>
-          <a:xfrm>
-            <a:off x="1088136" y="4069080"/>
-            <a:ext cx="3291840" cy="320040"/>
-          </a:xfrm>
-          <a:prstGeom prst="rect">
-            <a:avLst/>
-          </a:prstGeom>
-          <a:noFill/>
-          <a:ln/>
-        </p:spPr>
-        <p:txBody>
-          <a:bodyPr wrap="square" lIns="0" tIns="0" rIns="0" bIns="0" rtlCol="0" anchor="t"/>
-          <a:lstStyle/>
-          <a:p>
-            <a:pPr algn="l" indent="0" marL="0">
-              <a:lnSpc>
-                <a:spcPct val="130000"/>
-              </a:lnSpc>
-              <a:buNone/>
-            </a:pPr>
-            <a:r>
-              <a:rPr lang="en-US" sz="1300" dirty="0">
-                <a:solidFill>
-                  <a:srgbClr val="55555A"/>
-                </a:solidFill>
-                <a:latin typeface="Pretendard" pitchFamily="34" charset="0"/>
-                <a:ea typeface="Pretendard" pitchFamily="34" charset="-122"/>
-                <a:cs typeface="Pretendard" pitchFamily="34" charset="-120"/>
-              </a:rPr>
-              <a:t>연결 · 검증</a:t>
-            </a:r>
-            <a:endParaRPr lang="en-US" sz="1300" dirty="0"/>
-          </a:p>
-        </p:txBody>
-      </p:sp>
-      <p:sp>
-        <p:nvSpPr>
-          <p:cNvPr id="15" name="Text 13"/>
-          <p:cNvSpPr/>
-          <p:nvPr/>
-        </p:nvSpPr>
-        <p:spPr>
-          <a:xfrm>
-            <a:off x="4343400" y="4069080"/>
-            <a:ext cx="1280160" cy="320040"/>
-          </a:xfrm>
-          <a:prstGeom prst="rect">
-            <a:avLst/>
-          </a:prstGeom>
-          <a:noFill/>
-          <a:ln/>
-        </p:spPr>
-        <p:txBody>
-          <a:bodyPr wrap="square" lIns="0" tIns="0" rIns="0" bIns="0" rtlCol="0" anchor="t"/>
-          <a:lstStyle/>
-          <a:p>
-            <a:pPr algn="r" indent="0" marL="0">
-              <a:lnSpc>
-                <a:spcPct val="130000"/>
-              </a:lnSpc>
-              <a:buNone/>
-            </a:pPr>
-            <a:r>
-              <a:rPr lang="en-US" sz="1300" dirty="0">
-                <a:solidFill>
-                  <a:srgbClr val="1D1D1F"/>
-                </a:solidFill>
-                <a:latin typeface="Pretendard Medium" pitchFamily="34" charset="0"/>
-                <a:ea typeface="Pretendard Medium" pitchFamily="34" charset="-122"/>
-                <a:cs typeface="Pretendard Medium" pitchFamily="34" charset="-120"/>
-              </a:rPr>
-              <a:t>0.5일</a:t>
-            </a:r>
-            <a:endParaRPr lang="en-US" sz="1300" dirty="0"/>
-          </a:p>
-        </p:txBody>
-      </p:sp>
-      <p:sp>
-        <p:nvSpPr>
-          <p:cNvPr id="16" name="Text 14"/>
-          <p:cNvSpPr/>
-          <p:nvPr/>
-        </p:nvSpPr>
-        <p:spPr>
-          <a:xfrm>
-            <a:off x="1088136" y="4471416"/>
-            <a:ext cx="3291840" cy="320040"/>
-          </a:xfrm>
-          <a:prstGeom prst="rect">
-            <a:avLst/>
-          </a:prstGeom>
-          <a:noFill/>
-          <a:ln/>
-        </p:spPr>
-        <p:txBody>
-          <a:bodyPr wrap="square" lIns="0" tIns="0" rIns="0" bIns="0" rtlCol="0" anchor="t"/>
-          <a:lstStyle/>
-          <a:p>
-            <a:pPr algn="l" indent="0" marL="0">
-              <a:lnSpc>
-                <a:spcPct val="130000"/>
-              </a:lnSpc>
-              <a:buNone/>
-            </a:pPr>
-            <a:r>
-              <a:rPr lang="en-US" sz="1300" dirty="0">
-                <a:solidFill>
-                  <a:srgbClr val="55555A"/>
-                </a:solidFill>
-                <a:latin typeface="Pretendard" pitchFamily="34" charset="0"/>
-                <a:ea typeface="Pretendard" pitchFamily="34" charset="-122"/>
-                <a:cs typeface="Pretendard" pitchFamily="34" charset="-120"/>
-              </a:rPr>
-              <a:t>플러그인 배포</a:t>
-            </a:r>
-            <a:endParaRPr lang="en-US" sz="1300" dirty="0"/>
-          </a:p>
-        </p:txBody>
-      </p:sp>
-      <p:sp>
-        <p:nvSpPr>
-          <p:cNvPr id="17" name="Text 15"/>
-          <p:cNvSpPr/>
-          <p:nvPr/>
-        </p:nvSpPr>
-        <p:spPr>
-          <a:xfrm>
-            <a:off x="4343400" y="4471416"/>
-            <a:ext cx="1280160" cy="320040"/>
-          </a:xfrm>
-          <a:prstGeom prst="rect">
-            <a:avLst/>
-          </a:prstGeom>
-          <a:noFill/>
-          <a:ln/>
-        </p:spPr>
-        <p:txBody>
-          <a:bodyPr wrap="square" lIns="0" tIns="0" rIns="0" bIns="0" rtlCol="0" anchor="t"/>
-          <a:lstStyle/>
-          <a:p>
-            <a:pPr algn="r" indent="0" marL="0">
-              <a:lnSpc>
-                <a:spcPct val="130000"/>
-              </a:lnSpc>
-              <a:buNone/>
-            </a:pPr>
-            <a:r>
-              <a:rPr lang="en-US" sz="1300" dirty="0">
-                <a:solidFill>
-                  <a:srgbClr val="1D1D1F"/>
-                </a:solidFill>
-                <a:latin typeface="Pretendard Medium" pitchFamily="34" charset="0"/>
-                <a:ea typeface="Pretendard Medium" pitchFamily="34" charset="-122"/>
-                <a:cs typeface="Pretendard Medium" pitchFamily="34" charset="-120"/>
-              </a:rPr>
-              <a:t>0.5~1일</a:t>
-            </a:r>
-            <a:endParaRPr lang="en-US" sz="1300" dirty="0"/>
-          </a:p>
-        </p:txBody>
-      </p:sp>
-      <p:sp>
-        <p:nvSpPr>
-          <p:cNvPr id="18" name="Shape 16"/>
-          <p:cNvSpPr/>
-          <p:nvPr/>
-        </p:nvSpPr>
-        <p:spPr>
-          <a:xfrm>
-            <a:off x="1088136" y="4818888"/>
-            <a:ext cx="4498848" cy="0"/>
-          </a:xfrm>
-          <a:prstGeom prst="line">
-            <a:avLst/>
-          </a:prstGeom>
-          <a:noFill/>
-          <a:ln w="9525">
-            <a:solidFill>
-              <a:srgbClr val="E5E7EB"/>
-            </a:solidFill>
-            <a:prstDash val="solid"/>
-          </a:ln>
-        </p:spPr>
-      </p:sp>
-      <p:sp>
-        <p:nvSpPr>
-          <p:cNvPr id="19" name="Text 17"/>
-          <p:cNvSpPr/>
-          <p:nvPr/>
-        </p:nvSpPr>
-        <p:spPr>
-          <a:xfrm>
-            <a:off x="1088136" y="4910328"/>
-            <a:ext cx="1828800" cy="274320"/>
-          </a:xfrm>
-          <a:prstGeom prst="rect">
-            <a:avLst/>
-          </a:prstGeom>
-          <a:noFill/>
-          <a:ln/>
-        </p:spPr>
-        <p:txBody>
-          <a:bodyPr wrap="square" lIns="0" tIns="0" rIns="0" bIns="0" rtlCol="0" anchor="t"/>
-          <a:lstStyle/>
-          <a:p>
-            <a:pPr algn="l" indent="0" marL="0">
-              <a:lnSpc>
-                <a:spcPct val="130000"/>
-              </a:lnSpc>
-              <a:buNone/>
-            </a:pPr>
-            <a:r>
-              <a:rPr lang="en-US" sz="1200" dirty="0">
-                <a:solidFill>
-                  <a:srgbClr val="6E6E73"/>
-                </a:solidFill>
-                <a:latin typeface="Pretendard Medium" pitchFamily="34" charset="0"/>
-                <a:ea typeface="Pretendard Medium" pitchFamily="34" charset="-122"/>
-                <a:cs typeface="Pretendard Medium" pitchFamily="34" charset="-120"/>
-              </a:rPr>
-              <a:t>합계</a:t>
-            </a:r>
-            <a:endParaRPr lang="en-US" sz="1200" dirty="0"/>
-          </a:p>
-        </p:txBody>
-      </p:sp>
-      <p:sp>
-        <p:nvSpPr>
-          <p:cNvPr id="20" name="Text 18"/>
-          <p:cNvSpPr/>
-          <p:nvPr/>
-        </p:nvSpPr>
-        <p:spPr>
-          <a:xfrm>
-            <a:off x="3703320" y="4846320"/>
-            <a:ext cx="1920240" cy="365760"/>
-          </a:xfrm>
-          <a:prstGeom prst="rect">
-            <a:avLst/>
-          </a:prstGeom>
-          <a:noFill/>
-          <a:ln/>
-        </p:spPr>
-        <p:txBody>
-          <a:bodyPr wrap="square" lIns="0" tIns="0" rIns="0" bIns="0" rtlCol="0" anchor="t"/>
-          <a:lstStyle/>
-          <a:p>
-            <a:pPr algn="r" indent="0" marL="0">
-              <a:lnSpc>
-                <a:spcPct val="130000"/>
-              </a:lnSpc>
-              <a:buNone/>
-            </a:pPr>
-            <a:r>
-              <a:rPr lang="en-US" sz="2000" b="1" spc="-40" kern="0" dirty="0">
-                <a:solidFill>
-                  <a:srgbClr val="6C4CFF"/>
-                </a:solidFill>
-                <a:latin typeface="Pretendard" pitchFamily="34" charset="0"/>
-                <a:ea typeface="Pretendard" pitchFamily="34" charset="-122"/>
-                <a:cs typeface="Pretendard" pitchFamily="34" charset="-120"/>
-              </a:rPr>
-              <a:t>≈ 1주</a:t>
-            </a:r>
-            <a:endParaRPr lang="en-US" sz="2000" dirty="0"/>
-          </a:p>
-        </p:txBody>
-      </p:sp>
-      <p:sp>
-        <p:nvSpPr>
-          <p:cNvPr id="21" name="Shape 19"/>
+              <a:t>단, ‘그 볼트를 켰을 때’ 뿐</a:t>
+            </a:r>
+            <a:endParaRPr lang="en-US" sz="1150" dirty="0"/>
+          </a:p>
+        </p:txBody>
+      </p:sp>
+      <p:sp>
+        <p:nvSpPr>
+          <p:cNvPr id="17" name="Shape 15"/>
           <p:cNvSpPr/>
           <p:nvPr/>
         </p:nvSpPr>
         <p:spPr>
           <a:xfrm>
             <a:off x="6309360" y="2487168"/>
-            <a:ext cx="5120640" cy="2788920"/>
+            <a:ext cx="5120640" cy="2697480"/>
           </a:xfrm>
           <a:prstGeom prst="roundRect">
             <a:avLst>
-              <a:gd name="adj" fmla="val 4590"/>
+              <a:gd name="adj" fmla="val 4746"/>
             </a:avLst>
           </a:prstGeom>
           <a:solidFill>
@@ -9006,14 +9168,14 @@
       </p:sp>
       <p:sp>
         <p:nvSpPr>
-          <p:cNvPr id="22" name="Text 20"/>
+          <p:cNvPr id="18" name="Text 16"/>
           <p:cNvSpPr/>
           <p:nvPr/>
         </p:nvSpPr>
         <p:spPr>
           <a:xfrm>
             <a:off x="6620256" y="2743200"/>
-            <a:ext cx="4498848" cy="320040"/>
+            <a:ext cx="4498848" cy="274320"/>
           </a:xfrm>
           <a:prstGeom prst="rect">
             <a:avLst/>
@@ -9032,7 +9194,7 @@
               <a:buNone/>
             </a:pPr>
             <a:r>
-              <a:rPr lang="en-US" sz="1600" b="1" dirty="0">
+              <a:rPr lang="en-US" sz="1500" b="1" dirty="0">
                 <a:solidFill>
                   <a:srgbClr val="6C4CFF"/>
                 </a:solidFill>
@@ -9040,22 +9202,22 @@
                 <a:ea typeface="Pretendard" pitchFamily="34" charset="-122"/>
                 <a:cs typeface="Pretendard" pitchFamily="34" charset="-120"/>
               </a:rPr>
-              <a:t>영상까지 문서화</a:t>
-            </a:r>
-            <a:endParaRPr lang="en-US" sz="1600" dirty="0"/>
-          </a:p>
-        </p:txBody>
-      </p:sp>
-      <p:sp>
-        <p:nvSpPr>
-          <p:cNvPr id="23" name="Text 21"/>
-          <p:cNvSpPr/>
-          <p:nvPr/>
-        </p:nvSpPr>
-        <p:spPr>
-          <a:xfrm>
-            <a:off x="6620256" y="3264408"/>
-            <a:ext cx="3657600" cy="320040"/>
+              <a:t>플러그인이 더 하는 일</a:t>
+            </a:r>
+            <a:endParaRPr lang="en-US" sz="1500" dirty="0"/>
+          </a:p>
+        </p:txBody>
+      </p:sp>
+      <p:sp>
+        <p:nvSpPr>
+          <p:cNvPr id="19" name="Text 17"/>
+          <p:cNvSpPr/>
+          <p:nvPr/>
+        </p:nvSpPr>
+        <p:spPr>
+          <a:xfrm>
+            <a:off x="6620256" y="3236976"/>
+            <a:ext cx="274320" cy="274320"/>
           </a:xfrm>
           <a:prstGeom prst="rect">
             <a:avLst/>
@@ -9074,15 +9236,57 @@
               <a:buNone/>
             </a:pPr>
             <a:r>
-              <a:rPr lang="en-US" sz="1250" dirty="0">
-                <a:solidFill>
-                  <a:srgbClr val="1D1D1F"/>
+              <a:rPr lang="en-US" sz="1300" b="1" dirty="0">
+                <a:solidFill>
+                  <a:srgbClr val="6C4CFF"/>
                 </a:solidFill>
                 <a:latin typeface="Pretendard" pitchFamily="34" charset="0"/>
                 <a:ea typeface="Pretendard" pitchFamily="34" charset="-122"/>
                 <a:cs typeface="Pretendard" pitchFamily="34" charset="-120"/>
               </a:rPr>
-              <a:t>○ 공백 기능 12개 (통계·계정·요금)</a:t>
+              <a:t>✓</a:t>
+            </a:r>
+            <a:endParaRPr lang="en-US" sz="1300" dirty="0"/>
+          </a:p>
+        </p:txBody>
+      </p:sp>
+      <p:sp>
+        <p:nvSpPr>
+          <p:cNvPr id="20" name="Text 18"/>
+          <p:cNvSpPr/>
+          <p:nvPr/>
+        </p:nvSpPr>
+        <p:spPr>
+          <a:xfrm>
+            <a:off x="6967728" y="3218688"/>
+            <a:ext cx="4206240" cy="274320"/>
+          </a:xfrm>
+          <a:prstGeom prst="rect">
+            <a:avLst/>
+          </a:prstGeom>
+          <a:noFill/>
+          <a:ln/>
+        </p:spPr>
+        <p:txBody>
+          <a:bodyPr wrap="square" lIns="0" tIns="0" rIns="0" bIns="0" rtlCol="0" anchor="t"/>
+          <a:lstStyle/>
+          <a:p>
+            <a:pPr algn="l" indent="0" marL="0">
+              <a:lnSpc>
+                <a:spcPct val="130000"/>
+              </a:lnSpc>
+              <a:buNone/>
+            </a:pPr>
+            <a:r>
+              <a:rPr lang="en-US" sz="1250" dirty="0">
+                <a:solidFill>
+                  <a:srgbClr val="1D1D1F"/>
+                </a:solidFill>
+                <a:latin typeface="Pretendard SemiBold" pitchFamily="34" charset="0"/>
+                <a:ea typeface="Pretendard SemiBold" pitchFamily="34" charset="-122"/>
+                <a:cs typeface="Pretendard SemiBold" pitchFamily="34" charset="-120"/>
+              </a:rPr>
+              <a:t>어느 볼트·맨 바깥에서 켜도 로드</a:t>
             </a:r>
             <a:endParaRPr lang="en-US" sz="1250" dirty="0"/>
           </a:p>
@@ -9090,14 +9294,14 @@
       </p:sp>
       <p:sp>
         <p:nvSpPr>
-          <p:cNvPr id="24" name="Text 22"/>
-          <p:cNvSpPr/>
-          <p:nvPr/>
-        </p:nvSpPr>
-        <p:spPr>
-          <a:xfrm>
-            <a:off x="6620256" y="3666744"/>
-            <a:ext cx="3657600" cy="320040"/>
+          <p:cNvPr id="21" name="Text 19"/>
+          <p:cNvSpPr/>
+          <p:nvPr/>
+        </p:nvSpPr>
+        <p:spPr>
+          <a:xfrm>
+            <a:off x="6967728" y="3456432"/>
+            <a:ext cx="4206240" cy="274320"/>
           </a:xfrm>
           <a:prstGeom prst="rect">
             <a:avLst/>
@@ -9116,30 +9320,30 @@
               <a:buNone/>
             </a:pPr>
             <a:r>
-              <a:rPr lang="en-US" sz="1250" dirty="0">
-                <a:solidFill>
-                  <a:srgbClr val="1D1D1F"/>
+              <a:rPr lang="en-US" sz="1050" dirty="0">
+                <a:solidFill>
+                  <a:srgbClr val="6E6E73"/>
                 </a:solidFill>
                 <a:latin typeface="Pretendard" pitchFamily="34" charset="0"/>
                 <a:ea typeface="Pretendard" pitchFamily="34" charset="-122"/>
                 <a:cs typeface="Pretendard" pitchFamily="34" charset="-120"/>
               </a:rPr>
-              <a:t>◐ 부분 기능 9개 보강</a:t>
-            </a:r>
-            <a:endParaRPr lang="en-US" sz="1250" dirty="0"/>
-          </a:p>
-        </p:txBody>
-      </p:sp>
-      <p:sp>
-        <p:nvSpPr>
-          <p:cNvPr id="25" name="Text 23"/>
-          <p:cNvSpPr/>
-          <p:nvPr/>
-        </p:nvSpPr>
-        <p:spPr>
-          <a:xfrm>
-            <a:off x="6620256" y="4069080"/>
-            <a:ext cx="3657600" cy="320040"/>
+              <a:t>위치에 안 묶임</a:t>
+            </a:r>
+            <a:endParaRPr lang="en-US" sz="1050" dirty="0"/>
+          </a:p>
+        </p:txBody>
+      </p:sp>
+      <p:sp>
+        <p:nvSpPr>
+          <p:cNvPr id="22" name="Text 20"/>
+          <p:cNvSpPr/>
+          <p:nvPr/>
+        </p:nvSpPr>
+        <p:spPr>
+          <a:xfrm>
+            <a:off x="6620256" y="3739896"/>
+            <a:ext cx="274320" cy="274320"/>
           </a:xfrm>
           <a:prstGeom prst="rect">
             <a:avLst/>
@@ -9158,15 +9362,57 @@
               <a:buNone/>
             </a:pPr>
             <a:r>
-              <a:rPr lang="en-US" sz="1250" dirty="0">
-                <a:solidFill>
-                  <a:srgbClr val="1D1D1F"/>
+              <a:rPr lang="en-US" sz="1300" b="1" dirty="0">
+                <a:solidFill>
+                  <a:srgbClr val="6C4CFF"/>
                 </a:solidFill>
                 <a:latin typeface="Pretendard" pitchFamily="34" charset="0"/>
                 <a:ea typeface="Pretendard" pitchFamily="34" charset="-122"/>
                 <a:cs typeface="Pretendard" pitchFamily="34" charset="-120"/>
               </a:rPr>
-              <a:t>영상 수령 → 프레임 추출·작성</a:t>
+              <a:t>✓</a:t>
+            </a:r>
+            <a:endParaRPr lang="en-US" sz="1300" dirty="0"/>
+          </a:p>
+        </p:txBody>
+      </p:sp>
+      <p:sp>
+        <p:nvSpPr>
+          <p:cNvPr id="23" name="Text 21"/>
+          <p:cNvSpPr/>
+          <p:nvPr/>
+        </p:nvSpPr>
+        <p:spPr>
+          <a:xfrm>
+            <a:off x="6967728" y="3721608"/>
+            <a:ext cx="4206240" cy="274320"/>
+          </a:xfrm>
+          <a:prstGeom prst="rect">
+            <a:avLst/>
+          </a:prstGeom>
+          <a:noFill/>
+          <a:ln/>
+        </p:spPr>
+        <p:txBody>
+          <a:bodyPr wrap="square" lIns="0" tIns="0" rIns="0" bIns="0" rtlCol="0" anchor="t"/>
+          <a:lstStyle/>
+          <a:p>
+            <a:pPr algn="l" indent="0" marL="0">
+              <a:lnSpc>
+                <a:spcPct val="130000"/>
+              </a:lnSpc>
+              <a:buNone/>
+            </a:pPr>
+            <a:r>
+              <a:rPr lang="en-US" sz="1250" dirty="0">
+                <a:solidFill>
+                  <a:srgbClr val="1D1D1F"/>
+                </a:solidFill>
+                <a:latin typeface="Pretendard SemiBold" pitchFamily="34" charset="0"/>
+                <a:ea typeface="Pretendard SemiBold" pitchFamily="34" charset="-122"/>
+                <a:cs typeface="Pretendard SemiBold" pitchFamily="34" charset="-120"/>
+              </a:rPr>
+              <a:t>마켓플레이스에서 자동 최신화</a:t>
             </a:r>
             <a:endParaRPr lang="en-US" sz="1250" dirty="0"/>
           </a:p>
@@ -9174,14 +9420,98 @@
       </p:sp>
       <p:sp>
         <p:nvSpPr>
+          <p:cNvPr id="24" name="Text 22"/>
+          <p:cNvSpPr/>
+          <p:nvPr/>
+        </p:nvSpPr>
+        <p:spPr>
+          <a:xfrm>
+            <a:off x="6967728" y="3959352"/>
+            <a:ext cx="4206240" cy="274320"/>
+          </a:xfrm>
+          <a:prstGeom prst="rect">
+            <a:avLst/>
+          </a:prstGeom>
+          <a:noFill/>
+          <a:ln/>
+        </p:spPr>
+        <p:txBody>
+          <a:bodyPr wrap="square" lIns="0" tIns="0" rIns="0" bIns="0" rtlCol="0" anchor="t"/>
+          <a:lstStyle/>
+          <a:p>
+            <a:pPr algn="l" indent="0" marL="0">
+              <a:lnSpc>
+                <a:spcPct val="130000"/>
+              </a:lnSpc>
+              <a:buNone/>
+            </a:pPr>
+            <a:r>
+              <a:rPr lang="en-US" sz="1050" dirty="0">
+                <a:solidFill>
+                  <a:srgbClr val="6E6E73"/>
+                </a:solidFill>
+                <a:latin typeface="Pretendard" pitchFamily="34" charset="0"/>
+                <a:ea typeface="Pretendard" pitchFamily="34" charset="-122"/>
+                <a:cs typeface="Pretendard" pitchFamily="34" charset="-120"/>
+              </a:rPr>
+              <a:t>3대 수동 설치 X</a:t>
+            </a:r>
+            <a:endParaRPr lang="en-US" sz="1050" dirty="0"/>
+          </a:p>
+        </p:txBody>
+      </p:sp>
+      <p:sp>
+        <p:nvSpPr>
+          <p:cNvPr id="25" name="Text 23"/>
+          <p:cNvSpPr/>
+          <p:nvPr/>
+        </p:nvSpPr>
+        <p:spPr>
+          <a:xfrm>
+            <a:off x="6620256" y="4242816"/>
+            <a:ext cx="274320" cy="274320"/>
+          </a:xfrm>
+          <a:prstGeom prst="rect">
+            <a:avLst/>
+          </a:prstGeom>
+          <a:noFill/>
+          <a:ln/>
+        </p:spPr>
+        <p:txBody>
+          <a:bodyPr wrap="square" lIns="0" tIns="0" rIns="0" bIns="0" rtlCol="0" anchor="t"/>
+          <a:lstStyle/>
+          <a:p>
+            <a:pPr algn="l" indent="0" marL="0">
+              <a:lnSpc>
+                <a:spcPct val="130000"/>
+              </a:lnSpc>
+              <a:buNone/>
+            </a:pPr>
+            <a:r>
+              <a:rPr lang="en-US" sz="1300" b="1" dirty="0">
+                <a:solidFill>
+                  <a:srgbClr val="6C4CFF"/>
+                </a:solidFill>
+                <a:latin typeface="Pretendard" pitchFamily="34" charset="0"/>
+                <a:ea typeface="Pretendard" pitchFamily="34" charset="-122"/>
+                <a:cs typeface="Pretendard" pitchFamily="34" charset="-120"/>
+              </a:rPr>
+              <a:t>✓</a:t>
+            </a:r>
+            <a:endParaRPr lang="en-US" sz="1300" dirty="0"/>
+          </a:p>
+        </p:txBody>
+      </p:sp>
+      <p:sp>
+        <p:nvSpPr>
           <p:cNvPr id="26" name="Text 24"/>
           <p:cNvSpPr/>
           <p:nvPr/>
         </p:nvSpPr>
         <p:spPr>
           <a:xfrm>
-            <a:off x="10058400" y="4069080"/>
-            <a:ext cx="1097280" cy="320040"/>
+            <a:off x="6967728" y="4224528"/>
+            <a:ext cx="4206240" cy="274320"/>
           </a:xfrm>
           <a:prstGeom prst="rect">
             <a:avLst/>
@@ -9193,43 +9523,131 @@
           <a:bodyPr wrap="square" lIns="0" tIns="0" rIns="0" bIns="0" rtlCol="0" anchor="t"/>
           <a:lstStyle/>
           <a:p>
-            <a:pPr algn="r" indent="0" marL="0">
+            <a:pPr algn="l" indent="0" marL="0">
               <a:lnSpc>
                 <a:spcPct val="130000"/>
               </a:lnSpc>
               <a:buNone/>
             </a:pPr>
             <a:r>
-              <a:rPr lang="en-US" sz="1300" dirty="0">
+              <a:rPr lang="en-US" sz="1250" dirty="0">
                 <a:solidFill>
                   <a:srgbClr val="1D1D1F"/>
                 </a:solidFill>
-                <a:latin typeface="Pretendard Medium" pitchFamily="34" charset="0"/>
-                <a:ea typeface="Pretendard Medium" pitchFamily="34" charset="-122"/>
-                <a:cs typeface="Pretendard Medium" pitchFamily="34" charset="-120"/>
-              </a:rPr>
-              <a:t>+3~5일</a:t>
-            </a:r>
-            <a:endParaRPr lang="en-US" sz="1300" dirty="0"/>
-          </a:p>
-        </p:txBody>
-      </p:sp>
-      <p:sp>
-        <p:nvSpPr>
-          <p:cNvPr id="27" name="Shape 25"/>
-          <p:cNvSpPr/>
-          <p:nvPr/>
-        </p:nvSpPr>
-        <p:spPr>
-          <a:xfrm>
-            <a:off x="6620256" y="4818888"/>
-            <a:ext cx="4498848" cy="0"/>
-          </a:xfrm>
-          <a:prstGeom prst="line">
-            <a:avLst/>
-          </a:prstGeom>
-          <a:noFill/>
-          <a:ln w="9525">
+                <a:latin typeface="Pretendard SemiBold" pitchFamily="34" charset="0"/>
+                <a:ea typeface="Pretendard SemiBold" pitchFamily="34" charset="-122"/>
+                <a:cs typeface="Pretendard SemiBold" pitchFamily="34" charset="-120"/>
+              </a:rPr>
+              <a:t>git에 못 넣는 것도 배포</a:t>
+            </a:r>
+            <a:endParaRPr lang="en-US" sz="1250" dirty="0"/>
+          </a:p>
+        </p:txBody>
+      </p:sp>
+      <p:sp>
+        <p:nvSpPr>
+          <p:cNvPr id="27" name="Text 25"/>
+          <p:cNvSpPr/>
+          <p:nvPr/>
+        </p:nvSpPr>
+        <p:spPr>
+          <a:xfrm>
+            <a:off x="6967728" y="4462272"/>
+            <a:ext cx="4206240" cy="274320"/>
+          </a:xfrm>
+          <a:prstGeom prst="rect">
+            <a:avLst/>
+          </a:prstGeom>
+          <a:noFill/>
+          <a:ln/>
+        </p:spPr>
+        <p:txBody>
+          <a:bodyPr wrap="square" lIns="0" tIns="0" rIns="0" bIns="0" rtlCol="0" anchor="t"/>
+          <a:lstStyle/>
+          <a:p>
+            <a:pPr algn="l" indent="0" marL="0">
+              <a:lnSpc>
+                <a:spcPct val="130000"/>
+              </a:lnSpc>
+              <a:buNone/>
+            </a:pPr>
+            <a:r>
+              <a:rPr lang="en-US" sz="1050" dirty="0">
+                <a:solidFill>
+                  <a:srgbClr val="6E6E73"/>
+                </a:solidFill>
+                <a:latin typeface="Pretendard" pitchFamily="34" charset="0"/>
+                <a:ea typeface="Pretendard" pitchFamily="34" charset="-122"/>
+                <a:cs typeface="Pretendard" pitchFamily="34" charset="-120"/>
+              </a:rPr>
+              <a:t>gstack · 로그인 · Figma MCP</a:t>
+            </a:r>
+            <a:endParaRPr lang="en-US" sz="1050" dirty="0"/>
+          </a:p>
+        </p:txBody>
+      </p:sp>
+      <p:sp>
+        <p:nvSpPr>
+          <p:cNvPr id="28" name="Text 26"/>
+          <p:cNvSpPr/>
+          <p:nvPr/>
+        </p:nvSpPr>
+        <p:spPr>
+          <a:xfrm>
+            <a:off x="777240" y="5486400"/>
+            <a:ext cx="10637215" cy="274320"/>
+          </a:xfrm>
+          <a:prstGeom prst="rect">
+            <a:avLst/>
+          </a:prstGeom>
+          <a:noFill/>
+          <a:ln/>
+        </p:spPr>
+        <p:txBody>
+          <a:bodyPr wrap="square" lIns="0" tIns="0" rIns="0" bIns="0" rtlCol="0" anchor="t"/>
+          <a:lstStyle/>
+          <a:p>
+            <a:pPr algn="l" indent="0" marL="0">
+              <a:lnSpc>
+                <a:spcPct val="130000"/>
+              </a:lnSpc>
+              <a:buNone/>
+            </a:pPr>
+            <a:r>
+              <a:rPr lang="en-US" sz="1250" dirty="0">
+                <a:solidFill>
+                  <a:srgbClr val="1D1D1F"/>
+                </a:solidFill>
+                <a:latin typeface="Pretendard SemiBold" pitchFamily="34" charset="0"/>
+                <a:ea typeface="Pretendard SemiBold" pitchFamily="34" charset="-122"/>
+                <a:cs typeface="Pretendard SemiBold" pitchFamily="34" charset="-120"/>
+              </a:rPr>
+              <a:t>파일 구조 = 볼트 내부용 · 플러그인 = 볼트 경계를 넘는 배포용 — 대체재가 아니라 보완재.</a:t>
+            </a:r>
+            <a:endParaRPr lang="en-US" sz="1250" dirty="0"/>
+          </a:p>
+        </p:txBody>
+      </p:sp>
+      <p:sp>
+        <p:nvSpPr>
+          <p:cNvPr id="29" name="Shape 27"/>
+          <p:cNvSpPr/>
+          <p:nvPr/>
+        </p:nvSpPr>
+        <p:spPr>
+          <a:xfrm>
+            <a:off x="777240" y="5806440"/>
+            <a:ext cx="10637215" cy="384048"/>
+          </a:xfrm>
+          <a:prstGeom prst="roundRect">
+            <a:avLst>
+              <a:gd name="adj" fmla="val 23810"/>
+            </a:avLst>
+          </a:prstGeom>
+          <a:solidFill>
+            <a:srgbClr val="F5F5F7"/>
+          </a:solidFill>
+          <a:ln w="12700">
             <a:solidFill>
               <a:srgbClr val="E5E7EB"/>
             </a:solidFill>
@@ -9239,23 +9657,23 @@
       </p:sp>
       <p:sp>
         <p:nvSpPr>
-          <p:cNvPr id="28" name="Text 26"/>
-          <p:cNvSpPr/>
-          <p:nvPr/>
-        </p:nvSpPr>
-        <p:spPr>
-          <a:xfrm>
-            <a:off x="6620256" y="4910328"/>
-            <a:ext cx="2743200" cy="274320"/>
-          </a:xfrm>
-          <a:prstGeom prst="rect">
-            <a:avLst/>
-          </a:prstGeom>
-          <a:noFill/>
-          <a:ln/>
-        </p:spPr>
-        <p:txBody>
-          <a:bodyPr wrap="square" lIns="0" tIns="0" rIns="0" bIns="0" rtlCol="0" anchor="t"/>
+          <p:cNvPr id="30" name="Text 28"/>
+          <p:cNvSpPr/>
+          <p:nvPr/>
+        </p:nvSpPr>
+        <p:spPr>
+          <a:xfrm>
+            <a:off x="1033272" y="5806440"/>
+            <a:ext cx="10180015" cy="384048"/>
+          </a:xfrm>
+          <a:prstGeom prst="rect">
+            <a:avLst/>
+          </a:prstGeom>
+          <a:noFill/>
+          <a:ln/>
+        </p:spPr>
+        <p:txBody>
+          <a:bodyPr wrap="square" lIns="0" tIns="0" rIns="0" bIns="0" rtlCol="0" anchor="ctr"/>
           <a:lstStyle/>
           <a:p>
             <a:pPr algn="l" indent="0" marL="0">
@@ -9265,99 +9683,15 @@
               <a:buNone/>
             </a:pPr>
             <a:r>
-              <a:rPr lang="en-US" sz="1200" dirty="0">
-                <a:solidFill>
-                  <a:srgbClr val="6E6E73"/>
+              <a:rPr lang="en-US" sz="1150" dirty="0">
+                <a:solidFill>
+                  <a:srgbClr val="55555A"/>
                 </a:solidFill>
                 <a:latin typeface="Pretendard Medium" pitchFamily="34" charset="0"/>
                 <a:ea typeface="Pretendard Medium" pitchFamily="34" charset="-122"/>
                 <a:cs typeface="Pretendard Medium" pitchFamily="34" charset="-120"/>
               </a:rPr>
-              <a:t>문서 구조 + 영상</a:t>
-            </a:r>
-            <a:endParaRPr lang="en-US" sz="1200" dirty="0"/>
-          </a:p>
-        </p:txBody>
-      </p:sp>
-      <p:sp>
-        <p:nvSpPr>
-          <p:cNvPr id="29" name="Text 27"/>
-          <p:cNvSpPr/>
-          <p:nvPr/>
-        </p:nvSpPr>
-        <p:spPr>
-          <a:xfrm>
-            <a:off x="9235440" y="4846320"/>
-            <a:ext cx="1920240" cy="365760"/>
-          </a:xfrm>
-          <a:prstGeom prst="rect">
-            <a:avLst/>
-          </a:prstGeom>
-          <a:noFill/>
-          <a:ln/>
-        </p:spPr>
-        <p:txBody>
-          <a:bodyPr wrap="square" lIns="0" tIns="0" rIns="0" bIns="0" rtlCol="0" anchor="t"/>
-          <a:lstStyle/>
-          <a:p>
-            <a:pPr algn="r" indent="0" marL="0">
-              <a:lnSpc>
-                <a:spcPct val="130000"/>
-              </a:lnSpc>
-              <a:buNone/>
-            </a:pPr>
-            <a:r>
-              <a:rPr lang="en-US" sz="2000" b="1" spc="-40" kern="0" dirty="0">
-                <a:solidFill>
-                  <a:srgbClr val="6C4CFF"/>
-                </a:solidFill>
-                <a:latin typeface="Pretendard" pitchFamily="34" charset="0"/>
-                <a:ea typeface="Pretendard" pitchFamily="34" charset="-122"/>
-                <a:cs typeface="Pretendard" pitchFamily="34" charset="-120"/>
-              </a:rPr>
-              <a:t>≈ 2주</a:t>
-            </a:r>
-            <a:endParaRPr lang="en-US" sz="2000" dirty="0"/>
-          </a:p>
-        </p:txBody>
-      </p:sp>
-      <p:sp>
-        <p:nvSpPr>
-          <p:cNvPr id="30" name="Text 28"/>
-          <p:cNvSpPr/>
-          <p:nvPr/>
-        </p:nvSpPr>
-        <p:spPr>
-          <a:xfrm>
-            <a:off x="777240" y="5532120"/>
-            <a:ext cx="10637215" cy="365760"/>
-          </a:xfrm>
-          <a:prstGeom prst="rect">
-            <a:avLst/>
-          </a:prstGeom>
-          <a:noFill/>
-          <a:ln/>
-        </p:spPr>
-        <p:txBody>
-          <a:bodyPr wrap="square" lIns="0" tIns="0" rIns="0" bIns="0" rtlCol="0" anchor="t"/>
-          <a:lstStyle/>
-          <a:p>
-            <a:pPr algn="l" indent="0" marL="0">
-              <a:lnSpc>
-                <a:spcPct val="130000"/>
-              </a:lnSpc>
-              <a:buNone/>
-            </a:pPr>
-            <a:r>
-              <a:rPr lang="en-US" sz="1150" dirty="0">
-                <a:solidFill>
-                  <a:srgbClr val="6E6E73"/>
-                </a:solidFill>
-                <a:latin typeface="Pretendard Medium" pitchFamily="34" charset="0"/>
-                <a:ea typeface="Pretendard Medium" pitchFamily="34" charset="-122"/>
-                <a:cs typeface="Pretendard Medium" pitchFamily="34" charset="-120"/>
-              </a:rPr>
-              <a:t>※ 숫자는 추정치(예시)입니다. 다음 장에서 ‘어떤 기능에 영상이 필요한가’를 봅니다.</a:t>
+              <a:t>팀원 설치는 한 줄:  /plugin marketplace add CdBd-in/cdbd-plugin</a:t>
             </a:r>
             <a:endParaRPr lang="en-US" sz="1150" dirty="0"/>
           </a:p>
@@ -9428,7 +9762,7 @@
                 <a:ea typeface="Pretendard SemiBold" pitchFamily="34" charset="-122"/>
                 <a:cs typeface="Pretendard SemiBold" pitchFamily="34" charset="-120"/>
               </a:rPr>
-              <a:t>④ 영상</a:t>
+              <a:t>일정</a:t>
             </a:r>
             <a:endParaRPr lang="en-US" sz="1200" dirty="0"/>
           </a:p>
@@ -9509,7 +9843,7 @@
                 <a:ea typeface="Pretendard" pitchFamily="34" charset="-122"/>
                 <a:cs typeface="Pretendard" pitchFamily="34" charset="-120"/>
               </a:rPr>
-              <a:t>영상은 ‘일부’ 기능만 필요하다</a:t>
+              <a:t>얼마나 걸리나</a:t>
             </a:r>
             <a:endParaRPr lang="en-US" sz="2600" dirty="0"/>
           </a:p>
@@ -9548,7 +9882,7 @@
                 <a:ea typeface="Pretendard" pitchFamily="34" charset="-122"/>
                 <a:cs typeface="Pretendard" pitchFamily="34" charset="-120"/>
               </a:rPr>
-              <a:t>이미 문서화된 기능엔 불필요. 로그인 뒤 화면 흐름인 기능만 영상이 도움이 됩니다.</a:t>
+              <a:t>문서 구조만이면 약 1주, ○ 공백 기능을 영상으로 채우면 약 2주. (추정치)</a:t>
             </a:r>
             <a:endParaRPr lang="en-US" sz="1500" dirty="0"/>
           </a:p>
@@ -9640,12 +9974,12 @@
         </p:nvSpPr>
         <p:spPr>
           <a:xfrm>
-            <a:off x="777240" y="2450592"/>
-            <a:ext cx="5120640" cy="1965960"/>
+            <a:off x="777240" y="2487168"/>
+            <a:ext cx="5120640" cy="2788920"/>
           </a:xfrm>
           <a:prstGeom prst="roundRect">
             <a:avLst>
-              <a:gd name="adj" fmla="val 6512"/>
+              <a:gd name="adj" fmla="val 4590"/>
             </a:avLst>
           </a:prstGeom>
           <a:solidFill>
@@ -9667,8 +10001,8 @@
         </p:nvSpPr>
         <p:spPr>
           <a:xfrm>
-            <a:off x="1069848" y="2670048"/>
-            <a:ext cx="4572000" cy="274320"/>
+            <a:off x="1088136" y="2743200"/>
+            <a:ext cx="4498848" cy="320040"/>
           </a:xfrm>
           <a:prstGeom prst="rect">
             <a:avLst/>
@@ -9687,17 +10021,17 @@
               <a:buNone/>
             </a:pPr>
             <a:r>
-              <a:rPr lang="en-US" sz="1500" dirty="0">
-                <a:solidFill>
-                  <a:srgbClr val="6E6E73"/>
+              <a:rPr lang="en-US" sz="1600" dirty="0">
+                <a:solidFill>
+                  <a:srgbClr val="1D1D1F"/>
                 </a:solidFill>
                 <a:latin typeface="Pretendard SemiBold" pitchFamily="34" charset="0"/>
                 <a:ea typeface="Pretendard SemiBold" pitchFamily="34" charset="-122"/>
                 <a:cs typeface="Pretendard SemiBold" pitchFamily="34" charset="-120"/>
               </a:rPr>
-              <a:t>영상 불필요</a:t>
-            </a:r>
-            <a:endParaRPr lang="en-US" sz="1500" dirty="0"/>
+              <a:t>문서 구조 구축</a:t>
+            </a:r>
+            <a:endParaRPr lang="en-US" sz="1600" dirty="0"/>
           </a:p>
         </p:txBody>
       </p:sp>
@@ -9709,8 +10043,8 @@
         </p:nvSpPr>
         <p:spPr>
           <a:xfrm>
-            <a:off x="1069848" y="3090672"/>
-            <a:ext cx="4572000" cy="274320"/>
+            <a:off x="1088136" y="3264408"/>
+            <a:ext cx="3291840" cy="320040"/>
           </a:xfrm>
           <a:prstGeom prst="rect">
             <a:avLst/>
@@ -9729,49 +10063,7 @@
               <a:buNone/>
             </a:pPr>
             <a:r>
-              <a:rPr lang="en-US" sz="1250" dirty="0">
-                <a:solidFill>
-                  <a:srgbClr val="1D1D1F"/>
-                </a:solidFill>
-                <a:latin typeface="Pretendard SemiBold" pitchFamily="34" charset="0"/>
-                <a:ea typeface="Pretendard SemiBold" pitchFamily="34" charset="-122"/>
-                <a:cs typeface="Pretendard SemiBold" pitchFamily="34" charset="-120"/>
-              </a:rPr>
-              <a:t>이미 텍스트로 정리된 ● 기능</a:t>
-            </a:r>
-            <a:endParaRPr lang="en-US" sz="1250" dirty="0"/>
-          </a:p>
-        </p:txBody>
-      </p:sp>
-      <p:sp>
-        <p:nvSpPr>
-          <p:cNvPr id="11" name="Text 9"/>
-          <p:cNvSpPr/>
-          <p:nvPr/>
-        </p:nvSpPr>
-        <p:spPr>
-          <a:xfrm>
-            <a:off x="1069848" y="3419856"/>
-            <a:ext cx="4535424" cy="822960"/>
-          </a:xfrm>
-          <a:prstGeom prst="rect">
-            <a:avLst/>
-          </a:prstGeom>
-          <a:noFill/>
-          <a:ln/>
-        </p:spPr>
-        <p:txBody>
-          <a:bodyPr wrap="square" lIns="0" tIns="0" rIns="0" bIns="0" rtlCol="0" anchor="t"/>
-          <a:lstStyle/>
-          <a:p>
-            <a:pPr algn="l" indent="0" marL="0">
-              <a:lnSpc>
-                <a:spcPct val="140000"/>
-              </a:lnSpc>
-              <a:buNone/>
-            </a:pPr>
-            <a:r>
-              <a:rPr lang="en-US" sz="1200" dirty="0">
+              <a:rPr lang="en-US" sz="1300" dirty="0">
                 <a:solidFill>
                   <a:srgbClr val="55555A"/>
                 </a:solidFill>
@@ -9779,7 +10071,366 @@
                 <a:ea typeface="Pretendard" pitchFamily="34" charset="-122"/>
                 <a:cs typeface="Pretendard" pitchFamily="34" charset="-120"/>
               </a:rPr>
-              <a:t>카드 15종 · 카드 자동화 · URL 게시 · 이미지 라이브러리 — 스킬·문서가 이미 있어 화면 녹화가 새로 알려줄 게 없습니다.</a:t>
+              <a:t>첫 볼트 경로 문서</a:t>
+            </a:r>
+            <a:endParaRPr lang="en-US" sz="1300" dirty="0"/>
+          </a:p>
+        </p:txBody>
+      </p:sp>
+      <p:sp>
+        <p:nvSpPr>
+          <p:cNvPr id="11" name="Text 9"/>
+          <p:cNvSpPr/>
+          <p:nvPr/>
+        </p:nvSpPr>
+        <p:spPr>
+          <a:xfrm>
+            <a:off x="4343400" y="3264408"/>
+            <a:ext cx="1280160" cy="320040"/>
+          </a:xfrm>
+          <a:prstGeom prst="rect">
+            <a:avLst/>
+          </a:prstGeom>
+          <a:noFill/>
+          <a:ln/>
+        </p:spPr>
+        <p:txBody>
+          <a:bodyPr wrap="square" lIns="0" tIns="0" rIns="0" bIns="0" rtlCol="0" anchor="t"/>
+          <a:lstStyle/>
+          <a:p>
+            <a:pPr algn="r" indent="0" marL="0">
+              <a:lnSpc>
+                <a:spcPct val="130000"/>
+              </a:lnSpc>
+              <a:buNone/>
+            </a:pPr>
+            <a:r>
+              <a:rPr lang="en-US" sz="1300" dirty="0">
+                <a:solidFill>
+                  <a:srgbClr val="1D1D1F"/>
+                </a:solidFill>
+                <a:latin typeface="Pretendard Medium" pitchFamily="34" charset="0"/>
+                <a:ea typeface="Pretendard Medium" pitchFamily="34" charset="-122"/>
+                <a:cs typeface="Pretendard Medium" pitchFamily="34" charset="-120"/>
+              </a:rPr>
+              <a:t>0.5~1일</a:t>
+            </a:r>
+            <a:endParaRPr lang="en-US" sz="1300" dirty="0"/>
+          </a:p>
+        </p:txBody>
+      </p:sp>
+      <p:sp>
+        <p:nvSpPr>
+          <p:cNvPr id="12" name="Text 10"/>
+          <p:cNvSpPr/>
+          <p:nvPr/>
+        </p:nvSpPr>
+        <p:spPr>
+          <a:xfrm>
+            <a:off x="1088136" y="3666744"/>
+            <a:ext cx="3291840" cy="320040"/>
+          </a:xfrm>
+          <a:prstGeom prst="rect">
+            <a:avLst/>
+          </a:prstGeom>
+          <a:noFill/>
+          <a:ln/>
+        </p:spPr>
+        <p:txBody>
+          <a:bodyPr wrap="square" lIns="0" tIns="0" rIns="0" bIns="0" rtlCol="0" anchor="t"/>
+          <a:lstStyle/>
+          <a:p>
+            <a:pPr algn="l" indent="0" marL="0">
+              <a:lnSpc>
+                <a:spcPct val="130000"/>
+              </a:lnSpc>
+              <a:buNone/>
+            </a:pPr>
+            <a:r>
+              <a:rPr lang="en-US" sz="1300" dirty="0">
+                <a:solidFill>
+                  <a:srgbClr val="55555A"/>
+                </a:solidFill>
+                <a:latin typeface="Pretendard" pitchFamily="34" charset="0"/>
+                <a:ea typeface="Pretendard" pitchFamily="34" charset="-122"/>
+                <a:cs typeface="Pretendard" pitchFamily="34" charset="-120"/>
+              </a:rPr>
+              <a:t>나머지 4볼트 확산</a:t>
+            </a:r>
+            <a:endParaRPr lang="en-US" sz="1300" dirty="0"/>
+          </a:p>
+        </p:txBody>
+      </p:sp>
+      <p:sp>
+        <p:nvSpPr>
+          <p:cNvPr id="13" name="Text 11"/>
+          <p:cNvSpPr/>
+          <p:nvPr/>
+        </p:nvSpPr>
+        <p:spPr>
+          <a:xfrm>
+            <a:off x="4343400" y="3666744"/>
+            <a:ext cx="1280160" cy="320040"/>
+          </a:xfrm>
+          <a:prstGeom prst="rect">
+            <a:avLst/>
+          </a:prstGeom>
+          <a:noFill/>
+          <a:ln/>
+        </p:spPr>
+        <p:txBody>
+          <a:bodyPr wrap="square" lIns="0" tIns="0" rIns="0" bIns="0" rtlCol="0" anchor="t"/>
+          <a:lstStyle/>
+          <a:p>
+            <a:pPr algn="r" indent="0" marL="0">
+              <a:lnSpc>
+                <a:spcPct val="130000"/>
+              </a:lnSpc>
+              <a:buNone/>
+            </a:pPr>
+            <a:r>
+              <a:rPr lang="en-US" sz="1300" dirty="0">
+                <a:solidFill>
+                  <a:srgbClr val="1D1D1F"/>
+                </a:solidFill>
+                <a:latin typeface="Pretendard Medium" pitchFamily="34" charset="0"/>
+                <a:ea typeface="Pretendard Medium" pitchFamily="34" charset="-122"/>
+                <a:cs typeface="Pretendard Medium" pitchFamily="34" charset="-120"/>
+              </a:rPr>
+              <a:t>2~3일</a:t>
+            </a:r>
+            <a:endParaRPr lang="en-US" sz="1300" dirty="0"/>
+          </a:p>
+        </p:txBody>
+      </p:sp>
+      <p:sp>
+        <p:nvSpPr>
+          <p:cNvPr id="14" name="Text 12"/>
+          <p:cNvSpPr/>
+          <p:nvPr/>
+        </p:nvSpPr>
+        <p:spPr>
+          <a:xfrm>
+            <a:off x="1088136" y="4069080"/>
+            <a:ext cx="3291840" cy="320040"/>
+          </a:xfrm>
+          <a:prstGeom prst="rect">
+            <a:avLst/>
+          </a:prstGeom>
+          <a:noFill/>
+          <a:ln/>
+        </p:spPr>
+        <p:txBody>
+          <a:bodyPr wrap="square" lIns="0" tIns="0" rIns="0" bIns="0" rtlCol="0" anchor="t"/>
+          <a:lstStyle/>
+          <a:p>
+            <a:pPr algn="l" indent="0" marL="0">
+              <a:lnSpc>
+                <a:spcPct val="130000"/>
+              </a:lnSpc>
+              <a:buNone/>
+            </a:pPr>
+            <a:r>
+              <a:rPr lang="en-US" sz="1300" dirty="0">
+                <a:solidFill>
+                  <a:srgbClr val="55555A"/>
+                </a:solidFill>
+                <a:latin typeface="Pretendard" pitchFamily="34" charset="0"/>
+                <a:ea typeface="Pretendard" pitchFamily="34" charset="-122"/>
+                <a:cs typeface="Pretendard" pitchFamily="34" charset="-120"/>
+              </a:rPr>
+              <a:t>연결 · 검증</a:t>
+            </a:r>
+            <a:endParaRPr lang="en-US" sz="1300" dirty="0"/>
+          </a:p>
+        </p:txBody>
+      </p:sp>
+      <p:sp>
+        <p:nvSpPr>
+          <p:cNvPr id="15" name="Text 13"/>
+          <p:cNvSpPr/>
+          <p:nvPr/>
+        </p:nvSpPr>
+        <p:spPr>
+          <a:xfrm>
+            <a:off x="4343400" y="4069080"/>
+            <a:ext cx="1280160" cy="320040"/>
+          </a:xfrm>
+          <a:prstGeom prst="rect">
+            <a:avLst/>
+          </a:prstGeom>
+          <a:noFill/>
+          <a:ln/>
+        </p:spPr>
+        <p:txBody>
+          <a:bodyPr wrap="square" lIns="0" tIns="0" rIns="0" bIns="0" rtlCol="0" anchor="t"/>
+          <a:lstStyle/>
+          <a:p>
+            <a:pPr algn="r" indent="0" marL="0">
+              <a:lnSpc>
+                <a:spcPct val="130000"/>
+              </a:lnSpc>
+              <a:buNone/>
+            </a:pPr>
+            <a:r>
+              <a:rPr lang="en-US" sz="1300" dirty="0">
+                <a:solidFill>
+                  <a:srgbClr val="1D1D1F"/>
+                </a:solidFill>
+                <a:latin typeface="Pretendard Medium" pitchFamily="34" charset="0"/>
+                <a:ea typeface="Pretendard Medium" pitchFamily="34" charset="-122"/>
+                <a:cs typeface="Pretendard Medium" pitchFamily="34" charset="-120"/>
+              </a:rPr>
+              <a:t>0.5일</a:t>
+            </a:r>
+            <a:endParaRPr lang="en-US" sz="1300" dirty="0"/>
+          </a:p>
+        </p:txBody>
+      </p:sp>
+      <p:sp>
+        <p:nvSpPr>
+          <p:cNvPr id="16" name="Text 14"/>
+          <p:cNvSpPr/>
+          <p:nvPr/>
+        </p:nvSpPr>
+        <p:spPr>
+          <a:xfrm>
+            <a:off x="1088136" y="4471416"/>
+            <a:ext cx="3291840" cy="320040"/>
+          </a:xfrm>
+          <a:prstGeom prst="rect">
+            <a:avLst/>
+          </a:prstGeom>
+          <a:noFill/>
+          <a:ln/>
+        </p:spPr>
+        <p:txBody>
+          <a:bodyPr wrap="square" lIns="0" tIns="0" rIns="0" bIns="0" rtlCol="0" anchor="t"/>
+          <a:lstStyle/>
+          <a:p>
+            <a:pPr algn="l" indent="0" marL="0">
+              <a:lnSpc>
+                <a:spcPct val="130000"/>
+              </a:lnSpc>
+              <a:buNone/>
+            </a:pPr>
+            <a:r>
+              <a:rPr lang="en-US" sz="1300" dirty="0">
+                <a:solidFill>
+                  <a:srgbClr val="55555A"/>
+                </a:solidFill>
+                <a:latin typeface="Pretendard" pitchFamily="34" charset="0"/>
+                <a:ea typeface="Pretendard" pitchFamily="34" charset="-122"/>
+                <a:cs typeface="Pretendard" pitchFamily="34" charset="-120"/>
+              </a:rPr>
+              <a:t>플러그인 배포</a:t>
+            </a:r>
+            <a:endParaRPr lang="en-US" sz="1300" dirty="0"/>
+          </a:p>
+        </p:txBody>
+      </p:sp>
+      <p:sp>
+        <p:nvSpPr>
+          <p:cNvPr id="17" name="Text 15"/>
+          <p:cNvSpPr/>
+          <p:nvPr/>
+        </p:nvSpPr>
+        <p:spPr>
+          <a:xfrm>
+            <a:off x="4343400" y="4471416"/>
+            <a:ext cx="1280160" cy="320040"/>
+          </a:xfrm>
+          <a:prstGeom prst="rect">
+            <a:avLst/>
+          </a:prstGeom>
+          <a:noFill/>
+          <a:ln/>
+        </p:spPr>
+        <p:txBody>
+          <a:bodyPr wrap="square" lIns="0" tIns="0" rIns="0" bIns="0" rtlCol="0" anchor="t"/>
+          <a:lstStyle/>
+          <a:p>
+            <a:pPr algn="r" indent="0" marL="0">
+              <a:lnSpc>
+                <a:spcPct val="130000"/>
+              </a:lnSpc>
+              <a:buNone/>
+            </a:pPr>
+            <a:r>
+              <a:rPr lang="en-US" sz="1300" dirty="0">
+                <a:solidFill>
+                  <a:srgbClr val="1D1D1F"/>
+                </a:solidFill>
+                <a:latin typeface="Pretendard Medium" pitchFamily="34" charset="0"/>
+                <a:ea typeface="Pretendard Medium" pitchFamily="34" charset="-122"/>
+                <a:cs typeface="Pretendard Medium" pitchFamily="34" charset="-120"/>
+              </a:rPr>
+              <a:t>0.5~1일</a:t>
+            </a:r>
+            <a:endParaRPr lang="en-US" sz="1300" dirty="0"/>
+          </a:p>
+        </p:txBody>
+      </p:sp>
+      <p:sp>
+        <p:nvSpPr>
+          <p:cNvPr id="18" name="Shape 16"/>
+          <p:cNvSpPr/>
+          <p:nvPr/>
+        </p:nvSpPr>
+        <p:spPr>
+          <a:xfrm>
+            <a:off x="1088136" y="4818888"/>
+            <a:ext cx="4498848" cy="0"/>
+          </a:xfrm>
+          <a:prstGeom prst="line">
+            <a:avLst/>
+          </a:prstGeom>
+          <a:noFill/>
+          <a:ln w="9525">
+            <a:solidFill>
+              <a:srgbClr val="E5E7EB"/>
+            </a:solidFill>
+            <a:prstDash val="solid"/>
+          </a:ln>
+        </p:spPr>
+      </p:sp>
+      <p:sp>
+        <p:nvSpPr>
+          <p:cNvPr id="19" name="Text 17"/>
+          <p:cNvSpPr/>
+          <p:nvPr/>
+        </p:nvSpPr>
+        <p:spPr>
+          <a:xfrm>
+            <a:off x="1088136" y="4910328"/>
+            <a:ext cx="1828800" cy="274320"/>
+          </a:xfrm>
+          <a:prstGeom prst="rect">
+            <a:avLst/>
+          </a:prstGeom>
+          <a:noFill/>
+          <a:ln/>
+        </p:spPr>
+        <p:txBody>
+          <a:bodyPr wrap="square" lIns="0" tIns="0" rIns="0" bIns="0" rtlCol="0" anchor="t"/>
+          <a:lstStyle/>
+          <a:p>
+            <a:pPr algn="l" indent="0" marL="0">
+              <a:lnSpc>
+                <a:spcPct val="130000"/>
+              </a:lnSpc>
+              <a:buNone/>
+            </a:pPr>
+            <a:r>
+              <a:rPr lang="en-US" sz="1200" dirty="0">
+                <a:solidFill>
+                  <a:srgbClr val="6E6E73"/>
+                </a:solidFill>
+                <a:latin typeface="Pretendard Medium" pitchFamily="34" charset="0"/>
+                <a:ea typeface="Pretendard Medium" pitchFamily="34" charset="-122"/>
+                <a:cs typeface="Pretendard Medium" pitchFamily="34" charset="-120"/>
+              </a:rPr>
+              <a:t>합계</a:t>
             </a:r>
             <a:endParaRPr lang="en-US" sz="1200" dirty="0"/>
           </a:p>
@@ -9787,18 +10438,60 @@
       </p:sp>
       <p:sp>
         <p:nvSpPr>
-          <p:cNvPr id="12" name="Shape 10"/>
-          <p:cNvSpPr/>
-          <p:nvPr/>
-        </p:nvSpPr>
-        <p:spPr>
-          <a:xfrm>
-            <a:off x="6309360" y="2450592"/>
-            <a:ext cx="5120640" cy="1965960"/>
+          <p:cNvPr id="20" name="Text 18"/>
+          <p:cNvSpPr/>
+          <p:nvPr/>
+        </p:nvSpPr>
+        <p:spPr>
+          <a:xfrm>
+            <a:off x="3703320" y="4846320"/>
+            <a:ext cx="1920240" cy="365760"/>
+          </a:xfrm>
+          <a:prstGeom prst="rect">
+            <a:avLst/>
+          </a:prstGeom>
+          <a:noFill/>
+          <a:ln/>
+        </p:spPr>
+        <p:txBody>
+          <a:bodyPr wrap="square" lIns="0" tIns="0" rIns="0" bIns="0" rtlCol="0" anchor="t"/>
+          <a:lstStyle/>
+          <a:p>
+            <a:pPr algn="r" indent="0" marL="0">
+              <a:lnSpc>
+                <a:spcPct val="130000"/>
+              </a:lnSpc>
+              <a:buNone/>
+            </a:pPr>
+            <a:r>
+              <a:rPr lang="en-US" sz="2000" b="1" spc="-40" kern="0" dirty="0">
+                <a:solidFill>
+                  <a:srgbClr val="6C4CFF"/>
+                </a:solidFill>
+                <a:latin typeface="Pretendard" pitchFamily="34" charset="0"/>
+                <a:ea typeface="Pretendard" pitchFamily="34" charset="-122"/>
+                <a:cs typeface="Pretendard" pitchFamily="34" charset="-120"/>
+              </a:rPr>
+              <a:t>≈ 1주</a:t>
+            </a:r>
+            <a:endParaRPr lang="en-US" sz="2000" dirty="0"/>
+          </a:p>
+        </p:txBody>
+      </p:sp>
+      <p:sp>
+        <p:nvSpPr>
+          <p:cNvPr id="21" name="Shape 19"/>
+          <p:cNvSpPr/>
+          <p:nvPr/>
+        </p:nvSpPr>
+        <p:spPr>
+          <a:xfrm>
+            <a:off x="6309360" y="2487168"/>
+            <a:ext cx="5120640" cy="2788920"/>
           </a:xfrm>
           <a:prstGeom prst="roundRect">
             <a:avLst>
-              <a:gd name="adj" fmla="val 6512"/>
+              <a:gd name="adj" fmla="val 4590"/>
             </a:avLst>
           </a:prstGeom>
           <a:solidFill>
@@ -9814,14 +10507,14 @@
       </p:sp>
       <p:sp>
         <p:nvSpPr>
-          <p:cNvPr id="13" name="Text 11"/>
-          <p:cNvSpPr/>
-          <p:nvPr/>
-        </p:nvSpPr>
-        <p:spPr>
-          <a:xfrm>
-            <a:off x="6601968" y="2670048"/>
-            <a:ext cx="4572000" cy="274320"/>
+          <p:cNvPr id="22" name="Text 20"/>
+          <p:cNvSpPr/>
+          <p:nvPr/>
+        </p:nvSpPr>
+        <p:spPr>
+          <a:xfrm>
+            <a:off x="6620256" y="2743200"/>
+            <a:ext cx="4498848" cy="320040"/>
           </a:xfrm>
           <a:prstGeom prst="rect">
             <a:avLst/>
@@ -9840,7 +10533,7 @@
               <a:buNone/>
             </a:pPr>
             <a:r>
-              <a:rPr lang="en-US" sz="1500" b="1" dirty="0">
+              <a:rPr lang="en-US" sz="1600" b="1" dirty="0">
                 <a:solidFill>
                   <a:srgbClr val="6C4CFF"/>
                 </a:solidFill>
@@ -9848,22 +10541,22 @@
                 <a:ea typeface="Pretendard" pitchFamily="34" charset="-122"/>
                 <a:cs typeface="Pretendard" pitchFamily="34" charset="-120"/>
               </a:rPr>
-              <a:t>영상 필요</a:t>
-            </a:r>
-            <a:endParaRPr lang="en-US" sz="1500" dirty="0"/>
-          </a:p>
-        </p:txBody>
-      </p:sp>
-      <p:sp>
-        <p:nvSpPr>
-          <p:cNvPr id="14" name="Text 12"/>
-          <p:cNvSpPr/>
-          <p:nvPr/>
-        </p:nvSpPr>
-        <p:spPr>
-          <a:xfrm>
-            <a:off x="6601968" y="3090672"/>
-            <a:ext cx="4572000" cy="274320"/>
+              <a:t>영상까지 문서화</a:t>
+            </a:r>
+            <a:endParaRPr lang="en-US" sz="1600" dirty="0"/>
+          </a:p>
+        </p:txBody>
+      </p:sp>
+      <p:sp>
+        <p:nvSpPr>
+          <p:cNvPr id="23" name="Text 21"/>
+          <p:cNvSpPr/>
+          <p:nvPr/>
+        </p:nvSpPr>
+        <p:spPr>
+          <a:xfrm>
+            <a:off x="6620256" y="3264408"/>
+            <a:ext cx="3657600" cy="320040"/>
           </a:xfrm>
           <a:prstGeom prst="rect">
             <a:avLst/>
@@ -9883,48 +10576,6 @@
             </a:pPr>
             <a:r>
               <a:rPr lang="en-US" sz="1250" dirty="0">
-                <a:solidFill>
-                  <a:srgbClr val="1D1D1F"/>
-                </a:solidFill>
-                <a:latin typeface="Pretendard SemiBold" pitchFamily="34" charset="0"/>
-                <a:ea typeface="Pretendard SemiBold" pitchFamily="34" charset="-122"/>
-                <a:cs typeface="Pretendard SemiBold" pitchFamily="34" charset="-120"/>
-              </a:rPr>
-              <a:t>로그인 뒤에서만 보이는 ○ 공백 기능</a:t>
-            </a:r>
-            <a:endParaRPr lang="en-US" sz="1250" dirty="0"/>
-          </a:p>
-        </p:txBody>
-      </p:sp>
-      <p:sp>
-        <p:nvSpPr>
-          <p:cNvPr id="15" name="Text 13"/>
-          <p:cNvSpPr/>
-          <p:nvPr/>
-        </p:nvSpPr>
-        <p:spPr>
-          <a:xfrm>
-            <a:off x="6601968" y="3419856"/>
-            <a:ext cx="4535424" cy="822960"/>
-          </a:xfrm>
-          <a:prstGeom prst="rect">
-            <a:avLst/>
-          </a:prstGeom>
-          <a:noFill/>
-          <a:ln/>
-        </p:spPr>
-        <p:txBody>
-          <a:bodyPr wrap="square" lIns="0" tIns="0" rIns="0" bIns="0" rtlCol="0" anchor="t"/>
-          <a:lstStyle/>
-          <a:p>
-            <a:pPr algn="l" indent="0" marL="0">
-              <a:lnSpc>
-                <a:spcPct val="140000"/>
-              </a:lnSpc>
-              <a:buNone/>
-            </a:pPr>
-            <a:r>
-              <a:rPr lang="en-US" sz="1200" dirty="0">
                 <a:solidFill>
                   <a:srgbClr val="1D1D1F"/>
                 </a:solidFill>
@@ -9932,22 +10583,22 @@
                 <a:ea typeface="Pretendard" pitchFamily="34" charset="-122"/>
                 <a:cs typeface="Pretendard" pitchFamily="34" charset="-120"/>
               </a:rPr>
-              <a:t>통계 · 계정 · 요금 · 버전 · 공유 복제 · 데이터 연결 — UI 흐름이라 텍스트로 유추 불가, 화면이 정확한 문서화에 도움.</a:t>
-            </a:r>
-            <a:endParaRPr lang="en-US" sz="1200" dirty="0"/>
-          </a:p>
-        </p:txBody>
-      </p:sp>
-      <p:sp>
-        <p:nvSpPr>
-          <p:cNvPr id="16" name="Text 14"/>
-          <p:cNvSpPr/>
-          <p:nvPr/>
-        </p:nvSpPr>
-        <p:spPr>
-          <a:xfrm>
-            <a:off x="777240" y="4617720"/>
-            <a:ext cx="10637215" cy="274320"/>
+              <a:t>○ 공백 기능 12개 (통계·계정·요금)</a:t>
+            </a:r>
+            <a:endParaRPr lang="en-US" sz="1250" dirty="0"/>
+          </a:p>
+        </p:txBody>
+      </p:sp>
+      <p:sp>
+        <p:nvSpPr>
+          <p:cNvPr id="24" name="Text 22"/>
+          <p:cNvSpPr/>
+          <p:nvPr/>
+        </p:nvSpPr>
+        <p:spPr>
+          <a:xfrm>
+            <a:off x="6620256" y="3666744"/>
+            <a:ext cx="3657600" cy="320040"/>
           </a:xfrm>
           <a:prstGeom prst="rect">
             <a:avLst/>
@@ -9966,15 +10617,99 @@
               <a:buNone/>
             </a:pPr>
             <a:r>
+              <a:rPr lang="en-US" sz="1250" dirty="0">
+                <a:solidFill>
+                  <a:srgbClr val="1D1D1F"/>
+                </a:solidFill>
+                <a:latin typeface="Pretendard" pitchFamily="34" charset="0"/>
+                <a:ea typeface="Pretendard" pitchFamily="34" charset="-122"/>
+                <a:cs typeface="Pretendard" pitchFamily="34" charset="-120"/>
+              </a:rPr>
+              <a:t>◐ 부분 기능 9개 보강</a:t>
+            </a:r>
+            <a:endParaRPr lang="en-US" sz="1250" dirty="0"/>
+          </a:p>
+        </p:txBody>
+      </p:sp>
+      <p:sp>
+        <p:nvSpPr>
+          <p:cNvPr id="25" name="Text 23"/>
+          <p:cNvSpPr/>
+          <p:nvPr/>
+        </p:nvSpPr>
+        <p:spPr>
+          <a:xfrm>
+            <a:off x="6620256" y="4069080"/>
+            <a:ext cx="3657600" cy="320040"/>
+          </a:xfrm>
+          <a:prstGeom prst="rect">
+            <a:avLst/>
+          </a:prstGeom>
+          <a:noFill/>
+          <a:ln/>
+        </p:spPr>
+        <p:txBody>
+          <a:bodyPr wrap="square" lIns="0" tIns="0" rIns="0" bIns="0" rtlCol="0" anchor="t"/>
+          <a:lstStyle/>
+          <a:p>
+            <a:pPr algn="l" indent="0" marL="0">
+              <a:lnSpc>
+                <a:spcPct val="130000"/>
+              </a:lnSpc>
+              <a:buNone/>
+            </a:pPr>
+            <a:r>
+              <a:rPr lang="en-US" sz="1250" dirty="0">
+                <a:solidFill>
+                  <a:srgbClr val="1D1D1F"/>
+                </a:solidFill>
+                <a:latin typeface="Pretendard" pitchFamily="34" charset="0"/>
+                <a:ea typeface="Pretendard" pitchFamily="34" charset="-122"/>
+                <a:cs typeface="Pretendard" pitchFamily="34" charset="-120"/>
+              </a:rPr>
+              <a:t>영상 수령 → 프레임 추출·작성</a:t>
+            </a:r>
+            <a:endParaRPr lang="en-US" sz="1250" dirty="0"/>
+          </a:p>
+        </p:txBody>
+      </p:sp>
+      <p:sp>
+        <p:nvSpPr>
+          <p:cNvPr id="26" name="Text 24"/>
+          <p:cNvSpPr/>
+          <p:nvPr/>
+        </p:nvSpPr>
+        <p:spPr>
+          <a:xfrm>
+            <a:off x="10058400" y="4069080"/>
+            <a:ext cx="1097280" cy="320040"/>
+          </a:xfrm>
+          <a:prstGeom prst="rect">
+            <a:avLst/>
+          </a:prstGeom>
+          <a:noFill/>
+          <a:ln/>
+        </p:spPr>
+        <p:txBody>
+          <a:bodyPr wrap="square" lIns="0" tIns="0" rIns="0" bIns="0" rtlCol="0" anchor="t"/>
+          <a:lstStyle/>
+          <a:p>
+            <a:pPr algn="r" indent="0" marL="0">
+              <a:lnSpc>
+                <a:spcPct val="130000"/>
+              </a:lnSpc>
+              <a:buNone/>
+            </a:pPr>
+            <a:r>
               <a:rPr lang="en-US" sz="1300" dirty="0">
                 <a:solidFill>
-                  <a:srgbClr val="6C4CFF"/>
-                </a:solidFill>
-                <a:latin typeface="Pretendard SemiBold" pitchFamily="34" charset="0"/>
-                <a:ea typeface="Pretendard SemiBold" pitchFamily="34" charset="-122"/>
-                <a:cs typeface="Pretendard SemiBold" pitchFamily="34" charset="-120"/>
-              </a:rPr>
-              <a:t>영상을 추가한다면 — 어디에 아카이빙</a:t>
+                  <a:srgbClr val="1D1D1F"/>
+                </a:solidFill>
+                <a:latin typeface="Pretendard Medium" pitchFamily="34" charset="0"/>
+                <a:ea typeface="Pretendard Medium" pitchFamily="34" charset="-122"/>
+                <a:cs typeface="Pretendard Medium" pitchFamily="34" charset="-120"/>
+              </a:rPr>
+              <a:t>+3~5일</a:t>
             </a:r>
             <a:endParaRPr lang="en-US" sz="1300" dirty="0"/>
           </a:p>
@@ -9982,24 +10717,20 @@
       </p:sp>
       <p:sp>
         <p:nvSpPr>
-          <p:cNvPr id="17" name="Shape 15"/>
-          <p:cNvSpPr/>
-          <p:nvPr/>
-        </p:nvSpPr>
-        <p:spPr>
-          <a:xfrm>
-            <a:off x="777240" y="4956048"/>
-            <a:ext cx="3362858" cy="1051560"/>
-          </a:xfrm>
-          <a:prstGeom prst="roundRect">
-            <a:avLst>
-              <a:gd name="adj" fmla="val 8696"/>
-            </a:avLst>
-          </a:prstGeom>
-          <a:solidFill>
-            <a:srgbClr val="FFFFFF"/>
-          </a:solidFill>
-          <a:ln w="12700">
+          <p:cNvPr id="27" name="Shape 25"/>
+          <p:cNvSpPr/>
+          <p:nvPr/>
+        </p:nvSpPr>
+        <p:spPr>
+          <a:xfrm>
+            <a:off x="6620256" y="4818888"/>
+            <a:ext cx="4498848" cy="0"/>
+          </a:xfrm>
+          <a:prstGeom prst="line">
+            <a:avLst/>
+          </a:prstGeom>
+          <a:noFill/>
+          <a:ln w="9525">
             <a:solidFill>
               <a:srgbClr val="E5E7EB"/>
             </a:solidFill>
@@ -10009,14 +10740,14 @@
       </p:sp>
       <p:sp>
         <p:nvSpPr>
-          <p:cNvPr id="18" name="Text 16"/>
-          <p:cNvSpPr/>
-          <p:nvPr/>
-        </p:nvSpPr>
-        <p:spPr>
-          <a:xfrm>
-            <a:off x="996696" y="5102352"/>
-            <a:ext cx="2923946" cy="274320"/>
+          <p:cNvPr id="28" name="Text 26"/>
+          <p:cNvSpPr/>
+          <p:nvPr/>
+        </p:nvSpPr>
+        <p:spPr>
+          <a:xfrm>
+            <a:off x="6620256" y="4910328"/>
+            <a:ext cx="2743200" cy="274320"/>
           </a:xfrm>
           <a:prstGeom prst="rect">
             <a:avLst/>
@@ -10035,141 +10766,72 @@
               <a:buNone/>
             </a:pPr>
             <a:r>
-              <a:rPr lang="en-US" sz="1250" dirty="0">
+              <a:rPr lang="en-US" sz="1200" dirty="0">
+                <a:solidFill>
+                  <a:srgbClr val="6E6E73"/>
+                </a:solidFill>
+                <a:latin typeface="Pretendard Medium" pitchFamily="34" charset="0"/>
+                <a:ea typeface="Pretendard Medium" pitchFamily="34" charset="-122"/>
+                <a:cs typeface="Pretendard Medium" pitchFamily="34" charset="-120"/>
+              </a:rPr>
+              <a:t>문서 구조 + 영상</a:t>
+            </a:r>
+            <a:endParaRPr lang="en-US" sz="1200" dirty="0"/>
+          </a:p>
+        </p:txBody>
+      </p:sp>
+      <p:sp>
+        <p:nvSpPr>
+          <p:cNvPr id="29" name="Text 27"/>
+          <p:cNvSpPr/>
+          <p:nvPr/>
+        </p:nvSpPr>
+        <p:spPr>
+          <a:xfrm>
+            <a:off x="9235440" y="4846320"/>
+            <a:ext cx="1920240" cy="365760"/>
+          </a:xfrm>
+          <a:prstGeom prst="rect">
+            <a:avLst/>
+          </a:prstGeom>
+          <a:noFill/>
+          <a:ln/>
+        </p:spPr>
+        <p:txBody>
+          <a:bodyPr wrap="square" lIns="0" tIns="0" rIns="0" bIns="0" rtlCol="0" anchor="t"/>
+          <a:lstStyle/>
+          <a:p>
+            <a:pPr algn="r" indent="0" marL="0">
+              <a:lnSpc>
+                <a:spcPct val="130000"/>
+              </a:lnSpc>
+              <a:buNone/>
+            </a:pPr>
+            <a:r>
+              <a:rPr lang="en-US" sz="2000" b="1" spc="-40" kern="0" dirty="0">
                 <a:solidFill>
                   <a:srgbClr val="6C4CFF"/>
-                </a:solidFill>
-                <a:latin typeface="Pretendard SemiBold" pitchFamily="34" charset="0"/>
-                <a:ea typeface="Pretendard SemiBold" pitchFamily="34" charset="-122"/>
-                <a:cs typeface="Pretendard SemiBold" pitchFamily="34" charset="-120"/>
-              </a:rPr>
-              <a:t>원본 영상</a:t>
-            </a:r>
-            <a:endParaRPr lang="en-US" sz="1250" dirty="0"/>
-          </a:p>
-        </p:txBody>
-      </p:sp>
-      <p:sp>
-        <p:nvSpPr>
-          <p:cNvPr id="19" name="Text 17"/>
-          <p:cNvSpPr/>
-          <p:nvPr/>
-        </p:nvSpPr>
-        <p:spPr>
-          <a:xfrm>
-            <a:off x="996696" y="5394960"/>
-            <a:ext cx="2923946" cy="320040"/>
-          </a:xfrm>
-          <a:prstGeom prst="rect">
-            <a:avLst/>
-          </a:prstGeom>
-          <a:noFill/>
-          <a:ln/>
-        </p:spPr>
-        <p:txBody>
-          <a:bodyPr wrap="square" lIns="0" tIns="0" rIns="0" bIns="0" rtlCol="0" anchor="t"/>
-          <a:lstStyle/>
-          <a:p>
-            <a:pPr algn="l" indent="0" marL="0">
-              <a:lnSpc>
-                <a:spcPct val="120000"/>
-              </a:lnSpc>
-              <a:buNone/>
-            </a:pPr>
-            <a:r>
-              <a:rPr lang="en-US" sz="1100" dirty="0">
-                <a:solidFill>
-                  <a:srgbClr val="1D1D1F"/>
-                </a:solidFill>
-                <a:latin typeface="Pretendard SemiBold" pitchFamily="34" charset="0"/>
-                <a:ea typeface="Pretendard SemiBold" pitchFamily="34" charset="-122"/>
-                <a:cs typeface="Pretendard SemiBold" pitchFamily="34" charset="-120"/>
-              </a:rPr>
-              <a:t>git 밖 클라우드(구글 드라이브 등) + 문서에 링크</a:t>
-            </a:r>
-            <a:endParaRPr lang="en-US" sz="1100" dirty="0"/>
-          </a:p>
-        </p:txBody>
-      </p:sp>
-      <p:sp>
-        <p:nvSpPr>
-          <p:cNvPr id="20" name="Text 18"/>
-          <p:cNvSpPr/>
-          <p:nvPr/>
-        </p:nvSpPr>
-        <p:spPr>
-          <a:xfrm>
-            <a:off x="996696" y="5669280"/>
-            <a:ext cx="2923946" cy="292608"/>
-          </a:xfrm>
-          <a:prstGeom prst="rect">
-            <a:avLst/>
-          </a:prstGeom>
-          <a:noFill/>
-          <a:ln/>
-        </p:spPr>
-        <p:txBody>
-          <a:bodyPr wrap="square" lIns="0" tIns="0" rIns="0" bIns="0" rtlCol="0" anchor="t"/>
-          <a:lstStyle/>
-          <a:p>
-            <a:pPr algn="l" indent="0" marL="0">
-              <a:lnSpc>
-                <a:spcPct val="120000"/>
-              </a:lnSpc>
-              <a:buNone/>
-            </a:pPr>
-            <a:r>
-              <a:rPr lang="en-US" sz="1000" dirty="0">
-                <a:solidFill>
-                  <a:srgbClr val="6E6E73"/>
                 </a:solidFill>
                 <a:latin typeface="Pretendard" pitchFamily="34" charset="0"/>
                 <a:ea typeface="Pretendard" pitchFamily="34" charset="-122"/>
                 <a:cs typeface="Pretendard" pitchFamily="34" charset="-120"/>
               </a:rPr>
-              <a:t>용량 문제 — 커밋하면 볼트가 무거워짐 (marketing 517MB 전례)</a:t>
-            </a:r>
-            <a:endParaRPr lang="en-US" sz="1000" dirty="0"/>
-          </a:p>
-        </p:txBody>
-      </p:sp>
-      <p:sp>
-        <p:nvSpPr>
-          <p:cNvPr id="21" name="Shape 19"/>
-          <p:cNvSpPr/>
-          <p:nvPr/>
-        </p:nvSpPr>
-        <p:spPr>
-          <a:xfrm>
-            <a:off x="4414418" y="4956048"/>
-            <a:ext cx="3362858" cy="1051560"/>
-          </a:xfrm>
-          <a:prstGeom prst="roundRect">
-            <a:avLst>
-              <a:gd name="adj" fmla="val 8696"/>
-            </a:avLst>
-          </a:prstGeom>
-          <a:solidFill>
-            <a:srgbClr val="FFFFFF"/>
-          </a:solidFill>
-          <a:ln w="12700">
-            <a:solidFill>
-              <a:srgbClr val="E5E7EB"/>
-            </a:solidFill>
-            <a:prstDash val="solid"/>
-          </a:ln>
-        </p:spPr>
-      </p:sp>
-      <p:sp>
-        <p:nvSpPr>
-          <p:cNvPr id="22" name="Text 20"/>
-          <p:cNvSpPr/>
-          <p:nvPr/>
-        </p:nvSpPr>
-        <p:spPr>
-          <a:xfrm>
-            <a:off x="4633874" y="5102352"/>
-            <a:ext cx="2923946" cy="274320"/>
+              <a:t>≈ 2주</a:t>
+            </a:r>
+            <a:endParaRPr lang="en-US" sz="2000" dirty="0"/>
+          </a:p>
+        </p:txBody>
+      </p:sp>
+      <p:sp>
+        <p:nvSpPr>
+          <p:cNvPr id="30" name="Text 28"/>
+          <p:cNvSpPr/>
+          <p:nvPr/>
+        </p:nvSpPr>
+        <p:spPr>
+          <a:xfrm>
+            <a:off x="777240" y="5532120"/>
+            <a:ext cx="10637215" cy="365760"/>
           </a:xfrm>
           <a:prstGeom prst="rect">
             <a:avLst/>
@@ -10188,254 +10850,17 @@
               <a:buNone/>
             </a:pPr>
             <a:r>
-              <a:rPr lang="en-US" sz="1250" dirty="0">
-                <a:solidFill>
-                  <a:srgbClr val="6C4CFF"/>
-                </a:solidFill>
-                <a:latin typeface="Pretendard SemiBold" pitchFamily="34" charset="0"/>
-                <a:ea typeface="Pretendard SemiBold" pitchFamily="34" charset="-122"/>
-                <a:cs typeface="Pretendard SemiBold" pitchFamily="34" charset="-120"/>
-              </a:rPr>
-              <a:t>핵심 프레임</a:t>
-            </a:r>
-            <a:endParaRPr lang="en-US" sz="1250" dirty="0"/>
-          </a:p>
-        </p:txBody>
-      </p:sp>
-      <p:sp>
-        <p:nvSpPr>
-          <p:cNvPr id="23" name="Text 21"/>
-          <p:cNvSpPr/>
-          <p:nvPr/>
-        </p:nvSpPr>
-        <p:spPr>
-          <a:xfrm>
-            <a:off x="4633874" y="5394960"/>
-            <a:ext cx="2923946" cy="320040"/>
-          </a:xfrm>
-          <a:prstGeom prst="rect">
-            <a:avLst/>
-          </a:prstGeom>
-          <a:noFill/>
-          <a:ln/>
-        </p:spPr>
-        <p:txBody>
-          <a:bodyPr wrap="square" lIns="0" tIns="0" rIns="0" bIns="0" rtlCol="0" anchor="t"/>
-          <a:lstStyle/>
-          <a:p>
-            <a:pPr algn="l" indent="0" marL="0">
-              <a:lnSpc>
-                <a:spcPct val="120000"/>
-              </a:lnSpc>
-              <a:buNone/>
-            </a:pPr>
-            <a:r>
-              <a:rPr lang="en-US" sz="1100" dirty="0">
-                <a:solidFill>
-                  <a:srgbClr val="1D1D1F"/>
-                </a:solidFill>
-                <a:latin typeface="Pretendard SemiBold" pitchFamily="34" charset="0"/>
-                <a:ea typeface="Pretendard SemiBold" pitchFamily="34" charset="-122"/>
-                <a:cs typeface="Pretendard SemiBold" pitchFamily="34" charset="-120"/>
-              </a:rPr>
-              <a:t>정지컷 몇 장만 볼트 attachments/ 에 저장</a:t>
-            </a:r>
-            <a:endParaRPr lang="en-US" sz="1100" dirty="0"/>
-          </a:p>
-        </p:txBody>
-      </p:sp>
-      <p:sp>
-        <p:nvSpPr>
-          <p:cNvPr id="24" name="Text 22"/>
-          <p:cNvSpPr/>
-          <p:nvPr/>
-        </p:nvSpPr>
-        <p:spPr>
-          <a:xfrm>
-            <a:off x="4633874" y="5669280"/>
-            <a:ext cx="2923946" cy="292608"/>
-          </a:xfrm>
-          <a:prstGeom prst="rect">
-            <a:avLst/>
-          </a:prstGeom>
-          <a:noFill/>
-          <a:ln/>
-        </p:spPr>
-        <p:txBody>
-          <a:bodyPr wrap="square" lIns="0" tIns="0" rIns="0" bIns="0" rtlCol="0" anchor="t"/>
-          <a:lstStyle/>
-          <a:p>
-            <a:pPr algn="l" indent="0" marL="0">
-              <a:lnSpc>
-                <a:spcPct val="120000"/>
-              </a:lnSpc>
-              <a:buNone/>
-            </a:pPr>
-            <a:r>
-              <a:rPr lang="en-US" sz="1000" dirty="0">
+              <a:rPr lang="en-US" sz="1150" dirty="0">
                 <a:solidFill>
                   <a:srgbClr val="6E6E73"/>
                 </a:solidFill>
-                <a:latin typeface="Pretendard" pitchFamily="34" charset="0"/>
-                <a:ea typeface="Pretendard" pitchFamily="34" charset="-122"/>
-                <a:cs typeface="Pretendard" pitchFamily="34" charset="-120"/>
-              </a:rPr>
-              <a:t>문서에서 ![[…]] 로 바로 보이게</a:t>
-            </a:r>
-            <a:endParaRPr lang="en-US" sz="1000" dirty="0"/>
-          </a:p>
-        </p:txBody>
-      </p:sp>
-      <p:sp>
-        <p:nvSpPr>
-          <p:cNvPr id="25" name="Shape 23"/>
-          <p:cNvSpPr/>
-          <p:nvPr/>
-        </p:nvSpPr>
-        <p:spPr>
-          <a:xfrm>
-            <a:off x="8051597" y="4956048"/>
-            <a:ext cx="3362858" cy="1051560"/>
-          </a:xfrm>
-          <a:prstGeom prst="roundRect">
-            <a:avLst>
-              <a:gd name="adj" fmla="val 8696"/>
-            </a:avLst>
-          </a:prstGeom>
-          <a:solidFill>
-            <a:srgbClr val="FFFFFF"/>
-          </a:solidFill>
-          <a:ln w="12700">
-            <a:solidFill>
-              <a:srgbClr val="E5E7EB"/>
-            </a:solidFill>
-            <a:prstDash val="solid"/>
-          </a:ln>
-        </p:spPr>
-      </p:sp>
-      <p:sp>
-        <p:nvSpPr>
-          <p:cNvPr id="26" name="Text 24"/>
-          <p:cNvSpPr/>
-          <p:nvPr/>
-        </p:nvSpPr>
-        <p:spPr>
-          <a:xfrm>
-            <a:off x="8271053" y="5102352"/>
-            <a:ext cx="2923946" cy="274320"/>
-          </a:xfrm>
-          <a:prstGeom prst="rect">
-            <a:avLst/>
-          </a:prstGeom>
-          <a:noFill/>
-          <a:ln/>
-        </p:spPr>
-        <p:txBody>
-          <a:bodyPr wrap="square" lIns="0" tIns="0" rIns="0" bIns="0" rtlCol="0" anchor="t"/>
-          <a:lstStyle/>
-          <a:p>
-            <a:pPr algn="l" indent="0" marL="0">
-              <a:lnSpc>
-                <a:spcPct val="130000"/>
-              </a:lnSpc>
-              <a:buNone/>
-            </a:pPr>
-            <a:r>
-              <a:rPr lang="en-US" sz="1250" dirty="0">
-                <a:solidFill>
-                  <a:srgbClr val="6C4CFF"/>
-                </a:solidFill>
-                <a:latin typeface="Pretendard SemiBold" pitchFamily="34" charset="0"/>
-                <a:ea typeface="Pretendard SemiBold" pitchFamily="34" charset="-122"/>
-                <a:cs typeface="Pretendard SemiBold" pitchFamily="34" charset="-120"/>
-              </a:rPr>
-              <a:t>정본</a:t>
-            </a:r>
-            <a:endParaRPr lang="en-US" sz="1250" dirty="0"/>
-          </a:p>
-        </p:txBody>
-      </p:sp>
-      <p:sp>
-        <p:nvSpPr>
-          <p:cNvPr id="27" name="Text 25"/>
-          <p:cNvSpPr/>
-          <p:nvPr/>
-        </p:nvSpPr>
-        <p:spPr>
-          <a:xfrm>
-            <a:off x="8271053" y="5394960"/>
-            <a:ext cx="2923946" cy="320040"/>
-          </a:xfrm>
-          <a:prstGeom prst="rect">
-            <a:avLst/>
-          </a:prstGeom>
-          <a:noFill/>
-          <a:ln/>
-        </p:spPr>
-        <p:txBody>
-          <a:bodyPr wrap="square" lIns="0" tIns="0" rIns="0" bIns="0" rtlCol="0" anchor="t"/>
-          <a:lstStyle/>
-          <a:p>
-            <a:pPr algn="l" indent="0" marL="0">
-              <a:lnSpc>
-                <a:spcPct val="120000"/>
-              </a:lnSpc>
-              <a:buNone/>
-            </a:pPr>
-            <a:r>
-              <a:rPr lang="en-US" sz="1100" dirty="0">
-                <a:solidFill>
-                  <a:srgbClr val="1D1D1F"/>
-                </a:solidFill>
-                <a:latin typeface="Pretendard SemiBold" pitchFamily="34" charset="0"/>
-                <a:ea typeface="Pretendard SemiBold" pitchFamily="34" charset="-122"/>
-                <a:cs typeface="Pretendard SemiBold" pitchFamily="34" charset="-120"/>
-              </a:rPr>
-              <a:t>‘영상에서 뽑은 텍스트 문서’가 정본</a:t>
-            </a:r>
-            <a:endParaRPr lang="en-US" sz="1100" dirty="0"/>
-          </a:p>
-        </p:txBody>
-      </p:sp>
-      <p:sp>
-        <p:nvSpPr>
-          <p:cNvPr id="28" name="Text 26"/>
-          <p:cNvSpPr/>
-          <p:nvPr/>
-        </p:nvSpPr>
-        <p:spPr>
-          <a:xfrm>
-            <a:off x="8271053" y="5669280"/>
-            <a:ext cx="2923946" cy="292608"/>
-          </a:xfrm>
-          <a:prstGeom prst="rect">
-            <a:avLst/>
-          </a:prstGeom>
-          <a:noFill/>
-          <a:ln/>
-        </p:spPr>
-        <p:txBody>
-          <a:bodyPr wrap="square" lIns="0" tIns="0" rIns="0" bIns="0" rtlCol="0" anchor="t"/>
-          <a:lstStyle/>
-          <a:p>
-            <a:pPr algn="l" indent="0" marL="0">
-              <a:lnSpc>
-                <a:spcPct val="120000"/>
-              </a:lnSpc>
-              <a:buNone/>
-            </a:pPr>
-            <a:r>
-              <a:rPr lang="en-US" sz="1000" dirty="0">
-                <a:solidFill>
-                  <a:srgbClr val="6E6E73"/>
-                </a:solidFill>
-                <a:latin typeface="Pretendard" pitchFamily="34" charset="0"/>
-                <a:ea typeface="Pretendard" pitchFamily="34" charset="-122"/>
-                <a:cs typeface="Pretendard" pitchFamily="34" charset="-120"/>
-              </a:rPr>
-              <a:t>영상 자체는 원본 소스일 뿐 — 검색은 문서로</a:t>
-            </a:r>
-            <a:endParaRPr lang="en-US" sz="1000" dirty="0"/>
+                <a:latin typeface="Pretendard Medium" pitchFamily="34" charset="0"/>
+                <a:ea typeface="Pretendard Medium" pitchFamily="34" charset="-122"/>
+                <a:cs typeface="Pretendard Medium" pitchFamily="34" charset="-120"/>
+              </a:rPr>
+              <a:t>※ 숫자는 추정치(예시)입니다. 다음 장에서 ‘어떤 기능에 영상이 필요한가’를 봅니다.</a:t>
+            </a:r>
+            <a:endParaRPr lang="en-US" sz="1150" dirty="0"/>
           </a:p>
         </p:txBody>
       </p:sp>
@@ -10450,6 +10875,1082 @@
 <file path=ppt/slides/slide15.xml><?xml version="1.0" encoding="utf-8"?>
 <p:sld xmlns:a="http://schemas.openxmlformats.org/drawingml/2006/main" xmlns:r="http://schemas.openxmlformats.org/officeDocument/2006/relationships" xmlns:p="http://schemas.openxmlformats.org/presentationml/2006/main">
   <p:cSld name="Slide 15">
+    <p:bg>
+      <p:bgPr>
+        <a:solidFill>
+          <a:srgbClr val="FFFFFF"/>
+        </a:solidFill>
+      </p:bgPr>
+    </p:bg>
+    <p:spTree>
+      <p:nvGrpSpPr>
+        <p:cNvPr id="1" name=""/>
+        <p:cNvGrpSpPr/>
+        <p:nvPr/>
+      </p:nvGrpSpPr>
+      <p:grpSpPr>
+        <a:xfrm>
+          <a:off x="0" y="0"/>
+          <a:ext cx="0" cy="0"/>
+          <a:chOff x="0" y="0"/>
+          <a:chExt cx="0" cy="0"/>
+        </a:xfrm>
+      </p:grpSpPr>
+      <p:sp>
+        <p:nvSpPr>
+          <p:cNvPr id="2" name="Text 0"/>
+          <p:cNvSpPr/>
+          <p:nvPr/>
+        </p:nvSpPr>
+        <p:spPr>
+          <a:xfrm>
+            <a:off x="777240" y="566928"/>
+            <a:ext cx="5486400" cy="256032"/>
+          </a:xfrm>
+          <a:prstGeom prst="rect">
+            <a:avLst/>
+          </a:prstGeom>
+          <a:noFill/>
+          <a:ln/>
+        </p:spPr>
+        <p:txBody>
+          <a:bodyPr wrap="square" lIns="0" tIns="0" rIns="0" bIns="0" rtlCol="0" anchor="b"/>
+          <a:lstStyle/>
+          <a:p>
+            <a:pPr indent="0" marL="0">
+              <a:buNone/>
+            </a:pPr>
+            <a:r>
+              <a:rPr lang="en-US" sz="1200" dirty="0">
+                <a:solidFill>
+                  <a:srgbClr val="6C4CFF"/>
+                </a:solidFill>
+                <a:latin typeface="Pretendard SemiBold" pitchFamily="34" charset="0"/>
+                <a:ea typeface="Pretendard SemiBold" pitchFamily="34" charset="-122"/>
+                <a:cs typeface="Pretendard SemiBold" pitchFamily="34" charset="-120"/>
+              </a:rPr>
+              <a:t>④ 영상</a:t>
+            </a:r>
+            <a:endParaRPr lang="en-US" sz="1200" dirty="0"/>
+          </a:p>
+        </p:txBody>
+      </p:sp>
+      <p:sp>
+        <p:nvSpPr>
+          <p:cNvPr id="3" name="Text 1"/>
+          <p:cNvSpPr/>
+          <p:nvPr/>
+        </p:nvSpPr>
+        <p:spPr>
+          <a:xfrm>
+            <a:off x="6842455" y="566928"/>
+            <a:ext cx="4572000" cy="256032"/>
+          </a:xfrm>
+          <a:prstGeom prst="rect">
+            <a:avLst/>
+          </a:prstGeom>
+          <a:noFill/>
+          <a:ln/>
+        </p:spPr>
+        <p:txBody>
+          <a:bodyPr wrap="square" lIns="0" tIns="0" rIns="0" bIns="0" rtlCol="0" anchor="b"/>
+          <a:lstStyle/>
+          <a:p>
+            <a:pPr algn="r" indent="0" marL="0">
+              <a:buNone/>
+            </a:pPr>
+            <a:r>
+              <a:rPr lang="en-US" sz="1200" dirty="0">
+                <a:solidFill>
+                  <a:srgbClr val="9AA0A6"/>
+                </a:solidFill>
+                <a:latin typeface="Pretendard Medium" pitchFamily="34" charset="0"/>
+                <a:ea typeface="Pretendard Medium" pitchFamily="34" charset="-122"/>
+                <a:cs typeface="Pretendard Medium" pitchFamily="34" charset="-120"/>
+              </a:rPr>
+              <a:t>04  제작·일정</a:t>
+            </a:r>
+            <a:endParaRPr lang="en-US" sz="1200" dirty="0"/>
+          </a:p>
+        </p:txBody>
+      </p:sp>
+      <p:sp>
+        <p:nvSpPr>
+          <p:cNvPr id="4" name="Text 2"/>
+          <p:cNvSpPr/>
+          <p:nvPr/>
+        </p:nvSpPr>
+        <p:spPr>
+          <a:xfrm>
+            <a:off x="777240" y="896112"/>
+            <a:ext cx="10058400" cy="502920"/>
+          </a:xfrm>
+          <a:prstGeom prst="rect">
+            <a:avLst/>
+          </a:prstGeom>
+          <a:noFill/>
+          <a:ln/>
+        </p:spPr>
+        <p:txBody>
+          <a:bodyPr wrap="square" lIns="0" tIns="0" rIns="0" bIns="0" rtlCol="0" anchor="t"/>
+          <a:lstStyle/>
+          <a:p>
+            <a:pPr indent="0" marL="0">
+              <a:lnSpc>
+                <a:spcPct val="114000"/>
+              </a:lnSpc>
+              <a:buNone/>
+            </a:pPr>
+            <a:r>
+              <a:rPr lang="en-US" sz="2600" b="1" spc="-40" kern="0" dirty="0">
+                <a:solidFill>
+                  <a:srgbClr val="1D1D1F"/>
+                </a:solidFill>
+                <a:latin typeface="Pretendard" pitchFamily="34" charset="0"/>
+                <a:ea typeface="Pretendard" pitchFamily="34" charset="-122"/>
+                <a:cs typeface="Pretendard" pitchFamily="34" charset="-120"/>
+              </a:rPr>
+              <a:t>영상은 ‘일부’ 기능만 필요하다</a:t>
+            </a:r>
+            <a:endParaRPr lang="en-US" sz="2600" dirty="0"/>
+          </a:p>
+        </p:txBody>
+      </p:sp>
+      <p:sp>
+        <p:nvSpPr>
+          <p:cNvPr id="5" name="Text 3"/>
+          <p:cNvSpPr/>
+          <p:nvPr/>
+        </p:nvSpPr>
+        <p:spPr>
+          <a:xfrm>
+            <a:off x="777240" y="1463040"/>
+            <a:ext cx="10058400" cy="320040"/>
+          </a:xfrm>
+          <a:prstGeom prst="rect">
+            <a:avLst/>
+          </a:prstGeom>
+          <a:noFill/>
+          <a:ln/>
+        </p:spPr>
+        <p:txBody>
+          <a:bodyPr wrap="square" lIns="0" tIns="0" rIns="0" bIns="0" rtlCol="0" anchor="t"/>
+          <a:lstStyle/>
+          <a:p>
+            <a:pPr indent="0" marL="0">
+              <a:buNone/>
+            </a:pPr>
+            <a:r>
+              <a:rPr lang="en-US" sz="1500" dirty="0">
+                <a:solidFill>
+                  <a:srgbClr val="6E6E73"/>
+                </a:solidFill>
+                <a:latin typeface="Pretendard" pitchFamily="34" charset="0"/>
+                <a:ea typeface="Pretendard" pitchFamily="34" charset="-122"/>
+                <a:cs typeface="Pretendard" pitchFamily="34" charset="-120"/>
+              </a:rPr>
+              <a:t>이미 문서화된 기능엔 불필요. 로그인 뒤 화면 흐름인 기능만 영상이 도움이 됩니다.</a:t>
+            </a:r>
+            <a:endParaRPr lang="en-US" sz="1500" dirty="0"/>
+          </a:p>
+        </p:txBody>
+      </p:sp>
+      <p:sp>
+        <p:nvSpPr>
+          <p:cNvPr id="6" name="Text 4"/>
+          <p:cNvSpPr/>
+          <p:nvPr/>
+        </p:nvSpPr>
+        <p:spPr>
+          <a:xfrm>
+            <a:off x="777240" y="6382512"/>
+            <a:ext cx="5486400" cy="256032"/>
+          </a:xfrm>
+          <a:prstGeom prst="rect">
+            <a:avLst/>
+          </a:prstGeom>
+          <a:noFill/>
+          <a:ln/>
+        </p:spPr>
+        <p:txBody>
+          <a:bodyPr wrap="square" lIns="0" tIns="0" rIns="0" bIns="0" rtlCol="0" anchor="ctr"/>
+          <a:lstStyle/>
+          <a:p>
+            <a:pPr indent="0" marL="0">
+              <a:buNone/>
+            </a:pPr>
+            <a:r>
+              <a:rPr lang="en-US" sz="950" spc="50" kern="0" dirty="0">
+                <a:solidFill>
+                  <a:srgbClr val="9AA0A6"/>
+                </a:solidFill>
+                <a:latin typeface="Pretendard Medium" pitchFamily="34" charset="0"/>
+                <a:ea typeface="Pretendard Medium" pitchFamily="34" charset="-122"/>
+                <a:cs typeface="Pretendard Medium" pitchFamily="34" charset="-120"/>
+              </a:rPr>
+              <a:t>CDBD  ·  HOME.CDBD.IN</a:t>
+            </a:r>
+            <a:endParaRPr lang="en-US" sz="950" dirty="0"/>
+          </a:p>
+        </p:txBody>
+      </p:sp>
+      <p:sp>
+        <p:nvSpPr>
+          <p:cNvPr id="7" name="Text 5"/>
+          <p:cNvSpPr/>
+          <p:nvPr/>
+        </p:nvSpPr>
+        <p:spPr>
+          <a:xfrm>
+            <a:off x="10500055" y="6382512"/>
+            <a:ext cx="914400" cy="256032"/>
+          </a:xfrm>
+          <a:prstGeom prst="rect">
+            <a:avLst/>
+          </a:prstGeom>
+          <a:noFill/>
+          <a:ln/>
+        </p:spPr>
+        <p:txBody>
+          <a:bodyPr wrap="square" lIns="0" tIns="0" rIns="0" bIns="0" rtlCol="0" anchor="ctr"/>
+          <a:lstStyle/>
+          <a:p>
+            <a:pPr algn="r" indent="0" marL="0">
+              <a:buNone/>
+            </a:pPr>
+            <a:r>
+              <a:rPr lang="en-US" sz="1000" dirty="0">
+                <a:solidFill>
+                  <a:srgbClr val="9AA0A6"/>
+                </a:solidFill>
+                <a:latin typeface="Pretendard Medium" pitchFamily="34" charset="0"/>
+                <a:ea typeface="Pretendard Medium" pitchFamily="34" charset="-122"/>
+                <a:cs typeface="Pretendard Medium" pitchFamily="34" charset="-120"/>
+              </a:rPr>
+              <a:t>14</a:t>
+            </a:r>
+            <a:endParaRPr lang="en-US" sz="1000" dirty="0"/>
+          </a:p>
+        </p:txBody>
+      </p:sp>
+      <p:sp>
+        <p:nvSpPr>
+          <p:cNvPr id="8" name="Shape 6"/>
+          <p:cNvSpPr/>
+          <p:nvPr/>
+        </p:nvSpPr>
+        <p:spPr>
+          <a:xfrm>
+            <a:off x="777240" y="2450592"/>
+            <a:ext cx="5120640" cy="1965960"/>
+          </a:xfrm>
+          <a:prstGeom prst="roundRect">
+            <a:avLst>
+              <a:gd name="adj" fmla="val 6512"/>
+            </a:avLst>
+          </a:prstGeom>
+          <a:solidFill>
+            <a:srgbClr val="FFFFFF"/>
+          </a:solidFill>
+          <a:ln w="12700">
+            <a:solidFill>
+              <a:srgbClr val="E5E7EB"/>
+            </a:solidFill>
+            <a:prstDash val="solid"/>
+          </a:ln>
+        </p:spPr>
+      </p:sp>
+      <p:sp>
+        <p:nvSpPr>
+          <p:cNvPr id="9" name="Text 7"/>
+          <p:cNvSpPr/>
+          <p:nvPr/>
+        </p:nvSpPr>
+        <p:spPr>
+          <a:xfrm>
+            <a:off x="1069848" y="2670048"/>
+            <a:ext cx="4572000" cy="274320"/>
+          </a:xfrm>
+          <a:prstGeom prst="rect">
+            <a:avLst/>
+          </a:prstGeom>
+          <a:noFill/>
+          <a:ln/>
+        </p:spPr>
+        <p:txBody>
+          <a:bodyPr wrap="square" lIns="0" tIns="0" rIns="0" bIns="0" rtlCol="0" anchor="t"/>
+          <a:lstStyle/>
+          <a:p>
+            <a:pPr algn="l" indent="0" marL="0">
+              <a:lnSpc>
+                <a:spcPct val="130000"/>
+              </a:lnSpc>
+              <a:buNone/>
+            </a:pPr>
+            <a:r>
+              <a:rPr lang="en-US" sz="1500" dirty="0">
+                <a:solidFill>
+                  <a:srgbClr val="6E6E73"/>
+                </a:solidFill>
+                <a:latin typeface="Pretendard SemiBold" pitchFamily="34" charset="0"/>
+                <a:ea typeface="Pretendard SemiBold" pitchFamily="34" charset="-122"/>
+                <a:cs typeface="Pretendard SemiBold" pitchFamily="34" charset="-120"/>
+              </a:rPr>
+              <a:t>영상 불필요</a:t>
+            </a:r>
+            <a:endParaRPr lang="en-US" sz="1500" dirty="0"/>
+          </a:p>
+        </p:txBody>
+      </p:sp>
+      <p:sp>
+        <p:nvSpPr>
+          <p:cNvPr id="10" name="Text 8"/>
+          <p:cNvSpPr/>
+          <p:nvPr/>
+        </p:nvSpPr>
+        <p:spPr>
+          <a:xfrm>
+            <a:off x="1069848" y="3090672"/>
+            <a:ext cx="4572000" cy="274320"/>
+          </a:xfrm>
+          <a:prstGeom prst="rect">
+            <a:avLst/>
+          </a:prstGeom>
+          <a:noFill/>
+          <a:ln/>
+        </p:spPr>
+        <p:txBody>
+          <a:bodyPr wrap="square" lIns="0" tIns="0" rIns="0" bIns="0" rtlCol="0" anchor="t"/>
+          <a:lstStyle/>
+          <a:p>
+            <a:pPr algn="l" indent="0" marL="0">
+              <a:lnSpc>
+                <a:spcPct val="130000"/>
+              </a:lnSpc>
+              <a:buNone/>
+            </a:pPr>
+            <a:r>
+              <a:rPr lang="en-US" sz="1250" dirty="0">
+                <a:solidFill>
+                  <a:srgbClr val="1D1D1F"/>
+                </a:solidFill>
+                <a:latin typeface="Pretendard SemiBold" pitchFamily="34" charset="0"/>
+                <a:ea typeface="Pretendard SemiBold" pitchFamily="34" charset="-122"/>
+                <a:cs typeface="Pretendard SemiBold" pitchFamily="34" charset="-120"/>
+              </a:rPr>
+              <a:t>이미 텍스트로 정리된 ● 기능</a:t>
+            </a:r>
+            <a:endParaRPr lang="en-US" sz="1250" dirty="0"/>
+          </a:p>
+        </p:txBody>
+      </p:sp>
+      <p:sp>
+        <p:nvSpPr>
+          <p:cNvPr id="11" name="Text 9"/>
+          <p:cNvSpPr/>
+          <p:nvPr/>
+        </p:nvSpPr>
+        <p:spPr>
+          <a:xfrm>
+            <a:off x="1069848" y="3419856"/>
+            <a:ext cx="4535424" cy="822960"/>
+          </a:xfrm>
+          <a:prstGeom prst="rect">
+            <a:avLst/>
+          </a:prstGeom>
+          <a:noFill/>
+          <a:ln/>
+        </p:spPr>
+        <p:txBody>
+          <a:bodyPr wrap="square" lIns="0" tIns="0" rIns="0" bIns="0" rtlCol="0" anchor="t"/>
+          <a:lstStyle/>
+          <a:p>
+            <a:pPr algn="l" indent="0" marL="0">
+              <a:lnSpc>
+                <a:spcPct val="140000"/>
+              </a:lnSpc>
+              <a:buNone/>
+            </a:pPr>
+            <a:r>
+              <a:rPr lang="en-US" sz="1200" dirty="0">
+                <a:solidFill>
+                  <a:srgbClr val="55555A"/>
+                </a:solidFill>
+                <a:latin typeface="Pretendard" pitchFamily="34" charset="0"/>
+                <a:ea typeface="Pretendard" pitchFamily="34" charset="-122"/>
+                <a:cs typeface="Pretendard" pitchFamily="34" charset="-120"/>
+              </a:rPr>
+              <a:t>카드 15종 · 카드 자동화 · URL 게시 · 이미지 라이브러리 — 스킬·문서가 이미 있어 화면 녹화가 새로 알려줄 게 없습니다.</a:t>
+            </a:r>
+            <a:endParaRPr lang="en-US" sz="1200" dirty="0"/>
+          </a:p>
+        </p:txBody>
+      </p:sp>
+      <p:sp>
+        <p:nvSpPr>
+          <p:cNvPr id="12" name="Shape 10"/>
+          <p:cNvSpPr/>
+          <p:nvPr/>
+        </p:nvSpPr>
+        <p:spPr>
+          <a:xfrm>
+            <a:off x="6309360" y="2450592"/>
+            <a:ext cx="5120640" cy="1965960"/>
+          </a:xfrm>
+          <a:prstGeom prst="roundRect">
+            <a:avLst>
+              <a:gd name="adj" fmla="val 6512"/>
+            </a:avLst>
+          </a:prstGeom>
+          <a:solidFill>
+            <a:srgbClr val="EEEAFB"/>
+          </a:solidFill>
+          <a:ln w="19050">
+            <a:solidFill>
+              <a:srgbClr val="6C4CFF"/>
+            </a:solidFill>
+            <a:prstDash val="solid"/>
+          </a:ln>
+        </p:spPr>
+      </p:sp>
+      <p:sp>
+        <p:nvSpPr>
+          <p:cNvPr id="13" name="Text 11"/>
+          <p:cNvSpPr/>
+          <p:nvPr/>
+        </p:nvSpPr>
+        <p:spPr>
+          <a:xfrm>
+            <a:off x="6601968" y="2670048"/>
+            <a:ext cx="4572000" cy="274320"/>
+          </a:xfrm>
+          <a:prstGeom prst="rect">
+            <a:avLst/>
+          </a:prstGeom>
+          <a:noFill/>
+          <a:ln/>
+        </p:spPr>
+        <p:txBody>
+          <a:bodyPr wrap="square" lIns="0" tIns="0" rIns="0" bIns="0" rtlCol="0" anchor="t"/>
+          <a:lstStyle/>
+          <a:p>
+            <a:pPr algn="l" indent="0" marL="0">
+              <a:lnSpc>
+                <a:spcPct val="130000"/>
+              </a:lnSpc>
+              <a:buNone/>
+            </a:pPr>
+            <a:r>
+              <a:rPr lang="en-US" sz="1500" b="1" dirty="0">
+                <a:solidFill>
+                  <a:srgbClr val="6C4CFF"/>
+                </a:solidFill>
+                <a:latin typeface="Pretendard" pitchFamily="34" charset="0"/>
+                <a:ea typeface="Pretendard" pitchFamily="34" charset="-122"/>
+                <a:cs typeface="Pretendard" pitchFamily="34" charset="-120"/>
+              </a:rPr>
+              <a:t>영상 필요</a:t>
+            </a:r>
+            <a:endParaRPr lang="en-US" sz="1500" dirty="0"/>
+          </a:p>
+        </p:txBody>
+      </p:sp>
+      <p:sp>
+        <p:nvSpPr>
+          <p:cNvPr id="14" name="Text 12"/>
+          <p:cNvSpPr/>
+          <p:nvPr/>
+        </p:nvSpPr>
+        <p:spPr>
+          <a:xfrm>
+            <a:off x="6601968" y="3090672"/>
+            <a:ext cx="4572000" cy="274320"/>
+          </a:xfrm>
+          <a:prstGeom prst="rect">
+            <a:avLst/>
+          </a:prstGeom>
+          <a:noFill/>
+          <a:ln/>
+        </p:spPr>
+        <p:txBody>
+          <a:bodyPr wrap="square" lIns="0" tIns="0" rIns="0" bIns="0" rtlCol="0" anchor="t"/>
+          <a:lstStyle/>
+          <a:p>
+            <a:pPr algn="l" indent="0" marL="0">
+              <a:lnSpc>
+                <a:spcPct val="130000"/>
+              </a:lnSpc>
+              <a:buNone/>
+            </a:pPr>
+            <a:r>
+              <a:rPr lang="en-US" sz="1250" dirty="0">
+                <a:solidFill>
+                  <a:srgbClr val="1D1D1F"/>
+                </a:solidFill>
+                <a:latin typeface="Pretendard SemiBold" pitchFamily="34" charset="0"/>
+                <a:ea typeface="Pretendard SemiBold" pitchFamily="34" charset="-122"/>
+                <a:cs typeface="Pretendard SemiBold" pitchFamily="34" charset="-120"/>
+              </a:rPr>
+              <a:t>로그인 뒤에서만 보이는 ○ 공백 기능</a:t>
+            </a:r>
+            <a:endParaRPr lang="en-US" sz="1250" dirty="0"/>
+          </a:p>
+        </p:txBody>
+      </p:sp>
+      <p:sp>
+        <p:nvSpPr>
+          <p:cNvPr id="15" name="Text 13"/>
+          <p:cNvSpPr/>
+          <p:nvPr/>
+        </p:nvSpPr>
+        <p:spPr>
+          <a:xfrm>
+            <a:off x="6601968" y="3419856"/>
+            <a:ext cx="4535424" cy="822960"/>
+          </a:xfrm>
+          <a:prstGeom prst="rect">
+            <a:avLst/>
+          </a:prstGeom>
+          <a:noFill/>
+          <a:ln/>
+        </p:spPr>
+        <p:txBody>
+          <a:bodyPr wrap="square" lIns="0" tIns="0" rIns="0" bIns="0" rtlCol="0" anchor="t"/>
+          <a:lstStyle/>
+          <a:p>
+            <a:pPr algn="l" indent="0" marL="0">
+              <a:lnSpc>
+                <a:spcPct val="140000"/>
+              </a:lnSpc>
+              <a:buNone/>
+            </a:pPr>
+            <a:r>
+              <a:rPr lang="en-US" sz="1200" dirty="0">
+                <a:solidFill>
+                  <a:srgbClr val="1D1D1F"/>
+                </a:solidFill>
+                <a:latin typeface="Pretendard" pitchFamily="34" charset="0"/>
+                <a:ea typeface="Pretendard" pitchFamily="34" charset="-122"/>
+                <a:cs typeface="Pretendard" pitchFamily="34" charset="-120"/>
+              </a:rPr>
+              <a:t>통계 · 계정 · 요금 · 버전 · 공유 복제 · 데이터 연결 — UI 흐름이라 텍스트로 유추 불가, 화면이 정확한 문서화에 도움.</a:t>
+            </a:r>
+            <a:endParaRPr lang="en-US" sz="1200" dirty="0"/>
+          </a:p>
+        </p:txBody>
+      </p:sp>
+      <p:sp>
+        <p:nvSpPr>
+          <p:cNvPr id="16" name="Text 14"/>
+          <p:cNvSpPr/>
+          <p:nvPr/>
+        </p:nvSpPr>
+        <p:spPr>
+          <a:xfrm>
+            <a:off x="777240" y="4617720"/>
+            <a:ext cx="10637215" cy="274320"/>
+          </a:xfrm>
+          <a:prstGeom prst="rect">
+            <a:avLst/>
+          </a:prstGeom>
+          <a:noFill/>
+          <a:ln/>
+        </p:spPr>
+        <p:txBody>
+          <a:bodyPr wrap="square" lIns="0" tIns="0" rIns="0" bIns="0" rtlCol="0" anchor="t"/>
+          <a:lstStyle/>
+          <a:p>
+            <a:pPr algn="l" indent="0" marL="0">
+              <a:lnSpc>
+                <a:spcPct val="130000"/>
+              </a:lnSpc>
+              <a:buNone/>
+            </a:pPr>
+            <a:r>
+              <a:rPr lang="en-US" sz="1300" dirty="0">
+                <a:solidFill>
+                  <a:srgbClr val="6C4CFF"/>
+                </a:solidFill>
+                <a:latin typeface="Pretendard SemiBold" pitchFamily="34" charset="0"/>
+                <a:ea typeface="Pretendard SemiBold" pitchFamily="34" charset="-122"/>
+                <a:cs typeface="Pretendard SemiBold" pitchFamily="34" charset="-120"/>
+              </a:rPr>
+              <a:t>영상을 추가한다면 — 어디에 아카이빙</a:t>
+            </a:r>
+            <a:endParaRPr lang="en-US" sz="1300" dirty="0"/>
+          </a:p>
+        </p:txBody>
+      </p:sp>
+      <p:sp>
+        <p:nvSpPr>
+          <p:cNvPr id="17" name="Shape 15"/>
+          <p:cNvSpPr/>
+          <p:nvPr/>
+        </p:nvSpPr>
+        <p:spPr>
+          <a:xfrm>
+            <a:off x="777240" y="4956048"/>
+            <a:ext cx="3362858" cy="1051560"/>
+          </a:xfrm>
+          <a:prstGeom prst="roundRect">
+            <a:avLst>
+              <a:gd name="adj" fmla="val 8696"/>
+            </a:avLst>
+          </a:prstGeom>
+          <a:solidFill>
+            <a:srgbClr val="FFFFFF"/>
+          </a:solidFill>
+          <a:ln w="12700">
+            <a:solidFill>
+              <a:srgbClr val="E5E7EB"/>
+            </a:solidFill>
+            <a:prstDash val="solid"/>
+          </a:ln>
+        </p:spPr>
+      </p:sp>
+      <p:sp>
+        <p:nvSpPr>
+          <p:cNvPr id="18" name="Text 16"/>
+          <p:cNvSpPr/>
+          <p:nvPr/>
+        </p:nvSpPr>
+        <p:spPr>
+          <a:xfrm>
+            <a:off x="996696" y="5102352"/>
+            <a:ext cx="2923946" cy="274320"/>
+          </a:xfrm>
+          <a:prstGeom prst="rect">
+            <a:avLst/>
+          </a:prstGeom>
+          <a:noFill/>
+          <a:ln/>
+        </p:spPr>
+        <p:txBody>
+          <a:bodyPr wrap="square" lIns="0" tIns="0" rIns="0" bIns="0" rtlCol="0" anchor="t"/>
+          <a:lstStyle/>
+          <a:p>
+            <a:pPr algn="l" indent="0" marL="0">
+              <a:lnSpc>
+                <a:spcPct val="130000"/>
+              </a:lnSpc>
+              <a:buNone/>
+            </a:pPr>
+            <a:r>
+              <a:rPr lang="en-US" sz="1250" dirty="0">
+                <a:solidFill>
+                  <a:srgbClr val="6C4CFF"/>
+                </a:solidFill>
+                <a:latin typeface="Pretendard SemiBold" pitchFamily="34" charset="0"/>
+                <a:ea typeface="Pretendard SemiBold" pitchFamily="34" charset="-122"/>
+                <a:cs typeface="Pretendard SemiBold" pitchFamily="34" charset="-120"/>
+              </a:rPr>
+              <a:t>원본 영상</a:t>
+            </a:r>
+            <a:endParaRPr lang="en-US" sz="1250" dirty="0"/>
+          </a:p>
+        </p:txBody>
+      </p:sp>
+      <p:sp>
+        <p:nvSpPr>
+          <p:cNvPr id="19" name="Text 17"/>
+          <p:cNvSpPr/>
+          <p:nvPr/>
+        </p:nvSpPr>
+        <p:spPr>
+          <a:xfrm>
+            <a:off x="996696" y="5394960"/>
+            <a:ext cx="2923946" cy="320040"/>
+          </a:xfrm>
+          <a:prstGeom prst="rect">
+            <a:avLst/>
+          </a:prstGeom>
+          <a:noFill/>
+          <a:ln/>
+        </p:spPr>
+        <p:txBody>
+          <a:bodyPr wrap="square" lIns="0" tIns="0" rIns="0" bIns="0" rtlCol="0" anchor="t"/>
+          <a:lstStyle/>
+          <a:p>
+            <a:pPr algn="l" indent="0" marL="0">
+              <a:lnSpc>
+                <a:spcPct val="120000"/>
+              </a:lnSpc>
+              <a:buNone/>
+            </a:pPr>
+            <a:r>
+              <a:rPr lang="en-US" sz="1100" dirty="0">
+                <a:solidFill>
+                  <a:srgbClr val="1D1D1F"/>
+                </a:solidFill>
+                <a:latin typeface="Pretendard SemiBold" pitchFamily="34" charset="0"/>
+                <a:ea typeface="Pretendard SemiBold" pitchFamily="34" charset="-122"/>
+                <a:cs typeface="Pretendard SemiBold" pitchFamily="34" charset="-120"/>
+              </a:rPr>
+              <a:t>git 밖 클라우드(구글 드라이브 등) + 문서에 링크</a:t>
+            </a:r>
+            <a:endParaRPr lang="en-US" sz="1100" dirty="0"/>
+          </a:p>
+        </p:txBody>
+      </p:sp>
+      <p:sp>
+        <p:nvSpPr>
+          <p:cNvPr id="20" name="Text 18"/>
+          <p:cNvSpPr/>
+          <p:nvPr/>
+        </p:nvSpPr>
+        <p:spPr>
+          <a:xfrm>
+            <a:off x="996696" y="5669280"/>
+            <a:ext cx="2923946" cy="292608"/>
+          </a:xfrm>
+          <a:prstGeom prst="rect">
+            <a:avLst/>
+          </a:prstGeom>
+          <a:noFill/>
+          <a:ln/>
+        </p:spPr>
+        <p:txBody>
+          <a:bodyPr wrap="square" lIns="0" tIns="0" rIns="0" bIns="0" rtlCol="0" anchor="t"/>
+          <a:lstStyle/>
+          <a:p>
+            <a:pPr algn="l" indent="0" marL="0">
+              <a:lnSpc>
+                <a:spcPct val="120000"/>
+              </a:lnSpc>
+              <a:buNone/>
+            </a:pPr>
+            <a:r>
+              <a:rPr lang="en-US" sz="1000" dirty="0">
+                <a:solidFill>
+                  <a:srgbClr val="6E6E73"/>
+                </a:solidFill>
+                <a:latin typeface="Pretendard" pitchFamily="34" charset="0"/>
+                <a:ea typeface="Pretendard" pitchFamily="34" charset="-122"/>
+                <a:cs typeface="Pretendard" pitchFamily="34" charset="-120"/>
+              </a:rPr>
+              <a:t>용량 문제 — 커밋하면 볼트가 무거워짐 (marketing 517MB 전례)</a:t>
+            </a:r>
+            <a:endParaRPr lang="en-US" sz="1000" dirty="0"/>
+          </a:p>
+        </p:txBody>
+      </p:sp>
+      <p:sp>
+        <p:nvSpPr>
+          <p:cNvPr id="21" name="Shape 19"/>
+          <p:cNvSpPr/>
+          <p:nvPr/>
+        </p:nvSpPr>
+        <p:spPr>
+          <a:xfrm>
+            <a:off x="4414418" y="4956048"/>
+            <a:ext cx="3362858" cy="1051560"/>
+          </a:xfrm>
+          <a:prstGeom prst="roundRect">
+            <a:avLst>
+              <a:gd name="adj" fmla="val 8696"/>
+            </a:avLst>
+          </a:prstGeom>
+          <a:solidFill>
+            <a:srgbClr val="FFFFFF"/>
+          </a:solidFill>
+          <a:ln w="12700">
+            <a:solidFill>
+              <a:srgbClr val="E5E7EB"/>
+            </a:solidFill>
+            <a:prstDash val="solid"/>
+          </a:ln>
+        </p:spPr>
+      </p:sp>
+      <p:sp>
+        <p:nvSpPr>
+          <p:cNvPr id="22" name="Text 20"/>
+          <p:cNvSpPr/>
+          <p:nvPr/>
+        </p:nvSpPr>
+        <p:spPr>
+          <a:xfrm>
+            <a:off x="4633874" y="5102352"/>
+            <a:ext cx="2923946" cy="274320"/>
+          </a:xfrm>
+          <a:prstGeom prst="rect">
+            <a:avLst/>
+          </a:prstGeom>
+          <a:noFill/>
+          <a:ln/>
+        </p:spPr>
+        <p:txBody>
+          <a:bodyPr wrap="square" lIns="0" tIns="0" rIns="0" bIns="0" rtlCol="0" anchor="t"/>
+          <a:lstStyle/>
+          <a:p>
+            <a:pPr algn="l" indent="0" marL="0">
+              <a:lnSpc>
+                <a:spcPct val="130000"/>
+              </a:lnSpc>
+              <a:buNone/>
+            </a:pPr>
+            <a:r>
+              <a:rPr lang="en-US" sz="1250" dirty="0">
+                <a:solidFill>
+                  <a:srgbClr val="6C4CFF"/>
+                </a:solidFill>
+                <a:latin typeface="Pretendard SemiBold" pitchFamily="34" charset="0"/>
+                <a:ea typeface="Pretendard SemiBold" pitchFamily="34" charset="-122"/>
+                <a:cs typeface="Pretendard SemiBold" pitchFamily="34" charset="-120"/>
+              </a:rPr>
+              <a:t>핵심 프레임</a:t>
+            </a:r>
+            <a:endParaRPr lang="en-US" sz="1250" dirty="0"/>
+          </a:p>
+        </p:txBody>
+      </p:sp>
+      <p:sp>
+        <p:nvSpPr>
+          <p:cNvPr id="23" name="Text 21"/>
+          <p:cNvSpPr/>
+          <p:nvPr/>
+        </p:nvSpPr>
+        <p:spPr>
+          <a:xfrm>
+            <a:off x="4633874" y="5394960"/>
+            <a:ext cx="2923946" cy="320040"/>
+          </a:xfrm>
+          <a:prstGeom prst="rect">
+            <a:avLst/>
+          </a:prstGeom>
+          <a:noFill/>
+          <a:ln/>
+        </p:spPr>
+        <p:txBody>
+          <a:bodyPr wrap="square" lIns="0" tIns="0" rIns="0" bIns="0" rtlCol="0" anchor="t"/>
+          <a:lstStyle/>
+          <a:p>
+            <a:pPr algn="l" indent="0" marL="0">
+              <a:lnSpc>
+                <a:spcPct val="120000"/>
+              </a:lnSpc>
+              <a:buNone/>
+            </a:pPr>
+            <a:r>
+              <a:rPr lang="en-US" sz="1100" dirty="0">
+                <a:solidFill>
+                  <a:srgbClr val="1D1D1F"/>
+                </a:solidFill>
+                <a:latin typeface="Pretendard SemiBold" pitchFamily="34" charset="0"/>
+                <a:ea typeface="Pretendard SemiBold" pitchFamily="34" charset="-122"/>
+                <a:cs typeface="Pretendard SemiBold" pitchFamily="34" charset="-120"/>
+              </a:rPr>
+              <a:t>정지컷 몇 장만 볼트 attachments/ 에 저장</a:t>
+            </a:r>
+            <a:endParaRPr lang="en-US" sz="1100" dirty="0"/>
+          </a:p>
+        </p:txBody>
+      </p:sp>
+      <p:sp>
+        <p:nvSpPr>
+          <p:cNvPr id="24" name="Text 22"/>
+          <p:cNvSpPr/>
+          <p:nvPr/>
+        </p:nvSpPr>
+        <p:spPr>
+          <a:xfrm>
+            <a:off x="4633874" y="5669280"/>
+            <a:ext cx="2923946" cy="292608"/>
+          </a:xfrm>
+          <a:prstGeom prst="rect">
+            <a:avLst/>
+          </a:prstGeom>
+          <a:noFill/>
+          <a:ln/>
+        </p:spPr>
+        <p:txBody>
+          <a:bodyPr wrap="square" lIns="0" tIns="0" rIns="0" bIns="0" rtlCol="0" anchor="t"/>
+          <a:lstStyle/>
+          <a:p>
+            <a:pPr algn="l" indent="0" marL="0">
+              <a:lnSpc>
+                <a:spcPct val="120000"/>
+              </a:lnSpc>
+              <a:buNone/>
+            </a:pPr>
+            <a:r>
+              <a:rPr lang="en-US" sz="1000" dirty="0">
+                <a:solidFill>
+                  <a:srgbClr val="6E6E73"/>
+                </a:solidFill>
+                <a:latin typeface="Pretendard" pitchFamily="34" charset="0"/>
+                <a:ea typeface="Pretendard" pitchFamily="34" charset="-122"/>
+                <a:cs typeface="Pretendard" pitchFamily="34" charset="-120"/>
+              </a:rPr>
+              <a:t>문서에서 ![[…]] 로 바로 보이게</a:t>
+            </a:r>
+            <a:endParaRPr lang="en-US" sz="1000" dirty="0"/>
+          </a:p>
+        </p:txBody>
+      </p:sp>
+      <p:sp>
+        <p:nvSpPr>
+          <p:cNvPr id="25" name="Shape 23"/>
+          <p:cNvSpPr/>
+          <p:nvPr/>
+        </p:nvSpPr>
+        <p:spPr>
+          <a:xfrm>
+            <a:off x="8051597" y="4956048"/>
+            <a:ext cx="3362858" cy="1051560"/>
+          </a:xfrm>
+          <a:prstGeom prst="roundRect">
+            <a:avLst>
+              <a:gd name="adj" fmla="val 8696"/>
+            </a:avLst>
+          </a:prstGeom>
+          <a:solidFill>
+            <a:srgbClr val="FFFFFF"/>
+          </a:solidFill>
+          <a:ln w="12700">
+            <a:solidFill>
+              <a:srgbClr val="E5E7EB"/>
+            </a:solidFill>
+            <a:prstDash val="solid"/>
+          </a:ln>
+        </p:spPr>
+      </p:sp>
+      <p:sp>
+        <p:nvSpPr>
+          <p:cNvPr id="26" name="Text 24"/>
+          <p:cNvSpPr/>
+          <p:nvPr/>
+        </p:nvSpPr>
+        <p:spPr>
+          <a:xfrm>
+            <a:off x="8271053" y="5102352"/>
+            <a:ext cx="2923946" cy="274320"/>
+          </a:xfrm>
+          <a:prstGeom prst="rect">
+            <a:avLst/>
+          </a:prstGeom>
+          <a:noFill/>
+          <a:ln/>
+        </p:spPr>
+        <p:txBody>
+          <a:bodyPr wrap="square" lIns="0" tIns="0" rIns="0" bIns="0" rtlCol="0" anchor="t"/>
+          <a:lstStyle/>
+          <a:p>
+            <a:pPr algn="l" indent="0" marL="0">
+              <a:lnSpc>
+                <a:spcPct val="130000"/>
+              </a:lnSpc>
+              <a:buNone/>
+            </a:pPr>
+            <a:r>
+              <a:rPr lang="en-US" sz="1250" dirty="0">
+                <a:solidFill>
+                  <a:srgbClr val="6C4CFF"/>
+                </a:solidFill>
+                <a:latin typeface="Pretendard SemiBold" pitchFamily="34" charset="0"/>
+                <a:ea typeface="Pretendard SemiBold" pitchFamily="34" charset="-122"/>
+                <a:cs typeface="Pretendard SemiBold" pitchFamily="34" charset="-120"/>
+              </a:rPr>
+              <a:t>정본</a:t>
+            </a:r>
+            <a:endParaRPr lang="en-US" sz="1250" dirty="0"/>
+          </a:p>
+        </p:txBody>
+      </p:sp>
+      <p:sp>
+        <p:nvSpPr>
+          <p:cNvPr id="27" name="Text 25"/>
+          <p:cNvSpPr/>
+          <p:nvPr/>
+        </p:nvSpPr>
+        <p:spPr>
+          <a:xfrm>
+            <a:off x="8271053" y="5394960"/>
+            <a:ext cx="2923946" cy="320040"/>
+          </a:xfrm>
+          <a:prstGeom prst="rect">
+            <a:avLst/>
+          </a:prstGeom>
+          <a:noFill/>
+          <a:ln/>
+        </p:spPr>
+        <p:txBody>
+          <a:bodyPr wrap="square" lIns="0" tIns="0" rIns="0" bIns="0" rtlCol="0" anchor="t"/>
+          <a:lstStyle/>
+          <a:p>
+            <a:pPr algn="l" indent="0" marL="0">
+              <a:lnSpc>
+                <a:spcPct val="120000"/>
+              </a:lnSpc>
+              <a:buNone/>
+            </a:pPr>
+            <a:r>
+              <a:rPr lang="en-US" sz="1100" dirty="0">
+                <a:solidFill>
+                  <a:srgbClr val="1D1D1F"/>
+                </a:solidFill>
+                <a:latin typeface="Pretendard SemiBold" pitchFamily="34" charset="0"/>
+                <a:ea typeface="Pretendard SemiBold" pitchFamily="34" charset="-122"/>
+                <a:cs typeface="Pretendard SemiBold" pitchFamily="34" charset="-120"/>
+              </a:rPr>
+              <a:t>‘영상에서 뽑은 텍스트 문서’가 정본</a:t>
+            </a:r>
+            <a:endParaRPr lang="en-US" sz="1100" dirty="0"/>
+          </a:p>
+        </p:txBody>
+      </p:sp>
+      <p:sp>
+        <p:nvSpPr>
+          <p:cNvPr id="28" name="Text 26"/>
+          <p:cNvSpPr/>
+          <p:nvPr/>
+        </p:nvSpPr>
+        <p:spPr>
+          <a:xfrm>
+            <a:off x="8271053" y="5669280"/>
+            <a:ext cx="2923946" cy="292608"/>
+          </a:xfrm>
+          <a:prstGeom prst="rect">
+            <a:avLst/>
+          </a:prstGeom>
+          <a:noFill/>
+          <a:ln/>
+        </p:spPr>
+        <p:txBody>
+          <a:bodyPr wrap="square" lIns="0" tIns="0" rIns="0" bIns="0" rtlCol="0" anchor="t"/>
+          <a:lstStyle/>
+          <a:p>
+            <a:pPr algn="l" indent="0" marL="0">
+              <a:lnSpc>
+                <a:spcPct val="120000"/>
+              </a:lnSpc>
+              <a:buNone/>
+            </a:pPr>
+            <a:r>
+              <a:rPr lang="en-US" sz="1000" dirty="0">
+                <a:solidFill>
+                  <a:srgbClr val="6E6E73"/>
+                </a:solidFill>
+                <a:latin typeface="Pretendard" pitchFamily="34" charset="0"/>
+                <a:ea typeface="Pretendard" pitchFamily="34" charset="-122"/>
+                <a:cs typeface="Pretendard" pitchFamily="34" charset="-120"/>
+              </a:rPr>
+              <a:t>영상 자체는 원본 소스일 뿐 — 검색은 문서로</a:t>
+            </a:r>
+            <a:endParaRPr lang="en-US" sz="1000" dirty="0"/>
+          </a:p>
+        </p:txBody>
+      </p:sp>
+    </p:spTree>
+  </p:cSld>
+  <p:clrMapOvr>
+    <a:masterClrMapping/>
+  </p:clrMapOvr>
+</p:sld>
+</file>
+
+<file path=ppt/slides/slide16.xml><?xml version="1.0" encoding="utf-8"?>
+<p:sld xmlns:a="http://schemas.openxmlformats.org/drawingml/2006/main" xmlns:r="http://schemas.openxmlformats.org/officeDocument/2006/relationships" xmlns:p="http://schemas.openxmlformats.org/presentationml/2006/main">
+  <p:cSld name="Slide 16">
     <p:bg>
       <p:bgPr>
         <a:solidFill>

--- a/CdBd 기능 문서 구조 설계.pptx
+++ b/CdBd 기능 문서 구조 설계.pptx
@@ -21,9 +21,10 @@
     <p:sldId id="269" r:id="rId15"/>
     <p:sldId id="270" r:id="rId16"/>
     <p:sldId id="271" r:id="rId17"/>
+    <p:sldId id="272" r:id="rId18"/>
   </p:sldIdLst>
   <p:notesMasterIdLst>
-    <p:notesMasterId r:id="rId18"/>
+    <p:notesMasterId r:id="rId19"/>
   </p:notesMasterIdLst>
   <p:sldSz cx="12191695" cy="6858000"/>
   <p:notesSz cx="6858000" cy="12191695"/>
@@ -1157,6 +1158,94 @@
             <a:fld id="{F7021451-1387-4CA6-816F-3879F97B5CBC}" type="slidenum">
               <a:rPr lang="en-US"/>
               <a:t>16</a:t>
+            </a:fld>
+            <a:endParaRPr lang="en-US"/>
+          </a:p>
+        </p:txBody>
+      </p:sp>
+    </p:spTree>
+    <p:extLst>
+      <p:ext uri="{BB962C8B-B14F-4D97-AF65-F5344CB8AC3E}">
+        <p14:creationId xmlns:p14="http://schemas.microsoft.com/office/powerpoint/2010/main" val="1024086991"/>
+      </p:ext>
+    </p:extLst>
+  </p:cSld>
+  <p:clrMapOvr>
+    <a:masterClrMapping/>
+  </p:clrMapOvr>
+</p:notes>
+</file>
+
+<file path=ppt/notesSlides/notesSlide17.xml><?xml version="1.0" encoding="utf-8"?>
+<p:notes xmlns:a="http://schemas.openxmlformats.org/drawingml/2006/main" xmlns:r="http://schemas.openxmlformats.org/officeDocument/2006/relationships" xmlns:p="http://schemas.openxmlformats.org/presentationml/2006/main">
+  <p:cSld>
+    <p:spTree>
+      <p:nvGrpSpPr>
+        <p:cNvPr id="1" name=""/>
+        <p:cNvGrpSpPr/>
+        <p:nvPr/>
+      </p:nvGrpSpPr>
+      <p:grpSpPr>
+        <a:xfrm>
+          <a:off x="0" y="0"/>
+          <a:ext cx="0" cy="0"/>
+          <a:chOff x="0" y="0"/>
+          <a:chExt cx="0" cy="0"/>
+        </a:xfrm>
+      </p:grpSpPr>
+      <p:sp>
+        <p:nvSpPr>
+          <p:cNvPr id="2" name="Slide Image Placeholder 1"/>
+          <p:cNvSpPr>
+            <a:spLocks noGrp="1" noRot="1" noChangeAspect="1"/>
+          </p:cNvSpPr>
+          <p:nvPr>
+            <p:ph type="sldImg"/>
+          </p:nvPr>
+        </p:nvSpPr>
+        <p:spPr/>
+      </p:sp>
+      <p:sp>
+        <p:nvSpPr>
+          <p:cNvPr id="3" name="Notes Placeholder 2"/>
+          <p:cNvSpPr>
+            <a:spLocks noGrp="1"/>
+          </p:cNvSpPr>
+          <p:nvPr>
+            <p:ph type="body" idx="1"/>
+          </p:nvPr>
+        </p:nvSpPr>
+        <p:spPr/>
+        <p:txBody>
+          <a:bodyPr/>
+          <a:lstStyle/>
+          <a:p>
+            <a:r>
+              <a:rPr lang="en-US" dirty="0"/>
+              <a:t/>
+            </a:r>
+            <a:endParaRPr lang="en-US" dirty="0"/>
+          </a:p>
+        </p:txBody>
+      </p:sp>
+      <p:sp>
+        <p:nvSpPr>
+          <p:cNvPr id="4" name="Slide Number Placeholder 3"/>
+          <p:cNvSpPr>
+            <a:spLocks noGrp="1"/>
+          </p:cNvSpPr>
+          <p:nvPr>
+            <p:ph type="sldNum" sz="quarter" idx="10"/>
+          </p:nvPr>
+        </p:nvSpPr>
+        <p:spPr/>
+        <p:txBody>
+          <a:bodyPr/>
+          <a:lstStyle/>
+          <a:p>
+            <a:fld id="{F7021451-1387-4CA6-816F-3879F97B5CBC}" type="slidenum">
+              <a:rPr lang="en-US"/>
+              <a:t>17</a:t>
             </a:fld>
             <a:endParaRPr lang="en-US"/>
           </a:p>
@@ -2985,7 +3074,7 @@
                 <a:ea typeface="Pretendard" pitchFamily="34" charset="-122"/>
                 <a:cs typeface="Pretendard" pitchFamily="34" charset="-120"/>
               </a:rPr>
-              <a:t>기능마다 상태(●◐○) · 볼트 · 정본 파일을 한 줄씩. 실제 내용의 일부입니다.</a:t>
+              <a:t>고객이 쓰는 기준(8p 분류)으로 묶었습니다 — 에디터 · 대시보드 · 시작. 어드민은 제외.</a:t>
             </a:r>
             <a:endParaRPr lang="en-US" sz="1500" dirty="0"/>
           </a:p>
@@ -3077,8 +3166,8 @@
         </p:nvSpPr>
         <p:spPr>
           <a:xfrm>
-            <a:off x="7756855" y="1847088"/>
-            <a:ext cx="3657600" cy="256032"/>
+            <a:off x="5379415" y="1847088"/>
+            <a:ext cx="6035040" cy="256032"/>
           </a:xfrm>
           <a:prstGeom prst="rect">
             <a:avLst/>
@@ -3097,7 +3186,7 @@
               <a:buNone/>
             </a:pPr>
             <a:r>
-              <a:rPr lang="en-US" sz="1100" dirty="0">
+              <a:rPr lang="en-US" sz="1050" dirty="0">
                 <a:solidFill>
                   <a:srgbClr val="6E6E73"/>
                 </a:solidFill>
@@ -3105,9 +3194,9 @@
                 <a:ea typeface="Pretendard Medium" pitchFamily="34" charset="-122"/>
                 <a:cs typeface="Pretendard Medium" pitchFamily="34" charset="-120"/>
               </a:rPr>
-              <a:t>● 문서 있음   ◐ 부분   ○ 없음</a:t>
-            </a:r>
-            <a:endParaRPr lang="en-US" sz="1100" dirty="0"/>
+              <a:t>● 있음  ◐ 부분  ○ 없음   ·   [T] templates  [SV] design-service</a:t>
+            </a:r>
+            <a:endParaRPr lang="en-US" sz="1050" dirty="0"/>
           </a:p>
         </p:txBody>
       </p:sp>
@@ -3147,7 +3236,7 @@
                 <a:ea typeface="Pretendard SemiBold" pitchFamily="34" charset="-122"/>
                 <a:cs typeface="Pretendard SemiBold" pitchFamily="34" charset="-120"/>
               </a:rPr>
-              <a:t>에디터 · 어드민</a:t>
+              <a:t>ⓒ 에디터</a:t>
             </a:r>
             <a:endParaRPr lang="en-US" sz="1250" dirty="0"/>
           </a:p>
@@ -3161,7 +3250,7 @@
         </p:nvSpPr>
         <p:spPr>
           <a:xfrm>
-            <a:off x="777240" y="2615184"/>
+            <a:off x="777240" y="2596896"/>
             <a:ext cx="5074920" cy="0"/>
           </a:xfrm>
           <a:prstGeom prst="line">
@@ -3184,8 +3273,8 @@
         </p:nvSpPr>
         <p:spPr>
           <a:xfrm>
-            <a:off x="777240" y="2706624"/>
-            <a:ext cx="2194560" cy="320040"/>
+            <a:off x="777240" y="2688336"/>
+            <a:ext cx="2194560" cy="292608"/>
           </a:xfrm>
           <a:prstGeom prst="rect">
             <a:avLst/>
@@ -3204,7 +3293,7 @@
               <a:buNone/>
             </a:pPr>
             <a:r>
-              <a:rPr lang="en-US" sz="1150" dirty="0">
+              <a:rPr lang="en-US" sz="1100" dirty="0">
                 <a:solidFill>
                   <a:srgbClr val="1D1D1F"/>
                 </a:solidFill>
@@ -3214,7 +3303,7 @@
               </a:rPr>
               <a:t>카드 15종</a:t>
             </a:r>
-            <a:endParaRPr lang="en-US" sz="1150" dirty="0"/>
+            <a:endParaRPr lang="en-US" sz="1100" dirty="0"/>
           </a:p>
         </p:txBody>
       </p:sp>
@@ -3226,8 +3315,8 @@
         </p:nvSpPr>
         <p:spPr>
           <a:xfrm>
-            <a:off x="3017520" y="2706624"/>
-            <a:ext cx="365760" cy="320040"/>
+            <a:off x="3017520" y="2688336"/>
+            <a:ext cx="365760" cy="292608"/>
           </a:xfrm>
           <a:prstGeom prst="rect">
             <a:avLst/>
@@ -3246,7 +3335,7 @@
               <a:buNone/>
             </a:pPr>
             <a:r>
-              <a:rPr lang="en-US" sz="1150" dirty="0">
+              <a:rPr lang="en-US" sz="1100" dirty="0">
                 <a:solidFill>
                   <a:srgbClr val="6C4CFF"/>
                 </a:solidFill>
@@ -3256,7 +3345,7 @@
               </a:rPr>
               <a:t>●</a:t>
             </a:r>
-            <a:endParaRPr lang="en-US" sz="1150" dirty="0"/>
+            <a:endParaRPr lang="en-US" sz="1100" dirty="0"/>
           </a:p>
         </p:txBody>
       </p:sp>
@@ -3268,8 +3357,8 @@
         </p:nvSpPr>
         <p:spPr>
           <a:xfrm>
-            <a:off x="3474720" y="2706624"/>
-            <a:ext cx="2377440" cy="320040"/>
+            <a:off x="3474720" y="2688336"/>
+            <a:ext cx="2377440" cy="292608"/>
           </a:xfrm>
           <a:prstGeom prst="rect">
             <a:avLst/>
@@ -3288,7 +3377,7 @@
               <a:buNone/>
             </a:pPr>
             <a:r>
-              <a:rPr lang="en-US" sz="1050" dirty="0">
+              <a:rPr lang="en-US" sz="1000" dirty="0">
                 <a:solidFill>
                   <a:srgbClr val="55555A"/>
                 </a:solidFill>
@@ -3298,7 +3387,7 @@
               </a:rPr>
               <a:t>[T] 1-6-2</a:t>
             </a:r>
-            <a:endParaRPr lang="en-US" sz="1050" dirty="0"/>
+            <a:endParaRPr lang="en-US" sz="1000" dirty="0"/>
           </a:p>
         </p:txBody>
       </p:sp>
@@ -3310,7 +3399,7 @@
         </p:nvSpPr>
         <p:spPr>
           <a:xfrm>
-            <a:off x="777240" y="3054096"/>
+            <a:off x="777240" y="2994660"/>
             <a:ext cx="5074920" cy="0"/>
           </a:xfrm>
           <a:prstGeom prst="line">
@@ -3333,8 +3422,8 @@
         </p:nvSpPr>
         <p:spPr>
           <a:xfrm>
-            <a:off x="777240" y="3072384"/>
-            <a:ext cx="2194560" cy="320040"/>
+            <a:off x="777240" y="3017520"/>
+            <a:ext cx="2194560" cy="292608"/>
           </a:xfrm>
           <a:prstGeom prst="rect">
             <a:avLst/>
@@ -3353,7 +3442,7 @@
               <a:buNone/>
             </a:pPr>
             <a:r>
-              <a:rPr lang="en-US" sz="1150" dirty="0">
+              <a:rPr lang="en-US" sz="1100" dirty="0">
                 <a:solidFill>
                   <a:srgbClr val="1D1D1F"/>
                 </a:solidFill>
@@ -3363,7 +3452,7 @@
               </a:rPr>
               <a:t>카드 상품·코드</a:t>
             </a:r>
-            <a:endParaRPr lang="en-US" sz="1150" dirty="0"/>
+            <a:endParaRPr lang="en-US" sz="1100" dirty="0"/>
           </a:p>
         </p:txBody>
       </p:sp>
@@ -3375,8 +3464,8 @@
         </p:nvSpPr>
         <p:spPr>
           <a:xfrm>
-            <a:off x="3017520" y="3072384"/>
-            <a:ext cx="365760" cy="320040"/>
+            <a:off x="3017520" y="3017520"/>
+            <a:ext cx="365760" cy="292608"/>
           </a:xfrm>
           <a:prstGeom prst="rect">
             <a:avLst/>
@@ -3395,7 +3484,7 @@
               <a:buNone/>
             </a:pPr>
             <a:r>
-              <a:rPr lang="en-US" sz="1150" dirty="0">
+              <a:rPr lang="en-US" sz="1100" dirty="0">
                 <a:solidFill>
                   <a:srgbClr val="6E6E73"/>
                 </a:solidFill>
@@ -3405,7 +3494,7 @@
               </a:rPr>
               <a:t>◐</a:t>
             </a:r>
-            <a:endParaRPr lang="en-US" sz="1150" dirty="0"/>
+            <a:endParaRPr lang="en-US" sz="1100" dirty="0"/>
           </a:p>
         </p:txBody>
       </p:sp>
@@ -3417,8 +3506,8 @@
         </p:nvSpPr>
         <p:spPr>
           <a:xfrm>
-            <a:off x="3474720" y="3072384"/>
-            <a:ext cx="2377440" cy="320040"/>
+            <a:off x="3474720" y="3017520"/>
+            <a:ext cx="2377440" cy="292608"/>
           </a:xfrm>
           <a:prstGeom prst="rect">
             <a:avLst/>
@@ -3437,7 +3526,7 @@
               <a:buNone/>
             </a:pPr>
             <a:r>
-              <a:rPr lang="en-US" sz="1050" dirty="0">
+              <a:rPr lang="en-US" sz="1000" dirty="0">
                 <a:solidFill>
                   <a:srgbClr val="55555A"/>
                 </a:solidFill>
@@ -3445,9 +3534,9 @@
                 <a:ea typeface="Pretendard" pitchFamily="34" charset="-122"/>
                 <a:cs typeface="Pretendard" pitchFamily="34" charset="-120"/>
               </a:rPr>
-              <a:t>[T] 1-6-2 (정의만)</a:t>
-            </a:r>
-            <a:endParaRPr lang="en-US" sz="1050" dirty="0"/>
+              <a:t>[T] 1-6-2</a:t>
+            </a:r>
+            <a:endParaRPr lang="en-US" sz="1000" dirty="0"/>
           </a:p>
         </p:txBody>
       </p:sp>
@@ -3459,7 +3548,7 @@
         </p:nvSpPr>
         <p:spPr>
           <a:xfrm>
-            <a:off x="777240" y="3419856"/>
+            <a:off x="777240" y="3323844"/>
             <a:ext cx="5074920" cy="0"/>
           </a:xfrm>
           <a:prstGeom prst="line">
@@ -3482,8 +3571,8 @@
         </p:nvSpPr>
         <p:spPr>
           <a:xfrm>
-            <a:off x="777240" y="3438144"/>
-            <a:ext cx="2194560" cy="320040"/>
+            <a:off x="777240" y="3346704"/>
+            <a:ext cx="2194560" cy="292608"/>
           </a:xfrm>
           <a:prstGeom prst="rect">
             <a:avLst/>
@@ -3502,7 +3591,7 @@
               <a:buNone/>
             </a:pPr>
             <a:r>
-              <a:rPr lang="en-US" sz="1150" dirty="0">
+              <a:rPr lang="en-US" sz="1100" dirty="0">
                 <a:solidFill>
                   <a:srgbClr val="1D1D1F"/>
                 </a:solidFill>
@@ -3512,7 +3601,7 @@
               </a:rPr>
               <a:t>카드 자동화</a:t>
             </a:r>
-            <a:endParaRPr lang="en-US" sz="1150" dirty="0"/>
+            <a:endParaRPr lang="en-US" sz="1100" dirty="0"/>
           </a:p>
         </p:txBody>
       </p:sp>
@@ -3524,8 +3613,8 @@
         </p:nvSpPr>
         <p:spPr>
           <a:xfrm>
-            <a:off x="3017520" y="3438144"/>
-            <a:ext cx="365760" cy="320040"/>
+            <a:off x="3017520" y="3346704"/>
+            <a:ext cx="365760" cy="292608"/>
           </a:xfrm>
           <a:prstGeom prst="rect">
             <a:avLst/>
@@ -3544,7 +3633,7 @@
               <a:buNone/>
             </a:pPr>
             <a:r>
-              <a:rPr lang="en-US" sz="1150" dirty="0">
+              <a:rPr lang="en-US" sz="1100" dirty="0">
                 <a:solidFill>
                   <a:srgbClr val="6C4CFF"/>
                 </a:solidFill>
@@ -3554,7 +3643,7 @@
               </a:rPr>
               <a:t>●</a:t>
             </a:r>
-            <a:endParaRPr lang="en-US" sz="1150" dirty="0"/>
+            <a:endParaRPr lang="en-US" sz="1100" dirty="0"/>
           </a:p>
         </p:txBody>
       </p:sp>
@@ -3566,8 +3655,8 @@
         </p:nvSpPr>
         <p:spPr>
           <a:xfrm>
-            <a:off x="3474720" y="3438144"/>
-            <a:ext cx="2377440" cy="320040"/>
+            <a:off x="3474720" y="3346704"/>
+            <a:ext cx="2377440" cy="292608"/>
           </a:xfrm>
           <a:prstGeom prst="rect">
             <a:avLst/>
@@ -3586,7 +3675,7 @@
               <a:buNone/>
             </a:pPr>
             <a:r>
-              <a:rPr lang="en-US" sz="1050" dirty="0">
+              <a:rPr lang="en-US" sz="1000" dirty="0">
                 <a:solidFill>
                   <a:srgbClr val="55555A"/>
                 </a:solidFill>
@@ -3596,7 +3685,7 @@
               </a:rPr>
               <a:t>[T] skills/card-automation</a:t>
             </a:r>
-            <a:endParaRPr lang="en-US" sz="1050" dirty="0"/>
+            <a:endParaRPr lang="en-US" sz="1000" dirty="0"/>
           </a:p>
         </p:txBody>
       </p:sp>
@@ -3608,7 +3697,7 @@
         </p:nvSpPr>
         <p:spPr>
           <a:xfrm>
-            <a:off x="777240" y="3785616"/>
+            <a:off x="777240" y="3653028"/>
             <a:ext cx="5074920" cy="0"/>
           </a:xfrm>
           <a:prstGeom prst="line">
@@ -3631,8 +3720,8 @@
         </p:nvSpPr>
         <p:spPr>
           <a:xfrm>
-            <a:off x="777240" y="3803904"/>
-            <a:ext cx="2194560" cy="320040"/>
+            <a:off x="777240" y="3675888"/>
+            <a:ext cx="2194560" cy="292608"/>
           </a:xfrm>
           <a:prstGeom prst="rect">
             <a:avLst/>
@@ -3651,7 +3740,7 @@
               <a:buNone/>
             </a:pPr>
             <a:r>
-              <a:rPr lang="en-US" sz="1150" dirty="0">
+              <a:rPr lang="en-US" sz="1100" dirty="0">
                 <a:solidFill>
                   <a:srgbClr val="1D1D1F"/>
                 </a:solidFill>
@@ -3659,9 +3748,9 @@
                 <a:ea typeface="Pretendard Medium" pitchFamily="34" charset="-122"/>
                 <a:cs typeface="Pretendard Medium" pitchFamily="34" charset="-120"/>
               </a:rPr>
-              <a:t>에디터 구성</a:t>
-            </a:r>
-            <a:endParaRPr lang="en-US" sz="1150" dirty="0"/>
+              <a:t>구성·꾸미기</a:t>
+            </a:r>
+            <a:endParaRPr lang="en-US" sz="1100" dirty="0"/>
           </a:p>
         </p:txBody>
       </p:sp>
@@ -3673,8 +3762,8 @@
         </p:nvSpPr>
         <p:spPr>
           <a:xfrm>
-            <a:off x="3017520" y="3803904"/>
-            <a:ext cx="365760" cy="320040"/>
+            <a:off x="3017520" y="3675888"/>
+            <a:ext cx="365760" cy="292608"/>
           </a:xfrm>
           <a:prstGeom prst="rect">
             <a:avLst/>
@@ -3693,7 +3782,7 @@
               <a:buNone/>
             </a:pPr>
             <a:r>
-              <a:rPr lang="en-US" sz="1150" dirty="0">
+              <a:rPr lang="en-US" sz="1100" dirty="0">
                 <a:solidFill>
                   <a:srgbClr val="6E6E73"/>
                 </a:solidFill>
@@ -3703,7 +3792,7 @@
               </a:rPr>
               <a:t>◐</a:t>
             </a:r>
-            <a:endParaRPr lang="en-US" sz="1150" dirty="0"/>
+            <a:endParaRPr lang="en-US" sz="1100" dirty="0"/>
           </a:p>
         </p:txBody>
       </p:sp>
@@ -3715,8 +3804,8 @@
         </p:nvSpPr>
         <p:spPr>
           <a:xfrm>
-            <a:off x="3474720" y="3803904"/>
-            <a:ext cx="2377440" cy="320040"/>
+            <a:off x="3474720" y="3675888"/>
+            <a:ext cx="2377440" cy="292608"/>
           </a:xfrm>
           <a:prstGeom prst="rect">
             <a:avLst/>
@@ -3735,7 +3824,7 @@
               <a:buNone/>
             </a:pPr>
             <a:r>
-              <a:rPr lang="en-US" sz="1050" dirty="0">
+              <a:rPr lang="en-US" sz="1000" dirty="0">
                 <a:solidFill>
                   <a:srgbClr val="55555A"/>
                 </a:solidFill>
@@ -3745,7 +3834,7 @@
               </a:rPr>
               <a:t>[T] 1-6-1</a:t>
             </a:r>
-            <a:endParaRPr lang="en-US" sz="1050" dirty="0"/>
+            <a:endParaRPr lang="en-US" sz="1000" dirty="0"/>
           </a:p>
         </p:txBody>
       </p:sp>
@@ -3757,7 +3846,7 @@
         </p:nvSpPr>
         <p:spPr>
           <a:xfrm>
-            <a:off x="777240" y="4151376"/>
+            <a:off x="777240" y="3982212"/>
             <a:ext cx="5074920" cy="0"/>
           </a:xfrm>
           <a:prstGeom prst="line">
@@ -3780,8 +3869,8 @@
         </p:nvSpPr>
         <p:spPr>
           <a:xfrm>
-            <a:off x="777240" y="4169664"/>
-            <a:ext cx="2194560" cy="320040"/>
+            <a:off x="777240" y="4005072"/>
+            <a:ext cx="2194560" cy="292608"/>
           </a:xfrm>
           <a:prstGeom prst="rect">
             <a:avLst/>
@@ -3800,7 +3889,7 @@
               <a:buNone/>
             </a:pPr>
             <a:r>
-              <a:rPr lang="en-US" sz="1150" dirty="0">
+              <a:rPr lang="en-US" sz="1100" dirty="0">
                 <a:solidFill>
                   <a:srgbClr val="1D1D1F"/>
                 </a:solidFill>
@@ -3808,9 +3897,9 @@
                 <a:ea typeface="Pretendard Medium" pitchFamily="34" charset="-122"/>
                 <a:cs typeface="Pretendard Medium" pitchFamily="34" charset="-120"/>
               </a:rPr>
-              <a:t>URL 게시 · OG</a:t>
-            </a:r>
-            <a:endParaRPr lang="en-US" sz="1150" dirty="0"/>
+              <a:t>이미지 라이브러리</a:t>
+            </a:r>
+            <a:endParaRPr lang="en-US" sz="1100" dirty="0"/>
           </a:p>
         </p:txBody>
       </p:sp>
@@ -3822,8 +3911,8 @@
         </p:nvSpPr>
         <p:spPr>
           <a:xfrm>
-            <a:off x="3017520" y="4169664"/>
-            <a:ext cx="365760" cy="320040"/>
+            <a:off x="3017520" y="4005072"/>
+            <a:ext cx="365760" cy="292608"/>
           </a:xfrm>
           <a:prstGeom prst="rect">
             <a:avLst/>
@@ -3842,7 +3931,7 @@
               <a:buNone/>
             </a:pPr>
             <a:r>
-              <a:rPr lang="en-US" sz="1150" dirty="0">
+              <a:rPr lang="en-US" sz="1100" dirty="0">
                 <a:solidFill>
                   <a:srgbClr val="6C4CFF"/>
                 </a:solidFill>
@@ -3852,7 +3941,7 @@
               </a:rPr>
               <a:t>●</a:t>
             </a:r>
-            <a:endParaRPr lang="en-US" sz="1150" dirty="0"/>
+            <a:endParaRPr lang="en-US" sz="1100" dirty="0"/>
           </a:p>
         </p:txBody>
       </p:sp>
@@ -3864,8 +3953,8 @@
         </p:nvSpPr>
         <p:spPr>
           <a:xfrm>
-            <a:off x="3474720" y="4169664"/>
-            <a:ext cx="2377440" cy="320040"/>
+            <a:off x="3474720" y="4005072"/>
+            <a:ext cx="2377440" cy="292608"/>
           </a:xfrm>
           <a:prstGeom prst="rect">
             <a:avLst/>
@@ -3884,7 +3973,7 @@
               <a:buNone/>
             </a:pPr>
             <a:r>
-              <a:rPr lang="en-US" sz="1050" dirty="0">
+              <a:rPr lang="en-US" sz="1000" dirty="0">
                 <a:solidFill>
                   <a:srgbClr val="55555A"/>
                 </a:solidFill>
@@ -3892,9 +3981,9 @@
                 <a:ea typeface="Pretendard" pitchFamily="34" charset="-122"/>
                 <a:cs typeface="Pretendard" pitchFamily="34" charset="-120"/>
               </a:rPr>
-              <a:t>[SV] 1-4 §URL 게시</a:t>
-            </a:r>
-            <a:endParaRPr lang="en-US" sz="1050" dirty="0"/>
+              <a:t>[SV] CLAUDE §이미지</a:t>
+            </a:r>
+            <a:endParaRPr lang="en-US" sz="1000" dirty="0"/>
           </a:p>
         </p:txBody>
       </p:sp>
@@ -3906,7 +3995,7 @@
         </p:nvSpPr>
         <p:spPr>
           <a:xfrm>
-            <a:off x="777240" y="4517136"/>
+            <a:off x="777240" y="4311396"/>
             <a:ext cx="5074920" cy="0"/>
           </a:xfrm>
           <a:prstGeom prst="line">
@@ -3929,8 +4018,8 @@
         </p:nvSpPr>
         <p:spPr>
           <a:xfrm>
-            <a:off x="777240" y="4535424"/>
-            <a:ext cx="2194560" cy="320040"/>
+            <a:off x="777240" y="4334256"/>
+            <a:ext cx="2194560" cy="292608"/>
           </a:xfrm>
           <a:prstGeom prst="rect">
             <a:avLst/>
@@ -3949,7 +4038,7 @@
               <a:buNone/>
             </a:pPr>
             <a:r>
-              <a:rPr lang="en-US" sz="1150" dirty="0">
+              <a:rPr lang="en-US" sz="1100" dirty="0">
                 <a:solidFill>
                   <a:srgbClr val="1D1D1F"/>
                 </a:solidFill>
@@ -3957,9 +4046,9 @@
                 <a:ea typeface="Pretendard Medium" pitchFamily="34" charset="-122"/>
                 <a:cs typeface="Pretendard Medium" pitchFamily="34" charset="-120"/>
               </a:rPr>
-              <a:t>게시 자동화</a:t>
-            </a:r>
-            <a:endParaRPr lang="en-US" sz="1150" dirty="0"/>
+              <a:t>URL 게시 · OG</a:t>
+            </a:r>
+            <a:endParaRPr lang="en-US" sz="1100" dirty="0"/>
           </a:p>
         </p:txBody>
       </p:sp>
@@ -3971,8 +4060,8 @@
         </p:nvSpPr>
         <p:spPr>
           <a:xfrm>
-            <a:off x="3017520" y="4535424"/>
-            <a:ext cx="365760" cy="320040"/>
+            <a:off x="3017520" y="4334256"/>
+            <a:ext cx="365760" cy="292608"/>
           </a:xfrm>
           <a:prstGeom prst="rect">
             <a:avLst/>
@@ -3991,7 +4080,7 @@
               <a:buNone/>
             </a:pPr>
             <a:r>
-              <a:rPr lang="en-US" sz="1150" dirty="0">
+              <a:rPr lang="en-US" sz="1100" dirty="0">
                 <a:solidFill>
                   <a:srgbClr val="6C4CFF"/>
                 </a:solidFill>
@@ -4001,7 +4090,7 @@
               </a:rPr>
               <a:t>●</a:t>
             </a:r>
-            <a:endParaRPr lang="en-US" sz="1150" dirty="0"/>
+            <a:endParaRPr lang="en-US" sz="1100" dirty="0"/>
           </a:p>
         </p:txBody>
       </p:sp>
@@ -4013,8 +4102,8 @@
         </p:nvSpPr>
         <p:spPr>
           <a:xfrm>
-            <a:off x="3474720" y="4535424"/>
-            <a:ext cx="2377440" cy="320040"/>
+            <a:off x="3474720" y="4334256"/>
+            <a:ext cx="2377440" cy="292608"/>
           </a:xfrm>
           <a:prstGeom prst="rect">
             <a:avLst/>
@@ -4033,7 +4122,7 @@
               <a:buNone/>
             </a:pPr>
             <a:r>
-              <a:rPr lang="en-US" sz="1050" dirty="0">
+              <a:rPr lang="en-US" sz="1000" dirty="0">
                 <a:solidFill>
                   <a:srgbClr val="55555A"/>
                 </a:solidFill>
@@ -4041,9 +4130,9 @@
                 <a:ea typeface="Pretendard" pitchFamily="34" charset="-122"/>
                 <a:cs typeface="Pretendard" pitchFamily="34" charset="-120"/>
               </a:rPr>
-              <a:t>[SV] 1-4 §Supabase</a:t>
-            </a:r>
-            <a:endParaRPr lang="en-US" sz="1050" dirty="0"/>
+              <a:t>[SV] 1-4 §URL 게시</a:t>
+            </a:r>
+            <a:endParaRPr lang="en-US" sz="1000" dirty="0"/>
           </a:p>
         </p:txBody>
       </p:sp>
@@ -4055,7 +4144,7 @@
         </p:nvSpPr>
         <p:spPr>
           <a:xfrm>
-            <a:off x="777240" y="4882896"/>
+            <a:off x="777240" y="4640580"/>
             <a:ext cx="5074920" cy="0"/>
           </a:xfrm>
           <a:prstGeom prst="line">
@@ -4078,8 +4167,8 @@
         </p:nvSpPr>
         <p:spPr>
           <a:xfrm>
-            <a:off x="777240" y="4901184"/>
-            <a:ext cx="2194560" cy="320040"/>
+            <a:off x="777240" y="4663440"/>
+            <a:ext cx="2194560" cy="292608"/>
           </a:xfrm>
           <a:prstGeom prst="rect">
             <a:avLst/>
@@ -4098,7 +4187,7 @@
               <a:buNone/>
             </a:pPr>
             <a:r>
-              <a:rPr lang="en-US" sz="1150" dirty="0">
+              <a:rPr lang="en-US" sz="1100" dirty="0">
                 <a:solidFill>
                   <a:srgbClr val="1D1D1F"/>
                 </a:solidFill>
@@ -4106,9 +4195,9 @@
                 <a:ea typeface="Pretendard Medium" pitchFamily="34" charset="-122"/>
                 <a:cs typeface="Pretendard Medium" pitchFamily="34" charset="-120"/>
               </a:rPr>
-              <a:t>이미지 라이브러리</a:t>
-            </a:r>
-            <a:endParaRPr lang="en-US" sz="1150" dirty="0"/>
+              <a:t>게시 자동화</a:t>
+            </a:r>
+            <a:endParaRPr lang="en-US" sz="1100" dirty="0"/>
           </a:p>
         </p:txBody>
       </p:sp>
@@ -4120,8 +4209,8 @@
         </p:nvSpPr>
         <p:spPr>
           <a:xfrm>
-            <a:off x="3017520" y="4901184"/>
-            <a:ext cx="365760" cy="320040"/>
+            <a:off x="3017520" y="4663440"/>
+            <a:ext cx="365760" cy="292608"/>
           </a:xfrm>
           <a:prstGeom prst="rect">
             <a:avLst/>
@@ -4140,7 +4229,7 @@
               <a:buNone/>
             </a:pPr>
             <a:r>
-              <a:rPr lang="en-US" sz="1150" dirty="0">
+              <a:rPr lang="en-US" sz="1100" dirty="0">
                 <a:solidFill>
                   <a:srgbClr val="6C4CFF"/>
                 </a:solidFill>
@@ -4150,7 +4239,7 @@
               </a:rPr>
               <a:t>●</a:t>
             </a:r>
-            <a:endParaRPr lang="en-US" sz="1150" dirty="0"/>
+            <a:endParaRPr lang="en-US" sz="1100" dirty="0"/>
           </a:p>
         </p:txBody>
       </p:sp>
@@ -4162,8 +4251,8 @@
         </p:nvSpPr>
         <p:spPr>
           <a:xfrm>
-            <a:off x="3474720" y="4901184"/>
-            <a:ext cx="2377440" cy="320040"/>
+            <a:off x="3474720" y="4663440"/>
+            <a:ext cx="2377440" cy="292608"/>
           </a:xfrm>
           <a:prstGeom prst="rect">
             <a:avLst/>
@@ -4182,7 +4271,7 @@
               <a:buNone/>
             </a:pPr>
             <a:r>
-              <a:rPr lang="en-US" sz="1050" dirty="0">
+              <a:rPr lang="en-US" sz="1000" dirty="0">
                 <a:solidFill>
                   <a:srgbClr val="55555A"/>
                 </a:solidFill>
@@ -4190,9 +4279,9 @@
                 <a:ea typeface="Pretendard" pitchFamily="34" charset="-122"/>
                 <a:cs typeface="Pretendard" pitchFamily="34" charset="-120"/>
               </a:rPr>
-              <a:t>[SV] CLAUDE §이미지</a:t>
-            </a:r>
-            <a:endParaRPr lang="en-US" sz="1050" dirty="0"/>
+              <a:t>[SV] 1-4 §Supabase</a:t>
+            </a:r>
+            <a:endParaRPr lang="en-US" sz="1000" dirty="0"/>
           </a:p>
         </p:txBody>
       </p:sp>
@@ -4204,7 +4293,7 @@
         </p:nvSpPr>
         <p:spPr>
           <a:xfrm>
-            <a:off x="777240" y="5248656"/>
+            <a:off x="777240" y="4969764"/>
             <a:ext cx="5074920" cy="0"/>
           </a:xfrm>
           <a:prstGeom prst="line">
@@ -4227,8 +4316,8 @@
         </p:nvSpPr>
         <p:spPr>
           <a:xfrm>
-            <a:off x="777240" y="5266944"/>
-            <a:ext cx="2194560" cy="320040"/>
+            <a:off x="777240" y="4992624"/>
+            <a:ext cx="2194560" cy="292608"/>
           </a:xfrm>
           <a:prstGeom prst="rect">
             <a:avLst/>
@@ -4247,7 +4336,7 @@
               <a:buNone/>
             </a:pPr>
             <a:r>
-              <a:rPr lang="en-US" sz="1150" dirty="0">
+              <a:rPr lang="en-US" sz="1100" dirty="0">
                 <a:solidFill>
                   <a:srgbClr val="1D1D1F"/>
                 </a:solidFill>
@@ -4255,9 +4344,9 @@
                 <a:ea typeface="Pretendard Medium" pitchFamily="34" charset="-122"/>
                 <a:cs typeface="Pretendard Medium" pitchFamily="34" charset="-120"/>
               </a:rPr>
-              <a:t>템플릿 상세페이지</a:t>
-            </a:r>
-            <a:endParaRPr lang="en-US" sz="1150" dirty="0"/>
+              <a:t>페이지 비밀번호</a:t>
+            </a:r>
+            <a:endParaRPr lang="en-US" sz="1100" dirty="0"/>
           </a:p>
         </p:txBody>
       </p:sp>
@@ -4269,8 +4358,8 @@
         </p:nvSpPr>
         <p:spPr>
           <a:xfrm>
-            <a:off x="3017520" y="5266944"/>
-            <a:ext cx="365760" cy="320040"/>
+            <a:off x="3017520" y="4992624"/>
+            <a:ext cx="365760" cy="292608"/>
           </a:xfrm>
           <a:prstGeom prst="rect">
             <a:avLst/>
@@ -4289,17 +4378,17 @@
               <a:buNone/>
             </a:pPr>
             <a:r>
-              <a:rPr lang="en-US" sz="1150" dirty="0">
-                <a:solidFill>
-                  <a:srgbClr val="6C4CFF"/>
+              <a:rPr lang="en-US" sz="1100" dirty="0">
+                <a:solidFill>
+                  <a:srgbClr val="6E6E73"/>
                 </a:solidFill>
                 <a:latin typeface="Pretendard SemiBold" pitchFamily="34" charset="0"/>
                 <a:ea typeface="Pretendard SemiBold" pitchFamily="34" charset="-122"/>
                 <a:cs typeface="Pretendard SemiBold" pitchFamily="34" charset="-120"/>
               </a:rPr>
-              <a:t>●</a:t>
-            </a:r>
-            <a:endParaRPr lang="en-US" sz="1150" dirty="0"/>
+              <a:t>◐</a:t>
+            </a:r>
+            <a:endParaRPr lang="en-US" sz="1100" dirty="0"/>
           </a:p>
         </p:txBody>
       </p:sp>
@@ -4311,8 +4400,8 @@
         </p:nvSpPr>
         <p:spPr>
           <a:xfrm>
-            <a:off x="3474720" y="5266944"/>
-            <a:ext cx="2377440" cy="320040"/>
+            <a:off x="3474720" y="4992624"/>
+            <a:ext cx="2377440" cy="292608"/>
           </a:xfrm>
           <a:prstGeom prst="rect">
             <a:avLst/>
@@ -4331,7 +4420,7 @@
               <a:buNone/>
             </a:pPr>
             <a:r>
-              <a:rPr lang="en-US" sz="1050" dirty="0">
+              <a:rPr lang="en-US" sz="1000" dirty="0">
                 <a:solidFill>
                   <a:srgbClr val="55555A"/>
                 </a:solidFill>
@@ -4339,31 +4428,54 @@
                 <a:ea typeface="Pretendard" pitchFamily="34" charset="-122"/>
                 <a:cs typeface="Pretendard" pitchFamily="34" charset="-120"/>
               </a:rPr>
-              <a:t>[T] 1-7</a:t>
-            </a:r>
-            <a:endParaRPr lang="en-US" sz="1050" dirty="0"/>
-          </a:p>
-        </p:txBody>
-      </p:sp>
-      <p:sp>
-        <p:nvSpPr>
-          <p:cNvPr id="42" name="Text 40"/>
-          <p:cNvSpPr/>
-          <p:nvPr/>
-        </p:nvSpPr>
-        <p:spPr>
-          <a:xfrm>
-            <a:off x="6336792" y="2286000"/>
-            <a:ext cx="5074920" cy="274320"/>
-          </a:xfrm>
-          <a:prstGeom prst="rect">
-            <a:avLst/>
-          </a:prstGeom>
-          <a:noFill/>
-          <a:ln/>
-        </p:spPr>
-        <p:txBody>
-          <a:bodyPr wrap="square" lIns="0" tIns="0" rIns="0" bIns="0" rtlCol="0" anchor="t"/>
+              <a:t>[SV] 1-4 모달</a:t>
+            </a:r>
+            <a:endParaRPr lang="en-US" sz="1000" dirty="0"/>
+          </a:p>
+        </p:txBody>
+      </p:sp>
+      <p:sp>
+        <p:nvSpPr>
+          <p:cNvPr id="42" name="Shape 40"/>
+          <p:cNvSpPr/>
+          <p:nvPr/>
+        </p:nvSpPr>
+        <p:spPr>
+          <a:xfrm>
+            <a:off x="777240" y="5298948"/>
+            <a:ext cx="5074920" cy="0"/>
+          </a:xfrm>
+          <a:prstGeom prst="line">
+            <a:avLst/>
+          </a:prstGeom>
+          <a:noFill/>
+          <a:ln w="6350">
+            <a:solidFill>
+              <a:srgbClr val="F0F0F0"/>
+            </a:solidFill>
+            <a:prstDash val="solid"/>
+          </a:ln>
+        </p:spPr>
+      </p:sp>
+      <p:sp>
+        <p:nvSpPr>
+          <p:cNvPr id="43" name="Text 41"/>
+          <p:cNvSpPr/>
+          <p:nvPr/>
+        </p:nvSpPr>
+        <p:spPr>
+          <a:xfrm>
+            <a:off x="777240" y="5321808"/>
+            <a:ext cx="2194560" cy="292608"/>
+          </a:xfrm>
+          <a:prstGeom prst="rect">
+            <a:avLst/>
+          </a:prstGeom>
+          <a:noFill/>
+          <a:ln/>
+        </p:spPr>
+        <p:txBody>
+          <a:bodyPr wrap="square" lIns="0" tIns="0" rIns="0" bIns="0" rtlCol="0" anchor="ctr"/>
           <a:lstStyle/>
           <a:p>
             <a:pPr algn="l" indent="0" marL="0">
@@ -4373,15 +4485,141 @@
               <a:buNone/>
             </a:pPr>
             <a:r>
-              <a:rPr lang="en-US" sz="1250" dirty="0">
-                <a:solidFill>
-                  <a:srgbClr val="6C4CFF"/>
+              <a:rPr lang="en-US" sz="1100" dirty="0">
+                <a:solidFill>
+                  <a:srgbClr val="1D1D1F"/>
+                </a:solidFill>
+                <a:latin typeface="Pretendard Medium" pitchFamily="34" charset="0"/>
+                <a:ea typeface="Pretendard Medium" pitchFamily="34" charset="-122"/>
+                <a:cs typeface="Pretendard Medium" pitchFamily="34" charset="-120"/>
+              </a:rPr>
+              <a:t>데이터 연결</a:t>
+            </a:r>
+            <a:endParaRPr lang="en-US" sz="1100" dirty="0"/>
+          </a:p>
+        </p:txBody>
+      </p:sp>
+      <p:sp>
+        <p:nvSpPr>
+          <p:cNvPr id="44" name="Text 42"/>
+          <p:cNvSpPr/>
+          <p:nvPr/>
+        </p:nvSpPr>
+        <p:spPr>
+          <a:xfrm>
+            <a:off x="3017520" y="5321808"/>
+            <a:ext cx="365760" cy="292608"/>
+          </a:xfrm>
+          <a:prstGeom prst="rect">
+            <a:avLst/>
+          </a:prstGeom>
+          <a:noFill/>
+          <a:ln/>
+        </p:spPr>
+        <p:txBody>
+          <a:bodyPr wrap="square" lIns="0" tIns="0" rIns="0" bIns="0" rtlCol="0" anchor="ctr"/>
+          <a:lstStyle/>
+          <a:p>
+            <a:pPr algn="l" indent="0" marL="0">
+              <a:lnSpc>
+                <a:spcPct val="130000"/>
+              </a:lnSpc>
+              <a:buNone/>
+            </a:pPr>
+            <a:r>
+              <a:rPr lang="en-US" sz="1100" dirty="0">
+                <a:solidFill>
+                  <a:srgbClr val="6E6E73"/>
                 </a:solidFill>
                 <a:latin typeface="Pretendard SemiBold" pitchFamily="34" charset="0"/>
                 <a:ea typeface="Pretendard SemiBold" pitchFamily="34" charset="-122"/>
                 <a:cs typeface="Pretendard SemiBold" pitchFamily="34" charset="-120"/>
               </a:rPr>
-              <a:t>홈페이지 · 시작</a:t>
+              <a:t>○</a:t>
+            </a:r>
+            <a:endParaRPr lang="en-US" sz="1100" dirty="0"/>
+          </a:p>
+        </p:txBody>
+      </p:sp>
+      <p:sp>
+        <p:nvSpPr>
+          <p:cNvPr id="45" name="Text 43"/>
+          <p:cNvSpPr/>
+          <p:nvPr/>
+        </p:nvSpPr>
+        <p:spPr>
+          <a:xfrm>
+            <a:off x="3474720" y="5321808"/>
+            <a:ext cx="2377440" cy="292608"/>
+          </a:xfrm>
+          <a:prstGeom prst="rect">
+            <a:avLst/>
+          </a:prstGeom>
+          <a:noFill/>
+          <a:ln/>
+        </p:spPr>
+        <p:txBody>
+          <a:bodyPr wrap="square" lIns="0" tIns="0" rIns="0" bIns="0" rtlCol="0" anchor="ctr"/>
+          <a:lstStyle/>
+          <a:p>
+            <a:pPr algn="l" indent="0" marL="0">
+              <a:lnSpc>
+                <a:spcPct val="130000"/>
+              </a:lnSpc>
+              <a:buNone/>
+            </a:pPr>
+            <a:r>
+              <a:rPr lang="en-US" sz="1000" dirty="0">
+                <a:solidFill>
+                  <a:srgbClr val="55555A"/>
+                </a:solidFill>
+                <a:latin typeface="Pretendard" pitchFamily="34" charset="0"/>
+                <a:ea typeface="Pretendard" pitchFamily="34" charset="-122"/>
+                <a:cs typeface="Pretendard" pitchFamily="34" charset="-120"/>
+              </a:rPr>
+              <a:t>— 없음</a:t>
+            </a:r>
+            <a:endParaRPr lang="en-US" sz="1000" dirty="0"/>
+          </a:p>
+        </p:txBody>
+      </p:sp>
+      <p:sp>
+        <p:nvSpPr>
+          <p:cNvPr id="46" name="Text 44"/>
+          <p:cNvSpPr/>
+          <p:nvPr/>
+        </p:nvSpPr>
+        <p:spPr>
+          <a:xfrm>
+            <a:off x="6336792" y="2286000"/>
+            <a:ext cx="5074920" cy="274320"/>
+          </a:xfrm>
+          <a:prstGeom prst="rect">
+            <a:avLst/>
+          </a:prstGeom>
+          <a:noFill/>
+          <a:ln/>
+        </p:spPr>
+        <p:txBody>
+          <a:bodyPr wrap="square" lIns="0" tIns="0" rIns="0" bIns="0" rtlCol="0" anchor="t"/>
+          <a:lstStyle/>
+          <a:p>
+            <a:pPr algn="l" indent="0" marL="0">
+              <a:lnSpc>
+                <a:spcPct val="130000"/>
+              </a:lnSpc>
+              <a:buNone/>
+            </a:pPr>
+            <a:r>
+              <a:rPr lang="en-US" sz="1250" dirty="0">
+                <a:solidFill>
+                  <a:srgbClr val="6C4CFF"/>
+                </a:solidFill>
+                <a:latin typeface="Pretendard SemiBold" pitchFamily="34" charset="0"/>
+                <a:ea typeface="Pretendard SemiBold" pitchFamily="34" charset="-122"/>
+                <a:cs typeface="Pretendard SemiBold" pitchFamily="34" charset="-120"/>
+              </a:rPr>
+              <a:t>ⓑ 대시보드 (계정)</a:t>
             </a:r>
             <a:endParaRPr lang="en-US" sz="1250" dirty="0"/>
           </a:p>
@@ -4389,13 +4627,13 @@
       </p:sp>
       <p:sp>
         <p:nvSpPr>
-          <p:cNvPr id="43" name="Shape 41"/>
-          <p:cNvSpPr/>
-          <p:nvPr/>
-        </p:nvSpPr>
-        <p:spPr>
-          <a:xfrm>
-            <a:off x="6336792" y="2615184"/>
+          <p:cNvPr id="47" name="Shape 45"/>
+          <p:cNvSpPr/>
+          <p:nvPr/>
+        </p:nvSpPr>
+        <p:spPr>
+          <a:xfrm>
+            <a:off x="6336792" y="2596896"/>
             <a:ext cx="5074920" cy="0"/>
           </a:xfrm>
           <a:prstGeom prst="line">
@@ -4412,14 +4650,14 @@
       </p:sp>
       <p:sp>
         <p:nvSpPr>
-          <p:cNvPr id="44" name="Text 42"/>
-          <p:cNvSpPr/>
-          <p:nvPr/>
-        </p:nvSpPr>
-        <p:spPr>
-          <a:xfrm>
-            <a:off x="6336792" y="2706624"/>
-            <a:ext cx="2194560" cy="320040"/>
+          <p:cNvPr id="48" name="Text 46"/>
+          <p:cNvSpPr/>
+          <p:nvPr/>
+        </p:nvSpPr>
+        <p:spPr>
+          <a:xfrm>
+            <a:off x="6336792" y="2688336"/>
+            <a:ext cx="2194560" cy="292608"/>
           </a:xfrm>
           <a:prstGeom prst="rect">
             <a:avLst/>
@@ -4438,7 +4676,7 @@
               <a:buNone/>
             </a:pPr>
             <a:r>
-              <a:rPr lang="en-US" sz="1150" dirty="0">
+              <a:rPr lang="en-US" sz="1100" dirty="0">
                 <a:solidFill>
                   <a:srgbClr val="1D1D1F"/>
                 </a:solidFill>
@@ -4448,20 +4686,20 @@
               </a:rPr>
               <a:t>페이지 · URL 통계</a:t>
             </a:r>
-            <a:endParaRPr lang="en-US" sz="1150" dirty="0"/>
-          </a:p>
-        </p:txBody>
-      </p:sp>
-      <p:sp>
-        <p:nvSpPr>
-          <p:cNvPr id="45" name="Text 43"/>
-          <p:cNvSpPr/>
-          <p:nvPr/>
-        </p:nvSpPr>
-        <p:spPr>
-          <a:xfrm>
-            <a:off x="8577072" y="2706624"/>
-            <a:ext cx="365760" cy="320040"/>
+            <a:endParaRPr lang="en-US" sz="1100" dirty="0"/>
+          </a:p>
+        </p:txBody>
+      </p:sp>
+      <p:sp>
+        <p:nvSpPr>
+          <p:cNvPr id="49" name="Text 47"/>
+          <p:cNvSpPr/>
+          <p:nvPr/>
+        </p:nvSpPr>
+        <p:spPr>
+          <a:xfrm>
+            <a:off x="8577072" y="2688336"/>
+            <a:ext cx="365760" cy="292608"/>
           </a:xfrm>
           <a:prstGeom prst="rect">
             <a:avLst/>
@@ -4480,7 +4718,7 @@
               <a:buNone/>
             </a:pPr>
             <a:r>
-              <a:rPr lang="en-US" sz="1150" dirty="0">
+              <a:rPr lang="en-US" sz="1100" dirty="0">
                 <a:solidFill>
                   <a:srgbClr val="6E6E73"/>
                 </a:solidFill>
@@ -4490,20 +4728,20 @@
               </a:rPr>
               <a:t>○</a:t>
             </a:r>
-            <a:endParaRPr lang="en-US" sz="1150" dirty="0"/>
-          </a:p>
-        </p:txBody>
-      </p:sp>
-      <p:sp>
-        <p:nvSpPr>
-          <p:cNvPr id="46" name="Text 44"/>
-          <p:cNvSpPr/>
-          <p:nvPr/>
-        </p:nvSpPr>
-        <p:spPr>
-          <a:xfrm>
-            <a:off x="9034272" y="2706624"/>
-            <a:ext cx="2377440" cy="320040"/>
+            <a:endParaRPr lang="en-US" sz="1100" dirty="0"/>
+          </a:p>
+        </p:txBody>
+      </p:sp>
+      <p:sp>
+        <p:nvSpPr>
+          <p:cNvPr id="50" name="Text 48"/>
+          <p:cNvSpPr/>
+          <p:nvPr/>
+        </p:nvSpPr>
+        <p:spPr>
+          <a:xfrm>
+            <a:off x="9034272" y="2688336"/>
+            <a:ext cx="2377440" cy="292608"/>
           </a:xfrm>
           <a:prstGeom prst="rect">
             <a:avLst/>
@@ -4522,7 +4760,7 @@
               <a:buNone/>
             </a:pPr>
             <a:r>
-              <a:rPr lang="en-US" sz="1050" dirty="0">
+              <a:rPr lang="en-US" sz="1000" dirty="0">
                 <a:solidFill>
                   <a:srgbClr val="55555A"/>
                 </a:solidFill>
@@ -4532,19 +4770,19 @@
               </a:rPr>
               <a:t>— 없음</a:t>
             </a:r>
-            <a:endParaRPr lang="en-US" sz="1050" dirty="0"/>
-          </a:p>
-        </p:txBody>
-      </p:sp>
-      <p:sp>
-        <p:nvSpPr>
-          <p:cNvPr id="47" name="Shape 45"/>
-          <p:cNvSpPr/>
-          <p:nvPr/>
-        </p:nvSpPr>
-        <p:spPr>
-          <a:xfrm>
-            <a:off x="6336792" y="3054096"/>
+            <a:endParaRPr lang="en-US" sz="1000" dirty="0"/>
+          </a:p>
+        </p:txBody>
+      </p:sp>
+      <p:sp>
+        <p:nvSpPr>
+          <p:cNvPr id="51" name="Shape 49"/>
+          <p:cNvSpPr/>
+          <p:nvPr/>
+        </p:nvSpPr>
+        <p:spPr>
+          <a:xfrm>
+            <a:off x="6336792" y="2994660"/>
             <a:ext cx="5074920" cy="0"/>
           </a:xfrm>
           <a:prstGeom prst="line">
@@ -4561,14 +4799,14 @@
       </p:sp>
       <p:sp>
         <p:nvSpPr>
-          <p:cNvPr id="48" name="Text 46"/>
-          <p:cNvSpPr/>
-          <p:nvPr/>
-        </p:nvSpPr>
-        <p:spPr>
-          <a:xfrm>
-            <a:off x="6336792" y="3072384"/>
-            <a:ext cx="2194560" cy="320040"/>
+          <p:cNvPr id="52" name="Text 50"/>
+          <p:cNvSpPr/>
+          <p:nvPr/>
+        </p:nvSpPr>
+        <p:spPr>
+          <a:xfrm>
+            <a:off x="6336792" y="3017520"/>
+            <a:ext cx="2194560" cy="292608"/>
           </a:xfrm>
           <a:prstGeom prst="rect">
             <a:avLst/>
@@ -4587,7 +4825,7 @@
               <a:buNone/>
             </a:pPr>
             <a:r>
-              <a:rPr lang="en-US" sz="1150" dirty="0">
+              <a:rPr lang="en-US" sz="1100" dirty="0">
                 <a:solidFill>
                   <a:srgbClr val="1D1D1F"/>
                 </a:solidFill>
@@ -4595,22 +4833,22 @@
                 <a:ea typeface="Pretendard Medium" pitchFamily="34" charset="-122"/>
                 <a:cs typeface="Pretendard Medium" pitchFamily="34" charset="-120"/>
               </a:rPr>
-              <a:t>버전 · 공유 · 홈</a:t>
-            </a:r>
-            <a:endParaRPr lang="en-US" sz="1150" dirty="0"/>
-          </a:p>
-        </p:txBody>
-      </p:sp>
-      <p:sp>
-        <p:nvSpPr>
-          <p:cNvPr id="49" name="Text 47"/>
-          <p:cNvSpPr/>
-          <p:nvPr/>
-        </p:nvSpPr>
-        <p:spPr>
-          <a:xfrm>
-            <a:off x="8577072" y="3072384"/>
-            <a:ext cx="365760" cy="320040"/>
+              <a:t>버전 기록</a:t>
+            </a:r>
+            <a:endParaRPr lang="en-US" sz="1100" dirty="0"/>
+          </a:p>
+        </p:txBody>
+      </p:sp>
+      <p:sp>
+        <p:nvSpPr>
+          <p:cNvPr id="53" name="Text 51"/>
+          <p:cNvSpPr/>
+          <p:nvPr/>
+        </p:nvSpPr>
+        <p:spPr>
+          <a:xfrm>
+            <a:off x="8577072" y="3017520"/>
+            <a:ext cx="365760" cy="292608"/>
           </a:xfrm>
           <a:prstGeom prst="rect">
             <a:avLst/>
@@ -4629,7 +4867,7 @@
               <a:buNone/>
             </a:pPr>
             <a:r>
-              <a:rPr lang="en-US" sz="1150" dirty="0">
+              <a:rPr lang="en-US" sz="1100" dirty="0">
                 <a:solidFill>
                   <a:srgbClr val="6E6E73"/>
                 </a:solidFill>
@@ -4639,20 +4877,20 @@
               </a:rPr>
               <a:t>○</a:t>
             </a:r>
-            <a:endParaRPr lang="en-US" sz="1150" dirty="0"/>
-          </a:p>
-        </p:txBody>
-      </p:sp>
-      <p:sp>
-        <p:nvSpPr>
-          <p:cNvPr id="50" name="Text 48"/>
-          <p:cNvSpPr/>
-          <p:nvPr/>
-        </p:nvSpPr>
-        <p:spPr>
-          <a:xfrm>
-            <a:off x="9034272" y="3072384"/>
-            <a:ext cx="2377440" cy="320040"/>
+            <a:endParaRPr lang="en-US" sz="1100" dirty="0"/>
+          </a:p>
+        </p:txBody>
+      </p:sp>
+      <p:sp>
+        <p:nvSpPr>
+          <p:cNvPr id="54" name="Text 52"/>
+          <p:cNvSpPr/>
+          <p:nvPr/>
+        </p:nvSpPr>
+        <p:spPr>
+          <a:xfrm>
+            <a:off x="9034272" y="3017520"/>
+            <a:ext cx="2377440" cy="292608"/>
           </a:xfrm>
           <a:prstGeom prst="rect">
             <a:avLst/>
@@ -4671,7 +4909,7 @@
               <a:buNone/>
             </a:pPr>
             <a:r>
-              <a:rPr lang="en-US" sz="1050" dirty="0">
+              <a:rPr lang="en-US" sz="1000" dirty="0">
                 <a:solidFill>
                   <a:srgbClr val="55555A"/>
                 </a:solidFill>
@@ -4681,19 +4919,19 @@
               </a:rPr>
               <a:t>— 없음</a:t>
             </a:r>
-            <a:endParaRPr lang="en-US" sz="1050" dirty="0"/>
-          </a:p>
-        </p:txBody>
-      </p:sp>
-      <p:sp>
-        <p:nvSpPr>
-          <p:cNvPr id="51" name="Shape 49"/>
-          <p:cNvSpPr/>
-          <p:nvPr/>
-        </p:nvSpPr>
-        <p:spPr>
-          <a:xfrm>
-            <a:off x="6336792" y="3419856"/>
+            <a:endParaRPr lang="en-US" sz="1000" dirty="0"/>
+          </a:p>
+        </p:txBody>
+      </p:sp>
+      <p:sp>
+        <p:nvSpPr>
+          <p:cNvPr id="55" name="Shape 53"/>
+          <p:cNvSpPr/>
+          <p:nvPr/>
+        </p:nvSpPr>
+        <p:spPr>
+          <a:xfrm>
+            <a:off x="6336792" y="3323844"/>
             <a:ext cx="5074920" cy="0"/>
           </a:xfrm>
           <a:prstGeom prst="line">
@@ -4710,14 +4948,14 @@
       </p:sp>
       <p:sp>
         <p:nvSpPr>
-          <p:cNvPr id="52" name="Text 50"/>
-          <p:cNvSpPr/>
-          <p:nvPr/>
-        </p:nvSpPr>
-        <p:spPr>
-          <a:xfrm>
-            <a:off x="6336792" y="3438144"/>
-            <a:ext cx="2194560" cy="320040"/>
+          <p:cNvPr id="56" name="Text 54"/>
+          <p:cNvSpPr/>
+          <p:nvPr/>
+        </p:nvSpPr>
+        <p:spPr>
+          <a:xfrm>
+            <a:off x="6336792" y="3346704"/>
+            <a:ext cx="2194560" cy="292608"/>
           </a:xfrm>
           <a:prstGeom prst="rect">
             <a:avLst/>
@@ -4736,7 +4974,7 @@
               <a:buNone/>
             </a:pPr>
             <a:r>
-              <a:rPr lang="en-US" sz="1150" dirty="0">
+              <a:rPr lang="en-US" sz="1100" dirty="0">
                 <a:solidFill>
                   <a:srgbClr val="1D1D1F"/>
                 </a:solidFill>
@@ -4744,22 +4982,22 @@
                 <a:ea typeface="Pretendard Medium" pitchFamily="34" charset="-122"/>
                 <a:cs typeface="Pretendard Medium" pitchFamily="34" charset="-120"/>
               </a:rPr>
-              <a:t>계정 · 주소 · 권한</a:t>
-            </a:r>
-            <a:endParaRPr lang="en-US" sz="1150" dirty="0"/>
-          </a:p>
-        </p:txBody>
-      </p:sp>
-      <p:sp>
-        <p:nvSpPr>
-          <p:cNvPr id="53" name="Text 51"/>
-          <p:cNvSpPr/>
-          <p:nvPr/>
-        </p:nvSpPr>
-        <p:spPr>
-          <a:xfrm>
-            <a:off x="8577072" y="3438144"/>
-            <a:ext cx="365760" cy="320040"/>
+              <a:t>공유 복제</a:t>
+            </a:r>
+            <a:endParaRPr lang="en-US" sz="1100" dirty="0"/>
+          </a:p>
+        </p:txBody>
+      </p:sp>
+      <p:sp>
+        <p:nvSpPr>
+          <p:cNvPr id="57" name="Text 55"/>
+          <p:cNvSpPr/>
+          <p:nvPr/>
+        </p:nvSpPr>
+        <p:spPr>
+          <a:xfrm>
+            <a:off x="8577072" y="3346704"/>
+            <a:ext cx="365760" cy="292608"/>
           </a:xfrm>
           <a:prstGeom prst="rect">
             <a:avLst/>
@@ -4778,7 +5016,7 @@
               <a:buNone/>
             </a:pPr>
             <a:r>
-              <a:rPr lang="en-US" sz="1150" dirty="0">
+              <a:rPr lang="en-US" sz="1100" dirty="0">
                 <a:solidFill>
                   <a:srgbClr val="6E6E73"/>
                 </a:solidFill>
@@ -4788,20 +5026,20 @@
               </a:rPr>
               <a:t>○</a:t>
             </a:r>
-            <a:endParaRPr lang="en-US" sz="1150" dirty="0"/>
-          </a:p>
-        </p:txBody>
-      </p:sp>
-      <p:sp>
-        <p:nvSpPr>
-          <p:cNvPr id="54" name="Text 52"/>
-          <p:cNvSpPr/>
-          <p:nvPr/>
-        </p:nvSpPr>
-        <p:spPr>
-          <a:xfrm>
-            <a:off x="9034272" y="3438144"/>
-            <a:ext cx="2377440" cy="320040"/>
+            <a:endParaRPr lang="en-US" sz="1100" dirty="0"/>
+          </a:p>
+        </p:txBody>
+      </p:sp>
+      <p:sp>
+        <p:nvSpPr>
+          <p:cNvPr id="58" name="Text 56"/>
+          <p:cNvSpPr/>
+          <p:nvPr/>
+        </p:nvSpPr>
+        <p:spPr>
+          <a:xfrm>
+            <a:off x="9034272" y="3346704"/>
+            <a:ext cx="2377440" cy="292608"/>
           </a:xfrm>
           <a:prstGeom prst="rect">
             <a:avLst/>
@@ -4820,7 +5058,7 @@
               <a:buNone/>
             </a:pPr>
             <a:r>
-              <a:rPr lang="en-US" sz="1050" dirty="0">
+              <a:rPr lang="en-US" sz="1000" dirty="0">
                 <a:solidFill>
                   <a:srgbClr val="55555A"/>
                 </a:solidFill>
@@ -4830,19 +5068,19 @@
               </a:rPr>
               <a:t>— 없음</a:t>
             </a:r>
-            <a:endParaRPr lang="en-US" sz="1050" dirty="0"/>
-          </a:p>
-        </p:txBody>
-      </p:sp>
-      <p:sp>
-        <p:nvSpPr>
-          <p:cNvPr id="55" name="Shape 53"/>
-          <p:cNvSpPr/>
-          <p:nvPr/>
-        </p:nvSpPr>
-        <p:spPr>
-          <a:xfrm>
-            <a:off x="6336792" y="3785616"/>
+            <a:endParaRPr lang="en-US" sz="1000" dirty="0"/>
+          </a:p>
+        </p:txBody>
+      </p:sp>
+      <p:sp>
+        <p:nvSpPr>
+          <p:cNvPr id="59" name="Shape 57"/>
+          <p:cNvSpPr/>
+          <p:nvPr/>
+        </p:nvSpPr>
+        <p:spPr>
+          <a:xfrm>
+            <a:off x="6336792" y="3653028"/>
             <a:ext cx="5074920" cy="0"/>
           </a:xfrm>
           <a:prstGeom prst="line">
@@ -4859,14 +5097,14 @@
       </p:sp>
       <p:sp>
         <p:nvSpPr>
-          <p:cNvPr id="56" name="Text 54"/>
-          <p:cNvSpPr/>
-          <p:nvPr/>
-        </p:nvSpPr>
-        <p:spPr>
-          <a:xfrm>
-            <a:off x="6336792" y="3803904"/>
-            <a:ext cx="2194560" cy="320040"/>
+          <p:cNvPr id="60" name="Text 58"/>
+          <p:cNvSpPr/>
+          <p:nvPr/>
+        </p:nvSpPr>
+        <p:spPr>
+          <a:xfrm>
+            <a:off x="6336792" y="3675888"/>
+            <a:ext cx="2194560" cy="292608"/>
           </a:xfrm>
           <a:prstGeom prst="rect">
             <a:avLst/>
@@ -4885,7 +5123,7 @@
               <a:buNone/>
             </a:pPr>
             <a:r>
-              <a:rPr lang="en-US" sz="1150" dirty="0">
+              <a:rPr lang="en-US" sz="1100" dirty="0">
                 <a:solidFill>
                   <a:srgbClr val="1D1D1F"/>
                 </a:solidFill>
@@ -4893,22 +5131,22 @@
                 <a:ea typeface="Pretendard Medium" pitchFamily="34" charset="-122"/>
                 <a:cs typeface="Pretendard Medium" pitchFamily="34" charset="-120"/>
               </a:rPr>
-              <a:t>요금 · 결제</a:t>
-            </a:r>
-            <a:endParaRPr lang="en-US" sz="1150" dirty="0"/>
-          </a:p>
-        </p:txBody>
-      </p:sp>
-      <p:sp>
-        <p:nvSpPr>
-          <p:cNvPr id="57" name="Text 55"/>
-          <p:cNvSpPr/>
-          <p:nvPr/>
-        </p:nvSpPr>
-        <p:spPr>
-          <a:xfrm>
-            <a:off x="8577072" y="3803904"/>
-            <a:ext cx="365760" cy="320040"/>
+              <a:t>홈 · 내 페이지</a:t>
+            </a:r>
+            <a:endParaRPr lang="en-US" sz="1100" dirty="0"/>
+          </a:p>
+        </p:txBody>
+      </p:sp>
+      <p:sp>
+        <p:nvSpPr>
+          <p:cNvPr id="61" name="Text 59"/>
+          <p:cNvSpPr/>
+          <p:nvPr/>
+        </p:nvSpPr>
+        <p:spPr>
+          <a:xfrm>
+            <a:off x="8577072" y="3675888"/>
+            <a:ext cx="365760" cy="292608"/>
           </a:xfrm>
           <a:prstGeom prst="rect">
             <a:avLst/>
@@ -4927,7 +5165,7 @@
               <a:buNone/>
             </a:pPr>
             <a:r>
-              <a:rPr lang="en-US" sz="1150" dirty="0">
+              <a:rPr lang="en-US" sz="1100" dirty="0">
                 <a:solidFill>
                   <a:srgbClr val="6E6E73"/>
                 </a:solidFill>
@@ -4935,22 +5173,22 @@
                 <a:ea typeface="Pretendard SemiBold" pitchFamily="34" charset="-122"/>
                 <a:cs typeface="Pretendard SemiBold" pitchFamily="34" charset="-120"/>
               </a:rPr>
-              <a:t>◐</a:t>
-            </a:r>
-            <a:endParaRPr lang="en-US" sz="1150" dirty="0"/>
-          </a:p>
-        </p:txBody>
-      </p:sp>
-      <p:sp>
-        <p:nvSpPr>
-          <p:cNvPr id="58" name="Text 56"/>
-          <p:cNvSpPr/>
-          <p:nvPr/>
-        </p:nvSpPr>
-        <p:spPr>
-          <a:xfrm>
-            <a:off x="9034272" y="3803904"/>
-            <a:ext cx="2377440" cy="320040"/>
+              <a:t>○</a:t>
+            </a:r>
+            <a:endParaRPr lang="en-US" sz="1100" dirty="0"/>
+          </a:p>
+        </p:txBody>
+      </p:sp>
+      <p:sp>
+        <p:nvSpPr>
+          <p:cNvPr id="62" name="Text 60"/>
+          <p:cNvSpPr/>
+          <p:nvPr/>
+        </p:nvSpPr>
+        <p:spPr>
+          <a:xfrm>
+            <a:off x="9034272" y="3675888"/>
+            <a:ext cx="2377440" cy="292608"/>
           </a:xfrm>
           <a:prstGeom prst="rect">
             <a:avLst/>
@@ -4969,7 +5207,7 @@
               <a:buNone/>
             </a:pPr>
             <a:r>
-              <a:rPr lang="en-US" sz="1050" dirty="0">
+              <a:rPr lang="en-US" sz="1000" dirty="0">
                 <a:solidFill>
                   <a:srgbClr val="55555A"/>
                 </a:solidFill>
@@ -4977,21 +5215,21 @@
                 <a:ea typeface="Pretendard" pitchFamily="34" charset="-122"/>
                 <a:cs typeface="Pretendard" pitchFamily="34" charset="-120"/>
               </a:rPr>
-              <a:t>[SV] quota 실측</a:t>
-            </a:r>
-            <a:endParaRPr lang="en-US" sz="1050" dirty="0"/>
-          </a:p>
-        </p:txBody>
-      </p:sp>
-      <p:sp>
-        <p:nvSpPr>
-          <p:cNvPr id="59" name="Shape 57"/>
-          <p:cNvSpPr/>
-          <p:nvPr/>
-        </p:nvSpPr>
-        <p:spPr>
-          <a:xfrm>
-            <a:off x="6336792" y="4151376"/>
+              <a:t>— 없음</a:t>
+            </a:r>
+            <a:endParaRPr lang="en-US" sz="1000" dirty="0"/>
+          </a:p>
+        </p:txBody>
+      </p:sp>
+      <p:sp>
+        <p:nvSpPr>
+          <p:cNvPr id="63" name="Shape 61"/>
+          <p:cNvSpPr/>
+          <p:nvPr/>
+        </p:nvSpPr>
+        <p:spPr>
+          <a:xfrm>
+            <a:off x="6336792" y="3982212"/>
             <a:ext cx="5074920" cy="0"/>
           </a:xfrm>
           <a:prstGeom prst="line">
@@ -5008,14 +5246,14 @@
       </p:sp>
       <p:sp>
         <p:nvSpPr>
-          <p:cNvPr id="60" name="Text 58"/>
-          <p:cNvSpPr/>
-          <p:nvPr/>
-        </p:nvSpPr>
-        <p:spPr>
-          <a:xfrm>
-            <a:off x="6336792" y="4169664"/>
-            <a:ext cx="2194560" cy="320040"/>
+          <p:cNvPr id="64" name="Text 62"/>
+          <p:cNvSpPr/>
+          <p:nvPr/>
+        </p:nvSpPr>
+        <p:spPr>
+          <a:xfrm>
+            <a:off x="6336792" y="4005072"/>
+            <a:ext cx="2194560" cy="292608"/>
           </a:xfrm>
           <a:prstGeom prst="rect">
             <a:avLst/>
@@ -5034,7 +5272,7 @@
               <a:buNone/>
             </a:pPr>
             <a:r>
-              <a:rPr lang="en-US" sz="1150" dirty="0">
+              <a:rPr lang="en-US" sz="1100" dirty="0">
                 <a:solidFill>
                   <a:srgbClr val="1D1D1F"/>
                 </a:solidFill>
@@ -5042,22 +5280,22 @@
                 <a:ea typeface="Pretendard Medium" pitchFamily="34" charset="-122"/>
                 <a:cs typeface="Pretendard Medium" pitchFamily="34" charset="-120"/>
               </a:rPr>
-              <a:t>페이지 비밀번호</a:t>
-            </a:r>
-            <a:endParaRPr lang="en-US" sz="1150" dirty="0"/>
-          </a:p>
-        </p:txBody>
-      </p:sp>
-      <p:sp>
-        <p:nvSpPr>
-          <p:cNvPr id="61" name="Text 59"/>
-          <p:cNvSpPr/>
-          <p:nvPr/>
-        </p:nvSpPr>
-        <p:spPr>
-          <a:xfrm>
-            <a:off x="8577072" y="4169664"/>
-            <a:ext cx="365760" cy="320040"/>
+              <a:t>계정 · 내 주소</a:t>
+            </a:r>
+            <a:endParaRPr lang="en-US" sz="1100" dirty="0"/>
+          </a:p>
+        </p:txBody>
+      </p:sp>
+      <p:sp>
+        <p:nvSpPr>
+          <p:cNvPr id="65" name="Text 63"/>
+          <p:cNvSpPr/>
+          <p:nvPr/>
+        </p:nvSpPr>
+        <p:spPr>
+          <a:xfrm>
+            <a:off x="8577072" y="4005072"/>
+            <a:ext cx="365760" cy="292608"/>
           </a:xfrm>
           <a:prstGeom prst="rect">
             <a:avLst/>
@@ -5076,7 +5314,7 @@
               <a:buNone/>
             </a:pPr>
             <a:r>
-              <a:rPr lang="en-US" sz="1150" dirty="0">
+              <a:rPr lang="en-US" sz="1100" dirty="0">
                 <a:solidFill>
                   <a:srgbClr val="6E6E73"/>
                 </a:solidFill>
@@ -5084,22 +5322,22 @@
                 <a:ea typeface="Pretendard SemiBold" pitchFamily="34" charset="-122"/>
                 <a:cs typeface="Pretendard SemiBold" pitchFamily="34" charset="-120"/>
               </a:rPr>
-              <a:t>◐</a:t>
-            </a:r>
-            <a:endParaRPr lang="en-US" sz="1150" dirty="0"/>
-          </a:p>
-        </p:txBody>
-      </p:sp>
-      <p:sp>
-        <p:nvSpPr>
-          <p:cNvPr id="62" name="Text 60"/>
-          <p:cNvSpPr/>
-          <p:nvPr/>
-        </p:nvSpPr>
-        <p:spPr>
-          <a:xfrm>
-            <a:off x="9034272" y="4169664"/>
-            <a:ext cx="2377440" cy="320040"/>
+              <a:t>○</a:t>
+            </a:r>
+            <a:endParaRPr lang="en-US" sz="1100" dirty="0"/>
+          </a:p>
+        </p:txBody>
+      </p:sp>
+      <p:sp>
+        <p:nvSpPr>
+          <p:cNvPr id="66" name="Text 64"/>
+          <p:cNvSpPr/>
+          <p:nvPr/>
+        </p:nvSpPr>
+        <p:spPr>
+          <a:xfrm>
+            <a:off x="9034272" y="4005072"/>
+            <a:ext cx="2377440" cy="292608"/>
           </a:xfrm>
           <a:prstGeom prst="rect">
             <a:avLst/>
@@ -5118,7 +5356,7 @@
               <a:buNone/>
             </a:pPr>
             <a:r>
-              <a:rPr lang="en-US" sz="1050" dirty="0">
+              <a:rPr lang="en-US" sz="1000" dirty="0">
                 <a:solidFill>
                   <a:srgbClr val="55555A"/>
                 </a:solidFill>
@@ -5126,21 +5364,21 @@
                 <a:ea typeface="Pretendard" pitchFamily="34" charset="-122"/>
                 <a:cs typeface="Pretendard" pitchFamily="34" charset="-120"/>
               </a:rPr>
-              <a:t>[SV] 1-4 모달</a:t>
-            </a:r>
-            <a:endParaRPr lang="en-US" sz="1050" dirty="0"/>
-          </a:p>
-        </p:txBody>
-      </p:sp>
-      <p:sp>
-        <p:nvSpPr>
-          <p:cNvPr id="63" name="Shape 61"/>
-          <p:cNvSpPr/>
-          <p:nvPr/>
-        </p:nvSpPr>
-        <p:spPr>
-          <a:xfrm>
-            <a:off x="6336792" y="4517136"/>
+              <a:t>— 없음</a:t>
+            </a:r>
+            <a:endParaRPr lang="en-US" sz="1000" dirty="0"/>
+          </a:p>
+        </p:txBody>
+      </p:sp>
+      <p:sp>
+        <p:nvSpPr>
+          <p:cNvPr id="67" name="Shape 65"/>
+          <p:cNvSpPr/>
+          <p:nvPr/>
+        </p:nvSpPr>
+        <p:spPr>
+          <a:xfrm>
+            <a:off x="6336792" y="4311396"/>
             <a:ext cx="5074920" cy="0"/>
           </a:xfrm>
           <a:prstGeom prst="line">
@@ -5157,14 +5395,14 @@
       </p:sp>
       <p:sp>
         <p:nvSpPr>
-          <p:cNvPr id="64" name="Text 62"/>
-          <p:cNvSpPr/>
-          <p:nvPr/>
-        </p:nvSpPr>
-        <p:spPr>
-          <a:xfrm>
-            <a:off x="6336792" y="4535424"/>
-            <a:ext cx="2194560" cy="320040"/>
+          <p:cNvPr id="68" name="Text 66"/>
+          <p:cNvSpPr/>
+          <p:nvPr/>
+        </p:nvSpPr>
+        <p:spPr>
+          <a:xfrm>
+            <a:off x="6336792" y="4334256"/>
+            <a:ext cx="2194560" cy="292608"/>
           </a:xfrm>
           <a:prstGeom prst="rect">
             <a:avLst/>
@@ -5183,7 +5421,7 @@
               <a:buNone/>
             </a:pPr>
             <a:r>
-              <a:rPr lang="en-US" sz="1150" dirty="0">
+              <a:rPr lang="en-US" sz="1100" dirty="0">
                 <a:solidFill>
                   <a:srgbClr val="1D1D1F"/>
                 </a:solidFill>
@@ -5191,22 +5429,22 @@
                 <a:ea typeface="Pretendard Medium" pitchFamily="34" charset="-122"/>
                 <a:cs typeface="Pretendard Medium" pitchFamily="34" charset="-120"/>
               </a:rPr>
-              <a:t>데이터 연결</a:t>
-            </a:r>
-            <a:endParaRPr lang="en-US" sz="1150" dirty="0"/>
-          </a:p>
-        </p:txBody>
-      </p:sp>
-      <p:sp>
-        <p:nvSpPr>
-          <p:cNvPr id="65" name="Text 63"/>
-          <p:cNvSpPr/>
-          <p:nvPr/>
-        </p:nvSpPr>
-        <p:spPr>
-          <a:xfrm>
-            <a:off x="8577072" y="4535424"/>
-            <a:ext cx="365760" cy="320040"/>
+              <a:t>권한</a:t>
+            </a:r>
+            <a:endParaRPr lang="en-US" sz="1100" dirty="0"/>
+          </a:p>
+        </p:txBody>
+      </p:sp>
+      <p:sp>
+        <p:nvSpPr>
+          <p:cNvPr id="69" name="Text 67"/>
+          <p:cNvSpPr/>
+          <p:nvPr/>
+        </p:nvSpPr>
+        <p:spPr>
+          <a:xfrm>
+            <a:off x="8577072" y="4334256"/>
+            <a:ext cx="365760" cy="292608"/>
           </a:xfrm>
           <a:prstGeom prst="rect">
             <a:avLst/>
@@ -5225,7 +5463,7 @@
               <a:buNone/>
             </a:pPr>
             <a:r>
-              <a:rPr lang="en-US" sz="1150" dirty="0">
+              <a:rPr lang="en-US" sz="1100" dirty="0">
                 <a:solidFill>
                   <a:srgbClr val="6E6E73"/>
                 </a:solidFill>
@@ -5235,20 +5473,20 @@
               </a:rPr>
               <a:t>○</a:t>
             </a:r>
-            <a:endParaRPr lang="en-US" sz="1150" dirty="0"/>
-          </a:p>
-        </p:txBody>
-      </p:sp>
-      <p:sp>
-        <p:nvSpPr>
-          <p:cNvPr id="66" name="Text 64"/>
-          <p:cNvSpPr/>
-          <p:nvPr/>
-        </p:nvSpPr>
-        <p:spPr>
-          <a:xfrm>
-            <a:off x="9034272" y="4535424"/>
-            <a:ext cx="2377440" cy="320040"/>
+            <a:endParaRPr lang="en-US" sz="1100" dirty="0"/>
+          </a:p>
+        </p:txBody>
+      </p:sp>
+      <p:sp>
+        <p:nvSpPr>
+          <p:cNvPr id="70" name="Text 68"/>
+          <p:cNvSpPr/>
+          <p:nvPr/>
+        </p:nvSpPr>
+        <p:spPr>
+          <a:xfrm>
+            <a:off x="9034272" y="4334256"/>
+            <a:ext cx="2377440" cy="292608"/>
           </a:xfrm>
           <a:prstGeom prst="rect">
             <a:avLst/>
@@ -5267,7 +5505,7 @@
               <a:buNone/>
             </a:pPr>
             <a:r>
-              <a:rPr lang="en-US" sz="1050" dirty="0">
+              <a:rPr lang="en-US" sz="1000" dirty="0">
                 <a:solidFill>
                   <a:srgbClr val="55555A"/>
                 </a:solidFill>
@@ -5277,19 +5515,19 @@
               </a:rPr>
               <a:t>— 없음</a:t>
             </a:r>
-            <a:endParaRPr lang="en-US" sz="1050" dirty="0"/>
-          </a:p>
-        </p:txBody>
-      </p:sp>
-      <p:sp>
-        <p:nvSpPr>
-          <p:cNvPr id="67" name="Shape 65"/>
-          <p:cNvSpPr/>
-          <p:nvPr/>
-        </p:nvSpPr>
-        <p:spPr>
-          <a:xfrm>
-            <a:off x="6336792" y="4882896"/>
+            <a:endParaRPr lang="en-US" sz="1000" dirty="0"/>
+          </a:p>
+        </p:txBody>
+      </p:sp>
+      <p:sp>
+        <p:nvSpPr>
+          <p:cNvPr id="71" name="Shape 69"/>
+          <p:cNvSpPr/>
+          <p:nvPr/>
+        </p:nvSpPr>
+        <p:spPr>
+          <a:xfrm>
+            <a:off x="6336792" y="4640580"/>
             <a:ext cx="5074920" cy="0"/>
           </a:xfrm>
           <a:prstGeom prst="line">
@@ -5306,14 +5544,14 @@
       </p:sp>
       <p:sp>
         <p:nvSpPr>
-          <p:cNvPr id="68" name="Text 66"/>
-          <p:cNvSpPr/>
-          <p:nvPr/>
-        </p:nvSpPr>
-        <p:spPr>
-          <a:xfrm>
-            <a:off x="6336792" y="4901184"/>
-            <a:ext cx="2194560" cy="320040"/>
+          <p:cNvPr id="72" name="Text 70"/>
+          <p:cNvSpPr/>
+          <p:nvPr/>
+        </p:nvSpPr>
+        <p:spPr>
+          <a:xfrm>
+            <a:off x="6336792" y="4663440"/>
+            <a:ext cx="2194560" cy="292608"/>
           </a:xfrm>
           <a:prstGeom prst="rect">
             <a:avLst/>
@@ -5332,7 +5570,7 @@
               <a:buNone/>
             </a:pPr>
             <a:r>
-              <a:rPr lang="en-US" sz="1150" dirty="0">
+              <a:rPr lang="en-US" sz="1100" dirty="0">
                 <a:solidFill>
                   <a:srgbClr val="1D1D1F"/>
                 </a:solidFill>
@@ -5340,22 +5578,22 @@
                 <a:ea typeface="Pretendard Medium" pitchFamily="34" charset="-122"/>
                 <a:cs typeface="Pretendard Medium" pitchFamily="34" charset="-120"/>
               </a:rPr>
-              <a:t>회원가입</a:t>
-            </a:r>
-            <a:endParaRPr lang="en-US" sz="1150" dirty="0"/>
-          </a:p>
-        </p:txBody>
-      </p:sp>
-      <p:sp>
-        <p:nvSpPr>
-          <p:cNvPr id="69" name="Text 67"/>
-          <p:cNvSpPr/>
-          <p:nvPr/>
-        </p:nvSpPr>
-        <p:spPr>
-          <a:xfrm>
-            <a:off x="8577072" y="4901184"/>
-            <a:ext cx="365760" cy="320040"/>
+              <a:t>요금 · 결제</a:t>
+            </a:r>
+            <a:endParaRPr lang="en-US" sz="1100" dirty="0"/>
+          </a:p>
+        </p:txBody>
+      </p:sp>
+      <p:sp>
+        <p:nvSpPr>
+          <p:cNvPr id="73" name="Text 71"/>
+          <p:cNvSpPr/>
+          <p:nvPr/>
+        </p:nvSpPr>
+        <p:spPr>
+          <a:xfrm>
+            <a:off x="8577072" y="4663440"/>
+            <a:ext cx="365760" cy="292608"/>
           </a:xfrm>
           <a:prstGeom prst="rect">
             <a:avLst/>
@@ -5374,7 +5612,7 @@
               <a:buNone/>
             </a:pPr>
             <a:r>
-              <a:rPr lang="en-US" sz="1150" dirty="0">
+              <a:rPr lang="en-US" sz="1100" dirty="0">
                 <a:solidFill>
                   <a:srgbClr val="6E6E73"/>
                 </a:solidFill>
@@ -5382,22 +5620,22 @@
                 <a:ea typeface="Pretendard SemiBold" pitchFamily="34" charset="-122"/>
                 <a:cs typeface="Pretendard SemiBold" pitchFamily="34" charset="-120"/>
               </a:rPr>
-              <a:t>○</a:t>
-            </a:r>
-            <a:endParaRPr lang="en-US" sz="1150" dirty="0"/>
-          </a:p>
-        </p:txBody>
-      </p:sp>
-      <p:sp>
-        <p:nvSpPr>
-          <p:cNvPr id="70" name="Text 68"/>
-          <p:cNvSpPr/>
-          <p:nvPr/>
-        </p:nvSpPr>
-        <p:spPr>
-          <a:xfrm>
-            <a:off x="9034272" y="4901184"/>
-            <a:ext cx="2377440" cy="320040"/>
+              <a:t>◐</a:t>
+            </a:r>
+            <a:endParaRPr lang="en-US" sz="1100" dirty="0"/>
+          </a:p>
+        </p:txBody>
+      </p:sp>
+      <p:sp>
+        <p:nvSpPr>
+          <p:cNvPr id="74" name="Text 72"/>
+          <p:cNvSpPr/>
+          <p:nvPr/>
+        </p:nvSpPr>
+        <p:spPr>
+          <a:xfrm>
+            <a:off x="9034272" y="4663440"/>
+            <a:ext cx="2377440" cy="292608"/>
           </a:xfrm>
           <a:prstGeom prst="rect">
             <a:avLst/>
@@ -5416,7 +5654,7 @@
               <a:buNone/>
             </a:pPr>
             <a:r>
-              <a:rPr lang="en-US" sz="1050" dirty="0">
+              <a:rPr lang="en-US" sz="1000" dirty="0">
                 <a:solidFill>
                   <a:srgbClr val="55555A"/>
                 </a:solidFill>
@@ -5424,21 +5662,212 @@
                 <a:ea typeface="Pretendard" pitchFamily="34" charset="-122"/>
                 <a:cs typeface="Pretendard" pitchFamily="34" charset="-120"/>
               </a:rPr>
+              <a:t>[SV] quota 실측</a:t>
+            </a:r>
+            <a:endParaRPr lang="en-US" sz="1000" dirty="0"/>
+          </a:p>
+        </p:txBody>
+      </p:sp>
+      <p:sp>
+        <p:nvSpPr>
+          <p:cNvPr id="75" name="Text 73"/>
+          <p:cNvSpPr/>
+          <p:nvPr/>
+        </p:nvSpPr>
+        <p:spPr>
+          <a:xfrm>
+            <a:off x="6336792" y="5074920"/>
+            <a:ext cx="5074920" cy="274320"/>
+          </a:xfrm>
+          <a:prstGeom prst="rect">
+            <a:avLst/>
+          </a:prstGeom>
+          <a:noFill/>
+          <a:ln/>
+        </p:spPr>
+        <p:txBody>
+          <a:bodyPr wrap="square" lIns="0" tIns="0" rIns="0" bIns="0" rtlCol="0" anchor="t"/>
+          <a:lstStyle/>
+          <a:p>
+            <a:pPr algn="l" indent="0" marL="0">
+              <a:lnSpc>
+                <a:spcPct val="130000"/>
+              </a:lnSpc>
+              <a:buNone/>
+            </a:pPr>
+            <a:r>
+              <a:rPr lang="en-US" sz="1250" dirty="0">
+                <a:solidFill>
+                  <a:srgbClr val="6C4CFF"/>
+                </a:solidFill>
+                <a:latin typeface="Pretendard SemiBold" pitchFamily="34" charset="0"/>
+                <a:ea typeface="Pretendard SemiBold" pitchFamily="34" charset="-122"/>
+                <a:cs typeface="Pretendard SemiBold" pitchFamily="34" charset="-120"/>
+              </a:rPr>
+              <a:t>ⓐ 시작</a:t>
+            </a:r>
+            <a:endParaRPr lang="en-US" sz="1250" dirty="0"/>
+          </a:p>
+        </p:txBody>
+      </p:sp>
+      <p:sp>
+        <p:nvSpPr>
+          <p:cNvPr id="76" name="Shape 74"/>
+          <p:cNvSpPr/>
+          <p:nvPr/>
+        </p:nvSpPr>
+        <p:spPr>
+          <a:xfrm>
+            <a:off x="6336792" y="5385816"/>
+            <a:ext cx="5074920" cy="0"/>
+          </a:xfrm>
+          <a:prstGeom prst="line">
+            <a:avLst/>
+          </a:prstGeom>
+          <a:noFill/>
+          <a:ln w="9525">
+            <a:solidFill>
+              <a:srgbClr val="E5E7EB"/>
+            </a:solidFill>
+            <a:prstDash val="solid"/>
+          </a:ln>
+        </p:spPr>
+      </p:sp>
+      <p:sp>
+        <p:nvSpPr>
+          <p:cNvPr id="77" name="Text 75"/>
+          <p:cNvSpPr/>
+          <p:nvPr/>
+        </p:nvSpPr>
+        <p:spPr>
+          <a:xfrm>
+            <a:off x="6336792" y="5477256"/>
+            <a:ext cx="2194560" cy="292608"/>
+          </a:xfrm>
+          <a:prstGeom prst="rect">
+            <a:avLst/>
+          </a:prstGeom>
+          <a:noFill/>
+          <a:ln/>
+        </p:spPr>
+        <p:txBody>
+          <a:bodyPr wrap="square" lIns="0" tIns="0" rIns="0" bIns="0" rtlCol="0" anchor="ctr"/>
+          <a:lstStyle/>
+          <a:p>
+            <a:pPr algn="l" indent="0" marL="0">
+              <a:lnSpc>
+                <a:spcPct val="130000"/>
+              </a:lnSpc>
+              <a:buNone/>
+            </a:pPr>
+            <a:r>
+              <a:rPr lang="en-US" sz="1100" dirty="0">
+                <a:solidFill>
+                  <a:srgbClr val="1D1D1F"/>
+                </a:solidFill>
+                <a:latin typeface="Pretendard Medium" pitchFamily="34" charset="0"/>
+                <a:ea typeface="Pretendard Medium" pitchFamily="34" charset="-122"/>
+                <a:cs typeface="Pretendard Medium" pitchFamily="34" charset="-120"/>
+              </a:rPr>
+              <a:t>회원가입</a:t>
+            </a:r>
+            <a:endParaRPr lang="en-US" sz="1100" dirty="0"/>
+          </a:p>
+        </p:txBody>
+      </p:sp>
+      <p:sp>
+        <p:nvSpPr>
+          <p:cNvPr id="78" name="Text 76"/>
+          <p:cNvSpPr/>
+          <p:nvPr/>
+        </p:nvSpPr>
+        <p:spPr>
+          <a:xfrm>
+            <a:off x="8577072" y="5477256"/>
+            <a:ext cx="365760" cy="292608"/>
+          </a:xfrm>
+          <a:prstGeom prst="rect">
+            <a:avLst/>
+          </a:prstGeom>
+          <a:noFill/>
+          <a:ln/>
+        </p:spPr>
+        <p:txBody>
+          <a:bodyPr wrap="square" lIns="0" tIns="0" rIns="0" bIns="0" rtlCol="0" anchor="ctr"/>
+          <a:lstStyle/>
+          <a:p>
+            <a:pPr algn="l" indent="0" marL="0">
+              <a:lnSpc>
+                <a:spcPct val="130000"/>
+              </a:lnSpc>
+              <a:buNone/>
+            </a:pPr>
+            <a:r>
+              <a:rPr lang="en-US" sz="1100" dirty="0">
+                <a:solidFill>
+                  <a:srgbClr val="6E6E73"/>
+                </a:solidFill>
+                <a:latin typeface="Pretendard SemiBold" pitchFamily="34" charset="0"/>
+                <a:ea typeface="Pretendard SemiBold" pitchFamily="34" charset="-122"/>
+                <a:cs typeface="Pretendard SemiBold" pitchFamily="34" charset="-120"/>
+              </a:rPr>
+              <a:t>○</a:t>
+            </a:r>
+            <a:endParaRPr lang="en-US" sz="1100" dirty="0"/>
+          </a:p>
+        </p:txBody>
+      </p:sp>
+      <p:sp>
+        <p:nvSpPr>
+          <p:cNvPr id="79" name="Text 77"/>
+          <p:cNvSpPr/>
+          <p:nvPr/>
+        </p:nvSpPr>
+        <p:spPr>
+          <a:xfrm>
+            <a:off x="9034272" y="5477256"/>
+            <a:ext cx="2377440" cy="292608"/>
+          </a:xfrm>
+          <a:prstGeom prst="rect">
+            <a:avLst/>
+          </a:prstGeom>
+          <a:noFill/>
+          <a:ln/>
+        </p:spPr>
+        <p:txBody>
+          <a:bodyPr wrap="square" lIns="0" tIns="0" rIns="0" bIns="0" rtlCol="0" anchor="ctr"/>
+          <a:lstStyle/>
+          <a:p>
+            <a:pPr algn="l" indent="0" marL="0">
+              <a:lnSpc>
+                <a:spcPct val="130000"/>
+              </a:lnSpc>
+              <a:buNone/>
+            </a:pPr>
+            <a:r>
+              <a:rPr lang="en-US" sz="1000" dirty="0">
+                <a:solidFill>
+                  <a:srgbClr val="55555A"/>
+                </a:solidFill>
+                <a:latin typeface="Pretendard" pitchFamily="34" charset="0"/>
+                <a:ea typeface="Pretendard" pitchFamily="34" charset="-122"/>
+                <a:cs typeface="Pretendard" pitchFamily="34" charset="-120"/>
+              </a:rPr>
               <a:t>— 없음</a:t>
             </a:r>
-            <a:endParaRPr lang="en-US" sz="1050" dirty="0"/>
-          </a:p>
-        </p:txBody>
-      </p:sp>
-      <p:sp>
-        <p:nvSpPr>
-          <p:cNvPr id="71" name="Shape 69"/>
-          <p:cNvSpPr/>
-          <p:nvPr/>
-        </p:nvSpPr>
-        <p:spPr>
-          <a:xfrm>
-            <a:off x="6336792" y="5248656"/>
+            <a:endParaRPr lang="en-US" sz="1000" dirty="0"/>
+          </a:p>
+        </p:txBody>
+      </p:sp>
+      <p:sp>
+        <p:nvSpPr>
+          <p:cNvPr id="80" name="Shape 78"/>
+          <p:cNvSpPr/>
+          <p:nvPr/>
+        </p:nvSpPr>
+        <p:spPr>
+          <a:xfrm>
+            <a:off x="6336792" y="5783580"/>
             <a:ext cx="5074920" cy="0"/>
           </a:xfrm>
           <a:prstGeom prst="line">
@@ -5455,14 +5884,14 @@
       </p:sp>
       <p:sp>
         <p:nvSpPr>
-          <p:cNvPr id="72" name="Text 70"/>
-          <p:cNvSpPr/>
-          <p:nvPr/>
-        </p:nvSpPr>
-        <p:spPr>
-          <a:xfrm>
-            <a:off x="6336792" y="5266944"/>
-            <a:ext cx="2194560" cy="320040"/>
+          <p:cNvPr id="81" name="Text 79"/>
+          <p:cNvSpPr/>
+          <p:nvPr/>
+        </p:nvSpPr>
+        <p:spPr>
+          <a:xfrm>
+            <a:off x="6336792" y="5806440"/>
+            <a:ext cx="2194560" cy="292608"/>
           </a:xfrm>
           <a:prstGeom prst="rect">
             <a:avLst/>
@@ -5481,7 +5910,7 @@
               <a:buNone/>
             </a:pPr>
             <a:r>
-              <a:rPr lang="en-US" sz="1150" dirty="0">
+              <a:rPr lang="en-US" sz="1100" dirty="0">
                 <a:solidFill>
                   <a:srgbClr val="1D1D1F"/>
                 </a:solidFill>
@@ -5491,20 +5920,20 @@
               </a:rPr>
               <a:t>템플릿 페이지 생성</a:t>
             </a:r>
-            <a:endParaRPr lang="en-US" sz="1150" dirty="0"/>
-          </a:p>
-        </p:txBody>
-      </p:sp>
-      <p:sp>
-        <p:nvSpPr>
-          <p:cNvPr id="73" name="Text 71"/>
-          <p:cNvSpPr/>
-          <p:nvPr/>
-        </p:nvSpPr>
-        <p:spPr>
-          <a:xfrm>
-            <a:off x="8577072" y="5266944"/>
-            <a:ext cx="365760" cy="320040"/>
+            <a:endParaRPr lang="en-US" sz="1100" dirty="0"/>
+          </a:p>
+        </p:txBody>
+      </p:sp>
+      <p:sp>
+        <p:nvSpPr>
+          <p:cNvPr id="82" name="Text 80"/>
+          <p:cNvSpPr/>
+          <p:nvPr/>
+        </p:nvSpPr>
+        <p:spPr>
+          <a:xfrm>
+            <a:off x="8577072" y="5806440"/>
+            <a:ext cx="365760" cy="292608"/>
           </a:xfrm>
           <a:prstGeom prst="rect">
             <a:avLst/>
@@ -5523,7 +5952,7 @@
               <a:buNone/>
             </a:pPr>
             <a:r>
-              <a:rPr lang="en-US" sz="1150" dirty="0">
+              <a:rPr lang="en-US" sz="1100" dirty="0">
                 <a:solidFill>
                   <a:srgbClr val="6E6E73"/>
                 </a:solidFill>
@@ -5533,20 +5962,20 @@
               </a:rPr>
               <a:t>◐</a:t>
             </a:r>
-            <a:endParaRPr lang="en-US" sz="1150" dirty="0"/>
-          </a:p>
-        </p:txBody>
-      </p:sp>
-      <p:sp>
-        <p:nvSpPr>
-          <p:cNvPr id="74" name="Text 72"/>
-          <p:cNvSpPr/>
-          <p:nvPr/>
-        </p:nvSpPr>
-        <p:spPr>
-          <a:xfrm>
-            <a:off x="9034272" y="5266944"/>
-            <a:ext cx="2377440" cy="320040"/>
+            <a:endParaRPr lang="en-US" sz="1100" dirty="0"/>
+          </a:p>
+        </p:txBody>
+      </p:sp>
+      <p:sp>
+        <p:nvSpPr>
+          <p:cNvPr id="83" name="Text 81"/>
+          <p:cNvSpPr/>
+          <p:nvPr/>
+        </p:nvSpPr>
+        <p:spPr>
+          <a:xfrm>
+            <a:off x="9034272" y="5806440"/>
+            <a:ext cx="2377440" cy="292608"/>
           </a:xfrm>
           <a:prstGeom prst="rect">
             <a:avLst/>
@@ -5565,7 +5994,7 @@
               <a:buNone/>
             </a:pPr>
             <a:r>
-              <a:rPr lang="en-US" sz="1050" dirty="0">
+              <a:rPr lang="en-US" sz="1000" dirty="0">
                 <a:solidFill>
                   <a:srgbClr val="55555A"/>
                 </a:solidFill>
@@ -5575,49 +6004,7 @@
               </a:rPr>
               <a:t>[T] 1-1 워크플로우</a:t>
             </a:r>
-            <a:endParaRPr lang="en-US" sz="1050" dirty="0"/>
-          </a:p>
-        </p:txBody>
-      </p:sp>
-      <p:sp>
-        <p:nvSpPr>
-          <p:cNvPr id="75" name="Text 73"/>
-          <p:cNvSpPr/>
-          <p:nvPr/>
-        </p:nvSpPr>
-        <p:spPr>
-          <a:xfrm>
-            <a:off x="777240" y="5870448"/>
-            <a:ext cx="10637215" cy="274320"/>
-          </a:xfrm>
-          <a:prstGeom prst="rect">
-            <a:avLst/>
-          </a:prstGeom>
-          <a:noFill/>
-          <a:ln/>
-        </p:spPr>
-        <p:txBody>
-          <a:bodyPr wrap="square" lIns="0" tIns="0" rIns="0" bIns="0" rtlCol="0" anchor="t"/>
-          <a:lstStyle/>
-          <a:p>
-            <a:pPr algn="l" indent="0" marL="0">
-              <a:lnSpc>
-                <a:spcPct val="130000"/>
-              </a:lnSpc>
-              <a:buNone/>
-            </a:pPr>
-            <a:r>
-              <a:rPr lang="en-US" sz="1050" dirty="0">
-                <a:solidFill>
-                  <a:srgbClr val="6E6E73"/>
-                </a:solidFill>
-                <a:latin typeface="Pretendard Medium" pitchFamily="34" charset="0"/>
-                <a:ea typeface="Pretendard Medium" pitchFamily="34" charset="-122"/>
-                <a:cs typeface="Pretendard Medium" pitchFamily="34" charset="-120"/>
-              </a:rPr>
-              <a:t>[T] cdbd-templates · [SV] cdbd-design-service · 내용은 복제하지 않고 ‘위치’만 가리킴 · 전체 약 40개 중 일부</a:t>
-            </a:r>
-            <a:endParaRPr lang="en-US" sz="1050" dirty="0"/>
+            <a:endParaRPr lang="en-US" sz="1000" dirty="0"/>
           </a:p>
         </p:txBody>
       </p:sp>
@@ -5767,7 +6154,7 @@
                 <a:ea typeface="Pretendard" pitchFamily="34" charset="-122"/>
                 <a:cs typeface="Pretendard" pitchFamily="34" charset="-120"/>
               </a:rPr>
-              <a:t>예시 — cdbd-design-system 볼트</a:t>
+              <a:t>예시 — cdbd-templates 볼트</a:t>
             </a:r>
             <a:endParaRPr lang="en-US" sz="2600" dirty="0"/>
           </a:p>
@@ -5806,7 +6193,7 @@
                 <a:ea typeface="Pretendard" pitchFamily="34" charset="-122"/>
                 <a:cs typeface="Pretendard" pitchFamily="34" charset="-120"/>
               </a:rPr>
-              <a:t>이 볼트의 _기능별 경로 가이드.md 안엔 ‘이렇게 말하면 → 이 파일’이 이렇게 들어갑니다.</a:t>
+              <a:t>고객이 쓰는 에디터 기능이 있는 볼트 — 경로 가이드는 고객 기능으로 이렇게 채웁니다.</a:t>
             </a:r>
             <a:endParaRPr lang="en-US" sz="1500" dirty="0"/>
           </a:p>
@@ -5926,7 +6313,7 @@
         <p:spPr>
           <a:xfrm>
             <a:off x="1051560" y="2578608"/>
-            <a:ext cx="2697480" cy="310896"/>
+            <a:ext cx="2697480" cy="329184"/>
           </a:xfrm>
           <a:prstGeom prst="rect">
             <a:avLst/>
@@ -5953,7 +6340,7 @@
                 <a:ea typeface="Pretendard SemiBold" pitchFamily="34" charset="-122"/>
                 <a:cs typeface="Pretendard SemiBold" pitchFamily="34" charset="-120"/>
               </a:rPr>
-              <a:t>cdbd-design-system/</a:t>
+              <a:t>cdbd-templates/</a:t>
             </a:r>
             <a:endParaRPr lang="en-US" sz="1100" dirty="0"/>
           </a:p>
@@ -5967,8 +6354,8 @@
         </p:nvSpPr>
         <p:spPr>
           <a:xfrm>
-            <a:off x="1051560" y="2889504"/>
-            <a:ext cx="2697480" cy="310896"/>
+            <a:off x="1051560" y="2907792"/>
+            <a:ext cx="2697480" cy="329184"/>
           </a:xfrm>
           <a:prstGeom prst="rect">
             <a:avLst/>
@@ -6009,8 +6396,8 @@
         </p:nvSpPr>
         <p:spPr>
           <a:xfrm>
-            <a:off x="3840480" y="2889504"/>
-            <a:ext cx="1783080" cy="310896"/>
+            <a:off x="3840480" y="2907792"/>
+            <a:ext cx="1783080" cy="329184"/>
           </a:xfrm>
           <a:prstGeom prst="rect">
             <a:avLst/>
@@ -6051,8 +6438,8 @@
         </p:nvSpPr>
         <p:spPr>
           <a:xfrm>
-            <a:off x="1051560" y="3200400"/>
-            <a:ext cx="2697480" cy="310896"/>
+            <a:off x="1051560" y="3236976"/>
+            <a:ext cx="2697480" cy="329184"/>
           </a:xfrm>
           <a:prstGeom prst="rect">
             <a:avLst/>
@@ -6093,8 +6480,8 @@
         </p:nvSpPr>
         <p:spPr>
           <a:xfrm>
-            <a:off x="3840480" y="3200400"/>
-            <a:ext cx="1783080" cy="310896"/>
+            <a:off x="3840480" y="3236976"/>
+            <a:ext cx="1783080" cy="329184"/>
           </a:xfrm>
           <a:prstGeom prst="rect">
             <a:avLst/>
@@ -6135,8 +6522,8 @@
         </p:nvSpPr>
         <p:spPr>
           <a:xfrm>
-            <a:off x="1051560" y="3511296"/>
-            <a:ext cx="2697480" cy="310896"/>
+            <a:off x="1051560" y="3566160"/>
+            <a:ext cx="2697480" cy="329184"/>
           </a:xfrm>
           <a:prstGeom prst="rect">
             <a:avLst/>
@@ -6177,8 +6564,8 @@
         </p:nvSpPr>
         <p:spPr>
           <a:xfrm>
-            <a:off x="1051560" y="3822192"/>
-            <a:ext cx="2697480" cy="310896"/>
+            <a:off x="1051560" y="3895344"/>
+            <a:ext cx="2697480" cy="329184"/>
           </a:xfrm>
           <a:prstGeom prst="rect">
             <a:avLst/>
@@ -6205,7 +6592,7 @@
                 <a:ea typeface="Pretendard Medium" pitchFamily="34" charset="-122"/>
                 <a:cs typeface="Pretendard Medium" pitchFamily="34" charset="-120"/>
               </a:rPr>
-              <a:t>│   ├─ cdbd-icon-use/</a:t>
+              <a:t>│   └─ cdbd-card-automation/</a:t>
             </a:r>
             <a:endParaRPr lang="en-US" sz="1100" dirty="0"/>
           </a:p>
@@ -6219,8 +6606,8 @@
         </p:nvSpPr>
         <p:spPr>
           <a:xfrm>
-            <a:off x="3840480" y="3822192"/>
-            <a:ext cx="1783080" cy="310896"/>
+            <a:off x="3840480" y="3895344"/>
+            <a:ext cx="1783080" cy="329184"/>
           </a:xfrm>
           <a:prstGeom prst="rect">
             <a:avLst/>
@@ -6247,7 +6634,7 @@
                 <a:ea typeface="Pretendard" pitchFamily="34" charset="-122"/>
                 <a:cs typeface="Pretendard" pitchFamily="34" charset="-120"/>
               </a:rPr>
-              <a:t>아이콘 배치</a:t>
+              <a:t>카드 자동화</a:t>
             </a:r>
             <a:endParaRPr lang="en-US" sz="1050" dirty="0"/>
           </a:p>
@@ -6261,8 +6648,50 @@
         </p:nvSpPr>
         <p:spPr>
           <a:xfrm>
-            <a:off x="1051560" y="4133088"/>
-            <a:ext cx="2697480" cy="310896"/>
+            <a:off x="1051560" y="4224528"/>
+            <a:ext cx="2697480" cy="329184"/>
+          </a:xfrm>
+          <a:prstGeom prst="rect">
+            <a:avLst/>
+          </a:prstGeom>
+          <a:noFill/>
+          <a:ln/>
+        </p:spPr>
+        <p:txBody>
+          <a:bodyPr wrap="square" lIns="0" tIns="0" rIns="0" bIns="0" rtlCol="0" anchor="ctr"/>
+          <a:lstStyle/>
+          <a:p>
+            <a:pPr algn="l" indent="0" marL="0">
+              <a:lnSpc>
+                <a:spcPct val="100000"/>
+              </a:lnSpc>
+              <a:buNone/>
+            </a:pPr>
+            <a:r>
+              <a:rPr lang="en-US" sz="1100" dirty="0">
+                <a:solidFill>
+                  <a:srgbClr val="1D1D1F"/>
+                </a:solidFill>
+                <a:latin typeface="Pretendard SemiBold" pitchFamily="34" charset="0"/>
+                <a:ea typeface="Pretendard SemiBold" pitchFamily="34" charset="-122"/>
+                <a:cs typeface="Pretendard SemiBold" pitchFamily="34" charset="-120"/>
+              </a:rPr>
+              <a:t>└─ 1. 작업 가이드/</a:t>
+            </a:r>
+            <a:endParaRPr lang="en-US" sz="1100" dirty="0"/>
+          </a:p>
+        </p:txBody>
+      </p:sp>
+      <p:sp>
+        <p:nvSpPr>
+          <p:cNvPr id="18" name="Text 16"/>
+          <p:cNvSpPr/>
+          <p:nvPr/>
+        </p:nvSpPr>
+        <p:spPr>
+          <a:xfrm>
+            <a:off x="1051560" y="4553712"/>
+            <a:ext cx="2697480" cy="329184"/>
           </a:xfrm>
           <a:prstGeom prst="rect">
             <a:avLst/>
@@ -6289,7 +6718,7 @@
                 <a:ea typeface="Pretendard Medium" pitchFamily="34" charset="-122"/>
                 <a:cs typeface="Pretendard Medium" pitchFamily="34" charset="-120"/>
               </a:rPr>
-              <a:t>│   └─ cdbd-icon-creation/</a:t>
+              <a:t>    ├─ 1-6-2. CdBd 카드 기능.md</a:t>
             </a:r>
             <a:endParaRPr lang="en-US" sz="1100" dirty="0"/>
           </a:p>
@@ -6297,14 +6726,14 @@
       </p:sp>
       <p:sp>
         <p:nvSpPr>
-          <p:cNvPr id="18" name="Text 16"/>
-          <p:cNvSpPr/>
-          <p:nvPr/>
-        </p:nvSpPr>
-        <p:spPr>
-          <a:xfrm>
-            <a:off x="3840480" y="4133088"/>
-            <a:ext cx="1783080" cy="310896"/>
+          <p:cNvPr id="19" name="Text 17"/>
+          <p:cNvSpPr/>
+          <p:nvPr/>
+        </p:nvSpPr>
+        <p:spPr>
+          <a:xfrm>
+            <a:off x="3840480" y="4553712"/>
+            <a:ext cx="1783080" cy="329184"/>
           </a:xfrm>
           <a:prstGeom prst="rect">
             <a:avLst/>
@@ -6331,7 +6760,7 @@
                 <a:ea typeface="Pretendard" pitchFamily="34" charset="-122"/>
                 <a:cs typeface="Pretendard" pitchFamily="34" charset="-120"/>
               </a:rPr>
-              <a:t>아이콘 제작</a:t>
+              <a:t>카드 15종</a:t>
             </a:r>
             <a:endParaRPr lang="en-US" sz="1050" dirty="0"/>
           </a:p>
@@ -6339,56 +6768,14 @@
       </p:sp>
       <p:sp>
         <p:nvSpPr>
-          <p:cNvPr id="19" name="Text 17"/>
-          <p:cNvSpPr/>
-          <p:nvPr/>
-        </p:nvSpPr>
-        <p:spPr>
-          <a:xfrm>
-            <a:off x="1051560" y="4443984"/>
-            <a:ext cx="2697480" cy="310896"/>
-          </a:xfrm>
-          <a:prstGeom prst="rect">
-            <a:avLst/>
-          </a:prstGeom>
-          <a:noFill/>
-          <a:ln/>
-        </p:spPr>
-        <p:txBody>
-          <a:bodyPr wrap="square" lIns="0" tIns="0" rIns="0" bIns="0" rtlCol="0" anchor="ctr"/>
-          <a:lstStyle/>
-          <a:p>
-            <a:pPr algn="l" indent="0" marL="0">
-              <a:lnSpc>
-                <a:spcPct val="100000"/>
-              </a:lnSpc>
-              <a:buNone/>
-            </a:pPr>
-            <a:r>
-              <a:rPr lang="en-US" sz="1100" dirty="0">
-                <a:solidFill>
-                  <a:srgbClr val="1D1D1F"/>
-                </a:solidFill>
-                <a:latin typeface="Pretendard SemiBold" pitchFamily="34" charset="0"/>
-                <a:ea typeface="Pretendard SemiBold" pitchFamily="34" charset="-122"/>
-                <a:cs typeface="Pretendard SemiBold" pitchFamily="34" charset="-120"/>
-              </a:rPr>
-              <a:t>└─ 디자인 시스템/</a:t>
-            </a:r>
-            <a:endParaRPr lang="en-US" sz="1100" dirty="0"/>
-          </a:p>
-        </p:txBody>
-      </p:sp>
-      <p:sp>
-        <p:nvSpPr>
           <p:cNvPr id="20" name="Text 18"/>
           <p:cNvSpPr/>
           <p:nvPr/>
         </p:nvSpPr>
         <p:spPr>
           <a:xfrm>
-            <a:off x="1051560" y="4754880"/>
-            <a:ext cx="2697480" cy="310896"/>
+            <a:off x="1051560" y="4882896"/>
+            <a:ext cx="2697480" cy="329184"/>
           </a:xfrm>
           <a:prstGeom prst="rect">
             <a:avLst/>
@@ -6415,7 +6802,7 @@
                 <a:ea typeface="Pretendard Medium" pitchFamily="34" charset="-122"/>
                 <a:cs typeface="Pretendard Medium" pitchFamily="34" charset="-120"/>
               </a:rPr>
-              <a:t>    ├─ 1. 스타일/</a:t>
+              <a:t>    ├─ 1-6-1. CdBd 에디터.md</a:t>
             </a:r>
             <a:endParaRPr lang="en-US" sz="1100" dirty="0"/>
           </a:p>
@@ -6429,8 +6816,8 @@
         </p:nvSpPr>
         <p:spPr>
           <a:xfrm>
-            <a:off x="3840480" y="4754880"/>
-            <a:ext cx="1783080" cy="310896"/>
+            <a:off x="3840480" y="4882896"/>
+            <a:ext cx="1783080" cy="329184"/>
           </a:xfrm>
           <a:prstGeom prst="rect">
             <a:avLst/>
@@ -6457,7 +6844,7 @@
                 <a:ea typeface="Pretendard" pitchFamily="34" charset="-122"/>
                 <a:cs typeface="Pretendard" pitchFamily="34" charset="-120"/>
               </a:rPr>
-              <a:t>컬러·폰트</a:t>
+              <a:t>구성·꾸미기</a:t>
             </a:r>
             <a:endParaRPr lang="en-US" sz="1050" dirty="0"/>
           </a:p>
@@ -6471,8 +6858,8 @@
         </p:nvSpPr>
         <p:spPr>
           <a:xfrm>
-            <a:off x="1051560" y="5065776"/>
-            <a:ext cx="2697480" cy="310896"/>
+            <a:off x="1051560" y="5212080"/>
+            <a:ext cx="2697480" cy="329184"/>
           </a:xfrm>
           <a:prstGeom prst="rect">
             <a:avLst/>
@@ -6499,7 +6886,7 @@
                 <a:ea typeface="Pretendard Medium" pitchFamily="34" charset="-122"/>
                 <a:cs typeface="Pretendard Medium" pitchFamily="34" charset="-120"/>
               </a:rPr>
-              <a:t>    ├─ 4. 카드 기능 정의/</a:t>
+              <a:t>    └─ 1-1. 워크플로우.md</a:t>
             </a:r>
             <a:endParaRPr lang="en-US" sz="1100" dirty="0"/>
           </a:p>
@@ -6513,8 +6900,8 @@
         </p:nvSpPr>
         <p:spPr>
           <a:xfrm>
-            <a:off x="3840480" y="5065776"/>
-            <a:ext cx="1783080" cy="310896"/>
+            <a:off x="3840480" y="5212080"/>
+            <a:ext cx="1783080" cy="329184"/>
           </a:xfrm>
           <a:prstGeom prst="rect">
             <a:avLst/>
@@ -6541,7 +6928,7 @@
                 <a:ea typeface="Pretendard" pitchFamily="34" charset="-122"/>
                 <a:cs typeface="Pretendard" pitchFamily="34" charset="-120"/>
               </a:rPr>
-              <a:t>카드 15종</a:t>
+              <a:t>템플릿 생성</a:t>
             </a:r>
             <a:endParaRPr lang="en-US" sz="1050" dirty="0"/>
           </a:p>
@@ -6549,91 +6936,7 @@
       </p:sp>
       <p:sp>
         <p:nvSpPr>
-          <p:cNvPr id="24" name="Text 22"/>
-          <p:cNvSpPr/>
-          <p:nvPr/>
-        </p:nvSpPr>
-        <p:spPr>
-          <a:xfrm>
-            <a:off x="1051560" y="5376672"/>
-            <a:ext cx="2697480" cy="310896"/>
-          </a:xfrm>
-          <a:prstGeom prst="rect">
-            <a:avLst/>
-          </a:prstGeom>
-          <a:noFill/>
-          <a:ln/>
-        </p:spPr>
-        <p:txBody>
-          <a:bodyPr wrap="square" lIns="0" tIns="0" rIns="0" bIns="0" rtlCol="0" anchor="ctr"/>
-          <a:lstStyle/>
-          <a:p>
-            <a:pPr algn="l" indent="0" marL="0">
-              <a:lnSpc>
-                <a:spcPct val="100000"/>
-              </a:lnSpc>
-              <a:buNone/>
-            </a:pPr>
-            <a:r>
-              <a:rPr lang="en-US" sz="1100" dirty="0">
-                <a:solidFill>
-                  <a:srgbClr val="1D1D1F"/>
-                </a:solidFill>
-                <a:latin typeface="Pretendard Medium" pitchFamily="34" charset="0"/>
-                <a:ea typeface="Pretendard Medium" pitchFamily="34" charset="-122"/>
-                <a:cs typeface="Pretendard Medium" pitchFamily="34" charset="-120"/>
-              </a:rPr>
-              <a:t>    └─ 5. 신규 기획 가이드/</a:t>
-            </a:r>
-            <a:endParaRPr lang="en-US" sz="1100" dirty="0"/>
-          </a:p>
-        </p:txBody>
-      </p:sp>
-      <p:sp>
-        <p:nvSpPr>
-          <p:cNvPr id="25" name="Text 23"/>
-          <p:cNvSpPr/>
-          <p:nvPr/>
-        </p:nvSpPr>
-        <p:spPr>
-          <a:xfrm>
-            <a:off x="3840480" y="5376672"/>
-            <a:ext cx="1783080" cy="310896"/>
-          </a:xfrm>
-          <a:prstGeom prst="rect">
-            <a:avLst/>
-          </a:prstGeom>
-          <a:noFill/>
-          <a:ln/>
-        </p:spPr>
-        <p:txBody>
-          <a:bodyPr wrap="square" lIns="0" tIns="0" rIns="0" bIns="0" rtlCol="0" anchor="ctr"/>
-          <a:lstStyle/>
-          <a:p>
-            <a:pPr algn="l" indent="0" marL="0">
-              <a:lnSpc>
-                <a:spcPct val="100000"/>
-              </a:lnSpc>
-              <a:buNone/>
-            </a:pPr>
-            <a:r>
-              <a:rPr lang="en-US" sz="1050" dirty="0">
-                <a:solidFill>
-                  <a:srgbClr val="6C4CFF"/>
-                </a:solidFill>
-                <a:latin typeface="Pretendard" pitchFamily="34" charset="0"/>
-                <a:ea typeface="Pretendard" pitchFamily="34" charset="-122"/>
-                <a:cs typeface="Pretendard" pitchFamily="34" charset="-120"/>
-              </a:rPr>
-              <a:t>제작 5종</a:t>
-            </a:r>
-            <a:endParaRPr lang="en-US" sz="1050" dirty="0"/>
-          </a:p>
-        </p:txBody>
-      </p:sp>
-      <p:sp>
-        <p:nvSpPr>
-          <p:cNvPr id="26" name="Shape 24"/>
+          <p:cNvPr id="24" name="Shape 22"/>
           <p:cNvSpPr/>
           <p:nvPr/>
         </p:nvSpPr>
@@ -6660,7 +6963,7 @@
       </p:sp>
       <p:sp>
         <p:nvSpPr>
-          <p:cNvPr id="27" name="Text 25"/>
+          <p:cNvPr id="25" name="Text 23"/>
           <p:cNvSpPr/>
           <p:nvPr/>
         </p:nvSpPr>
@@ -6702,7 +7005,7 @@
       </p:sp>
       <p:sp>
         <p:nvSpPr>
-          <p:cNvPr id="28" name="Text 26"/>
+          <p:cNvPr id="26" name="Text 24"/>
           <p:cNvSpPr/>
           <p:nvPr/>
         </p:nvSpPr>
@@ -6736,7 +7039,7 @@
                 <a:ea typeface="Pretendard" pitchFamily="34" charset="-122"/>
                 <a:cs typeface="Pretendard" pitchFamily="34" charset="-120"/>
               </a:rPr>
-              <a:t>이 볼트의 기능 → 정본 파일 (내용은 복제하지 않고 가리킴)</a:t>
+              <a:t>[CdBd 기능 — 고객이 쓰는] 이렇게 말하면 → 이 파일</a:t>
             </a:r>
             <a:endParaRPr lang="en-US" sz="1000" dirty="0"/>
           </a:p>
@@ -6744,13 +7047,13 @@
       </p:sp>
       <p:sp>
         <p:nvSpPr>
-          <p:cNvPr id="29" name="Text 27"/>
-          <p:cNvSpPr/>
-          <p:nvPr/>
-        </p:nvSpPr>
-        <p:spPr>
-          <a:xfrm>
-            <a:off x="6263640" y="3246120"/>
+          <p:cNvPr id="27" name="Text 25"/>
+          <p:cNvSpPr/>
+          <p:nvPr/>
+        </p:nvSpPr>
+        <p:spPr>
+          <a:xfrm>
+            <a:off x="6263640" y="3291840"/>
             <a:ext cx="4876495" cy="256032"/>
           </a:xfrm>
           <a:prstGeom prst="rect">
@@ -6778,7 +7081,7 @@
                 <a:ea typeface="Pretendard SemiBold" pitchFamily="34" charset="-122"/>
                 <a:cs typeface="Pretendard SemiBold" pitchFamily="34" charset="-120"/>
               </a:rPr>
-              <a:t>“아이콘 바꿔줘”</a:t>
+              <a:t>“카드 타입 골라줘”</a:t>
             </a:r>
             <a:endParaRPr lang="en-US" sz="1150" dirty="0"/>
           </a:p>
@@ -6786,13 +7089,13 @@
       </p:sp>
       <p:sp>
         <p:nvSpPr>
-          <p:cNvPr id="30" name="Text 28"/>
-          <p:cNvSpPr/>
-          <p:nvPr/>
-        </p:nvSpPr>
-        <p:spPr>
-          <a:xfrm>
-            <a:off x="6391656" y="3465576"/>
+          <p:cNvPr id="28" name="Text 26"/>
+          <p:cNvSpPr/>
+          <p:nvPr/>
+        </p:nvSpPr>
+        <p:spPr>
+          <a:xfrm>
+            <a:off x="6391656" y="3511296"/>
             <a:ext cx="4748479" cy="256032"/>
           </a:xfrm>
           <a:prstGeom prst="rect">
@@ -6820,7 +7123,7 @@
                 <a:ea typeface="Pretendard" pitchFamily="34" charset="-122"/>
                 <a:cs typeface="Pretendard" pitchFamily="34" charset="-120"/>
               </a:rPr>
-              <a:t>→ skills/cdbd-icon-use/ · 2-1 아이콘</a:t>
+              <a:t>→ 1-6-2. CdBd 카드 기능.md (15종)</a:t>
             </a:r>
             <a:endParaRPr lang="en-US" sz="1050" dirty="0"/>
           </a:p>
@@ -6828,13 +7131,13 @@
       </p:sp>
       <p:sp>
         <p:nvSpPr>
-          <p:cNvPr id="31" name="Text 29"/>
-          <p:cNvSpPr/>
-          <p:nvPr/>
-        </p:nvSpPr>
-        <p:spPr>
-          <a:xfrm>
-            <a:off x="6263640" y="3703320"/>
+          <p:cNvPr id="29" name="Text 27"/>
+          <p:cNvSpPr/>
+          <p:nvPr/>
+        </p:nvSpPr>
+        <p:spPr>
+          <a:xfrm>
+            <a:off x="6263640" y="3803904"/>
             <a:ext cx="4876495" cy="256032"/>
           </a:xfrm>
           <a:prstGeom prst="rect">
@@ -6862,7 +7165,7 @@
                 <a:ea typeface="Pretendard SemiBold" pitchFamily="34" charset="-122"/>
                 <a:cs typeface="Pretendard SemiBold" pitchFamily="34" charset="-120"/>
               </a:rPr>
-              <a:t>“신규 아이콘 제작”</a:t>
+              <a:t>“카드 자동화 해줘”</a:t>
             </a:r>
             <a:endParaRPr lang="en-US" sz="1150" dirty="0"/>
           </a:p>
@@ -6870,13 +7173,13 @@
       </p:sp>
       <p:sp>
         <p:nvSpPr>
-          <p:cNvPr id="32" name="Text 30"/>
-          <p:cNvSpPr/>
-          <p:nvPr/>
-        </p:nvSpPr>
-        <p:spPr>
-          <a:xfrm>
-            <a:off x="6391656" y="3922776"/>
+          <p:cNvPr id="30" name="Text 28"/>
+          <p:cNvSpPr/>
+          <p:nvPr/>
+        </p:nvSpPr>
+        <p:spPr>
+          <a:xfrm>
+            <a:off x="6391656" y="4023360"/>
             <a:ext cx="4748479" cy="256032"/>
           </a:xfrm>
           <a:prstGeom prst="rect">
@@ -6904,7 +7207,7 @@
                 <a:ea typeface="Pretendard" pitchFamily="34" charset="-122"/>
                 <a:cs typeface="Pretendard" pitchFamily="34" charset="-120"/>
               </a:rPr>
-              <a:t>→ skills/cdbd-icon-creation/ · 5-1</a:t>
+              <a:t>→ skills/cdbd-card-automation/</a:t>
             </a:r>
             <a:endParaRPr lang="en-US" sz="1050" dirty="0"/>
           </a:p>
@@ -6912,13 +7215,13 @@
       </p:sp>
       <p:sp>
         <p:nvSpPr>
-          <p:cNvPr id="33" name="Text 31"/>
-          <p:cNvSpPr/>
-          <p:nvPr/>
-        </p:nvSpPr>
-        <p:spPr>
-          <a:xfrm>
-            <a:off x="6263640" y="4160520"/>
+          <p:cNvPr id="31" name="Text 29"/>
+          <p:cNvSpPr/>
+          <p:nvPr/>
+        </p:nvSpPr>
+        <p:spPr>
+          <a:xfrm>
+            <a:off x="6263640" y="4315968"/>
             <a:ext cx="4876495" cy="256032"/>
           </a:xfrm>
           <a:prstGeom prst="rect">
@@ -6946,7 +7249,7 @@
                 <a:ea typeface="Pretendard SemiBold" pitchFamily="34" charset="-122"/>
                 <a:cs typeface="Pretendard SemiBold" pitchFamily="34" charset="-120"/>
               </a:rPr>
-              <a:t>“카드 스펙 알려줘”</a:t>
+              <a:t>“에디터 구성·꾸미기”</a:t>
             </a:r>
             <a:endParaRPr lang="en-US" sz="1150" dirty="0"/>
           </a:p>
@@ -6954,13 +7257,13 @@
       </p:sp>
       <p:sp>
         <p:nvSpPr>
-          <p:cNvPr id="34" name="Text 32"/>
-          <p:cNvSpPr/>
-          <p:nvPr/>
-        </p:nvSpPr>
-        <p:spPr>
-          <a:xfrm>
-            <a:off x="6391656" y="4379976"/>
+          <p:cNvPr id="32" name="Text 30"/>
+          <p:cNvSpPr/>
+          <p:nvPr/>
+        </p:nvSpPr>
+        <p:spPr>
+          <a:xfrm>
+            <a:off x="6391656" y="4535424"/>
             <a:ext cx="4748479" cy="256032"/>
           </a:xfrm>
           <a:prstGeom prst="rect">
@@ -6988,7 +7291,7 @@
                 <a:ea typeface="Pretendard" pitchFamily="34" charset="-122"/>
                 <a:cs typeface="Pretendard" pitchFamily="34" charset="-120"/>
               </a:rPr>
-              <a:t>→ 4. 카드 기능 정의/ (4-3~4-17)</a:t>
+              <a:t>→ 1-6-1. CdBd 에디터.md</a:t>
             </a:r>
             <a:endParaRPr lang="en-US" sz="1050" dirty="0"/>
           </a:p>
@@ -6996,13 +7299,13 @@
       </p:sp>
       <p:sp>
         <p:nvSpPr>
-          <p:cNvPr id="35" name="Text 33"/>
-          <p:cNvSpPr/>
-          <p:nvPr/>
-        </p:nvSpPr>
-        <p:spPr>
-          <a:xfrm>
-            <a:off x="6263640" y="4617720"/>
+          <p:cNvPr id="33" name="Text 31"/>
+          <p:cNvSpPr/>
+          <p:nvPr/>
+        </p:nvSpPr>
+        <p:spPr>
+          <a:xfrm>
+            <a:off x="6263640" y="4828032"/>
             <a:ext cx="4876495" cy="256032"/>
           </a:xfrm>
           <a:prstGeom prst="rect">
@@ -7030,7 +7333,7 @@
                 <a:ea typeface="Pretendard SemiBold" pitchFamily="34" charset="-122"/>
                 <a:cs typeface="Pretendard SemiBold" pitchFamily="34" charset="-120"/>
               </a:rPr>
-              <a:t>“컬러·폰트 토큰”</a:t>
+              <a:t>“템플릿 페이지 생성”</a:t>
             </a:r>
             <a:endParaRPr lang="en-US" sz="1150" dirty="0"/>
           </a:p>
@@ -7038,13 +7341,13 @@
       </p:sp>
       <p:sp>
         <p:nvSpPr>
-          <p:cNvPr id="36" name="Text 34"/>
-          <p:cNvSpPr/>
-          <p:nvPr/>
-        </p:nvSpPr>
-        <p:spPr>
-          <a:xfrm>
-            <a:off x="6391656" y="4837176"/>
+          <p:cNvPr id="34" name="Text 32"/>
+          <p:cNvSpPr/>
+          <p:nvPr/>
+        </p:nvSpPr>
+        <p:spPr>
+          <a:xfrm>
+            <a:off x="6391656" y="5047488"/>
             <a:ext cx="4748479" cy="256032"/>
           </a:xfrm>
           <a:prstGeom prst="rect">
@@ -7072,7 +7375,7 @@
                 <a:ea typeface="Pretendard" pitchFamily="34" charset="-122"/>
                 <a:cs typeface="Pretendard" pitchFamily="34" charset="-120"/>
               </a:rPr>
-              <a:t>→ 1-1 컬러 · 1-2 폰트</a:t>
+              <a:t>→ 1-1. 워크플로우.md</a:t>
             </a:r>
             <a:endParaRPr lang="en-US" sz="1050" dirty="0"/>
           </a:p>
@@ -7080,14 +7383,14 @@
       </p:sp>
       <p:sp>
         <p:nvSpPr>
-          <p:cNvPr id="37" name="Text 35"/>
-          <p:cNvSpPr/>
-          <p:nvPr/>
-        </p:nvSpPr>
-        <p:spPr>
-          <a:xfrm>
-            <a:off x="6263640" y="5074920"/>
-            <a:ext cx="4876495" cy="256032"/>
+          <p:cNvPr id="35" name="Text 33"/>
+          <p:cNvSpPr/>
+          <p:nvPr/>
+        </p:nvSpPr>
+        <p:spPr>
+          <a:xfrm>
+            <a:off x="6263640" y="5596128"/>
+            <a:ext cx="4876495" cy="320040"/>
           </a:xfrm>
           <a:prstGeom prst="rect">
             <a:avLst/>
@@ -7101,148 +7404,22 @@
           <a:p>
             <a:pPr algn="l" indent="0" marL="0">
               <a:lnSpc>
-                <a:spcPct val="130000"/>
-              </a:lnSpc>
-              <a:buNone/>
-            </a:pPr>
-            <a:r>
-              <a:rPr lang="en-US" sz="1150" dirty="0">
-                <a:solidFill>
-                  <a:srgbClr val="1D1D1F"/>
-                </a:solidFill>
-                <a:latin typeface="Pretendard SemiBold" pitchFamily="34" charset="0"/>
-                <a:ea typeface="Pretendard SemiBold" pitchFamily="34" charset="-122"/>
-                <a:cs typeface="Pretendard SemiBold" pitchFamily="34" charset="-120"/>
-              </a:rPr>
-              <a:t>“컴포넌트 일괄 교체”</a:t>
-            </a:r>
-            <a:endParaRPr lang="en-US" sz="1150" dirty="0"/>
-          </a:p>
-        </p:txBody>
-      </p:sp>
-      <p:sp>
-        <p:nvSpPr>
-          <p:cNvPr id="38" name="Text 36"/>
-          <p:cNvSpPr/>
-          <p:nvPr/>
-        </p:nvSpPr>
-        <p:spPr>
-          <a:xfrm>
-            <a:off x="6391656" y="5294376"/>
-            <a:ext cx="4748479" cy="256032"/>
-          </a:xfrm>
-          <a:prstGeom prst="rect">
-            <a:avLst/>
-          </a:prstGeom>
-          <a:noFill/>
-          <a:ln/>
-        </p:spPr>
-        <p:txBody>
-          <a:bodyPr wrap="square" lIns="0" tIns="0" rIns="0" bIns="0" rtlCol="0" anchor="t"/>
-          <a:lstStyle/>
-          <a:p>
-            <a:pPr algn="l" indent="0" marL="0">
-              <a:lnSpc>
-                <a:spcPct val="130000"/>
-              </a:lnSpc>
-              <a:buNone/>
-            </a:pPr>
-            <a:r>
-              <a:rPr lang="en-US" sz="1050" dirty="0">
-                <a:solidFill>
-                  <a:srgbClr val="55555A"/>
+                <a:spcPct val="120000"/>
+              </a:lnSpc>
+              <a:buNone/>
+            </a:pPr>
+            <a:r>
+              <a:rPr lang="en-US" sz="950" dirty="0">
+                <a:solidFill>
+                  <a:srgbClr val="6E6E73"/>
                 </a:solidFill>
                 <a:latin typeface="Pretendard" pitchFamily="34" charset="0"/>
                 <a:ea typeface="Pretendard" pitchFamily="34" charset="-122"/>
                 <a:cs typeface="Pretendard" pitchFamily="34" charset="-120"/>
               </a:rPr>
-              <a:t>→ 컴포넌트 교체 작업/</a:t>
-            </a:r>
-            <a:endParaRPr lang="en-US" sz="1050" dirty="0"/>
-          </a:p>
-        </p:txBody>
-      </p:sp>
-      <p:sp>
-        <p:nvSpPr>
-          <p:cNvPr id="39" name="Text 37"/>
-          <p:cNvSpPr/>
-          <p:nvPr/>
-        </p:nvSpPr>
-        <p:spPr>
-          <a:xfrm>
-            <a:off x="6263640" y="5532120"/>
-            <a:ext cx="4876495" cy="256032"/>
-          </a:xfrm>
-          <a:prstGeom prst="rect">
-            <a:avLst/>
-          </a:prstGeom>
-          <a:noFill/>
-          <a:ln/>
-        </p:spPr>
-        <p:txBody>
-          <a:bodyPr wrap="square" lIns="0" tIns="0" rIns="0" bIns="0" rtlCol="0" anchor="t"/>
-          <a:lstStyle/>
-          <a:p>
-            <a:pPr algn="l" indent="0" marL="0">
-              <a:lnSpc>
-                <a:spcPct val="130000"/>
-              </a:lnSpc>
-              <a:buNone/>
-            </a:pPr>
-            <a:r>
-              <a:rPr lang="en-US" sz="1150" dirty="0">
-                <a:solidFill>
-                  <a:srgbClr val="1D1D1F"/>
-                </a:solidFill>
-                <a:latin typeface="Pretendard SemiBold" pitchFamily="34" charset="0"/>
-                <a:ea typeface="Pretendard SemiBold" pitchFamily="34" charset="-122"/>
-                <a:cs typeface="Pretendard SemiBold" pitchFamily="34" charset="-120"/>
-              </a:rPr>
-              <a:t>“개발 핸드오프 문서”</a:t>
-            </a:r>
-            <a:endParaRPr lang="en-US" sz="1150" dirty="0"/>
-          </a:p>
-        </p:txBody>
-      </p:sp>
-      <p:sp>
-        <p:nvSpPr>
-          <p:cNvPr id="40" name="Text 38"/>
-          <p:cNvSpPr/>
-          <p:nvPr/>
-        </p:nvSpPr>
-        <p:spPr>
-          <a:xfrm>
-            <a:off x="6391656" y="5751576"/>
-            <a:ext cx="4748479" cy="256032"/>
-          </a:xfrm>
-          <a:prstGeom prst="rect">
-            <a:avLst/>
-          </a:prstGeom>
-          <a:noFill/>
-          <a:ln/>
-        </p:spPr>
-        <p:txBody>
-          <a:bodyPr wrap="square" lIns="0" tIns="0" rIns="0" bIns="0" rtlCol="0" anchor="t"/>
-          <a:lstStyle/>
-          <a:p>
-            <a:pPr algn="l" indent="0" marL="0">
-              <a:lnSpc>
-                <a:spcPct val="130000"/>
-              </a:lnSpc>
-              <a:buNone/>
-            </a:pPr>
-            <a:r>
-              <a:rPr lang="en-US" sz="1050" dirty="0">
-                <a:solidFill>
-                  <a:srgbClr val="55555A"/>
-                </a:solidFill>
-                <a:latin typeface="Pretendard" pitchFamily="34" charset="0"/>
-                <a:ea typeface="Pretendard" pitchFamily="34" charset="-122"/>
-                <a:cs typeface="Pretendard" pitchFamily="34" charset="-120"/>
-              </a:rPr>
-              <a:t>→ 5-5 개발 문서 제작 가이드</a:t>
-            </a:r>
-            <a:endParaRPr lang="en-US" sz="1050" dirty="0"/>
+              <a:t>＊ 시안·프리셋·팔레트 = Figma 제작 · 상세페이지 = 어드민 → 같은 파일에 구분해 따로 담습니다.</a:t>
+            </a:r>
+            <a:endParaRPr lang="en-US" sz="950" dirty="0"/>
           </a:p>
         </p:txBody>
       </p:sp>
@@ -9762,7 +9939,7 @@
                 <a:ea typeface="Pretendard SemiBold" pitchFamily="34" charset="-122"/>
                 <a:cs typeface="Pretendard SemiBold" pitchFamily="34" charset="-120"/>
               </a:rPr>
-              <a:t>일정</a:t>
+              <a:t>⑤ 플러그인</a:t>
             </a:r>
             <a:endParaRPr lang="en-US" sz="1200" dirty="0"/>
           </a:p>
@@ -9843,7 +10020,7 @@
                 <a:ea typeface="Pretendard" pitchFamily="34" charset="-122"/>
                 <a:cs typeface="Pretendard" pitchFamily="34" charset="-120"/>
               </a:rPr>
-              <a:t>얼마나 걸리나</a:t>
+              <a:t>무엇을 담고, 구조는 어떻게 바뀌나</a:t>
             </a:r>
             <a:endParaRPr lang="en-US" sz="2600" dirty="0"/>
           </a:p>
@@ -9882,7 +10059,7 @@
                 <a:ea typeface="Pretendard" pitchFamily="34" charset="-122"/>
                 <a:cs typeface="Pretendard" pitchFamily="34" charset="-120"/>
               </a:rPr>
-              <a:t>문서 구조만이면 약 1주, ○ 공백 기능을 영상으로 채우면 약 2주. (추정치)</a:t>
+              <a:t>스킬·에이전트·MCP·공통 문서를 한 저장소에 묶습니다. 기존 볼트는 안 바뀝니다.</a:t>
             </a:r>
             <a:endParaRPr lang="en-US" sz="1500" dirty="0"/>
           </a:p>
@@ -9974,12 +10151,12 @@
         </p:nvSpPr>
         <p:spPr>
           <a:xfrm>
-            <a:off x="777240" y="2487168"/>
-            <a:ext cx="5120640" cy="2788920"/>
+            <a:off x="777240" y="2377440"/>
+            <a:ext cx="4937760" cy="3611880"/>
           </a:xfrm>
           <a:prstGeom prst="roundRect">
             <a:avLst>
-              <a:gd name="adj" fmla="val 4590"/>
+              <a:gd name="adj" fmla="val 3038"/>
             </a:avLst>
           </a:prstGeom>
           <a:solidFill>
@@ -10001,8 +10178,8 @@
         </p:nvSpPr>
         <p:spPr>
           <a:xfrm>
-            <a:off x="1088136" y="2743200"/>
-            <a:ext cx="4498848" cy="320040"/>
+            <a:off x="1051560" y="2578608"/>
+            <a:ext cx="4572000" cy="274320"/>
           </a:xfrm>
           <a:prstGeom prst="rect">
             <a:avLst/>
@@ -10021,7 +10198,7 @@
               <a:buNone/>
             </a:pPr>
             <a:r>
-              <a:rPr lang="en-US" sz="1600" dirty="0">
+              <a:rPr lang="en-US" sz="1400" dirty="0">
                 <a:solidFill>
                   <a:srgbClr val="1D1D1F"/>
                 </a:solidFill>
@@ -10029,9 +10206,9 @@
                 <a:ea typeface="Pretendard SemiBold" pitchFamily="34" charset="-122"/>
                 <a:cs typeface="Pretendard SemiBold" pitchFamily="34" charset="-120"/>
               </a:rPr>
-              <a:t>문서 구조 구축</a:t>
-            </a:r>
-            <a:endParaRPr lang="en-US" sz="1600" dirty="0"/>
+              <a:t>플러그인이 담는 것</a:t>
+            </a:r>
+            <a:endParaRPr lang="en-US" sz="1400" dirty="0"/>
           </a:p>
         </p:txBody>
       </p:sp>
@@ -10043,17 +10220,17 @@
         </p:nvSpPr>
         <p:spPr>
           <a:xfrm>
-            <a:off x="1088136" y="3264408"/>
-            <a:ext cx="3291840" cy="320040"/>
-          </a:xfrm>
-          <a:prstGeom prst="rect">
-            <a:avLst/>
-          </a:prstGeom>
-          <a:noFill/>
-          <a:ln/>
-        </p:spPr>
-        <p:txBody>
-          <a:bodyPr wrap="square" lIns="0" tIns="0" rIns="0" bIns="0" rtlCol="0" anchor="t"/>
+            <a:off x="1069848" y="3063240"/>
+            <a:ext cx="182880" cy="274320"/>
+          </a:xfrm>
+          <a:prstGeom prst="rect">
+            <a:avLst/>
+          </a:prstGeom>
+          <a:noFill/>
+          <a:ln/>
+        </p:spPr>
+        <p:txBody>
+          <a:bodyPr wrap="square" lIns="0" tIns="0" rIns="0" bIns="0" rtlCol="0" anchor="ctr"/>
           <a:lstStyle/>
           <a:p>
             <a:pPr algn="l" indent="0" marL="0">
@@ -10063,15 +10240,15 @@
               <a:buNone/>
             </a:pPr>
             <a:r>
-              <a:rPr lang="en-US" sz="1300" dirty="0">
-                <a:solidFill>
-                  <a:srgbClr val="55555A"/>
+              <a:rPr lang="en-US" sz="1300" b="1" dirty="0">
+                <a:solidFill>
+                  <a:srgbClr val="6C4CFF"/>
                 </a:solidFill>
                 <a:latin typeface="Pretendard" pitchFamily="34" charset="0"/>
                 <a:ea typeface="Pretendard" pitchFamily="34" charset="-122"/>
                 <a:cs typeface="Pretendard" pitchFamily="34" charset="-120"/>
               </a:rPr>
-              <a:t>첫 볼트 경로 문서</a:t>
+              <a:t>·</a:t>
             </a:r>
             <a:endParaRPr lang="en-US" sz="1300" dirty="0"/>
           </a:p>
@@ -10085,37 +10262,37 @@
         </p:nvSpPr>
         <p:spPr>
           <a:xfrm>
-            <a:off x="4343400" y="3264408"/>
-            <a:ext cx="1280160" cy="320040"/>
-          </a:xfrm>
-          <a:prstGeom prst="rect">
-            <a:avLst/>
-          </a:prstGeom>
-          <a:noFill/>
-          <a:ln/>
-        </p:spPr>
-        <p:txBody>
-          <a:bodyPr wrap="square" lIns="0" tIns="0" rIns="0" bIns="0" rtlCol="0" anchor="t"/>
-          <a:lstStyle/>
-          <a:p>
-            <a:pPr algn="r" indent="0" marL="0">
+            <a:off x="1252728" y="3063240"/>
+            <a:ext cx="1737360" cy="274320"/>
+          </a:xfrm>
+          <a:prstGeom prst="rect">
+            <a:avLst/>
+          </a:prstGeom>
+          <a:noFill/>
+          <a:ln/>
+        </p:spPr>
+        <p:txBody>
+          <a:bodyPr wrap="square" lIns="0" tIns="0" rIns="0" bIns="0" rtlCol="0" anchor="ctr"/>
+          <a:lstStyle/>
+          <a:p>
+            <a:pPr algn="l" indent="0" marL="0">
               <a:lnSpc>
                 <a:spcPct val="130000"/>
               </a:lnSpc>
               <a:buNone/>
             </a:pPr>
             <a:r>
-              <a:rPr lang="en-US" sz="1300" dirty="0">
-                <a:solidFill>
-                  <a:srgbClr val="1D1D1F"/>
-                </a:solidFill>
-                <a:latin typeface="Pretendard Medium" pitchFamily="34" charset="0"/>
-                <a:ea typeface="Pretendard Medium" pitchFamily="34" charset="-122"/>
-                <a:cs typeface="Pretendard Medium" pitchFamily="34" charset="-120"/>
-              </a:rPr>
-              <a:t>0.5~1일</a:t>
-            </a:r>
-            <a:endParaRPr lang="en-US" sz="1300" dirty="0"/>
+              <a:rPr lang="en-US" sz="1200" dirty="0">
+                <a:solidFill>
+                  <a:srgbClr val="6C4CFF"/>
+                </a:solidFill>
+                <a:latin typeface="Pretendard SemiBold" pitchFamily="34" charset="0"/>
+                <a:ea typeface="Pretendard SemiBold" pitchFamily="34" charset="-122"/>
+                <a:cs typeface="Pretendard SemiBold" pitchFamily="34" charset="-120"/>
+              </a:rPr>
+              <a:t>skills/</a:t>
+            </a:r>
+            <a:endParaRPr lang="en-US" sz="1200" dirty="0"/>
           </a:p>
         </p:txBody>
       </p:sp>
@@ -10127,17 +10304,17 @@
         </p:nvSpPr>
         <p:spPr>
           <a:xfrm>
-            <a:off x="1088136" y="3666744"/>
-            <a:ext cx="3291840" cy="320040"/>
-          </a:xfrm>
-          <a:prstGeom prst="rect">
-            <a:avLst/>
-          </a:prstGeom>
-          <a:noFill/>
-          <a:ln/>
-        </p:spPr>
-        <p:txBody>
-          <a:bodyPr wrap="square" lIns="0" tIns="0" rIns="0" bIns="0" rtlCol="0" anchor="t"/>
+            <a:off x="2926080" y="3063240"/>
+            <a:ext cx="2651760" cy="274320"/>
+          </a:xfrm>
+          <a:prstGeom prst="rect">
+            <a:avLst/>
+          </a:prstGeom>
+          <a:noFill/>
+          <a:ln/>
+        </p:spPr>
+        <p:txBody>
+          <a:bodyPr wrap="square" lIns="0" tIns="0" rIns="0" bIns="0" rtlCol="0" anchor="ctr"/>
           <a:lstStyle/>
           <a:p>
             <a:pPr algn="l" indent="0" marL="0">
@@ -10147,7 +10324,7 @@
               <a:buNone/>
             </a:pPr>
             <a:r>
-              <a:rPr lang="en-US" sz="1300" dirty="0">
+              <a:rPr lang="en-US" sz="1050" dirty="0">
                 <a:solidFill>
                   <a:srgbClr val="55555A"/>
                 </a:solidFill>
@@ -10155,9 +10332,9 @@
                 <a:ea typeface="Pretendard" pitchFamily="34" charset="-122"/>
                 <a:cs typeface="Pretendard" pitchFamily="34" charset="-120"/>
               </a:rPr>
-              <a:t>나머지 4볼트 확산</a:t>
-            </a:r>
-            <a:endParaRPr lang="en-US" sz="1300" dirty="0"/>
+              <a:t>스킬 (카드 자동화 · 룩북 · QR …)</a:t>
+            </a:r>
+            <a:endParaRPr lang="en-US" sz="1050" dirty="0"/>
           </a:p>
         </p:txBody>
       </p:sp>
@@ -10169,77 +10346,35 @@
         </p:nvSpPr>
         <p:spPr>
           <a:xfrm>
-            <a:off x="4343400" y="3666744"/>
-            <a:ext cx="1280160" cy="320040"/>
-          </a:xfrm>
-          <a:prstGeom prst="rect">
-            <a:avLst/>
-          </a:prstGeom>
-          <a:noFill/>
-          <a:ln/>
-        </p:spPr>
-        <p:txBody>
-          <a:bodyPr wrap="square" lIns="0" tIns="0" rIns="0" bIns="0" rtlCol="0" anchor="t"/>
-          <a:lstStyle/>
-          <a:p>
-            <a:pPr algn="r" indent="0" marL="0">
+            <a:off x="1069848" y="3502152"/>
+            <a:ext cx="182880" cy="274320"/>
+          </a:xfrm>
+          <a:prstGeom prst="rect">
+            <a:avLst/>
+          </a:prstGeom>
+          <a:noFill/>
+          <a:ln/>
+        </p:spPr>
+        <p:txBody>
+          <a:bodyPr wrap="square" lIns="0" tIns="0" rIns="0" bIns="0" rtlCol="0" anchor="ctr"/>
+          <a:lstStyle/>
+          <a:p>
+            <a:pPr algn="l" indent="0" marL="0">
               <a:lnSpc>
                 <a:spcPct val="130000"/>
               </a:lnSpc>
               <a:buNone/>
             </a:pPr>
             <a:r>
-              <a:rPr lang="en-US" sz="1300" dirty="0">
-                <a:solidFill>
-                  <a:srgbClr val="1D1D1F"/>
-                </a:solidFill>
-                <a:latin typeface="Pretendard Medium" pitchFamily="34" charset="0"/>
-                <a:ea typeface="Pretendard Medium" pitchFamily="34" charset="-122"/>
-                <a:cs typeface="Pretendard Medium" pitchFamily="34" charset="-120"/>
-              </a:rPr>
-              <a:t>2~3일</a:t>
-            </a:r>
-            <a:endParaRPr lang="en-US" sz="1300" dirty="0"/>
-          </a:p>
-        </p:txBody>
-      </p:sp>
-      <p:sp>
-        <p:nvSpPr>
-          <p:cNvPr id="14" name="Text 12"/>
-          <p:cNvSpPr/>
-          <p:nvPr/>
-        </p:nvSpPr>
-        <p:spPr>
-          <a:xfrm>
-            <a:off x="1088136" y="4069080"/>
-            <a:ext cx="3291840" cy="320040"/>
-          </a:xfrm>
-          <a:prstGeom prst="rect">
-            <a:avLst/>
-          </a:prstGeom>
-          <a:noFill/>
-          <a:ln/>
-        </p:spPr>
-        <p:txBody>
-          <a:bodyPr wrap="square" lIns="0" tIns="0" rIns="0" bIns="0" rtlCol="0" anchor="t"/>
-          <a:lstStyle/>
-          <a:p>
-            <a:pPr algn="l" indent="0" marL="0">
-              <a:lnSpc>
-                <a:spcPct val="130000"/>
-              </a:lnSpc>
-              <a:buNone/>
-            </a:pPr>
-            <a:r>
-              <a:rPr lang="en-US" sz="1300" dirty="0">
-                <a:solidFill>
-                  <a:srgbClr val="55555A"/>
+              <a:rPr lang="en-US" sz="1300" b="1" dirty="0">
+                <a:solidFill>
+                  <a:srgbClr val="6C4CFF"/>
                 </a:solidFill>
                 <a:latin typeface="Pretendard" pitchFamily="34" charset="0"/>
                 <a:ea typeface="Pretendard" pitchFamily="34" charset="-122"/>
                 <a:cs typeface="Pretendard" pitchFamily="34" charset="-120"/>
               </a:rPr>
-              <a:t>연결 · 검증</a:t>
+              <a:t>·</a:t>
             </a:r>
             <a:endParaRPr lang="en-US" sz="1300" dirty="0"/>
           </a:p>
@@ -10247,75 +10382,75 @@
       </p:sp>
       <p:sp>
         <p:nvSpPr>
+          <p:cNvPr id="14" name="Text 12"/>
+          <p:cNvSpPr/>
+          <p:nvPr/>
+        </p:nvSpPr>
+        <p:spPr>
+          <a:xfrm>
+            <a:off x="1252728" y="3502152"/>
+            <a:ext cx="1737360" cy="274320"/>
+          </a:xfrm>
+          <a:prstGeom prst="rect">
+            <a:avLst/>
+          </a:prstGeom>
+          <a:noFill/>
+          <a:ln/>
+        </p:spPr>
+        <p:txBody>
+          <a:bodyPr wrap="square" lIns="0" tIns="0" rIns="0" bIns="0" rtlCol="0" anchor="ctr"/>
+          <a:lstStyle/>
+          <a:p>
+            <a:pPr algn="l" indent="0" marL="0">
+              <a:lnSpc>
+                <a:spcPct val="130000"/>
+              </a:lnSpc>
+              <a:buNone/>
+            </a:pPr>
+            <a:r>
+              <a:rPr lang="en-US" sz="1200" dirty="0">
+                <a:solidFill>
+                  <a:srgbClr val="6C4CFF"/>
+                </a:solidFill>
+                <a:latin typeface="Pretendard SemiBold" pitchFamily="34" charset="0"/>
+                <a:ea typeface="Pretendard SemiBold" pitchFamily="34" charset="-122"/>
+                <a:cs typeface="Pretendard SemiBold" pitchFamily="34" charset="-120"/>
+              </a:rPr>
+              <a:t>agents/</a:t>
+            </a:r>
+            <a:endParaRPr lang="en-US" sz="1200" dirty="0"/>
+          </a:p>
+        </p:txBody>
+      </p:sp>
+      <p:sp>
+        <p:nvSpPr>
           <p:cNvPr id="15" name="Text 13"/>
           <p:cNvSpPr/>
           <p:nvPr/>
         </p:nvSpPr>
         <p:spPr>
           <a:xfrm>
-            <a:off x="4343400" y="4069080"/>
-            <a:ext cx="1280160" cy="320040"/>
-          </a:xfrm>
-          <a:prstGeom prst="rect">
-            <a:avLst/>
-          </a:prstGeom>
-          <a:noFill/>
-          <a:ln/>
-        </p:spPr>
-        <p:txBody>
-          <a:bodyPr wrap="square" lIns="0" tIns="0" rIns="0" bIns="0" rtlCol="0" anchor="t"/>
-          <a:lstStyle/>
-          <a:p>
-            <a:pPr algn="r" indent="0" marL="0">
+            <a:off x="2926080" y="3502152"/>
+            <a:ext cx="2651760" cy="274320"/>
+          </a:xfrm>
+          <a:prstGeom prst="rect">
+            <a:avLst/>
+          </a:prstGeom>
+          <a:noFill/>
+          <a:ln/>
+        </p:spPr>
+        <p:txBody>
+          <a:bodyPr wrap="square" lIns="0" tIns="0" rIns="0" bIns="0" rtlCol="0" anchor="ctr"/>
+          <a:lstStyle/>
+          <a:p>
+            <a:pPr algn="l" indent="0" marL="0">
               <a:lnSpc>
                 <a:spcPct val="130000"/>
               </a:lnSpc>
               <a:buNone/>
             </a:pPr>
             <a:r>
-              <a:rPr lang="en-US" sz="1300" dirty="0">
-                <a:solidFill>
-                  <a:srgbClr val="1D1D1F"/>
-                </a:solidFill>
-                <a:latin typeface="Pretendard Medium" pitchFamily="34" charset="0"/>
-                <a:ea typeface="Pretendard Medium" pitchFamily="34" charset="-122"/>
-                <a:cs typeface="Pretendard Medium" pitchFamily="34" charset="-120"/>
-              </a:rPr>
-              <a:t>0.5일</a:t>
-            </a:r>
-            <a:endParaRPr lang="en-US" sz="1300" dirty="0"/>
-          </a:p>
-        </p:txBody>
-      </p:sp>
-      <p:sp>
-        <p:nvSpPr>
-          <p:cNvPr id="16" name="Text 14"/>
-          <p:cNvSpPr/>
-          <p:nvPr/>
-        </p:nvSpPr>
-        <p:spPr>
-          <a:xfrm>
-            <a:off x="1088136" y="4471416"/>
-            <a:ext cx="3291840" cy="320040"/>
-          </a:xfrm>
-          <a:prstGeom prst="rect">
-            <a:avLst/>
-          </a:prstGeom>
-          <a:noFill/>
-          <a:ln/>
-        </p:spPr>
-        <p:txBody>
-          <a:bodyPr wrap="square" lIns="0" tIns="0" rIns="0" bIns="0" rtlCol="0" anchor="t"/>
-          <a:lstStyle/>
-          <a:p>
-            <a:pPr algn="l" indent="0" marL="0">
-              <a:lnSpc>
-                <a:spcPct val="130000"/>
-              </a:lnSpc>
-              <a:buNone/>
-            </a:pPr>
-            <a:r>
-              <a:rPr lang="en-US" sz="1300" dirty="0">
+              <a:rPr lang="en-US" sz="1050" dirty="0">
                 <a:solidFill>
                   <a:srgbClr val="55555A"/>
                 </a:solidFill>
@@ -10323,7 +10458,49 @@
                 <a:ea typeface="Pretendard" pitchFamily="34" charset="-122"/>
                 <a:cs typeface="Pretendard" pitchFamily="34" charset="-120"/>
               </a:rPr>
-              <a:t>플러그인 배포</a:t>
+              <a:t>서브에이전트</a:t>
+            </a:r>
+            <a:endParaRPr lang="en-US" sz="1050" dirty="0"/>
+          </a:p>
+        </p:txBody>
+      </p:sp>
+      <p:sp>
+        <p:nvSpPr>
+          <p:cNvPr id="16" name="Text 14"/>
+          <p:cNvSpPr/>
+          <p:nvPr/>
+        </p:nvSpPr>
+        <p:spPr>
+          <a:xfrm>
+            <a:off x="1069848" y="3941064"/>
+            <a:ext cx="182880" cy="274320"/>
+          </a:xfrm>
+          <a:prstGeom prst="rect">
+            <a:avLst/>
+          </a:prstGeom>
+          <a:noFill/>
+          <a:ln/>
+        </p:spPr>
+        <p:txBody>
+          <a:bodyPr wrap="square" lIns="0" tIns="0" rIns="0" bIns="0" rtlCol="0" anchor="ctr"/>
+          <a:lstStyle/>
+          <a:p>
+            <a:pPr algn="l" indent="0" marL="0">
+              <a:lnSpc>
+                <a:spcPct val="130000"/>
+              </a:lnSpc>
+              <a:buNone/>
+            </a:pPr>
+            <a:r>
+              <a:rPr lang="en-US" sz="1300" b="1" dirty="0">
+                <a:solidFill>
+                  <a:srgbClr val="6C4CFF"/>
+                </a:solidFill>
+                <a:latin typeface="Pretendard" pitchFamily="34" charset="0"/>
+                <a:ea typeface="Pretendard" pitchFamily="34" charset="-122"/>
+                <a:cs typeface="Pretendard" pitchFamily="34" charset="-120"/>
+              </a:rPr>
+              <a:t>·</a:t>
             </a:r>
             <a:endParaRPr lang="en-US" sz="1300" dirty="0"/>
           </a:p>
@@ -10337,35 +10514,119 @@
         </p:nvSpPr>
         <p:spPr>
           <a:xfrm>
-            <a:off x="4343400" y="4471416"/>
-            <a:ext cx="1280160" cy="320040"/>
-          </a:xfrm>
-          <a:prstGeom prst="rect">
-            <a:avLst/>
-          </a:prstGeom>
-          <a:noFill/>
-          <a:ln/>
-        </p:spPr>
-        <p:txBody>
-          <a:bodyPr wrap="square" lIns="0" tIns="0" rIns="0" bIns="0" rtlCol="0" anchor="t"/>
-          <a:lstStyle/>
-          <a:p>
-            <a:pPr algn="r" indent="0" marL="0">
+            <a:off x="1252728" y="3941064"/>
+            <a:ext cx="1737360" cy="274320"/>
+          </a:xfrm>
+          <a:prstGeom prst="rect">
+            <a:avLst/>
+          </a:prstGeom>
+          <a:noFill/>
+          <a:ln/>
+        </p:spPr>
+        <p:txBody>
+          <a:bodyPr wrap="square" lIns="0" tIns="0" rIns="0" bIns="0" rtlCol="0" anchor="ctr"/>
+          <a:lstStyle/>
+          <a:p>
+            <a:pPr algn="l" indent="0" marL="0">
               <a:lnSpc>
                 <a:spcPct val="130000"/>
               </a:lnSpc>
               <a:buNone/>
             </a:pPr>
             <a:r>
-              <a:rPr lang="en-US" sz="1300" dirty="0">
-                <a:solidFill>
-                  <a:srgbClr val="1D1D1F"/>
-                </a:solidFill>
-                <a:latin typeface="Pretendard Medium" pitchFamily="34" charset="0"/>
-                <a:ea typeface="Pretendard Medium" pitchFamily="34" charset="-122"/>
-                <a:cs typeface="Pretendard Medium" pitchFamily="34" charset="-120"/>
-              </a:rPr>
-              <a:t>0.5~1일</a:t>
+              <a:rPr lang="en-US" sz="1200" dirty="0">
+                <a:solidFill>
+                  <a:srgbClr val="6C4CFF"/>
+                </a:solidFill>
+                <a:latin typeface="Pretendard SemiBold" pitchFamily="34" charset="0"/>
+                <a:ea typeface="Pretendard SemiBold" pitchFamily="34" charset="-122"/>
+                <a:cs typeface="Pretendard SemiBold" pitchFamily="34" charset="-120"/>
+              </a:rPr>
+              <a:t>commands/</a:t>
+            </a:r>
+            <a:endParaRPr lang="en-US" sz="1200" dirty="0"/>
+          </a:p>
+        </p:txBody>
+      </p:sp>
+      <p:sp>
+        <p:nvSpPr>
+          <p:cNvPr id="18" name="Text 16"/>
+          <p:cNvSpPr/>
+          <p:nvPr/>
+        </p:nvSpPr>
+        <p:spPr>
+          <a:xfrm>
+            <a:off x="2926080" y="3941064"/>
+            <a:ext cx="2651760" cy="274320"/>
+          </a:xfrm>
+          <a:prstGeom prst="rect">
+            <a:avLst/>
+          </a:prstGeom>
+          <a:noFill/>
+          <a:ln/>
+        </p:spPr>
+        <p:txBody>
+          <a:bodyPr wrap="square" lIns="0" tIns="0" rIns="0" bIns="0" rtlCol="0" anchor="ctr"/>
+          <a:lstStyle/>
+          <a:p>
+            <a:pPr algn="l" indent="0" marL="0">
+              <a:lnSpc>
+                <a:spcPct val="130000"/>
+              </a:lnSpc>
+              <a:buNone/>
+            </a:pPr>
+            <a:r>
+              <a:rPr lang="en-US" sz="1050" dirty="0">
+                <a:solidFill>
+                  <a:srgbClr val="55555A"/>
+                </a:solidFill>
+                <a:latin typeface="Pretendard" pitchFamily="34" charset="0"/>
+                <a:ea typeface="Pretendard" pitchFamily="34" charset="-122"/>
+                <a:cs typeface="Pretendard" pitchFamily="34" charset="-120"/>
+              </a:rPr>
+              <a:t>슬래시 명령</a:t>
+            </a:r>
+            <a:endParaRPr lang="en-US" sz="1050" dirty="0"/>
+          </a:p>
+        </p:txBody>
+      </p:sp>
+      <p:sp>
+        <p:nvSpPr>
+          <p:cNvPr id="19" name="Text 17"/>
+          <p:cNvSpPr/>
+          <p:nvPr/>
+        </p:nvSpPr>
+        <p:spPr>
+          <a:xfrm>
+            <a:off x="1069848" y="4379976"/>
+            <a:ext cx="182880" cy="274320"/>
+          </a:xfrm>
+          <a:prstGeom prst="rect">
+            <a:avLst/>
+          </a:prstGeom>
+          <a:noFill/>
+          <a:ln/>
+        </p:spPr>
+        <p:txBody>
+          <a:bodyPr wrap="square" lIns="0" tIns="0" rIns="0" bIns="0" rtlCol="0" anchor="ctr"/>
+          <a:lstStyle/>
+          <a:p>
+            <a:pPr algn="l" indent="0" marL="0">
+              <a:lnSpc>
+                <a:spcPct val="130000"/>
+              </a:lnSpc>
+              <a:buNone/>
+            </a:pPr>
+            <a:r>
+              <a:rPr lang="en-US" sz="1300" b="1" dirty="0">
+                <a:solidFill>
+                  <a:srgbClr val="6C4CFF"/>
+                </a:solidFill>
+                <a:latin typeface="Pretendard" pitchFamily="34" charset="0"/>
+                <a:ea typeface="Pretendard" pitchFamily="34" charset="-122"/>
+                <a:cs typeface="Pretendard" pitchFamily="34" charset="-120"/>
+              </a:rPr>
+              <a:t>·</a:t>
             </a:r>
             <a:endParaRPr lang="en-US" sz="1300" dirty="0"/>
           </a:p>
@@ -10373,20 +10634,360 @@
       </p:sp>
       <p:sp>
         <p:nvSpPr>
-          <p:cNvPr id="18" name="Shape 16"/>
-          <p:cNvSpPr/>
-          <p:nvPr/>
-        </p:nvSpPr>
-        <p:spPr>
-          <a:xfrm>
-            <a:off x="1088136" y="4818888"/>
-            <a:ext cx="4498848" cy="0"/>
-          </a:xfrm>
-          <a:prstGeom prst="line">
-            <a:avLst/>
-          </a:prstGeom>
-          <a:noFill/>
-          <a:ln w="9525">
+          <p:cNvPr id="20" name="Text 18"/>
+          <p:cNvSpPr/>
+          <p:nvPr/>
+        </p:nvSpPr>
+        <p:spPr>
+          <a:xfrm>
+            <a:off x="1252728" y="4379976"/>
+            <a:ext cx="1737360" cy="274320"/>
+          </a:xfrm>
+          <a:prstGeom prst="rect">
+            <a:avLst/>
+          </a:prstGeom>
+          <a:noFill/>
+          <a:ln/>
+        </p:spPr>
+        <p:txBody>
+          <a:bodyPr wrap="square" lIns="0" tIns="0" rIns="0" bIns="0" rtlCol="0" anchor="ctr"/>
+          <a:lstStyle/>
+          <a:p>
+            <a:pPr algn="l" indent="0" marL="0">
+              <a:lnSpc>
+                <a:spcPct val="130000"/>
+              </a:lnSpc>
+              <a:buNone/>
+            </a:pPr>
+            <a:r>
+              <a:rPr lang="en-US" sz="1200" dirty="0">
+                <a:solidFill>
+                  <a:srgbClr val="6C4CFF"/>
+                </a:solidFill>
+                <a:latin typeface="Pretendard SemiBold" pitchFamily="34" charset="0"/>
+                <a:ea typeface="Pretendard SemiBold" pitchFamily="34" charset="-122"/>
+                <a:cs typeface="Pretendard SemiBold" pitchFamily="34" charset="-120"/>
+              </a:rPr>
+              <a:t>.mcp.json</a:t>
+            </a:r>
+            <a:endParaRPr lang="en-US" sz="1200" dirty="0"/>
+          </a:p>
+        </p:txBody>
+      </p:sp>
+      <p:sp>
+        <p:nvSpPr>
+          <p:cNvPr id="21" name="Text 19"/>
+          <p:cNvSpPr/>
+          <p:nvPr/>
+        </p:nvSpPr>
+        <p:spPr>
+          <a:xfrm>
+            <a:off x="2926080" y="4379976"/>
+            <a:ext cx="2651760" cy="274320"/>
+          </a:xfrm>
+          <a:prstGeom prst="rect">
+            <a:avLst/>
+          </a:prstGeom>
+          <a:noFill/>
+          <a:ln/>
+        </p:spPr>
+        <p:txBody>
+          <a:bodyPr wrap="square" lIns="0" tIns="0" rIns="0" bIns="0" rtlCol="0" anchor="ctr"/>
+          <a:lstStyle/>
+          <a:p>
+            <a:pPr algn="l" indent="0" marL="0">
+              <a:lnSpc>
+                <a:spcPct val="130000"/>
+              </a:lnSpc>
+              <a:buNone/>
+            </a:pPr>
+            <a:r>
+              <a:rPr lang="en-US" sz="1050" dirty="0">
+                <a:solidFill>
+                  <a:srgbClr val="55555A"/>
+                </a:solidFill>
+                <a:latin typeface="Pretendard" pitchFamily="34" charset="0"/>
+                <a:ea typeface="Pretendard" pitchFamily="34" charset="-122"/>
+                <a:cs typeface="Pretendard" pitchFamily="34" charset="-120"/>
+              </a:rPr>
+              <a:t>Figma MCP 연결</a:t>
+            </a:r>
+            <a:endParaRPr lang="en-US" sz="1050" dirty="0"/>
+          </a:p>
+        </p:txBody>
+      </p:sp>
+      <p:sp>
+        <p:nvSpPr>
+          <p:cNvPr id="22" name="Text 20"/>
+          <p:cNvSpPr/>
+          <p:nvPr/>
+        </p:nvSpPr>
+        <p:spPr>
+          <a:xfrm>
+            <a:off x="1069848" y="4818888"/>
+            <a:ext cx="182880" cy="274320"/>
+          </a:xfrm>
+          <a:prstGeom prst="rect">
+            <a:avLst/>
+          </a:prstGeom>
+          <a:noFill/>
+          <a:ln/>
+        </p:spPr>
+        <p:txBody>
+          <a:bodyPr wrap="square" lIns="0" tIns="0" rIns="0" bIns="0" rtlCol="0" anchor="ctr"/>
+          <a:lstStyle/>
+          <a:p>
+            <a:pPr algn="l" indent="0" marL="0">
+              <a:lnSpc>
+                <a:spcPct val="130000"/>
+              </a:lnSpc>
+              <a:buNone/>
+            </a:pPr>
+            <a:r>
+              <a:rPr lang="en-US" sz="1300" b="1" dirty="0">
+                <a:solidFill>
+                  <a:srgbClr val="6C4CFF"/>
+                </a:solidFill>
+                <a:latin typeface="Pretendard" pitchFamily="34" charset="0"/>
+                <a:ea typeface="Pretendard" pitchFamily="34" charset="-122"/>
+                <a:cs typeface="Pretendard" pitchFamily="34" charset="-120"/>
+              </a:rPr>
+              <a:t>·</a:t>
+            </a:r>
+            <a:endParaRPr lang="en-US" sz="1300" dirty="0"/>
+          </a:p>
+        </p:txBody>
+      </p:sp>
+      <p:sp>
+        <p:nvSpPr>
+          <p:cNvPr id="23" name="Text 21"/>
+          <p:cNvSpPr/>
+          <p:nvPr/>
+        </p:nvSpPr>
+        <p:spPr>
+          <a:xfrm>
+            <a:off x="1252728" y="4818888"/>
+            <a:ext cx="1737360" cy="274320"/>
+          </a:xfrm>
+          <a:prstGeom prst="rect">
+            <a:avLst/>
+          </a:prstGeom>
+          <a:noFill/>
+          <a:ln/>
+        </p:spPr>
+        <p:txBody>
+          <a:bodyPr wrap="square" lIns="0" tIns="0" rIns="0" bIns="0" rtlCol="0" anchor="ctr"/>
+          <a:lstStyle/>
+          <a:p>
+            <a:pPr algn="l" indent="0" marL="0">
+              <a:lnSpc>
+                <a:spcPct val="130000"/>
+              </a:lnSpc>
+              <a:buNone/>
+            </a:pPr>
+            <a:r>
+              <a:rPr lang="en-US" sz="1200" dirty="0">
+                <a:solidFill>
+                  <a:srgbClr val="6C4CFF"/>
+                </a:solidFill>
+                <a:latin typeface="Pretendard SemiBold" pitchFamily="34" charset="0"/>
+                <a:ea typeface="Pretendard SemiBold" pitchFamily="34" charset="-122"/>
+                <a:cs typeface="Pretendard SemiBold" pitchFamily="34" charset="-120"/>
+              </a:rPr>
+              <a:t>공통 경로 가이드</a:t>
+            </a:r>
+            <a:endParaRPr lang="en-US" sz="1200" dirty="0"/>
+          </a:p>
+        </p:txBody>
+      </p:sp>
+      <p:sp>
+        <p:nvSpPr>
+          <p:cNvPr id="24" name="Text 22"/>
+          <p:cNvSpPr/>
+          <p:nvPr/>
+        </p:nvSpPr>
+        <p:spPr>
+          <a:xfrm>
+            <a:off x="2926080" y="4818888"/>
+            <a:ext cx="2651760" cy="274320"/>
+          </a:xfrm>
+          <a:prstGeom prst="rect">
+            <a:avLst/>
+          </a:prstGeom>
+          <a:noFill/>
+          <a:ln/>
+        </p:spPr>
+        <p:txBody>
+          <a:bodyPr wrap="square" lIns="0" tIns="0" rIns="0" bIns="0" rtlCol="0" anchor="ctr"/>
+          <a:lstStyle/>
+          <a:p>
+            <a:pPr algn="l" indent="0" marL="0">
+              <a:lnSpc>
+                <a:spcPct val="130000"/>
+              </a:lnSpc>
+              <a:buNone/>
+            </a:pPr>
+            <a:r>
+              <a:rPr lang="en-US" sz="1050" dirty="0">
+                <a:solidFill>
+                  <a:srgbClr val="55555A"/>
+                </a:solidFill>
+                <a:latin typeface="Pretendard" pitchFamily="34" charset="0"/>
+                <a:ea typeface="Pretendard" pitchFamily="34" charset="-122"/>
+                <a:cs typeface="Pretendard" pitchFamily="34" charset="-120"/>
+              </a:rPr>
+              <a:t>볼트 공통 라우팅</a:t>
+            </a:r>
+            <a:endParaRPr lang="en-US" sz="1050" dirty="0"/>
+          </a:p>
+        </p:txBody>
+      </p:sp>
+      <p:sp>
+        <p:nvSpPr>
+          <p:cNvPr id="25" name="Text 23"/>
+          <p:cNvSpPr/>
+          <p:nvPr/>
+        </p:nvSpPr>
+        <p:spPr>
+          <a:xfrm>
+            <a:off x="1069848" y="5257800"/>
+            <a:ext cx="182880" cy="274320"/>
+          </a:xfrm>
+          <a:prstGeom prst="rect">
+            <a:avLst/>
+          </a:prstGeom>
+          <a:noFill/>
+          <a:ln/>
+        </p:spPr>
+        <p:txBody>
+          <a:bodyPr wrap="square" lIns="0" tIns="0" rIns="0" bIns="0" rtlCol="0" anchor="ctr"/>
+          <a:lstStyle/>
+          <a:p>
+            <a:pPr algn="l" indent="0" marL="0">
+              <a:lnSpc>
+                <a:spcPct val="130000"/>
+              </a:lnSpc>
+              <a:buNone/>
+            </a:pPr>
+            <a:r>
+              <a:rPr lang="en-US" sz="1300" b="1" dirty="0">
+                <a:solidFill>
+                  <a:srgbClr val="6C4CFF"/>
+                </a:solidFill>
+                <a:latin typeface="Pretendard" pitchFamily="34" charset="0"/>
+                <a:ea typeface="Pretendard" pitchFamily="34" charset="-122"/>
+                <a:cs typeface="Pretendard" pitchFamily="34" charset="-120"/>
+              </a:rPr>
+              <a:t>·</a:t>
+            </a:r>
+            <a:endParaRPr lang="en-US" sz="1300" dirty="0"/>
+          </a:p>
+        </p:txBody>
+      </p:sp>
+      <p:sp>
+        <p:nvSpPr>
+          <p:cNvPr id="26" name="Text 24"/>
+          <p:cNvSpPr/>
+          <p:nvPr/>
+        </p:nvSpPr>
+        <p:spPr>
+          <a:xfrm>
+            <a:off x="1252728" y="5257800"/>
+            <a:ext cx="1737360" cy="274320"/>
+          </a:xfrm>
+          <a:prstGeom prst="rect">
+            <a:avLst/>
+          </a:prstGeom>
+          <a:noFill/>
+          <a:ln/>
+        </p:spPr>
+        <p:txBody>
+          <a:bodyPr wrap="square" lIns="0" tIns="0" rIns="0" bIns="0" rtlCol="0" anchor="ctr"/>
+          <a:lstStyle/>
+          <a:p>
+            <a:pPr algn="l" indent="0" marL="0">
+              <a:lnSpc>
+                <a:spcPct val="130000"/>
+              </a:lnSpc>
+              <a:buNone/>
+            </a:pPr>
+            <a:r>
+              <a:rPr lang="en-US" sz="1200" dirty="0">
+                <a:solidFill>
+                  <a:srgbClr val="6C4CFF"/>
+                </a:solidFill>
+                <a:latin typeface="Pretendard SemiBold" pitchFamily="34" charset="0"/>
+                <a:ea typeface="Pretendard SemiBold" pitchFamily="34" charset="-122"/>
+                <a:cs typeface="Pretendard SemiBold" pitchFamily="34" charset="-120"/>
+              </a:rPr>
+              <a:t>브랜드 토큰 정본</a:t>
+            </a:r>
+            <a:endParaRPr lang="en-US" sz="1200" dirty="0"/>
+          </a:p>
+        </p:txBody>
+      </p:sp>
+      <p:sp>
+        <p:nvSpPr>
+          <p:cNvPr id="27" name="Text 25"/>
+          <p:cNvSpPr/>
+          <p:nvPr/>
+        </p:nvSpPr>
+        <p:spPr>
+          <a:xfrm>
+            <a:off x="2926080" y="5257800"/>
+            <a:ext cx="2651760" cy="274320"/>
+          </a:xfrm>
+          <a:prstGeom prst="rect">
+            <a:avLst/>
+          </a:prstGeom>
+          <a:noFill/>
+          <a:ln/>
+        </p:spPr>
+        <p:txBody>
+          <a:bodyPr wrap="square" lIns="0" tIns="0" rIns="0" bIns="0" rtlCol="0" anchor="ctr"/>
+          <a:lstStyle/>
+          <a:p>
+            <a:pPr algn="l" indent="0" marL="0">
+              <a:lnSpc>
+                <a:spcPct val="130000"/>
+              </a:lnSpc>
+              <a:buNone/>
+            </a:pPr>
+            <a:r>
+              <a:rPr lang="en-US" sz="1050" dirty="0">
+                <a:solidFill>
+                  <a:srgbClr val="55555A"/>
+                </a:solidFill>
+                <a:latin typeface="Pretendard" pitchFamily="34" charset="0"/>
+                <a:ea typeface="Pretendard" pitchFamily="34" charset="-122"/>
+                <a:cs typeface="Pretendard" pitchFamily="34" charset="-120"/>
+              </a:rPr>
+              <a:t>컬러 · 폰트</a:t>
+            </a:r>
+            <a:endParaRPr lang="en-US" sz="1050" dirty="0"/>
+          </a:p>
+        </p:txBody>
+      </p:sp>
+      <p:sp>
+        <p:nvSpPr>
+          <p:cNvPr id="28" name="Shape 26"/>
+          <p:cNvSpPr/>
+          <p:nvPr/>
+        </p:nvSpPr>
+        <p:spPr>
+          <a:xfrm>
+            <a:off x="5989320" y="2377440"/>
+            <a:ext cx="5425135" cy="3611880"/>
+          </a:xfrm>
+          <a:prstGeom prst="roundRect">
+            <a:avLst>
+              <a:gd name="adj" fmla="val 3038"/>
+            </a:avLst>
+          </a:prstGeom>
+          <a:solidFill>
+            <a:srgbClr val="F5F5F7"/>
+          </a:solidFill>
+          <a:ln w="12700">
             <a:solidFill>
               <a:srgbClr val="E5E7EB"/>
             </a:solidFill>
@@ -10396,14 +10997,14 @@
       </p:sp>
       <p:sp>
         <p:nvSpPr>
-          <p:cNvPr id="19" name="Text 17"/>
-          <p:cNvSpPr/>
-          <p:nvPr/>
-        </p:nvSpPr>
-        <p:spPr>
-          <a:xfrm>
-            <a:off x="1088136" y="4910328"/>
-            <a:ext cx="1828800" cy="274320"/>
+          <p:cNvPr id="29" name="Text 27"/>
+          <p:cNvSpPr/>
+          <p:nvPr/>
+        </p:nvSpPr>
+        <p:spPr>
+          <a:xfrm>
+            <a:off x="6263640" y="2578608"/>
+            <a:ext cx="4876495" cy="274320"/>
           </a:xfrm>
           <a:prstGeom prst="rect">
             <a:avLst/>
@@ -10422,49 +11023,217 @@
               <a:buNone/>
             </a:pPr>
             <a:r>
-              <a:rPr lang="en-US" sz="1200" dirty="0">
-                <a:solidFill>
-                  <a:srgbClr val="6E6E73"/>
+              <a:rPr lang="en-US" sz="1300" b="1" dirty="0">
+                <a:solidFill>
+                  <a:srgbClr val="6C4CFF"/>
+                </a:solidFill>
+                <a:latin typeface="Pretendard" pitchFamily="34" charset="0"/>
+                <a:ea typeface="Pretendard" pitchFamily="34" charset="-122"/>
+                <a:cs typeface="Pretendard" pitchFamily="34" charset="-120"/>
+              </a:rPr>
+              <a:t>파일 구조는 이렇게 — 새 저장소 1개</a:t>
+            </a:r>
+            <a:endParaRPr lang="en-US" sz="1300" dirty="0"/>
+          </a:p>
+        </p:txBody>
+      </p:sp>
+      <p:sp>
+        <p:nvSpPr>
+          <p:cNvPr id="30" name="Text 28"/>
+          <p:cNvSpPr/>
+          <p:nvPr/>
+        </p:nvSpPr>
+        <p:spPr>
+          <a:xfrm>
+            <a:off x="6263640" y="2999232"/>
+            <a:ext cx="3200400" cy="310896"/>
+          </a:xfrm>
+          <a:prstGeom prst="rect">
+            <a:avLst/>
+          </a:prstGeom>
+          <a:noFill/>
+          <a:ln/>
+        </p:spPr>
+        <p:txBody>
+          <a:bodyPr wrap="square" lIns="0" tIns="0" rIns="0" bIns="0" rtlCol="0" anchor="ctr"/>
+          <a:lstStyle/>
+          <a:p>
+            <a:pPr algn="l" indent="0" marL="0">
+              <a:lnSpc>
+                <a:spcPct val="100000"/>
+              </a:lnSpc>
+              <a:buNone/>
+            </a:pPr>
+            <a:r>
+              <a:rPr lang="en-US" sz="1050" dirty="0">
+                <a:solidFill>
+                  <a:srgbClr val="6C4CFF"/>
+                </a:solidFill>
+                <a:latin typeface="Pretendard SemiBold" pitchFamily="34" charset="0"/>
+                <a:ea typeface="Pretendard SemiBold" pitchFamily="34" charset="-122"/>
+                <a:cs typeface="Pretendard SemiBold" pitchFamily="34" charset="-120"/>
+              </a:rPr>
+              <a:t>cdbd-plugin/</a:t>
+            </a:r>
+            <a:endParaRPr lang="en-US" sz="1050" dirty="0"/>
+          </a:p>
+        </p:txBody>
+      </p:sp>
+      <p:sp>
+        <p:nvSpPr>
+          <p:cNvPr id="31" name="Text 29"/>
+          <p:cNvSpPr/>
+          <p:nvPr/>
+        </p:nvSpPr>
+        <p:spPr>
+          <a:xfrm>
+            <a:off x="9555480" y="2999232"/>
+            <a:ext cx="1584655" cy="310896"/>
+          </a:xfrm>
+          <a:prstGeom prst="rect">
+            <a:avLst/>
+          </a:prstGeom>
+          <a:noFill/>
+          <a:ln/>
+        </p:spPr>
+        <p:txBody>
+          <a:bodyPr wrap="square" lIns="0" tIns="0" rIns="0" bIns="0" rtlCol="0" anchor="ctr"/>
+          <a:lstStyle/>
+          <a:p>
+            <a:pPr algn="l" indent="0" marL="0">
+              <a:lnSpc>
+                <a:spcPct val="100000"/>
+              </a:lnSpc>
+              <a:buNone/>
+            </a:pPr>
+            <a:r>
+              <a:rPr lang="en-US" sz="1000" dirty="0">
+                <a:solidFill>
+                  <a:srgbClr val="6C4CFF"/>
+                </a:solidFill>
+                <a:latin typeface="Pretendard" pitchFamily="34" charset="0"/>
+                <a:ea typeface="Pretendard" pitchFamily="34" charset="-122"/>
+                <a:cs typeface="Pretendard" pitchFamily="34" charset="-120"/>
+              </a:rPr>
+              <a:t>신규 저장소</a:t>
+            </a:r>
+            <a:endParaRPr lang="en-US" sz="1000" dirty="0"/>
+          </a:p>
+        </p:txBody>
+      </p:sp>
+      <p:sp>
+        <p:nvSpPr>
+          <p:cNvPr id="32" name="Text 30"/>
+          <p:cNvSpPr/>
+          <p:nvPr/>
+        </p:nvSpPr>
+        <p:spPr>
+          <a:xfrm>
+            <a:off x="6263640" y="3310128"/>
+            <a:ext cx="3200400" cy="310896"/>
+          </a:xfrm>
+          <a:prstGeom prst="rect">
+            <a:avLst/>
+          </a:prstGeom>
+          <a:noFill/>
+          <a:ln/>
+        </p:spPr>
+        <p:txBody>
+          <a:bodyPr wrap="square" lIns="0" tIns="0" rIns="0" bIns="0" rtlCol="0" anchor="ctr"/>
+          <a:lstStyle/>
+          <a:p>
+            <a:pPr algn="l" indent="0" marL="0">
+              <a:lnSpc>
+                <a:spcPct val="100000"/>
+              </a:lnSpc>
+              <a:buNone/>
+            </a:pPr>
+            <a:r>
+              <a:rPr lang="en-US" sz="1050" dirty="0">
+                <a:solidFill>
+                  <a:srgbClr val="1D1D1F"/>
+                </a:solidFill>
+                <a:latin typeface="Pretendard SemiBold" pitchFamily="34" charset="0"/>
+                <a:ea typeface="Pretendard SemiBold" pitchFamily="34" charset="-122"/>
+                <a:cs typeface="Pretendard SemiBold" pitchFamily="34" charset="-120"/>
+              </a:rPr>
+              <a:t>├─ .claude-plugin/</a:t>
+            </a:r>
+            <a:endParaRPr lang="en-US" sz="1050" dirty="0"/>
+          </a:p>
+        </p:txBody>
+      </p:sp>
+      <p:sp>
+        <p:nvSpPr>
+          <p:cNvPr id="33" name="Text 31"/>
+          <p:cNvSpPr/>
+          <p:nvPr/>
+        </p:nvSpPr>
+        <p:spPr>
+          <a:xfrm>
+            <a:off x="6263640" y="3621024"/>
+            <a:ext cx="3200400" cy="310896"/>
+          </a:xfrm>
+          <a:prstGeom prst="rect">
+            <a:avLst/>
+          </a:prstGeom>
+          <a:noFill/>
+          <a:ln/>
+        </p:spPr>
+        <p:txBody>
+          <a:bodyPr wrap="square" lIns="0" tIns="0" rIns="0" bIns="0" rtlCol="0" anchor="ctr"/>
+          <a:lstStyle/>
+          <a:p>
+            <a:pPr algn="l" indent="0" marL="0">
+              <a:lnSpc>
+                <a:spcPct val="100000"/>
+              </a:lnSpc>
+              <a:buNone/>
+            </a:pPr>
+            <a:r>
+              <a:rPr lang="en-US" sz="1050" dirty="0">
+                <a:solidFill>
+                  <a:srgbClr val="1D1D1F"/>
                 </a:solidFill>
                 <a:latin typeface="Pretendard Medium" pitchFamily="34" charset="0"/>
                 <a:ea typeface="Pretendard Medium" pitchFamily="34" charset="-122"/>
                 <a:cs typeface="Pretendard Medium" pitchFamily="34" charset="-120"/>
               </a:rPr>
-              <a:t>합계</a:t>
-            </a:r>
-            <a:endParaRPr lang="en-US" sz="1200" dirty="0"/>
-          </a:p>
-        </p:txBody>
-      </p:sp>
-      <p:sp>
-        <p:nvSpPr>
-          <p:cNvPr id="20" name="Text 18"/>
-          <p:cNvSpPr/>
-          <p:nvPr/>
-        </p:nvSpPr>
-        <p:spPr>
-          <a:xfrm>
-            <a:off x="3703320" y="4846320"/>
-            <a:ext cx="1920240" cy="365760"/>
-          </a:xfrm>
-          <a:prstGeom prst="rect">
-            <a:avLst/>
-          </a:prstGeom>
-          <a:noFill/>
-          <a:ln/>
-        </p:spPr>
-        <p:txBody>
-          <a:bodyPr wrap="square" lIns="0" tIns="0" rIns="0" bIns="0" rtlCol="0" anchor="t"/>
-          <a:lstStyle/>
-          <a:p>
-            <a:pPr algn="r" indent="0" marL="0">
-              <a:lnSpc>
-                <a:spcPct val="130000"/>
-              </a:lnSpc>
-              <a:buNone/>
-            </a:pPr>
-            <a:r>
-              <a:rPr lang="en-US" sz="2000" b="1" spc="-40" kern="0" dirty="0">
+              <a:t>│    └─ marketplace.json</a:t>
+            </a:r>
+            <a:endParaRPr lang="en-US" sz="1050" dirty="0"/>
+          </a:p>
+        </p:txBody>
+      </p:sp>
+      <p:sp>
+        <p:nvSpPr>
+          <p:cNvPr id="34" name="Text 32"/>
+          <p:cNvSpPr/>
+          <p:nvPr/>
+        </p:nvSpPr>
+        <p:spPr>
+          <a:xfrm>
+            <a:off x="9555480" y="3621024"/>
+            <a:ext cx="1584655" cy="310896"/>
+          </a:xfrm>
+          <a:prstGeom prst="rect">
+            <a:avLst/>
+          </a:prstGeom>
+          <a:noFill/>
+          <a:ln/>
+        </p:spPr>
+        <p:txBody>
+          <a:bodyPr wrap="square" lIns="0" tIns="0" rIns="0" bIns="0" rtlCol="0" anchor="ctr"/>
+          <a:lstStyle/>
+          <a:p>
+            <a:pPr algn="l" indent="0" marL="0">
+              <a:lnSpc>
+                <a:spcPct val="100000"/>
+              </a:lnSpc>
+              <a:buNone/>
+            </a:pPr>
+            <a:r>
+              <a:rPr lang="en-US" sz="1000" dirty="0">
                 <a:solidFill>
                   <a:srgbClr val="6C4CFF"/>
                 </a:solidFill>
@@ -10472,68 +11241,209 @@
                 <a:ea typeface="Pretendard" pitchFamily="34" charset="-122"/>
                 <a:cs typeface="Pretendard" pitchFamily="34" charset="-120"/>
               </a:rPr>
-              <a:t>≈ 1주</a:t>
-            </a:r>
-            <a:endParaRPr lang="en-US" sz="2000" dirty="0"/>
-          </a:p>
-        </p:txBody>
-      </p:sp>
-      <p:sp>
-        <p:nvSpPr>
-          <p:cNvPr id="21" name="Shape 19"/>
-          <p:cNvSpPr/>
-          <p:nvPr/>
-        </p:nvSpPr>
-        <p:spPr>
-          <a:xfrm>
-            <a:off x="6309360" y="2487168"/>
-            <a:ext cx="5120640" cy="2788920"/>
-          </a:xfrm>
-          <a:prstGeom prst="roundRect">
-            <a:avLst>
-              <a:gd name="adj" fmla="val 4590"/>
-            </a:avLst>
-          </a:prstGeom>
-          <a:solidFill>
-            <a:srgbClr val="EEEAFB"/>
-          </a:solidFill>
-          <a:ln w="19050">
-            <a:solidFill>
-              <a:srgbClr val="6C4CFF"/>
-            </a:solidFill>
-            <a:prstDash val="solid"/>
-          </a:ln>
-        </p:spPr>
-      </p:sp>
-      <p:sp>
-        <p:nvSpPr>
-          <p:cNvPr id="22" name="Text 20"/>
-          <p:cNvSpPr/>
-          <p:nvPr/>
-        </p:nvSpPr>
-        <p:spPr>
-          <a:xfrm>
-            <a:off x="6620256" y="2743200"/>
-            <a:ext cx="4498848" cy="320040"/>
-          </a:xfrm>
-          <a:prstGeom prst="rect">
-            <a:avLst/>
-          </a:prstGeom>
-          <a:noFill/>
-          <a:ln/>
-        </p:spPr>
-        <p:txBody>
-          <a:bodyPr wrap="square" lIns="0" tIns="0" rIns="0" bIns="0" rtlCol="0" anchor="t"/>
-          <a:lstStyle/>
-          <a:p>
-            <a:pPr algn="l" indent="0" marL="0">
-              <a:lnSpc>
-                <a:spcPct val="130000"/>
-              </a:lnSpc>
-              <a:buNone/>
-            </a:pPr>
-            <a:r>
-              <a:rPr lang="en-US" sz="1600" b="1" dirty="0">
+              <a:t>마켓 정의</a:t>
+            </a:r>
+            <a:endParaRPr lang="en-US" sz="1000" dirty="0"/>
+          </a:p>
+        </p:txBody>
+      </p:sp>
+      <p:sp>
+        <p:nvSpPr>
+          <p:cNvPr id="35" name="Text 33"/>
+          <p:cNvSpPr/>
+          <p:nvPr/>
+        </p:nvSpPr>
+        <p:spPr>
+          <a:xfrm>
+            <a:off x="6263640" y="3931920"/>
+            <a:ext cx="3200400" cy="310896"/>
+          </a:xfrm>
+          <a:prstGeom prst="rect">
+            <a:avLst/>
+          </a:prstGeom>
+          <a:noFill/>
+          <a:ln/>
+        </p:spPr>
+        <p:txBody>
+          <a:bodyPr wrap="square" lIns="0" tIns="0" rIns="0" bIns="0" rtlCol="0" anchor="ctr"/>
+          <a:lstStyle/>
+          <a:p>
+            <a:pPr algn="l" indent="0" marL="0">
+              <a:lnSpc>
+                <a:spcPct val="100000"/>
+              </a:lnSpc>
+              <a:buNone/>
+            </a:pPr>
+            <a:r>
+              <a:rPr lang="en-US" sz="1050" dirty="0">
+                <a:solidFill>
+                  <a:srgbClr val="1D1D1F"/>
+                </a:solidFill>
+                <a:latin typeface="Pretendard SemiBold" pitchFamily="34" charset="0"/>
+                <a:ea typeface="Pretendard SemiBold" pitchFamily="34" charset="-122"/>
+                <a:cs typeface="Pretendard SemiBold" pitchFamily="34" charset="-120"/>
+              </a:rPr>
+              <a:t>└─ plugins/cdbd/</a:t>
+            </a:r>
+            <a:endParaRPr lang="en-US" sz="1050" dirty="0"/>
+          </a:p>
+        </p:txBody>
+      </p:sp>
+      <p:sp>
+        <p:nvSpPr>
+          <p:cNvPr id="36" name="Text 34"/>
+          <p:cNvSpPr/>
+          <p:nvPr/>
+        </p:nvSpPr>
+        <p:spPr>
+          <a:xfrm>
+            <a:off x="6263640" y="4242816"/>
+            <a:ext cx="3200400" cy="310896"/>
+          </a:xfrm>
+          <a:prstGeom prst="rect">
+            <a:avLst/>
+          </a:prstGeom>
+          <a:noFill/>
+          <a:ln/>
+        </p:spPr>
+        <p:txBody>
+          <a:bodyPr wrap="square" lIns="0" tIns="0" rIns="0" bIns="0" rtlCol="0" anchor="ctr"/>
+          <a:lstStyle/>
+          <a:p>
+            <a:pPr algn="l" indent="0" marL="0">
+              <a:lnSpc>
+                <a:spcPct val="100000"/>
+              </a:lnSpc>
+              <a:buNone/>
+            </a:pPr>
+            <a:r>
+              <a:rPr lang="en-US" sz="1050" dirty="0">
+                <a:solidFill>
+                  <a:srgbClr val="1D1D1F"/>
+                </a:solidFill>
+                <a:latin typeface="Pretendard Medium" pitchFamily="34" charset="0"/>
+                <a:ea typeface="Pretendard Medium" pitchFamily="34" charset="-122"/>
+                <a:cs typeface="Pretendard Medium" pitchFamily="34" charset="-120"/>
+              </a:rPr>
+              <a:t>     ├─ .claude-plugin/plugin.json</a:t>
+            </a:r>
+            <a:endParaRPr lang="en-US" sz="1050" dirty="0"/>
+          </a:p>
+        </p:txBody>
+      </p:sp>
+      <p:sp>
+        <p:nvSpPr>
+          <p:cNvPr id="37" name="Text 35"/>
+          <p:cNvSpPr/>
+          <p:nvPr/>
+        </p:nvSpPr>
+        <p:spPr>
+          <a:xfrm>
+            <a:off x="6263640" y="4553712"/>
+            <a:ext cx="3200400" cy="310896"/>
+          </a:xfrm>
+          <a:prstGeom prst="rect">
+            <a:avLst/>
+          </a:prstGeom>
+          <a:noFill/>
+          <a:ln/>
+        </p:spPr>
+        <p:txBody>
+          <a:bodyPr wrap="square" lIns="0" tIns="0" rIns="0" bIns="0" rtlCol="0" anchor="ctr"/>
+          <a:lstStyle/>
+          <a:p>
+            <a:pPr algn="l" indent="0" marL="0">
+              <a:lnSpc>
+                <a:spcPct val="100000"/>
+              </a:lnSpc>
+              <a:buNone/>
+            </a:pPr>
+            <a:r>
+              <a:rPr lang="en-US" sz="1050" dirty="0">
+                <a:solidFill>
+                  <a:srgbClr val="1D1D1F"/>
+                </a:solidFill>
+                <a:latin typeface="Pretendard Medium" pitchFamily="34" charset="0"/>
+                <a:ea typeface="Pretendard Medium" pitchFamily="34" charset="-122"/>
+                <a:cs typeface="Pretendard Medium" pitchFamily="34" charset="-120"/>
+              </a:rPr>
+              <a:t>     ├─ skills/ · agents/ · commands/</a:t>
+            </a:r>
+            <a:endParaRPr lang="en-US" sz="1050" dirty="0"/>
+          </a:p>
+        </p:txBody>
+      </p:sp>
+      <p:sp>
+        <p:nvSpPr>
+          <p:cNvPr id="38" name="Text 36"/>
+          <p:cNvSpPr/>
+          <p:nvPr/>
+        </p:nvSpPr>
+        <p:spPr>
+          <a:xfrm>
+            <a:off x="6263640" y="4864608"/>
+            <a:ext cx="3200400" cy="310896"/>
+          </a:xfrm>
+          <a:prstGeom prst="rect">
+            <a:avLst/>
+          </a:prstGeom>
+          <a:noFill/>
+          <a:ln/>
+        </p:spPr>
+        <p:txBody>
+          <a:bodyPr wrap="square" lIns="0" tIns="0" rIns="0" bIns="0" rtlCol="0" anchor="ctr"/>
+          <a:lstStyle/>
+          <a:p>
+            <a:pPr algn="l" indent="0" marL="0">
+              <a:lnSpc>
+                <a:spcPct val="100000"/>
+              </a:lnSpc>
+              <a:buNone/>
+            </a:pPr>
+            <a:r>
+              <a:rPr lang="en-US" sz="1050" dirty="0">
+                <a:solidFill>
+                  <a:srgbClr val="1D1D1F"/>
+                </a:solidFill>
+                <a:latin typeface="Pretendard Medium" pitchFamily="34" charset="0"/>
+                <a:ea typeface="Pretendard Medium" pitchFamily="34" charset="-122"/>
+                <a:cs typeface="Pretendard Medium" pitchFamily="34" charset="-120"/>
+              </a:rPr>
+              <a:t>     ├─ .mcp.json</a:t>
+            </a:r>
+            <a:endParaRPr lang="en-US" sz="1050" dirty="0"/>
+          </a:p>
+        </p:txBody>
+      </p:sp>
+      <p:sp>
+        <p:nvSpPr>
+          <p:cNvPr id="39" name="Text 37"/>
+          <p:cNvSpPr/>
+          <p:nvPr/>
+        </p:nvSpPr>
+        <p:spPr>
+          <a:xfrm>
+            <a:off x="9555480" y="4864608"/>
+            <a:ext cx="1584655" cy="310896"/>
+          </a:xfrm>
+          <a:prstGeom prst="rect">
+            <a:avLst/>
+          </a:prstGeom>
+          <a:noFill/>
+          <a:ln/>
+        </p:spPr>
+        <p:txBody>
+          <a:bodyPr wrap="square" lIns="0" tIns="0" rIns="0" bIns="0" rtlCol="0" anchor="ctr"/>
+          <a:lstStyle/>
+          <a:p>
+            <a:pPr algn="l" indent="0" marL="0">
+              <a:lnSpc>
+                <a:spcPct val="100000"/>
+              </a:lnSpc>
+              <a:buNone/>
+            </a:pPr>
+            <a:r>
+              <a:rPr lang="en-US" sz="1000" dirty="0">
                 <a:solidFill>
                   <a:srgbClr val="6C4CFF"/>
                 </a:solidFill>
@@ -10541,167 +11451,41 @@
                 <a:ea typeface="Pretendard" pitchFamily="34" charset="-122"/>
                 <a:cs typeface="Pretendard" pitchFamily="34" charset="-120"/>
               </a:rPr>
-              <a:t>영상까지 문서화</a:t>
-            </a:r>
-            <a:endParaRPr lang="en-US" sz="1600" dirty="0"/>
-          </a:p>
-        </p:txBody>
-      </p:sp>
-      <p:sp>
-        <p:nvSpPr>
-          <p:cNvPr id="23" name="Text 21"/>
-          <p:cNvSpPr/>
-          <p:nvPr/>
-        </p:nvSpPr>
-        <p:spPr>
-          <a:xfrm>
-            <a:off x="6620256" y="3264408"/>
-            <a:ext cx="3657600" cy="320040"/>
-          </a:xfrm>
-          <a:prstGeom prst="rect">
-            <a:avLst/>
-          </a:prstGeom>
-          <a:noFill/>
-          <a:ln/>
-        </p:spPr>
-        <p:txBody>
-          <a:bodyPr wrap="square" lIns="0" tIns="0" rIns="0" bIns="0" rtlCol="0" anchor="t"/>
-          <a:lstStyle/>
-          <a:p>
-            <a:pPr algn="l" indent="0" marL="0">
-              <a:lnSpc>
-                <a:spcPct val="130000"/>
-              </a:lnSpc>
-              <a:buNone/>
-            </a:pPr>
-            <a:r>
-              <a:rPr lang="en-US" sz="1250" dirty="0">
-                <a:solidFill>
-                  <a:srgbClr val="1D1D1F"/>
-                </a:solidFill>
-                <a:latin typeface="Pretendard" pitchFamily="34" charset="0"/>
-                <a:ea typeface="Pretendard" pitchFamily="34" charset="-122"/>
-                <a:cs typeface="Pretendard" pitchFamily="34" charset="-120"/>
-              </a:rPr>
-              <a:t>○ 공백 기능 12개 (통계·계정·요금)</a:t>
-            </a:r>
-            <a:endParaRPr lang="en-US" sz="1250" dirty="0"/>
-          </a:p>
-        </p:txBody>
-      </p:sp>
-      <p:sp>
-        <p:nvSpPr>
-          <p:cNvPr id="24" name="Text 22"/>
-          <p:cNvSpPr/>
-          <p:nvPr/>
-        </p:nvSpPr>
-        <p:spPr>
-          <a:xfrm>
-            <a:off x="6620256" y="3666744"/>
-            <a:ext cx="3657600" cy="320040"/>
-          </a:xfrm>
-          <a:prstGeom prst="rect">
-            <a:avLst/>
-          </a:prstGeom>
-          <a:noFill/>
-          <a:ln/>
-        </p:spPr>
-        <p:txBody>
-          <a:bodyPr wrap="square" lIns="0" tIns="0" rIns="0" bIns="0" rtlCol="0" anchor="t"/>
-          <a:lstStyle/>
-          <a:p>
-            <a:pPr algn="l" indent="0" marL="0">
-              <a:lnSpc>
-                <a:spcPct val="130000"/>
-              </a:lnSpc>
-              <a:buNone/>
-            </a:pPr>
-            <a:r>
-              <a:rPr lang="en-US" sz="1250" dirty="0">
-                <a:solidFill>
-                  <a:srgbClr val="1D1D1F"/>
-                </a:solidFill>
-                <a:latin typeface="Pretendard" pitchFamily="34" charset="0"/>
-                <a:ea typeface="Pretendard" pitchFamily="34" charset="-122"/>
-                <a:cs typeface="Pretendard" pitchFamily="34" charset="-120"/>
-              </a:rPr>
-              <a:t>◐ 부분 기능 9개 보강</a:t>
-            </a:r>
-            <a:endParaRPr lang="en-US" sz="1250" dirty="0"/>
-          </a:p>
-        </p:txBody>
-      </p:sp>
-      <p:sp>
-        <p:nvSpPr>
-          <p:cNvPr id="25" name="Text 23"/>
-          <p:cNvSpPr/>
-          <p:nvPr/>
-        </p:nvSpPr>
-        <p:spPr>
-          <a:xfrm>
-            <a:off x="6620256" y="4069080"/>
-            <a:ext cx="3657600" cy="320040"/>
-          </a:xfrm>
-          <a:prstGeom prst="rect">
-            <a:avLst/>
-          </a:prstGeom>
-          <a:noFill/>
-          <a:ln/>
-        </p:spPr>
-        <p:txBody>
-          <a:bodyPr wrap="square" lIns="0" tIns="0" rIns="0" bIns="0" rtlCol="0" anchor="t"/>
-          <a:lstStyle/>
-          <a:p>
-            <a:pPr algn="l" indent="0" marL="0">
-              <a:lnSpc>
-                <a:spcPct val="130000"/>
-              </a:lnSpc>
-              <a:buNone/>
-            </a:pPr>
-            <a:r>
-              <a:rPr lang="en-US" sz="1250" dirty="0">
-                <a:solidFill>
-                  <a:srgbClr val="1D1D1F"/>
-                </a:solidFill>
-                <a:latin typeface="Pretendard" pitchFamily="34" charset="0"/>
-                <a:ea typeface="Pretendard" pitchFamily="34" charset="-122"/>
-                <a:cs typeface="Pretendard" pitchFamily="34" charset="-120"/>
-              </a:rPr>
-              <a:t>영상 수령 → 프레임 추출·작성</a:t>
-            </a:r>
-            <a:endParaRPr lang="en-US" sz="1250" dirty="0"/>
-          </a:p>
-        </p:txBody>
-      </p:sp>
-      <p:sp>
-        <p:nvSpPr>
-          <p:cNvPr id="26" name="Text 24"/>
-          <p:cNvSpPr/>
-          <p:nvPr/>
-        </p:nvSpPr>
-        <p:spPr>
-          <a:xfrm>
-            <a:off x="10058400" y="4069080"/>
-            <a:ext cx="1097280" cy="320040"/>
-          </a:xfrm>
-          <a:prstGeom prst="rect">
-            <a:avLst/>
-          </a:prstGeom>
-          <a:noFill/>
-          <a:ln/>
-        </p:spPr>
-        <p:txBody>
-          <a:bodyPr wrap="square" lIns="0" tIns="0" rIns="0" bIns="0" rtlCol="0" anchor="t"/>
-          <a:lstStyle/>
-          <a:p>
-            <a:pPr algn="r" indent="0" marL="0">
-              <a:lnSpc>
-                <a:spcPct val="130000"/>
-              </a:lnSpc>
-              <a:buNone/>
-            </a:pPr>
-            <a:r>
-              <a:rPr lang="en-US" sz="1300" dirty="0">
+              <a:t>Figma</a:t>
+            </a:r>
+            <a:endParaRPr lang="en-US" sz="1000" dirty="0"/>
+          </a:p>
+        </p:txBody>
+      </p:sp>
+      <p:sp>
+        <p:nvSpPr>
+          <p:cNvPr id="40" name="Text 38"/>
+          <p:cNvSpPr/>
+          <p:nvPr/>
+        </p:nvSpPr>
+        <p:spPr>
+          <a:xfrm>
+            <a:off x="6263640" y="5175504"/>
+            <a:ext cx="3200400" cy="310896"/>
+          </a:xfrm>
+          <a:prstGeom prst="rect">
+            <a:avLst/>
+          </a:prstGeom>
+          <a:noFill/>
+          <a:ln/>
+        </p:spPr>
+        <p:txBody>
+          <a:bodyPr wrap="square" lIns="0" tIns="0" rIns="0" bIns="0" rtlCol="0" anchor="ctr"/>
+          <a:lstStyle/>
+          <a:p>
+            <a:pPr algn="l" indent="0" marL="0">
+              <a:lnSpc>
+                <a:spcPct val="100000"/>
+              </a:lnSpc>
+              <a:buNone/>
+            </a:pPr>
+            <a:r>
+              <a:rPr lang="en-US" sz="1050" dirty="0">
                 <a:solidFill>
                   <a:srgbClr val="1D1D1F"/>
                 </a:solidFill>
@@ -10709,45 +11493,22 @@
                 <a:ea typeface="Pretendard Medium" pitchFamily="34" charset="-122"/>
                 <a:cs typeface="Pretendard Medium" pitchFamily="34" charset="-120"/>
               </a:rPr>
-              <a:t>+3~5일</a:t>
-            </a:r>
-            <a:endParaRPr lang="en-US" sz="1300" dirty="0"/>
-          </a:p>
-        </p:txBody>
-      </p:sp>
-      <p:sp>
-        <p:nvSpPr>
-          <p:cNvPr id="27" name="Shape 25"/>
-          <p:cNvSpPr/>
-          <p:nvPr/>
-        </p:nvSpPr>
-        <p:spPr>
-          <a:xfrm>
-            <a:off x="6620256" y="4818888"/>
-            <a:ext cx="4498848" cy="0"/>
-          </a:xfrm>
-          <a:prstGeom prst="line">
-            <a:avLst/>
-          </a:prstGeom>
-          <a:noFill/>
-          <a:ln w="9525">
-            <a:solidFill>
-              <a:srgbClr val="E5E7EB"/>
-            </a:solidFill>
-            <a:prstDash val="solid"/>
-          </a:ln>
-        </p:spPr>
-      </p:sp>
-      <p:sp>
-        <p:nvSpPr>
-          <p:cNvPr id="28" name="Text 26"/>
-          <p:cNvSpPr/>
-          <p:nvPr/>
-        </p:nvSpPr>
-        <p:spPr>
-          <a:xfrm>
-            <a:off x="6620256" y="4910328"/>
-            <a:ext cx="2743200" cy="274320"/>
+              <a:t>     └─ 경로 가이드 · 브랜드 토큰</a:t>
+            </a:r>
+            <a:endParaRPr lang="en-US" sz="1050" dirty="0"/>
+          </a:p>
+        </p:txBody>
+      </p:sp>
+      <p:sp>
+        <p:nvSpPr>
+          <p:cNvPr id="41" name="Text 39"/>
+          <p:cNvSpPr/>
+          <p:nvPr/>
+        </p:nvSpPr>
+        <p:spPr>
+          <a:xfrm>
+            <a:off x="6263640" y="5623560"/>
+            <a:ext cx="4876495" cy="274320"/>
           </a:xfrm>
           <a:prstGeom prst="rect">
             <a:avLst/>
@@ -10766,101 +11527,17 @@
               <a:buNone/>
             </a:pPr>
             <a:r>
-              <a:rPr lang="en-US" sz="1200" dirty="0">
-                <a:solidFill>
-                  <a:srgbClr val="6E6E73"/>
-                </a:solidFill>
-                <a:latin typeface="Pretendard Medium" pitchFamily="34" charset="0"/>
-                <a:ea typeface="Pretendard Medium" pitchFamily="34" charset="-122"/>
-                <a:cs typeface="Pretendard Medium" pitchFamily="34" charset="-120"/>
-              </a:rPr>
-              <a:t>문서 구조 + 영상</a:t>
-            </a:r>
-            <a:endParaRPr lang="en-US" sz="1200" dirty="0"/>
-          </a:p>
-        </p:txBody>
-      </p:sp>
-      <p:sp>
-        <p:nvSpPr>
-          <p:cNvPr id="29" name="Text 27"/>
-          <p:cNvSpPr/>
-          <p:nvPr/>
-        </p:nvSpPr>
-        <p:spPr>
-          <a:xfrm>
-            <a:off x="9235440" y="4846320"/>
-            <a:ext cx="1920240" cy="365760"/>
-          </a:xfrm>
-          <a:prstGeom prst="rect">
-            <a:avLst/>
-          </a:prstGeom>
-          <a:noFill/>
-          <a:ln/>
-        </p:spPr>
-        <p:txBody>
-          <a:bodyPr wrap="square" lIns="0" tIns="0" rIns="0" bIns="0" rtlCol="0" anchor="t"/>
-          <a:lstStyle/>
-          <a:p>
-            <a:pPr algn="r" indent="0" marL="0">
-              <a:lnSpc>
-                <a:spcPct val="130000"/>
-              </a:lnSpc>
-              <a:buNone/>
-            </a:pPr>
-            <a:r>
-              <a:rPr lang="en-US" sz="2000" b="1" spc="-40" kern="0" dirty="0">
-                <a:solidFill>
-                  <a:srgbClr val="6C4CFF"/>
-                </a:solidFill>
-                <a:latin typeface="Pretendard" pitchFamily="34" charset="0"/>
-                <a:ea typeface="Pretendard" pitchFamily="34" charset="-122"/>
-                <a:cs typeface="Pretendard" pitchFamily="34" charset="-120"/>
-              </a:rPr>
-              <a:t>≈ 2주</a:t>
-            </a:r>
-            <a:endParaRPr lang="en-US" sz="2000" dirty="0"/>
-          </a:p>
-        </p:txBody>
-      </p:sp>
-      <p:sp>
-        <p:nvSpPr>
-          <p:cNvPr id="30" name="Text 28"/>
-          <p:cNvSpPr/>
-          <p:nvPr/>
-        </p:nvSpPr>
-        <p:spPr>
-          <a:xfrm>
-            <a:off x="777240" y="5532120"/>
-            <a:ext cx="10637215" cy="365760"/>
-          </a:xfrm>
-          <a:prstGeom prst="rect">
-            <a:avLst/>
-          </a:prstGeom>
-          <a:noFill/>
-          <a:ln/>
-        </p:spPr>
-        <p:txBody>
-          <a:bodyPr wrap="square" lIns="0" tIns="0" rIns="0" bIns="0" rtlCol="0" anchor="t"/>
-          <a:lstStyle/>
-          <a:p>
-            <a:pPr algn="l" indent="0" marL="0">
-              <a:lnSpc>
-                <a:spcPct val="130000"/>
-              </a:lnSpc>
-              <a:buNone/>
-            </a:pPr>
-            <a:r>
-              <a:rPr lang="en-US" sz="1150" dirty="0">
-                <a:solidFill>
-                  <a:srgbClr val="6E6E73"/>
-                </a:solidFill>
-                <a:latin typeface="Pretendard Medium" pitchFamily="34" charset="0"/>
-                <a:ea typeface="Pretendard Medium" pitchFamily="34" charset="-122"/>
-                <a:cs typeface="Pretendard Medium" pitchFamily="34" charset="-120"/>
-              </a:rPr>
-              <a:t>※ 숫자는 추정치(예시)입니다. 다음 장에서 ‘어떤 기능에 영상이 필요한가’를 봅니다.</a:t>
-            </a:r>
-            <a:endParaRPr lang="en-US" sz="1150" dirty="0"/>
+              <a:rPr lang="en-US" sz="1100" dirty="0">
+                <a:solidFill>
+                  <a:srgbClr val="1D1D1F"/>
+                </a:solidFill>
+                <a:latin typeface="Pretendard SemiBold" pitchFamily="34" charset="0"/>
+                <a:ea typeface="Pretendard SemiBold" pitchFamily="34" charset="-122"/>
+                <a:cs typeface="Pretendard SemiBold" pitchFamily="34" charset="-120"/>
+              </a:rPr>
+              <a:t>design/ 및 5개 볼트 → 구조 그대로 (안 바뀜)</a:t>
+            </a:r>
+            <a:endParaRPr lang="en-US" sz="1100" dirty="0"/>
           </a:p>
         </p:txBody>
       </p:sp>
@@ -10929,7 +11606,7 @@
                 <a:ea typeface="Pretendard SemiBold" pitchFamily="34" charset="-122"/>
                 <a:cs typeface="Pretendard SemiBold" pitchFamily="34" charset="-120"/>
               </a:rPr>
-              <a:t>④ 영상</a:t>
+              <a:t>일정</a:t>
             </a:r>
             <a:endParaRPr lang="en-US" sz="1200" dirty="0"/>
           </a:p>
@@ -11010,7 +11687,7 @@
                 <a:ea typeface="Pretendard" pitchFamily="34" charset="-122"/>
                 <a:cs typeface="Pretendard" pitchFamily="34" charset="-120"/>
               </a:rPr>
-              <a:t>영상은 ‘일부’ 기능만 필요하다</a:t>
+              <a:t>얼마나 걸리나</a:t>
             </a:r>
             <a:endParaRPr lang="en-US" sz="2600" dirty="0"/>
           </a:p>
@@ -11049,7 +11726,7 @@
                 <a:ea typeface="Pretendard" pitchFamily="34" charset="-122"/>
                 <a:cs typeface="Pretendard" pitchFamily="34" charset="-120"/>
               </a:rPr>
-              <a:t>이미 문서화된 기능엔 불필요. 로그인 뒤 화면 흐름인 기능만 영상이 도움이 됩니다.</a:t>
+              <a:t>문서 구조만이면 약 1주, ○ 공백 기능을 영상으로 채우면 약 2주. (추정치)</a:t>
             </a:r>
             <a:endParaRPr lang="en-US" sz="1500" dirty="0"/>
           </a:p>
@@ -11141,12 +11818,12 @@
         </p:nvSpPr>
         <p:spPr>
           <a:xfrm>
-            <a:off x="777240" y="2450592"/>
-            <a:ext cx="5120640" cy="1965960"/>
+            <a:off x="777240" y="2487168"/>
+            <a:ext cx="5120640" cy="2788920"/>
           </a:xfrm>
           <a:prstGeom prst="roundRect">
             <a:avLst>
-              <a:gd name="adj" fmla="val 6512"/>
+              <a:gd name="adj" fmla="val 4590"/>
             </a:avLst>
           </a:prstGeom>
           <a:solidFill>
@@ -11168,8 +11845,8 @@
         </p:nvSpPr>
         <p:spPr>
           <a:xfrm>
-            <a:off x="1069848" y="2670048"/>
-            <a:ext cx="4572000" cy="274320"/>
+            <a:off x="1088136" y="2743200"/>
+            <a:ext cx="4498848" cy="320040"/>
           </a:xfrm>
           <a:prstGeom prst="rect">
             <a:avLst/>
@@ -11188,17 +11865,17 @@
               <a:buNone/>
             </a:pPr>
             <a:r>
-              <a:rPr lang="en-US" sz="1500" dirty="0">
-                <a:solidFill>
-                  <a:srgbClr val="6E6E73"/>
+              <a:rPr lang="en-US" sz="1600" dirty="0">
+                <a:solidFill>
+                  <a:srgbClr val="1D1D1F"/>
                 </a:solidFill>
                 <a:latin typeface="Pretendard SemiBold" pitchFamily="34" charset="0"/>
                 <a:ea typeface="Pretendard SemiBold" pitchFamily="34" charset="-122"/>
                 <a:cs typeface="Pretendard SemiBold" pitchFamily="34" charset="-120"/>
               </a:rPr>
-              <a:t>영상 불필요</a:t>
-            </a:r>
-            <a:endParaRPr lang="en-US" sz="1500" dirty="0"/>
+              <a:t>문서 구조 구축</a:t>
+            </a:r>
+            <a:endParaRPr lang="en-US" sz="1600" dirty="0"/>
           </a:p>
         </p:txBody>
       </p:sp>
@@ -11210,8 +11887,8 @@
         </p:nvSpPr>
         <p:spPr>
           <a:xfrm>
-            <a:off x="1069848" y="3090672"/>
-            <a:ext cx="4572000" cy="274320"/>
+            <a:off x="1088136" y="3264408"/>
+            <a:ext cx="3291840" cy="320040"/>
           </a:xfrm>
           <a:prstGeom prst="rect">
             <a:avLst/>
@@ -11230,49 +11907,7 @@
               <a:buNone/>
             </a:pPr>
             <a:r>
-              <a:rPr lang="en-US" sz="1250" dirty="0">
-                <a:solidFill>
-                  <a:srgbClr val="1D1D1F"/>
-                </a:solidFill>
-                <a:latin typeface="Pretendard SemiBold" pitchFamily="34" charset="0"/>
-                <a:ea typeface="Pretendard SemiBold" pitchFamily="34" charset="-122"/>
-                <a:cs typeface="Pretendard SemiBold" pitchFamily="34" charset="-120"/>
-              </a:rPr>
-              <a:t>이미 텍스트로 정리된 ● 기능</a:t>
-            </a:r>
-            <a:endParaRPr lang="en-US" sz="1250" dirty="0"/>
-          </a:p>
-        </p:txBody>
-      </p:sp>
-      <p:sp>
-        <p:nvSpPr>
-          <p:cNvPr id="11" name="Text 9"/>
-          <p:cNvSpPr/>
-          <p:nvPr/>
-        </p:nvSpPr>
-        <p:spPr>
-          <a:xfrm>
-            <a:off x="1069848" y="3419856"/>
-            <a:ext cx="4535424" cy="822960"/>
-          </a:xfrm>
-          <a:prstGeom prst="rect">
-            <a:avLst/>
-          </a:prstGeom>
-          <a:noFill/>
-          <a:ln/>
-        </p:spPr>
-        <p:txBody>
-          <a:bodyPr wrap="square" lIns="0" tIns="0" rIns="0" bIns="0" rtlCol="0" anchor="t"/>
-          <a:lstStyle/>
-          <a:p>
-            <a:pPr algn="l" indent="0" marL="0">
-              <a:lnSpc>
-                <a:spcPct val="140000"/>
-              </a:lnSpc>
-              <a:buNone/>
-            </a:pPr>
-            <a:r>
-              <a:rPr lang="en-US" sz="1200" dirty="0">
+              <a:rPr lang="en-US" sz="1300" dirty="0">
                 <a:solidFill>
                   <a:srgbClr val="55555A"/>
                 </a:solidFill>
@@ -11280,7 +11915,366 @@
                 <a:ea typeface="Pretendard" pitchFamily="34" charset="-122"/>
                 <a:cs typeface="Pretendard" pitchFamily="34" charset="-120"/>
               </a:rPr>
-              <a:t>카드 15종 · 카드 자동화 · URL 게시 · 이미지 라이브러리 — 스킬·문서가 이미 있어 화면 녹화가 새로 알려줄 게 없습니다.</a:t>
+              <a:t>첫 볼트 경로 문서</a:t>
+            </a:r>
+            <a:endParaRPr lang="en-US" sz="1300" dirty="0"/>
+          </a:p>
+        </p:txBody>
+      </p:sp>
+      <p:sp>
+        <p:nvSpPr>
+          <p:cNvPr id="11" name="Text 9"/>
+          <p:cNvSpPr/>
+          <p:nvPr/>
+        </p:nvSpPr>
+        <p:spPr>
+          <a:xfrm>
+            <a:off x="4343400" y="3264408"/>
+            <a:ext cx="1280160" cy="320040"/>
+          </a:xfrm>
+          <a:prstGeom prst="rect">
+            <a:avLst/>
+          </a:prstGeom>
+          <a:noFill/>
+          <a:ln/>
+        </p:spPr>
+        <p:txBody>
+          <a:bodyPr wrap="square" lIns="0" tIns="0" rIns="0" bIns="0" rtlCol="0" anchor="t"/>
+          <a:lstStyle/>
+          <a:p>
+            <a:pPr algn="r" indent="0" marL="0">
+              <a:lnSpc>
+                <a:spcPct val="130000"/>
+              </a:lnSpc>
+              <a:buNone/>
+            </a:pPr>
+            <a:r>
+              <a:rPr lang="en-US" sz="1300" dirty="0">
+                <a:solidFill>
+                  <a:srgbClr val="1D1D1F"/>
+                </a:solidFill>
+                <a:latin typeface="Pretendard Medium" pitchFamily="34" charset="0"/>
+                <a:ea typeface="Pretendard Medium" pitchFamily="34" charset="-122"/>
+                <a:cs typeface="Pretendard Medium" pitchFamily="34" charset="-120"/>
+              </a:rPr>
+              <a:t>0.5~1일</a:t>
+            </a:r>
+            <a:endParaRPr lang="en-US" sz="1300" dirty="0"/>
+          </a:p>
+        </p:txBody>
+      </p:sp>
+      <p:sp>
+        <p:nvSpPr>
+          <p:cNvPr id="12" name="Text 10"/>
+          <p:cNvSpPr/>
+          <p:nvPr/>
+        </p:nvSpPr>
+        <p:spPr>
+          <a:xfrm>
+            <a:off x="1088136" y="3666744"/>
+            <a:ext cx="3291840" cy="320040"/>
+          </a:xfrm>
+          <a:prstGeom prst="rect">
+            <a:avLst/>
+          </a:prstGeom>
+          <a:noFill/>
+          <a:ln/>
+        </p:spPr>
+        <p:txBody>
+          <a:bodyPr wrap="square" lIns="0" tIns="0" rIns="0" bIns="0" rtlCol="0" anchor="t"/>
+          <a:lstStyle/>
+          <a:p>
+            <a:pPr algn="l" indent="0" marL="0">
+              <a:lnSpc>
+                <a:spcPct val="130000"/>
+              </a:lnSpc>
+              <a:buNone/>
+            </a:pPr>
+            <a:r>
+              <a:rPr lang="en-US" sz="1300" dirty="0">
+                <a:solidFill>
+                  <a:srgbClr val="55555A"/>
+                </a:solidFill>
+                <a:latin typeface="Pretendard" pitchFamily="34" charset="0"/>
+                <a:ea typeface="Pretendard" pitchFamily="34" charset="-122"/>
+                <a:cs typeface="Pretendard" pitchFamily="34" charset="-120"/>
+              </a:rPr>
+              <a:t>나머지 4볼트 확산</a:t>
+            </a:r>
+            <a:endParaRPr lang="en-US" sz="1300" dirty="0"/>
+          </a:p>
+        </p:txBody>
+      </p:sp>
+      <p:sp>
+        <p:nvSpPr>
+          <p:cNvPr id="13" name="Text 11"/>
+          <p:cNvSpPr/>
+          <p:nvPr/>
+        </p:nvSpPr>
+        <p:spPr>
+          <a:xfrm>
+            <a:off x="4343400" y="3666744"/>
+            <a:ext cx="1280160" cy="320040"/>
+          </a:xfrm>
+          <a:prstGeom prst="rect">
+            <a:avLst/>
+          </a:prstGeom>
+          <a:noFill/>
+          <a:ln/>
+        </p:spPr>
+        <p:txBody>
+          <a:bodyPr wrap="square" lIns="0" tIns="0" rIns="0" bIns="0" rtlCol="0" anchor="t"/>
+          <a:lstStyle/>
+          <a:p>
+            <a:pPr algn="r" indent="0" marL="0">
+              <a:lnSpc>
+                <a:spcPct val="130000"/>
+              </a:lnSpc>
+              <a:buNone/>
+            </a:pPr>
+            <a:r>
+              <a:rPr lang="en-US" sz="1300" dirty="0">
+                <a:solidFill>
+                  <a:srgbClr val="1D1D1F"/>
+                </a:solidFill>
+                <a:latin typeface="Pretendard Medium" pitchFamily="34" charset="0"/>
+                <a:ea typeface="Pretendard Medium" pitchFamily="34" charset="-122"/>
+                <a:cs typeface="Pretendard Medium" pitchFamily="34" charset="-120"/>
+              </a:rPr>
+              <a:t>2~3일</a:t>
+            </a:r>
+            <a:endParaRPr lang="en-US" sz="1300" dirty="0"/>
+          </a:p>
+        </p:txBody>
+      </p:sp>
+      <p:sp>
+        <p:nvSpPr>
+          <p:cNvPr id="14" name="Text 12"/>
+          <p:cNvSpPr/>
+          <p:nvPr/>
+        </p:nvSpPr>
+        <p:spPr>
+          <a:xfrm>
+            <a:off x="1088136" y="4069080"/>
+            <a:ext cx="3291840" cy="320040"/>
+          </a:xfrm>
+          <a:prstGeom prst="rect">
+            <a:avLst/>
+          </a:prstGeom>
+          <a:noFill/>
+          <a:ln/>
+        </p:spPr>
+        <p:txBody>
+          <a:bodyPr wrap="square" lIns="0" tIns="0" rIns="0" bIns="0" rtlCol="0" anchor="t"/>
+          <a:lstStyle/>
+          <a:p>
+            <a:pPr algn="l" indent="0" marL="0">
+              <a:lnSpc>
+                <a:spcPct val="130000"/>
+              </a:lnSpc>
+              <a:buNone/>
+            </a:pPr>
+            <a:r>
+              <a:rPr lang="en-US" sz="1300" dirty="0">
+                <a:solidFill>
+                  <a:srgbClr val="55555A"/>
+                </a:solidFill>
+                <a:latin typeface="Pretendard" pitchFamily="34" charset="0"/>
+                <a:ea typeface="Pretendard" pitchFamily="34" charset="-122"/>
+                <a:cs typeface="Pretendard" pitchFamily="34" charset="-120"/>
+              </a:rPr>
+              <a:t>연결 · 검증</a:t>
+            </a:r>
+            <a:endParaRPr lang="en-US" sz="1300" dirty="0"/>
+          </a:p>
+        </p:txBody>
+      </p:sp>
+      <p:sp>
+        <p:nvSpPr>
+          <p:cNvPr id="15" name="Text 13"/>
+          <p:cNvSpPr/>
+          <p:nvPr/>
+        </p:nvSpPr>
+        <p:spPr>
+          <a:xfrm>
+            <a:off x="4343400" y="4069080"/>
+            <a:ext cx="1280160" cy="320040"/>
+          </a:xfrm>
+          <a:prstGeom prst="rect">
+            <a:avLst/>
+          </a:prstGeom>
+          <a:noFill/>
+          <a:ln/>
+        </p:spPr>
+        <p:txBody>
+          <a:bodyPr wrap="square" lIns="0" tIns="0" rIns="0" bIns="0" rtlCol="0" anchor="t"/>
+          <a:lstStyle/>
+          <a:p>
+            <a:pPr algn="r" indent="0" marL="0">
+              <a:lnSpc>
+                <a:spcPct val="130000"/>
+              </a:lnSpc>
+              <a:buNone/>
+            </a:pPr>
+            <a:r>
+              <a:rPr lang="en-US" sz="1300" dirty="0">
+                <a:solidFill>
+                  <a:srgbClr val="1D1D1F"/>
+                </a:solidFill>
+                <a:latin typeface="Pretendard Medium" pitchFamily="34" charset="0"/>
+                <a:ea typeface="Pretendard Medium" pitchFamily="34" charset="-122"/>
+                <a:cs typeface="Pretendard Medium" pitchFamily="34" charset="-120"/>
+              </a:rPr>
+              <a:t>0.5일</a:t>
+            </a:r>
+            <a:endParaRPr lang="en-US" sz="1300" dirty="0"/>
+          </a:p>
+        </p:txBody>
+      </p:sp>
+      <p:sp>
+        <p:nvSpPr>
+          <p:cNvPr id="16" name="Text 14"/>
+          <p:cNvSpPr/>
+          <p:nvPr/>
+        </p:nvSpPr>
+        <p:spPr>
+          <a:xfrm>
+            <a:off x="1088136" y="4471416"/>
+            <a:ext cx="3291840" cy="320040"/>
+          </a:xfrm>
+          <a:prstGeom prst="rect">
+            <a:avLst/>
+          </a:prstGeom>
+          <a:noFill/>
+          <a:ln/>
+        </p:spPr>
+        <p:txBody>
+          <a:bodyPr wrap="square" lIns="0" tIns="0" rIns="0" bIns="0" rtlCol="0" anchor="t"/>
+          <a:lstStyle/>
+          <a:p>
+            <a:pPr algn="l" indent="0" marL="0">
+              <a:lnSpc>
+                <a:spcPct val="130000"/>
+              </a:lnSpc>
+              <a:buNone/>
+            </a:pPr>
+            <a:r>
+              <a:rPr lang="en-US" sz="1300" dirty="0">
+                <a:solidFill>
+                  <a:srgbClr val="55555A"/>
+                </a:solidFill>
+                <a:latin typeface="Pretendard" pitchFamily="34" charset="0"/>
+                <a:ea typeface="Pretendard" pitchFamily="34" charset="-122"/>
+                <a:cs typeface="Pretendard" pitchFamily="34" charset="-120"/>
+              </a:rPr>
+              <a:t>플러그인 배포</a:t>
+            </a:r>
+            <a:endParaRPr lang="en-US" sz="1300" dirty="0"/>
+          </a:p>
+        </p:txBody>
+      </p:sp>
+      <p:sp>
+        <p:nvSpPr>
+          <p:cNvPr id="17" name="Text 15"/>
+          <p:cNvSpPr/>
+          <p:nvPr/>
+        </p:nvSpPr>
+        <p:spPr>
+          <a:xfrm>
+            <a:off x="4343400" y="4471416"/>
+            <a:ext cx="1280160" cy="320040"/>
+          </a:xfrm>
+          <a:prstGeom prst="rect">
+            <a:avLst/>
+          </a:prstGeom>
+          <a:noFill/>
+          <a:ln/>
+        </p:spPr>
+        <p:txBody>
+          <a:bodyPr wrap="square" lIns="0" tIns="0" rIns="0" bIns="0" rtlCol="0" anchor="t"/>
+          <a:lstStyle/>
+          <a:p>
+            <a:pPr algn="r" indent="0" marL="0">
+              <a:lnSpc>
+                <a:spcPct val="130000"/>
+              </a:lnSpc>
+              <a:buNone/>
+            </a:pPr>
+            <a:r>
+              <a:rPr lang="en-US" sz="1300" dirty="0">
+                <a:solidFill>
+                  <a:srgbClr val="1D1D1F"/>
+                </a:solidFill>
+                <a:latin typeface="Pretendard Medium" pitchFamily="34" charset="0"/>
+                <a:ea typeface="Pretendard Medium" pitchFamily="34" charset="-122"/>
+                <a:cs typeface="Pretendard Medium" pitchFamily="34" charset="-120"/>
+              </a:rPr>
+              <a:t>0.5~1일</a:t>
+            </a:r>
+            <a:endParaRPr lang="en-US" sz="1300" dirty="0"/>
+          </a:p>
+        </p:txBody>
+      </p:sp>
+      <p:sp>
+        <p:nvSpPr>
+          <p:cNvPr id="18" name="Shape 16"/>
+          <p:cNvSpPr/>
+          <p:nvPr/>
+        </p:nvSpPr>
+        <p:spPr>
+          <a:xfrm>
+            <a:off x="1088136" y="4818888"/>
+            <a:ext cx="4498848" cy="0"/>
+          </a:xfrm>
+          <a:prstGeom prst="line">
+            <a:avLst/>
+          </a:prstGeom>
+          <a:noFill/>
+          <a:ln w="9525">
+            <a:solidFill>
+              <a:srgbClr val="E5E7EB"/>
+            </a:solidFill>
+            <a:prstDash val="solid"/>
+          </a:ln>
+        </p:spPr>
+      </p:sp>
+      <p:sp>
+        <p:nvSpPr>
+          <p:cNvPr id="19" name="Text 17"/>
+          <p:cNvSpPr/>
+          <p:nvPr/>
+        </p:nvSpPr>
+        <p:spPr>
+          <a:xfrm>
+            <a:off x="1088136" y="4910328"/>
+            <a:ext cx="1828800" cy="274320"/>
+          </a:xfrm>
+          <a:prstGeom prst="rect">
+            <a:avLst/>
+          </a:prstGeom>
+          <a:noFill/>
+          <a:ln/>
+        </p:spPr>
+        <p:txBody>
+          <a:bodyPr wrap="square" lIns="0" tIns="0" rIns="0" bIns="0" rtlCol="0" anchor="t"/>
+          <a:lstStyle/>
+          <a:p>
+            <a:pPr algn="l" indent="0" marL="0">
+              <a:lnSpc>
+                <a:spcPct val="130000"/>
+              </a:lnSpc>
+              <a:buNone/>
+            </a:pPr>
+            <a:r>
+              <a:rPr lang="en-US" sz="1200" dirty="0">
+                <a:solidFill>
+                  <a:srgbClr val="6E6E73"/>
+                </a:solidFill>
+                <a:latin typeface="Pretendard Medium" pitchFamily="34" charset="0"/>
+                <a:ea typeface="Pretendard Medium" pitchFamily="34" charset="-122"/>
+                <a:cs typeface="Pretendard Medium" pitchFamily="34" charset="-120"/>
+              </a:rPr>
+              <a:t>합계</a:t>
             </a:r>
             <a:endParaRPr lang="en-US" sz="1200" dirty="0"/>
           </a:p>
@@ -11288,18 +12282,60 @@
       </p:sp>
       <p:sp>
         <p:nvSpPr>
-          <p:cNvPr id="12" name="Shape 10"/>
-          <p:cNvSpPr/>
-          <p:nvPr/>
-        </p:nvSpPr>
-        <p:spPr>
-          <a:xfrm>
-            <a:off x="6309360" y="2450592"/>
-            <a:ext cx="5120640" cy="1965960"/>
+          <p:cNvPr id="20" name="Text 18"/>
+          <p:cNvSpPr/>
+          <p:nvPr/>
+        </p:nvSpPr>
+        <p:spPr>
+          <a:xfrm>
+            <a:off x="3703320" y="4846320"/>
+            <a:ext cx="1920240" cy="365760"/>
+          </a:xfrm>
+          <a:prstGeom prst="rect">
+            <a:avLst/>
+          </a:prstGeom>
+          <a:noFill/>
+          <a:ln/>
+        </p:spPr>
+        <p:txBody>
+          <a:bodyPr wrap="square" lIns="0" tIns="0" rIns="0" bIns="0" rtlCol="0" anchor="t"/>
+          <a:lstStyle/>
+          <a:p>
+            <a:pPr algn="r" indent="0" marL="0">
+              <a:lnSpc>
+                <a:spcPct val="130000"/>
+              </a:lnSpc>
+              <a:buNone/>
+            </a:pPr>
+            <a:r>
+              <a:rPr lang="en-US" sz="2000" b="1" spc="-40" kern="0" dirty="0">
+                <a:solidFill>
+                  <a:srgbClr val="6C4CFF"/>
+                </a:solidFill>
+                <a:latin typeface="Pretendard" pitchFamily="34" charset="0"/>
+                <a:ea typeface="Pretendard" pitchFamily="34" charset="-122"/>
+                <a:cs typeface="Pretendard" pitchFamily="34" charset="-120"/>
+              </a:rPr>
+              <a:t>≈ 1주</a:t>
+            </a:r>
+            <a:endParaRPr lang="en-US" sz="2000" dirty="0"/>
+          </a:p>
+        </p:txBody>
+      </p:sp>
+      <p:sp>
+        <p:nvSpPr>
+          <p:cNvPr id="21" name="Shape 19"/>
+          <p:cNvSpPr/>
+          <p:nvPr/>
+        </p:nvSpPr>
+        <p:spPr>
+          <a:xfrm>
+            <a:off x="6309360" y="2487168"/>
+            <a:ext cx="5120640" cy="2788920"/>
           </a:xfrm>
           <a:prstGeom prst="roundRect">
             <a:avLst>
-              <a:gd name="adj" fmla="val 6512"/>
+              <a:gd name="adj" fmla="val 4590"/>
             </a:avLst>
           </a:prstGeom>
           <a:solidFill>
@@ -11315,14 +12351,14 @@
       </p:sp>
       <p:sp>
         <p:nvSpPr>
-          <p:cNvPr id="13" name="Text 11"/>
-          <p:cNvSpPr/>
-          <p:nvPr/>
-        </p:nvSpPr>
-        <p:spPr>
-          <a:xfrm>
-            <a:off x="6601968" y="2670048"/>
-            <a:ext cx="4572000" cy="274320"/>
+          <p:cNvPr id="22" name="Text 20"/>
+          <p:cNvSpPr/>
+          <p:nvPr/>
+        </p:nvSpPr>
+        <p:spPr>
+          <a:xfrm>
+            <a:off x="6620256" y="2743200"/>
+            <a:ext cx="4498848" cy="320040"/>
           </a:xfrm>
           <a:prstGeom prst="rect">
             <a:avLst/>
@@ -11341,7 +12377,7 @@
               <a:buNone/>
             </a:pPr>
             <a:r>
-              <a:rPr lang="en-US" sz="1500" b="1" dirty="0">
+              <a:rPr lang="en-US" sz="1600" b="1" dirty="0">
                 <a:solidFill>
                   <a:srgbClr val="6C4CFF"/>
                 </a:solidFill>
@@ -11349,22 +12385,22 @@
                 <a:ea typeface="Pretendard" pitchFamily="34" charset="-122"/>
                 <a:cs typeface="Pretendard" pitchFamily="34" charset="-120"/>
               </a:rPr>
-              <a:t>영상 필요</a:t>
-            </a:r>
-            <a:endParaRPr lang="en-US" sz="1500" dirty="0"/>
-          </a:p>
-        </p:txBody>
-      </p:sp>
-      <p:sp>
-        <p:nvSpPr>
-          <p:cNvPr id="14" name="Text 12"/>
-          <p:cNvSpPr/>
-          <p:nvPr/>
-        </p:nvSpPr>
-        <p:spPr>
-          <a:xfrm>
-            <a:off x="6601968" y="3090672"/>
-            <a:ext cx="4572000" cy="274320"/>
+              <a:t>영상까지 문서화</a:t>
+            </a:r>
+            <a:endParaRPr lang="en-US" sz="1600" dirty="0"/>
+          </a:p>
+        </p:txBody>
+      </p:sp>
+      <p:sp>
+        <p:nvSpPr>
+          <p:cNvPr id="23" name="Text 21"/>
+          <p:cNvSpPr/>
+          <p:nvPr/>
+        </p:nvSpPr>
+        <p:spPr>
+          <a:xfrm>
+            <a:off x="6620256" y="3264408"/>
+            <a:ext cx="3657600" cy="320040"/>
           </a:xfrm>
           <a:prstGeom prst="rect">
             <a:avLst/>
@@ -11384,48 +12420,6 @@
             </a:pPr>
             <a:r>
               <a:rPr lang="en-US" sz="1250" dirty="0">
-                <a:solidFill>
-                  <a:srgbClr val="1D1D1F"/>
-                </a:solidFill>
-                <a:latin typeface="Pretendard SemiBold" pitchFamily="34" charset="0"/>
-                <a:ea typeface="Pretendard SemiBold" pitchFamily="34" charset="-122"/>
-                <a:cs typeface="Pretendard SemiBold" pitchFamily="34" charset="-120"/>
-              </a:rPr>
-              <a:t>로그인 뒤에서만 보이는 ○ 공백 기능</a:t>
-            </a:r>
-            <a:endParaRPr lang="en-US" sz="1250" dirty="0"/>
-          </a:p>
-        </p:txBody>
-      </p:sp>
-      <p:sp>
-        <p:nvSpPr>
-          <p:cNvPr id="15" name="Text 13"/>
-          <p:cNvSpPr/>
-          <p:nvPr/>
-        </p:nvSpPr>
-        <p:spPr>
-          <a:xfrm>
-            <a:off x="6601968" y="3419856"/>
-            <a:ext cx="4535424" cy="822960"/>
-          </a:xfrm>
-          <a:prstGeom prst="rect">
-            <a:avLst/>
-          </a:prstGeom>
-          <a:noFill/>
-          <a:ln/>
-        </p:spPr>
-        <p:txBody>
-          <a:bodyPr wrap="square" lIns="0" tIns="0" rIns="0" bIns="0" rtlCol="0" anchor="t"/>
-          <a:lstStyle/>
-          <a:p>
-            <a:pPr algn="l" indent="0" marL="0">
-              <a:lnSpc>
-                <a:spcPct val="140000"/>
-              </a:lnSpc>
-              <a:buNone/>
-            </a:pPr>
-            <a:r>
-              <a:rPr lang="en-US" sz="1200" dirty="0">
                 <a:solidFill>
                   <a:srgbClr val="1D1D1F"/>
                 </a:solidFill>
@@ -11433,22 +12427,22 @@
                 <a:ea typeface="Pretendard" pitchFamily="34" charset="-122"/>
                 <a:cs typeface="Pretendard" pitchFamily="34" charset="-120"/>
               </a:rPr>
-              <a:t>통계 · 계정 · 요금 · 버전 · 공유 복제 · 데이터 연결 — UI 흐름이라 텍스트로 유추 불가, 화면이 정확한 문서화에 도움.</a:t>
-            </a:r>
-            <a:endParaRPr lang="en-US" sz="1200" dirty="0"/>
-          </a:p>
-        </p:txBody>
-      </p:sp>
-      <p:sp>
-        <p:nvSpPr>
-          <p:cNvPr id="16" name="Text 14"/>
-          <p:cNvSpPr/>
-          <p:nvPr/>
-        </p:nvSpPr>
-        <p:spPr>
-          <a:xfrm>
-            <a:off x="777240" y="4617720"/>
-            <a:ext cx="10637215" cy="274320"/>
+              <a:t>○ 공백 기능 12개 (통계·계정·요금)</a:t>
+            </a:r>
+            <a:endParaRPr lang="en-US" sz="1250" dirty="0"/>
+          </a:p>
+        </p:txBody>
+      </p:sp>
+      <p:sp>
+        <p:nvSpPr>
+          <p:cNvPr id="24" name="Text 22"/>
+          <p:cNvSpPr/>
+          <p:nvPr/>
+        </p:nvSpPr>
+        <p:spPr>
+          <a:xfrm>
+            <a:off x="6620256" y="3666744"/>
+            <a:ext cx="3657600" cy="320040"/>
           </a:xfrm>
           <a:prstGeom prst="rect">
             <a:avLst/>
@@ -11467,15 +12461,99 @@
               <a:buNone/>
             </a:pPr>
             <a:r>
+              <a:rPr lang="en-US" sz="1250" dirty="0">
+                <a:solidFill>
+                  <a:srgbClr val="1D1D1F"/>
+                </a:solidFill>
+                <a:latin typeface="Pretendard" pitchFamily="34" charset="0"/>
+                <a:ea typeface="Pretendard" pitchFamily="34" charset="-122"/>
+                <a:cs typeface="Pretendard" pitchFamily="34" charset="-120"/>
+              </a:rPr>
+              <a:t>◐ 부분 기능 9개 보강</a:t>
+            </a:r>
+            <a:endParaRPr lang="en-US" sz="1250" dirty="0"/>
+          </a:p>
+        </p:txBody>
+      </p:sp>
+      <p:sp>
+        <p:nvSpPr>
+          <p:cNvPr id="25" name="Text 23"/>
+          <p:cNvSpPr/>
+          <p:nvPr/>
+        </p:nvSpPr>
+        <p:spPr>
+          <a:xfrm>
+            <a:off x="6620256" y="4069080"/>
+            <a:ext cx="3657600" cy="320040"/>
+          </a:xfrm>
+          <a:prstGeom prst="rect">
+            <a:avLst/>
+          </a:prstGeom>
+          <a:noFill/>
+          <a:ln/>
+        </p:spPr>
+        <p:txBody>
+          <a:bodyPr wrap="square" lIns="0" tIns="0" rIns="0" bIns="0" rtlCol="0" anchor="t"/>
+          <a:lstStyle/>
+          <a:p>
+            <a:pPr algn="l" indent="0" marL="0">
+              <a:lnSpc>
+                <a:spcPct val="130000"/>
+              </a:lnSpc>
+              <a:buNone/>
+            </a:pPr>
+            <a:r>
+              <a:rPr lang="en-US" sz="1250" dirty="0">
+                <a:solidFill>
+                  <a:srgbClr val="1D1D1F"/>
+                </a:solidFill>
+                <a:latin typeface="Pretendard" pitchFamily="34" charset="0"/>
+                <a:ea typeface="Pretendard" pitchFamily="34" charset="-122"/>
+                <a:cs typeface="Pretendard" pitchFamily="34" charset="-120"/>
+              </a:rPr>
+              <a:t>영상 수령 → 프레임 추출·작성</a:t>
+            </a:r>
+            <a:endParaRPr lang="en-US" sz="1250" dirty="0"/>
+          </a:p>
+        </p:txBody>
+      </p:sp>
+      <p:sp>
+        <p:nvSpPr>
+          <p:cNvPr id="26" name="Text 24"/>
+          <p:cNvSpPr/>
+          <p:nvPr/>
+        </p:nvSpPr>
+        <p:spPr>
+          <a:xfrm>
+            <a:off x="10058400" y="4069080"/>
+            <a:ext cx="1097280" cy="320040"/>
+          </a:xfrm>
+          <a:prstGeom prst="rect">
+            <a:avLst/>
+          </a:prstGeom>
+          <a:noFill/>
+          <a:ln/>
+        </p:spPr>
+        <p:txBody>
+          <a:bodyPr wrap="square" lIns="0" tIns="0" rIns="0" bIns="0" rtlCol="0" anchor="t"/>
+          <a:lstStyle/>
+          <a:p>
+            <a:pPr algn="r" indent="0" marL="0">
+              <a:lnSpc>
+                <a:spcPct val="130000"/>
+              </a:lnSpc>
+              <a:buNone/>
+            </a:pPr>
+            <a:r>
               <a:rPr lang="en-US" sz="1300" dirty="0">
                 <a:solidFill>
-                  <a:srgbClr val="6C4CFF"/>
-                </a:solidFill>
-                <a:latin typeface="Pretendard SemiBold" pitchFamily="34" charset="0"/>
-                <a:ea typeface="Pretendard SemiBold" pitchFamily="34" charset="-122"/>
-                <a:cs typeface="Pretendard SemiBold" pitchFamily="34" charset="-120"/>
-              </a:rPr>
-              <a:t>영상을 추가한다면 — 어디에 아카이빙</a:t>
+                  <a:srgbClr val="1D1D1F"/>
+                </a:solidFill>
+                <a:latin typeface="Pretendard Medium" pitchFamily="34" charset="0"/>
+                <a:ea typeface="Pretendard Medium" pitchFamily="34" charset="-122"/>
+                <a:cs typeface="Pretendard Medium" pitchFamily="34" charset="-120"/>
+              </a:rPr>
+              <a:t>+3~5일</a:t>
             </a:r>
             <a:endParaRPr lang="en-US" sz="1300" dirty="0"/>
           </a:p>
@@ -11483,24 +12561,20 @@
       </p:sp>
       <p:sp>
         <p:nvSpPr>
-          <p:cNvPr id="17" name="Shape 15"/>
-          <p:cNvSpPr/>
-          <p:nvPr/>
-        </p:nvSpPr>
-        <p:spPr>
-          <a:xfrm>
-            <a:off x="777240" y="4956048"/>
-            <a:ext cx="3362858" cy="1051560"/>
-          </a:xfrm>
-          <a:prstGeom prst="roundRect">
-            <a:avLst>
-              <a:gd name="adj" fmla="val 8696"/>
-            </a:avLst>
-          </a:prstGeom>
-          <a:solidFill>
-            <a:srgbClr val="FFFFFF"/>
-          </a:solidFill>
-          <a:ln w="12700">
+          <p:cNvPr id="27" name="Shape 25"/>
+          <p:cNvSpPr/>
+          <p:nvPr/>
+        </p:nvSpPr>
+        <p:spPr>
+          <a:xfrm>
+            <a:off x="6620256" y="4818888"/>
+            <a:ext cx="4498848" cy="0"/>
+          </a:xfrm>
+          <a:prstGeom prst="line">
+            <a:avLst/>
+          </a:prstGeom>
+          <a:noFill/>
+          <a:ln w="9525">
             <a:solidFill>
               <a:srgbClr val="E5E7EB"/>
             </a:solidFill>
@@ -11510,14 +12584,14 @@
       </p:sp>
       <p:sp>
         <p:nvSpPr>
-          <p:cNvPr id="18" name="Text 16"/>
-          <p:cNvSpPr/>
-          <p:nvPr/>
-        </p:nvSpPr>
-        <p:spPr>
-          <a:xfrm>
-            <a:off x="996696" y="5102352"/>
-            <a:ext cx="2923946" cy="274320"/>
+          <p:cNvPr id="28" name="Text 26"/>
+          <p:cNvSpPr/>
+          <p:nvPr/>
+        </p:nvSpPr>
+        <p:spPr>
+          <a:xfrm>
+            <a:off x="6620256" y="4910328"/>
+            <a:ext cx="2743200" cy="274320"/>
           </a:xfrm>
           <a:prstGeom prst="rect">
             <a:avLst/>
@@ -11536,141 +12610,72 @@
               <a:buNone/>
             </a:pPr>
             <a:r>
-              <a:rPr lang="en-US" sz="1250" dirty="0">
+              <a:rPr lang="en-US" sz="1200" dirty="0">
+                <a:solidFill>
+                  <a:srgbClr val="6E6E73"/>
+                </a:solidFill>
+                <a:latin typeface="Pretendard Medium" pitchFamily="34" charset="0"/>
+                <a:ea typeface="Pretendard Medium" pitchFamily="34" charset="-122"/>
+                <a:cs typeface="Pretendard Medium" pitchFamily="34" charset="-120"/>
+              </a:rPr>
+              <a:t>문서 구조 + 영상</a:t>
+            </a:r>
+            <a:endParaRPr lang="en-US" sz="1200" dirty="0"/>
+          </a:p>
+        </p:txBody>
+      </p:sp>
+      <p:sp>
+        <p:nvSpPr>
+          <p:cNvPr id="29" name="Text 27"/>
+          <p:cNvSpPr/>
+          <p:nvPr/>
+        </p:nvSpPr>
+        <p:spPr>
+          <a:xfrm>
+            <a:off x="9235440" y="4846320"/>
+            <a:ext cx="1920240" cy="365760"/>
+          </a:xfrm>
+          <a:prstGeom prst="rect">
+            <a:avLst/>
+          </a:prstGeom>
+          <a:noFill/>
+          <a:ln/>
+        </p:spPr>
+        <p:txBody>
+          <a:bodyPr wrap="square" lIns="0" tIns="0" rIns="0" bIns="0" rtlCol="0" anchor="t"/>
+          <a:lstStyle/>
+          <a:p>
+            <a:pPr algn="r" indent="0" marL="0">
+              <a:lnSpc>
+                <a:spcPct val="130000"/>
+              </a:lnSpc>
+              <a:buNone/>
+            </a:pPr>
+            <a:r>
+              <a:rPr lang="en-US" sz="2000" b="1" spc="-40" kern="0" dirty="0">
                 <a:solidFill>
                   <a:srgbClr val="6C4CFF"/>
-                </a:solidFill>
-                <a:latin typeface="Pretendard SemiBold" pitchFamily="34" charset="0"/>
-                <a:ea typeface="Pretendard SemiBold" pitchFamily="34" charset="-122"/>
-                <a:cs typeface="Pretendard SemiBold" pitchFamily="34" charset="-120"/>
-              </a:rPr>
-              <a:t>원본 영상</a:t>
-            </a:r>
-            <a:endParaRPr lang="en-US" sz="1250" dirty="0"/>
-          </a:p>
-        </p:txBody>
-      </p:sp>
-      <p:sp>
-        <p:nvSpPr>
-          <p:cNvPr id="19" name="Text 17"/>
-          <p:cNvSpPr/>
-          <p:nvPr/>
-        </p:nvSpPr>
-        <p:spPr>
-          <a:xfrm>
-            <a:off x="996696" y="5394960"/>
-            <a:ext cx="2923946" cy="320040"/>
-          </a:xfrm>
-          <a:prstGeom prst="rect">
-            <a:avLst/>
-          </a:prstGeom>
-          <a:noFill/>
-          <a:ln/>
-        </p:spPr>
-        <p:txBody>
-          <a:bodyPr wrap="square" lIns="0" tIns="0" rIns="0" bIns="0" rtlCol="0" anchor="t"/>
-          <a:lstStyle/>
-          <a:p>
-            <a:pPr algn="l" indent="0" marL="0">
-              <a:lnSpc>
-                <a:spcPct val="120000"/>
-              </a:lnSpc>
-              <a:buNone/>
-            </a:pPr>
-            <a:r>
-              <a:rPr lang="en-US" sz="1100" dirty="0">
-                <a:solidFill>
-                  <a:srgbClr val="1D1D1F"/>
-                </a:solidFill>
-                <a:latin typeface="Pretendard SemiBold" pitchFamily="34" charset="0"/>
-                <a:ea typeface="Pretendard SemiBold" pitchFamily="34" charset="-122"/>
-                <a:cs typeface="Pretendard SemiBold" pitchFamily="34" charset="-120"/>
-              </a:rPr>
-              <a:t>git 밖 클라우드(구글 드라이브 등) + 문서에 링크</a:t>
-            </a:r>
-            <a:endParaRPr lang="en-US" sz="1100" dirty="0"/>
-          </a:p>
-        </p:txBody>
-      </p:sp>
-      <p:sp>
-        <p:nvSpPr>
-          <p:cNvPr id="20" name="Text 18"/>
-          <p:cNvSpPr/>
-          <p:nvPr/>
-        </p:nvSpPr>
-        <p:spPr>
-          <a:xfrm>
-            <a:off x="996696" y="5669280"/>
-            <a:ext cx="2923946" cy="292608"/>
-          </a:xfrm>
-          <a:prstGeom prst="rect">
-            <a:avLst/>
-          </a:prstGeom>
-          <a:noFill/>
-          <a:ln/>
-        </p:spPr>
-        <p:txBody>
-          <a:bodyPr wrap="square" lIns="0" tIns="0" rIns="0" bIns="0" rtlCol="0" anchor="t"/>
-          <a:lstStyle/>
-          <a:p>
-            <a:pPr algn="l" indent="0" marL="0">
-              <a:lnSpc>
-                <a:spcPct val="120000"/>
-              </a:lnSpc>
-              <a:buNone/>
-            </a:pPr>
-            <a:r>
-              <a:rPr lang="en-US" sz="1000" dirty="0">
-                <a:solidFill>
-                  <a:srgbClr val="6E6E73"/>
                 </a:solidFill>
                 <a:latin typeface="Pretendard" pitchFamily="34" charset="0"/>
                 <a:ea typeface="Pretendard" pitchFamily="34" charset="-122"/>
                 <a:cs typeface="Pretendard" pitchFamily="34" charset="-120"/>
               </a:rPr>
-              <a:t>용량 문제 — 커밋하면 볼트가 무거워짐 (marketing 517MB 전례)</a:t>
-            </a:r>
-            <a:endParaRPr lang="en-US" sz="1000" dirty="0"/>
-          </a:p>
-        </p:txBody>
-      </p:sp>
-      <p:sp>
-        <p:nvSpPr>
-          <p:cNvPr id="21" name="Shape 19"/>
-          <p:cNvSpPr/>
-          <p:nvPr/>
-        </p:nvSpPr>
-        <p:spPr>
-          <a:xfrm>
-            <a:off x="4414418" y="4956048"/>
-            <a:ext cx="3362858" cy="1051560"/>
-          </a:xfrm>
-          <a:prstGeom prst="roundRect">
-            <a:avLst>
-              <a:gd name="adj" fmla="val 8696"/>
-            </a:avLst>
-          </a:prstGeom>
-          <a:solidFill>
-            <a:srgbClr val="FFFFFF"/>
-          </a:solidFill>
-          <a:ln w="12700">
-            <a:solidFill>
-              <a:srgbClr val="E5E7EB"/>
-            </a:solidFill>
-            <a:prstDash val="solid"/>
-          </a:ln>
-        </p:spPr>
-      </p:sp>
-      <p:sp>
-        <p:nvSpPr>
-          <p:cNvPr id="22" name="Text 20"/>
-          <p:cNvSpPr/>
-          <p:nvPr/>
-        </p:nvSpPr>
-        <p:spPr>
-          <a:xfrm>
-            <a:off x="4633874" y="5102352"/>
-            <a:ext cx="2923946" cy="274320"/>
+              <a:t>≈ 2주</a:t>
+            </a:r>
+            <a:endParaRPr lang="en-US" sz="2000" dirty="0"/>
+          </a:p>
+        </p:txBody>
+      </p:sp>
+      <p:sp>
+        <p:nvSpPr>
+          <p:cNvPr id="30" name="Text 28"/>
+          <p:cNvSpPr/>
+          <p:nvPr/>
+        </p:nvSpPr>
+        <p:spPr>
+          <a:xfrm>
+            <a:off x="777240" y="5532120"/>
+            <a:ext cx="10637215" cy="365760"/>
           </a:xfrm>
           <a:prstGeom prst="rect">
             <a:avLst/>
@@ -11689,254 +12694,17 @@
               <a:buNone/>
             </a:pPr>
             <a:r>
-              <a:rPr lang="en-US" sz="1250" dirty="0">
-                <a:solidFill>
-                  <a:srgbClr val="6C4CFF"/>
-                </a:solidFill>
-                <a:latin typeface="Pretendard SemiBold" pitchFamily="34" charset="0"/>
-                <a:ea typeface="Pretendard SemiBold" pitchFamily="34" charset="-122"/>
-                <a:cs typeface="Pretendard SemiBold" pitchFamily="34" charset="-120"/>
-              </a:rPr>
-              <a:t>핵심 프레임</a:t>
-            </a:r>
-            <a:endParaRPr lang="en-US" sz="1250" dirty="0"/>
-          </a:p>
-        </p:txBody>
-      </p:sp>
-      <p:sp>
-        <p:nvSpPr>
-          <p:cNvPr id="23" name="Text 21"/>
-          <p:cNvSpPr/>
-          <p:nvPr/>
-        </p:nvSpPr>
-        <p:spPr>
-          <a:xfrm>
-            <a:off x="4633874" y="5394960"/>
-            <a:ext cx="2923946" cy="320040"/>
-          </a:xfrm>
-          <a:prstGeom prst="rect">
-            <a:avLst/>
-          </a:prstGeom>
-          <a:noFill/>
-          <a:ln/>
-        </p:spPr>
-        <p:txBody>
-          <a:bodyPr wrap="square" lIns="0" tIns="0" rIns="0" bIns="0" rtlCol="0" anchor="t"/>
-          <a:lstStyle/>
-          <a:p>
-            <a:pPr algn="l" indent="0" marL="0">
-              <a:lnSpc>
-                <a:spcPct val="120000"/>
-              </a:lnSpc>
-              <a:buNone/>
-            </a:pPr>
-            <a:r>
-              <a:rPr lang="en-US" sz="1100" dirty="0">
-                <a:solidFill>
-                  <a:srgbClr val="1D1D1F"/>
-                </a:solidFill>
-                <a:latin typeface="Pretendard SemiBold" pitchFamily="34" charset="0"/>
-                <a:ea typeface="Pretendard SemiBold" pitchFamily="34" charset="-122"/>
-                <a:cs typeface="Pretendard SemiBold" pitchFamily="34" charset="-120"/>
-              </a:rPr>
-              <a:t>정지컷 몇 장만 볼트 attachments/ 에 저장</a:t>
-            </a:r>
-            <a:endParaRPr lang="en-US" sz="1100" dirty="0"/>
-          </a:p>
-        </p:txBody>
-      </p:sp>
-      <p:sp>
-        <p:nvSpPr>
-          <p:cNvPr id="24" name="Text 22"/>
-          <p:cNvSpPr/>
-          <p:nvPr/>
-        </p:nvSpPr>
-        <p:spPr>
-          <a:xfrm>
-            <a:off x="4633874" y="5669280"/>
-            <a:ext cx="2923946" cy="292608"/>
-          </a:xfrm>
-          <a:prstGeom prst="rect">
-            <a:avLst/>
-          </a:prstGeom>
-          <a:noFill/>
-          <a:ln/>
-        </p:spPr>
-        <p:txBody>
-          <a:bodyPr wrap="square" lIns="0" tIns="0" rIns="0" bIns="0" rtlCol="0" anchor="t"/>
-          <a:lstStyle/>
-          <a:p>
-            <a:pPr algn="l" indent="0" marL="0">
-              <a:lnSpc>
-                <a:spcPct val="120000"/>
-              </a:lnSpc>
-              <a:buNone/>
-            </a:pPr>
-            <a:r>
-              <a:rPr lang="en-US" sz="1000" dirty="0">
+              <a:rPr lang="en-US" sz="1150" dirty="0">
                 <a:solidFill>
                   <a:srgbClr val="6E6E73"/>
                 </a:solidFill>
-                <a:latin typeface="Pretendard" pitchFamily="34" charset="0"/>
-                <a:ea typeface="Pretendard" pitchFamily="34" charset="-122"/>
-                <a:cs typeface="Pretendard" pitchFamily="34" charset="-120"/>
-              </a:rPr>
-              <a:t>문서에서 ![[…]] 로 바로 보이게</a:t>
-            </a:r>
-            <a:endParaRPr lang="en-US" sz="1000" dirty="0"/>
-          </a:p>
-        </p:txBody>
-      </p:sp>
-      <p:sp>
-        <p:nvSpPr>
-          <p:cNvPr id="25" name="Shape 23"/>
-          <p:cNvSpPr/>
-          <p:nvPr/>
-        </p:nvSpPr>
-        <p:spPr>
-          <a:xfrm>
-            <a:off x="8051597" y="4956048"/>
-            <a:ext cx="3362858" cy="1051560"/>
-          </a:xfrm>
-          <a:prstGeom prst="roundRect">
-            <a:avLst>
-              <a:gd name="adj" fmla="val 8696"/>
-            </a:avLst>
-          </a:prstGeom>
-          <a:solidFill>
-            <a:srgbClr val="FFFFFF"/>
-          </a:solidFill>
-          <a:ln w="12700">
-            <a:solidFill>
-              <a:srgbClr val="E5E7EB"/>
-            </a:solidFill>
-            <a:prstDash val="solid"/>
-          </a:ln>
-        </p:spPr>
-      </p:sp>
-      <p:sp>
-        <p:nvSpPr>
-          <p:cNvPr id="26" name="Text 24"/>
-          <p:cNvSpPr/>
-          <p:nvPr/>
-        </p:nvSpPr>
-        <p:spPr>
-          <a:xfrm>
-            <a:off x="8271053" y="5102352"/>
-            <a:ext cx="2923946" cy="274320"/>
-          </a:xfrm>
-          <a:prstGeom prst="rect">
-            <a:avLst/>
-          </a:prstGeom>
-          <a:noFill/>
-          <a:ln/>
-        </p:spPr>
-        <p:txBody>
-          <a:bodyPr wrap="square" lIns="0" tIns="0" rIns="0" bIns="0" rtlCol="0" anchor="t"/>
-          <a:lstStyle/>
-          <a:p>
-            <a:pPr algn="l" indent="0" marL="0">
-              <a:lnSpc>
-                <a:spcPct val="130000"/>
-              </a:lnSpc>
-              <a:buNone/>
-            </a:pPr>
-            <a:r>
-              <a:rPr lang="en-US" sz="1250" dirty="0">
-                <a:solidFill>
-                  <a:srgbClr val="6C4CFF"/>
-                </a:solidFill>
-                <a:latin typeface="Pretendard SemiBold" pitchFamily="34" charset="0"/>
-                <a:ea typeface="Pretendard SemiBold" pitchFamily="34" charset="-122"/>
-                <a:cs typeface="Pretendard SemiBold" pitchFamily="34" charset="-120"/>
-              </a:rPr>
-              <a:t>정본</a:t>
-            </a:r>
-            <a:endParaRPr lang="en-US" sz="1250" dirty="0"/>
-          </a:p>
-        </p:txBody>
-      </p:sp>
-      <p:sp>
-        <p:nvSpPr>
-          <p:cNvPr id="27" name="Text 25"/>
-          <p:cNvSpPr/>
-          <p:nvPr/>
-        </p:nvSpPr>
-        <p:spPr>
-          <a:xfrm>
-            <a:off x="8271053" y="5394960"/>
-            <a:ext cx="2923946" cy="320040"/>
-          </a:xfrm>
-          <a:prstGeom prst="rect">
-            <a:avLst/>
-          </a:prstGeom>
-          <a:noFill/>
-          <a:ln/>
-        </p:spPr>
-        <p:txBody>
-          <a:bodyPr wrap="square" lIns="0" tIns="0" rIns="0" bIns="0" rtlCol="0" anchor="t"/>
-          <a:lstStyle/>
-          <a:p>
-            <a:pPr algn="l" indent="0" marL="0">
-              <a:lnSpc>
-                <a:spcPct val="120000"/>
-              </a:lnSpc>
-              <a:buNone/>
-            </a:pPr>
-            <a:r>
-              <a:rPr lang="en-US" sz="1100" dirty="0">
-                <a:solidFill>
-                  <a:srgbClr val="1D1D1F"/>
-                </a:solidFill>
-                <a:latin typeface="Pretendard SemiBold" pitchFamily="34" charset="0"/>
-                <a:ea typeface="Pretendard SemiBold" pitchFamily="34" charset="-122"/>
-                <a:cs typeface="Pretendard SemiBold" pitchFamily="34" charset="-120"/>
-              </a:rPr>
-              <a:t>‘영상에서 뽑은 텍스트 문서’가 정본</a:t>
-            </a:r>
-            <a:endParaRPr lang="en-US" sz="1100" dirty="0"/>
-          </a:p>
-        </p:txBody>
-      </p:sp>
-      <p:sp>
-        <p:nvSpPr>
-          <p:cNvPr id="28" name="Text 26"/>
-          <p:cNvSpPr/>
-          <p:nvPr/>
-        </p:nvSpPr>
-        <p:spPr>
-          <a:xfrm>
-            <a:off x="8271053" y="5669280"/>
-            <a:ext cx="2923946" cy="292608"/>
-          </a:xfrm>
-          <a:prstGeom prst="rect">
-            <a:avLst/>
-          </a:prstGeom>
-          <a:noFill/>
-          <a:ln/>
-        </p:spPr>
-        <p:txBody>
-          <a:bodyPr wrap="square" lIns="0" tIns="0" rIns="0" bIns="0" rtlCol="0" anchor="t"/>
-          <a:lstStyle/>
-          <a:p>
-            <a:pPr algn="l" indent="0" marL="0">
-              <a:lnSpc>
-                <a:spcPct val="120000"/>
-              </a:lnSpc>
-              <a:buNone/>
-            </a:pPr>
-            <a:r>
-              <a:rPr lang="en-US" sz="1000" dirty="0">
-                <a:solidFill>
-                  <a:srgbClr val="6E6E73"/>
-                </a:solidFill>
-                <a:latin typeface="Pretendard" pitchFamily="34" charset="0"/>
-                <a:ea typeface="Pretendard" pitchFamily="34" charset="-122"/>
-                <a:cs typeface="Pretendard" pitchFamily="34" charset="-120"/>
-              </a:rPr>
-              <a:t>영상 자체는 원본 소스일 뿐 — 검색은 문서로</a:t>
-            </a:r>
-            <a:endParaRPr lang="en-US" sz="1000" dirty="0"/>
+                <a:latin typeface="Pretendard Medium" pitchFamily="34" charset="0"/>
+                <a:ea typeface="Pretendard Medium" pitchFamily="34" charset="-122"/>
+                <a:cs typeface="Pretendard Medium" pitchFamily="34" charset="-120"/>
+              </a:rPr>
+              <a:t>※ 숫자는 추정치(예시)입니다. 다음 장에서 ‘어떤 기능에 영상이 필요한가’를 봅니다.</a:t>
+            </a:r>
+            <a:endParaRPr lang="en-US" sz="1150" dirty="0"/>
           </a:p>
         </p:txBody>
       </p:sp>
@@ -11951,6 +12719,1082 @@
 <file path=ppt/slides/slide16.xml><?xml version="1.0" encoding="utf-8"?>
 <p:sld xmlns:a="http://schemas.openxmlformats.org/drawingml/2006/main" xmlns:r="http://schemas.openxmlformats.org/officeDocument/2006/relationships" xmlns:p="http://schemas.openxmlformats.org/presentationml/2006/main">
   <p:cSld name="Slide 16">
+    <p:bg>
+      <p:bgPr>
+        <a:solidFill>
+          <a:srgbClr val="FFFFFF"/>
+        </a:solidFill>
+      </p:bgPr>
+    </p:bg>
+    <p:spTree>
+      <p:nvGrpSpPr>
+        <p:cNvPr id="1" name=""/>
+        <p:cNvGrpSpPr/>
+        <p:nvPr/>
+      </p:nvGrpSpPr>
+      <p:grpSpPr>
+        <a:xfrm>
+          <a:off x="0" y="0"/>
+          <a:ext cx="0" cy="0"/>
+          <a:chOff x="0" y="0"/>
+          <a:chExt cx="0" cy="0"/>
+        </a:xfrm>
+      </p:grpSpPr>
+      <p:sp>
+        <p:nvSpPr>
+          <p:cNvPr id="2" name="Text 0"/>
+          <p:cNvSpPr/>
+          <p:nvPr/>
+        </p:nvSpPr>
+        <p:spPr>
+          <a:xfrm>
+            <a:off x="777240" y="566928"/>
+            <a:ext cx="5486400" cy="256032"/>
+          </a:xfrm>
+          <a:prstGeom prst="rect">
+            <a:avLst/>
+          </a:prstGeom>
+          <a:noFill/>
+          <a:ln/>
+        </p:spPr>
+        <p:txBody>
+          <a:bodyPr wrap="square" lIns="0" tIns="0" rIns="0" bIns="0" rtlCol="0" anchor="b"/>
+          <a:lstStyle/>
+          <a:p>
+            <a:pPr indent="0" marL="0">
+              <a:buNone/>
+            </a:pPr>
+            <a:r>
+              <a:rPr lang="en-US" sz="1200" dirty="0">
+                <a:solidFill>
+                  <a:srgbClr val="6C4CFF"/>
+                </a:solidFill>
+                <a:latin typeface="Pretendard SemiBold" pitchFamily="34" charset="0"/>
+                <a:ea typeface="Pretendard SemiBold" pitchFamily="34" charset="-122"/>
+                <a:cs typeface="Pretendard SemiBold" pitchFamily="34" charset="-120"/>
+              </a:rPr>
+              <a:t>④ 영상</a:t>
+            </a:r>
+            <a:endParaRPr lang="en-US" sz="1200" dirty="0"/>
+          </a:p>
+        </p:txBody>
+      </p:sp>
+      <p:sp>
+        <p:nvSpPr>
+          <p:cNvPr id="3" name="Text 1"/>
+          <p:cNvSpPr/>
+          <p:nvPr/>
+        </p:nvSpPr>
+        <p:spPr>
+          <a:xfrm>
+            <a:off x="6842455" y="566928"/>
+            <a:ext cx="4572000" cy="256032"/>
+          </a:xfrm>
+          <a:prstGeom prst="rect">
+            <a:avLst/>
+          </a:prstGeom>
+          <a:noFill/>
+          <a:ln/>
+        </p:spPr>
+        <p:txBody>
+          <a:bodyPr wrap="square" lIns="0" tIns="0" rIns="0" bIns="0" rtlCol="0" anchor="b"/>
+          <a:lstStyle/>
+          <a:p>
+            <a:pPr algn="r" indent="0" marL="0">
+              <a:buNone/>
+            </a:pPr>
+            <a:r>
+              <a:rPr lang="en-US" sz="1200" dirty="0">
+                <a:solidFill>
+                  <a:srgbClr val="9AA0A6"/>
+                </a:solidFill>
+                <a:latin typeface="Pretendard Medium" pitchFamily="34" charset="0"/>
+                <a:ea typeface="Pretendard Medium" pitchFamily="34" charset="-122"/>
+                <a:cs typeface="Pretendard Medium" pitchFamily="34" charset="-120"/>
+              </a:rPr>
+              <a:t>04  제작·일정</a:t>
+            </a:r>
+            <a:endParaRPr lang="en-US" sz="1200" dirty="0"/>
+          </a:p>
+        </p:txBody>
+      </p:sp>
+      <p:sp>
+        <p:nvSpPr>
+          <p:cNvPr id="4" name="Text 2"/>
+          <p:cNvSpPr/>
+          <p:nvPr/>
+        </p:nvSpPr>
+        <p:spPr>
+          <a:xfrm>
+            <a:off x="777240" y="896112"/>
+            <a:ext cx="10058400" cy="502920"/>
+          </a:xfrm>
+          <a:prstGeom prst="rect">
+            <a:avLst/>
+          </a:prstGeom>
+          <a:noFill/>
+          <a:ln/>
+        </p:spPr>
+        <p:txBody>
+          <a:bodyPr wrap="square" lIns="0" tIns="0" rIns="0" bIns="0" rtlCol="0" anchor="t"/>
+          <a:lstStyle/>
+          <a:p>
+            <a:pPr indent="0" marL="0">
+              <a:lnSpc>
+                <a:spcPct val="114000"/>
+              </a:lnSpc>
+              <a:buNone/>
+            </a:pPr>
+            <a:r>
+              <a:rPr lang="en-US" sz="2600" b="1" spc="-40" kern="0" dirty="0">
+                <a:solidFill>
+                  <a:srgbClr val="1D1D1F"/>
+                </a:solidFill>
+                <a:latin typeface="Pretendard" pitchFamily="34" charset="0"/>
+                <a:ea typeface="Pretendard" pitchFamily="34" charset="-122"/>
+                <a:cs typeface="Pretendard" pitchFamily="34" charset="-120"/>
+              </a:rPr>
+              <a:t>영상은 ‘일부’ 기능만 필요하다</a:t>
+            </a:r>
+            <a:endParaRPr lang="en-US" sz="2600" dirty="0"/>
+          </a:p>
+        </p:txBody>
+      </p:sp>
+      <p:sp>
+        <p:nvSpPr>
+          <p:cNvPr id="5" name="Text 3"/>
+          <p:cNvSpPr/>
+          <p:nvPr/>
+        </p:nvSpPr>
+        <p:spPr>
+          <a:xfrm>
+            <a:off x="777240" y="1463040"/>
+            <a:ext cx="10058400" cy="320040"/>
+          </a:xfrm>
+          <a:prstGeom prst="rect">
+            <a:avLst/>
+          </a:prstGeom>
+          <a:noFill/>
+          <a:ln/>
+        </p:spPr>
+        <p:txBody>
+          <a:bodyPr wrap="square" lIns="0" tIns="0" rIns="0" bIns="0" rtlCol="0" anchor="t"/>
+          <a:lstStyle/>
+          <a:p>
+            <a:pPr indent="0" marL="0">
+              <a:buNone/>
+            </a:pPr>
+            <a:r>
+              <a:rPr lang="en-US" sz="1500" dirty="0">
+                <a:solidFill>
+                  <a:srgbClr val="6E6E73"/>
+                </a:solidFill>
+                <a:latin typeface="Pretendard" pitchFamily="34" charset="0"/>
+                <a:ea typeface="Pretendard" pitchFamily="34" charset="-122"/>
+                <a:cs typeface="Pretendard" pitchFamily="34" charset="-120"/>
+              </a:rPr>
+              <a:t>이미 문서화된 기능엔 불필요. 로그인 뒤 화면 흐름인 기능만 영상이 도움이 됩니다.</a:t>
+            </a:r>
+            <a:endParaRPr lang="en-US" sz="1500" dirty="0"/>
+          </a:p>
+        </p:txBody>
+      </p:sp>
+      <p:sp>
+        <p:nvSpPr>
+          <p:cNvPr id="6" name="Text 4"/>
+          <p:cNvSpPr/>
+          <p:nvPr/>
+        </p:nvSpPr>
+        <p:spPr>
+          <a:xfrm>
+            <a:off x="777240" y="6382512"/>
+            <a:ext cx="5486400" cy="256032"/>
+          </a:xfrm>
+          <a:prstGeom prst="rect">
+            <a:avLst/>
+          </a:prstGeom>
+          <a:noFill/>
+          <a:ln/>
+        </p:spPr>
+        <p:txBody>
+          <a:bodyPr wrap="square" lIns="0" tIns="0" rIns="0" bIns="0" rtlCol="0" anchor="ctr"/>
+          <a:lstStyle/>
+          <a:p>
+            <a:pPr indent="0" marL="0">
+              <a:buNone/>
+            </a:pPr>
+            <a:r>
+              <a:rPr lang="en-US" sz="950" spc="50" kern="0" dirty="0">
+                <a:solidFill>
+                  <a:srgbClr val="9AA0A6"/>
+                </a:solidFill>
+                <a:latin typeface="Pretendard Medium" pitchFamily="34" charset="0"/>
+                <a:ea typeface="Pretendard Medium" pitchFamily="34" charset="-122"/>
+                <a:cs typeface="Pretendard Medium" pitchFamily="34" charset="-120"/>
+              </a:rPr>
+              <a:t>CDBD  ·  HOME.CDBD.IN</a:t>
+            </a:r>
+            <a:endParaRPr lang="en-US" sz="950" dirty="0"/>
+          </a:p>
+        </p:txBody>
+      </p:sp>
+      <p:sp>
+        <p:nvSpPr>
+          <p:cNvPr id="7" name="Text 5"/>
+          <p:cNvSpPr/>
+          <p:nvPr/>
+        </p:nvSpPr>
+        <p:spPr>
+          <a:xfrm>
+            <a:off x="10500055" y="6382512"/>
+            <a:ext cx="914400" cy="256032"/>
+          </a:xfrm>
+          <a:prstGeom prst="rect">
+            <a:avLst/>
+          </a:prstGeom>
+          <a:noFill/>
+          <a:ln/>
+        </p:spPr>
+        <p:txBody>
+          <a:bodyPr wrap="square" lIns="0" tIns="0" rIns="0" bIns="0" rtlCol="0" anchor="ctr"/>
+          <a:lstStyle/>
+          <a:p>
+            <a:pPr algn="r" indent="0" marL="0">
+              <a:buNone/>
+            </a:pPr>
+            <a:r>
+              <a:rPr lang="en-US" sz="1000" dirty="0">
+                <a:solidFill>
+                  <a:srgbClr val="9AA0A6"/>
+                </a:solidFill>
+                <a:latin typeface="Pretendard Medium" pitchFamily="34" charset="0"/>
+                <a:ea typeface="Pretendard Medium" pitchFamily="34" charset="-122"/>
+                <a:cs typeface="Pretendard Medium" pitchFamily="34" charset="-120"/>
+              </a:rPr>
+              <a:t>15</a:t>
+            </a:r>
+            <a:endParaRPr lang="en-US" sz="1000" dirty="0"/>
+          </a:p>
+        </p:txBody>
+      </p:sp>
+      <p:sp>
+        <p:nvSpPr>
+          <p:cNvPr id="8" name="Shape 6"/>
+          <p:cNvSpPr/>
+          <p:nvPr/>
+        </p:nvSpPr>
+        <p:spPr>
+          <a:xfrm>
+            <a:off x="777240" y="2450592"/>
+            <a:ext cx="5120640" cy="1965960"/>
+          </a:xfrm>
+          <a:prstGeom prst="roundRect">
+            <a:avLst>
+              <a:gd name="adj" fmla="val 6512"/>
+            </a:avLst>
+          </a:prstGeom>
+          <a:solidFill>
+            <a:srgbClr val="FFFFFF"/>
+          </a:solidFill>
+          <a:ln w="12700">
+            <a:solidFill>
+              <a:srgbClr val="E5E7EB"/>
+            </a:solidFill>
+            <a:prstDash val="solid"/>
+          </a:ln>
+        </p:spPr>
+      </p:sp>
+      <p:sp>
+        <p:nvSpPr>
+          <p:cNvPr id="9" name="Text 7"/>
+          <p:cNvSpPr/>
+          <p:nvPr/>
+        </p:nvSpPr>
+        <p:spPr>
+          <a:xfrm>
+            <a:off x="1069848" y="2670048"/>
+            <a:ext cx="4572000" cy="274320"/>
+          </a:xfrm>
+          <a:prstGeom prst="rect">
+            <a:avLst/>
+          </a:prstGeom>
+          <a:noFill/>
+          <a:ln/>
+        </p:spPr>
+        <p:txBody>
+          <a:bodyPr wrap="square" lIns="0" tIns="0" rIns="0" bIns="0" rtlCol="0" anchor="t"/>
+          <a:lstStyle/>
+          <a:p>
+            <a:pPr algn="l" indent="0" marL="0">
+              <a:lnSpc>
+                <a:spcPct val="130000"/>
+              </a:lnSpc>
+              <a:buNone/>
+            </a:pPr>
+            <a:r>
+              <a:rPr lang="en-US" sz="1500" dirty="0">
+                <a:solidFill>
+                  <a:srgbClr val="6E6E73"/>
+                </a:solidFill>
+                <a:latin typeface="Pretendard SemiBold" pitchFamily="34" charset="0"/>
+                <a:ea typeface="Pretendard SemiBold" pitchFamily="34" charset="-122"/>
+                <a:cs typeface="Pretendard SemiBold" pitchFamily="34" charset="-120"/>
+              </a:rPr>
+              <a:t>영상 불필요</a:t>
+            </a:r>
+            <a:endParaRPr lang="en-US" sz="1500" dirty="0"/>
+          </a:p>
+        </p:txBody>
+      </p:sp>
+      <p:sp>
+        <p:nvSpPr>
+          <p:cNvPr id="10" name="Text 8"/>
+          <p:cNvSpPr/>
+          <p:nvPr/>
+        </p:nvSpPr>
+        <p:spPr>
+          <a:xfrm>
+            <a:off x="1069848" y="3090672"/>
+            <a:ext cx="4572000" cy="274320"/>
+          </a:xfrm>
+          <a:prstGeom prst="rect">
+            <a:avLst/>
+          </a:prstGeom>
+          <a:noFill/>
+          <a:ln/>
+        </p:spPr>
+        <p:txBody>
+          <a:bodyPr wrap="square" lIns="0" tIns="0" rIns="0" bIns="0" rtlCol="0" anchor="t"/>
+          <a:lstStyle/>
+          <a:p>
+            <a:pPr algn="l" indent="0" marL="0">
+              <a:lnSpc>
+                <a:spcPct val="130000"/>
+              </a:lnSpc>
+              <a:buNone/>
+            </a:pPr>
+            <a:r>
+              <a:rPr lang="en-US" sz="1250" dirty="0">
+                <a:solidFill>
+                  <a:srgbClr val="1D1D1F"/>
+                </a:solidFill>
+                <a:latin typeface="Pretendard SemiBold" pitchFamily="34" charset="0"/>
+                <a:ea typeface="Pretendard SemiBold" pitchFamily="34" charset="-122"/>
+                <a:cs typeface="Pretendard SemiBold" pitchFamily="34" charset="-120"/>
+              </a:rPr>
+              <a:t>이미 텍스트로 정리된 ● 기능</a:t>
+            </a:r>
+            <a:endParaRPr lang="en-US" sz="1250" dirty="0"/>
+          </a:p>
+        </p:txBody>
+      </p:sp>
+      <p:sp>
+        <p:nvSpPr>
+          <p:cNvPr id="11" name="Text 9"/>
+          <p:cNvSpPr/>
+          <p:nvPr/>
+        </p:nvSpPr>
+        <p:spPr>
+          <a:xfrm>
+            <a:off x="1069848" y="3419856"/>
+            <a:ext cx="4535424" cy="822960"/>
+          </a:xfrm>
+          <a:prstGeom prst="rect">
+            <a:avLst/>
+          </a:prstGeom>
+          <a:noFill/>
+          <a:ln/>
+        </p:spPr>
+        <p:txBody>
+          <a:bodyPr wrap="square" lIns="0" tIns="0" rIns="0" bIns="0" rtlCol="0" anchor="t"/>
+          <a:lstStyle/>
+          <a:p>
+            <a:pPr algn="l" indent="0" marL="0">
+              <a:lnSpc>
+                <a:spcPct val="140000"/>
+              </a:lnSpc>
+              <a:buNone/>
+            </a:pPr>
+            <a:r>
+              <a:rPr lang="en-US" sz="1200" dirty="0">
+                <a:solidFill>
+                  <a:srgbClr val="55555A"/>
+                </a:solidFill>
+                <a:latin typeface="Pretendard" pitchFamily="34" charset="0"/>
+                <a:ea typeface="Pretendard" pitchFamily="34" charset="-122"/>
+                <a:cs typeface="Pretendard" pitchFamily="34" charset="-120"/>
+              </a:rPr>
+              <a:t>카드 15종 · 카드 자동화 · URL 게시 · 이미지 라이브러리 — 스킬·문서가 이미 있어 화면 녹화가 새로 알려줄 게 없습니다.</a:t>
+            </a:r>
+            <a:endParaRPr lang="en-US" sz="1200" dirty="0"/>
+          </a:p>
+        </p:txBody>
+      </p:sp>
+      <p:sp>
+        <p:nvSpPr>
+          <p:cNvPr id="12" name="Shape 10"/>
+          <p:cNvSpPr/>
+          <p:nvPr/>
+        </p:nvSpPr>
+        <p:spPr>
+          <a:xfrm>
+            <a:off x="6309360" y="2450592"/>
+            <a:ext cx="5120640" cy="1965960"/>
+          </a:xfrm>
+          <a:prstGeom prst="roundRect">
+            <a:avLst>
+              <a:gd name="adj" fmla="val 6512"/>
+            </a:avLst>
+          </a:prstGeom>
+          <a:solidFill>
+            <a:srgbClr val="EEEAFB"/>
+          </a:solidFill>
+          <a:ln w="19050">
+            <a:solidFill>
+              <a:srgbClr val="6C4CFF"/>
+            </a:solidFill>
+            <a:prstDash val="solid"/>
+          </a:ln>
+        </p:spPr>
+      </p:sp>
+      <p:sp>
+        <p:nvSpPr>
+          <p:cNvPr id="13" name="Text 11"/>
+          <p:cNvSpPr/>
+          <p:nvPr/>
+        </p:nvSpPr>
+        <p:spPr>
+          <a:xfrm>
+            <a:off x="6601968" y="2670048"/>
+            <a:ext cx="4572000" cy="274320"/>
+          </a:xfrm>
+          <a:prstGeom prst="rect">
+            <a:avLst/>
+          </a:prstGeom>
+          <a:noFill/>
+          <a:ln/>
+        </p:spPr>
+        <p:txBody>
+          <a:bodyPr wrap="square" lIns="0" tIns="0" rIns="0" bIns="0" rtlCol="0" anchor="t"/>
+          <a:lstStyle/>
+          <a:p>
+            <a:pPr algn="l" indent="0" marL="0">
+              <a:lnSpc>
+                <a:spcPct val="130000"/>
+              </a:lnSpc>
+              <a:buNone/>
+            </a:pPr>
+            <a:r>
+              <a:rPr lang="en-US" sz="1500" b="1" dirty="0">
+                <a:solidFill>
+                  <a:srgbClr val="6C4CFF"/>
+                </a:solidFill>
+                <a:latin typeface="Pretendard" pitchFamily="34" charset="0"/>
+                <a:ea typeface="Pretendard" pitchFamily="34" charset="-122"/>
+                <a:cs typeface="Pretendard" pitchFamily="34" charset="-120"/>
+              </a:rPr>
+              <a:t>영상 필요</a:t>
+            </a:r>
+            <a:endParaRPr lang="en-US" sz="1500" dirty="0"/>
+          </a:p>
+        </p:txBody>
+      </p:sp>
+      <p:sp>
+        <p:nvSpPr>
+          <p:cNvPr id="14" name="Text 12"/>
+          <p:cNvSpPr/>
+          <p:nvPr/>
+        </p:nvSpPr>
+        <p:spPr>
+          <a:xfrm>
+            <a:off x="6601968" y="3090672"/>
+            <a:ext cx="4572000" cy="274320"/>
+          </a:xfrm>
+          <a:prstGeom prst="rect">
+            <a:avLst/>
+          </a:prstGeom>
+          <a:noFill/>
+          <a:ln/>
+        </p:spPr>
+        <p:txBody>
+          <a:bodyPr wrap="square" lIns="0" tIns="0" rIns="0" bIns="0" rtlCol="0" anchor="t"/>
+          <a:lstStyle/>
+          <a:p>
+            <a:pPr algn="l" indent="0" marL="0">
+              <a:lnSpc>
+                <a:spcPct val="130000"/>
+              </a:lnSpc>
+              <a:buNone/>
+            </a:pPr>
+            <a:r>
+              <a:rPr lang="en-US" sz="1250" dirty="0">
+                <a:solidFill>
+                  <a:srgbClr val="1D1D1F"/>
+                </a:solidFill>
+                <a:latin typeface="Pretendard SemiBold" pitchFamily="34" charset="0"/>
+                <a:ea typeface="Pretendard SemiBold" pitchFamily="34" charset="-122"/>
+                <a:cs typeface="Pretendard SemiBold" pitchFamily="34" charset="-120"/>
+              </a:rPr>
+              <a:t>로그인 뒤에서만 보이는 ○ 공백 기능</a:t>
+            </a:r>
+            <a:endParaRPr lang="en-US" sz="1250" dirty="0"/>
+          </a:p>
+        </p:txBody>
+      </p:sp>
+      <p:sp>
+        <p:nvSpPr>
+          <p:cNvPr id="15" name="Text 13"/>
+          <p:cNvSpPr/>
+          <p:nvPr/>
+        </p:nvSpPr>
+        <p:spPr>
+          <a:xfrm>
+            <a:off x="6601968" y="3419856"/>
+            <a:ext cx="4535424" cy="822960"/>
+          </a:xfrm>
+          <a:prstGeom prst="rect">
+            <a:avLst/>
+          </a:prstGeom>
+          <a:noFill/>
+          <a:ln/>
+        </p:spPr>
+        <p:txBody>
+          <a:bodyPr wrap="square" lIns="0" tIns="0" rIns="0" bIns="0" rtlCol="0" anchor="t"/>
+          <a:lstStyle/>
+          <a:p>
+            <a:pPr algn="l" indent="0" marL="0">
+              <a:lnSpc>
+                <a:spcPct val="140000"/>
+              </a:lnSpc>
+              <a:buNone/>
+            </a:pPr>
+            <a:r>
+              <a:rPr lang="en-US" sz="1200" dirty="0">
+                <a:solidFill>
+                  <a:srgbClr val="1D1D1F"/>
+                </a:solidFill>
+                <a:latin typeface="Pretendard" pitchFamily="34" charset="0"/>
+                <a:ea typeface="Pretendard" pitchFamily="34" charset="-122"/>
+                <a:cs typeface="Pretendard" pitchFamily="34" charset="-120"/>
+              </a:rPr>
+              <a:t>통계 · 계정 · 요금 · 버전 · 공유 복제 · 데이터 연결 — UI 흐름이라 텍스트로 유추 불가, 화면이 정확한 문서화에 도움.</a:t>
+            </a:r>
+            <a:endParaRPr lang="en-US" sz="1200" dirty="0"/>
+          </a:p>
+        </p:txBody>
+      </p:sp>
+      <p:sp>
+        <p:nvSpPr>
+          <p:cNvPr id="16" name="Text 14"/>
+          <p:cNvSpPr/>
+          <p:nvPr/>
+        </p:nvSpPr>
+        <p:spPr>
+          <a:xfrm>
+            <a:off x="777240" y="4617720"/>
+            <a:ext cx="10637215" cy="274320"/>
+          </a:xfrm>
+          <a:prstGeom prst="rect">
+            <a:avLst/>
+          </a:prstGeom>
+          <a:noFill/>
+          <a:ln/>
+        </p:spPr>
+        <p:txBody>
+          <a:bodyPr wrap="square" lIns="0" tIns="0" rIns="0" bIns="0" rtlCol="0" anchor="t"/>
+          <a:lstStyle/>
+          <a:p>
+            <a:pPr algn="l" indent="0" marL="0">
+              <a:lnSpc>
+                <a:spcPct val="130000"/>
+              </a:lnSpc>
+              <a:buNone/>
+            </a:pPr>
+            <a:r>
+              <a:rPr lang="en-US" sz="1300" dirty="0">
+                <a:solidFill>
+                  <a:srgbClr val="6C4CFF"/>
+                </a:solidFill>
+                <a:latin typeface="Pretendard SemiBold" pitchFamily="34" charset="0"/>
+                <a:ea typeface="Pretendard SemiBold" pitchFamily="34" charset="-122"/>
+                <a:cs typeface="Pretendard SemiBold" pitchFamily="34" charset="-120"/>
+              </a:rPr>
+              <a:t>원본 영상은 남겨야 하나? — 정본은 텍스트, 원본은 필요할 때만 클라우드에</a:t>
+            </a:r>
+            <a:endParaRPr lang="en-US" sz="1300" dirty="0"/>
+          </a:p>
+        </p:txBody>
+      </p:sp>
+      <p:sp>
+        <p:nvSpPr>
+          <p:cNvPr id="17" name="Shape 15"/>
+          <p:cNvSpPr/>
+          <p:nvPr/>
+        </p:nvSpPr>
+        <p:spPr>
+          <a:xfrm>
+            <a:off x="777240" y="4956048"/>
+            <a:ext cx="3362858" cy="1051560"/>
+          </a:xfrm>
+          <a:prstGeom prst="roundRect">
+            <a:avLst>
+              <a:gd name="adj" fmla="val 8696"/>
+            </a:avLst>
+          </a:prstGeom>
+          <a:solidFill>
+            <a:srgbClr val="FFFFFF"/>
+          </a:solidFill>
+          <a:ln w="12700">
+            <a:solidFill>
+              <a:srgbClr val="E5E7EB"/>
+            </a:solidFill>
+            <a:prstDash val="solid"/>
+          </a:ln>
+        </p:spPr>
+      </p:sp>
+      <p:sp>
+        <p:nvSpPr>
+          <p:cNvPr id="18" name="Text 16"/>
+          <p:cNvSpPr/>
+          <p:nvPr/>
+        </p:nvSpPr>
+        <p:spPr>
+          <a:xfrm>
+            <a:off x="996696" y="5102352"/>
+            <a:ext cx="2923946" cy="274320"/>
+          </a:xfrm>
+          <a:prstGeom prst="rect">
+            <a:avLst/>
+          </a:prstGeom>
+          <a:noFill/>
+          <a:ln/>
+        </p:spPr>
+        <p:txBody>
+          <a:bodyPr wrap="square" lIns="0" tIns="0" rIns="0" bIns="0" rtlCol="0" anchor="t"/>
+          <a:lstStyle/>
+          <a:p>
+            <a:pPr algn="l" indent="0" marL="0">
+              <a:lnSpc>
+                <a:spcPct val="130000"/>
+              </a:lnSpc>
+              <a:buNone/>
+            </a:pPr>
+            <a:r>
+              <a:rPr lang="en-US" sz="1250" dirty="0">
+                <a:solidFill>
+                  <a:srgbClr val="6C4CFF"/>
+                </a:solidFill>
+                <a:latin typeface="Pretendard SemiBold" pitchFamily="34" charset="0"/>
+                <a:ea typeface="Pretendard SemiBold" pitchFamily="34" charset="-122"/>
+                <a:cs typeface="Pretendard SemiBold" pitchFamily="34" charset="-120"/>
+              </a:rPr>
+              <a:t>정본 = 텍스트</a:t>
+            </a:r>
+            <a:endParaRPr lang="en-US" sz="1250" dirty="0"/>
+          </a:p>
+        </p:txBody>
+      </p:sp>
+      <p:sp>
+        <p:nvSpPr>
+          <p:cNvPr id="19" name="Text 17"/>
+          <p:cNvSpPr/>
+          <p:nvPr/>
+        </p:nvSpPr>
+        <p:spPr>
+          <a:xfrm>
+            <a:off x="996696" y="5394960"/>
+            <a:ext cx="2923946" cy="320040"/>
+          </a:xfrm>
+          <a:prstGeom prst="rect">
+            <a:avLst/>
+          </a:prstGeom>
+          <a:noFill/>
+          <a:ln/>
+        </p:spPr>
+        <p:txBody>
+          <a:bodyPr wrap="square" lIns="0" tIns="0" rIns="0" bIns="0" rtlCol="0" anchor="t"/>
+          <a:lstStyle/>
+          <a:p>
+            <a:pPr algn="l" indent="0" marL="0">
+              <a:lnSpc>
+                <a:spcPct val="120000"/>
+              </a:lnSpc>
+              <a:buNone/>
+            </a:pPr>
+            <a:r>
+              <a:rPr lang="en-US" sz="1100" dirty="0">
+                <a:solidFill>
+                  <a:srgbClr val="1D1D1F"/>
+                </a:solidFill>
+                <a:latin typeface="Pretendard SemiBold" pitchFamily="34" charset="0"/>
+                <a:ea typeface="Pretendard SemiBold" pitchFamily="34" charset="-122"/>
+                <a:cs typeface="Pretendard SemiBold" pitchFamily="34" charset="-120"/>
+              </a:rPr>
+              <a:t>‘영상에서 뽑은 문서’가 정본</a:t>
+            </a:r>
+            <a:endParaRPr lang="en-US" sz="1100" dirty="0"/>
+          </a:p>
+        </p:txBody>
+      </p:sp>
+      <p:sp>
+        <p:nvSpPr>
+          <p:cNvPr id="20" name="Text 18"/>
+          <p:cNvSpPr/>
+          <p:nvPr/>
+        </p:nvSpPr>
+        <p:spPr>
+          <a:xfrm>
+            <a:off x="996696" y="5669280"/>
+            <a:ext cx="2923946" cy="292608"/>
+          </a:xfrm>
+          <a:prstGeom prst="rect">
+            <a:avLst/>
+          </a:prstGeom>
+          <a:noFill/>
+          <a:ln/>
+        </p:spPr>
+        <p:txBody>
+          <a:bodyPr wrap="square" lIns="0" tIns="0" rIns="0" bIns="0" rtlCol="0" anchor="t"/>
+          <a:lstStyle/>
+          <a:p>
+            <a:pPr algn="l" indent="0" marL="0">
+              <a:lnSpc>
+                <a:spcPct val="120000"/>
+              </a:lnSpc>
+              <a:buNone/>
+            </a:pPr>
+            <a:r>
+              <a:rPr lang="en-US" sz="1000" dirty="0">
+                <a:solidFill>
+                  <a:srgbClr val="6E6E73"/>
+                </a:solidFill>
+                <a:latin typeface="Pretendard" pitchFamily="34" charset="0"/>
+                <a:ea typeface="Pretendard" pitchFamily="34" charset="-122"/>
+                <a:cs typeface="Pretendard" pitchFamily="34" charset="-120"/>
+              </a:rPr>
+              <a:t>영상은 제작용 소스일 뿐 · 검색은 문서로</a:t>
+            </a:r>
+            <a:endParaRPr lang="en-US" sz="1000" dirty="0"/>
+          </a:p>
+        </p:txBody>
+      </p:sp>
+      <p:sp>
+        <p:nvSpPr>
+          <p:cNvPr id="21" name="Shape 19"/>
+          <p:cNvSpPr/>
+          <p:nvPr/>
+        </p:nvSpPr>
+        <p:spPr>
+          <a:xfrm>
+            <a:off x="4414418" y="4956048"/>
+            <a:ext cx="3362858" cy="1051560"/>
+          </a:xfrm>
+          <a:prstGeom prst="roundRect">
+            <a:avLst>
+              <a:gd name="adj" fmla="val 8696"/>
+            </a:avLst>
+          </a:prstGeom>
+          <a:solidFill>
+            <a:srgbClr val="FFFFFF"/>
+          </a:solidFill>
+          <a:ln w="12700">
+            <a:solidFill>
+              <a:srgbClr val="E5E7EB"/>
+            </a:solidFill>
+            <a:prstDash val="solid"/>
+          </a:ln>
+        </p:spPr>
+      </p:sp>
+      <p:sp>
+        <p:nvSpPr>
+          <p:cNvPr id="22" name="Text 20"/>
+          <p:cNvSpPr/>
+          <p:nvPr/>
+        </p:nvSpPr>
+        <p:spPr>
+          <a:xfrm>
+            <a:off x="4633874" y="5102352"/>
+            <a:ext cx="2923946" cy="274320"/>
+          </a:xfrm>
+          <a:prstGeom prst="rect">
+            <a:avLst/>
+          </a:prstGeom>
+          <a:noFill/>
+          <a:ln/>
+        </p:spPr>
+        <p:txBody>
+          <a:bodyPr wrap="square" lIns="0" tIns="0" rIns="0" bIns="0" rtlCol="0" anchor="t"/>
+          <a:lstStyle/>
+          <a:p>
+            <a:pPr algn="l" indent="0" marL="0">
+              <a:lnSpc>
+                <a:spcPct val="130000"/>
+              </a:lnSpc>
+              <a:buNone/>
+            </a:pPr>
+            <a:r>
+              <a:rPr lang="en-US" sz="1250" dirty="0">
+                <a:solidFill>
+                  <a:srgbClr val="6C4CFF"/>
+                </a:solidFill>
+                <a:latin typeface="Pretendard SemiBold" pitchFamily="34" charset="0"/>
+                <a:ea typeface="Pretendard SemiBold" pitchFamily="34" charset="-122"/>
+                <a:cs typeface="Pretendard SemiBold" pitchFamily="34" charset="-120"/>
+              </a:rPr>
+              <a:t>원본 영상</a:t>
+            </a:r>
+            <a:endParaRPr lang="en-US" sz="1250" dirty="0"/>
+          </a:p>
+        </p:txBody>
+      </p:sp>
+      <p:sp>
+        <p:nvSpPr>
+          <p:cNvPr id="23" name="Text 21"/>
+          <p:cNvSpPr/>
+          <p:nvPr/>
+        </p:nvSpPr>
+        <p:spPr>
+          <a:xfrm>
+            <a:off x="4633874" y="5394960"/>
+            <a:ext cx="2923946" cy="320040"/>
+          </a:xfrm>
+          <a:prstGeom prst="rect">
+            <a:avLst/>
+          </a:prstGeom>
+          <a:noFill/>
+          <a:ln/>
+        </p:spPr>
+        <p:txBody>
+          <a:bodyPr wrap="square" lIns="0" tIns="0" rIns="0" bIns="0" rtlCol="0" anchor="t"/>
+          <a:lstStyle/>
+          <a:p>
+            <a:pPr algn="l" indent="0" marL="0">
+              <a:lnSpc>
+                <a:spcPct val="120000"/>
+              </a:lnSpc>
+              <a:buNone/>
+            </a:pPr>
+            <a:r>
+              <a:rPr lang="en-US" sz="1100" dirty="0">
+                <a:solidFill>
+                  <a:srgbClr val="1D1D1F"/>
+                </a:solidFill>
+                <a:latin typeface="Pretendard SemiBold" pitchFamily="34" charset="0"/>
+                <a:ea typeface="Pretendard SemiBold" pitchFamily="34" charset="-122"/>
+                <a:cs typeface="Pretendard SemiBold" pitchFamily="34" charset="-120"/>
+              </a:rPr>
+              <a:t>필요하면 git 밖 클라우드(구글 드라이브)</a:t>
+            </a:r>
+            <a:endParaRPr lang="en-US" sz="1100" dirty="0"/>
+          </a:p>
+        </p:txBody>
+      </p:sp>
+      <p:sp>
+        <p:nvSpPr>
+          <p:cNvPr id="24" name="Text 22"/>
+          <p:cNvSpPr/>
+          <p:nvPr/>
+        </p:nvSpPr>
+        <p:spPr>
+          <a:xfrm>
+            <a:off x="4633874" y="5669280"/>
+            <a:ext cx="2923946" cy="292608"/>
+          </a:xfrm>
+          <a:prstGeom prst="rect">
+            <a:avLst/>
+          </a:prstGeom>
+          <a:noFill/>
+          <a:ln/>
+        </p:spPr>
+        <p:txBody>
+          <a:bodyPr wrap="square" lIns="0" tIns="0" rIns="0" bIns="0" rtlCol="0" anchor="t"/>
+          <a:lstStyle/>
+          <a:p>
+            <a:pPr algn="l" indent="0" marL="0">
+              <a:lnSpc>
+                <a:spcPct val="120000"/>
+              </a:lnSpc>
+              <a:buNone/>
+            </a:pPr>
+            <a:r>
+              <a:rPr lang="en-US" sz="1000" dirty="0">
+                <a:solidFill>
+                  <a:srgbClr val="6E6E73"/>
+                </a:solidFill>
+                <a:latin typeface="Pretendard" pitchFamily="34" charset="0"/>
+                <a:ea typeface="Pretendard" pitchFamily="34" charset="-122"/>
+                <a:cs typeface="Pretendard" pitchFamily="34" charset="-120"/>
+              </a:rPr>
+              <a:t>+ 문서에 링크 · 커밋 시 볼트 무거워짐(517MB 전례)</a:t>
+            </a:r>
+            <a:endParaRPr lang="en-US" sz="1000" dirty="0"/>
+          </a:p>
+        </p:txBody>
+      </p:sp>
+      <p:sp>
+        <p:nvSpPr>
+          <p:cNvPr id="25" name="Shape 23"/>
+          <p:cNvSpPr/>
+          <p:nvPr/>
+        </p:nvSpPr>
+        <p:spPr>
+          <a:xfrm>
+            <a:off x="8051597" y="4956048"/>
+            <a:ext cx="3362858" cy="1051560"/>
+          </a:xfrm>
+          <a:prstGeom prst="roundRect">
+            <a:avLst>
+              <a:gd name="adj" fmla="val 8696"/>
+            </a:avLst>
+          </a:prstGeom>
+          <a:solidFill>
+            <a:srgbClr val="FFFFFF"/>
+          </a:solidFill>
+          <a:ln w="12700">
+            <a:solidFill>
+              <a:srgbClr val="E5E7EB"/>
+            </a:solidFill>
+            <a:prstDash val="solid"/>
+          </a:ln>
+        </p:spPr>
+      </p:sp>
+      <p:sp>
+        <p:nvSpPr>
+          <p:cNvPr id="26" name="Text 24"/>
+          <p:cNvSpPr/>
+          <p:nvPr/>
+        </p:nvSpPr>
+        <p:spPr>
+          <a:xfrm>
+            <a:off x="8271053" y="5102352"/>
+            <a:ext cx="2923946" cy="274320"/>
+          </a:xfrm>
+          <a:prstGeom prst="rect">
+            <a:avLst/>
+          </a:prstGeom>
+          <a:noFill/>
+          <a:ln/>
+        </p:spPr>
+        <p:txBody>
+          <a:bodyPr wrap="square" lIns="0" tIns="0" rIns="0" bIns="0" rtlCol="0" anchor="t"/>
+          <a:lstStyle/>
+          <a:p>
+            <a:pPr algn="l" indent="0" marL="0">
+              <a:lnSpc>
+                <a:spcPct val="130000"/>
+              </a:lnSpc>
+              <a:buNone/>
+            </a:pPr>
+            <a:r>
+              <a:rPr lang="en-US" sz="1250" dirty="0">
+                <a:solidFill>
+                  <a:srgbClr val="6C4CFF"/>
+                </a:solidFill>
+                <a:latin typeface="Pretendard SemiBold" pitchFamily="34" charset="0"/>
+                <a:ea typeface="Pretendard SemiBold" pitchFamily="34" charset="-122"/>
+                <a:cs typeface="Pretendard SemiBold" pitchFamily="34" charset="-120"/>
+              </a:rPr>
+              <a:t>핵심 프레임</a:t>
+            </a:r>
+            <a:endParaRPr lang="en-US" sz="1250" dirty="0"/>
+          </a:p>
+        </p:txBody>
+      </p:sp>
+      <p:sp>
+        <p:nvSpPr>
+          <p:cNvPr id="27" name="Text 25"/>
+          <p:cNvSpPr/>
+          <p:nvPr/>
+        </p:nvSpPr>
+        <p:spPr>
+          <a:xfrm>
+            <a:off x="8271053" y="5394960"/>
+            <a:ext cx="2923946" cy="320040"/>
+          </a:xfrm>
+          <a:prstGeom prst="rect">
+            <a:avLst/>
+          </a:prstGeom>
+          <a:noFill/>
+          <a:ln/>
+        </p:spPr>
+        <p:txBody>
+          <a:bodyPr wrap="square" lIns="0" tIns="0" rIns="0" bIns="0" rtlCol="0" anchor="t"/>
+          <a:lstStyle/>
+          <a:p>
+            <a:pPr algn="l" indent="0" marL="0">
+              <a:lnSpc>
+                <a:spcPct val="120000"/>
+              </a:lnSpc>
+              <a:buNone/>
+            </a:pPr>
+            <a:r>
+              <a:rPr lang="en-US" sz="1100" dirty="0">
+                <a:solidFill>
+                  <a:srgbClr val="1D1D1F"/>
+                </a:solidFill>
+                <a:latin typeface="Pretendard SemiBold" pitchFamily="34" charset="0"/>
+                <a:ea typeface="Pretendard SemiBold" pitchFamily="34" charset="-122"/>
+                <a:cs typeface="Pretendard SemiBold" pitchFamily="34" charset="-120"/>
+              </a:rPr>
+              <a:t>정지컷 몇 장만 볼트 attachments/ 에</a:t>
+            </a:r>
+            <a:endParaRPr lang="en-US" sz="1100" dirty="0"/>
+          </a:p>
+        </p:txBody>
+      </p:sp>
+      <p:sp>
+        <p:nvSpPr>
+          <p:cNvPr id="28" name="Text 26"/>
+          <p:cNvSpPr/>
+          <p:nvPr/>
+        </p:nvSpPr>
+        <p:spPr>
+          <a:xfrm>
+            <a:off x="8271053" y="5669280"/>
+            <a:ext cx="2923946" cy="292608"/>
+          </a:xfrm>
+          <a:prstGeom prst="rect">
+            <a:avLst/>
+          </a:prstGeom>
+          <a:noFill/>
+          <a:ln/>
+        </p:spPr>
+        <p:txBody>
+          <a:bodyPr wrap="square" lIns="0" tIns="0" rIns="0" bIns="0" rtlCol="0" anchor="t"/>
+          <a:lstStyle/>
+          <a:p>
+            <a:pPr algn="l" indent="0" marL="0">
+              <a:lnSpc>
+                <a:spcPct val="120000"/>
+              </a:lnSpc>
+              <a:buNone/>
+            </a:pPr>
+            <a:r>
+              <a:rPr lang="en-US" sz="1000" dirty="0">
+                <a:solidFill>
+                  <a:srgbClr val="6E6E73"/>
+                </a:solidFill>
+                <a:latin typeface="Pretendard" pitchFamily="34" charset="0"/>
+                <a:ea typeface="Pretendard" pitchFamily="34" charset="-122"/>
+                <a:cs typeface="Pretendard" pitchFamily="34" charset="-120"/>
+              </a:rPr>
+              <a:t>문서에서 ![[…]] 로 바로 보이게</a:t>
+            </a:r>
+            <a:endParaRPr lang="en-US" sz="1000" dirty="0"/>
+          </a:p>
+        </p:txBody>
+      </p:sp>
+    </p:spTree>
+  </p:cSld>
+  <p:clrMapOvr>
+    <a:masterClrMapping/>
+  </p:clrMapOvr>
+</p:sld>
+</file>
+
+<file path=ppt/slides/slide17.xml><?xml version="1.0" encoding="utf-8"?>
+<p:sld xmlns:a="http://schemas.openxmlformats.org/drawingml/2006/main" xmlns:r="http://schemas.openxmlformats.org/officeDocument/2006/relationships" xmlns:p="http://schemas.openxmlformats.org/presentationml/2006/main">
+  <p:cSld name="Slide 17">
     <p:bg>
       <p:bgPr>
         <a:solidFill>

--- a/CdBd 기능 문서 구조 설계.pptx
+++ b/CdBd 기능 문서 구조 설계.pptx
@@ -3074,7 +3074,7 @@
                 <a:ea typeface="Pretendard" pitchFamily="34" charset="-122"/>
                 <a:cs typeface="Pretendard" pitchFamily="34" charset="-120"/>
               </a:rPr>
-              <a:t>고객이 쓰는 기준(8p 분류)으로 묶었습니다 — 에디터 · 대시보드 · 시작. 어드민은 제외.</a:t>
+              <a:t>고객이 쓰는 기준(8p 분류)으로 묶었습니다 — 대시보드 · 에디터 두 갈래. 어드민은 제외.</a:t>
             </a:r>
             <a:endParaRPr lang="en-US" sz="1500" dirty="0"/>
           </a:p>
@@ -3236,7 +3236,7 @@
                 <a:ea typeface="Pretendard SemiBold" pitchFamily="34" charset="-122"/>
                 <a:cs typeface="Pretendard SemiBold" pitchFamily="34" charset="-120"/>
               </a:rPr>
-              <a:t>ⓒ 에디터</a:t>
+              <a:t>Ⓑ 에디터</a:t>
             </a:r>
             <a:endParaRPr lang="en-US" sz="1250" dirty="0"/>
           </a:p>
@@ -4619,7 +4619,7 @@
                 <a:ea typeface="Pretendard SemiBold" pitchFamily="34" charset="-122"/>
                 <a:cs typeface="Pretendard SemiBold" pitchFamily="34" charset="-120"/>
               </a:rPr>
-              <a:t>ⓑ 대시보드 (계정)</a:t>
+              <a:t>Ⓐ 대시보드 (계정)</a:t>
             </a:r>
             <a:endParaRPr lang="en-US" sz="1250" dirty="0"/>
           </a:p>
@@ -4684,7 +4684,7 @@
                 <a:ea typeface="Pretendard Medium" pitchFamily="34" charset="-122"/>
                 <a:cs typeface="Pretendard Medium" pitchFamily="34" charset="-120"/>
               </a:rPr>
-              <a:t>페이지 · URL 통계</a:t>
+              <a:t>회원가입 · 로그인</a:t>
             </a:r>
             <a:endParaRPr lang="en-US" sz="1100" dirty="0"/>
           </a:p>
@@ -4833,7 +4833,7 @@
                 <a:ea typeface="Pretendard Medium" pitchFamily="34" charset="-122"/>
                 <a:cs typeface="Pretendard Medium" pitchFamily="34" charset="-120"/>
               </a:rPr>
-              <a:t>버전 기록</a:t>
+              <a:t>템플릿 페이지 생성</a:t>
             </a:r>
             <a:endParaRPr lang="en-US" sz="1100" dirty="0"/>
           </a:p>
@@ -4875,7 +4875,7 @@
                 <a:ea typeface="Pretendard SemiBold" pitchFamily="34" charset="-122"/>
                 <a:cs typeface="Pretendard SemiBold" pitchFamily="34" charset="-120"/>
               </a:rPr>
-              <a:t>○</a:t>
+              <a:t>◐</a:t>
             </a:r>
             <a:endParaRPr lang="en-US" sz="1100" dirty="0"/>
           </a:p>
@@ -4917,7 +4917,7 @@
                 <a:ea typeface="Pretendard" pitchFamily="34" charset="-122"/>
                 <a:cs typeface="Pretendard" pitchFamily="34" charset="-120"/>
               </a:rPr>
-              <a:t>— 없음</a:t>
+              <a:t>[T] 1-1 워크플로우</a:t>
             </a:r>
             <a:endParaRPr lang="en-US" sz="1000" dirty="0"/>
           </a:p>
@@ -4982,7 +4982,7 @@
                 <a:ea typeface="Pretendard Medium" pitchFamily="34" charset="-122"/>
                 <a:cs typeface="Pretendard Medium" pitchFamily="34" charset="-120"/>
               </a:rPr>
-              <a:t>공유 복제</a:t>
+              <a:t>홈 · 내 페이지</a:t>
             </a:r>
             <a:endParaRPr lang="en-US" sz="1100" dirty="0"/>
           </a:p>
@@ -5131,7 +5131,7 @@
                 <a:ea typeface="Pretendard Medium" pitchFamily="34" charset="-122"/>
                 <a:cs typeface="Pretendard Medium" pitchFamily="34" charset="-120"/>
               </a:rPr>
-              <a:t>홈 · 내 페이지</a:t>
+              <a:t>공유 복제</a:t>
             </a:r>
             <a:endParaRPr lang="en-US" sz="1100" dirty="0"/>
           </a:p>
@@ -5280,7 +5280,7 @@
                 <a:ea typeface="Pretendard Medium" pitchFamily="34" charset="-122"/>
                 <a:cs typeface="Pretendard Medium" pitchFamily="34" charset="-120"/>
               </a:rPr>
-              <a:t>계정 · 내 주소</a:t>
+              <a:t>버전 기록</a:t>
             </a:r>
             <a:endParaRPr lang="en-US" sz="1100" dirty="0"/>
           </a:p>
@@ -5429,7 +5429,7 @@
                 <a:ea typeface="Pretendard Medium" pitchFamily="34" charset="-122"/>
                 <a:cs typeface="Pretendard Medium" pitchFamily="34" charset="-120"/>
               </a:rPr>
-              <a:t>권한</a:t>
+              <a:t>페이지 · URL 통계</a:t>
             </a:r>
             <a:endParaRPr lang="en-US" sz="1100" dirty="0"/>
           </a:p>
@@ -5578,7 +5578,7 @@
                 <a:ea typeface="Pretendard Medium" pitchFamily="34" charset="-122"/>
                 <a:cs typeface="Pretendard Medium" pitchFamily="34" charset="-120"/>
               </a:rPr>
-              <a:t>요금 · 결제</a:t>
+              <a:t>계정 · 내 주소</a:t>
             </a:r>
             <a:endParaRPr lang="en-US" sz="1100" dirty="0"/>
           </a:p>
@@ -5620,7 +5620,7 @@
                 <a:ea typeface="Pretendard SemiBold" pitchFamily="34" charset="-122"/>
                 <a:cs typeface="Pretendard SemiBold" pitchFamily="34" charset="-120"/>
               </a:rPr>
-              <a:t>◐</a:t>
+              <a:t>○</a:t>
             </a:r>
             <a:endParaRPr lang="en-US" sz="1100" dirty="0"/>
           </a:p>
@@ -5662,7 +5662,7 @@
                 <a:ea typeface="Pretendard" pitchFamily="34" charset="-122"/>
                 <a:cs typeface="Pretendard" pitchFamily="34" charset="-120"/>
               </a:rPr>
-              <a:t>[SV] quota 실측</a:t>
+              <a:t>— 없음</a:t>
             </a:r>
             <a:endParaRPr lang="en-US" sz="1000" dirty="0"/>
           </a:p>
@@ -5670,204 +5670,13 @@
       </p:sp>
       <p:sp>
         <p:nvSpPr>
-          <p:cNvPr id="75" name="Text 73"/>
-          <p:cNvSpPr/>
-          <p:nvPr/>
-        </p:nvSpPr>
-        <p:spPr>
-          <a:xfrm>
-            <a:off x="6336792" y="5074920"/>
-            <a:ext cx="5074920" cy="274320"/>
-          </a:xfrm>
-          <a:prstGeom prst="rect">
-            <a:avLst/>
-          </a:prstGeom>
-          <a:noFill/>
-          <a:ln/>
-        </p:spPr>
-        <p:txBody>
-          <a:bodyPr wrap="square" lIns="0" tIns="0" rIns="0" bIns="0" rtlCol="0" anchor="t"/>
-          <a:lstStyle/>
-          <a:p>
-            <a:pPr algn="l" indent="0" marL="0">
-              <a:lnSpc>
-                <a:spcPct val="130000"/>
-              </a:lnSpc>
-              <a:buNone/>
-            </a:pPr>
-            <a:r>
-              <a:rPr lang="en-US" sz="1250" dirty="0">
-                <a:solidFill>
-                  <a:srgbClr val="6C4CFF"/>
-                </a:solidFill>
-                <a:latin typeface="Pretendard SemiBold" pitchFamily="34" charset="0"/>
-                <a:ea typeface="Pretendard SemiBold" pitchFamily="34" charset="-122"/>
-                <a:cs typeface="Pretendard SemiBold" pitchFamily="34" charset="-120"/>
-              </a:rPr>
-              <a:t>ⓐ 시작</a:t>
-            </a:r>
-            <a:endParaRPr lang="en-US" sz="1250" dirty="0"/>
-          </a:p>
-        </p:txBody>
-      </p:sp>
-      <p:sp>
-        <p:nvSpPr>
-          <p:cNvPr id="76" name="Shape 74"/>
-          <p:cNvSpPr/>
-          <p:nvPr/>
-        </p:nvSpPr>
-        <p:spPr>
-          <a:xfrm>
-            <a:off x="6336792" y="5385816"/>
-            <a:ext cx="5074920" cy="0"/>
-          </a:xfrm>
-          <a:prstGeom prst="line">
-            <a:avLst/>
-          </a:prstGeom>
-          <a:noFill/>
-          <a:ln w="9525">
-            <a:solidFill>
-              <a:srgbClr val="E5E7EB"/>
-            </a:solidFill>
-            <a:prstDash val="solid"/>
-          </a:ln>
-        </p:spPr>
-      </p:sp>
-      <p:sp>
-        <p:nvSpPr>
-          <p:cNvPr id="77" name="Text 75"/>
-          <p:cNvSpPr/>
-          <p:nvPr/>
-        </p:nvSpPr>
-        <p:spPr>
-          <a:xfrm>
-            <a:off x="6336792" y="5477256"/>
-            <a:ext cx="2194560" cy="292608"/>
-          </a:xfrm>
-          <a:prstGeom prst="rect">
-            <a:avLst/>
-          </a:prstGeom>
-          <a:noFill/>
-          <a:ln/>
-        </p:spPr>
-        <p:txBody>
-          <a:bodyPr wrap="square" lIns="0" tIns="0" rIns="0" bIns="0" rtlCol="0" anchor="ctr"/>
-          <a:lstStyle/>
-          <a:p>
-            <a:pPr algn="l" indent="0" marL="0">
-              <a:lnSpc>
-                <a:spcPct val="130000"/>
-              </a:lnSpc>
-              <a:buNone/>
-            </a:pPr>
-            <a:r>
-              <a:rPr lang="en-US" sz="1100" dirty="0">
-                <a:solidFill>
-                  <a:srgbClr val="1D1D1F"/>
-                </a:solidFill>
-                <a:latin typeface="Pretendard Medium" pitchFamily="34" charset="0"/>
-                <a:ea typeface="Pretendard Medium" pitchFamily="34" charset="-122"/>
-                <a:cs typeface="Pretendard Medium" pitchFamily="34" charset="-120"/>
-              </a:rPr>
-              <a:t>회원가입</a:t>
-            </a:r>
-            <a:endParaRPr lang="en-US" sz="1100" dirty="0"/>
-          </a:p>
-        </p:txBody>
-      </p:sp>
-      <p:sp>
-        <p:nvSpPr>
-          <p:cNvPr id="78" name="Text 76"/>
-          <p:cNvSpPr/>
-          <p:nvPr/>
-        </p:nvSpPr>
-        <p:spPr>
-          <a:xfrm>
-            <a:off x="8577072" y="5477256"/>
-            <a:ext cx="365760" cy="292608"/>
-          </a:xfrm>
-          <a:prstGeom prst="rect">
-            <a:avLst/>
-          </a:prstGeom>
-          <a:noFill/>
-          <a:ln/>
-        </p:spPr>
-        <p:txBody>
-          <a:bodyPr wrap="square" lIns="0" tIns="0" rIns="0" bIns="0" rtlCol="0" anchor="ctr"/>
-          <a:lstStyle/>
-          <a:p>
-            <a:pPr algn="l" indent="0" marL="0">
-              <a:lnSpc>
-                <a:spcPct val="130000"/>
-              </a:lnSpc>
-              <a:buNone/>
-            </a:pPr>
-            <a:r>
-              <a:rPr lang="en-US" sz="1100" dirty="0">
-                <a:solidFill>
-                  <a:srgbClr val="6E6E73"/>
-                </a:solidFill>
-                <a:latin typeface="Pretendard SemiBold" pitchFamily="34" charset="0"/>
-                <a:ea typeface="Pretendard SemiBold" pitchFamily="34" charset="-122"/>
-                <a:cs typeface="Pretendard SemiBold" pitchFamily="34" charset="-120"/>
-              </a:rPr>
-              <a:t>○</a:t>
-            </a:r>
-            <a:endParaRPr lang="en-US" sz="1100" dirty="0"/>
-          </a:p>
-        </p:txBody>
-      </p:sp>
-      <p:sp>
-        <p:nvSpPr>
-          <p:cNvPr id="79" name="Text 77"/>
-          <p:cNvSpPr/>
-          <p:nvPr/>
-        </p:nvSpPr>
-        <p:spPr>
-          <a:xfrm>
-            <a:off x="9034272" y="5477256"/>
-            <a:ext cx="2377440" cy="292608"/>
-          </a:xfrm>
-          <a:prstGeom prst="rect">
-            <a:avLst/>
-          </a:prstGeom>
-          <a:noFill/>
-          <a:ln/>
-        </p:spPr>
-        <p:txBody>
-          <a:bodyPr wrap="square" lIns="0" tIns="0" rIns="0" bIns="0" rtlCol="0" anchor="ctr"/>
-          <a:lstStyle/>
-          <a:p>
-            <a:pPr algn="l" indent="0" marL="0">
-              <a:lnSpc>
-                <a:spcPct val="130000"/>
-              </a:lnSpc>
-              <a:buNone/>
-            </a:pPr>
-            <a:r>
-              <a:rPr lang="en-US" sz="1000" dirty="0">
-                <a:solidFill>
-                  <a:srgbClr val="55555A"/>
-                </a:solidFill>
-                <a:latin typeface="Pretendard" pitchFamily="34" charset="0"/>
-                <a:ea typeface="Pretendard" pitchFamily="34" charset="-122"/>
-                <a:cs typeface="Pretendard" pitchFamily="34" charset="-120"/>
-              </a:rPr>
-              <a:t>— 없음</a:t>
-            </a:r>
-            <a:endParaRPr lang="en-US" sz="1000" dirty="0"/>
-          </a:p>
-        </p:txBody>
-      </p:sp>
-      <p:sp>
-        <p:nvSpPr>
-          <p:cNvPr id="80" name="Shape 78"/>
-          <p:cNvSpPr/>
-          <p:nvPr/>
-        </p:nvSpPr>
-        <p:spPr>
-          <a:xfrm>
-            <a:off x="6336792" y="5783580"/>
+          <p:cNvPr id="75" name="Shape 73"/>
+          <p:cNvSpPr/>
+          <p:nvPr/>
+        </p:nvSpPr>
+        <p:spPr>
+          <a:xfrm>
+            <a:off x="6336792" y="4969764"/>
             <a:ext cx="5074920" cy="0"/>
           </a:xfrm>
           <a:prstGeom prst="line">
@@ -5884,13 +5693,13 @@
       </p:sp>
       <p:sp>
         <p:nvSpPr>
-          <p:cNvPr id="81" name="Text 79"/>
-          <p:cNvSpPr/>
-          <p:nvPr/>
-        </p:nvSpPr>
-        <p:spPr>
-          <a:xfrm>
-            <a:off x="6336792" y="5806440"/>
+          <p:cNvPr id="76" name="Text 74"/>
+          <p:cNvSpPr/>
+          <p:nvPr/>
+        </p:nvSpPr>
+        <p:spPr>
+          <a:xfrm>
+            <a:off x="6336792" y="4992624"/>
             <a:ext cx="2194560" cy="292608"/>
           </a:xfrm>
           <a:prstGeom prst="rect">
@@ -5918,7 +5727,7 @@
                 <a:ea typeface="Pretendard Medium" pitchFamily="34" charset="-122"/>
                 <a:cs typeface="Pretendard Medium" pitchFamily="34" charset="-120"/>
               </a:rPr>
-              <a:t>템플릿 페이지 생성</a:t>
+              <a:t>권한</a:t>
             </a:r>
             <a:endParaRPr lang="en-US" sz="1100" dirty="0"/>
           </a:p>
@@ -5926,13 +5735,13 @@
       </p:sp>
       <p:sp>
         <p:nvSpPr>
-          <p:cNvPr id="82" name="Text 80"/>
-          <p:cNvSpPr/>
-          <p:nvPr/>
-        </p:nvSpPr>
-        <p:spPr>
-          <a:xfrm>
-            <a:off x="8577072" y="5806440"/>
+          <p:cNvPr id="77" name="Text 75"/>
+          <p:cNvSpPr/>
+          <p:nvPr/>
+        </p:nvSpPr>
+        <p:spPr>
+          <a:xfrm>
+            <a:off x="8577072" y="4992624"/>
             <a:ext cx="365760" cy="292608"/>
           </a:xfrm>
           <a:prstGeom prst="rect">
@@ -5960,7 +5769,7 @@
                 <a:ea typeface="Pretendard SemiBold" pitchFamily="34" charset="-122"/>
                 <a:cs typeface="Pretendard SemiBold" pitchFamily="34" charset="-120"/>
               </a:rPr>
-              <a:t>◐</a:t>
+              <a:t>○</a:t>
             </a:r>
             <a:endParaRPr lang="en-US" sz="1100" dirty="0"/>
           </a:p>
@@ -5968,13 +5777,13 @@
       </p:sp>
       <p:sp>
         <p:nvSpPr>
-          <p:cNvPr id="83" name="Text 81"/>
-          <p:cNvSpPr/>
-          <p:nvPr/>
-        </p:nvSpPr>
-        <p:spPr>
-          <a:xfrm>
-            <a:off x="9034272" y="5806440"/>
+          <p:cNvPr id="78" name="Text 76"/>
+          <p:cNvSpPr/>
+          <p:nvPr/>
+        </p:nvSpPr>
+        <p:spPr>
+          <a:xfrm>
+            <a:off x="9034272" y="4992624"/>
             <a:ext cx="2377440" cy="292608"/>
           </a:xfrm>
           <a:prstGeom prst="rect">
@@ -6002,7 +5811,156 @@
                 <a:ea typeface="Pretendard" pitchFamily="34" charset="-122"/>
                 <a:cs typeface="Pretendard" pitchFamily="34" charset="-120"/>
               </a:rPr>
-              <a:t>[T] 1-1 워크플로우</a:t>
+              <a:t>— 없음</a:t>
+            </a:r>
+            <a:endParaRPr lang="en-US" sz="1000" dirty="0"/>
+          </a:p>
+        </p:txBody>
+      </p:sp>
+      <p:sp>
+        <p:nvSpPr>
+          <p:cNvPr id="79" name="Shape 77"/>
+          <p:cNvSpPr/>
+          <p:nvPr/>
+        </p:nvSpPr>
+        <p:spPr>
+          <a:xfrm>
+            <a:off x="6336792" y="5298948"/>
+            <a:ext cx="5074920" cy="0"/>
+          </a:xfrm>
+          <a:prstGeom prst="line">
+            <a:avLst/>
+          </a:prstGeom>
+          <a:noFill/>
+          <a:ln w="6350">
+            <a:solidFill>
+              <a:srgbClr val="F0F0F0"/>
+            </a:solidFill>
+            <a:prstDash val="solid"/>
+          </a:ln>
+        </p:spPr>
+      </p:sp>
+      <p:sp>
+        <p:nvSpPr>
+          <p:cNvPr id="80" name="Text 78"/>
+          <p:cNvSpPr/>
+          <p:nvPr/>
+        </p:nvSpPr>
+        <p:spPr>
+          <a:xfrm>
+            <a:off x="6336792" y="5321808"/>
+            <a:ext cx="2194560" cy="292608"/>
+          </a:xfrm>
+          <a:prstGeom prst="rect">
+            <a:avLst/>
+          </a:prstGeom>
+          <a:noFill/>
+          <a:ln/>
+        </p:spPr>
+        <p:txBody>
+          <a:bodyPr wrap="square" lIns="0" tIns="0" rIns="0" bIns="0" rtlCol="0" anchor="ctr"/>
+          <a:lstStyle/>
+          <a:p>
+            <a:pPr algn="l" indent="0" marL="0">
+              <a:lnSpc>
+                <a:spcPct val="130000"/>
+              </a:lnSpc>
+              <a:buNone/>
+            </a:pPr>
+            <a:r>
+              <a:rPr lang="en-US" sz="1100" dirty="0">
+                <a:solidFill>
+                  <a:srgbClr val="1D1D1F"/>
+                </a:solidFill>
+                <a:latin typeface="Pretendard Medium" pitchFamily="34" charset="0"/>
+                <a:ea typeface="Pretendard Medium" pitchFamily="34" charset="-122"/>
+                <a:cs typeface="Pretendard Medium" pitchFamily="34" charset="-120"/>
+              </a:rPr>
+              <a:t>요금 · 결제</a:t>
+            </a:r>
+            <a:endParaRPr lang="en-US" sz="1100" dirty="0"/>
+          </a:p>
+        </p:txBody>
+      </p:sp>
+      <p:sp>
+        <p:nvSpPr>
+          <p:cNvPr id="81" name="Text 79"/>
+          <p:cNvSpPr/>
+          <p:nvPr/>
+        </p:nvSpPr>
+        <p:spPr>
+          <a:xfrm>
+            <a:off x="8577072" y="5321808"/>
+            <a:ext cx="365760" cy="292608"/>
+          </a:xfrm>
+          <a:prstGeom prst="rect">
+            <a:avLst/>
+          </a:prstGeom>
+          <a:noFill/>
+          <a:ln/>
+        </p:spPr>
+        <p:txBody>
+          <a:bodyPr wrap="square" lIns="0" tIns="0" rIns="0" bIns="0" rtlCol="0" anchor="ctr"/>
+          <a:lstStyle/>
+          <a:p>
+            <a:pPr algn="l" indent="0" marL="0">
+              <a:lnSpc>
+                <a:spcPct val="130000"/>
+              </a:lnSpc>
+              <a:buNone/>
+            </a:pPr>
+            <a:r>
+              <a:rPr lang="en-US" sz="1100" dirty="0">
+                <a:solidFill>
+                  <a:srgbClr val="6E6E73"/>
+                </a:solidFill>
+                <a:latin typeface="Pretendard SemiBold" pitchFamily="34" charset="0"/>
+                <a:ea typeface="Pretendard SemiBold" pitchFamily="34" charset="-122"/>
+                <a:cs typeface="Pretendard SemiBold" pitchFamily="34" charset="-120"/>
+              </a:rPr>
+              <a:t>◐</a:t>
+            </a:r>
+            <a:endParaRPr lang="en-US" sz="1100" dirty="0"/>
+          </a:p>
+        </p:txBody>
+      </p:sp>
+      <p:sp>
+        <p:nvSpPr>
+          <p:cNvPr id="82" name="Text 80"/>
+          <p:cNvSpPr/>
+          <p:nvPr/>
+        </p:nvSpPr>
+        <p:spPr>
+          <a:xfrm>
+            <a:off x="9034272" y="5321808"/>
+            <a:ext cx="2377440" cy="292608"/>
+          </a:xfrm>
+          <a:prstGeom prst="rect">
+            <a:avLst/>
+          </a:prstGeom>
+          <a:noFill/>
+          <a:ln/>
+        </p:spPr>
+        <p:txBody>
+          <a:bodyPr wrap="square" lIns="0" tIns="0" rIns="0" bIns="0" rtlCol="0" anchor="ctr"/>
+          <a:lstStyle/>
+          <a:p>
+            <a:pPr algn="l" indent="0" marL="0">
+              <a:lnSpc>
+                <a:spcPct val="130000"/>
+              </a:lnSpc>
+              <a:buNone/>
+            </a:pPr>
+            <a:r>
+              <a:rPr lang="en-US" sz="1000" dirty="0">
+                <a:solidFill>
+                  <a:srgbClr val="55555A"/>
+                </a:solidFill>
+                <a:latin typeface="Pretendard" pitchFamily="34" charset="0"/>
+                <a:ea typeface="Pretendard" pitchFamily="34" charset="-122"/>
+                <a:cs typeface="Pretendard" pitchFamily="34" charset="-120"/>
+              </a:rPr>
+              <a:t>[SV] quota 실측</a:t>
             </a:r>
             <a:endParaRPr lang="en-US" sz="1000" dirty="0"/>
           </a:p>
@@ -7081,7 +7039,7 @@
                 <a:ea typeface="Pretendard SemiBold" pitchFamily="34" charset="-122"/>
                 <a:cs typeface="Pretendard SemiBold" pitchFamily="34" charset="-120"/>
               </a:rPr>
-              <a:t>“카드 타입 골라줘”</a:t>
+              <a:t>“상품 카드 넣어줘”</a:t>
             </a:r>
             <a:endParaRPr lang="en-US" sz="1150" dirty="0"/>
           </a:p>
@@ -7123,7 +7081,7 @@
                 <a:ea typeface="Pretendard" pitchFamily="34" charset="-122"/>
                 <a:cs typeface="Pretendard" pitchFamily="34" charset="-120"/>
               </a:rPr>
-              <a:t>→ 1-6-2. CdBd 카드 기능.md (15종)</a:t>
+              <a:t>→ 1-6-2. CdBd 카드 기능.md</a:t>
             </a:r>
             <a:endParaRPr lang="en-US" sz="1050" dirty="0"/>
           </a:p>
@@ -7165,7 +7123,7 @@
                 <a:ea typeface="Pretendard SemiBold" pitchFamily="34" charset="-122"/>
                 <a:cs typeface="Pretendard SemiBold" pitchFamily="34" charset="-120"/>
               </a:rPr>
-              <a:t>“카드 자동화 해줘”</a:t>
+              <a:t>“예약 받는 카드 만들어줘”</a:t>
             </a:r>
             <a:endParaRPr lang="en-US" sz="1150" dirty="0"/>
           </a:p>
@@ -7207,7 +7165,7 @@
                 <a:ea typeface="Pretendard" pitchFamily="34" charset="-122"/>
                 <a:cs typeface="Pretendard" pitchFamily="34" charset="-120"/>
               </a:rPr>
-              <a:t>→ skills/cdbd-card-automation/</a:t>
+              <a:t>→ 1-6-2. CdBd 카드 기능.md</a:t>
             </a:r>
             <a:endParaRPr lang="en-US" sz="1050" dirty="0"/>
           </a:p>
@@ -7249,7 +7207,7 @@
                 <a:ea typeface="Pretendard SemiBold" pitchFamily="34" charset="-122"/>
                 <a:cs typeface="Pretendard SemiBold" pitchFamily="34" charset="-120"/>
               </a:rPr>
-              <a:t>“에디터 구성·꾸미기”</a:t>
+              <a:t>“유튜브 영상 카드 추가해줘”</a:t>
             </a:r>
             <a:endParaRPr lang="en-US" sz="1150" dirty="0"/>
           </a:p>
@@ -7291,7 +7249,7 @@
                 <a:ea typeface="Pretendard" pitchFamily="34" charset="-122"/>
                 <a:cs typeface="Pretendard" pitchFamily="34" charset="-120"/>
               </a:rPr>
-              <a:t>→ 1-6-1. CdBd 에디터.md</a:t>
+              <a:t>→ 1-6-2. CdBd 카드 기능.md</a:t>
             </a:r>
             <a:endParaRPr lang="en-US" sz="1050" dirty="0"/>
           </a:p>
@@ -7333,7 +7291,7 @@
                 <a:ea typeface="Pretendard SemiBold" pitchFamily="34" charset="-122"/>
                 <a:cs typeface="Pretendard SemiBold" pitchFamily="34" charset="-120"/>
               </a:rPr>
-              <a:t>“템플릿 페이지 생성”</a:t>
+              <a:t>“페이지 테마·배경 바꿔줘”</a:t>
             </a:r>
             <a:endParaRPr lang="en-US" sz="1150" dirty="0"/>
           </a:p>
@@ -7375,7 +7333,7 @@
                 <a:ea typeface="Pretendard" pitchFamily="34" charset="-122"/>
                 <a:cs typeface="Pretendard" pitchFamily="34" charset="-120"/>
               </a:rPr>
-              <a:t>→ 1-1. 워크플로우.md</a:t>
+              <a:t>→ 1-6-1. CdBd 에디터.md</a:t>
             </a:r>
             <a:endParaRPr lang="en-US" sz="1050" dirty="0"/>
           </a:p>
@@ -7608,7 +7566,7 @@
                 <a:ea typeface="Pretendard" pitchFamily="34" charset="-122"/>
                 <a:cs typeface="Pretendard" pitchFamily="34" charset="-120"/>
               </a:rPr>
-              <a:t>원리 — 한 곳을 완성·검증한 뒤 나머지로 복제하고, 마지막에 플러그인으로 묶습니다.</a:t>
+              <a:t>한 곳(cdbd-templates)을 완성·검증한 뒤, 나머지 볼트로 그대로 복제합니다.</a:t>
             </a:r>
             <a:endParaRPr lang="en-US" sz="1500" dirty="0"/>
           </a:p>
@@ -7700,899 +7658,14 @@
         </p:nvSpPr>
         <p:spPr>
           <a:xfrm>
-            <a:off x="1645920" y="3520440"/>
-            <a:ext cx="8899855" cy="0"/>
+            <a:off x="1005840" y="2487168"/>
+            <a:ext cx="0" cy="3108960"/>
           </a:xfrm>
           <a:prstGeom prst="line">
             <a:avLst/>
           </a:prstGeom>
           <a:noFill/>
-          <a:ln w="19050">
-            <a:solidFill>
-              <a:srgbClr val="6C4CFF"/>
-            </a:solidFill>
-            <a:prstDash val="solid"/>
-          </a:ln>
-        </p:spPr>
-      </p:sp>
-      <p:sp>
-        <p:nvSpPr>
-          <p:cNvPr id="9" name="Shape 7"/>
-          <p:cNvSpPr/>
-          <p:nvPr/>
-        </p:nvSpPr>
-        <p:spPr>
-          <a:xfrm>
-            <a:off x="1417320" y="3291840"/>
-            <a:ext cx="457200" cy="457200"/>
-          </a:xfrm>
-          <a:prstGeom prst="ellipse">
-            <a:avLst/>
-          </a:prstGeom>
-          <a:solidFill>
-            <a:srgbClr val="6C4CFF"/>
-          </a:solidFill>
-          <a:ln/>
-        </p:spPr>
-      </p:sp>
-      <p:sp>
-        <p:nvSpPr>
-          <p:cNvPr id="10" name="Text 8"/>
-          <p:cNvSpPr/>
-          <p:nvPr/>
-        </p:nvSpPr>
-        <p:spPr>
-          <a:xfrm>
-            <a:off x="1417320" y="3291840"/>
-            <a:ext cx="457200" cy="457200"/>
-          </a:xfrm>
-          <a:prstGeom prst="rect">
-            <a:avLst/>
-          </a:prstGeom>
-          <a:noFill/>
-          <a:ln/>
-        </p:spPr>
-        <p:txBody>
-          <a:bodyPr wrap="square" lIns="0" tIns="0" rIns="0" bIns="0" rtlCol="0" anchor="ctr"/>
-          <a:lstStyle/>
-          <a:p>
-            <a:pPr algn="ctr" indent="0" marL="0">
-              <a:buNone/>
-            </a:pPr>
-            <a:r>
-              <a:rPr lang="en-US" sz="1300" b="1" dirty="0">
-                <a:solidFill>
-                  <a:srgbClr val="FFFFFF"/>
-                </a:solidFill>
-                <a:latin typeface="Pretendard" pitchFamily="34" charset="0"/>
-                <a:ea typeface="Pretendard" pitchFamily="34" charset="-122"/>
-                <a:cs typeface="Pretendard" pitchFamily="34" charset="-120"/>
-              </a:rPr>
-              <a:t>1</a:t>
-            </a:r>
-            <a:endParaRPr lang="en-US" sz="1300" dirty="0"/>
-          </a:p>
-        </p:txBody>
-      </p:sp>
-      <p:sp>
-        <p:nvSpPr>
-          <p:cNvPr id="11" name="Text 9"/>
-          <p:cNvSpPr/>
-          <p:nvPr/>
-        </p:nvSpPr>
-        <p:spPr>
-          <a:xfrm>
-            <a:off x="801654" y="3977640"/>
-            <a:ext cx="1688531" cy="548640"/>
-          </a:xfrm>
-          <a:prstGeom prst="rect">
-            <a:avLst/>
-          </a:prstGeom>
-          <a:noFill/>
-          <a:ln/>
-        </p:spPr>
-        <p:txBody>
-          <a:bodyPr wrap="square" lIns="0" tIns="0" rIns="0" bIns="0" rtlCol="0" anchor="t"/>
-          <a:lstStyle/>
-          <a:p>
-            <a:pPr algn="ctr" indent="0" marL="0">
-              <a:lnSpc>
-                <a:spcPct val="115000"/>
-              </a:lnSpc>
-              <a:buNone/>
-            </a:pPr>
-            <a:r>
-              <a:rPr lang="en-US" sz="1250" dirty="0">
-                <a:solidFill>
-                  <a:srgbClr val="1D1D1F"/>
-                </a:solidFill>
-                <a:latin typeface="Pretendard SemiBold" pitchFamily="34" charset="0"/>
-                <a:ea typeface="Pretendard SemiBold" pitchFamily="34" charset="-122"/>
-                <a:cs typeface="Pretendard SemiBold" pitchFamily="34" charset="-120"/>
-              </a:rPr>
-              <a:t>분류 확정</a:t>
-            </a:r>
-            <a:endParaRPr lang="en-US" sz="1250" dirty="0"/>
-          </a:p>
-        </p:txBody>
-      </p:sp>
-      <p:sp>
-        <p:nvSpPr>
-          <p:cNvPr id="12" name="Text 10"/>
-          <p:cNvSpPr/>
-          <p:nvPr/>
-        </p:nvSpPr>
-        <p:spPr>
-          <a:xfrm>
-            <a:off x="801654" y="4526280"/>
-            <a:ext cx="1688531" cy="274320"/>
-          </a:xfrm>
-          <a:prstGeom prst="rect">
-            <a:avLst/>
-          </a:prstGeom>
-          <a:noFill/>
-          <a:ln/>
-        </p:spPr>
-        <p:txBody>
-          <a:bodyPr wrap="square" lIns="0" tIns="0" rIns="0" bIns="0" rtlCol="0" anchor="t"/>
-          <a:lstStyle/>
-          <a:p>
-            <a:pPr algn="ctr" indent="0" marL="0">
-              <a:lnSpc>
-                <a:spcPct val="130000"/>
-              </a:lnSpc>
-              <a:buNone/>
-            </a:pPr>
-            <a:r>
-              <a:rPr lang="en-US" sz="1200" b="1" dirty="0">
-                <a:solidFill>
-                  <a:srgbClr val="6C4CFF"/>
-                </a:solidFill>
-                <a:latin typeface="Pretendard" pitchFamily="34" charset="0"/>
-                <a:ea typeface="Pretendard" pitchFamily="34" charset="-122"/>
-                <a:cs typeface="Pretendard" pitchFamily="34" charset="-120"/>
-              </a:rPr>
-              <a:t>오늘</a:t>
-            </a:r>
-            <a:endParaRPr lang="en-US" sz="1200" dirty="0"/>
-          </a:p>
-        </p:txBody>
-      </p:sp>
-      <p:sp>
-        <p:nvSpPr>
-          <p:cNvPr id="13" name="Shape 11"/>
-          <p:cNvSpPr/>
-          <p:nvPr/>
-        </p:nvSpPr>
-        <p:spPr>
-          <a:xfrm>
-            <a:off x="3197291" y="3291840"/>
-            <a:ext cx="457200" cy="457200"/>
-          </a:xfrm>
-          <a:prstGeom prst="ellipse">
-            <a:avLst/>
-          </a:prstGeom>
-          <a:solidFill>
-            <a:srgbClr val="6C4CFF"/>
-          </a:solidFill>
-          <a:ln/>
-        </p:spPr>
-      </p:sp>
-      <p:sp>
-        <p:nvSpPr>
-          <p:cNvPr id="14" name="Text 12"/>
-          <p:cNvSpPr/>
-          <p:nvPr/>
-        </p:nvSpPr>
-        <p:spPr>
-          <a:xfrm>
-            <a:off x="3197291" y="3291840"/>
-            <a:ext cx="457200" cy="457200"/>
-          </a:xfrm>
-          <a:prstGeom prst="rect">
-            <a:avLst/>
-          </a:prstGeom>
-          <a:noFill/>
-          <a:ln/>
-        </p:spPr>
-        <p:txBody>
-          <a:bodyPr wrap="square" lIns="0" tIns="0" rIns="0" bIns="0" rtlCol="0" anchor="ctr"/>
-          <a:lstStyle/>
-          <a:p>
-            <a:pPr algn="ctr" indent="0" marL="0">
-              <a:buNone/>
-            </a:pPr>
-            <a:r>
-              <a:rPr lang="en-US" sz="1300" b="1" dirty="0">
-                <a:solidFill>
-                  <a:srgbClr val="FFFFFF"/>
-                </a:solidFill>
-                <a:latin typeface="Pretendard" pitchFamily="34" charset="0"/>
-                <a:ea typeface="Pretendard" pitchFamily="34" charset="-122"/>
-                <a:cs typeface="Pretendard" pitchFamily="34" charset="-120"/>
-              </a:rPr>
-              <a:t>2</a:t>
-            </a:r>
-            <a:endParaRPr lang="en-US" sz="1300" dirty="0"/>
-          </a:p>
-        </p:txBody>
-      </p:sp>
-      <p:sp>
-        <p:nvSpPr>
-          <p:cNvPr id="15" name="Text 13"/>
-          <p:cNvSpPr/>
-          <p:nvPr/>
-        </p:nvSpPr>
-        <p:spPr>
-          <a:xfrm>
-            <a:off x="2581626" y="3977640"/>
-            <a:ext cx="1688531" cy="548640"/>
-          </a:xfrm>
-          <a:prstGeom prst="rect">
-            <a:avLst/>
-          </a:prstGeom>
-          <a:noFill/>
-          <a:ln/>
-        </p:spPr>
-        <p:txBody>
-          <a:bodyPr wrap="square" lIns="0" tIns="0" rIns="0" bIns="0" rtlCol="0" anchor="t"/>
-          <a:lstStyle/>
-          <a:p>
-            <a:pPr algn="ctr" indent="0" marL="0">
-              <a:lnSpc>
-                <a:spcPct val="115000"/>
-              </a:lnSpc>
-              <a:buNone/>
-            </a:pPr>
-            <a:r>
-              <a:rPr lang="en-US" sz="1250" dirty="0">
-                <a:solidFill>
-                  <a:srgbClr val="1D1D1F"/>
-                </a:solidFill>
-                <a:latin typeface="Pretendard SemiBold" pitchFamily="34" charset="0"/>
-                <a:ea typeface="Pretendard SemiBold" pitchFamily="34" charset="-122"/>
-                <a:cs typeface="Pretendard SemiBold" pitchFamily="34" charset="-120"/>
-              </a:rPr>
-              <a:t>경로 문서 작성</a:t>
-            </a:r>
-            <a:endParaRPr lang="en-US" sz="1250" dirty="0"/>
-          </a:p>
-        </p:txBody>
-      </p:sp>
-      <p:sp>
-        <p:nvSpPr>
-          <p:cNvPr id="16" name="Text 14"/>
-          <p:cNvSpPr/>
-          <p:nvPr/>
-        </p:nvSpPr>
-        <p:spPr>
-          <a:xfrm>
-            <a:off x="2581626" y="4526280"/>
-            <a:ext cx="1688531" cy="274320"/>
-          </a:xfrm>
-          <a:prstGeom prst="rect">
-            <a:avLst/>
-          </a:prstGeom>
-          <a:noFill/>
-          <a:ln/>
-        </p:spPr>
-        <p:txBody>
-          <a:bodyPr wrap="square" lIns="0" tIns="0" rIns="0" bIns="0" rtlCol="0" anchor="t"/>
-          <a:lstStyle/>
-          <a:p>
-            <a:pPr algn="ctr" indent="0" marL="0">
-              <a:lnSpc>
-                <a:spcPct val="130000"/>
-              </a:lnSpc>
-              <a:buNone/>
-            </a:pPr>
-            <a:r>
-              <a:rPr lang="en-US" sz="1200" b="1" dirty="0">
-                <a:solidFill>
-                  <a:srgbClr val="6C4CFF"/>
-                </a:solidFill>
-                <a:latin typeface="Pretendard" pitchFamily="34" charset="0"/>
-                <a:ea typeface="Pretendard" pitchFamily="34" charset="-122"/>
-                <a:cs typeface="Pretendard" pitchFamily="34" charset="-120"/>
-              </a:rPr>
-              <a:t>0.5일</a:t>
-            </a:r>
-            <a:endParaRPr lang="en-US" sz="1200" dirty="0"/>
-          </a:p>
-        </p:txBody>
-      </p:sp>
-      <p:sp>
-        <p:nvSpPr>
-          <p:cNvPr id="17" name="Shape 15"/>
-          <p:cNvSpPr/>
-          <p:nvPr/>
-        </p:nvSpPr>
-        <p:spPr>
-          <a:xfrm>
-            <a:off x="4977262" y="3291840"/>
-            <a:ext cx="457200" cy="457200"/>
-          </a:xfrm>
-          <a:prstGeom prst="ellipse">
-            <a:avLst/>
-          </a:prstGeom>
-          <a:solidFill>
-            <a:srgbClr val="6C4CFF"/>
-          </a:solidFill>
-          <a:ln/>
-        </p:spPr>
-      </p:sp>
-      <p:sp>
-        <p:nvSpPr>
-          <p:cNvPr id="18" name="Text 16"/>
-          <p:cNvSpPr/>
-          <p:nvPr/>
-        </p:nvSpPr>
-        <p:spPr>
-          <a:xfrm>
-            <a:off x="4977262" y="3291840"/>
-            <a:ext cx="457200" cy="457200"/>
-          </a:xfrm>
-          <a:prstGeom prst="rect">
-            <a:avLst/>
-          </a:prstGeom>
-          <a:noFill/>
-          <a:ln/>
-        </p:spPr>
-        <p:txBody>
-          <a:bodyPr wrap="square" lIns="0" tIns="0" rIns="0" bIns="0" rtlCol="0" anchor="ctr"/>
-          <a:lstStyle/>
-          <a:p>
-            <a:pPr algn="ctr" indent="0" marL="0">
-              <a:buNone/>
-            </a:pPr>
-            <a:r>
-              <a:rPr lang="en-US" sz="1300" b="1" dirty="0">
-                <a:solidFill>
-                  <a:srgbClr val="FFFFFF"/>
-                </a:solidFill>
-                <a:latin typeface="Pretendard" pitchFamily="34" charset="0"/>
-                <a:ea typeface="Pretendard" pitchFamily="34" charset="-122"/>
-                <a:cs typeface="Pretendard" pitchFamily="34" charset="-120"/>
-              </a:rPr>
-              <a:t>3</a:t>
-            </a:r>
-            <a:endParaRPr lang="en-US" sz="1300" dirty="0"/>
-          </a:p>
-        </p:txBody>
-      </p:sp>
-      <p:sp>
-        <p:nvSpPr>
-          <p:cNvPr id="19" name="Text 17"/>
-          <p:cNvSpPr/>
-          <p:nvPr/>
-        </p:nvSpPr>
-        <p:spPr>
-          <a:xfrm>
-            <a:off x="4361597" y="3977640"/>
-            <a:ext cx="1688531" cy="548640"/>
-          </a:xfrm>
-          <a:prstGeom prst="rect">
-            <a:avLst/>
-          </a:prstGeom>
-          <a:noFill/>
-          <a:ln/>
-        </p:spPr>
-        <p:txBody>
-          <a:bodyPr wrap="square" lIns="0" tIns="0" rIns="0" bIns="0" rtlCol="0" anchor="t"/>
-          <a:lstStyle/>
-          <a:p>
-            <a:pPr algn="ctr" indent="0" marL="0">
-              <a:lnSpc>
-                <a:spcPct val="115000"/>
-              </a:lnSpc>
-              <a:buNone/>
-            </a:pPr>
-            <a:r>
-              <a:rPr lang="en-US" sz="1250" dirty="0">
-                <a:solidFill>
-                  <a:srgbClr val="1D1D1F"/>
-                </a:solidFill>
-                <a:latin typeface="Pretendard SemiBold" pitchFamily="34" charset="0"/>
-                <a:ea typeface="Pretendard SemiBold" pitchFamily="34" charset="-122"/>
-                <a:cs typeface="Pretendard SemiBold" pitchFamily="34" charset="-120"/>
-              </a:rPr>
-              <a:t>CLAUDE.md 연결</a:t>
-            </a:r>
-            <a:endParaRPr lang="en-US" sz="1250" dirty="0"/>
-          </a:p>
-        </p:txBody>
-      </p:sp>
-      <p:sp>
-        <p:nvSpPr>
-          <p:cNvPr id="20" name="Text 18"/>
-          <p:cNvSpPr/>
-          <p:nvPr/>
-        </p:nvSpPr>
-        <p:spPr>
-          <a:xfrm>
-            <a:off x="4361597" y="4526280"/>
-            <a:ext cx="1688531" cy="274320"/>
-          </a:xfrm>
-          <a:prstGeom prst="rect">
-            <a:avLst/>
-          </a:prstGeom>
-          <a:noFill/>
-          <a:ln/>
-        </p:spPr>
-        <p:txBody>
-          <a:bodyPr wrap="square" lIns="0" tIns="0" rIns="0" bIns="0" rtlCol="0" anchor="t"/>
-          <a:lstStyle/>
-          <a:p>
-            <a:pPr algn="ctr" indent="0" marL="0">
-              <a:lnSpc>
-                <a:spcPct val="130000"/>
-              </a:lnSpc>
-              <a:buNone/>
-            </a:pPr>
-            <a:r>
-              <a:rPr lang="en-US" sz="1200" b="1" dirty="0">
-                <a:solidFill>
-                  <a:srgbClr val="6C4CFF"/>
-                </a:solidFill>
-                <a:latin typeface="Pretendard" pitchFamily="34" charset="0"/>
-                <a:ea typeface="Pretendard" pitchFamily="34" charset="-122"/>
-                <a:cs typeface="Pretendard" pitchFamily="34" charset="-120"/>
-              </a:rPr>
-              <a:t>5분</a:t>
-            </a:r>
-            <a:endParaRPr lang="en-US" sz="1200" dirty="0"/>
-          </a:p>
-        </p:txBody>
-      </p:sp>
-      <p:sp>
-        <p:nvSpPr>
-          <p:cNvPr id="21" name="Shape 19"/>
-          <p:cNvSpPr/>
-          <p:nvPr/>
-        </p:nvSpPr>
-        <p:spPr>
-          <a:xfrm>
-            <a:off x="6757233" y="3291840"/>
-            <a:ext cx="457200" cy="457200"/>
-          </a:xfrm>
-          <a:prstGeom prst="ellipse">
-            <a:avLst/>
-          </a:prstGeom>
-          <a:solidFill>
-            <a:srgbClr val="6C4CFF"/>
-          </a:solidFill>
-          <a:ln/>
-        </p:spPr>
-      </p:sp>
-      <p:sp>
-        <p:nvSpPr>
-          <p:cNvPr id="22" name="Text 20"/>
-          <p:cNvSpPr/>
-          <p:nvPr/>
-        </p:nvSpPr>
-        <p:spPr>
-          <a:xfrm>
-            <a:off x="6757233" y="3291840"/>
-            <a:ext cx="457200" cy="457200"/>
-          </a:xfrm>
-          <a:prstGeom prst="rect">
-            <a:avLst/>
-          </a:prstGeom>
-          <a:noFill/>
-          <a:ln/>
-        </p:spPr>
-        <p:txBody>
-          <a:bodyPr wrap="square" lIns="0" tIns="0" rIns="0" bIns="0" rtlCol="0" anchor="ctr"/>
-          <a:lstStyle/>
-          <a:p>
-            <a:pPr algn="ctr" indent="0" marL="0">
-              <a:buNone/>
-            </a:pPr>
-            <a:r>
-              <a:rPr lang="en-US" sz="1300" b="1" dirty="0">
-                <a:solidFill>
-                  <a:srgbClr val="FFFFFF"/>
-                </a:solidFill>
-                <a:latin typeface="Pretendard" pitchFamily="34" charset="0"/>
-                <a:ea typeface="Pretendard" pitchFamily="34" charset="-122"/>
-                <a:cs typeface="Pretendard" pitchFamily="34" charset="-120"/>
-              </a:rPr>
-              <a:t>4</a:t>
-            </a:r>
-            <a:endParaRPr lang="en-US" sz="1300" dirty="0"/>
-          </a:p>
-        </p:txBody>
-      </p:sp>
-      <p:sp>
-        <p:nvSpPr>
-          <p:cNvPr id="23" name="Text 21"/>
-          <p:cNvSpPr/>
-          <p:nvPr/>
-        </p:nvSpPr>
-        <p:spPr>
-          <a:xfrm>
-            <a:off x="6141568" y="3977640"/>
-            <a:ext cx="1688531" cy="548640"/>
-          </a:xfrm>
-          <a:prstGeom prst="rect">
-            <a:avLst/>
-          </a:prstGeom>
-          <a:noFill/>
-          <a:ln/>
-        </p:spPr>
-        <p:txBody>
-          <a:bodyPr wrap="square" lIns="0" tIns="0" rIns="0" bIns="0" rtlCol="0" anchor="t"/>
-          <a:lstStyle/>
-          <a:p>
-            <a:pPr algn="ctr" indent="0" marL="0">
-              <a:lnSpc>
-                <a:spcPct val="115000"/>
-              </a:lnSpc>
-              <a:buNone/>
-            </a:pPr>
-            <a:r>
-              <a:rPr lang="en-US" sz="1250" dirty="0">
-                <a:solidFill>
-                  <a:srgbClr val="1D1D1F"/>
-                </a:solidFill>
-                <a:latin typeface="Pretendard SemiBold" pitchFamily="34" charset="0"/>
-                <a:ea typeface="Pretendard SemiBold" pitchFamily="34" charset="-122"/>
-                <a:cs typeface="Pretendard SemiBold" pitchFamily="34" charset="-120"/>
-              </a:rPr>
-              <a:t>검증</a:t>
-            </a:r>
-            <a:endParaRPr lang="en-US" sz="1250" dirty="0"/>
-          </a:p>
-        </p:txBody>
-      </p:sp>
-      <p:sp>
-        <p:nvSpPr>
-          <p:cNvPr id="24" name="Text 22"/>
-          <p:cNvSpPr/>
-          <p:nvPr/>
-        </p:nvSpPr>
-        <p:spPr>
-          <a:xfrm>
-            <a:off x="6141568" y="4526280"/>
-            <a:ext cx="1688531" cy="274320"/>
-          </a:xfrm>
-          <a:prstGeom prst="rect">
-            <a:avLst/>
-          </a:prstGeom>
-          <a:noFill/>
-          <a:ln/>
-        </p:spPr>
-        <p:txBody>
-          <a:bodyPr wrap="square" lIns="0" tIns="0" rIns="0" bIns="0" rtlCol="0" anchor="t"/>
-          <a:lstStyle/>
-          <a:p>
-            <a:pPr algn="ctr" indent="0" marL="0">
-              <a:lnSpc>
-                <a:spcPct val="130000"/>
-              </a:lnSpc>
-              <a:buNone/>
-            </a:pPr>
-            <a:r>
-              <a:rPr lang="en-US" sz="1200" b="1" dirty="0">
-                <a:solidFill>
-                  <a:srgbClr val="6C4CFF"/>
-                </a:solidFill>
-                <a:latin typeface="Pretendard" pitchFamily="34" charset="0"/>
-                <a:ea typeface="Pretendard" pitchFamily="34" charset="-122"/>
-                <a:cs typeface="Pretendard" pitchFamily="34" charset="-120"/>
-              </a:rPr>
-              <a:t>10분</a:t>
-            </a:r>
-            <a:endParaRPr lang="en-US" sz="1200" dirty="0"/>
-          </a:p>
-        </p:txBody>
-      </p:sp>
-      <p:sp>
-        <p:nvSpPr>
-          <p:cNvPr id="25" name="Shape 23"/>
-          <p:cNvSpPr/>
-          <p:nvPr/>
-        </p:nvSpPr>
-        <p:spPr>
-          <a:xfrm>
-            <a:off x="8537204" y="3291840"/>
-            <a:ext cx="457200" cy="457200"/>
-          </a:xfrm>
-          <a:prstGeom prst="ellipse">
-            <a:avLst/>
-          </a:prstGeom>
-          <a:solidFill>
-            <a:srgbClr val="6C4CFF"/>
-          </a:solidFill>
-          <a:ln/>
-        </p:spPr>
-      </p:sp>
-      <p:sp>
-        <p:nvSpPr>
-          <p:cNvPr id="26" name="Text 24"/>
-          <p:cNvSpPr/>
-          <p:nvPr/>
-        </p:nvSpPr>
-        <p:spPr>
-          <a:xfrm>
-            <a:off x="8537204" y="3291840"/>
-            <a:ext cx="457200" cy="457200"/>
-          </a:xfrm>
-          <a:prstGeom prst="rect">
-            <a:avLst/>
-          </a:prstGeom>
-          <a:noFill/>
-          <a:ln/>
-        </p:spPr>
-        <p:txBody>
-          <a:bodyPr wrap="square" lIns="0" tIns="0" rIns="0" bIns="0" rtlCol="0" anchor="ctr"/>
-          <a:lstStyle/>
-          <a:p>
-            <a:pPr algn="ctr" indent="0" marL="0">
-              <a:buNone/>
-            </a:pPr>
-            <a:r>
-              <a:rPr lang="en-US" sz="1300" b="1" dirty="0">
-                <a:solidFill>
-                  <a:srgbClr val="FFFFFF"/>
-                </a:solidFill>
-                <a:latin typeface="Pretendard" pitchFamily="34" charset="0"/>
-                <a:ea typeface="Pretendard" pitchFamily="34" charset="-122"/>
-                <a:cs typeface="Pretendard" pitchFamily="34" charset="-120"/>
-              </a:rPr>
-              <a:t>5</a:t>
-            </a:r>
-            <a:endParaRPr lang="en-US" sz="1300" dirty="0"/>
-          </a:p>
-        </p:txBody>
-      </p:sp>
-      <p:sp>
-        <p:nvSpPr>
-          <p:cNvPr id="27" name="Text 25"/>
-          <p:cNvSpPr/>
-          <p:nvPr/>
-        </p:nvSpPr>
-        <p:spPr>
-          <a:xfrm>
-            <a:off x="7921539" y="3977640"/>
-            <a:ext cx="1688531" cy="548640"/>
-          </a:xfrm>
-          <a:prstGeom prst="rect">
-            <a:avLst/>
-          </a:prstGeom>
-          <a:noFill/>
-          <a:ln/>
-        </p:spPr>
-        <p:txBody>
-          <a:bodyPr wrap="square" lIns="0" tIns="0" rIns="0" bIns="0" rtlCol="0" anchor="t"/>
-          <a:lstStyle/>
-          <a:p>
-            <a:pPr algn="ctr" indent="0" marL="0">
-              <a:lnSpc>
-                <a:spcPct val="115000"/>
-              </a:lnSpc>
-              <a:buNone/>
-            </a:pPr>
-            <a:r>
-              <a:rPr lang="en-US" sz="1250" dirty="0">
-                <a:solidFill>
-                  <a:srgbClr val="1D1D1F"/>
-                </a:solidFill>
-                <a:latin typeface="Pretendard SemiBold" pitchFamily="34" charset="0"/>
-                <a:ea typeface="Pretendard SemiBold" pitchFamily="34" charset="-122"/>
-                <a:cs typeface="Pretendard SemiBold" pitchFamily="34" charset="-120"/>
-              </a:rPr>
-              <a:t>확산 + 스킬</a:t>
-            </a:r>
-            <a:endParaRPr lang="en-US" sz="1250" dirty="0"/>
-          </a:p>
-        </p:txBody>
-      </p:sp>
-      <p:sp>
-        <p:nvSpPr>
-          <p:cNvPr id="28" name="Text 26"/>
-          <p:cNvSpPr/>
-          <p:nvPr/>
-        </p:nvSpPr>
-        <p:spPr>
-          <a:xfrm>
-            <a:off x="7921539" y="4526280"/>
-            <a:ext cx="1688531" cy="274320"/>
-          </a:xfrm>
-          <a:prstGeom prst="rect">
-            <a:avLst/>
-          </a:prstGeom>
-          <a:noFill/>
-          <a:ln/>
-        </p:spPr>
-        <p:txBody>
-          <a:bodyPr wrap="square" lIns="0" tIns="0" rIns="0" bIns="0" rtlCol="0" anchor="t"/>
-          <a:lstStyle/>
-          <a:p>
-            <a:pPr algn="ctr" indent="0" marL="0">
-              <a:lnSpc>
-                <a:spcPct val="130000"/>
-              </a:lnSpc>
-              <a:buNone/>
-            </a:pPr>
-            <a:r>
-              <a:rPr lang="en-US" sz="1200" b="1" dirty="0">
-                <a:solidFill>
-                  <a:srgbClr val="6C4CFF"/>
-                </a:solidFill>
-                <a:latin typeface="Pretendard" pitchFamily="34" charset="0"/>
-                <a:ea typeface="Pretendard" pitchFamily="34" charset="-122"/>
-                <a:cs typeface="Pretendard" pitchFamily="34" charset="-120"/>
-              </a:rPr>
-              <a:t>이후</a:t>
-            </a:r>
-            <a:endParaRPr lang="en-US" sz="1200" dirty="0"/>
-          </a:p>
-        </p:txBody>
-      </p:sp>
-      <p:sp>
-        <p:nvSpPr>
-          <p:cNvPr id="29" name="Shape 27"/>
-          <p:cNvSpPr/>
-          <p:nvPr/>
-        </p:nvSpPr>
-        <p:spPr>
-          <a:xfrm>
-            <a:off x="10317175" y="3291840"/>
-            <a:ext cx="457200" cy="457200"/>
-          </a:xfrm>
-          <a:prstGeom prst="ellipse">
-            <a:avLst/>
-          </a:prstGeom>
-          <a:solidFill>
-            <a:srgbClr val="6C4CFF"/>
-          </a:solidFill>
-          <a:ln/>
-        </p:spPr>
-      </p:sp>
-      <p:sp>
-        <p:nvSpPr>
-          <p:cNvPr id="30" name="Text 28"/>
-          <p:cNvSpPr/>
-          <p:nvPr/>
-        </p:nvSpPr>
-        <p:spPr>
-          <a:xfrm>
-            <a:off x="10317175" y="3291840"/>
-            <a:ext cx="457200" cy="457200"/>
-          </a:xfrm>
-          <a:prstGeom prst="rect">
-            <a:avLst/>
-          </a:prstGeom>
-          <a:noFill/>
-          <a:ln/>
-        </p:spPr>
-        <p:txBody>
-          <a:bodyPr wrap="square" lIns="0" tIns="0" rIns="0" bIns="0" rtlCol="0" anchor="ctr"/>
-          <a:lstStyle/>
-          <a:p>
-            <a:pPr algn="ctr" indent="0" marL="0">
-              <a:buNone/>
-            </a:pPr>
-            <a:r>
-              <a:rPr lang="en-US" sz="1300" b="1" dirty="0">
-                <a:solidFill>
-                  <a:srgbClr val="FFFFFF"/>
-                </a:solidFill>
-                <a:latin typeface="Pretendard" pitchFamily="34" charset="0"/>
-                <a:ea typeface="Pretendard" pitchFamily="34" charset="-122"/>
-                <a:cs typeface="Pretendard" pitchFamily="34" charset="-120"/>
-              </a:rPr>
-              <a:t>6</a:t>
-            </a:r>
-            <a:endParaRPr lang="en-US" sz="1300" dirty="0"/>
-          </a:p>
-        </p:txBody>
-      </p:sp>
-      <p:sp>
-        <p:nvSpPr>
-          <p:cNvPr id="31" name="Text 29"/>
-          <p:cNvSpPr/>
-          <p:nvPr/>
-        </p:nvSpPr>
-        <p:spPr>
-          <a:xfrm>
-            <a:off x="9701510" y="3977640"/>
-            <a:ext cx="1688531" cy="548640"/>
-          </a:xfrm>
-          <a:prstGeom prst="rect">
-            <a:avLst/>
-          </a:prstGeom>
-          <a:noFill/>
-          <a:ln/>
-        </p:spPr>
-        <p:txBody>
-          <a:bodyPr wrap="square" lIns="0" tIns="0" rIns="0" bIns="0" rtlCol="0" anchor="t"/>
-          <a:lstStyle/>
-          <a:p>
-            <a:pPr algn="ctr" indent="0" marL="0">
-              <a:lnSpc>
-                <a:spcPct val="115000"/>
-              </a:lnSpc>
-              <a:buNone/>
-            </a:pPr>
-            <a:r>
-              <a:rPr lang="en-US" sz="1250" dirty="0">
-                <a:solidFill>
-                  <a:srgbClr val="1D1D1F"/>
-                </a:solidFill>
-                <a:latin typeface="Pretendard SemiBold" pitchFamily="34" charset="0"/>
-                <a:ea typeface="Pretendard SemiBold" pitchFamily="34" charset="-122"/>
-                <a:cs typeface="Pretendard SemiBold" pitchFamily="34" charset="-120"/>
-              </a:rPr>
-              <a:t>플러그인 배포</a:t>
-            </a:r>
-            <a:endParaRPr lang="en-US" sz="1250" dirty="0"/>
-          </a:p>
-        </p:txBody>
-      </p:sp>
-      <p:sp>
-        <p:nvSpPr>
-          <p:cNvPr id="32" name="Text 30"/>
-          <p:cNvSpPr/>
-          <p:nvPr/>
-        </p:nvSpPr>
-        <p:spPr>
-          <a:xfrm>
-            <a:off x="9701510" y="4526280"/>
-            <a:ext cx="1688531" cy="274320"/>
-          </a:xfrm>
-          <a:prstGeom prst="rect">
-            <a:avLst/>
-          </a:prstGeom>
-          <a:noFill/>
-          <a:ln/>
-        </p:spPr>
-        <p:txBody>
-          <a:bodyPr wrap="square" lIns="0" tIns="0" rIns="0" bIns="0" rtlCol="0" anchor="t"/>
-          <a:lstStyle/>
-          <a:p>
-            <a:pPr algn="ctr" indent="0" marL="0">
-              <a:lnSpc>
-                <a:spcPct val="130000"/>
-              </a:lnSpc>
-              <a:buNone/>
-            </a:pPr>
-            <a:r>
-              <a:rPr lang="en-US" sz="1200" b="1" dirty="0">
-                <a:solidFill>
-                  <a:srgbClr val="6C4CFF"/>
-                </a:solidFill>
-                <a:latin typeface="Pretendard" pitchFamily="34" charset="0"/>
-                <a:ea typeface="Pretendard" pitchFamily="34" charset="-122"/>
-                <a:cs typeface="Pretendard" pitchFamily="34" charset="-120"/>
-              </a:rPr>
-              <a:t>이후</a:t>
-            </a:r>
-            <a:endParaRPr lang="en-US" sz="1200" dirty="0"/>
-          </a:p>
-        </p:txBody>
-      </p:sp>
-      <p:sp>
-        <p:nvSpPr>
-          <p:cNvPr id="33" name="Shape 31"/>
-          <p:cNvSpPr/>
-          <p:nvPr/>
-        </p:nvSpPr>
-        <p:spPr>
-          <a:xfrm>
-            <a:off x="777240" y="5029200"/>
-            <a:ext cx="10637215" cy="868680"/>
-          </a:xfrm>
-          <a:prstGeom prst="roundRect">
-            <a:avLst>
-              <a:gd name="adj" fmla="val 10526"/>
-            </a:avLst>
-          </a:prstGeom>
-          <a:solidFill>
-            <a:srgbClr val="F5F5F7"/>
-          </a:solidFill>
-          <a:ln w="12700">
+          <a:ln w="15875">
             <a:solidFill>
               <a:srgbClr val="E5E7EB"/>
             </a:solidFill>
@@ -8602,23 +7675,82 @@
       </p:sp>
       <p:sp>
         <p:nvSpPr>
-          <p:cNvPr id="34" name="Text 32"/>
-          <p:cNvSpPr/>
-          <p:nvPr/>
-        </p:nvSpPr>
-        <p:spPr>
-          <a:xfrm>
-            <a:off x="1051560" y="5193792"/>
-            <a:ext cx="3657600" cy="274320"/>
-          </a:xfrm>
-          <a:prstGeom prst="rect">
-            <a:avLst/>
-          </a:prstGeom>
-          <a:noFill/>
-          <a:ln/>
-        </p:spPr>
-        <p:txBody>
-          <a:bodyPr wrap="square" lIns="0" tIns="0" rIns="0" bIns="0" rtlCol="0" anchor="t"/>
+          <p:cNvPr id="9" name="Shape 7"/>
+          <p:cNvSpPr/>
+          <p:nvPr/>
+        </p:nvSpPr>
+        <p:spPr>
+          <a:xfrm>
+            <a:off x="804672" y="2286000"/>
+            <a:ext cx="402336" cy="402336"/>
+          </a:xfrm>
+          <a:prstGeom prst="ellipse">
+            <a:avLst/>
+          </a:prstGeom>
+          <a:solidFill>
+            <a:srgbClr val="6C4CFF"/>
+          </a:solidFill>
+          <a:ln/>
+        </p:spPr>
+      </p:sp>
+      <p:sp>
+        <p:nvSpPr>
+          <p:cNvPr id="10" name="Text 8"/>
+          <p:cNvSpPr/>
+          <p:nvPr/>
+        </p:nvSpPr>
+        <p:spPr>
+          <a:xfrm>
+            <a:off x="804672" y="2286000"/>
+            <a:ext cx="402336" cy="402336"/>
+          </a:xfrm>
+          <a:prstGeom prst="rect">
+            <a:avLst/>
+          </a:prstGeom>
+          <a:noFill/>
+          <a:ln/>
+        </p:spPr>
+        <p:txBody>
+          <a:bodyPr wrap="square" lIns="0" tIns="0" rIns="0" bIns="0" rtlCol="0" anchor="ctr"/>
+          <a:lstStyle/>
+          <a:p>
+            <a:pPr algn="ctr" indent="0" marL="0">
+              <a:buNone/>
+            </a:pPr>
+            <a:r>
+              <a:rPr lang="en-US" sz="1300" b="1" dirty="0">
+                <a:solidFill>
+                  <a:srgbClr val="FFFFFF"/>
+                </a:solidFill>
+                <a:latin typeface="Pretendard" pitchFamily="34" charset="0"/>
+                <a:ea typeface="Pretendard" pitchFamily="34" charset="-122"/>
+                <a:cs typeface="Pretendard" pitchFamily="34" charset="-120"/>
+              </a:rPr>
+              <a:t>1</a:t>
+            </a:r>
+            <a:endParaRPr lang="en-US" sz="1300" dirty="0"/>
+          </a:p>
+        </p:txBody>
+      </p:sp>
+      <p:sp>
+        <p:nvSpPr>
+          <p:cNvPr id="11" name="Text 9"/>
+          <p:cNvSpPr/>
+          <p:nvPr/>
+        </p:nvSpPr>
+        <p:spPr>
+          <a:xfrm>
+            <a:off x="1435608" y="2286000"/>
+            <a:ext cx="4114800" cy="292608"/>
+          </a:xfrm>
+          <a:prstGeom prst="rect">
+            <a:avLst/>
+          </a:prstGeom>
+          <a:noFill/>
+          <a:ln/>
+        </p:spPr>
+        <p:txBody>
+          <a:bodyPr wrap="square" lIns="0" tIns="0" rIns="0" bIns="0" rtlCol="0" anchor="ctr"/>
           <a:lstStyle/>
           <a:p>
             <a:pPr algn="l" indent="0" marL="0">
@@ -8628,39 +7760,39 @@
               <a:buNone/>
             </a:pPr>
             <a:r>
-              <a:rPr lang="en-US" sz="1300" dirty="0">
-                <a:solidFill>
-                  <a:srgbClr val="6C4CFF"/>
+              <a:rPr lang="en-US" sz="1450" dirty="0">
+                <a:solidFill>
+                  <a:srgbClr val="1D1D1F"/>
                 </a:solidFill>
                 <a:latin typeface="Pretendard SemiBold" pitchFamily="34" charset="0"/>
                 <a:ea typeface="Pretendard SemiBold" pitchFamily="34" charset="-122"/>
                 <a:cs typeface="Pretendard SemiBold" pitchFamily="34" charset="-120"/>
               </a:rPr>
-              <a:t>첫 볼트 = cdbd-templates</a:t>
-            </a:r>
-            <a:endParaRPr lang="en-US" sz="1300" dirty="0"/>
-          </a:p>
-        </p:txBody>
-      </p:sp>
-      <p:sp>
-        <p:nvSpPr>
-          <p:cNvPr id="35" name="Text 33"/>
-          <p:cNvSpPr/>
-          <p:nvPr/>
-        </p:nvSpPr>
-        <p:spPr>
-          <a:xfrm>
-            <a:off x="1051560" y="5504688"/>
-            <a:ext cx="10088575" cy="365760"/>
-          </a:xfrm>
-          <a:prstGeom prst="rect">
-            <a:avLst/>
-          </a:prstGeom>
-          <a:noFill/>
-          <a:ln/>
-        </p:spPr>
-        <p:txBody>
-          <a:bodyPr wrap="square" lIns="0" tIns="0" rIns="0" bIns="0" rtlCol="0" anchor="t"/>
+              <a:t>분류 확정</a:t>
+            </a:r>
+            <a:endParaRPr lang="en-US" sz="1450" dirty="0"/>
+          </a:p>
+        </p:txBody>
+      </p:sp>
+      <p:sp>
+        <p:nvSpPr>
+          <p:cNvPr id="12" name="Text 10"/>
+          <p:cNvSpPr/>
+          <p:nvPr/>
+        </p:nvSpPr>
+        <p:spPr>
+          <a:xfrm>
+            <a:off x="1435608" y="2596896"/>
+            <a:ext cx="8351215" cy="274320"/>
+          </a:xfrm>
+          <a:prstGeom prst="rect">
+            <a:avLst/>
+          </a:prstGeom>
+          <a:noFill/>
+          <a:ln/>
+        </p:spPr>
+        <p:txBody>
+          <a:bodyPr wrap="square" lIns="0" tIns="0" rIns="0" bIns="0" rtlCol="0" anchor="ctr"/>
           <a:lstStyle/>
           <a:p>
             <a:pPr algn="l" indent="0" marL="0">
@@ -8670,7 +7802,7 @@
               <a:buNone/>
             </a:pPr>
             <a:r>
-              <a:rPr lang="en-US" sz="1200" dirty="0">
+              <a:rPr lang="en-US" sz="1150" dirty="0">
                 <a:solidFill>
                   <a:srgbClr val="55555A"/>
                 </a:solidFill>
@@ -8678,7 +7810,1106 @@
                 <a:ea typeface="Pretendard" pitchFamily="34" charset="-122"/>
                 <a:cs typeface="Pretendard" pitchFamily="34" charset="-120"/>
               </a:rPr>
-              <a:t>“이 템플릿 상세페이지 만들어줘”로 검증 → Claude가 경로 문서를 보고 올바른 파일을 여는지 확인. 통과하면 나머지 4볼트로 같은 문서를 복제합니다.</a:t>
+              <a:t>대분류(대시보드 · 에디터)를 합의하고 첫 볼트를 고른다</a:t>
+            </a:r>
+            <a:endParaRPr lang="en-US" sz="1150" dirty="0"/>
+          </a:p>
+        </p:txBody>
+      </p:sp>
+      <p:sp>
+        <p:nvSpPr>
+          <p:cNvPr id="13" name="Shape 11"/>
+          <p:cNvSpPr/>
+          <p:nvPr/>
+        </p:nvSpPr>
+        <p:spPr>
+          <a:xfrm>
+            <a:off x="10042855" y="2304288"/>
+            <a:ext cx="1371600" cy="384048"/>
+          </a:xfrm>
+          <a:prstGeom prst="roundRect">
+            <a:avLst>
+              <a:gd name="adj" fmla="val 50000"/>
+            </a:avLst>
+          </a:prstGeom>
+          <a:solidFill>
+            <a:srgbClr val="EEEAFB"/>
+          </a:solidFill>
+          <a:ln/>
+        </p:spPr>
+      </p:sp>
+      <p:sp>
+        <p:nvSpPr>
+          <p:cNvPr id="14" name="Text 12"/>
+          <p:cNvSpPr/>
+          <p:nvPr/>
+        </p:nvSpPr>
+        <p:spPr>
+          <a:xfrm>
+            <a:off x="10042855" y="2304288"/>
+            <a:ext cx="1371600" cy="384048"/>
+          </a:xfrm>
+          <a:prstGeom prst="rect">
+            <a:avLst/>
+          </a:prstGeom>
+          <a:noFill/>
+          <a:ln/>
+        </p:spPr>
+        <p:txBody>
+          <a:bodyPr wrap="square" lIns="0" tIns="0" rIns="0" bIns="0" rtlCol="0" anchor="ctr"/>
+          <a:lstStyle/>
+          <a:p>
+            <a:pPr algn="ctr" indent="0" marL="0">
+              <a:lnSpc>
+                <a:spcPct val="130000"/>
+              </a:lnSpc>
+              <a:buNone/>
+            </a:pPr>
+            <a:r>
+              <a:rPr lang="en-US" sz="1200" dirty="0">
+                <a:solidFill>
+                  <a:srgbClr val="6C4CFF"/>
+                </a:solidFill>
+                <a:latin typeface="Pretendard SemiBold" pitchFamily="34" charset="0"/>
+                <a:ea typeface="Pretendard SemiBold" pitchFamily="34" charset="-122"/>
+                <a:cs typeface="Pretendard SemiBold" pitchFamily="34" charset="-120"/>
+              </a:rPr>
+              <a:t>오늘</a:t>
+            </a:r>
+            <a:endParaRPr lang="en-US" sz="1200" dirty="0"/>
+          </a:p>
+        </p:txBody>
+      </p:sp>
+      <p:sp>
+        <p:nvSpPr>
+          <p:cNvPr id="15" name="Shape 13"/>
+          <p:cNvSpPr/>
+          <p:nvPr/>
+        </p:nvSpPr>
+        <p:spPr>
+          <a:xfrm>
+            <a:off x="804672" y="2907792"/>
+            <a:ext cx="402336" cy="402336"/>
+          </a:xfrm>
+          <a:prstGeom prst="ellipse">
+            <a:avLst/>
+          </a:prstGeom>
+          <a:solidFill>
+            <a:srgbClr val="6C4CFF"/>
+          </a:solidFill>
+          <a:ln/>
+        </p:spPr>
+      </p:sp>
+      <p:sp>
+        <p:nvSpPr>
+          <p:cNvPr id="16" name="Text 14"/>
+          <p:cNvSpPr/>
+          <p:nvPr/>
+        </p:nvSpPr>
+        <p:spPr>
+          <a:xfrm>
+            <a:off x="804672" y="2907792"/>
+            <a:ext cx="402336" cy="402336"/>
+          </a:xfrm>
+          <a:prstGeom prst="rect">
+            <a:avLst/>
+          </a:prstGeom>
+          <a:noFill/>
+          <a:ln/>
+        </p:spPr>
+        <p:txBody>
+          <a:bodyPr wrap="square" lIns="0" tIns="0" rIns="0" bIns="0" rtlCol="0" anchor="ctr"/>
+          <a:lstStyle/>
+          <a:p>
+            <a:pPr algn="ctr" indent="0" marL="0">
+              <a:buNone/>
+            </a:pPr>
+            <a:r>
+              <a:rPr lang="en-US" sz="1300" b="1" dirty="0">
+                <a:solidFill>
+                  <a:srgbClr val="FFFFFF"/>
+                </a:solidFill>
+                <a:latin typeface="Pretendard" pitchFamily="34" charset="0"/>
+                <a:ea typeface="Pretendard" pitchFamily="34" charset="-122"/>
+                <a:cs typeface="Pretendard" pitchFamily="34" charset="-120"/>
+              </a:rPr>
+              <a:t>2</a:t>
+            </a:r>
+            <a:endParaRPr lang="en-US" sz="1300" dirty="0"/>
+          </a:p>
+        </p:txBody>
+      </p:sp>
+      <p:sp>
+        <p:nvSpPr>
+          <p:cNvPr id="17" name="Text 15"/>
+          <p:cNvSpPr/>
+          <p:nvPr/>
+        </p:nvSpPr>
+        <p:spPr>
+          <a:xfrm>
+            <a:off x="1435608" y="2907792"/>
+            <a:ext cx="4114800" cy="292608"/>
+          </a:xfrm>
+          <a:prstGeom prst="rect">
+            <a:avLst/>
+          </a:prstGeom>
+          <a:noFill/>
+          <a:ln/>
+        </p:spPr>
+        <p:txBody>
+          <a:bodyPr wrap="square" lIns="0" tIns="0" rIns="0" bIns="0" rtlCol="0" anchor="ctr"/>
+          <a:lstStyle/>
+          <a:p>
+            <a:pPr algn="l" indent="0" marL="0">
+              <a:lnSpc>
+                <a:spcPct val="130000"/>
+              </a:lnSpc>
+              <a:buNone/>
+            </a:pPr>
+            <a:r>
+              <a:rPr lang="en-US" sz="1450" dirty="0">
+                <a:solidFill>
+                  <a:srgbClr val="1D1D1F"/>
+                </a:solidFill>
+                <a:latin typeface="Pretendard SemiBold" pitchFamily="34" charset="0"/>
+                <a:ea typeface="Pretendard SemiBold" pitchFamily="34" charset="-122"/>
+                <a:cs typeface="Pretendard SemiBold" pitchFamily="34" charset="-120"/>
+              </a:rPr>
+              <a:t>경로 문서 작성</a:t>
+            </a:r>
+            <a:endParaRPr lang="en-US" sz="1450" dirty="0"/>
+          </a:p>
+        </p:txBody>
+      </p:sp>
+      <p:sp>
+        <p:nvSpPr>
+          <p:cNvPr id="18" name="Text 16"/>
+          <p:cNvSpPr/>
+          <p:nvPr/>
+        </p:nvSpPr>
+        <p:spPr>
+          <a:xfrm>
+            <a:off x="1435608" y="3218688"/>
+            <a:ext cx="8351215" cy="274320"/>
+          </a:xfrm>
+          <a:prstGeom prst="rect">
+            <a:avLst/>
+          </a:prstGeom>
+          <a:noFill/>
+          <a:ln/>
+        </p:spPr>
+        <p:txBody>
+          <a:bodyPr wrap="square" lIns="0" tIns="0" rIns="0" bIns="0" rtlCol="0" anchor="ctr"/>
+          <a:lstStyle/>
+          <a:p>
+            <a:pPr algn="l" indent="0" marL="0">
+              <a:lnSpc>
+                <a:spcPct val="130000"/>
+              </a:lnSpc>
+              <a:buNone/>
+            </a:pPr>
+            <a:r>
+              <a:rPr lang="en-US" sz="1150" dirty="0">
+                <a:solidFill>
+                  <a:srgbClr val="55555A"/>
+                </a:solidFill>
+                <a:latin typeface="Pretendard" pitchFamily="34" charset="0"/>
+                <a:ea typeface="Pretendard" pitchFamily="34" charset="-122"/>
+                <a:cs typeface="Pretendard" pitchFamily="34" charset="-120"/>
+              </a:rPr>
+              <a:t>그 볼트의 CdBd 기능 → 정확한 파일·섹션을 매핑하고 경로를 검증한다</a:t>
+            </a:r>
+            <a:endParaRPr lang="en-US" sz="1150" dirty="0"/>
+          </a:p>
+        </p:txBody>
+      </p:sp>
+      <p:sp>
+        <p:nvSpPr>
+          <p:cNvPr id="19" name="Shape 17"/>
+          <p:cNvSpPr/>
+          <p:nvPr/>
+        </p:nvSpPr>
+        <p:spPr>
+          <a:xfrm>
+            <a:off x="10042855" y="2926080"/>
+            <a:ext cx="1371600" cy="384048"/>
+          </a:xfrm>
+          <a:prstGeom prst="roundRect">
+            <a:avLst>
+              <a:gd name="adj" fmla="val 50000"/>
+            </a:avLst>
+          </a:prstGeom>
+          <a:solidFill>
+            <a:srgbClr val="EEEAFB"/>
+          </a:solidFill>
+          <a:ln/>
+        </p:spPr>
+      </p:sp>
+      <p:sp>
+        <p:nvSpPr>
+          <p:cNvPr id="20" name="Text 18"/>
+          <p:cNvSpPr/>
+          <p:nvPr/>
+        </p:nvSpPr>
+        <p:spPr>
+          <a:xfrm>
+            <a:off x="10042855" y="2926080"/>
+            <a:ext cx="1371600" cy="384048"/>
+          </a:xfrm>
+          <a:prstGeom prst="rect">
+            <a:avLst/>
+          </a:prstGeom>
+          <a:noFill/>
+          <a:ln/>
+        </p:spPr>
+        <p:txBody>
+          <a:bodyPr wrap="square" lIns="0" tIns="0" rIns="0" bIns="0" rtlCol="0" anchor="ctr"/>
+          <a:lstStyle/>
+          <a:p>
+            <a:pPr algn="ctr" indent="0" marL="0">
+              <a:lnSpc>
+                <a:spcPct val="130000"/>
+              </a:lnSpc>
+              <a:buNone/>
+            </a:pPr>
+            <a:r>
+              <a:rPr lang="en-US" sz="1200" dirty="0">
+                <a:solidFill>
+                  <a:srgbClr val="6C4CFF"/>
+                </a:solidFill>
+                <a:latin typeface="Pretendard SemiBold" pitchFamily="34" charset="0"/>
+                <a:ea typeface="Pretendard SemiBold" pitchFamily="34" charset="-122"/>
+                <a:cs typeface="Pretendard SemiBold" pitchFamily="34" charset="-120"/>
+              </a:rPr>
+              <a:t>0.5일</a:t>
+            </a:r>
+            <a:endParaRPr lang="en-US" sz="1200" dirty="0"/>
+          </a:p>
+        </p:txBody>
+      </p:sp>
+      <p:sp>
+        <p:nvSpPr>
+          <p:cNvPr id="21" name="Shape 19"/>
+          <p:cNvSpPr/>
+          <p:nvPr/>
+        </p:nvSpPr>
+        <p:spPr>
+          <a:xfrm>
+            <a:off x="804672" y="3529584"/>
+            <a:ext cx="402336" cy="402336"/>
+          </a:xfrm>
+          <a:prstGeom prst="ellipse">
+            <a:avLst/>
+          </a:prstGeom>
+          <a:solidFill>
+            <a:srgbClr val="6C4CFF"/>
+          </a:solidFill>
+          <a:ln/>
+        </p:spPr>
+      </p:sp>
+      <p:sp>
+        <p:nvSpPr>
+          <p:cNvPr id="22" name="Text 20"/>
+          <p:cNvSpPr/>
+          <p:nvPr/>
+        </p:nvSpPr>
+        <p:spPr>
+          <a:xfrm>
+            <a:off x="804672" y="3529584"/>
+            <a:ext cx="402336" cy="402336"/>
+          </a:xfrm>
+          <a:prstGeom prst="rect">
+            <a:avLst/>
+          </a:prstGeom>
+          <a:noFill/>
+          <a:ln/>
+        </p:spPr>
+        <p:txBody>
+          <a:bodyPr wrap="square" lIns="0" tIns="0" rIns="0" bIns="0" rtlCol="0" anchor="ctr"/>
+          <a:lstStyle/>
+          <a:p>
+            <a:pPr algn="ctr" indent="0" marL="0">
+              <a:buNone/>
+            </a:pPr>
+            <a:r>
+              <a:rPr lang="en-US" sz="1300" b="1" dirty="0">
+                <a:solidFill>
+                  <a:srgbClr val="FFFFFF"/>
+                </a:solidFill>
+                <a:latin typeface="Pretendard" pitchFamily="34" charset="0"/>
+                <a:ea typeface="Pretendard" pitchFamily="34" charset="-122"/>
+                <a:cs typeface="Pretendard" pitchFamily="34" charset="-120"/>
+              </a:rPr>
+              <a:t>3</a:t>
+            </a:r>
+            <a:endParaRPr lang="en-US" sz="1300" dirty="0"/>
+          </a:p>
+        </p:txBody>
+      </p:sp>
+      <p:sp>
+        <p:nvSpPr>
+          <p:cNvPr id="23" name="Text 21"/>
+          <p:cNvSpPr/>
+          <p:nvPr/>
+        </p:nvSpPr>
+        <p:spPr>
+          <a:xfrm>
+            <a:off x="1435608" y="3529584"/>
+            <a:ext cx="4114800" cy="292608"/>
+          </a:xfrm>
+          <a:prstGeom prst="rect">
+            <a:avLst/>
+          </a:prstGeom>
+          <a:noFill/>
+          <a:ln/>
+        </p:spPr>
+        <p:txBody>
+          <a:bodyPr wrap="square" lIns="0" tIns="0" rIns="0" bIns="0" rtlCol="0" anchor="ctr"/>
+          <a:lstStyle/>
+          <a:p>
+            <a:pPr algn="l" indent="0" marL="0">
+              <a:lnSpc>
+                <a:spcPct val="130000"/>
+              </a:lnSpc>
+              <a:buNone/>
+            </a:pPr>
+            <a:r>
+              <a:rPr lang="en-US" sz="1450" dirty="0">
+                <a:solidFill>
+                  <a:srgbClr val="1D1D1F"/>
+                </a:solidFill>
+                <a:latin typeface="Pretendard SemiBold" pitchFamily="34" charset="0"/>
+                <a:ea typeface="Pretendard SemiBold" pitchFamily="34" charset="-122"/>
+                <a:cs typeface="Pretendard SemiBold" pitchFamily="34" charset="-120"/>
+              </a:rPr>
+              <a:t>CLAUDE.md 연결</a:t>
+            </a:r>
+            <a:endParaRPr lang="en-US" sz="1450" dirty="0"/>
+          </a:p>
+        </p:txBody>
+      </p:sp>
+      <p:sp>
+        <p:nvSpPr>
+          <p:cNvPr id="24" name="Text 22"/>
+          <p:cNvSpPr/>
+          <p:nvPr/>
+        </p:nvSpPr>
+        <p:spPr>
+          <a:xfrm>
+            <a:off x="1435608" y="3840480"/>
+            <a:ext cx="8351215" cy="274320"/>
+          </a:xfrm>
+          <a:prstGeom prst="rect">
+            <a:avLst/>
+          </a:prstGeom>
+          <a:noFill/>
+          <a:ln/>
+        </p:spPr>
+        <p:txBody>
+          <a:bodyPr wrap="square" lIns="0" tIns="0" rIns="0" bIns="0" rtlCol="0" anchor="ctr"/>
+          <a:lstStyle/>
+          <a:p>
+            <a:pPr algn="l" indent="0" marL="0">
+              <a:lnSpc>
+                <a:spcPct val="130000"/>
+              </a:lnSpc>
+              <a:buNone/>
+            </a:pPr>
+            <a:r>
+              <a:rPr lang="en-US" sz="1150" dirty="0">
+                <a:solidFill>
+                  <a:srgbClr val="55555A"/>
+                </a:solidFill>
+                <a:latin typeface="Pretendard" pitchFamily="34" charset="0"/>
+                <a:ea typeface="Pretendard" pitchFamily="34" charset="-122"/>
+                <a:cs typeface="Pretendard" pitchFamily="34" charset="-120"/>
+              </a:rPr>
+              <a:t>그 볼트 CLAUDE.md 맨 위에 @_기능별 경로 가이드.md 한 줄을 넣는다</a:t>
+            </a:r>
+            <a:endParaRPr lang="en-US" sz="1150" dirty="0"/>
+          </a:p>
+        </p:txBody>
+      </p:sp>
+      <p:sp>
+        <p:nvSpPr>
+          <p:cNvPr id="25" name="Shape 23"/>
+          <p:cNvSpPr/>
+          <p:nvPr/>
+        </p:nvSpPr>
+        <p:spPr>
+          <a:xfrm>
+            <a:off x="10042855" y="3547872"/>
+            <a:ext cx="1371600" cy="384048"/>
+          </a:xfrm>
+          <a:prstGeom prst="roundRect">
+            <a:avLst>
+              <a:gd name="adj" fmla="val 50000"/>
+            </a:avLst>
+          </a:prstGeom>
+          <a:solidFill>
+            <a:srgbClr val="EEEAFB"/>
+          </a:solidFill>
+          <a:ln/>
+        </p:spPr>
+      </p:sp>
+      <p:sp>
+        <p:nvSpPr>
+          <p:cNvPr id="26" name="Text 24"/>
+          <p:cNvSpPr/>
+          <p:nvPr/>
+        </p:nvSpPr>
+        <p:spPr>
+          <a:xfrm>
+            <a:off x="10042855" y="3547872"/>
+            <a:ext cx="1371600" cy="384048"/>
+          </a:xfrm>
+          <a:prstGeom prst="rect">
+            <a:avLst/>
+          </a:prstGeom>
+          <a:noFill/>
+          <a:ln/>
+        </p:spPr>
+        <p:txBody>
+          <a:bodyPr wrap="square" lIns="0" tIns="0" rIns="0" bIns="0" rtlCol="0" anchor="ctr"/>
+          <a:lstStyle/>
+          <a:p>
+            <a:pPr algn="ctr" indent="0" marL="0">
+              <a:lnSpc>
+                <a:spcPct val="130000"/>
+              </a:lnSpc>
+              <a:buNone/>
+            </a:pPr>
+            <a:r>
+              <a:rPr lang="en-US" sz="1200" dirty="0">
+                <a:solidFill>
+                  <a:srgbClr val="6C4CFF"/>
+                </a:solidFill>
+                <a:latin typeface="Pretendard SemiBold" pitchFamily="34" charset="0"/>
+                <a:ea typeface="Pretendard SemiBold" pitchFamily="34" charset="-122"/>
+                <a:cs typeface="Pretendard SemiBold" pitchFamily="34" charset="-120"/>
+              </a:rPr>
+              <a:t>5분</a:t>
+            </a:r>
+            <a:endParaRPr lang="en-US" sz="1200" dirty="0"/>
+          </a:p>
+        </p:txBody>
+      </p:sp>
+      <p:sp>
+        <p:nvSpPr>
+          <p:cNvPr id="27" name="Shape 25"/>
+          <p:cNvSpPr/>
+          <p:nvPr/>
+        </p:nvSpPr>
+        <p:spPr>
+          <a:xfrm>
+            <a:off x="804672" y="4151376"/>
+            <a:ext cx="402336" cy="402336"/>
+          </a:xfrm>
+          <a:prstGeom prst="ellipse">
+            <a:avLst/>
+          </a:prstGeom>
+          <a:solidFill>
+            <a:srgbClr val="6C4CFF"/>
+          </a:solidFill>
+          <a:ln/>
+        </p:spPr>
+      </p:sp>
+      <p:sp>
+        <p:nvSpPr>
+          <p:cNvPr id="28" name="Text 26"/>
+          <p:cNvSpPr/>
+          <p:nvPr/>
+        </p:nvSpPr>
+        <p:spPr>
+          <a:xfrm>
+            <a:off x="804672" y="4151376"/>
+            <a:ext cx="402336" cy="402336"/>
+          </a:xfrm>
+          <a:prstGeom prst="rect">
+            <a:avLst/>
+          </a:prstGeom>
+          <a:noFill/>
+          <a:ln/>
+        </p:spPr>
+        <p:txBody>
+          <a:bodyPr wrap="square" lIns="0" tIns="0" rIns="0" bIns="0" rtlCol="0" anchor="ctr"/>
+          <a:lstStyle/>
+          <a:p>
+            <a:pPr algn="ctr" indent="0" marL="0">
+              <a:buNone/>
+            </a:pPr>
+            <a:r>
+              <a:rPr lang="en-US" sz="1300" b="1" dirty="0">
+                <a:solidFill>
+                  <a:srgbClr val="FFFFFF"/>
+                </a:solidFill>
+                <a:latin typeface="Pretendard" pitchFamily="34" charset="0"/>
+                <a:ea typeface="Pretendard" pitchFamily="34" charset="-122"/>
+                <a:cs typeface="Pretendard" pitchFamily="34" charset="-120"/>
+              </a:rPr>
+              <a:t>4</a:t>
+            </a:r>
+            <a:endParaRPr lang="en-US" sz="1300" dirty="0"/>
+          </a:p>
+        </p:txBody>
+      </p:sp>
+      <p:sp>
+        <p:nvSpPr>
+          <p:cNvPr id="29" name="Text 27"/>
+          <p:cNvSpPr/>
+          <p:nvPr/>
+        </p:nvSpPr>
+        <p:spPr>
+          <a:xfrm>
+            <a:off x="1435608" y="4151376"/>
+            <a:ext cx="4114800" cy="292608"/>
+          </a:xfrm>
+          <a:prstGeom prst="rect">
+            <a:avLst/>
+          </a:prstGeom>
+          <a:noFill/>
+          <a:ln/>
+        </p:spPr>
+        <p:txBody>
+          <a:bodyPr wrap="square" lIns="0" tIns="0" rIns="0" bIns="0" rtlCol="0" anchor="ctr"/>
+          <a:lstStyle/>
+          <a:p>
+            <a:pPr algn="l" indent="0" marL="0">
+              <a:lnSpc>
+                <a:spcPct val="130000"/>
+              </a:lnSpc>
+              <a:buNone/>
+            </a:pPr>
+            <a:r>
+              <a:rPr lang="en-US" sz="1450" dirty="0">
+                <a:solidFill>
+                  <a:srgbClr val="1D1D1F"/>
+                </a:solidFill>
+                <a:latin typeface="Pretendard SemiBold" pitchFamily="34" charset="0"/>
+                <a:ea typeface="Pretendard SemiBold" pitchFamily="34" charset="-122"/>
+                <a:cs typeface="Pretendard SemiBold" pitchFamily="34" charset="-120"/>
+              </a:rPr>
+              <a:t>검증</a:t>
+            </a:r>
+            <a:endParaRPr lang="en-US" sz="1450" dirty="0"/>
+          </a:p>
+        </p:txBody>
+      </p:sp>
+      <p:sp>
+        <p:nvSpPr>
+          <p:cNvPr id="30" name="Text 28"/>
+          <p:cNvSpPr/>
+          <p:nvPr/>
+        </p:nvSpPr>
+        <p:spPr>
+          <a:xfrm>
+            <a:off x="1435608" y="4462272"/>
+            <a:ext cx="8351215" cy="274320"/>
+          </a:xfrm>
+          <a:prstGeom prst="rect">
+            <a:avLst/>
+          </a:prstGeom>
+          <a:noFill/>
+          <a:ln/>
+        </p:spPr>
+        <p:txBody>
+          <a:bodyPr wrap="square" lIns="0" tIns="0" rIns="0" bIns="0" rtlCol="0" anchor="ctr"/>
+          <a:lstStyle/>
+          <a:p>
+            <a:pPr algn="l" indent="0" marL="0">
+              <a:lnSpc>
+                <a:spcPct val="130000"/>
+              </a:lnSpc>
+              <a:buNone/>
+            </a:pPr>
+            <a:r>
+              <a:rPr lang="en-US" sz="1150" dirty="0">
+                <a:solidFill>
+                  <a:srgbClr val="55555A"/>
+                </a:solidFill>
+                <a:latin typeface="Pretendard" pitchFamily="34" charset="0"/>
+                <a:ea typeface="Pretendard" pitchFamily="34" charset="-122"/>
+                <a:cs typeface="Pretendard" pitchFamily="34" charset="-120"/>
+              </a:rPr>
+              <a:t>“상품 카드 넣어줘” 등으로 Claude가 올바른 파일을 여는지 확인한다</a:t>
+            </a:r>
+            <a:endParaRPr lang="en-US" sz="1150" dirty="0"/>
+          </a:p>
+        </p:txBody>
+      </p:sp>
+      <p:sp>
+        <p:nvSpPr>
+          <p:cNvPr id="31" name="Shape 29"/>
+          <p:cNvSpPr/>
+          <p:nvPr/>
+        </p:nvSpPr>
+        <p:spPr>
+          <a:xfrm>
+            <a:off x="10042855" y="4169664"/>
+            <a:ext cx="1371600" cy="384048"/>
+          </a:xfrm>
+          <a:prstGeom prst="roundRect">
+            <a:avLst>
+              <a:gd name="adj" fmla="val 50000"/>
+            </a:avLst>
+          </a:prstGeom>
+          <a:solidFill>
+            <a:srgbClr val="EEEAFB"/>
+          </a:solidFill>
+          <a:ln/>
+        </p:spPr>
+      </p:sp>
+      <p:sp>
+        <p:nvSpPr>
+          <p:cNvPr id="32" name="Text 30"/>
+          <p:cNvSpPr/>
+          <p:nvPr/>
+        </p:nvSpPr>
+        <p:spPr>
+          <a:xfrm>
+            <a:off x="10042855" y="4169664"/>
+            <a:ext cx="1371600" cy="384048"/>
+          </a:xfrm>
+          <a:prstGeom prst="rect">
+            <a:avLst/>
+          </a:prstGeom>
+          <a:noFill/>
+          <a:ln/>
+        </p:spPr>
+        <p:txBody>
+          <a:bodyPr wrap="square" lIns="0" tIns="0" rIns="0" bIns="0" rtlCol="0" anchor="ctr"/>
+          <a:lstStyle/>
+          <a:p>
+            <a:pPr algn="ctr" indent="0" marL="0">
+              <a:lnSpc>
+                <a:spcPct val="130000"/>
+              </a:lnSpc>
+              <a:buNone/>
+            </a:pPr>
+            <a:r>
+              <a:rPr lang="en-US" sz="1200" dirty="0">
+                <a:solidFill>
+                  <a:srgbClr val="6C4CFF"/>
+                </a:solidFill>
+                <a:latin typeface="Pretendard SemiBold" pitchFamily="34" charset="0"/>
+                <a:ea typeface="Pretendard SemiBold" pitchFamily="34" charset="-122"/>
+                <a:cs typeface="Pretendard SemiBold" pitchFamily="34" charset="-120"/>
+              </a:rPr>
+              <a:t>10분</a:t>
+            </a:r>
+            <a:endParaRPr lang="en-US" sz="1200" dirty="0"/>
+          </a:p>
+        </p:txBody>
+      </p:sp>
+      <p:sp>
+        <p:nvSpPr>
+          <p:cNvPr id="33" name="Shape 31"/>
+          <p:cNvSpPr/>
+          <p:nvPr/>
+        </p:nvSpPr>
+        <p:spPr>
+          <a:xfrm>
+            <a:off x="804672" y="4773168"/>
+            <a:ext cx="402336" cy="402336"/>
+          </a:xfrm>
+          <a:prstGeom prst="ellipse">
+            <a:avLst/>
+          </a:prstGeom>
+          <a:solidFill>
+            <a:srgbClr val="6C4CFF"/>
+          </a:solidFill>
+          <a:ln/>
+        </p:spPr>
+      </p:sp>
+      <p:sp>
+        <p:nvSpPr>
+          <p:cNvPr id="34" name="Text 32"/>
+          <p:cNvSpPr/>
+          <p:nvPr/>
+        </p:nvSpPr>
+        <p:spPr>
+          <a:xfrm>
+            <a:off x="804672" y="4773168"/>
+            <a:ext cx="402336" cy="402336"/>
+          </a:xfrm>
+          <a:prstGeom prst="rect">
+            <a:avLst/>
+          </a:prstGeom>
+          <a:noFill/>
+          <a:ln/>
+        </p:spPr>
+        <p:txBody>
+          <a:bodyPr wrap="square" lIns="0" tIns="0" rIns="0" bIns="0" rtlCol="0" anchor="ctr"/>
+          <a:lstStyle/>
+          <a:p>
+            <a:pPr algn="ctr" indent="0" marL="0">
+              <a:buNone/>
+            </a:pPr>
+            <a:r>
+              <a:rPr lang="en-US" sz="1300" b="1" dirty="0">
+                <a:solidFill>
+                  <a:srgbClr val="FFFFFF"/>
+                </a:solidFill>
+                <a:latin typeface="Pretendard" pitchFamily="34" charset="0"/>
+                <a:ea typeface="Pretendard" pitchFamily="34" charset="-122"/>
+                <a:cs typeface="Pretendard" pitchFamily="34" charset="-120"/>
+              </a:rPr>
+              <a:t>5</a:t>
+            </a:r>
+            <a:endParaRPr lang="en-US" sz="1300" dirty="0"/>
+          </a:p>
+        </p:txBody>
+      </p:sp>
+      <p:sp>
+        <p:nvSpPr>
+          <p:cNvPr id="35" name="Text 33"/>
+          <p:cNvSpPr/>
+          <p:nvPr/>
+        </p:nvSpPr>
+        <p:spPr>
+          <a:xfrm>
+            <a:off x="1435608" y="4773168"/>
+            <a:ext cx="4114800" cy="292608"/>
+          </a:xfrm>
+          <a:prstGeom prst="rect">
+            <a:avLst/>
+          </a:prstGeom>
+          <a:noFill/>
+          <a:ln/>
+        </p:spPr>
+        <p:txBody>
+          <a:bodyPr wrap="square" lIns="0" tIns="0" rIns="0" bIns="0" rtlCol="0" anchor="ctr"/>
+          <a:lstStyle/>
+          <a:p>
+            <a:pPr algn="l" indent="0" marL="0">
+              <a:lnSpc>
+                <a:spcPct val="130000"/>
+              </a:lnSpc>
+              <a:buNone/>
+            </a:pPr>
+            <a:r>
+              <a:rPr lang="en-US" sz="1450" dirty="0">
+                <a:solidFill>
+                  <a:srgbClr val="1D1D1F"/>
+                </a:solidFill>
+                <a:latin typeface="Pretendard SemiBold" pitchFamily="34" charset="0"/>
+                <a:ea typeface="Pretendard SemiBold" pitchFamily="34" charset="-122"/>
+                <a:cs typeface="Pretendard SemiBold" pitchFamily="34" charset="-120"/>
+              </a:rPr>
+              <a:t>나머지 볼트 확산</a:t>
+            </a:r>
+            <a:endParaRPr lang="en-US" sz="1450" dirty="0"/>
+          </a:p>
+        </p:txBody>
+      </p:sp>
+      <p:sp>
+        <p:nvSpPr>
+          <p:cNvPr id="36" name="Text 34"/>
+          <p:cNvSpPr/>
+          <p:nvPr/>
+        </p:nvSpPr>
+        <p:spPr>
+          <a:xfrm>
+            <a:off x="1435608" y="5084064"/>
+            <a:ext cx="8351215" cy="274320"/>
+          </a:xfrm>
+          <a:prstGeom prst="rect">
+            <a:avLst/>
+          </a:prstGeom>
+          <a:noFill/>
+          <a:ln/>
+        </p:spPr>
+        <p:txBody>
+          <a:bodyPr wrap="square" lIns="0" tIns="0" rIns="0" bIns="0" rtlCol="0" anchor="ctr"/>
+          <a:lstStyle/>
+          <a:p>
+            <a:pPr algn="l" indent="0" marL="0">
+              <a:lnSpc>
+                <a:spcPct val="130000"/>
+              </a:lnSpc>
+              <a:buNone/>
+            </a:pPr>
+            <a:r>
+              <a:rPr lang="en-US" sz="1150" dirty="0">
+                <a:solidFill>
+                  <a:srgbClr val="55555A"/>
+                </a:solidFill>
+                <a:latin typeface="Pretendard" pitchFamily="34" charset="0"/>
+                <a:ea typeface="Pretendard" pitchFamily="34" charset="-122"/>
+                <a:cs typeface="Pretendard" pitchFamily="34" charset="-120"/>
+              </a:rPr>
+              <a:t>통과하면 나머지 4개 볼트에 같은 경로 문서를 복제한다</a:t>
+            </a:r>
+            <a:endParaRPr lang="en-US" sz="1150" dirty="0"/>
+          </a:p>
+        </p:txBody>
+      </p:sp>
+      <p:sp>
+        <p:nvSpPr>
+          <p:cNvPr id="37" name="Shape 35"/>
+          <p:cNvSpPr/>
+          <p:nvPr/>
+        </p:nvSpPr>
+        <p:spPr>
+          <a:xfrm>
+            <a:off x="10042855" y="4791456"/>
+            <a:ext cx="1371600" cy="384048"/>
+          </a:xfrm>
+          <a:prstGeom prst="roundRect">
+            <a:avLst>
+              <a:gd name="adj" fmla="val 50000"/>
+            </a:avLst>
+          </a:prstGeom>
+          <a:solidFill>
+            <a:srgbClr val="EEEAFB"/>
+          </a:solidFill>
+          <a:ln/>
+        </p:spPr>
+      </p:sp>
+      <p:sp>
+        <p:nvSpPr>
+          <p:cNvPr id="38" name="Text 36"/>
+          <p:cNvSpPr/>
+          <p:nvPr/>
+        </p:nvSpPr>
+        <p:spPr>
+          <a:xfrm>
+            <a:off x="10042855" y="4791456"/>
+            <a:ext cx="1371600" cy="384048"/>
+          </a:xfrm>
+          <a:prstGeom prst="rect">
+            <a:avLst/>
+          </a:prstGeom>
+          <a:noFill/>
+          <a:ln/>
+        </p:spPr>
+        <p:txBody>
+          <a:bodyPr wrap="square" lIns="0" tIns="0" rIns="0" bIns="0" rtlCol="0" anchor="ctr"/>
+          <a:lstStyle/>
+          <a:p>
+            <a:pPr algn="ctr" indent="0" marL="0">
+              <a:lnSpc>
+                <a:spcPct val="130000"/>
+              </a:lnSpc>
+              <a:buNone/>
+            </a:pPr>
+            <a:r>
+              <a:rPr lang="en-US" sz="1200" dirty="0">
+                <a:solidFill>
+                  <a:srgbClr val="6C4CFF"/>
+                </a:solidFill>
+                <a:latin typeface="Pretendard SemiBold" pitchFamily="34" charset="0"/>
+                <a:ea typeface="Pretendard SemiBold" pitchFamily="34" charset="-122"/>
+                <a:cs typeface="Pretendard SemiBold" pitchFamily="34" charset="-120"/>
+              </a:rPr>
+              <a:t>이후</a:t>
+            </a:r>
+            <a:endParaRPr lang="en-US" sz="1200" dirty="0"/>
+          </a:p>
+        </p:txBody>
+      </p:sp>
+      <p:sp>
+        <p:nvSpPr>
+          <p:cNvPr id="39" name="Shape 37"/>
+          <p:cNvSpPr/>
+          <p:nvPr/>
+        </p:nvSpPr>
+        <p:spPr>
+          <a:xfrm>
+            <a:off x="804672" y="5394960"/>
+            <a:ext cx="402336" cy="402336"/>
+          </a:xfrm>
+          <a:prstGeom prst="ellipse">
+            <a:avLst/>
+          </a:prstGeom>
+          <a:solidFill>
+            <a:srgbClr val="6C4CFF"/>
+          </a:solidFill>
+          <a:ln/>
+        </p:spPr>
+      </p:sp>
+      <p:sp>
+        <p:nvSpPr>
+          <p:cNvPr id="40" name="Text 38"/>
+          <p:cNvSpPr/>
+          <p:nvPr/>
+        </p:nvSpPr>
+        <p:spPr>
+          <a:xfrm>
+            <a:off x="804672" y="5394960"/>
+            <a:ext cx="402336" cy="402336"/>
+          </a:xfrm>
+          <a:prstGeom prst="rect">
+            <a:avLst/>
+          </a:prstGeom>
+          <a:noFill/>
+          <a:ln/>
+        </p:spPr>
+        <p:txBody>
+          <a:bodyPr wrap="square" lIns="0" tIns="0" rIns="0" bIns="0" rtlCol="0" anchor="ctr"/>
+          <a:lstStyle/>
+          <a:p>
+            <a:pPr algn="ctr" indent="0" marL="0">
+              <a:buNone/>
+            </a:pPr>
+            <a:r>
+              <a:rPr lang="en-US" sz="1300" b="1" dirty="0">
+                <a:solidFill>
+                  <a:srgbClr val="FFFFFF"/>
+                </a:solidFill>
+                <a:latin typeface="Pretendard" pitchFamily="34" charset="0"/>
+                <a:ea typeface="Pretendard" pitchFamily="34" charset="-122"/>
+                <a:cs typeface="Pretendard" pitchFamily="34" charset="-120"/>
+              </a:rPr>
+              <a:t>6</a:t>
+            </a:r>
+            <a:endParaRPr lang="en-US" sz="1300" dirty="0"/>
+          </a:p>
+        </p:txBody>
+      </p:sp>
+      <p:sp>
+        <p:nvSpPr>
+          <p:cNvPr id="41" name="Text 39"/>
+          <p:cNvSpPr/>
+          <p:nvPr/>
+        </p:nvSpPr>
+        <p:spPr>
+          <a:xfrm>
+            <a:off x="1435608" y="5394960"/>
+            <a:ext cx="4114800" cy="292608"/>
+          </a:xfrm>
+          <a:prstGeom prst="rect">
+            <a:avLst/>
+          </a:prstGeom>
+          <a:noFill/>
+          <a:ln/>
+        </p:spPr>
+        <p:txBody>
+          <a:bodyPr wrap="square" lIns="0" tIns="0" rIns="0" bIns="0" rtlCol="0" anchor="ctr"/>
+          <a:lstStyle/>
+          <a:p>
+            <a:pPr algn="l" indent="0" marL="0">
+              <a:lnSpc>
+                <a:spcPct val="130000"/>
+              </a:lnSpc>
+              <a:buNone/>
+            </a:pPr>
+            <a:r>
+              <a:rPr lang="en-US" sz="1450" dirty="0">
+                <a:solidFill>
+                  <a:srgbClr val="1D1D1F"/>
+                </a:solidFill>
+                <a:latin typeface="Pretendard SemiBold" pitchFamily="34" charset="0"/>
+                <a:ea typeface="Pretendard SemiBold" pitchFamily="34" charset="-122"/>
+                <a:cs typeface="Pretendard SemiBold" pitchFamily="34" charset="-120"/>
+              </a:rPr>
+              <a:t>플러그인 배포</a:t>
+            </a:r>
+            <a:endParaRPr lang="en-US" sz="1450" dirty="0"/>
+          </a:p>
+        </p:txBody>
+      </p:sp>
+      <p:sp>
+        <p:nvSpPr>
+          <p:cNvPr id="42" name="Text 40"/>
+          <p:cNvSpPr/>
+          <p:nvPr/>
+        </p:nvSpPr>
+        <p:spPr>
+          <a:xfrm>
+            <a:off x="1435608" y="5705856"/>
+            <a:ext cx="8351215" cy="274320"/>
+          </a:xfrm>
+          <a:prstGeom prst="rect">
+            <a:avLst/>
+          </a:prstGeom>
+          <a:noFill/>
+          <a:ln/>
+        </p:spPr>
+        <p:txBody>
+          <a:bodyPr wrap="square" lIns="0" tIns="0" rIns="0" bIns="0" rtlCol="0" anchor="ctr"/>
+          <a:lstStyle/>
+          <a:p>
+            <a:pPr algn="l" indent="0" marL="0">
+              <a:lnSpc>
+                <a:spcPct val="130000"/>
+              </a:lnSpc>
+              <a:buNone/>
+            </a:pPr>
+            <a:r>
+              <a:rPr lang="en-US" sz="1150" dirty="0">
+                <a:solidFill>
+                  <a:srgbClr val="55555A"/>
+                </a:solidFill>
+                <a:latin typeface="Pretendard" pitchFamily="34" charset="0"/>
+                <a:ea typeface="Pretendard" pitchFamily="34" charset="-122"/>
+                <a:cs typeface="Pretendard" pitchFamily="34" charset="-120"/>
+              </a:rPr>
+              <a:t>통합 경로 가이드·브랜드 토큰을 묶어 어느 볼트에서도 로드되게 한다</a:t>
+            </a:r>
+            <a:endParaRPr lang="en-US" sz="1150" dirty="0"/>
+          </a:p>
+        </p:txBody>
+      </p:sp>
+      <p:sp>
+        <p:nvSpPr>
+          <p:cNvPr id="43" name="Shape 41"/>
+          <p:cNvSpPr/>
+          <p:nvPr/>
+        </p:nvSpPr>
+        <p:spPr>
+          <a:xfrm>
+            <a:off x="10042855" y="5413248"/>
+            <a:ext cx="1371600" cy="384048"/>
+          </a:xfrm>
+          <a:prstGeom prst="roundRect">
+            <a:avLst>
+              <a:gd name="adj" fmla="val 50000"/>
+            </a:avLst>
+          </a:prstGeom>
+          <a:solidFill>
+            <a:srgbClr val="EEEAFB"/>
+          </a:solidFill>
+          <a:ln/>
+        </p:spPr>
+      </p:sp>
+      <p:sp>
+        <p:nvSpPr>
+          <p:cNvPr id="44" name="Text 42"/>
+          <p:cNvSpPr/>
+          <p:nvPr/>
+        </p:nvSpPr>
+        <p:spPr>
+          <a:xfrm>
+            <a:off x="10042855" y="5413248"/>
+            <a:ext cx="1371600" cy="384048"/>
+          </a:xfrm>
+          <a:prstGeom prst="rect">
+            <a:avLst/>
+          </a:prstGeom>
+          <a:noFill/>
+          <a:ln/>
+        </p:spPr>
+        <p:txBody>
+          <a:bodyPr wrap="square" lIns="0" tIns="0" rIns="0" bIns="0" rtlCol="0" anchor="ctr"/>
+          <a:lstStyle/>
+          <a:p>
+            <a:pPr algn="ctr" indent="0" marL="0">
+              <a:lnSpc>
+                <a:spcPct val="130000"/>
+              </a:lnSpc>
+              <a:buNone/>
+            </a:pPr>
+            <a:r>
+              <a:rPr lang="en-US" sz="1200" dirty="0">
+                <a:solidFill>
+                  <a:srgbClr val="6C4CFF"/>
+                </a:solidFill>
+                <a:latin typeface="Pretendard SemiBold" pitchFamily="34" charset="0"/>
+                <a:ea typeface="Pretendard SemiBold" pitchFamily="34" charset="-122"/>
+                <a:cs typeface="Pretendard SemiBold" pitchFamily="34" charset="-120"/>
+              </a:rPr>
+              <a:t>이후</a:t>
             </a:r>
             <a:endParaRPr lang="en-US" sz="1200" dirty="0"/>
           </a:p>
@@ -10020,7 +10251,7 @@
                 <a:ea typeface="Pretendard" pitchFamily="34" charset="-122"/>
                 <a:cs typeface="Pretendard" pitchFamily="34" charset="-120"/>
               </a:rPr>
-              <a:t>무엇을 담고, 구조는 어떻게 바뀌나</a:t>
+              <a:t>목적에 필요한 것만 담는다</a:t>
             </a:r>
             <a:endParaRPr lang="en-US" sz="2600" dirty="0"/>
           </a:p>
@@ -10059,7 +10290,7 @@
                 <a:ea typeface="Pretendard" pitchFamily="34" charset="-122"/>
                 <a:cs typeface="Pretendard" pitchFamily="34" charset="-120"/>
               </a:rPr>
-              <a:t>스킬·에이전트·MCP·공통 문서를 한 저장소에 묶습니다. 기존 볼트는 안 바뀝니다.</a:t>
+              <a:t>목적은 하나 — CdBd 기능을 어느 볼트에서도 수행. 그에 필요한 것만 넣습니다.</a:t>
             </a:r>
             <a:endParaRPr lang="en-US" sz="1500" dirty="0"/>
           </a:p>
@@ -10214,23 +10445,43 @@
       </p:sp>
       <p:sp>
         <p:nvSpPr>
-          <p:cNvPr id="10" name="Text 8"/>
-          <p:cNvSpPr/>
-          <p:nvPr/>
-        </p:nvSpPr>
-        <p:spPr>
-          <a:xfrm>
-            <a:off x="1069848" y="3063240"/>
-            <a:ext cx="182880" cy="274320"/>
-          </a:xfrm>
-          <a:prstGeom prst="rect">
-            <a:avLst/>
-          </a:prstGeom>
-          <a:noFill/>
-          <a:ln/>
-        </p:spPr>
-        <p:txBody>
-          <a:bodyPr wrap="square" lIns="0" tIns="0" rIns="0" bIns="0" rtlCol="0" anchor="ctr"/>
+          <p:cNvPr id="10" name="Shape 8"/>
+          <p:cNvSpPr/>
+          <p:nvPr/>
+        </p:nvSpPr>
+        <p:spPr>
+          <a:xfrm>
+            <a:off x="1088136" y="3127248"/>
+            <a:ext cx="109728" cy="109728"/>
+          </a:xfrm>
+          <a:prstGeom prst="ellipse">
+            <a:avLst/>
+          </a:prstGeom>
+          <a:solidFill>
+            <a:srgbClr val="6C4CFF"/>
+          </a:solidFill>
+          <a:ln/>
+        </p:spPr>
+      </p:sp>
+      <p:sp>
+        <p:nvSpPr>
+          <p:cNvPr id="11" name="Text 9"/>
+          <p:cNvSpPr/>
+          <p:nvPr/>
+        </p:nvSpPr>
+        <p:spPr>
+          <a:xfrm>
+            <a:off x="1325880" y="3063240"/>
+            <a:ext cx="4206240" cy="274320"/>
+          </a:xfrm>
+          <a:prstGeom prst="rect">
+            <a:avLst/>
+          </a:prstGeom>
+          <a:noFill/>
+          <a:ln/>
+        </p:spPr>
+        <p:txBody>
+          <a:bodyPr wrap="square" lIns="0" tIns="0" rIns="0" bIns="0" rtlCol="0" anchor="t"/>
           <a:lstStyle/>
           <a:p>
             <a:pPr algn="l" indent="0" marL="0">
@@ -10240,39 +10491,101 @@
               <a:buNone/>
             </a:pPr>
             <a:r>
-              <a:rPr lang="en-US" sz="1300" b="1" dirty="0">
+              <a:rPr lang="en-US" sz="1250" dirty="0">
                 <a:solidFill>
                   <a:srgbClr val="6C4CFF"/>
+                </a:solidFill>
+                <a:latin typeface="Pretendard SemiBold" pitchFamily="34" charset="0"/>
+                <a:ea typeface="Pretendard SemiBold" pitchFamily="34" charset="-122"/>
+                <a:cs typeface="Pretendard SemiBold" pitchFamily="34" charset="-120"/>
+              </a:rPr>
+              <a:t>통합 기능 경로 가이드</a:t>
+            </a:r>
+            <a:endParaRPr lang="en-US" sz="1250" dirty="0"/>
+          </a:p>
+        </p:txBody>
+      </p:sp>
+      <p:sp>
+        <p:nvSpPr>
+          <p:cNvPr id="12" name="Text 10"/>
+          <p:cNvSpPr/>
+          <p:nvPr/>
+        </p:nvSpPr>
+        <p:spPr>
+          <a:xfrm>
+            <a:off x="1325880" y="3337560"/>
+            <a:ext cx="4206240" cy="274320"/>
+          </a:xfrm>
+          <a:prstGeom prst="rect">
+            <a:avLst/>
+          </a:prstGeom>
+          <a:noFill/>
+          <a:ln/>
+        </p:spPr>
+        <p:txBody>
+          <a:bodyPr wrap="square" lIns="0" tIns="0" rIns="0" bIns="0" rtlCol="0" anchor="t"/>
+          <a:lstStyle/>
+          <a:p>
+            <a:pPr algn="l" indent="0" marL="0">
+              <a:lnSpc>
+                <a:spcPct val="130000"/>
+              </a:lnSpc>
+              <a:buNone/>
+            </a:pPr>
+            <a:r>
+              <a:rPr lang="en-US" sz="1050" dirty="0">
+                <a:solidFill>
+                  <a:srgbClr val="55555A"/>
                 </a:solidFill>
                 <a:latin typeface="Pretendard" pitchFamily="34" charset="0"/>
                 <a:ea typeface="Pretendard" pitchFamily="34" charset="-122"/>
                 <a:cs typeface="Pretendard" pitchFamily="34" charset="-120"/>
               </a:rPr>
-              <a:t>·</a:t>
-            </a:r>
-            <a:endParaRPr lang="en-US" sz="1300" dirty="0"/>
-          </a:p>
-        </p:txBody>
-      </p:sp>
-      <p:sp>
-        <p:nvSpPr>
-          <p:cNvPr id="11" name="Text 9"/>
-          <p:cNvSpPr/>
-          <p:nvPr/>
-        </p:nvSpPr>
-        <p:spPr>
-          <a:xfrm>
-            <a:off x="1252728" y="3063240"/>
-            <a:ext cx="1737360" cy="274320"/>
-          </a:xfrm>
-          <a:prstGeom prst="rect">
-            <a:avLst/>
-          </a:prstGeom>
-          <a:noFill/>
-          <a:ln/>
-        </p:spPr>
-        <p:txBody>
-          <a:bodyPr wrap="square" lIns="0" tIns="0" rIns="0" bIns="0" rtlCol="0" anchor="ctr"/>
+              <a:t>전 볼트 CdBd 기능 → 파일  ·  어디서 켜도 자동 로드</a:t>
+            </a:r>
+            <a:endParaRPr lang="en-US" sz="1050" dirty="0"/>
+          </a:p>
+        </p:txBody>
+      </p:sp>
+      <p:sp>
+        <p:nvSpPr>
+          <p:cNvPr id="13" name="Shape 11"/>
+          <p:cNvSpPr/>
+          <p:nvPr/>
+        </p:nvSpPr>
+        <p:spPr>
+          <a:xfrm>
+            <a:off x="1088136" y="3785616"/>
+            <a:ext cx="109728" cy="109728"/>
+          </a:xfrm>
+          <a:prstGeom prst="ellipse">
+            <a:avLst/>
+          </a:prstGeom>
+          <a:solidFill>
+            <a:srgbClr val="6C4CFF"/>
+          </a:solidFill>
+          <a:ln/>
+        </p:spPr>
+      </p:sp>
+      <p:sp>
+        <p:nvSpPr>
+          <p:cNvPr id="14" name="Text 12"/>
+          <p:cNvSpPr/>
+          <p:nvPr/>
+        </p:nvSpPr>
+        <p:spPr>
+          <a:xfrm>
+            <a:off x="1325880" y="3721608"/>
+            <a:ext cx="4206240" cy="274320"/>
+          </a:xfrm>
+          <a:prstGeom prst="rect">
+            <a:avLst/>
+          </a:prstGeom>
+          <a:noFill/>
+          <a:ln/>
+        </p:spPr>
+        <p:txBody>
+          <a:bodyPr wrap="square" lIns="0" tIns="0" rIns="0" bIns="0" rtlCol="0" anchor="t"/>
           <a:lstStyle/>
           <a:p>
             <a:pPr algn="l" indent="0" marL="0">
@@ -10282,7 +10595,7 @@
               <a:buNone/>
             </a:pPr>
             <a:r>
-              <a:rPr lang="en-US" sz="1200" dirty="0">
+              <a:rPr lang="en-US" sz="1250" dirty="0">
                 <a:solidFill>
                   <a:srgbClr val="6C4CFF"/>
                 </a:solidFill>
@@ -10290,31 +10603,31 @@
                 <a:ea typeface="Pretendard SemiBold" pitchFamily="34" charset="-122"/>
                 <a:cs typeface="Pretendard SemiBold" pitchFamily="34" charset="-120"/>
               </a:rPr>
-              <a:t>skills/</a:t>
-            </a:r>
-            <a:endParaRPr lang="en-US" sz="1200" dirty="0"/>
-          </a:p>
-        </p:txBody>
-      </p:sp>
-      <p:sp>
-        <p:nvSpPr>
-          <p:cNvPr id="12" name="Text 10"/>
-          <p:cNvSpPr/>
-          <p:nvPr/>
-        </p:nvSpPr>
-        <p:spPr>
-          <a:xfrm>
-            <a:off x="2926080" y="3063240"/>
-            <a:ext cx="2651760" cy="274320"/>
-          </a:xfrm>
-          <a:prstGeom prst="rect">
-            <a:avLst/>
-          </a:prstGeom>
-          <a:noFill/>
-          <a:ln/>
-        </p:spPr>
-        <p:txBody>
-          <a:bodyPr wrap="square" lIns="0" tIns="0" rIns="0" bIns="0" rtlCol="0" anchor="ctr"/>
+              <a:t>브랜드 토큰 정본</a:t>
+            </a:r>
+            <a:endParaRPr lang="en-US" sz="1250" dirty="0"/>
+          </a:p>
+        </p:txBody>
+      </p:sp>
+      <p:sp>
+        <p:nvSpPr>
+          <p:cNvPr id="15" name="Text 13"/>
+          <p:cNvSpPr/>
+          <p:nvPr/>
+        </p:nvSpPr>
+        <p:spPr>
+          <a:xfrm>
+            <a:off x="1325880" y="3995928"/>
+            <a:ext cx="4206240" cy="274320"/>
+          </a:xfrm>
+          <a:prstGeom prst="rect">
+            <a:avLst/>
+          </a:prstGeom>
+          <a:noFill/>
+          <a:ln/>
+        </p:spPr>
+        <p:txBody>
+          <a:bodyPr wrap="square" lIns="0" tIns="0" rIns="0" bIns="0" rtlCol="0" anchor="t"/>
           <a:lstStyle/>
           <a:p>
             <a:pPr algn="l" indent="0" marL="0">
@@ -10332,7 +10645,7 @@
                 <a:ea typeface="Pretendard" pitchFamily="34" charset="-122"/>
                 <a:cs typeface="Pretendard" pitchFamily="34" charset="-120"/>
               </a:rPr>
-              <a:t>스킬 (카드 자동화 · 룩북 · QR …)</a:t>
+              <a:t>컬러 · 폰트 정본값  ·  어느 볼트든 같은 값</a:t>
             </a:r>
             <a:endParaRPr lang="en-US" sz="1050" dirty="0"/>
           </a:p>
@@ -10340,23 +10653,43 @@
       </p:sp>
       <p:sp>
         <p:nvSpPr>
-          <p:cNvPr id="13" name="Text 11"/>
-          <p:cNvSpPr/>
-          <p:nvPr/>
-        </p:nvSpPr>
-        <p:spPr>
-          <a:xfrm>
-            <a:off x="1069848" y="3502152"/>
-            <a:ext cx="182880" cy="274320"/>
-          </a:xfrm>
-          <a:prstGeom prst="rect">
-            <a:avLst/>
-          </a:prstGeom>
-          <a:noFill/>
-          <a:ln/>
-        </p:spPr>
-        <p:txBody>
-          <a:bodyPr wrap="square" lIns="0" tIns="0" rIns="0" bIns="0" rtlCol="0" anchor="ctr"/>
+          <p:cNvPr id="16" name="Shape 14"/>
+          <p:cNvSpPr/>
+          <p:nvPr/>
+        </p:nvSpPr>
+        <p:spPr>
+          <a:xfrm>
+            <a:off x="1088136" y="4443984"/>
+            <a:ext cx="109728" cy="109728"/>
+          </a:xfrm>
+          <a:prstGeom prst="ellipse">
+            <a:avLst/>
+          </a:prstGeom>
+          <a:solidFill>
+            <a:srgbClr val="6C4CFF"/>
+          </a:solidFill>
+          <a:ln/>
+        </p:spPr>
+      </p:sp>
+      <p:sp>
+        <p:nvSpPr>
+          <p:cNvPr id="17" name="Text 15"/>
+          <p:cNvSpPr/>
+          <p:nvPr/>
+        </p:nvSpPr>
+        <p:spPr>
+          <a:xfrm>
+            <a:off x="1325880" y="4379976"/>
+            <a:ext cx="4206240" cy="274320"/>
+          </a:xfrm>
+          <a:prstGeom prst="rect">
+            <a:avLst/>
+          </a:prstGeom>
+          <a:noFill/>
+          <a:ln/>
+        </p:spPr>
+        <p:txBody>
+          <a:bodyPr wrap="square" lIns="0" tIns="0" rIns="0" bIns="0" rtlCol="0" anchor="t"/>
           <a:lstStyle/>
           <a:p>
             <a:pPr algn="l" indent="0" marL="0">
@@ -10366,39 +10699,101 @@
               <a:buNone/>
             </a:pPr>
             <a:r>
-              <a:rPr lang="en-US" sz="1300" b="1" dirty="0">
+              <a:rPr lang="en-US" sz="1250" dirty="0">
                 <a:solidFill>
                   <a:srgbClr val="6C4CFF"/>
+                </a:solidFill>
+                <a:latin typeface="Pretendard SemiBold" pitchFamily="34" charset="0"/>
+                <a:ea typeface="Pretendard SemiBold" pitchFamily="34" charset="-122"/>
+                <a:cs typeface="Pretendard SemiBold" pitchFamily="34" charset="-120"/>
+              </a:rPr>
+              <a:t>.mcp.json</a:t>
+            </a:r>
+            <a:endParaRPr lang="en-US" sz="1250" dirty="0"/>
+          </a:p>
+        </p:txBody>
+      </p:sp>
+      <p:sp>
+        <p:nvSpPr>
+          <p:cNvPr id="18" name="Text 16"/>
+          <p:cNvSpPr/>
+          <p:nvPr/>
+        </p:nvSpPr>
+        <p:spPr>
+          <a:xfrm>
+            <a:off x="1325880" y="4654296"/>
+            <a:ext cx="4206240" cy="274320"/>
+          </a:xfrm>
+          <a:prstGeom prst="rect">
+            <a:avLst/>
+          </a:prstGeom>
+          <a:noFill/>
+          <a:ln/>
+        </p:spPr>
+        <p:txBody>
+          <a:bodyPr wrap="square" lIns="0" tIns="0" rIns="0" bIns="0" rtlCol="0" anchor="t"/>
+          <a:lstStyle/>
+          <a:p>
+            <a:pPr algn="l" indent="0" marL="0">
+              <a:lnSpc>
+                <a:spcPct val="130000"/>
+              </a:lnSpc>
+              <a:buNone/>
+            </a:pPr>
+            <a:r>
+              <a:rPr lang="en-US" sz="1050" dirty="0">
+                <a:solidFill>
+                  <a:srgbClr val="55555A"/>
                 </a:solidFill>
                 <a:latin typeface="Pretendard" pitchFamily="34" charset="0"/>
                 <a:ea typeface="Pretendard" pitchFamily="34" charset="-122"/>
                 <a:cs typeface="Pretendard" pitchFamily="34" charset="-120"/>
               </a:rPr>
-              <a:t>·</a:t>
-            </a:r>
-            <a:endParaRPr lang="en-US" sz="1300" dirty="0"/>
-          </a:p>
-        </p:txBody>
-      </p:sp>
-      <p:sp>
-        <p:nvSpPr>
-          <p:cNvPr id="14" name="Text 12"/>
-          <p:cNvSpPr/>
-          <p:nvPr/>
-        </p:nvSpPr>
-        <p:spPr>
-          <a:xfrm>
-            <a:off x="1252728" y="3502152"/>
-            <a:ext cx="1737360" cy="274320"/>
-          </a:xfrm>
-          <a:prstGeom prst="rect">
-            <a:avLst/>
-          </a:prstGeom>
-          <a:noFill/>
-          <a:ln/>
-        </p:spPr>
-        <p:txBody>
-          <a:bodyPr wrap="square" lIns="0" tIns="0" rIns="0" bIns="0" rtlCol="0" anchor="ctr"/>
+              <a:t>Figma 연결  ·  실행 도구</a:t>
+            </a:r>
+            <a:endParaRPr lang="en-US" sz="1050" dirty="0"/>
+          </a:p>
+        </p:txBody>
+      </p:sp>
+      <p:sp>
+        <p:nvSpPr>
+          <p:cNvPr id="19" name="Shape 17"/>
+          <p:cNvSpPr/>
+          <p:nvPr/>
+        </p:nvSpPr>
+        <p:spPr>
+          <a:xfrm>
+            <a:off x="1088136" y="5102352"/>
+            <a:ext cx="109728" cy="109728"/>
+          </a:xfrm>
+          <a:prstGeom prst="ellipse">
+            <a:avLst/>
+          </a:prstGeom>
+          <a:solidFill>
+            <a:srgbClr val="6C4CFF"/>
+          </a:solidFill>
+          <a:ln/>
+        </p:spPr>
+      </p:sp>
+      <p:sp>
+        <p:nvSpPr>
+          <p:cNvPr id="20" name="Text 18"/>
+          <p:cNvSpPr/>
+          <p:nvPr/>
+        </p:nvSpPr>
+        <p:spPr>
+          <a:xfrm>
+            <a:off x="1325880" y="5038344"/>
+            <a:ext cx="4206240" cy="274320"/>
+          </a:xfrm>
+          <a:prstGeom prst="rect">
+            <a:avLst/>
+          </a:prstGeom>
+          <a:noFill/>
+          <a:ln/>
+        </p:spPr>
+        <p:txBody>
+          <a:bodyPr wrap="square" lIns="0" tIns="0" rIns="0" bIns="0" rtlCol="0" anchor="t"/>
           <a:lstStyle/>
           <a:p>
             <a:pPr algn="l" indent="0" marL="0">
@@ -10408,7 +10803,7 @@
               <a:buNone/>
             </a:pPr>
             <a:r>
-              <a:rPr lang="en-US" sz="1200" dirty="0">
+              <a:rPr lang="en-US" sz="1250" dirty="0">
                 <a:solidFill>
                   <a:srgbClr val="6C4CFF"/>
                 </a:solidFill>
@@ -10416,31 +10811,31 @@
                 <a:ea typeface="Pretendard SemiBold" pitchFamily="34" charset="-122"/>
                 <a:cs typeface="Pretendard SemiBold" pitchFamily="34" charset="-120"/>
               </a:rPr>
-              <a:t>agents/</a:t>
-            </a:r>
-            <a:endParaRPr lang="en-US" sz="1200" dirty="0"/>
-          </a:p>
-        </p:txBody>
-      </p:sp>
-      <p:sp>
-        <p:nvSpPr>
-          <p:cNvPr id="15" name="Text 13"/>
-          <p:cNvSpPr/>
-          <p:nvPr/>
-        </p:nvSpPr>
-        <p:spPr>
-          <a:xfrm>
-            <a:off x="2926080" y="3502152"/>
-            <a:ext cx="2651760" cy="274320"/>
-          </a:xfrm>
-          <a:prstGeom prst="rect">
-            <a:avLst/>
-          </a:prstGeom>
-          <a:noFill/>
-          <a:ln/>
-        </p:spPr>
-        <p:txBody>
-          <a:bodyPr wrap="square" lIns="0" tIns="0" rIns="0" bIns="0" rtlCol="0" anchor="ctr"/>
+              <a:t>로그인 · 셋업 안내</a:t>
+            </a:r>
+            <a:endParaRPr lang="en-US" sz="1250" dirty="0"/>
+          </a:p>
+        </p:txBody>
+      </p:sp>
+      <p:sp>
+        <p:nvSpPr>
+          <p:cNvPr id="21" name="Text 19"/>
+          <p:cNvSpPr/>
+          <p:nvPr/>
+        </p:nvSpPr>
+        <p:spPr>
+          <a:xfrm>
+            <a:off x="1325880" y="5312664"/>
+            <a:ext cx="4206240" cy="274320"/>
+          </a:xfrm>
+          <a:prstGeom prst="rect">
+            <a:avLst/>
+          </a:prstGeom>
+          <a:noFill/>
+          <a:ln/>
+        </p:spPr>
+        <p:txBody>
+          <a:bodyPr wrap="square" lIns="0" tIns="0" rIns="0" bIns="0" rtlCol="0" anchor="t"/>
           <a:lstStyle/>
           <a:p>
             <a:pPr algn="l" indent="0" marL="0">
@@ -10458,7 +10853,7 @@
                 <a:ea typeface="Pretendard" pitchFamily="34" charset="-122"/>
                 <a:cs typeface="Pretendard" pitchFamily="34" charset="-120"/>
               </a:rPr>
-              <a:t>서브에이전트</a:t>
+              <a:t>각자 컴퓨터 설정 위치  ·  어느 PC에서도 실행</a:t>
             </a:r>
             <a:endParaRPr lang="en-US" sz="1050" dirty="0"/>
           </a:p>
@@ -10466,511 +10861,7 @@
       </p:sp>
       <p:sp>
         <p:nvSpPr>
-          <p:cNvPr id="16" name="Text 14"/>
-          <p:cNvSpPr/>
-          <p:nvPr/>
-        </p:nvSpPr>
-        <p:spPr>
-          <a:xfrm>
-            <a:off x="1069848" y="3941064"/>
-            <a:ext cx="182880" cy="274320"/>
-          </a:xfrm>
-          <a:prstGeom prst="rect">
-            <a:avLst/>
-          </a:prstGeom>
-          <a:noFill/>
-          <a:ln/>
-        </p:spPr>
-        <p:txBody>
-          <a:bodyPr wrap="square" lIns="0" tIns="0" rIns="0" bIns="0" rtlCol="0" anchor="ctr"/>
-          <a:lstStyle/>
-          <a:p>
-            <a:pPr algn="l" indent="0" marL="0">
-              <a:lnSpc>
-                <a:spcPct val="130000"/>
-              </a:lnSpc>
-              <a:buNone/>
-            </a:pPr>
-            <a:r>
-              <a:rPr lang="en-US" sz="1300" b="1" dirty="0">
-                <a:solidFill>
-                  <a:srgbClr val="6C4CFF"/>
-                </a:solidFill>
-                <a:latin typeface="Pretendard" pitchFamily="34" charset="0"/>
-                <a:ea typeface="Pretendard" pitchFamily="34" charset="-122"/>
-                <a:cs typeface="Pretendard" pitchFamily="34" charset="-120"/>
-              </a:rPr>
-              <a:t>·</a:t>
-            </a:r>
-            <a:endParaRPr lang="en-US" sz="1300" dirty="0"/>
-          </a:p>
-        </p:txBody>
-      </p:sp>
-      <p:sp>
-        <p:nvSpPr>
-          <p:cNvPr id="17" name="Text 15"/>
-          <p:cNvSpPr/>
-          <p:nvPr/>
-        </p:nvSpPr>
-        <p:spPr>
-          <a:xfrm>
-            <a:off x="1252728" y="3941064"/>
-            <a:ext cx="1737360" cy="274320"/>
-          </a:xfrm>
-          <a:prstGeom prst="rect">
-            <a:avLst/>
-          </a:prstGeom>
-          <a:noFill/>
-          <a:ln/>
-        </p:spPr>
-        <p:txBody>
-          <a:bodyPr wrap="square" lIns="0" tIns="0" rIns="0" bIns="0" rtlCol="0" anchor="ctr"/>
-          <a:lstStyle/>
-          <a:p>
-            <a:pPr algn="l" indent="0" marL="0">
-              <a:lnSpc>
-                <a:spcPct val="130000"/>
-              </a:lnSpc>
-              <a:buNone/>
-            </a:pPr>
-            <a:r>
-              <a:rPr lang="en-US" sz="1200" dirty="0">
-                <a:solidFill>
-                  <a:srgbClr val="6C4CFF"/>
-                </a:solidFill>
-                <a:latin typeface="Pretendard SemiBold" pitchFamily="34" charset="0"/>
-                <a:ea typeface="Pretendard SemiBold" pitchFamily="34" charset="-122"/>
-                <a:cs typeface="Pretendard SemiBold" pitchFamily="34" charset="-120"/>
-              </a:rPr>
-              <a:t>commands/</a:t>
-            </a:r>
-            <a:endParaRPr lang="en-US" sz="1200" dirty="0"/>
-          </a:p>
-        </p:txBody>
-      </p:sp>
-      <p:sp>
-        <p:nvSpPr>
-          <p:cNvPr id="18" name="Text 16"/>
-          <p:cNvSpPr/>
-          <p:nvPr/>
-        </p:nvSpPr>
-        <p:spPr>
-          <a:xfrm>
-            <a:off x="2926080" y="3941064"/>
-            <a:ext cx="2651760" cy="274320"/>
-          </a:xfrm>
-          <a:prstGeom prst="rect">
-            <a:avLst/>
-          </a:prstGeom>
-          <a:noFill/>
-          <a:ln/>
-        </p:spPr>
-        <p:txBody>
-          <a:bodyPr wrap="square" lIns="0" tIns="0" rIns="0" bIns="0" rtlCol="0" anchor="ctr"/>
-          <a:lstStyle/>
-          <a:p>
-            <a:pPr algn="l" indent="0" marL="0">
-              <a:lnSpc>
-                <a:spcPct val="130000"/>
-              </a:lnSpc>
-              <a:buNone/>
-            </a:pPr>
-            <a:r>
-              <a:rPr lang="en-US" sz="1050" dirty="0">
-                <a:solidFill>
-                  <a:srgbClr val="55555A"/>
-                </a:solidFill>
-                <a:latin typeface="Pretendard" pitchFamily="34" charset="0"/>
-                <a:ea typeface="Pretendard" pitchFamily="34" charset="-122"/>
-                <a:cs typeface="Pretendard" pitchFamily="34" charset="-120"/>
-              </a:rPr>
-              <a:t>슬래시 명령</a:t>
-            </a:r>
-            <a:endParaRPr lang="en-US" sz="1050" dirty="0"/>
-          </a:p>
-        </p:txBody>
-      </p:sp>
-      <p:sp>
-        <p:nvSpPr>
-          <p:cNvPr id="19" name="Text 17"/>
-          <p:cNvSpPr/>
-          <p:nvPr/>
-        </p:nvSpPr>
-        <p:spPr>
-          <a:xfrm>
-            <a:off x="1069848" y="4379976"/>
-            <a:ext cx="182880" cy="274320"/>
-          </a:xfrm>
-          <a:prstGeom prst="rect">
-            <a:avLst/>
-          </a:prstGeom>
-          <a:noFill/>
-          <a:ln/>
-        </p:spPr>
-        <p:txBody>
-          <a:bodyPr wrap="square" lIns="0" tIns="0" rIns="0" bIns="0" rtlCol="0" anchor="ctr"/>
-          <a:lstStyle/>
-          <a:p>
-            <a:pPr algn="l" indent="0" marL="0">
-              <a:lnSpc>
-                <a:spcPct val="130000"/>
-              </a:lnSpc>
-              <a:buNone/>
-            </a:pPr>
-            <a:r>
-              <a:rPr lang="en-US" sz="1300" b="1" dirty="0">
-                <a:solidFill>
-                  <a:srgbClr val="6C4CFF"/>
-                </a:solidFill>
-                <a:latin typeface="Pretendard" pitchFamily="34" charset="0"/>
-                <a:ea typeface="Pretendard" pitchFamily="34" charset="-122"/>
-                <a:cs typeface="Pretendard" pitchFamily="34" charset="-120"/>
-              </a:rPr>
-              <a:t>·</a:t>
-            </a:r>
-            <a:endParaRPr lang="en-US" sz="1300" dirty="0"/>
-          </a:p>
-        </p:txBody>
-      </p:sp>
-      <p:sp>
-        <p:nvSpPr>
-          <p:cNvPr id="20" name="Text 18"/>
-          <p:cNvSpPr/>
-          <p:nvPr/>
-        </p:nvSpPr>
-        <p:spPr>
-          <a:xfrm>
-            <a:off x="1252728" y="4379976"/>
-            <a:ext cx="1737360" cy="274320"/>
-          </a:xfrm>
-          <a:prstGeom prst="rect">
-            <a:avLst/>
-          </a:prstGeom>
-          <a:noFill/>
-          <a:ln/>
-        </p:spPr>
-        <p:txBody>
-          <a:bodyPr wrap="square" lIns="0" tIns="0" rIns="0" bIns="0" rtlCol="0" anchor="ctr"/>
-          <a:lstStyle/>
-          <a:p>
-            <a:pPr algn="l" indent="0" marL="0">
-              <a:lnSpc>
-                <a:spcPct val="130000"/>
-              </a:lnSpc>
-              <a:buNone/>
-            </a:pPr>
-            <a:r>
-              <a:rPr lang="en-US" sz="1200" dirty="0">
-                <a:solidFill>
-                  <a:srgbClr val="6C4CFF"/>
-                </a:solidFill>
-                <a:latin typeface="Pretendard SemiBold" pitchFamily="34" charset="0"/>
-                <a:ea typeface="Pretendard SemiBold" pitchFamily="34" charset="-122"/>
-                <a:cs typeface="Pretendard SemiBold" pitchFamily="34" charset="-120"/>
-              </a:rPr>
-              <a:t>.mcp.json</a:t>
-            </a:r>
-            <a:endParaRPr lang="en-US" sz="1200" dirty="0"/>
-          </a:p>
-        </p:txBody>
-      </p:sp>
-      <p:sp>
-        <p:nvSpPr>
-          <p:cNvPr id="21" name="Text 19"/>
-          <p:cNvSpPr/>
-          <p:nvPr/>
-        </p:nvSpPr>
-        <p:spPr>
-          <a:xfrm>
-            <a:off x="2926080" y="4379976"/>
-            <a:ext cx="2651760" cy="274320"/>
-          </a:xfrm>
-          <a:prstGeom prst="rect">
-            <a:avLst/>
-          </a:prstGeom>
-          <a:noFill/>
-          <a:ln/>
-        </p:spPr>
-        <p:txBody>
-          <a:bodyPr wrap="square" lIns="0" tIns="0" rIns="0" bIns="0" rtlCol="0" anchor="ctr"/>
-          <a:lstStyle/>
-          <a:p>
-            <a:pPr algn="l" indent="0" marL="0">
-              <a:lnSpc>
-                <a:spcPct val="130000"/>
-              </a:lnSpc>
-              <a:buNone/>
-            </a:pPr>
-            <a:r>
-              <a:rPr lang="en-US" sz="1050" dirty="0">
-                <a:solidFill>
-                  <a:srgbClr val="55555A"/>
-                </a:solidFill>
-                <a:latin typeface="Pretendard" pitchFamily="34" charset="0"/>
-                <a:ea typeface="Pretendard" pitchFamily="34" charset="-122"/>
-                <a:cs typeface="Pretendard" pitchFamily="34" charset="-120"/>
-              </a:rPr>
-              <a:t>Figma MCP 연결</a:t>
-            </a:r>
-            <a:endParaRPr lang="en-US" sz="1050" dirty="0"/>
-          </a:p>
-        </p:txBody>
-      </p:sp>
-      <p:sp>
-        <p:nvSpPr>
-          <p:cNvPr id="22" name="Text 20"/>
-          <p:cNvSpPr/>
-          <p:nvPr/>
-        </p:nvSpPr>
-        <p:spPr>
-          <a:xfrm>
-            <a:off x="1069848" y="4818888"/>
-            <a:ext cx="182880" cy="274320"/>
-          </a:xfrm>
-          <a:prstGeom prst="rect">
-            <a:avLst/>
-          </a:prstGeom>
-          <a:noFill/>
-          <a:ln/>
-        </p:spPr>
-        <p:txBody>
-          <a:bodyPr wrap="square" lIns="0" tIns="0" rIns="0" bIns="0" rtlCol="0" anchor="ctr"/>
-          <a:lstStyle/>
-          <a:p>
-            <a:pPr algn="l" indent="0" marL="0">
-              <a:lnSpc>
-                <a:spcPct val="130000"/>
-              </a:lnSpc>
-              <a:buNone/>
-            </a:pPr>
-            <a:r>
-              <a:rPr lang="en-US" sz="1300" b="1" dirty="0">
-                <a:solidFill>
-                  <a:srgbClr val="6C4CFF"/>
-                </a:solidFill>
-                <a:latin typeface="Pretendard" pitchFamily="34" charset="0"/>
-                <a:ea typeface="Pretendard" pitchFamily="34" charset="-122"/>
-                <a:cs typeface="Pretendard" pitchFamily="34" charset="-120"/>
-              </a:rPr>
-              <a:t>·</a:t>
-            </a:r>
-            <a:endParaRPr lang="en-US" sz="1300" dirty="0"/>
-          </a:p>
-        </p:txBody>
-      </p:sp>
-      <p:sp>
-        <p:nvSpPr>
-          <p:cNvPr id="23" name="Text 21"/>
-          <p:cNvSpPr/>
-          <p:nvPr/>
-        </p:nvSpPr>
-        <p:spPr>
-          <a:xfrm>
-            <a:off x="1252728" y="4818888"/>
-            <a:ext cx="1737360" cy="274320"/>
-          </a:xfrm>
-          <a:prstGeom prst="rect">
-            <a:avLst/>
-          </a:prstGeom>
-          <a:noFill/>
-          <a:ln/>
-        </p:spPr>
-        <p:txBody>
-          <a:bodyPr wrap="square" lIns="0" tIns="0" rIns="0" bIns="0" rtlCol="0" anchor="ctr"/>
-          <a:lstStyle/>
-          <a:p>
-            <a:pPr algn="l" indent="0" marL="0">
-              <a:lnSpc>
-                <a:spcPct val="130000"/>
-              </a:lnSpc>
-              <a:buNone/>
-            </a:pPr>
-            <a:r>
-              <a:rPr lang="en-US" sz="1200" dirty="0">
-                <a:solidFill>
-                  <a:srgbClr val="6C4CFF"/>
-                </a:solidFill>
-                <a:latin typeface="Pretendard SemiBold" pitchFamily="34" charset="0"/>
-                <a:ea typeface="Pretendard SemiBold" pitchFamily="34" charset="-122"/>
-                <a:cs typeface="Pretendard SemiBold" pitchFamily="34" charset="-120"/>
-              </a:rPr>
-              <a:t>공통 경로 가이드</a:t>
-            </a:r>
-            <a:endParaRPr lang="en-US" sz="1200" dirty="0"/>
-          </a:p>
-        </p:txBody>
-      </p:sp>
-      <p:sp>
-        <p:nvSpPr>
-          <p:cNvPr id="24" name="Text 22"/>
-          <p:cNvSpPr/>
-          <p:nvPr/>
-        </p:nvSpPr>
-        <p:spPr>
-          <a:xfrm>
-            <a:off x="2926080" y="4818888"/>
-            <a:ext cx="2651760" cy="274320"/>
-          </a:xfrm>
-          <a:prstGeom prst="rect">
-            <a:avLst/>
-          </a:prstGeom>
-          <a:noFill/>
-          <a:ln/>
-        </p:spPr>
-        <p:txBody>
-          <a:bodyPr wrap="square" lIns="0" tIns="0" rIns="0" bIns="0" rtlCol="0" anchor="ctr"/>
-          <a:lstStyle/>
-          <a:p>
-            <a:pPr algn="l" indent="0" marL="0">
-              <a:lnSpc>
-                <a:spcPct val="130000"/>
-              </a:lnSpc>
-              <a:buNone/>
-            </a:pPr>
-            <a:r>
-              <a:rPr lang="en-US" sz="1050" dirty="0">
-                <a:solidFill>
-                  <a:srgbClr val="55555A"/>
-                </a:solidFill>
-                <a:latin typeface="Pretendard" pitchFamily="34" charset="0"/>
-                <a:ea typeface="Pretendard" pitchFamily="34" charset="-122"/>
-                <a:cs typeface="Pretendard" pitchFamily="34" charset="-120"/>
-              </a:rPr>
-              <a:t>볼트 공통 라우팅</a:t>
-            </a:r>
-            <a:endParaRPr lang="en-US" sz="1050" dirty="0"/>
-          </a:p>
-        </p:txBody>
-      </p:sp>
-      <p:sp>
-        <p:nvSpPr>
-          <p:cNvPr id="25" name="Text 23"/>
-          <p:cNvSpPr/>
-          <p:nvPr/>
-        </p:nvSpPr>
-        <p:spPr>
-          <a:xfrm>
-            <a:off x="1069848" y="5257800"/>
-            <a:ext cx="182880" cy="274320"/>
-          </a:xfrm>
-          <a:prstGeom prst="rect">
-            <a:avLst/>
-          </a:prstGeom>
-          <a:noFill/>
-          <a:ln/>
-        </p:spPr>
-        <p:txBody>
-          <a:bodyPr wrap="square" lIns="0" tIns="0" rIns="0" bIns="0" rtlCol="0" anchor="ctr"/>
-          <a:lstStyle/>
-          <a:p>
-            <a:pPr algn="l" indent="0" marL="0">
-              <a:lnSpc>
-                <a:spcPct val="130000"/>
-              </a:lnSpc>
-              <a:buNone/>
-            </a:pPr>
-            <a:r>
-              <a:rPr lang="en-US" sz="1300" b="1" dirty="0">
-                <a:solidFill>
-                  <a:srgbClr val="6C4CFF"/>
-                </a:solidFill>
-                <a:latin typeface="Pretendard" pitchFamily="34" charset="0"/>
-                <a:ea typeface="Pretendard" pitchFamily="34" charset="-122"/>
-                <a:cs typeface="Pretendard" pitchFamily="34" charset="-120"/>
-              </a:rPr>
-              <a:t>·</a:t>
-            </a:r>
-            <a:endParaRPr lang="en-US" sz="1300" dirty="0"/>
-          </a:p>
-        </p:txBody>
-      </p:sp>
-      <p:sp>
-        <p:nvSpPr>
-          <p:cNvPr id="26" name="Text 24"/>
-          <p:cNvSpPr/>
-          <p:nvPr/>
-        </p:nvSpPr>
-        <p:spPr>
-          <a:xfrm>
-            <a:off x="1252728" y="5257800"/>
-            <a:ext cx="1737360" cy="274320"/>
-          </a:xfrm>
-          <a:prstGeom prst="rect">
-            <a:avLst/>
-          </a:prstGeom>
-          <a:noFill/>
-          <a:ln/>
-        </p:spPr>
-        <p:txBody>
-          <a:bodyPr wrap="square" lIns="0" tIns="0" rIns="0" bIns="0" rtlCol="0" anchor="ctr"/>
-          <a:lstStyle/>
-          <a:p>
-            <a:pPr algn="l" indent="0" marL="0">
-              <a:lnSpc>
-                <a:spcPct val="130000"/>
-              </a:lnSpc>
-              <a:buNone/>
-            </a:pPr>
-            <a:r>
-              <a:rPr lang="en-US" sz="1200" dirty="0">
-                <a:solidFill>
-                  <a:srgbClr val="6C4CFF"/>
-                </a:solidFill>
-                <a:latin typeface="Pretendard SemiBold" pitchFamily="34" charset="0"/>
-                <a:ea typeface="Pretendard SemiBold" pitchFamily="34" charset="-122"/>
-                <a:cs typeface="Pretendard SemiBold" pitchFamily="34" charset="-120"/>
-              </a:rPr>
-              <a:t>브랜드 토큰 정본</a:t>
-            </a:r>
-            <a:endParaRPr lang="en-US" sz="1200" dirty="0"/>
-          </a:p>
-        </p:txBody>
-      </p:sp>
-      <p:sp>
-        <p:nvSpPr>
-          <p:cNvPr id="27" name="Text 25"/>
-          <p:cNvSpPr/>
-          <p:nvPr/>
-        </p:nvSpPr>
-        <p:spPr>
-          <a:xfrm>
-            <a:off x="2926080" y="5257800"/>
-            <a:ext cx="2651760" cy="274320"/>
-          </a:xfrm>
-          <a:prstGeom prst="rect">
-            <a:avLst/>
-          </a:prstGeom>
-          <a:noFill/>
-          <a:ln/>
-        </p:spPr>
-        <p:txBody>
-          <a:bodyPr wrap="square" lIns="0" tIns="0" rIns="0" bIns="0" rtlCol="0" anchor="ctr"/>
-          <a:lstStyle/>
-          <a:p>
-            <a:pPr algn="l" indent="0" marL="0">
-              <a:lnSpc>
-                <a:spcPct val="130000"/>
-              </a:lnSpc>
-              <a:buNone/>
-            </a:pPr>
-            <a:r>
-              <a:rPr lang="en-US" sz="1050" dirty="0">
-                <a:solidFill>
-                  <a:srgbClr val="55555A"/>
-                </a:solidFill>
-                <a:latin typeface="Pretendard" pitchFamily="34" charset="0"/>
-                <a:ea typeface="Pretendard" pitchFamily="34" charset="-122"/>
-                <a:cs typeface="Pretendard" pitchFamily="34" charset="-120"/>
-              </a:rPr>
-              <a:t>컬러 · 폰트</a:t>
-            </a:r>
-            <a:endParaRPr lang="en-US" sz="1050" dirty="0"/>
-          </a:p>
-        </p:txBody>
-      </p:sp>
-      <p:sp>
-        <p:nvSpPr>
-          <p:cNvPr id="28" name="Shape 26"/>
+          <p:cNvPr id="22" name="Shape 20"/>
           <p:cNvSpPr/>
           <p:nvPr/>
         </p:nvSpPr>
@@ -10997,7 +10888,7 @@
       </p:sp>
       <p:sp>
         <p:nvSpPr>
-          <p:cNvPr id="29" name="Text 27"/>
+          <p:cNvPr id="23" name="Text 21"/>
           <p:cNvSpPr/>
           <p:nvPr/>
         </p:nvSpPr>
@@ -11039,14 +10930,14 @@
       </p:sp>
       <p:sp>
         <p:nvSpPr>
-          <p:cNvPr id="30" name="Text 28"/>
-          <p:cNvSpPr/>
-          <p:nvPr/>
-        </p:nvSpPr>
-        <p:spPr>
-          <a:xfrm>
-            <a:off x="6263640" y="2999232"/>
-            <a:ext cx="3200400" cy="310896"/>
+          <p:cNvPr id="24" name="Text 22"/>
+          <p:cNvSpPr/>
+          <p:nvPr/>
+        </p:nvSpPr>
+        <p:spPr>
+          <a:xfrm>
+            <a:off x="6263640" y="3035808"/>
+            <a:ext cx="3063240" cy="347472"/>
           </a:xfrm>
           <a:prstGeom prst="rect">
             <a:avLst/>
@@ -11081,14 +10972,14 @@
       </p:sp>
       <p:sp>
         <p:nvSpPr>
-          <p:cNvPr id="31" name="Text 29"/>
-          <p:cNvSpPr/>
-          <p:nvPr/>
-        </p:nvSpPr>
-        <p:spPr>
-          <a:xfrm>
-            <a:off x="9555480" y="2999232"/>
-            <a:ext cx="1584655" cy="310896"/>
+          <p:cNvPr id="25" name="Text 23"/>
+          <p:cNvSpPr/>
+          <p:nvPr/>
+        </p:nvSpPr>
+        <p:spPr>
+          <a:xfrm>
+            <a:off x="9418320" y="3035808"/>
+            <a:ext cx="1721815" cy="347472"/>
           </a:xfrm>
           <a:prstGeom prst="rect">
             <a:avLst/>
@@ -11123,14 +11014,98 @@
       </p:sp>
       <p:sp>
         <p:nvSpPr>
-          <p:cNvPr id="32" name="Text 30"/>
-          <p:cNvSpPr/>
-          <p:nvPr/>
-        </p:nvSpPr>
-        <p:spPr>
-          <a:xfrm>
-            <a:off x="6263640" y="3310128"/>
-            <a:ext cx="3200400" cy="310896"/>
+          <p:cNvPr id="26" name="Text 24"/>
+          <p:cNvSpPr/>
+          <p:nvPr/>
+        </p:nvSpPr>
+        <p:spPr>
+          <a:xfrm>
+            <a:off x="6263640" y="3383280"/>
+            <a:ext cx="3063240" cy="347472"/>
+          </a:xfrm>
+          <a:prstGeom prst="rect">
+            <a:avLst/>
+          </a:prstGeom>
+          <a:noFill/>
+          <a:ln/>
+        </p:spPr>
+        <p:txBody>
+          <a:bodyPr wrap="square" lIns="0" tIns="0" rIns="0" bIns="0" rtlCol="0" anchor="ctr"/>
+          <a:lstStyle/>
+          <a:p>
+            <a:pPr algn="l" indent="0" marL="0">
+              <a:lnSpc>
+                <a:spcPct val="100000"/>
+              </a:lnSpc>
+              <a:buNone/>
+            </a:pPr>
+            <a:r>
+              <a:rPr lang="en-US" sz="1050" dirty="0">
+                <a:solidFill>
+                  <a:srgbClr val="1D1D1F"/>
+                </a:solidFill>
+                <a:latin typeface="Pretendard Medium" pitchFamily="34" charset="0"/>
+                <a:ea typeface="Pretendard Medium" pitchFamily="34" charset="-122"/>
+                <a:cs typeface="Pretendard Medium" pitchFamily="34" charset="-120"/>
+              </a:rPr>
+              <a:t>├─ .claude-plugin/marketplace.json</a:t>
+            </a:r>
+            <a:endParaRPr lang="en-US" sz="1050" dirty="0"/>
+          </a:p>
+        </p:txBody>
+      </p:sp>
+      <p:sp>
+        <p:nvSpPr>
+          <p:cNvPr id="27" name="Text 25"/>
+          <p:cNvSpPr/>
+          <p:nvPr/>
+        </p:nvSpPr>
+        <p:spPr>
+          <a:xfrm>
+            <a:off x="9418320" y="3383280"/>
+            <a:ext cx="1721815" cy="347472"/>
+          </a:xfrm>
+          <a:prstGeom prst="rect">
+            <a:avLst/>
+          </a:prstGeom>
+          <a:noFill/>
+          <a:ln/>
+        </p:spPr>
+        <p:txBody>
+          <a:bodyPr wrap="square" lIns="0" tIns="0" rIns="0" bIns="0" rtlCol="0" anchor="ctr"/>
+          <a:lstStyle/>
+          <a:p>
+            <a:pPr algn="l" indent="0" marL="0">
+              <a:lnSpc>
+                <a:spcPct val="100000"/>
+              </a:lnSpc>
+              <a:buNone/>
+            </a:pPr>
+            <a:r>
+              <a:rPr lang="en-US" sz="1000" dirty="0">
+                <a:solidFill>
+                  <a:srgbClr val="6C4CFF"/>
+                </a:solidFill>
+                <a:latin typeface="Pretendard" pitchFamily="34" charset="0"/>
+                <a:ea typeface="Pretendard" pitchFamily="34" charset="-122"/>
+                <a:cs typeface="Pretendard" pitchFamily="34" charset="-120"/>
+              </a:rPr>
+              <a:t>마켓 정의</a:t>
+            </a:r>
+            <a:endParaRPr lang="en-US" sz="1000" dirty="0"/>
+          </a:p>
+        </p:txBody>
+      </p:sp>
+      <p:sp>
+        <p:nvSpPr>
+          <p:cNvPr id="28" name="Text 26"/>
+          <p:cNvSpPr/>
+          <p:nvPr/>
+        </p:nvSpPr>
+        <p:spPr>
+          <a:xfrm>
+            <a:off x="6263640" y="3730752"/>
+            <a:ext cx="3063240" cy="347472"/>
           </a:xfrm>
           <a:prstGeom prst="rect">
             <a:avLst/>
@@ -11157,7 +11132,7 @@
                 <a:ea typeface="Pretendard SemiBold" pitchFamily="34" charset="-122"/>
                 <a:cs typeface="Pretendard SemiBold" pitchFamily="34" charset="-120"/>
               </a:rPr>
-              <a:t>├─ .claude-plugin/</a:t>
+              <a:t>└─ plugins/cdbd/</a:t>
             </a:r>
             <a:endParaRPr lang="en-US" sz="1050" dirty="0"/>
           </a:p>
@@ -11165,14 +11140,14 @@
       </p:sp>
       <p:sp>
         <p:nvSpPr>
-          <p:cNvPr id="33" name="Text 31"/>
-          <p:cNvSpPr/>
-          <p:nvPr/>
-        </p:nvSpPr>
-        <p:spPr>
-          <a:xfrm>
-            <a:off x="6263640" y="3621024"/>
-            <a:ext cx="3200400" cy="310896"/>
+          <p:cNvPr id="29" name="Text 27"/>
+          <p:cNvSpPr/>
+          <p:nvPr/>
+        </p:nvSpPr>
+        <p:spPr>
+          <a:xfrm>
+            <a:off x="6263640" y="4078224"/>
+            <a:ext cx="3063240" cy="347472"/>
           </a:xfrm>
           <a:prstGeom prst="rect">
             <a:avLst/>
@@ -11199,7 +11174,7 @@
                 <a:ea typeface="Pretendard Medium" pitchFamily="34" charset="-122"/>
                 <a:cs typeface="Pretendard Medium" pitchFamily="34" charset="-120"/>
               </a:rPr>
-              <a:t>│    └─ marketplace.json</a:t>
+              <a:t>     ├─ 통합 기능 경로 가이드.md</a:t>
             </a:r>
             <a:endParaRPr lang="en-US" sz="1050" dirty="0"/>
           </a:p>
@@ -11207,14 +11182,14 @@
       </p:sp>
       <p:sp>
         <p:nvSpPr>
-          <p:cNvPr id="34" name="Text 32"/>
-          <p:cNvSpPr/>
-          <p:nvPr/>
-        </p:nvSpPr>
-        <p:spPr>
-          <a:xfrm>
-            <a:off x="9555480" y="3621024"/>
-            <a:ext cx="1584655" cy="310896"/>
+          <p:cNvPr id="30" name="Text 28"/>
+          <p:cNvSpPr/>
+          <p:nvPr/>
+        </p:nvSpPr>
+        <p:spPr>
+          <a:xfrm>
+            <a:off x="9418320" y="4078224"/>
+            <a:ext cx="1721815" cy="347472"/>
           </a:xfrm>
           <a:prstGeom prst="rect">
             <a:avLst/>
@@ -11241,7 +11216,7 @@
                 <a:ea typeface="Pretendard" pitchFamily="34" charset="-122"/>
                 <a:cs typeface="Pretendard" pitchFamily="34" charset="-120"/>
               </a:rPr>
-              <a:t>마켓 정의</a:t>
+              <a:t>전 볼트 기능→파일</a:t>
             </a:r>
             <a:endParaRPr lang="en-US" sz="1000" dirty="0"/>
           </a:p>
@@ -11249,56 +11224,14 @@
       </p:sp>
       <p:sp>
         <p:nvSpPr>
-          <p:cNvPr id="35" name="Text 33"/>
-          <p:cNvSpPr/>
-          <p:nvPr/>
-        </p:nvSpPr>
-        <p:spPr>
-          <a:xfrm>
-            <a:off x="6263640" y="3931920"/>
-            <a:ext cx="3200400" cy="310896"/>
-          </a:xfrm>
-          <a:prstGeom prst="rect">
-            <a:avLst/>
-          </a:prstGeom>
-          <a:noFill/>
-          <a:ln/>
-        </p:spPr>
-        <p:txBody>
-          <a:bodyPr wrap="square" lIns="0" tIns="0" rIns="0" bIns="0" rtlCol="0" anchor="ctr"/>
-          <a:lstStyle/>
-          <a:p>
-            <a:pPr algn="l" indent="0" marL="0">
-              <a:lnSpc>
-                <a:spcPct val="100000"/>
-              </a:lnSpc>
-              <a:buNone/>
-            </a:pPr>
-            <a:r>
-              <a:rPr lang="en-US" sz="1050" dirty="0">
-                <a:solidFill>
-                  <a:srgbClr val="1D1D1F"/>
-                </a:solidFill>
-                <a:latin typeface="Pretendard SemiBold" pitchFamily="34" charset="0"/>
-                <a:ea typeface="Pretendard SemiBold" pitchFamily="34" charset="-122"/>
-                <a:cs typeface="Pretendard SemiBold" pitchFamily="34" charset="-120"/>
-              </a:rPr>
-              <a:t>└─ plugins/cdbd/</a:t>
-            </a:r>
-            <a:endParaRPr lang="en-US" sz="1050" dirty="0"/>
-          </a:p>
-        </p:txBody>
-      </p:sp>
-      <p:sp>
-        <p:nvSpPr>
-          <p:cNvPr id="36" name="Text 34"/>
-          <p:cNvSpPr/>
-          <p:nvPr/>
-        </p:nvSpPr>
-        <p:spPr>
-          <a:xfrm>
-            <a:off x="6263640" y="4242816"/>
-            <a:ext cx="3200400" cy="310896"/>
+          <p:cNvPr id="31" name="Text 29"/>
+          <p:cNvSpPr/>
+          <p:nvPr/>
+        </p:nvSpPr>
+        <p:spPr>
+          <a:xfrm>
+            <a:off x="6263640" y="4425696"/>
+            <a:ext cx="3063240" cy="347472"/>
           </a:xfrm>
           <a:prstGeom prst="rect">
             <a:avLst/>
@@ -11325,7 +11258,7 @@
                 <a:ea typeface="Pretendard Medium" pitchFamily="34" charset="-122"/>
                 <a:cs typeface="Pretendard Medium" pitchFamily="34" charset="-120"/>
               </a:rPr>
-              <a:t>     ├─ .claude-plugin/plugin.json</a:t>
+              <a:t>     ├─ 브랜드 토큰.md</a:t>
             </a:r>
             <a:endParaRPr lang="en-US" sz="1050" dirty="0"/>
           </a:p>
@@ -11333,14 +11266,56 @@
       </p:sp>
       <p:sp>
         <p:nvSpPr>
-          <p:cNvPr id="37" name="Text 35"/>
-          <p:cNvSpPr/>
-          <p:nvPr/>
-        </p:nvSpPr>
-        <p:spPr>
-          <a:xfrm>
-            <a:off x="6263640" y="4553712"/>
-            <a:ext cx="3200400" cy="310896"/>
+          <p:cNvPr id="32" name="Text 30"/>
+          <p:cNvSpPr/>
+          <p:nvPr/>
+        </p:nvSpPr>
+        <p:spPr>
+          <a:xfrm>
+            <a:off x="9418320" y="4425696"/>
+            <a:ext cx="1721815" cy="347472"/>
+          </a:xfrm>
+          <a:prstGeom prst="rect">
+            <a:avLst/>
+          </a:prstGeom>
+          <a:noFill/>
+          <a:ln/>
+        </p:spPr>
+        <p:txBody>
+          <a:bodyPr wrap="square" lIns="0" tIns="0" rIns="0" bIns="0" rtlCol="0" anchor="ctr"/>
+          <a:lstStyle/>
+          <a:p>
+            <a:pPr algn="l" indent="0" marL="0">
+              <a:lnSpc>
+                <a:spcPct val="100000"/>
+              </a:lnSpc>
+              <a:buNone/>
+            </a:pPr>
+            <a:r>
+              <a:rPr lang="en-US" sz="1000" dirty="0">
+                <a:solidFill>
+                  <a:srgbClr val="6C4CFF"/>
+                </a:solidFill>
+                <a:latin typeface="Pretendard" pitchFamily="34" charset="0"/>
+                <a:ea typeface="Pretendard" pitchFamily="34" charset="-122"/>
+                <a:cs typeface="Pretendard" pitchFamily="34" charset="-120"/>
+              </a:rPr>
+              <a:t>컬러·폰트</a:t>
+            </a:r>
+            <a:endParaRPr lang="en-US" sz="1000" dirty="0"/>
+          </a:p>
+        </p:txBody>
+      </p:sp>
+      <p:sp>
+        <p:nvSpPr>
+          <p:cNvPr id="33" name="Text 31"/>
+          <p:cNvSpPr/>
+          <p:nvPr/>
+        </p:nvSpPr>
+        <p:spPr>
+          <a:xfrm>
+            <a:off x="6263640" y="4773168"/>
+            <a:ext cx="3063240" cy="347472"/>
           </a:xfrm>
           <a:prstGeom prst="rect">
             <a:avLst/>
@@ -11367,7 +11342,7 @@
                 <a:ea typeface="Pretendard Medium" pitchFamily="34" charset="-122"/>
                 <a:cs typeface="Pretendard Medium" pitchFamily="34" charset="-120"/>
               </a:rPr>
-              <a:t>     ├─ skills/ · agents/ · commands/</a:t>
+              <a:t>     ├─ .mcp.json</a:t>
             </a:r>
             <a:endParaRPr lang="en-US" sz="1050" dirty="0"/>
           </a:p>
@@ -11375,14 +11350,56 @@
       </p:sp>
       <p:sp>
         <p:nvSpPr>
-          <p:cNvPr id="38" name="Text 36"/>
-          <p:cNvSpPr/>
-          <p:nvPr/>
-        </p:nvSpPr>
-        <p:spPr>
-          <a:xfrm>
-            <a:off x="6263640" y="4864608"/>
-            <a:ext cx="3200400" cy="310896"/>
+          <p:cNvPr id="34" name="Text 32"/>
+          <p:cNvSpPr/>
+          <p:nvPr/>
+        </p:nvSpPr>
+        <p:spPr>
+          <a:xfrm>
+            <a:off x="9418320" y="4773168"/>
+            <a:ext cx="1721815" cy="347472"/>
+          </a:xfrm>
+          <a:prstGeom prst="rect">
+            <a:avLst/>
+          </a:prstGeom>
+          <a:noFill/>
+          <a:ln/>
+        </p:spPr>
+        <p:txBody>
+          <a:bodyPr wrap="square" lIns="0" tIns="0" rIns="0" bIns="0" rtlCol="0" anchor="ctr"/>
+          <a:lstStyle/>
+          <a:p>
+            <a:pPr algn="l" indent="0" marL="0">
+              <a:lnSpc>
+                <a:spcPct val="100000"/>
+              </a:lnSpc>
+              <a:buNone/>
+            </a:pPr>
+            <a:r>
+              <a:rPr lang="en-US" sz="1000" dirty="0">
+                <a:solidFill>
+                  <a:srgbClr val="6C4CFF"/>
+                </a:solidFill>
+                <a:latin typeface="Pretendard" pitchFamily="34" charset="0"/>
+                <a:ea typeface="Pretendard" pitchFamily="34" charset="-122"/>
+                <a:cs typeface="Pretendard" pitchFamily="34" charset="-120"/>
+              </a:rPr>
+              <a:t>Figma</a:t>
+            </a:r>
+            <a:endParaRPr lang="en-US" sz="1000" dirty="0"/>
+          </a:p>
+        </p:txBody>
+      </p:sp>
+      <p:sp>
+        <p:nvSpPr>
+          <p:cNvPr id="35" name="Text 33"/>
+          <p:cNvSpPr/>
+          <p:nvPr/>
+        </p:nvSpPr>
+        <p:spPr>
+          <a:xfrm>
+            <a:off x="6263640" y="5120640"/>
+            <a:ext cx="3063240" cy="347472"/>
           </a:xfrm>
           <a:prstGeom prst="rect">
             <a:avLst/>
@@ -11409,7 +11426,7 @@
                 <a:ea typeface="Pretendard Medium" pitchFamily="34" charset="-122"/>
                 <a:cs typeface="Pretendard Medium" pitchFamily="34" charset="-120"/>
               </a:rPr>
-              <a:t>     ├─ .mcp.json</a:t>
+              <a:t>     └─ ONBOARDING.md</a:t>
             </a:r>
             <a:endParaRPr lang="en-US" sz="1050" dirty="0"/>
           </a:p>
@@ -11417,14 +11434,14 @@
       </p:sp>
       <p:sp>
         <p:nvSpPr>
-          <p:cNvPr id="39" name="Text 37"/>
-          <p:cNvSpPr/>
-          <p:nvPr/>
-        </p:nvSpPr>
-        <p:spPr>
-          <a:xfrm>
-            <a:off x="9555480" y="4864608"/>
-            <a:ext cx="1584655" cy="310896"/>
+          <p:cNvPr id="36" name="Text 34"/>
+          <p:cNvSpPr/>
+          <p:nvPr/>
+        </p:nvSpPr>
+        <p:spPr>
+          <a:xfrm>
+            <a:off x="9418320" y="5120640"/>
+            <a:ext cx="1721815" cy="347472"/>
           </a:xfrm>
           <a:prstGeom prst="rect">
             <a:avLst/>
@@ -11451,7 +11468,7 @@
                 <a:ea typeface="Pretendard" pitchFamily="34" charset="-122"/>
                 <a:cs typeface="Pretendard" pitchFamily="34" charset="-120"/>
               </a:rPr>
-              <a:t>Figma</a:t>
+              <a:t>로그인·셋업</a:t>
             </a:r>
             <a:endParaRPr lang="en-US" sz="1000" dirty="0"/>
           </a:p>
@@ -11459,49 +11476,7 @@
       </p:sp>
       <p:sp>
         <p:nvSpPr>
-          <p:cNvPr id="40" name="Text 38"/>
-          <p:cNvSpPr/>
-          <p:nvPr/>
-        </p:nvSpPr>
-        <p:spPr>
-          <a:xfrm>
-            <a:off x="6263640" y="5175504"/>
-            <a:ext cx="3200400" cy="310896"/>
-          </a:xfrm>
-          <a:prstGeom prst="rect">
-            <a:avLst/>
-          </a:prstGeom>
-          <a:noFill/>
-          <a:ln/>
-        </p:spPr>
-        <p:txBody>
-          <a:bodyPr wrap="square" lIns="0" tIns="0" rIns="0" bIns="0" rtlCol="0" anchor="ctr"/>
-          <a:lstStyle/>
-          <a:p>
-            <a:pPr algn="l" indent="0" marL="0">
-              <a:lnSpc>
-                <a:spcPct val="100000"/>
-              </a:lnSpc>
-              <a:buNone/>
-            </a:pPr>
-            <a:r>
-              <a:rPr lang="en-US" sz="1050" dirty="0">
-                <a:solidFill>
-                  <a:srgbClr val="1D1D1F"/>
-                </a:solidFill>
-                <a:latin typeface="Pretendard Medium" pitchFamily="34" charset="0"/>
-                <a:ea typeface="Pretendard Medium" pitchFamily="34" charset="-122"/>
-                <a:cs typeface="Pretendard Medium" pitchFamily="34" charset="-120"/>
-              </a:rPr>
-              <a:t>     └─ 경로 가이드 · 브랜드 토큰</a:t>
-            </a:r>
-            <a:endParaRPr lang="en-US" sz="1050" dirty="0"/>
-          </a:p>
-        </p:txBody>
-      </p:sp>
-      <p:sp>
-        <p:nvSpPr>
-          <p:cNvPr id="41" name="Text 39"/>
+          <p:cNvPr id="37" name="Text 35"/>
           <p:cNvSpPr/>
           <p:nvPr/>
         </p:nvSpPr>
@@ -21715,7 +21690,7 @@
                 <a:ea typeface="Pretendard" pitchFamily="34" charset="-122"/>
                 <a:cs typeface="Pretendard" pitchFamily="34" charset="-120"/>
               </a:rPr>
-              <a:t>어드민 제외 · 고객이 쓰는 축으로 분류. ●◐○로 문서 유무도 함께 표시.</a:t>
+              <a:t>어드민 제외 · 고객이 쓰는 두 갈래(대시보드 · 에디터). ●◐○로 문서 유무 표시.</a:t>
             </a:r>
             <a:endParaRPr lang="en-US" sz="1500" dirty="0"/>
           </a:p>
@@ -22193,8 +22168,8 @@
         </p:nvSpPr>
         <p:spPr>
           <a:xfrm>
-            <a:off x="2148840" y="3090672"/>
-            <a:ext cx="7863840" cy="0"/>
+            <a:off x="3346704" y="3090672"/>
+            <a:ext cx="5495544" cy="0"/>
           </a:xfrm>
           <a:prstGeom prst="line">
             <a:avLst/>
@@ -22216,8 +22191,8 @@
         </p:nvSpPr>
         <p:spPr>
           <a:xfrm>
-            <a:off x="2458669" y="3090672"/>
-            <a:ext cx="0" cy="109728"/>
+            <a:off x="3345104" y="3090672"/>
+            <a:ext cx="0" cy="-27432"/>
           </a:xfrm>
           <a:prstGeom prst="line">
             <a:avLst/>
@@ -22239,12 +22214,12 @@
         </p:nvSpPr>
         <p:spPr>
           <a:xfrm>
-            <a:off x="777240" y="3200400"/>
-            <a:ext cx="3362858" cy="2121408"/>
+            <a:off x="777240" y="3063240"/>
+            <a:ext cx="5135728" cy="2450592"/>
           </a:xfrm>
           <a:prstGeom prst="roundRect">
             <a:avLst>
-              <a:gd name="adj" fmla="val 5172"/>
+              <a:gd name="adj" fmla="val 4478"/>
             </a:avLst>
           </a:prstGeom>
           <a:solidFill>
@@ -22266,7 +22241,7 @@
         </p:nvSpPr>
         <p:spPr>
           <a:xfrm>
-            <a:off x="1033272" y="3419856"/>
+            <a:off x="1069848" y="3282696"/>
             <a:ext cx="457200" cy="365760"/>
           </a:xfrm>
           <a:prstGeom prst="rect">
@@ -22294,7 +22269,7 @@
                 <a:ea typeface="Pretendard" pitchFamily="34" charset="-122"/>
                 <a:cs typeface="Pretendard" pitchFamily="34" charset="-120"/>
               </a:rPr>
-              <a:t>ⓐ</a:t>
+              <a:t>Ⓐ</a:t>
             </a:r>
             <a:endParaRPr lang="en-US" sz="1800" dirty="0"/>
           </a:p>
@@ -22308,8 +22283,8 @@
         </p:nvSpPr>
         <p:spPr>
           <a:xfrm>
-            <a:off x="1490472" y="3474720"/>
-            <a:ext cx="2448458" cy="320040"/>
+            <a:off x="1554480" y="3337560"/>
+            <a:ext cx="4129888" cy="320040"/>
           </a:xfrm>
           <a:prstGeom prst="rect">
             <a:avLst/>
@@ -22336,7 +22311,7 @@
                 <a:ea typeface="Pretendard SemiBold" pitchFamily="34" charset="-122"/>
                 <a:cs typeface="Pretendard SemiBold" pitchFamily="34" charset="-120"/>
               </a:rPr>
-              <a:t>시작</a:t>
+              <a:t>대시보드 (계정)</a:t>
             </a:r>
             <a:endParaRPr lang="en-US" sz="1500" dirty="0"/>
           </a:p>
@@ -22350,8 +22325,8 @@
         </p:nvSpPr>
         <p:spPr>
           <a:xfrm>
-            <a:off x="1033272" y="3931920"/>
-            <a:ext cx="2850794" cy="0"/>
+            <a:off x="1069848" y="3794760"/>
+            <a:ext cx="4550512" cy="0"/>
           </a:xfrm>
           <a:prstGeom prst="line">
             <a:avLst/>
@@ -22373,7 +22348,7 @@
         </p:nvSpPr>
         <p:spPr>
           <a:xfrm>
-            <a:off x="1051560" y="4059936"/>
+            <a:off x="1088136" y="3941064"/>
             <a:ext cx="228600" cy="274320"/>
           </a:xfrm>
           <a:prstGeom prst="rect">
@@ -22383,7 +22358,7 @@
           <a:ln/>
         </p:spPr>
         <p:txBody>
-          <a:bodyPr wrap="square" lIns="0" tIns="0" rIns="0" bIns="0" rtlCol="0" anchor="t"/>
+          <a:bodyPr wrap="square" lIns="0" tIns="0" rIns="0" bIns="0" rtlCol="0" anchor="ctr"/>
           <a:lstStyle/>
           <a:p>
             <a:pPr algn="l" indent="0" marL="0">
@@ -22393,7 +22368,7 @@
               <a:buNone/>
             </a:pPr>
             <a:r>
-              <a:rPr lang="en-US" sz="1100" dirty="0">
+              <a:rPr lang="en-US" sz="1150" dirty="0">
                 <a:solidFill>
                   <a:srgbClr val="6E6E73"/>
                 </a:solidFill>
@@ -22403,7 +22378,7 @@
               </a:rPr>
               <a:t>○</a:t>
             </a:r>
-            <a:endParaRPr lang="en-US" sz="1100" dirty="0"/>
+            <a:endParaRPr lang="en-US" sz="1150" dirty="0"/>
           </a:p>
         </p:txBody>
       </p:sp>
@@ -22415,27 +22390,27 @@
         </p:nvSpPr>
         <p:spPr>
           <a:xfrm>
-            <a:off x="1307592" y="4041648"/>
-            <a:ext cx="2631338" cy="292608"/>
-          </a:xfrm>
-          <a:prstGeom prst="rect">
-            <a:avLst/>
-          </a:prstGeom>
-          <a:noFill/>
-          <a:ln/>
-        </p:spPr>
-        <p:txBody>
-          <a:bodyPr wrap="square" lIns="0" tIns="0" rIns="0" bIns="0" rtlCol="0" anchor="t"/>
-          <a:lstStyle/>
-          <a:p>
-            <a:pPr algn="l" indent="0" marL="0">
-              <a:lnSpc>
-                <a:spcPct val="120000"/>
-              </a:lnSpc>
-              <a:buNone/>
-            </a:pPr>
-            <a:r>
-              <a:rPr lang="en-US" sz="1150" dirty="0">
+            <a:off x="1362456" y="3941064"/>
+            <a:ext cx="4312768" cy="274320"/>
+          </a:xfrm>
+          <a:prstGeom prst="rect">
+            <a:avLst/>
+          </a:prstGeom>
+          <a:noFill/>
+          <a:ln/>
+        </p:spPr>
+        <p:txBody>
+          <a:bodyPr wrap="square" lIns="0" tIns="0" rIns="0" bIns="0" rtlCol="0" anchor="ctr"/>
+          <a:lstStyle/>
+          <a:p>
+            <a:pPr algn="l" indent="0" marL="0">
+              <a:lnSpc>
+                <a:spcPct val="130000"/>
+              </a:lnSpc>
+              <a:buNone/>
+            </a:pPr>
+            <a:r>
+              <a:rPr lang="en-US" sz="1200" dirty="0">
                 <a:solidFill>
                   <a:srgbClr val="55555A"/>
                 </a:solidFill>
@@ -22443,9 +22418,9 @@
                 <a:ea typeface="Pretendard" pitchFamily="34" charset="-122"/>
                 <a:cs typeface="Pretendard" pitchFamily="34" charset="-120"/>
               </a:rPr>
-              <a:t>회원가입</a:t>
-            </a:r>
-            <a:endParaRPr lang="en-US" sz="1150" dirty="0"/>
+              <a:t>회원가입 · 로그인</a:t>
+            </a:r>
+            <a:endParaRPr lang="en-US" sz="1200" dirty="0"/>
           </a:p>
         </p:txBody>
       </p:sp>
@@ -22457,7 +22432,7 @@
         </p:nvSpPr>
         <p:spPr>
           <a:xfrm>
-            <a:off x="1051560" y="4370832"/>
+            <a:off x="1088136" y="4215384"/>
             <a:ext cx="228600" cy="274320"/>
           </a:xfrm>
           <a:prstGeom prst="rect">
@@ -22467,7 +22442,7 @@
           <a:ln/>
         </p:spPr>
         <p:txBody>
-          <a:bodyPr wrap="square" lIns="0" tIns="0" rIns="0" bIns="0" rtlCol="0" anchor="t"/>
+          <a:bodyPr wrap="square" lIns="0" tIns="0" rIns="0" bIns="0" rtlCol="0" anchor="ctr"/>
           <a:lstStyle/>
           <a:p>
             <a:pPr algn="l" indent="0" marL="0">
@@ -22477,7 +22452,7 @@
               <a:buNone/>
             </a:pPr>
             <a:r>
-              <a:rPr lang="en-US" sz="1100" dirty="0">
+              <a:rPr lang="en-US" sz="1150" dirty="0">
                 <a:solidFill>
                   <a:srgbClr val="6E6E73"/>
                 </a:solidFill>
@@ -22487,7 +22462,7 @@
               </a:rPr>
               <a:t>◐</a:t>
             </a:r>
-            <a:endParaRPr lang="en-US" sz="1100" dirty="0"/>
+            <a:endParaRPr lang="en-US" sz="1150" dirty="0"/>
           </a:p>
         </p:txBody>
       </p:sp>
@@ -22499,27 +22474,27 @@
         </p:nvSpPr>
         <p:spPr>
           <a:xfrm>
-            <a:off x="1307592" y="4352544"/>
-            <a:ext cx="2631338" cy="292608"/>
-          </a:xfrm>
-          <a:prstGeom prst="rect">
-            <a:avLst/>
-          </a:prstGeom>
-          <a:noFill/>
-          <a:ln/>
-        </p:spPr>
-        <p:txBody>
-          <a:bodyPr wrap="square" lIns="0" tIns="0" rIns="0" bIns="0" rtlCol="0" anchor="t"/>
-          <a:lstStyle/>
-          <a:p>
-            <a:pPr algn="l" indent="0" marL="0">
-              <a:lnSpc>
-                <a:spcPct val="120000"/>
-              </a:lnSpc>
-              <a:buNone/>
-            </a:pPr>
-            <a:r>
-              <a:rPr lang="en-US" sz="1150" dirty="0">
+            <a:off x="1362456" y="4215384"/>
+            <a:ext cx="4312768" cy="274320"/>
+          </a:xfrm>
+          <a:prstGeom prst="rect">
+            <a:avLst/>
+          </a:prstGeom>
+          <a:noFill/>
+          <a:ln/>
+        </p:spPr>
+        <p:txBody>
+          <a:bodyPr wrap="square" lIns="0" tIns="0" rIns="0" bIns="0" rtlCol="0" anchor="ctr"/>
+          <a:lstStyle/>
+          <a:p>
+            <a:pPr algn="l" indent="0" marL="0">
+              <a:lnSpc>
+                <a:spcPct val="130000"/>
+              </a:lnSpc>
+              <a:buNone/>
+            </a:pPr>
+            <a:r>
+              <a:rPr lang="en-US" sz="1200" dirty="0">
                 <a:solidFill>
                   <a:srgbClr val="55555A"/>
                 </a:solidFill>
@@ -22529,20 +22504,356 @@
               </a:rPr>
               <a:t>템플릿 선택 → 페이지 생성</a:t>
             </a:r>
+            <a:endParaRPr lang="en-US" sz="1200" dirty="0"/>
+          </a:p>
+        </p:txBody>
+      </p:sp>
+      <p:sp>
+        <p:nvSpPr>
+          <p:cNvPr id="28" name="Text 26"/>
+          <p:cNvSpPr/>
+          <p:nvPr/>
+        </p:nvSpPr>
+        <p:spPr>
+          <a:xfrm>
+            <a:off x="1088136" y="4489704"/>
+            <a:ext cx="228600" cy="274320"/>
+          </a:xfrm>
+          <a:prstGeom prst="rect">
+            <a:avLst/>
+          </a:prstGeom>
+          <a:noFill/>
+          <a:ln/>
+        </p:spPr>
+        <p:txBody>
+          <a:bodyPr wrap="square" lIns="0" tIns="0" rIns="0" bIns="0" rtlCol="0" anchor="ctr"/>
+          <a:lstStyle/>
+          <a:p>
+            <a:pPr algn="l" indent="0" marL="0">
+              <a:lnSpc>
+                <a:spcPct val="130000"/>
+              </a:lnSpc>
+              <a:buNone/>
+            </a:pPr>
+            <a:r>
+              <a:rPr lang="en-US" sz="1150" dirty="0">
+                <a:solidFill>
+                  <a:srgbClr val="6E6E73"/>
+                </a:solidFill>
+                <a:latin typeface="Pretendard Medium" pitchFamily="34" charset="0"/>
+                <a:ea typeface="Pretendard Medium" pitchFamily="34" charset="-122"/>
+                <a:cs typeface="Pretendard Medium" pitchFamily="34" charset="-120"/>
+              </a:rPr>
+              <a:t>○</a:t>
+            </a:r>
             <a:endParaRPr lang="en-US" sz="1150" dirty="0"/>
           </a:p>
         </p:txBody>
       </p:sp>
       <p:sp>
         <p:nvSpPr>
-          <p:cNvPr id="28" name="Shape 26"/>
-          <p:cNvSpPr/>
-          <p:nvPr/>
-        </p:nvSpPr>
-        <p:spPr>
-          <a:xfrm>
-            <a:off x="6095848" y="3090672"/>
-            <a:ext cx="0" cy="109728"/>
+          <p:cNvPr id="29" name="Text 27"/>
+          <p:cNvSpPr/>
+          <p:nvPr/>
+        </p:nvSpPr>
+        <p:spPr>
+          <a:xfrm>
+            <a:off x="1362456" y="4489704"/>
+            <a:ext cx="4312768" cy="274320"/>
+          </a:xfrm>
+          <a:prstGeom prst="rect">
+            <a:avLst/>
+          </a:prstGeom>
+          <a:noFill/>
+          <a:ln/>
+        </p:spPr>
+        <p:txBody>
+          <a:bodyPr wrap="square" lIns="0" tIns="0" rIns="0" bIns="0" rtlCol="0" anchor="ctr"/>
+          <a:lstStyle/>
+          <a:p>
+            <a:pPr algn="l" indent="0" marL="0">
+              <a:lnSpc>
+                <a:spcPct val="130000"/>
+              </a:lnSpc>
+              <a:buNone/>
+            </a:pPr>
+            <a:r>
+              <a:rPr lang="en-US" sz="1200" dirty="0">
+                <a:solidFill>
+                  <a:srgbClr val="55555A"/>
+                </a:solidFill>
+                <a:latin typeface="Pretendard" pitchFamily="34" charset="0"/>
+                <a:ea typeface="Pretendard" pitchFamily="34" charset="-122"/>
+                <a:cs typeface="Pretendard" pitchFamily="34" charset="-120"/>
+              </a:rPr>
+              <a:t>홈 · 내 페이지 · 공유 · 버전</a:t>
+            </a:r>
+            <a:endParaRPr lang="en-US" sz="1200" dirty="0"/>
+          </a:p>
+        </p:txBody>
+      </p:sp>
+      <p:sp>
+        <p:nvSpPr>
+          <p:cNvPr id="30" name="Text 28"/>
+          <p:cNvSpPr/>
+          <p:nvPr/>
+        </p:nvSpPr>
+        <p:spPr>
+          <a:xfrm>
+            <a:off x="1088136" y="4764024"/>
+            <a:ext cx="228600" cy="274320"/>
+          </a:xfrm>
+          <a:prstGeom prst="rect">
+            <a:avLst/>
+          </a:prstGeom>
+          <a:noFill/>
+          <a:ln/>
+        </p:spPr>
+        <p:txBody>
+          <a:bodyPr wrap="square" lIns="0" tIns="0" rIns="0" bIns="0" rtlCol="0" anchor="ctr"/>
+          <a:lstStyle/>
+          <a:p>
+            <a:pPr algn="l" indent="0" marL="0">
+              <a:lnSpc>
+                <a:spcPct val="130000"/>
+              </a:lnSpc>
+              <a:buNone/>
+            </a:pPr>
+            <a:r>
+              <a:rPr lang="en-US" sz="1150" dirty="0">
+                <a:solidFill>
+                  <a:srgbClr val="6E6E73"/>
+                </a:solidFill>
+                <a:latin typeface="Pretendard Medium" pitchFamily="34" charset="0"/>
+                <a:ea typeface="Pretendard Medium" pitchFamily="34" charset="-122"/>
+                <a:cs typeface="Pretendard Medium" pitchFamily="34" charset="-120"/>
+              </a:rPr>
+              <a:t>○</a:t>
+            </a:r>
+            <a:endParaRPr lang="en-US" sz="1150" dirty="0"/>
+          </a:p>
+        </p:txBody>
+      </p:sp>
+      <p:sp>
+        <p:nvSpPr>
+          <p:cNvPr id="31" name="Text 29"/>
+          <p:cNvSpPr/>
+          <p:nvPr/>
+        </p:nvSpPr>
+        <p:spPr>
+          <a:xfrm>
+            <a:off x="1362456" y="4764024"/>
+            <a:ext cx="4312768" cy="274320"/>
+          </a:xfrm>
+          <a:prstGeom prst="rect">
+            <a:avLst/>
+          </a:prstGeom>
+          <a:noFill/>
+          <a:ln/>
+        </p:spPr>
+        <p:txBody>
+          <a:bodyPr wrap="square" lIns="0" tIns="0" rIns="0" bIns="0" rtlCol="0" anchor="ctr"/>
+          <a:lstStyle/>
+          <a:p>
+            <a:pPr algn="l" indent="0" marL="0">
+              <a:lnSpc>
+                <a:spcPct val="130000"/>
+              </a:lnSpc>
+              <a:buNone/>
+            </a:pPr>
+            <a:r>
+              <a:rPr lang="en-US" sz="1200" dirty="0">
+                <a:solidFill>
+                  <a:srgbClr val="55555A"/>
+                </a:solidFill>
+                <a:latin typeface="Pretendard" pitchFamily="34" charset="0"/>
+                <a:ea typeface="Pretendard" pitchFamily="34" charset="-122"/>
+                <a:cs typeface="Pretendard" pitchFamily="34" charset="-120"/>
+              </a:rPr>
+              <a:t>페이지 · URL 통계</a:t>
+            </a:r>
+            <a:endParaRPr lang="en-US" sz="1200" dirty="0"/>
+          </a:p>
+        </p:txBody>
+      </p:sp>
+      <p:sp>
+        <p:nvSpPr>
+          <p:cNvPr id="32" name="Text 30"/>
+          <p:cNvSpPr/>
+          <p:nvPr/>
+        </p:nvSpPr>
+        <p:spPr>
+          <a:xfrm>
+            <a:off x="1088136" y="5038344"/>
+            <a:ext cx="228600" cy="274320"/>
+          </a:xfrm>
+          <a:prstGeom prst="rect">
+            <a:avLst/>
+          </a:prstGeom>
+          <a:noFill/>
+          <a:ln/>
+        </p:spPr>
+        <p:txBody>
+          <a:bodyPr wrap="square" lIns="0" tIns="0" rIns="0" bIns="0" rtlCol="0" anchor="ctr"/>
+          <a:lstStyle/>
+          <a:p>
+            <a:pPr algn="l" indent="0" marL="0">
+              <a:lnSpc>
+                <a:spcPct val="130000"/>
+              </a:lnSpc>
+              <a:buNone/>
+            </a:pPr>
+            <a:r>
+              <a:rPr lang="en-US" sz="1150" dirty="0">
+                <a:solidFill>
+                  <a:srgbClr val="6E6E73"/>
+                </a:solidFill>
+                <a:latin typeface="Pretendard Medium" pitchFamily="34" charset="0"/>
+                <a:ea typeface="Pretendard Medium" pitchFamily="34" charset="-122"/>
+                <a:cs typeface="Pretendard Medium" pitchFamily="34" charset="-120"/>
+              </a:rPr>
+              <a:t>○</a:t>
+            </a:r>
+            <a:endParaRPr lang="en-US" sz="1150" dirty="0"/>
+          </a:p>
+        </p:txBody>
+      </p:sp>
+      <p:sp>
+        <p:nvSpPr>
+          <p:cNvPr id="33" name="Text 31"/>
+          <p:cNvSpPr/>
+          <p:nvPr/>
+        </p:nvSpPr>
+        <p:spPr>
+          <a:xfrm>
+            <a:off x="1362456" y="5038344"/>
+            <a:ext cx="4312768" cy="274320"/>
+          </a:xfrm>
+          <a:prstGeom prst="rect">
+            <a:avLst/>
+          </a:prstGeom>
+          <a:noFill/>
+          <a:ln/>
+        </p:spPr>
+        <p:txBody>
+          <a:bodyPr wrap="square" lIns="0" tIns="0" rIns="0" bIns="0" rtlCol="0" anchor="ctr"/>
+          <a:lstStyle/>
+          <a:p>
+            <a:pPr algn="l" indent="0" marL="0">
+              <a:lnSpc>
+                <a:spcPct val="130000"/>
+              </a:lnSpc>
+              <a:buNone/>
+            </a:pPr>
+            <a:r>
+              <a:rPr lang="en-US" sz="1200" dirty="0">
+                <a:solidFill>
+                  <a:srgbClr val="55555A"/>
+                </a:solidFill>
+                <a:latin typeface="Pretendard" pitchFamily="34" charset="0"/>
+                <a:ea typeface="Pretendard" pitchFamily="34" charset="-122"/>
+                <a:cs typeface="Pretendard" pitchFamily="34" charset="-120"/>
+              </a:rPr>
+              <a:t>계정 · 내 주소 · 권한</a:t>
+            </a:r>
+            <a:endParaRPr lang="en-US" sz="1200" dirty="0"/>
+          </a:p>
+        </p:txBody>
+      </p:sp>
+      <p:sp>
+        <p:nvSpPr>
+          <p:cNvPr id="34" name="Text 32"/>
+          <p:cNvSpPr/>
+          <p:nvPr/>
+        </p:nvSpPr>
+        <p:spPr>
+          <a:xfrm>
+            <a:off x="1088136" y="5312664"/>
+            <a:ext cx="228600" cy="274320"/>
+          </a:xfrm>
+          <a:prstGeom prst="rect">
+            <a:avLst/>
+          </a:prstGeom>
+          <a:noFill/>
+          <a:ln/>
+        </p:spPr>
+        <p:txBody>
+          <a:bodyPr wrap="square" lIns="0" tIns="0" rIns="0" bIns="0" rtlCol="0" anchor="ctr"/>
+          <a:lstStyle/>
+          <a:p>
+            <a:pPr algn="l" indent="0" marL="0">
+              <a:lnSpc>
+                <a:spcPct val="130000"/>
+              </a:lnSpc>
+              <a:buNone/>
+            </a:pPr>
+            <a:r>
+              <a:rPr lang="en-US" sz="1150" dirty="0">
+                <a:solidFill>
+                  <a:srgbClr val="6E6E73"/>
+                </a:solidFill>
+                <a:latin typeface="Pretendard Medium" pitchFamily="34" charset="0"/>
+                <a:ea typeface="Pretendard Medium" pitchFamily="34" charset="-122"/>
+                <a:cs typeface="Pretendard Medium" pitchFamily="34" charset="-120"/>
+              </a:rPr>
+              <a:t>◐</a:t>
+            </a:r>
+            <a:endParaRPr lang="en-US" sz="1150" dirty="0"/>
+          </a:p>
+        </p:txBody>
+      </p:sp>
+      <p:sp>
+        <p:nvSpPr>
+          <p:cNvPr id="35" name="Text 33"/>
+          <p:cNvSpPr/>
+          <p:nvPr/>
+        </p:nvSpPr>
+        <p:spPr>
+          <a:xfrm>
+            <a:off x="1362456" y="5312664"/>
+            <a:ext cx="4312768" cy="274320"/>
+          </a:xfrm>
+          <a:prstGeom prst="rect">
+            <a:avLst/>
+          </a:prstGeom>
+          <a:noFill/>
+          <a:ln/>
+        </p:spPr>
+        <p:txBody>
+          <a:bodyPr wrap="square" lIns="0" tIns="0" rIns="0" bIns="0" rtlCol="0" anchor="ctr"/>
+          <a:lstStyle/>
+          <a:p>
+            <a:pPr algn="l" indent="0" marL="0">
+              <a:lnSpc>
+                <a:spcPct val="130000"/>
+              </a:lnSpc>
+              <a:buNone/>
+            </a:pPr>
+            <a:r>
+              <a:rPr lang="en-US" sz="1200" dirty="0">
+                <a:solidFill>
+                  <a:srgbClr val="55555A"/>
+                </a:solidFill>
+                <a:latin typeface="Pretendard" pitchFamily="34" charset="0"/>
+                <a:ea typeface="Pretendard" pitchFamily="34" charset="-122"/>
+                <a:cs typeface="Pretendard" pitchFamily="34" charset="-120"/>
+              </a:rPr>
+              <a:t>요금 · 결제</a:t>
+            </a:r>
+            <a:endParaRPr lang="en-US" sz="1200" dirty="0"/>
+          </a:p>
+        </p:txBody>
+      </p:sp>
+      <p:sp>
+        <p:nvSpPr>
+          <p:cNvPr id="36" name="Shape 34"/>
+          <p:cNvSpPr/>
+          <p:nvPr/>
+        </p:nvSpPr>
+        <p:spPr>
+          <a:xfrm>
+            <a:off x="8846591" y="3090672"/>
+            <a:ext cx="0" cy="-27432"/>
           </a:xfrm>
           <a:prstGeom prst="line">
             <a:avLst/>
@@ -22558,18 +22869,18 @@
       </p:sp>
       <p:sp>
         <p:nvSpPr>
-          <p:cNvPr id="29" name="Shape 27"/>
-          <p:cNvSpPr/>
-          <p:nvPr/>
-        </p:nvSpPr>
-        <p:spPr>
-          <a:xfrm>
-            <a:off x="4414418" y="3200400"/>
-            <a:ext cx="3362858" cy="2121408"/>
+          <p:cNvPr id="37" name="Shape 35"/>
+          <p:cNvSpPr/>
+          <p:nvPr/>
+        </p:nvSpPr>
+        <p:spPr>
+          <a:xfrm>
+            <a:off x="6278728" y="3063240"/>
+            <a:ext cx="5135728" cy="2450592"/>
           </a:xfrm>
           <a:prstGeom prst="roundRect">
             <a:avLst>
-              <a:gd name="adj" fmla="val 5172"/>
+              <a:gd name="adj" fmla="val 4478"/>
             </a:avLst>
           </a:prstGeom>
           <a:solidFill>
@@ -22585,13 +22896,13 @@
       </p:sp>
       <p:sp>
         <p:nvSpPr>
-          <p:cNvPr id="30" name="Text 28"/>
-          <p:cNvSpPr/>
-          <p:nvPr/>
-        </p:nvSpPr>
-        <p:spPr>
-          <a:xfrm>
-            <a:off x="4670450" y="3419856"/>
+          <p:cNvPr id="38" name="Text 36"/>
+          <p:cNvSpPr/>
+          <p:nvPr/>
+        </p:nvSpPr>
+        <p:spPr>
+          <a:xfrm>
+            <a:off x="6571336" y="3282696"/>
             <a:ext cx="457200" cy="365760"/>
           </a:xfrm>
           <a:prstGeom prst="rect">
@@ -22619,7 +22930,7 @@
                 <a:ea typeface="Pretendard" pitchFamily="34" charset="-122"/>
                 <a:cs typeface="Pretendard" pitchFamily="34" charset="-120"/>
               </a:rPr>
-              <a:t>ⓑ</a:t>
+              <a:t>Ⓑ</a:t>
             </a:r>
             <a:endParaRPr lang="en-US" sz="1800" dirty="0"/>
           </a:p>
@@ -22627,14 +22938,14 @@
       </p:sp>
       <p:sp>
         <p:nvSpPr>
-          <p:cNvPr id="31" name="Text 29"/>
-          <p:cNvSpPr/>
-          <p:nvPr/>
-        </p:nvSpPr>
-        <p:spPr>
-          <a:xfrm>
-            <a:off x="5127650" y="3474720"/>
-            <a:ext cx="2448458" cy="320040"/>
+          <p:cNvPr id="39" name="Text 37"/>
+          <p:cNvSpPr/>
+          <p:nvPr/>
+        </p:nvSpPr>
+        <p:spPr>
+          <a:xfrm>
+            <a:off x="7055968" y="3337560"/>
+            <a:ext cx="4129888" cy="320040"/>
           </a:xfrm>
           <a:prstGeom prst="rect">
             <a:avLst/>
@@ -22661,7 +22972,7 @@
                 <a:ea typeface="Pretendard SemiBold" pitchFamily="34" charset="-122"/>
                 <a:cs typeface="Pretendard SemiBold" pitchFamily="34" charset="-120"/>
               </a:rPr>
-              <a:t>대시보드 (계정)</a:t>
+              <a:t>에디터</a:t>
             </a:r>
             <a:endParaRPr lang="en-US" sz="1500" dirty="0"/>
           </a:p>
@@ -22669,14 +22980,14 @@
       </p:sp>
       <p:sp>
         <p:nvSpPr>
-          <p:cNvPr id="32" name="Shape 30"/>
-          <p:cNvSpPr/>
-          <p:nvPr/>
-        </p:nvSpPr>
-        <p:spPr>
-          <a:xfrm>
-            <a:off x="4670450" y="3931920"/>
-            <a:ext cx="2850794" cy="0"/>
+          <p:cNvPr id="40" name="Shape 38"/>
+          <p:cNvSpPr/>
+          <p:nvPr/>
+        </p:nvSpPr>
+        <p:spPr>
+          <a:xfrm>
+            <a:off x="6571336" y="3794760"/>
+            <a:ext cx="4550512" cy="0"/>
           </a:xfrm>
           <a:prstGeom prst="line">
             <a:avLst/>
@@ -22692,13 +23003,13 @@
       </p:sp>
       <p:sp>
         <p:nvSpPr>
-          <p:cNvPr id="33" name="Text 31"/>
-          <p:cNvSpPr/>
-          <p:nvPr/>
-        </p:nvSpPr>
-        <p:spPr>
-          <a:xfrm>
-            <a:off x="4688738" y="4059936"/>
+          <p:cNvPr id="41" name="Text 39"/>
+          <p:cNvSpPr/>
+          <p:nvPr/>
+        </p:nvSpPr>
+        <p:spPr>
+          <a:xfrm>
+            <a:off x="6589624" y="3941064"/>
             <a:ext cx="228600" cy="274320"/>
           </a:xfrm>
           <a:prstGeom prst="rect">
@@ -22708,7 +23019,7 @@
           <a:ln/>
         </p:spPr>
         <p:txBody>
-          <a:bodyPr wrap="square" lIns="0" tIns="0" rIns="0" bIns="0" rtlCol="0" anchor="t"/>
+          <a:bodyPr wrap="square" lIns="0" tIns="0" rIns="0" bIns="0" rtlCol="0" anchor="ctr"/>
           <a:lstStyle/>
           <a:p>
             <a:pPr algn="l" indent="0" marL="0">
@@ -22718,49 +23029,49 @@
               <a:buNone/>
             </a:pPr>
             <a:r>
-              <a:rPr lang="en-US" sz="1100" dirty="0">
-                <a:solidFill>
-                  <a:srgbClr val="6E6E73"/>
+              <a:rPr lang="en-US" sz="1150" dirty="0">
+                <a:solidFill>
+                  <a:srgbClr val="6C4CFF"/>
                 </a:solidFill>
                 <a:latin typeface="Pretendard Medium" pitchFamily="34" charset="0"/>
                 <a:ea typeface="Pretendard Medium" pitchFamily="34" charset="-122"/>
                 <a:cs typeface="Pretendard Medium" pitchFamily="34" charset="-120"/>
               </a:rPr>
-              <a:t>○</a:t>
-            </a:r>
-            <a:endParaRPr lang="en-US" sz="1100" dirty="0"/>
-          </a:p>
-        </p:txBody>
-      </p:sp>
-      <p:sp>
-        <p:nvSpPr>
-          <p:cNvPr id="34" name="Text 32"/>
-          <p:cNvSpPr/>
-          <p:nvPr/>
-        </p:nvSpPr>
-        <p:spPr>
-          <a:xfrm>
-            <a:off x="4944770" y="4041648"/>
-            <a:ext cx="2631338" cy="292608"/>
-          </a:xfrm>
-          <a:prstGeom prst="rect">
-            <a:avLst/>
-          </a:prstGeom>
-          <a:noFill/>
-          <a:ln/>
-        </p:spPr>
-        <p:txBody>
-          <a:bodyPr wrap="square" lIns="0" tIns="0" rIns="0" bIns="0" rtlCol="0" anchor="t"/>
-          <a:lstStyle/>
-          <a:p>
-            <a:pPr algn="l" indent="0" marL="0">
-              <a:lnSpc>
-                <a:spcPct val="120000"/>
-              </a:lnSpc>
-              <a:buNone/>
-            </a:pPr>
-            <a:r>
-              <a:rPr lang="en-US" sz="1150" dirty="0">
+              <a:t>●</a:t>
+            </a:r>
+            <a:endParaRPr lang="en-US" sz="1150" dirty="0"/>
+          </a:p>
+        </p:txBody>
+      </p:sp>
+      <p:sp>
+        <p:nvSpPr>
+          <p:cNvPr id="42" name="Text 40"/>
+          <p:cNvSpPr/>
+          <p:nvPr/>
+        </p:nvSpPr>
+        <p:spPr>
+          <a:xfrm>
+            <a:off x="6863944" y="3941064"/>
+            <a:ext cx="4312768" cy="274320"/>
+          </a:xfrm>
+          <a:prstGeom prst="rect">
+            <a:avLst/>
+          </a:prstGeom>
+          <a:noFill/>
+          <a:ln/>
+        </p:spPr>
+        <p:txBody>
+          <a:bodyPr wrap="square" lIns="0" tIns="0" rIns="0" bIns="0" rtlCol="0" anchor="ctr"/>
+          <a:lstStyle/>
+          <a:p>
+            <a:pPr algn="l" indent="0" marL="0">
+              <a:lnSpc>
+                <a:spcPct val="130000"/>
+              </a:lnSpc>
+              <a:buNone/>
+            </a:pPr>
+            <a:r>
+              <a:rPr lang="en-US" sz="1200" dirty="0">
                 <a:solidFill>
                   <a:srgbClr val="55555A"/>
                 </a:solidFill>
@@ -22768,21 +23079,21 @@
                 <a:ea typeface="Pretendard" pitchFamily="34" charset="-122"/>
                 <a:cs typeface="Pretendard" pitchFamily="34" charset="-120"/>
               </a:rPr>
-              <a:t>홈 · 내 페이지 · 공유 · 버전</a:t>
-            </a:r>
-            <a:endParaRPr lang="en-US" sz="1150" dirty="0"/>
-          </a:p>
-        </p:txBody>
-      </p:sp>
-      <p:sp>
-        <p:nvSpPr>
-          <p:cNvPr id="35" name="Text 33"/>
-          <p:cNvSpPr/>
-          <p:nvPr/>
-        </p:nvSpPr>
-        <p:spPr>
-          <a:xfrm>
-            <a:off x="4688738" y="4370832"/>
+              <a:t>카드 15종 (+상품·코드)</a:t>
+            </a:r>
+            <a:endParaRPr lang="en-US" sz="1200" dirty="0"/>
+          </a:p>
+        </p:txBody>
+      </p:sp>
+      <p:sp>
+        <p:nvSpPr>
+          <p:cNvPr id="43" name="Text 41"/>
+          <p:cNvSpPr/>
+          <p:nvPr/>
+        </p:nvSpPr>
+        <p:spPr>
+          <a:xfrm>
+            <a:off x="6589624" y="4215384"/>
             <a:ext cx="228600" cy="274320"/>
           </a:xfrm>
           <a:prstGeom prst="rect">
@@ -22792,7 +23103,7 @@
           <a:ln/>
         </p:spPr>
         <p:txBody>
-          <a:bodyPr wrap="square" lIns="0" tIns="0" rIns="0" bIns="0" rtlCol="0" anchor="t"/>
+          <a:bodyPr wrap="square" lIns="0" tIns="0" rIns="0" bIns="0" rtlCol="0" anchor="ctr"/>
           <a:lstStyle/>
           <a:p>
             <a:pPr algn="l" indent="0" marL="0">
@@ -22802,49 +23113,49 @@
               <a:buNone/>
             </a:pPr>
             <a:r>
-              <a:rPr lang="en-US" sz="1100" dirty="0">
-                <a:solidFill>
-                  <a:srgbClr val="6E6E73"/>
+              <a:rPr lang="en-US" sz="1150" dirty="0">
+                <a:solidFill>
+                  <a:srgbClr val="6C4CFF"/>
                 </a:solidFill>
                 <a:latin typeface="Pretendard Medium" pitchFamily="34" charset="0"/>
                 <a:ea typeface="Pretendard Medium" pitchFamily="34" charset="-122"/>
                 <a:cs typeface="Pretendard Medium" pitchFamily="34" charset="-120"/>
               </a:rPr>
-              <a:t>○</a:t>
-            </a:r>
-            <a:endParaRPr lang="en-US" sz="1100" dirty="0"/>
-          </a:p>
-        </p:txBody>
-      </p:sp>
-      <p:sp>
-        <p:nvSpPr>
-          <p:cNvPr id="36" name="Text 34"/>
-          <p:cNvSpPr/>
-          <p:nvPr/>
-        </p:nvSpPr>
-        <p:spPr>
-          <a:xfrm>
-            <a:off x="4944770" y="4352544"/>
-            <a:ext cx="2631338" cy="292608"/>
-          </a:xfrm>
-          <a:prstGeom prst="rect">
-            <a:avLst/>
-          </a:prstGeom>
-          <a:noFill/>
-          <a:ln/>
-        </p:spPr>
-        <p:txBody>
-          <a:bodyPr wrap="square" lIns="0" tIns="0" rIns="0" bIns="0" rtlCol="0" anchor="t"/>
-          <a:lstStyle/>
-          <a:p>
-            <a:pPr algn="l" indent="0" marL="0">
-              <a:lnSpc>
-                <a:spcPct val="120000"/>
-              </a:lnSpc>
-              <a:buNone/>
-            </a:pPr>
-            <a:r>
-              <a:rPr lang="en-US" sz="1150" dirty="0">
+              <a:t>●</a:t>
+            </a:r>
+            <a:endParaRPr lang="en-US" sz="1150" dirty="0"/>
+          </a:p>
+        </p:txBody>
+      </p:sp>
+      <p:sp>
+        <p:nvSpPr>
+          <p:cNvPr id="44" name="Text 42"/>
+          <p:cNvSpPr/>
+          <p:nvPr/>
+        </p:nvSpPr>
+        <p:spPr>
+          <a:xfrm>
+            <a:off x="6863944" y="4215384"/>
+            <a:ext cx="4312768" cy="274320"/>
+          </a:xfrm>
+          <a:prstGeom prst="rect">
+            <a:avLst/>
+          </a:prstGeom>
+          <a:noFill/>
+          <a:ln/>
+        </p:spPr>
+        <p:txBody>
+          <a:bodyPr wrap="square" lIns="0" tIns="0" rIns="0" bIns="0" rtlCol="0" anchor="ctr"/>
+          <a:lstStyle/>
+          <a:p>
+            <a:pPr algn="l" indent="0" marL="0">
+              <a:lnSpc>
+                <a:spcPct val="130000"/>
+              </a:lnSpc>
+              <a:buNone/>
+            </a:pPr>
+            <a:r>
+              <a:rPr lang="en-US" sz="1200" dirty="0">
                 <a:solidFill>
                   <a:srgbClr val="55555A"/>
                 </a:solidFill>
@@ -22852,21 +23163,21 @@
                 <a:ea typeface="Pretendard" pitchFamily="34" charset="-122"/>
                 <a:cs typeface="Pretendard" pitchFamily="34" charset="-120"/>
               </a:rPr>
-              <a:t>페이지 · URL 통계</a:t>
-            </a:r>
-            <a:endParaRPr lang="en-US" sz="1150" dirty="0"/>
-          </a:p>
-        </p:txBody>
-      </p:sp>
-      <p:sp>
-        <p:nvSpPr>
-          <p:cNvPr id="37" name="Text 35"/>
-          <p:cNvSpPr/>
-          <p:nvPr/>
-        </p:nvSpPr>
-        <p:spPr>
-          <a:xfrm>
-            <a:off x="4688738" y="4681728"/>
+              <a:t>구성·꾸미기 · 이미지</a:t>
+            </a:r>
+            <a:endParaRPr lang="en-US" sz="1200" dirty="0"/>
+          </a:p>
+        </p:txBody>
+      </p:sp>
+      <p:sp>
+        <p:nvSpPr>
+          <p:cNvPr id="45" name="Text 43"/>
+          <p:cNvSpPr/>
+          <p:nvPr/>
+        </p:nvSpPr>
+        <p:spPr>
+          <a:xfrm>
+            <a:off x="6589624" y="4489704"/>
             <a:ext cx="228600" cy="274320"/>
           </a:xfrm>
           <a:prstGeom prst="rect">
@@ -22876,7 +23187,7 @@
           <a:ln/>
         </p:spPr>
         <p:txBody>
-          <a:bodyPr wrap="square" lIns="0" tIns="0" rIns="0" bIns="0" rtlCol="0" anchor="t"/>
+          <a:bodyPr wrap="square" lIns="0" tIns="0" rIns="0" bIns="0" rtlCol="0" anchor="ctr"/>
           <a:lstStyle/>
           <a:p>
             <a:pPr algn="l" indent="0" marL="0">
@@ -22886,49 +23197,49 @@
               <a:buNone/>
             </a:pPr>
             <a:r>
-              <a:rPr lang="en-US" sz="1100" dirty="0">
-                <a:solidFill>
-                  <a:srgbClr val="6E6E73"/>
+              <a:rPr lang="en-US" sz="1150" dirty="0">
+                <a:solidFill>
+                  <a:srgbClr val="6C4CFF"/>
                 </a:solidFill>
                 <a:latin typeface="Pretendard Medium" pitchFamily="34" charset="0"/>
                 <a:ea typeface="Pretendard Medium" pitchFamily="34" charset="-122"/>
                 <a:cs typeface="Pretendard Medium" pitchFamily="34" charset="-120"/>
               </a:rPr>
-              <a:t>○</a:t>
-            </a:r>
-            <a:endParaRPr lang="en-US" sz="1100" dirty="0"/>
-          </a:p>
-        </p:txBody>
-      </p:sp>
-      <p:sp>
-        <p:nvSpPr>
-          <p:cNvPr id="38" name="Text 36"/>
-          <p:cNvSpPr/>
-          <p:nvPr/>
-        </p:nvSpPr>
-        <p:spPr>
-          <a:xfrm>
-            <a:off x="4944770" y="4663440"/>
-            <a:ext cx="2631338" cy="292608"/>
-          </a:xfrm>
-          <a:prstGeom prst="rect">
-            <a:avLst/>
-          </a:prstGeom>
-          <a:noFill/>
-          <a:ln/>
-        </p:spPr>
-        <p:txBody>
-          <a:bodyPr wrap="square" lIns="0" tIns="0" rIns="0" bIns="0" rtlCol="0" anchor="t"/>
-          <a:lstStyle/>
-          <a:p>
-            <a:pPr algn="l" indent="0" marL="0">
-              <a:lnSpc>
-                <a:spcPct val="120000"/>
-              </a:lnSpc>
-              <a:buNone/>
-            </a:pPr>
-            <a:r>
-              <a:rPr lang="en-US" sz="1150" dirty="0">
+              <a:t>●</a:t>
+            </a:r>
+            <a:endParaRPr lang="en-US" sz="1150" dirty="0"/>
+          </a:p>
+        </p:txBody>
+      </p:sp>
+      <p:sp>
+        <p:nvSpPr>
+          <p:cNvPr id="46" name="Text 44"/>
+          <p:cNvSpPr/>
+          <p:nvPr/>
+        </p:nvSpPr>
+        <p:spPr>
+          <a:xfrm>
+            <a:off x="6863944" y="4489704"/>
+            <a:ext cx="4312768" cy="274320"/>
+          </a:xfrm>
+          <a:prstGeom prst="rect">
+            <a:avLst/>
+          </a:prstGeom>
+          <a:noFill/>
+          <a:ln/>
+        </p:spPr>
+        <p:txBody>
+          <a:bodyPr wrap="square" lIns="0" tIns="0" rIns="0" bIns="0" rtlCol="0" anchor="ctr"/>
+          <a:lstStyle/>
+          <a:p>
+            <a:pPr algn="l" indent="0" marL="0">
+              <a:lnSpc>
+                <a:spcPct val="130000"/>
+              </a:lnSpc>
+              <a:buNone/>
+            </a:pPr>
+            <a:r>
+              <a:rPr lang="en-US" sz="1200" dirty="0">
                 <a:solidFill>
                   <a:srgbClr val="55555A"/>
                 </a:solidFill>
@@ -22936,7 +23247,49 @@
                 <a:ea typeface="Pretendard" pitchFamily="34" charset="-122"/>
                 <a:cs typeface="Pretendard" pitchFamily="34" charset="-120"/>
               </a:rPr>
-              <a:t>계정 · 주소 · 권한 · 요금</a:t>
+              <a:t>게시 (URL · OG · 비밀번호)</a:t>
+            </a:r>
+            <a:endParaRPr lang="en-US" sz="1200" dirty="0"/>
+          </a:p>
+        </p:txBody>
+      </p:sp>
+      <p:sp>
+        <p:nvSpPr>
+          <p:cNvPr id="47" name="Text 45"/>
+          <p:cNvSpPr/>
+          <p:nvPr/>
+        </p:nvSpPr>
+        <p:spPr>
+          <a:xfrm>
+            <a:off x="6589624" y="4764024"/>
+            <a:ext cx="228600" cy="274320"/>
+          </a:xfrm>
+          <a:prstGeom prst="rect">
+            <a:avLst/>
+          </a:prstGeom>
+          <a:noFill/>
+          <a:ln/>
+        </p:spPr>
+        <p:txBody>
+          <a:bodyPr wrap="square" lIns="0" tIns="0" rIns="0" bIns="0" rtlCol="0" anchor="ctr"/>
+          <a:lstStyle/>
+          <a:p>
+            <a:pPr algn="l" indent="0" marL="0">
+              <a:lnSpc>
+                <a:spcPct val="130000"/>
+              </a:lnSpc>
+              <a:buNone/>
+            </a:pPr>
+            <a:r>
+              <a:rPr lang="en-US" sz="1150" dirty="0">
+                <a:solidFill>
+                  <a:srgbClr val="6E6E73"/>
+                </a:solidFill>
+                <a:latin typeface="Pretendard Medium" pitchFamily="34" charset="0"/>
+                <a:ea typeface="Pretendard Medium" pitchFamily="34" charset="-122"/>
+                <a:cs typeface="Pretendard Medium" pitchFamily="34" charset="-120"/>
+              </a:rPr>
+              <a:t>○</a:t>
             </a:r>
             <a:endParaRPr lang="en-US" sz="1150" dirty="0"/>
           </a:p>
@@ -22944,73 +23297,23 @@
       </p:sp>
       <p:sp>
         <p:nvSpPr>
-          <p:cNvPr id="39" name="Shape 37"/>
-          <p:cNvSpPr/>
-          <p:nvPr/>
-        </p:nvSpPr>
-        <p:spPr>
-          <a:xfrm>
-            <a:off x="9733026" y="3090672"/>
-            <a:ext cx="0" cy="109728"/>
-          </a:xfrm>
-          <a:prstGeom prst="line">
-            <a:avLst/>
-          </a:prstGeom>
-          <a:noFill/>
-          <a:ln w="12700">
-            <a:solidFill>
-              <a:srgbClr val="E5E7EB"/>
-            </a:solidFill>
-            <a:prstDash val="solid"/>
-          </a:ln>
-        </p:spPr>
-      </p:sp>
-      <p:sp>
-        <p:nvSpPr>
-          <p:cNvPr id="40" name="Shape 38"/>
-          <p:cNvSpPr/>
-          <p:nvPr/>
-        </p:nvSpPr>
-        <p:spPr>
-          <a:xfrm>
-            <a:off x="8051597" y="3200400"/>
-            <a:ext cx="3362858" cy="2121408"/>
-          </a:xfrm>
-          <a:prstGeom prst="roundRect">
-            <a:avLst>
-              <a:gd name="adj" fmla="val 5172"/>
-            </a:avLst>
-          </a:prstGeom>
-          <a:solidFill>
-            <a:srgbClr val="FFFFFF"/>
-          </a:solidFill>
-          <a:ln w="12700">
-            <a:solidFill>
-              <a:srgbClr val="E5E7EB"/>
-            </a:solidFill>
-            <a:prstDash val="solid"/>
-          </a:ln>
-        </p:spPr>
-      </p:sp>
-      <p:sp>
-        <p:nvSpPr>
-          <p:cNvPr id="41" name="Text 39"/>
-          <p:cNvSpPr/>
-          <p:nvPr/>
-        </p:nvSpPr>
-        <p:spPr>
-          <a:xfrm>
-            <a:off x="8307629" y="3419856"/>
-            <a:ext cx="457200" cy="365760"/>
-          </a:xfrm>
-          <a:prstGeom prst="rect">
-            <a:avLst/>
-          </a:prstGeom>
-          <a:noFill/>
-          <a:ln/>
-        </p:spPr>
-        <p:txBody>
-          <a:bodyPr wrap="square" lIns="0" tIns="0" rIns="0" bIns="0" rtlCol="0" anchor="t"/>
+          <p:cNvPr id="48" name="Text 46"/>
+          <p:cNvSpPr/>
+          <p:nvPr/>
+        </p:nvSpPr>
+        <p:spPr>
+          <a:xfrm>
+            <a:off x="6863944" y="4764024"/>
+            <a:ext cx="4312768" cy="274320"/>
+          </a:xfrm>
+          <a:prstGeom prst="rect">
+            <a:avLst/>
+          </a:prstGeom>
+          <a:noFill/>
+          <a:ln/>
+        </p:spPr>
+        <p:txBody>
+          <a:bodyPr wrap="square" lIns="0" tIns="0" rIns="0" bIns="0" rtlCol="0" anchor="ctr"/>
           <a:lstStyle/>
           <a:p>
             <a:pPr algn="l" indent="0" marL="0">
@@ -23020,435 +23323,34 @@
               <a:buNone/>
             </a:pPr>
             <a:r>
-              <a:rPr lang="en-US" sz="1800" b="1" dirty="0">
-                <a:solidFill>
-                  <a:srgbClr val="6C4CFF"/>
+              <a:rPr lang="en-US" sz="1200" dirty="0">
+                <a:solidFill>
+                  <a:srgbClr val="55555A"/>
                 </a:solidFill>
                 <a:latin typeface="Pretendard" pitchFamily="34" charset="0"/>
                 <a:ea typeface="Pretendard" pitchFamily="34" charset="-122"/>
                 <a:cs typeface="Pretendard" pitchFamily="34" charset="-120"/>
               </a:rPr>
-              <a:t>ⓒ</a:t>
-            </a:r>
-            <a:endParaRPr lang="en-US" sz="1800" dirty="0"/>
-          </a:p>
-        </p:txBody>
-      </p:sp>
-      <p:sp>
-        <p:nvSpPr>
-          <p:cNvPr id="42" name="Text 40"/>
-          <p:cNvSpPr/>
-          <p:nvPr/>
-        </p:nvSpPr>
-        <p:spPr>
-          <a:xfrm>
-            <a:off x="8764829" y="3474720"/>
-            <a:ext cx="2448458" cy="320040"/>
-          </a:xfrm>
-          <a:prstGeom prst="rect">
-            <a:avLst/>
-          </a:prstGeom>
-          <a:noFill/>
-          <a:ln/>
-        </p:spPr>
-        <p:txBody>
-          <a:bodyPr wrap="square" lIns="0" tIns="0" rIns="0" bIns="0" rtlCol="0" anchor="t"/>
-          <a:lstStyle/>
-          <a:p>
-            <a:pPr algn="l" indent="0" marL="0">
-              <a:lnSpc>
-                <a:spcPct val="130000"/>
-              </a:lnSpc>
-              <a:buNone/>
-            </a:pPr>
-            <a:r>
-              <a:rPr lang="en-US" sz="1500" spc="-20" kern="0" dirty="0">
-                <a:solidFill>
-                  <a:srgbClr val="1D1D1F"/>
-                </a:solidFill>
-                <a:latin typeface="Pretendard SemiBold" pitchFamily="34" charset="0"/>
-                <a:ea typeface="Pretendard SemiBold" pitchFamily="34" charset="-122"/>
-                <a:cs typeface="Pretendard SemiBold" pitchFamily="34" charset="-120"/>
-              </a:rPr>
-              <a:t>에디터</a:t>
-            </a:r>
-            <a:endParaRPr lang="en-US" sz="1500" dirty="0"/>
-          </a:p>
-        </p:txBody>
-      </p:sp>
-      <p:sp>
-        <p:nvSpPr>
-          <p:cNvPr id="43" name="Shape 41"/>
-          <p:cNvSpPr/>
-          <p:nvPr/>
-        </p:nvSpPr>
-        <p:spPr>
-          <a:xfrm>
-            <a:off x="8307629" y="3931920"/>
-            <a:ext cx="2850794" cy="0"/>
-          </a:xfrm>
-          <a:prstGeom prst="line">
-            <a:avLst/>
-          </a:prstGeom>
-          <a:noFill/>
-          <a:ln w="9525">
-            <a:solidFill>
-              <a:srgbClr val="E5E7EB"/>
-            </a:solidFill>
-            <a:prstDash val="solid"/>
-          </a:ln>
-        </p:spPr>
-      </p:sp>
-      <p:sp>
-        <p:nvSpPr>
-          <p:cNvPr id="44" name="Text 42"/>
-          <p:cNvSpPr/>
-          <p:nvPr/>
-        </p:nvSpPr>
-        <p:spPr>
-          <a:xfrm>
-            <a:off x="8325917" y="4059936"/>
-            <a:ext cx="228600" cy="274320"/>
-          </a:xfrm>
-          <a:prstGeom prst="rect">
-            <a:avLst/>
-          </a:prstGeom>
-          <a:noFill/>
-          <a:ln/>
-        </p:spPr>
-        <p:txBody>
-          <a:bodyPr wrap="square" lIns="0" tIns="0" rIns="0" bIns="0" rtlCol="0" anchor="t"/>
-          <a:lstStyle/>
-          <a:p>
-            <a:pPr algn="l" indent="0" marL="0">
-              <a:lnSpc>
-                <a:spcPct val="130000"/>
-              </a:lnSpc>
-              <a:buNone/>
-            </a:pPr>
-            <a:r>
-              <a:rPr lang="en-US" sz="1100" dirty="0">
-                <a:solidFill>
-                  <a:srgbClr val="6C4CFF"/>
-                </a:solidFill>
-                <a:latin typeface="Pretendard Medium" pitchFamily="34" charset="0"/>
-                <a:ea typeface="Pretendard Medium" pitchFamily="34" charset="-122"/>
-                <a:cs typeface="Pretendard Medium" pitchFamily="34" charset="-120"/>
-              </a:rPr>
-              <a:t>●</a:t>
-            </a:r>
-            <a:endParaRPr lang="en-US" sz="1100" dirty="0"/>
-          </a:p>
-        </p:txBody>
-      </p:sp>
-      <p:sp>
-        <p:nvSpPr>
-          <p:cNvPr id="45" name="Text 43"/>
-          <p:cNvSpPr/>
-          <p:nvPr/>
-        </p:nvSpPr>
-        <p:spPr>
-          <a:xfrm>
-            <a:off x="8581949" y="4041648"/>
-            <a:ext cx="2631338" cy="292608"/>
-          </a:xfrm>
-          <a:prstGeom prst="rect">
-            <a:avLst/>
-          </a:prstGeom>
-          <a:noFill/>
-          <a:ln/>
-        </p:spPr>
-        <p:txBody>
-          <a:bodyPr wrap="square" lIns="0" tIns="0" rIns="0" bIns="0" rtlCol="0" anchor="t"/>
-          <a:lstStyle/>
-          <a:p>
-            <a:pPr algn="l" indent="0" marL="0">
-              <a:lnSpc>
-                <a:spcPct val="120000"/>
-              </a:lnSpc>
-              <a:buNone/>
-            </a:pPr>
-            <a:r>
-              <a:rPr lang="en-US" sz="1150" dirty="0">
-                <a:solidFill>
-                  <a:srgbClr val="55555A"/>
-                </a:solidFill>
-                <a:latin typeface="Pretendard" pitchFamily="34" charset="0"/>
-                <a:ea typeface="Pretendard" pitchFamily="34" charset="-122"/>
-                <a:cs typeface="Pretendard" pitchFamily="34" charset="-120"/>
-              </a:rPr>
-              <a:t>카드 15종 (+상품·코드)</a:t>
-            </a:r>
-            <a:endParaRPr lang="en-US" sz="1150" dirty="0"/>
-          </a:p>
-        </p:txBody>
-      </p:sp>
-      <p:sp>
-        <p:nvSpPr>
-          <p:cNvPr id="46" name="Text 44"/>
-          <p:cNvSpPr/>
-          <p:nvPr/>
-        </p:nvSpPr>
-        <p:spPr>
-          <a:xfrm>
-            <a:off x="8325917" y="4370832"/>
-            <a:ext cx="228600" cy="274320"/>
-          </a:xfrm>
-          <a:prstGeom prst="rect">
-            <a:avLst/>
-          </a:prstGeom>
-          <a:noFill/>
-          <a:ln/>
-        </p:spPr>
-        <p:txBody>
-          <a:bodyPr wrap="square" lIns="0" tIns="0" rIns="0" bIns="0" rtlCol="0" anchor="t"/>
-          <a:lstStyle/>
-          <a:p>
-            <a:pPr algn="l" indent="0" marL="0">
-              <a:lnSpc>
-                <a:spcPct val="130000"/>
-              </a:lnSpc>
-              <a:buNone/>
-            </a:pPr>
-            <a:r>
-              <a:rPr lang="en-US" sz="1100" dirty="0">
-                <a:solidFill>
-                  <a:srgbClr val="6C4CFF"/>
-                </a:solidFill>
-                <a:latin typeface="Pretendard Medium" pitchFamily="34" charset="0"/>
-                <a:ea typeface="Pretendard Medium" pitchFamily="34" charset="-122"/>
-                <a:cs typeface="Pretendard Medium" pitchFamily="34" charset="-120"/>
-              </a:rPr>
-              <a:t>●</a:t>
-            </a:r>
-            <a:endParaRPr lang="en-US" sz="1100" dirty="0"/>
-          </a:p>
-        </p:txBody>
-      </p:sp>
-      <p:sp>
-        <p:nvSpPr>
-          <p:cNvPr id="47" name="Text 45"/>
-          <p:cNvSpPr/>
-          <p:nvPr/>
-        </p:nvSpPr>
-        <p:spPr>
-          <a:xfrm>
-            <a:off x="8581949" y="4352544"/>
-            <a:ext cx="2631338" cy="292608"/>
-          </a:xfrm>
-          <a:prstGeom prst="rect">
-            <a:avLst/>
-          </a:prstGeom>
-          <a:noFill/>
-          <a:ln/>
-        </p:spPr>
-        <p:txBody>
-          <a:bodyPr wrap="square" lIns="0" tIns="0" rIns="0" bIns="0" rtlCol="0" anchor="t"/>
-          <a:lstStyle/>
-          <a:p>
-            <a:pPr algn="l" indent="0" marL="0">
-              <a:lnSpc>
-                <a:spcPct val="120000"/>
-              </a:lnSpc>
-              <a:buNone/>
-            </a:pPr>
-            <a:r>
-              <a:rPr lang="en-US" sz="1150" dirty="0">
-                <a:solidFill>
-                  <a:srgbClr val="55555A"/>
-                </a:solidFill>
-                <a:latin typeface="Pretendard" pitchFamily="34" charset="0"/>
-                <a:ea typeface="Pretendard" pitchFamily="34" charset="-122"/>
-                <a:cs typeface="Pretendard" pitchFamily="34" charset="-120"/>
-              </a:rPr>
-              <a:t>구성·꾸미기 · 이미지</a:t>
-            </a:r>
-            <a:endParaRPr lang="en-US" sz="1150" dirty="0"/>
-          </a:p>
-        </p:txBody>
-      </p:sp>
-      <p:sp>
-        <p:nvSpPr>
-          <p:cNvPr id="48" name="Text 46"/>
-          <p:cNvSpPr/>
-          <p:nvPr/>
-        </p:nvSpPr>
-        <p:spPr>
-          <a:xfrm>
-            <a:off x="8325917" y="4681728"/>
-            <a:ext cx="228600" cy="274320"/>
-          </a:xfrm>
-          <a:prstGeom prst="rect">
-            <a:avLst/>
-          </a:prstGeom>
-          <a:noFill/>
-          <a:ln/>
-        </p:spPr>
-        <p:txBody>
-          <a:bodyPr wrap="square" lIns="0" tIns="0" rIns="0" bIns="0" rtlCol="0" anchor="t"/>
-          <a:lstStyle/>
-          <a:p>
-            <a:pPr algn="l" indent="0" marL="0">
-              <a:lnSpc>
-                <a:spcPct val="130000"/>
-              </a:lnSpc>
-              <a:buNone/>
-            </a:pPr>
-            <a:r>
-              <a:rPr lang="en-US" sz="1100" dirty="0">
-                <a:solidFill>
-                  <a:srgbClr val="6C4CFF"/>
-                </a:solidFill>
-                <a:latin typeface="Pretendard Medium" pitchFamily="34" charset="0"/>
-                <a:ea typeface="Pretendard Medium" pitchFamily="34" charset="-122"/>
-                <a:cs typeface="Pretendard Medium" pitchFamily="34" charset="-120"/>
-              </a:rPr>
-              <a:t>●</a:t>
-            </a:r>
-            <a:endParaRPr lang="en-US" sz="1100" dirty="0"/>
-          </a:p>
-        </p:txBody>
-      </p:sp>
-      <p:sp>
-        <p:nvSpPr>
-          <p:cNvPr id="49" name="Text 47"/>
-          <p:cNvSpPr/>
-          <p:nvPr/>
-        </p:nvSpPr>
-        <p:spPr>
-          <a:xfrm>
-            <a:off x="8581949" y="4663440"/>
-            <a:ext cx="2631338" cy="292608"/>
-          </a:xfrm>
-          <a:prstGeom prst="rect">
-            <a:avLst/>
-          </a:prstGeom>
-          <a:noFill/>
-          <a:ln/>
-        </p:spPr>
-        <p:txBody>
-          <a:bodyPr wrap="square" lIns="0" tIns="0" rIns="0" bIns="0" rtlCol="0" anchor="t"/>
-          <a:lstStyle/>
-          <a:p>
-            <a:pPr algn="l" indent="0" marL="0">
-              <a:lnSpc>
-                <a:spcPct val="120000"/>
-              </a:lnSpc>
-              <a:buNone/>
-            </a:pPr>
-            <a:r>
-              <a:rPr lang="en-US" sz="1150" dirty="0">
-                <a:solidFill>
-                  <a:srgbClr val="55555A"/>
-                </a:solidFill>
-                <a:latin typeface="Pretendard" pitchFamily="34" charset="0"/>
-                <a:ea typeface="Pretendard" pitchFamily="34" charset="-122"/>
-                <a:cs typeface="Pretendard" pitchFamily="34" charset="-120"/>
-              </a:rPr>
-              <a:t>게시(URL·OG·비밀번호)</a:t>
-            </a:r>
-            <a:endParaRPr lang="en-US" sz="1150" dirty="0"/>
-          </a:p>
-        </p:txBody>
-      </p:sp>
-      <p:sp>
-        <p:nvSpPr>
-          <p:cNvPr id="50" name="Text 48"/>
-          <p:cNvSpPr/>
-          <p:nvPr/>
-        </p:nvSpPr>
-        <p:spPr>
-          <a:xfrm>
-            <a:off x="8325917" y="4992624"/>
-            <a:ext cx="228600" cy="274320"/>
-          </a:xfrm>
-          <a:prstGeom prst="rect">
-            <a:avLst/>
-          </a:prstGeom>
-          <a:noFill/>
-          <a:ln/>
-        </p:spPr>
-        <p:txBody>
-          <a:bodyPr wrap="square" lIns="0" tIns="0" rIns="0" bIns="0" rtlCol="0" anchor="t"/>
-          <a:lstStyle/>
-          <a:p>
-            <a:pPr algn="l" indent="0" marL="0">
-              <a:lnSpc>
-                <a:spcPct val="130000"/>
-              </a:lnSpc>
-              <a:buNone/>
-            </a:pPr>
-            <a:r>
-              <a:rPr lang="en-US" sz="1100" dirty="0">
-                <a:solidFill>
-                  <a:srgbClr val="6E6E73"/>
-                </a:solidFill>
-                <a:latin typeface="Pretendard Medium" pitchFamily="34" charset="0"/>
-                <a:ea typeface="Pretendard Medium" pitchFamily="34" charset="-122"/>
-                <a:cs typeface="Pretendard Medium" pitchFamily="34" charset="-120"/>
-              </a:rPr>
-              <a:t>○</a:t>
-            </a:r>
-            <a:endParaRPr lang="en-US" sz="1100" dirty="0"/>
-          </a:p>
-        </p:txBody>
-      </p:sp>
-      <p:sp>
-        <p:nvSpPr>
-          <p:cNvPr id="51" name="Text 49"/>
-          <p:cNvSpPr/>
-          <p:nvPr/>
-        </p:nvSpPr>
-        <p:spPr>
-          <a:xfrm>
-            <a:off x="8581949" y="4974336"/>
-            <a:ext cx="2631338" cy="292608"/>
-          </a:xfrm>
-          <a:prstGeom prst="rect">
-            <a:avLst/>
-          </a:prstGeom>
-          <a:noFill/>
-          <a:ln/>
-        </p:spPr>
-        <p:txBody>
-          <a:bodyPr wrap="square" lIns="0" tIns="0" rIns="0" bIns="0" rtlCol="0" anchor="t"/>
-          <a:lstStyle/>
-          <a:p>
-            <a:pPr algn="l" indent="0" marL="0">
-              <a:lnSpc>
-                <a:spcPct val="120000"/>
-              </a:lnSpc>
-              <a:buNone/>
-            </a:pPr>
-            <a:r>
-              <a:rPr lang="en-US" sz="1150" dirty="0">
-                <a:solidFill>
-                  <a:srgbClr val="55555A"/>
-                </a:solidFill>
-                <a:latin typeface="Pretendard" pitchFamily="34" charset="0"/>
-                <a:ea typeface="Pretendard" pitchFamily="34" charset="-122"/>
-                <a:cs typeface="Pretendard" pitchFamily="34" charset="-120"/>
-              </a:rPr>
-              <a:t>데이터 연결</a:t>
-            </a:r>
-            <a:endParaRPr lang="en-US" sz="1150" dirty="0"/>
-          </a:p>
-        </p:txBody>
-      </p:sp>
-      <p:sp>
-        <p:nvSpPr>
-          <p:cNvPr id="52" name="Shape 50"/>
-          <p:cNvSpPr/>
-          <p:nvPr/>
-        </p:nvSpPr>
-        <p:spPr>
-          <a:xfrm>
-            <a:off x="777240" y="5541264"/>
-            <a:ext cx="10637215" cy="548640"/>
+              <a:t>데이터 연결 (개인화)</a:t>
+            </a:r>
+            <a:endParaRPr lang="en-US" sz="1200" dirty="0"/>
+          </a:p>
+        </p:txBody>
+      </p:sp>
+      <p:sp>
+        <p:nvSpPr>
+          <p:cNvPr id="49" name="Shape 47"/>
+          <p:cNvSpPr/>
+          <p:nvPr/>
+        </p:nvSpPr>
+        <p:spPr>
+          <a:xfrm>
+            <a:off x="777240" y="5669280"/>
+            <a:ext cx="10637215" cy="475488"/>
           </a:xfrm>
           <a:prstGeom prst="roundRect">
             <a:avLst>
-              <a:gd name="adj" fmla="val 16667"/>
+              <a:gd name="adj" fmla="val 19231"/>
             </a:avLst>
           </a:prstGeom>
           <a:solidFill>
@@ -23464,14 +23366,14 @@
       </p:sp>
       <p:sp>
         <p:nvSpPr>
-          <p:cNvPr id="53" name="Text 51"/>
-          <p:cNvSpPr/>
-          <p:nvPr/>
-        </p:nvSpPr>
-        <p:spPr>
-          <a:xfrm>
-            <a:off x="1033272" y="5541264"/>
-            <a:ext cx="1188720" cy="548640"/>
+          <p:cNvPr id="50" name="Text 48"/>
+          <p:cNvSpPr/>
+          <p:nvPr/>
+        </p:nvSpPr>
+        <p:spPr>
+          <a:xfrm>
+            <a:off x="1033272" y="5669280"/>
+            <a:ext cx="1188720" cy="475488"/>
           </a:xfrm>
           <a:prstGeom prst="rect">
             <a:avLst/>
@@ -23506,14 +23408,14 @@
       </p:sp>
       <p:sp>
         <p:nvSpPr>
-          <p:cNvPr id="54" name="Text 52"/>
-          <p:cNvSpPr/>
-          <p:nvPr/>
-        </p:nvSpPr>
-        <p:spPr>
-          <a:xfrm>
-            <a:off x="2148840" y="5541264"/>
-            <a:ext cx="9082735" cy="548640"/>
+          <p:cNvPr id="51" name="Text 49"/>
+          <p:cNvSpPr/>
+          <p:nvPr/>
+        </p:nvSpPr>
+        <p:spPr>
+          <a:xfrm>
+            <a:off x="2148840" y="5669280"/>
+            <a:ext cx="9082735" cy="475488"/>
           </a:xfrm>
           <a:prstGeom prst="rect">
             <a:avLst/>
@@ -23540,7 +23442,7 @@
                 <a:ea typeface="Pretendard" pitchFamily="34" charset="-122"/>
                 <a:cs typeface="Pretendard" pitchFamily="34" charset="-120"/>
               </a:rPr>
-              <a:t>대시보드(계정) 영역 전체가 ○ — 로그인 뒤에서만 보여 문서가 없습니다. 여기가 영상으로 채울 1순위입니다. (어드민은 제외 → 팀 운영)</a:t>
+              <a:t>대시보드(계정)는 대부분 ○ — 로그인 뒤에서만 보여 문서가 없습니다. 여기가 영상으로 채울 1순위. (어드민은 제외 → 팀 운영)</a:t>
             </a:r>
             <a:endParaRPr lang="en-US" sz="1150" dirty="0"/>
           </a:p>

--- a/CdBd 기능 문서 구조 설계.pptx
+++ b/CdBd 기능 문서 구조 설계.pptx
@@ -6151,7 +6151,7 @@
                 <a:ea typeface="Pretendard" pitchFamily="34" charset="-122"/>
                 <a:cs typeface="Pretendard" pitchFamily="34" charset="-120"/>
               </a:rPr>
-              <a:t>고객이 쓰는 에디터 기능이 있는 볼트 — 경로 가이드는 고객 기능으로 이렇게 채웁니다.</a:t>
+              <a:t>이 볼트에 어떤 CdBd 기능이 있고, 각각 어느 파일에 있는지 이렇게 적습니다.</a:t>
             </a:r>
             <a:endParaRPr lang="en-US" sz="1500" dirty="0"/>
           </a:p>
@@ -6997,7 +6997,7 @@
                 <a:ea typeface="Pretendard" pitchFamily="34" charset="-122"/>
                 <a:cs typeface="Pretendard" pitchFamily="34" charset="-120"/>
               </a:rPr>
-              <a:t>[CdBd 기능 — 고객이 쓰는] 이렇게 말하면 → 이 파일</a:t>
+              <a:t>이 볼트에 있는 CdBd 기능 → 어느 파일에 있나</a:t>
             </a:r>
             <a:endParaRPr lang="en-US" sz="1000" dirty="0"/>
           </a:p>
@@ -7011,7 +7011,7 @@
         </p:nvSpPr>
         <p:spPr>
           <a:xfrm>
-            <a:off x="6263640" y="3291840"/>
+            <a:off x="6263640" y="3246120"/>
             <a:ext cx="4876495" cy="256032"/>
           </a:xfrm>
           <a:prstGeom prst="rect">
@@ -7039,7 +7039,7 @@
                 <a:ea typeface="Pretendard SemiBold" pitchFamily="34" charset="-122"/>
                 <a:cs typeface="Pretendard SemiBold" pitchFamily="34" charset="-120"/>
               </a:rPr>
-              <a:t>“상품 카드 넣어줘”</a:t>
+              <a:t>카드 기능 15종  (상품·예약·유튜브·SNS…)</a:t>
             </a:r>
             <a:endParaRPr lang="en-US" sz="1150" dirty="0"/>
           </a:p>
@@ -7053,7 +7053,7 @@
         </p:nvSpPr>
         <p:spPr>
           <a:xfrm>
-            <a:off x="6391656" y="3511296"/>
+            <a:off x="6391656" y="3474720"/>
             <a:ext cx="4748479" cy="256032"/>
           </a:xfrm>
           <a:prstGeom prst="rect">
@@ -7075,7 +7075,7 @@
             <a:r>
               <a:rPr lang="en-US" sz="1050" dirty="0">
                 <a:solidFill>
-                  <a:srgbClr val="55555A"/>
+                  <a:srgbClr val="6C4CFF"/>
                 </a:solidFill>
                 <a:latin typeface="Pretendard" pitchFamily="34" charset="0"/>
                 <a:ea typeface="Pretendard" pitchFamily="34" charset="-122"/>
@@ -7095,7 +7095,7 @@
         </p:nvSpPr>
         <p:spPr>
           <a:xfrm>
-            <a:off x="6263640" y="3803904"/>
+            <a:off x="6263640" y="3794760"/>
             <a:ext cx="4876495" cy="256032"/>
           </a:xfrm>
           <a:prstGeom prst="rect">
@@ -7123,7 +7123,7 @@
                 <a:ea typeface="Pretendard SemiBold" pitchFamily="34" charset="-122"/>
                 <a:cs typeface="Pretendard SemiBold" pitchFamily="34" charset="-120"/>
               </a:rPr>
-              <a:t>“예약 받는 카드 만들어줘”</a:t>
+              <a:t>새 페이지 추가  (템플릿에서 생성)</a:t>
             </a:r>
             <a:endParaRPr lang="en-US" sz="1150" dirty="0"/>
           </a:p>
@@ -7159,13 +7159,13 @@
             <a:r>
               <a:rPr lang="en-US" sz="1050" dirty="0">
                 <a:solidFill>
-                  <a:srgbClr val="55555A"/>
+                  <a:srgbClr val="6C4CFF"/>
                 </a:solidFill>
                 <a:latin typeface="Pretendard" pitchFamily="34" charset="0"/>
                 <a:ea typeface="Pretendard" pitchFamily="34" charset="-122"/>
                 <a:cs typeface="Pretendard" pitchFamily="34" charset="-120"/>
               </a:rPr>
-              <a:t>→ 1-6-2. CdBd 카드 기능.md</a:t>
+              <a:t>→ 1-1. 워크플로우.md</a:t>
             </a:r>
             <a:endParaRPr lang="en-US" sz="1050" dirty="0"/>
           </a:p>
@@ -7179,7 +7179,7 @@
         </p:nvSpPr>
         <p:spPr>
           <a:xfrm>
-            <a:off x="6263640" y="4315968"/>
+            <a:off x="6263640" y="4343400"/>
             <a:ext cx="4876495" cy="256032"/>
           </a:xfrm>
           <a:prstGeom prst="rect">
@@ -7207,7 +7207,7 @@
                 <a:ea typeface="Pretendard SemiBold" pitchFamily="34" charset="-122"/>
                 <a:cs typeface="Pretendard SemiBold" pitchFamily="34" charset="-120"/>
               </a:rPr>
-              <a:t>“유튜브 영상 카드 추가해줘”</a:t>
+              <a:t>페이지 구성·꾸미기  (테마·배경·여백)</a:t>
             </a:r>
             <a:endParaRPr lang="en-US" sz="1150" dirty="0"/>
           </a:p>
@@ -7221,7 +7221,7 @@
         </p:nvSpPr>
         <p:spPr>
           <a:xfrm>
-            <a:off x="6391656" y="4535424"/>
+            <a:off x="6391656" y="4572000"/>
             <a:ext cx="4748479" cy="256032"/>
           </a:xfrm>
           <a:prstGeom prst="rect">
@@ -7243,13 +7243,13 @@
             <a:r>
               <a:rPr lang="en-US" sz="1050" dirty="0">
                 <a:solidFill>
-                  <a:srgbClr val="55555A"/>
+                  <a:srgbClr val="6C4CFF"/>
                 </a:solidFill>
                 <a:latin typeface="Pretendard" pitchFamily="34" charset="0"/>
                 <a:ea typeface="Pretendard" pitchFamily="34" charset="-122"/>
                 <a:cs typeface="Pretendard" pitchFamily="34" charset="-120"/>
               </a:rPr>
-              <a:t>→ 1-6-2. CdBd 카드 기능.md</a:t>
+              <a:t>→ 1-6-1. CdBd 에디터.md</a:t>
             </a:r>
             <a:endParaRPr lang="en-US" sz="1050" dirty="0"/>
           </a:p>
@@ -7263,7 +7263,7 @@
         </p:nvSpPr>
         <p:spPr>
           <a:xfrm>
-            <a:off x="6263640" y="4828032"/>
+            <a:off x="6263640" y="4892040"/>
             <a:ext cx="4876495" cy="256032"/>
           </a:xfrm>
           <a:prstGeom prst="rect">
@@ -7291,7 +7291,7 @@
                 <a:ea typeface="Pretendard SemiBold" pitchFamily="34" charset="-122"/>
                 <a:cs typeface="Pretendard SemiBold" pitchFamily="34" charset="-120"/>
               </a:rPr>
-              <a:t>“페이지 테마·배경 바꿔줘”</a:t>
+              <a:t>카드 자동화  (순서·핀·복제·삭제)</a:t>
             </a:r>
             <a:endParaRPr lang="en-US" sz="1150" dirty="0"/>
           </a:p>
@@ -7305,7 +7305,7 @@
         </p:nvSpPr>
         <p:spPr>
           <a:xfrm>
-            <a:off x="6391656" y="5047488"/>
+            <a:off x="6391656" y="5120640"/>
             <a:ext cx="4748479" cy="256032"/>
           </a:xfrm>
           <a:prstGeom prst="rect">
@@ -7327,13 +7327,13 @@
             <a:r>
               <a:rPr lang="en-US" sz="1050" dirty="0">
                 <a:solidFill>
-                  <a:srgbClr val="55555A"/>
+                  <a:srgbClr val="6C4CFF"/>
                 </a:solidFill>
                 <a:latin typeface="Pretendard" pitchFamily="34" charset="0"/>
                 <a:ea typeface="Pretendard" pitchFamily="34" charset="-122"/>
                 <a:cs typeface="Pretendard" pitchFamily="34" charset="-120"/>
               </a:rPr>
-              <a:t>→ 1-6-1. CdBd 에디터.md</a:t>
+              <a:t>→ .claude/skills/cdbd-card-automation/</a:t>
             </a:r>
             <a:endParaRPr lang="en-US" sz="1050" dirty="0"/>
           </a:p>
@@ -7347,7 +7347,7 @@
         </p:nvSpPr>
         <p:spPr>
           <a:xfrm>
-            <a:off x="6263640" y="5596128"/>
+            <a:off x="6263640" y="5623560"/>
             <a:ext cx="4876495" cy="320040"/>
           </a:xfrm>
           <a:prstGeom prst="rect">
@@ -9946,7 +9946,7 @@
                 <a:ea typeface="Pretendard SemiBold" pitchFamily="34" charset="-122"/>
                 <a:cs typeface="Pretendard SemiBold" pitchFamily="34" charset="-120"/>
               </a:rPr>
-              <a:t>git에 못 넣는 것도 배포</a:t>
+              <a:t>볼트를 넘는 라우팅</a:t>
             </a:r>
             <a:endParaRPr lang="en-US" sz="1250" dirty="0"/>
           </a:p>
@@ -9988,7 +9988,7 @@
                 <a:ea typeface="Pretendard" pitchFamily="34" charset="-122"/>
                 <a:cs typeface="Pretendard" pitchFamily="34" charset="-120"/>
               </a:rPr>
-              <a:t>gstack · 로그인 · Figma MCP</a:t>
+              <a:t>다른 볼트 기능의 위치까지 안내</a:t>
             </a:r>
             <a:endParaRPr lang="en-US" sz="1050" dirty="0"/>
           </a:p>
@@ -10030,7 +10030,7 @@
                 <a:ea typeface="Pretendard SemiBold" pitchFamily="34" charset="-122"/>
                 <a:cs typeface="Pretendard SemiBold" pitchFamily="34" charset="-120"/>
               </a:rPr>
-              <a:t>파일 구조 = 볼트 내부용 · 플러그인 = 볼트 경계를 넘는 배포용 — 대체재가 아니라 보완재.</a:t>
+              <a:t>파일 구조 = 볼트 내부용 · 플러그인 = 볼트 경계를 넘는 발견용 — 대체재가 아니라 보완재.</a:t>
             </a:r>
             <a:endParaRPr lang="en-US" sz="1250" dirty="0"/>
           </a:p>
@@ -10251,7 +10251,7 @@
                 <a:ea typeface="Pretendard" pitchFamily="34" charset="-122"/>
                 <a:cs typeface="Pretendard" pitchFamily="34" charset="-120"/>
               </a:rPr>
-              <a:t>목적에 필요한 것만 담는다</a:t>
+              <a:t>플러그인이 담는 건 ‘통합 기능 경로 가이드’ 하나</a:t>
             </a:r>
             <a:endParaRPr lang="en-US" sz="2600" dirty="0"/>
           </a:p>
@@ -10290,7 +10290,7 @@
                 <a:ea typeface="Pretendard" pitchFamily="34" charset="-122"/>
                 <a:cs typeface="Pretendard" pitchFamily="34" charset="-120"/>
               </a:rPr>
-              <a:t>목적은 하나 — CdBd 기능을 어느 볼트에서도 수행. 그에 필요한 것만 넣습니다.</a:t>
+              <a:t>5개 볼트의 경로 가이드를 하나로 합친 파일 — 이게 하는 역할은 셋입니다.</a:t>
             </a:r>
             <a:endParaRPr lang="en-US" sz="1500" dirty="0"/>
           </a:p>
@@ -10451,16 +10451,23 @@
         </p:nvSpPr>
         <p:spPr>
           <a:xfrm>
-            <a:off x="1088136" y="3127248"/>
-            <a:ext cx="109728" cy="109728"/>
-          </a:xfrm>
-          <a:prstGeom prst="ellipse">
-            <a:avLst/>
+            <a:off x="1051560" y="2999232"/>
+            <a:ext cx="4389120" cy="530352"/>
+          </a:xfrm>
+          <a:prstGeom prst="roundRect">
+            <a:avLst>
+              <a:gd name="adj" fmla="val 17241"/>
+            </a:avLst>
           </a:prstGeom>
           <a:solidFill>
-            <a:srgbClr val="6C4CFF"/>
+            <a:srgbClr val="EEEAFB"/>
           </a:solidFill>
-          <a:ln/>
+          <a:ln w="15875">
+            <a:solidFill>
+              <a:srgbClr val="6C4CFF"/>
+            </a:solidFill>
+            <a:prstDash val="solid"/>
+          </a:ln>
         </p:spPr>
       </p:sp>
       <p:sp>
@@ -10471,8 +10478,50 @@
         </p:nvSpPr>
         <p:spPr>
           <a:xfrm>
-            <a:off x="1325880" y="3063240"/>
-            <a:ext cx="4206240" cy="274320"/>
+            <a:off x="1051560" y="2999232"/>
+            <a:ext cx="4389120" cy="530352"/>
+          </a:xfrm>
+          <a:prstGeom prst="rect">
+            <a:avLst/>
+          </a:prstGeom>
+          <a:noFill/>
+          <a:ln/>
+        </p:spPr>
+        <p:txBody>
+          <a:bodyPr wrap="square" lIns="0" tIns="0" rIns="0" bIns="0" rtlCol="0" anchor="ctr"/>
+          <a:lstStyle/>
+          <a:p>
+            <a:pPr algn="ctr" indent="0" marL="0">
+              <a:lnSpc>
+                <a:spcPct val="130000"/>
+              </a:lnSpc>
+              <a:buNone/>
+            </a:pPr>
+            <a:r>
+              <a:rPr lang="en-US" sz="1300" b="1" dirty="0">
+                <a:solidFill>
+                  <a:srgbClr val="6C4CFF"/>
+                </a:solidFill>
+                <a:latin typeface="Pretendard" pitchFamily="34" charset="0"/>
+                <a:ea typeface="Pretendard" pitchFamily="34" charset="-122"/>
+                <a:cs typeface="Pretendard" pitchFamily="34" charset="-120"/>
+              </a:rPr>
+              <a:t>통합 기능 경로 가이드 (.md 한 장)</a:t>
+            </a:r>
+            <a:endParaRPr lang="en-US" sz="1300" dirty="0"/>
+          </a:p>
+        </p:txBody>
+      </p:sp>
+      <p:sp>
+        <p:nvSpPr>
+          <p:cNvPr id="12" name="Text 10"/>
+          <p:cNvSpPr/>
+          <p:nvPr/>
+        </p:nvSpPr>
+        <p:spPr>
+          <a:xfrm>
+            <a:off x="1051560" y="3675888"/>
+            <a:ext cx="4389120" cy="274320"/>
           </a:xfrm>
           <a:prstGeom prst="rect">
             <a:avLst/>
@@ -10491,30 +10540,417 @@
               <a:buNone/>
             </a:pPr>
             <a:r>
-              <a:rPr lang="en-US" sz="1250" dirty="0">
-                <a:solidFill>
-                  <a:srgbClr val="6C4CFF"/>
+              <a:rPr lang="en-US" sz="1100" dirty="0">
+                <a:solidFill>
+                  <a:srgbClr val="55555A"/>
+                </a:solidFill>
+                <a:latin typeface="Pretendard" pitchFamily="34" charset="0"/>
+                <a:ea typeface="Pretendard" pitchFamily="34" charset="-122"/>
+                <a:cs typeface="Pretendard" pitchFamily="34" charset="-120"/>
+              </a:rPr>
+              <a:t>= 5개 볼트의 _기능별 경로 가이드를 하나로 합침</a:t>
+            </a:r>
+            <a:endParaRPr lang="en-US" sz="1100" dirty="0"/>
+          </a:p>
+        </p:txBody>
+      </p:sp>
+      <p:sp>
+        <p:nvSpPr>
+          <p:cNvPr id="13" name="Shape 11"/>
+          <p:cNvSpPr/>
+          <p:nvPr/>
+        </p:nvSpPr>
+        <p:spPr>
+          <a:xfrm>
+            <a:off x="1051560" y="4041648"/>
+            <a:ext cx="822960" cy="292608"/>
+          </a:xfrm>
+          <a:prstGeom prst="roundRect">
+            <a:avLst>
+              <a:gd name="adj" fmla="val 18750"/>
+            </a:avLst>
+          </a:prstGeom>
+          <a:solidFill>
+            <a:srgbClr val="FFFFFF"/>
+          </a:solidFill>
+          <a:ln w="12700">
+            <a:solidFill>
+              <a:srgbClr val="E5E7EB"/>
+            </a:solidFill>
+            <a:prstDash val="solid"/>
+          </a:ln>
+        </p:spPr>
+      </p:sp>
+      <p:sp>
+        <p:nvSpPr>
+          <p:cNvPr id="14" name="Text 12"/>
+          <p:cNvSpPr/>
+          <p:nvPr/>
+        </p:nvSpPr>
+        <p:spPr>
+          <a:xfrm>
+            <a:off x="1051560" y="4041648"/>
+            <a:ext cx="822960" cy="292608"/>
+          </a:xfrm>
+          <a:prstGeom prst="rect">
+            <a:avLst/>
+          </a:prstGeom>
+          <a:noFill/>
+          <a:ln/>
+        </p:spPr>
+        <p:txBody>
+          <a:bodyPr wrap="square" lIns="0" tIns="0" rIns="0" bIns="0" rtlCol="0" anchor="ctr"/>
+          <a:lstStyle/>
+          <a:p>
+            <a:pPr algn="ctr" indent="0" marL="0">
+              <a:lnSpc>
+                <a:spcPct val="130000"/>
+              </a:lnSpc>
+              <a:buNone/>
+            </a:pPr>
+            <a:r>
+              <a:rPr lang="en-US" sz="850" dirty="0">
+                <a:solidFill>
+                  <a:srgbClr val="55555A"/>
+                </a:solidFill>
+                <a:latin typeface="Pretendard Medium" pitchFamily="34" charset="0"/>
+                <a:ea typeface="Pretendard Medium" pitchFamily="34" charset="-122"/>
+                <a:cs typeface="Pretendard Medium" pitchFamily="34" charset="-120"/>
+              </a:rPr>
+              <a:t>templates</a:t>
+            </a:r>
+            <a:endParaRPr lang="en-US" sz="850" dirty="0"/>
+          </a:p>
+        </p:txBody>
+      </p:sp>
+      <p:sp>
+        <p:nvSpPr>
+          <p:cNvPr id="15" name="Shape 13"/>
+          <p:cNvSpPr/>
+          <p:nvPr/>
+        </p:nvSpPr>
+        <p:spPr>
+          <a:xfrm>
+            <a:off x="1920240" y="4041648"/>
+            <a:ext cx="822960" cy="292608"/>
+          </a:xfrm>
+          <a:prstGeom prst="roundRect">
+            <a:avLst>
+              <a:gd name="adj" fmla="val 18750"/>
+            </a:avLst>
+          </a:prstGeom>
+          <a:solidFill>
+            <a:srgbClr val="FFFFFF"/>
+          </a:solidFill>
+          <a:ln w="12700">
+            <a:solidFill>
+              <a:srgbClr val="E5E7EB"/>
+            </a:solidFill>
+            <a:prstDash val="solid"/>
+          </a:ln>
+        </p:spPr>
+      </p:sp>
+      <p:sp>
+        <p:nvSpPr>
+          <p:cNvPr id="16" name="Text 14"/>
+          <p:cNvSpPr/>
+          <p:nvPr/>
+        </p:nvSpPr>
+        <p:spPr>
+          <a:xfrm>
+            <a:off x="1920240" y="4041648"/>
+            <a:ext cx="822960" cy="292608"/>
+          </a:xfrm>
+          <a:prstGeom prst="rect">
+            <a:avLst/>
+          </a:prstGeom>
+          <a:noFill/>
+          <a:ln/>
+        </p:spPr>
+        <p:txBody>
+          <a:bodyPr wrap="square" lIns="0" tIns="0" rIns="0" bIns="0" rtlCol="0" anchor="ctr"/>
+          <a:lstStyle/>
+          <a:p>
+            <a:pPr algn="ctr" indent="0" marL="0">
+              <a:lnSpc>
+                <a:spcPct val="130000"/>
+              </a:lnSpc>
+              <a:buNone/>
+            </a:pPr>
+            <a:r>
+              <a:rPr lang="en-US" sz="850" dirty="0">
+                <a:solidFill>
+                  <a:srgbClr val="55555A"/>
+                </a:solidFill>
+                <a:latin typeface="Pretendard Medium" pitchFamily="34" charset="0"/>
+                <a:ea typeface="Pretendard Medium" pitchFamily="34" charset="-122"/>
+                <a:cs typeface="Pretendard Medium" pitchFamily="34" charset="-120"/>
+              </a:rPr>
+              <a:t>service</a:t>
+            </a:r>
+            <a:endParaRPr lang="en-US" sz="850" dirty="0"/>
+          </a:p>
+        </p:txBody>
+      </p:sp>
+      <p:sp>
+        <p:nvSpPr>
+          <p:cNvPr id="17" name="Shape 15"/>
+          <p:cNvSpPr/>
+          <p:nvPr/>
+        </p:nvSpPr>
+        <p:spPr>
+          <a:xfrm>
+            <a:off x="2788920" y="4041648"/>
+            <a:ext cx="822960" cy="292608"/>
+          </a:xfrm>
+          <a:prstGeom prst="roundRect">
+            <a:avLst>
+              <a:gd name="adj" fmla="val 18750"/>
+            </a:avLst>
+          </a:prstGeom>
+          <a:solidFill>
+            <a:srgbClr val="FFFFFF"/>
+          </a:solidFill>
+          <a:ln w="12700">
+            <a:solidFill>
+              <a:srgbClr val="E5E7EB"/>
+            </a:solidFill>
+            <a:prstDash val="solid"/>
+          </a:ln>
+        </p:spPr>
+      </p:sp>
+      <p:sp>
+        <p:nvSpPr>
+          <p:cNvPr id="18" name="Text 16"/>
+          <p:cNvSpPr/>
+          <p:nvPr/>
+        </p:nvSpPr>
+        <p:spPr>
+          <a:xfrm>
+            <a:off x="2788920" y="4041648"/>
+            <a:ext cx="822960" cy="292608"/>
+          </a:xfrm>
+          <a:prstGeom prst="rect">
+            <a:avLst/>
+          </a:prstGeom>
+          <a:noFill/>
+          <a:ln/>
+        </p:spPr>
+        <p:txBody>
+          <a:bodyPr wrap="square" lIns="0" tIns="0" rIns="0" bIns="0" rtlCol="0" anchor="ctr"/>
+          <a:lstStyle/>
+          <a:p>
+            <a:pPr algn="ctr" indent="0" marL="0">
+              <a:lnSpc>
+                <a:spcPct val="130000"/>
+              </a:lnSpc>
+              <a:buNone/>
+            </a:pPr>
+            <a:r>
+              <a:rPr lang="en-US" sz="850" dirty="0">
+                <a:solidFill>
+                  <a:srgbClr val="55555A"/>
+                </a:solidFill>
+                <a:latin typeface="Pretendard Medium" pitchFamily="34" charset="0"/>
+                <a:ea typeface="Pretendard Medium" pitchFamily="34" charset="-122"/>
+                <a:cs typeface="Pretendard Medium" pitchFamily="34" charset="-120"/>
+              </a:rPr>
+              <a:t>system</a:t>
+            </a:r>
+            <a:endParaRPr lang="en-US" sz="850" dirty="0"/>
+          </a:p>
+        </p:txBody>
+      </p:sp>
+      <p:sp>
+        <p:nvSpPr>
+          <p:cNvPr id="19" name="Shape 17"/>
+          <p:cNvSpPr/>
+          <p:nvPr/>
+        </p:nvSpPr>
+        <p:spPr>
+          <a:xfrm>
+            <a:off x="3657600" y="4041648"/>
+            <a:ext cx="822960" cy="292608"/>
+          </a:xfrm>
+          <a:prstGeom prst="roundRect">
+            <a:avLst>
+              <a:gd name="adj" fmla="val 18750"/>
+            </a:avLst>
+          </a:prstGeom>
+          <a:solidFill>
+            <a:srgbClr val="FFFFFF"/>
+          </a:solidFill>
+          <a:ln w="12700">
+            <a:solidFill>
+              <a:srgbClr val="E5E7EB"/>
+            </a:solidFill>
+            <a:prstDash val="solid"/>
+          </a:ln>
+        </p:spPr>
+      </p:sp>
+      <p:sp>
+        <p:nvSpPr>
+          <p:cNvPr id="20" name="Text 18"/>
+          <p:cNvSpPr/>
+          <p:nvPr/>
+        </p:nvSpPr>
+        <p:spPr>
+          <a:xfrm>
+            <a:off x="3657600" y="4041648"/>
+            <a:ext cx="822960" cy="292608"/>
+          </a:xfrm>
+          <a:prstGeom prst="rect">
+            <a:avLst/>
+          </a:prstGeom>
+          <a:noFill/>
+          <a:ln/>
+        </p:spPr>
+        <p:txBody>
+          <a:bodyPr wrap="square" lIns="0" tIns="0" rIns="0" bIns="0" rtlCol="0" anchor="ctr"/>
+          <a:lstStyle/>
+          <a:p>
+            <a:pPr algn="ctr" indent="0" marL="0">
+              <a:lnSpc>
+                <a:spcPct val="130000"/>
+              </a:lnSpc>
+              <a:buNone/>
+            </a:pPr>
+            <a:r>
+              <a:rPr lang="en-US" sz="850" dirty="0">
+                <a:solidFill>
+                  <a:srgbClr val="55555A"/>
+                </a:solidFill>
+                <a:latin typeface="Pretendard Medium" pitchFamily="34" charset="0"/>
+                <a:ea typeface="Pretendard Medium" pitchFamily="34" charset="-122"/>
+                <a:cs typeface="Pretendard Medium" pitchFamily="34" charset="-120"/>
+              </a:rPr>
+              <a:t>marketing</a:t>
+            </a:r>
+            <a:endParaRPr lang="en-US" sz="850" dirty="0"/>
+          </a:p>
+        </p:txBody>
+      </p:sp>
+      <p:sp>
+        <p:nvSpPr>
+          <p:cNvPr id="21" name="Shape 19"/>
+          <p:cNvSpPr/>
+          <p:nvPr/>
+        </p:nvSpPr>
+        <p:spPr>
+          <a:xfrm>
+            <a:off x="4526280" y="4041648"/>
+            <a:ext cx="822960" cy="292608"/>
+          </a:xfrm>
+          <a:prstGeom prst="roundRect">
+            <a:avLst>
+              <a:gd name="adj" fmla="val 18750"/>
+            </a:avLst>
+          </a:prstGeom>
+          <a:solidFill>
+            <a:srgbClr val="FFFFFF"/>
+          </a:solidFill>
+          <a:ln w="12700">
+            <a:solidFill>
+              <a:srgbClr val="E5E7EB"/>
+            </a:solidFill>
+            <a:prstDash val="solid"/>
+          </a:ln>
+        </p:spPr>
+      </p:sp>
+      <p:sp>
+        <p:nvSpPr>
+          <p:cNvPr id="22" name="Text 20"/>
+          <p:cNvSpPr/>
+          <p:nvPr/>
+        </p:nvSpPr>
+        <p:spPr>
+          <a:xfrm>
+            <a:off x="4526280" y="4041648"/>
+            <a:ext cx="822960" cy="292608"/>
+          </a:xfrm>
+          <a:prstGeom prst="rect">
+            <a:avLst/>
+          </a:prstGeom>
+          <a:noFill/>
+          <a:ln/>
+        </p:spPr>
+        <p:txBody>
+          <a:bodyPr wrap="square" lIns="0" tIns="0" rIns="0" bIns="0" rtlCol="0" anchor="ctr"/>
+          <a:lstStyle/>
+          <a:p>
+            <a:pPr algn="ctr" indent="0" marL="0">
+              <a:lnSpc>
+                <a:spcPct val="130000"/>
+              </a:lnSpc>
+              <a:buNone/>
+            </a:pPr>
+            <a:r>
+              <a:rPr lang="en-US" sz="850" dirty="0">
+                <a:solidFill>
+                  <a:srgbClr val="55555A"/>
+                </a:solidFill>
+                <a:latin typeface="Pretendard Medium" pitchFamily="34" charset="0"/>
+                <a:ea typeface="Pretendard Medium" pitchFamily="34" charset="-122"/>
+                <a:cs typeface="Pretendard Medium" pitchFamily="34" charset="-120"/>
+              </a:rPr>
+              <a:t>qrstp</a:t>
+            </a:r>
+            <a:endParaRPr lang="en-US" sz="850" dirty="0"/>
+          </a:p>
+        </p:txBody>
+      </p:sp>
+      <p:sp>
+        <p:nvSpPr>
+          <p:cNvPr id="23" name="Text 21"/>
+          <p:cNvSpPr/>
+          <p:nvPr/>
+        </p:nvSpPr>
+        <p:spPr>
+          <a:xfrm>
+            <a:off x="1051560" y="4681728"/>
+            <a:ext cx="4389120" cy="256032"/>
+          </a:xfrm>
+          <a:prstGeom prst="rect">
+            <a:avLst/>
+          </a:prstGeom>
+          <a:noFill/>
+          <a:ln/>
+        </p:spPr>
+        <p:txBody>
+          <a:bodyPr wrap="square" lIns="0" tIns="0" rIns="0" bIns="0" rtlCol="0" anchor="t"/>
+          <a:lstStyle/>
+          <a:p>
+            <a:pPr algn="l" indent="0" marL="0">
+              <a:lnSpc>
+                <a:spcPct val="130000"/>
+              </a:lnSpc>
+              <a:buNone/>
+            </a:pPr>
+            <a:r>
+              <a:rPr lang="en-US" sz="1100" dirty="0">
+                <a:solidFill>
+                  <a:srgbClr val="6E6E73"/>
                 </a:solidFill>
                 <a:latin typeface="Pretendard SemiBold" pitchFamily="34" charset="0"/>
                 <a:ea typeface="Pretendard SemiBold" pitchFamily="34" charset="-122"/>
                 <a:cs typeface="Pretendard SemiBold" pitchFamily="34" charset="-120"/>
               </a:rPr>
-              <a:t>통합 기능 경로 가이드</a:t>
-            </a:r>
-            <a:endParaRPr lang="en-US" sz="1250" dirty="0"/>
-          </a:p>
-        </p:txBody>
-      </p:sp>
-      <p:sp>
-        <p:nvSpPr>
-          <p:cNvPr id="12" name="Text 10"/>
-          <p:cNvSpPr/>
-          <p:nvPr/>
-        </p:nvSpPr>
-        <p:spPr>
-          <a:xfrm>
-            <a:off x="1325880" y="3337560"/>
-            <a:ext cx="4206240" cy="274320"/>
+              <a:t>이건 플러그인이 아님</a:t>
+            </a:r>
+            <a:endParaRPr lang="en-US" sz="1100" dirty="0"/>
+          </a:p>
+        </p:txBody>
+      </p:sp>
+      <p:sp>
+        <p:nvSpPr>
+          <p:cNvPr id="24" name="Text 22"/>
+          <p:cNvSpPr/>
+          <p:nvPr/>
+        </p:nvSpPr>
+        <p:spPr>
+          <a:xfrm>
+            <a:off x="1051560" y="4956048"/>
+            <a:ext cx="4389120" cy="822960"/>
           </a:xfrm>
           <a:prstGeom prst="rect">
             <a:avLst/>
@@ -10528,124 +10964,40 @@
           <a:p>
             <a:pPr algn="l" indent="0" marL="0">
               <a:lnSpc>
-                <a:spcPct val="130000"/>
+                <a:spcPct val="140000"/>
               </a:lnSpc>
               <a:buNone/>
             </a:pPr>
             <a:r>
               <a:rPr lang="en-US" sz="1050" dirty="0">
                 <a:solidFill>
-                  <a:srgbClr val="55555A"/>
+                  <a:srgbClr val="6E6E73"/>
                 </a:solidFill>
                 <a:latin typeface="Pretendard" pitchFamily="34" charset="0"/>
                 <a:ea typeface="Pretendard" pitchFamily="34" charset="-122"/>
                 <a:cs typeface="Pretendard" pitchFamily="34" charset="-120"/>
               </a:rPr>
-              <a:t>전 볼트 CdBd 기능 → 파일  ·  어디서 켜도 자동 로드</a:t>
+              <a:t>· 브랜드 토큰 · Figma MCP → Figma 작업용 도구</a:t>
             </a:r>
             <a:endParaRPr lang="en-US" sz="1050" dirty="0"/>
           </a:p>
-        </p:txBody>
-      </p:sp>
-      <p:sp>
-        <p:nvSpPr>
-          <p:cNvPr id="13" name="Shape 11"/>
-          <p:cNvSpPr/>
-          <p:nvPr/>
-        </p:nvSpPr>
-        <p:spPr>
-          <a:xfrm>
-            <a:off x="1088136" y="3785616"/>
-            <a:ext cx="109728" cy="109728"/>
-          </a:xfrm>
-          <a:prstGeom prst="ellipse">
-            <a:avLst/>
-          </a:prstGeom>
-          <a:solidFill>
-            <a:srgbClr val="6C4CFF"/>
-          </a:solidFill>
-          <a:ln/>
-        </p:spPr>
-      </p:sp>
-      <p:sp>
-        <p:nvSpPr>
-          <p:cNvPr id="14" name="Text 12"/>
-          <p:cNvSpPr/>
-          <p:nvPr/>
-        </p:nvSpPr>
-        <p:spPr>
-          <a:xfrm>
-            <a:off x="1325880" y="3721608"/>
-            <a:ext cx="4206240" cy="274320"/>
-          </a:xfrm>
-          <a:prstGeom prst="rect">
-            <a:avLst/>
-          </a:prstGeom>
-          <a:noFill/>
-          <a:ln/>
-        </p:spPr>
-        <p:txBody>
-          <a:bodyPr wrap="square" lIns="0" tIns="0" rIns="0" bIns="0" rtlCol="0" anchor="t"/>
-          <a:lstStyle/>
-          <a:p>
-            <a:pPr algn="l" indent="0" marL="0">
-              <a:lnSpc>
-                <a:spcPct val="130000"/>
-              </a:lnSpc>
-              <a:buNone/>
-            </a:pPr>
-            <a:r>
-              <a:rPr lang="en-US" sz="1250" dirty="0">
-                <a:solidFill>
-                  <a:srgbClr val="6C4CFF"/>
-                </a:solidFill>
-                <a:latin typeface="Pretendard SemiBold" pitchFamily="34" charset="0"/>
-                <a:ea typeface="Pretendard SemiBold" pitchFamily="34" charset="-122"/>
-                <a:cs typeface="Pretendard SemiBold" pitchFamily="34" charset="-120"/>
-              </a:rPr>
-              <a:t>브랜드 토큰 정본</a:t>
-            </a:r>
-            <a:endParaRPr lang="en-US" sz="1250" dirty="0"/>
-          </a:p>
-        </p:txBody>
-      </p:sp>
-      <p:sp>
-        <p:nvSpPr>
-          <p:cNvPr id="15" name="Text 13"/>
-          <p:cNvSpPr/>
-          <p:nvPr/>
-        </p:nvSpPr>
-        <p:spPr>
-          <a:xfrm>
-            <a:off x="1325880" y="3995928"/>
-            <a:ext cx="4206240" cy="274320"/>
-          </a:xfrm>
-          <a:prstGeom prst="rect">
-            <a:avLst/>
-          </a:prstGeom>
-          <a:noFill/>
-          <a:ln/>
-        </p:spPr>
-        <p:txBody>
-          <a:bodyPr wrap="square" lIns="0" tIns="0" rIns="0" bIns="0" rtlCol="0" anchor="t"/>
-          <a:lstStyle/>
-          <a:p>
-            <a:pPr algn="l" indent="0" marL="0">
-              <a:lnSpc>
-                <a:spcPct val="130000"/>
+          <a:p>
+            <a:pPr algn="l" indent="0" marL="0">
+              <a:lnSpc>
+                <a:spcPct val="140000"/>
               </a:lnSpc>
               <a:buNone/>
             </a:pPr>
             <a:r>
               <a:rPr lang="en-US" sz="1050" dirty="0">
                 <a:solidFill>
-                  <a:srgbClr val="55555A"/>
+                  <a:srgbClr val="6E6E73"/>
                 </a:solidFill>
                 <a:latin typeface="Pretendard" pitchFamily="34" charset="0"/>
                 <a:ea typeface="Pretendard" pitchFamily="34" charset="-122"/>
                 <a:cs typeface="Pretendard" pitchFamily="34" charset="-120"/>
               </a:rPr>
-              <a:t>컬러 · 폰트 정본값  ·  어느 볼트든 같은 값</a:t>
+              <a:t>· 로그인 정보 → 비밀이라 각자 로컬(~/.config)</a:t>
             </a:r>
             <a:endParaRPr lang="en-US" sz="1050" dirty="0"/>
           </a:p>
@@ -10653,215 +11005,7 @@
       </p:sp>
       <p:sp>
         <p:nvSpPr>
-          <p:cNvPr id="16" name="Shape 14"/>
-          <p:cNvSpPr/>
-          <p:nvPr/>
-        </p:nvSpPr>
-        <p:spPr>
-          <a:xfrm>
-            <a:off x="1088136" y="4443984"/>
-            <a:ext cx="109728" cy="109728"/>
-          </a:xfrm>
-          <a:prstGeom prst="ellipse">
-            <a:avLst/>
-          </a:prstGeom>
-          <a:solidFill>
-            <a:srgbClr val="6C4CFF"/>
-          </a:solidFill>
-          <a:ln/>
-        </p:spPr>
-      </p:sp>
-      <p:sp>
-        <p:nvSpPr>
-          <p:cNvPr id="17" name="Text 15"/>
-          <p:cNvSpPr/>
-          <p:nvPr/>
-        </p:nvSpPr>
-        <p:spPr>
-          <a:xfrm>
-            <a:off x="1325880" y="4379976"/>
-            <a:ext cx="4206240" cy="274320"/>
-          </a:xfrm>
-          <a:prstGeom prst="rect">
-            <a:avLst/>
-          </a:prstGeom>
-          <a:noFill/>
-          <a:ln/>
-        </p:spPr>
-        <p:txBody>
-          <a:bodyPr wrap="square" lIns="0" tIns="0" rIns="0" bIns="0" rtlCol="0" anchor="t"/>
-          <a:lstStyle/>
-          <a:p>
-            <a:pPr algn="l" indent="0" marL="0">
-              <a:lnSpc>
-                <a:spcPct val="130000"/>
-              </a:lnSpc>
-              <a:buNone/>
-            </a:pPr>
-            <a:r>
-              <a:rPr lang="en-US" sz="1250" dirty="0">
-                <a:solidFill>
-                  <a:srgbClr val="6C4CFF"/>
-                </a:solidFill>
-                <a:latin typeface="Pretendard SemiBold" pitchFamily="34" charset="0"/>
-                <a:ea typeface="Pretendard SemiBold" pitchFamily="34" charset="-122"/>
-                <a:cs typeface="Pretendard SemiBold" pitchFamily="34" charset="-120"/>
-              </a:rPr>
-              <a:t>.mcp.json</a:t>
-            </a:r>
-            <a:endParaRPr lang="en-US" sz="1250" dirty="0"/>
-          </a:p>
-        </p:txBody>
-      </p:sp>
-      <p:sp>
-        <p:nvSpPr>
-          <p:cNvPr id="18" name="Text 16"/>
-          <p:cNvSpPr/>
-          <p:nvPr/>
-        </p:nvSpPr>
-        <p:spPr>
-          <a:xfrm>
-            <a:off x="1325880" y="4654296"/>
-            <a:ext cx="4206240" cy="274320"/>
-          </a:xfrm>
-          <a:prstGeom prst="rect">
-            <a:avLst/>
-          </a:prstGeom>
-          <a:noFill/>
-          <a:ln/>
-        </p:spPr>
-        <p:txBody>
-          <a:bodyPr wrap="square" lIns="0" tIns="0" rIns="0" bIns="0" rtlCol="0" anchor="t"/>
-          <a:lstStyle/>
-          <a:p>
-            <a:pPr algn="l" indent="0" marL="0">
-              <a:lnSpc>
-                <a:spcPct val="130000"/>
-              </a:lnSpc>
-              <a:buNone/>
-            </a:pPr>
-            <a:r>
-              <a:rPr lang="en-US" sz="1050" dirty="0">
-                <a:solidFill>
-                  <a:srgbClr val="55555A"/>
-                </a:solidFill>
-                <a:latin typeface="Pretendard" pitchFamily="34" charset="0"/>
-                <a:ea typeface="Pretendard" pitchFamily="34" charset="-122"/>
-                <a:cs typeface="Pretendard" pitchFamily="34" charset="-120"/>
-              </a:rPr>
-              <a:t>Figma 연결  ·  실행 도구</a:t>
-            </a:r>
-            <a:endParaRPr lang="en-US" sz="1050" dirty="0"/>
-          </a:p>
-        </p:txBody>
-      </p:sp>
-      <p:sp>
-        <p:nvSpPr>
-          <p:cNvPr id="19" name="Shape 17"/>
-          <p:cNvSpPr/>
-          <p:nvPr/>
-        </p:nvSpPr>
-        <p:spPr>
-          <a:xfrm>
-            <a:off x="1088136" y="5102352"/>
-            <a:ext cx="109728" cy="109728"/>
-          </a:xfrm>
-          <a:prstGeom prst="ellipse">
-            <a:avLst/>
-          </a:prstGeom>
-          <a:solidFill>
-            <a:srgbClr val="6C4CFF"/>
-          </a:solidFill>
-          <a:ln/>
-        </p:spPr>
-      </p:sp>
-      <p:sp>
-        <p:nvSpPr>
-          <p:cNvPr id="20" name="Text 18"/>
-          <p:cNvSpPr/>
-          <p:nvPr/>
-        </p:nvSpPr>
-        <p:spPr>
-          <a:xfrm>
-            <a:off x="1325880" y="5038344"/>
-            <a:ext cx="4206240" cy="274320"/>
-          </a:xfrm>
-          <a:prstGeom prst="rect">
-            <a:avLst/>
-          </a:prstGeom>
-          <a:noFill/>
-          <a:ln/>
-        </p:spPr>
-        <p:txBody>
-          <a:bodyPr wrap="square" lIns="0" tIns="0" rIns="0" bIns="0" rtlCol="0" anchor="t"/>
-          <a:lstStyle/>
-          <a:p>
-            <a:pPr algn="l" indent="0" marL="0">
-              <a:lnSpc>
-                <a:spcPct val="130000"/>
-              </a:lnSpc>
-              <a:buNone/>
-            </a:pPr>
-            <a:r>
-              <a:rPr lang="en-US" sz="1250" dirty="0">
-                <a:solidFill>
-                  <a:srgbClr val="6C4CFF"/>
-                </a:solidFill>
-                <a:latin typeface="Pretendard SemiBold" pitchFamily="34" charset="0"/>
-                <a:ea typeface="Pretendard SemiBold" pitchFamily="34" charset="-122"/>
-                <a:cs typeface="Pretendard SemiBold" pitchFamily="34" charset="-120"/>
-              </a:rPr>
-              <a:t>로그인 · 셋업 안내</a:t>
-            </a:r>
-            <a:endParaRPr lang="en-US" sz="1250" dirty="0"/>
-          </a:p>
-        </p:txBody>
-      </p:sp>
-      <p:sp>
-        <p:nvSpPr>
-          <p:cNvPr id="21" name="Text 19"/>
-          <p:cNvSpPr/>
-          <p:nvPr/>
-        </p:nvSpPr>
-        <p:spPr>
-          <a:xfrm>
-            <a:off x="1325880" y="5312664"/>
-            <a:ext cx="4206240" cy="274320"/>
-          </a:xfrm>
-          <a:prstGeom prst="rect">
-            <a:avLst/>
-          </a:prstGeom>
-          <a:noFill/>
-          <a:ln/>
-        </p:spPr>
-        <p:txBody>
-          <a:bodyPr wrap="square" lIns="0" tIns="0" rIns="0" bIns="0" rtlCol="0" anchor="t"/>
-          <a:lstStyle/>
-          <a:p>
-            <a:pPr algn="l" indent="0" marL="0">
-              <a:lnSpc>
-                <a:spcPct val="130000"/>
-              </a:lnSpc>
-              <a:buNone/>
-            </a:pPr>
-            <a:r>
-              <a:rPr lang="en-US" sz="1050" dirty="0">
-                <a:solidFill>
-                  <a:srgbClr val="55555A"/>
-                </a:solidFill>
-                <a:latin typeface="Pretendard" pitchFamily="34" charset="0"/>
-                <a:ea typeface="Pretendard" pitchFamily="34" charset="-122"/>
-                <a:cs typeface="Pretendard" pitchFamily="34" charset="-120"/>
-              </a:rPr>
-              <a:t>각자 컴퓨터 설정 위치  ·  어느 PC에서도 실행</a:t>
-            </a:r>
-            <a:endParaRPr lang="en-US" sz="1050" dirty="0"/>
-          </a:p>
-        </p:txBody>
-      </p:sp>
-      <p:sp>
-        <p:nvSpPr>
-          <p:cNvPr id="22" name="Shape 20"/>
+          <p:cNvPr id="25" name="Shape 23"/>
           <p:cNvSpPr/>
           <p:nvPr/>
         </p:nvSpPr>
@@ -10888,7 +11032,7 @@
       </p:sp>
       <p:sp>
         <p:nvSpPr>
-          <p:cNvPr id="23" name="Text 21"/>
+          <p:cNvPr id="26" name="Text 24"/>
           <p:cNvSpPr/>
           <p:nvPr/>
         </p:nvSpPr>
@@ -10922,7 +11066,7 @@
                 <a:ea typeface="Pretendard" pitchFamily="34" charset="-122"/>
                 <a:cs typeface="Pretendard" pitchFamily="34" charset="-120"/>
               </a:rPr>
-              <a:t>파일 구조는 이렇게 — 새 저장소 1개</a:t>
+              <a:t>이 가이드가 하는 일 (역할)</a:t>
             </a:r>
             <a:endParaRPr lang="en-US" sz="1300" dirty="0"/>
           </a:p>
@@ -10930,125 +11074,142 @@
       </p:sp>
       <p:sp>
         <p:nvSpPr>
-          <p:cNvPr id="24" name="Text 22"/>
-          <p:cNvSpPr/>
-          <p:nvPr/>
-        </p:nvSpPr>
-        <p:spPr>
-          <a:xfrm>
-            <a:off x="6263640" y="3035808"/>
-            <a:ext cx="3063240" cy="347472"/>
-          </a:xfrm>
-          <a:prstGeom prst="rect">
-            <a:avLst/>
-          </a:prstGeom>
-          <a:noFill/>
-          <a:ln/>
-        </p:spPr>
-        <p:txBody>
-          <a:bodyPr wrap="square" lIns="0" tIns="0" rIns="0" bIns="0" rtlCol="0" anchor="ctr"/>
-          <a:lstStyle/>
-          <a:p>
-            <a:pPr algn="l" indent="0" marL="0">
-              <a:lnSpc>
-                <a:spcPct val="100000"/>
-              </a:lnSpc>
-              <a:buNone/>
-            </a:pPr>
-            <a:r>
-              <a:rPr lang="en-US" sz="1050" dirty="0">
-                <a:solidFill>
-                  <a:srgbClr val="6C4CFF"/>
+          <p:cNvPr id="27" name="Shape 25"/>
+          <p:cNvSpPr/>
+          <p:nvPr/>
+        </p:nvSpPr>
+        <p:spPr>
+          <a:xfrm>
+            <a:off x="6263640" y="3081528"/>
+            <a:ext cx="365760" cy="365760"/>
+          </a:xfrm>
+          <a:prstGeom prst="ellipse">
+            <a:avLst/>
+          </a:prstGeom>
+          <a:solidFill>
+            <a:srgbClr val="6C4CFF"/>
+          </a:solidFill>
+          <a:ln/>
+        </p:spPr>
+      </p:sp>
+      <p:sp>
+        <p:nvSpPr>
+          <p:cNvPr id="28" name="Text 26"/>
+          <p:cNvSpPr/>
+          <p:nvPr/>
+        </p:nvSpPr>
+        <p:spPr>
+          <a:xfrm>
+            <a:off x="6263640" y="3081528"/>
+            <a:ext cx="365760" cy="365760"/>
+          </a:xfrm>
+          <a:prstGeom prst="rect">
+            <a:avLst/>
+          </a:prstGeom>
+          <a:noFill/>
+          <a:ln/>
+        </p:spPr>
+        <p:txBody>
+          <a:bodyPr wrap="square" lIns="0" tIns="0" rIns="0" bIns="0" rtlCol="0" anchor="ctr"/>
+          <a:lstStyle/>
+          <a:p>
+            <a:pPr algn="ctr" indent="0" marL="0">
+              <a:buNone/>
+            </a:pPr>
+            <a:r>
+              <a:rPr lang="en-US" sz="1300" b="1" dirty="0">
+                <a:solidFill>
+                  <a:srgbClr val="FFFFFF"/>
+                </a:solidFill>
+                <a:latin typeface="Pretendard" pitchFamily="34" charset="0"/>
+                <a:ea typeface="Pretendard" pitchFamily="34" charset="-122"/>
+                <a:cs typeface="Pretendard" pitchFamily="34" charset="-120"/>
+              </a:rPr>
+              <a:t>1</a:t>
+            </a:r>
+            <a:endParaRPr lang="en-US" sz="1300" dirty="0"/>
+          </a:p>
+        </p:txBody>
+      </p:sp>
+      <p:sp>
+        <p:nvSpPr>
+          <p:cNvPr id="29" name="Text 27"/>
+          <p:cNvSpPr/>
+          <p:nvPr/>
+        </p:nvSpPr>
+        <p:spPr>
+          <a:xfrm>
+            <a:off x="6766560" y="3063240"/>
+            <a:ext cx="4419295" cy="274320"/>
+          </a:xfrm>
+          <a:prstGeom prst="rect">
+            <a:avLst/>
+          </a:prstGeom>
+          <a:noFill/>
+          <a:ln/>
+        </p:spPr>
+        <p:txBody>
+          <a:bodyPr wrap="square" lIns="0" tIns="0" rIns="0" bIns="0" rtlCol="0" anchor="t"/>
+          <a:lstStyle/>
+          <a:p>
+            <a:pPr algn="l" indent="0" marL="0">
+              <a:lnSpc>
+                <a:spcPct val="130000"/>
+              </a:lnSpc>
+              <a:buNone/>
+            </a:pPr>
+            <a:r>
+              <a:rPr lang="en-US" sz="1300" dirty="0">
+                <a:solidFill>
+                  <a:srgbClr val="1D1D1F"/>
                 </a:solidFill>
                 <a:latin typeface="Pretendard SemiBold" pitchFamily="34" charset="0"/>
                 <a:ea typeface="Pretendard SemiBold" pitchFamily="34" charset="-122"/>
                 <a:cs typeface="Pretendard SemiBold" pitchFamily="34" charset="-120"/>
               </a:rPr>
-              <a:t>cdbd-plugin/</a:t>
-            </a:r>
-            <a:endParaRPr lang="en-US" sz="1050" dirty="0"/>
-          </a:p>
-        </p:txBody>
-      </p:sp>
-      <p:sp>
-        <p:nvSpPr>
-          <p:cNvPr id="25" name="Text 23"/>
-          <p:cNvSpPr/>
-          <p:nvPr/>
-        </p:nvSpPr>
-        <p:spPr>
-          <a:xfrm>
-            <a:off x="9418320" y="3035808"/>
-            <a:ext cx="1721815" cy="347472"/>
-          </a:xfrm>
-          <a:prstGeom prst="rect">
-            <a:avLst/>
-          </a:prstGeom>
-          <a:noFill/>
-          <a:ln/>
-        </p:spPr>
-        <p:txBody>
-          <a:bodyPr wrap="square" lIns="0" tIns="0" rIns="0" bIns="0" rtlCol="0" anchor="ctr"/>
-          <a:lstStyle/>
-          <a:p>
-            <a:pPr algn="l" indent="0" marL="0">
-              <a:lnSpc>
-                <a:spcPct val="100000"/>
-              </a:lnSpc>
-              <a:buNone/>
-            </a:pPr>
-            <a:r>
-              <a:rPr lang="en-US" sz="1000" dirty="0">
-                <a:solidFill>
-                  <a:srgbClr val="6C4CFF"/>
+              <a:t>위치 무관 발견</a:t>
+            </a:r>
+            <a:endParaRPr lang="en-US" sz="1300" dirty="0"/>
+          </a:p>
+        </p:txBody>
+      </p:sp>
+      <p:sp>
+        <p:nvSpPr>
+          <p:cNvPr id="30" name="Text 28"/>
+          <p:cNvSpPr/>
+          <p:nvPr/>
+        </p:nvSpPr>
+        <p:spPr>
+          <a:xfrm>
+            <a:off x="6766560" y="3364992"/>
+            <a:ext cx="4373575" cy="640080"/>
+          </a:xfrm>
+          <a:prstGeom prst="rect">
+            <a:avLst/>
+          </a:prstGeom>
+          <a:noFill/>
+          <a:ln/>
+        </p:spPr>
+        <p:txBody>
+          <a:bodyPr wrap="square" lIns="0" tIns="0" rIns="0" bIns="0" rtlCol="0" anchor="t"/>
+          <a:lstStyle/>
+          <a:p>
+            <a:pPr algn="l" indent="0" marL="0">
+              <a:lnSpc>
+                <a:spcPct val="135000"/>
+              </a:lnSpc>
+              <a:buNone/>
+            </a:pPr>
+            <a:r>
+              <a:rPr lang="en-US" sz="1050" dirty="0">
+                <a:solidFill>
+                  <a:srgbClr val="55555A"/>
                 </a:solidFill>
                 <a:latin typeface="Pretendard" pitchFamily="34" charset="0"/>
                 <a:ea typeface="Pretendard" pitchFamily="34" charset="-122"/>
                 <a:cs typeface="Pretendard" pitchFamily="34" charset="-120"/>
               </a:rPr>
-              <a:t>신규 저장소</a:t>
-            </a:r>
-            <a:endParaRPr lang="en-US" sz="1000" dirty="0"/>
-          </a:p>
-        </p:txBody>
-      </p:sp>
-      <p:sp>
-        <p:nvSpPr>
-          <p:cNvPr id="26" name="Text 24"/>
-          <p:cNvSpPr/>
-          <p:nvPr/>
-        </p:nvSpPr>
-        <p:spPr>
-          <a:xfrm>
-            <a:off x="6263640" y="3383280"/>
-            <a:ext cx="3063240" cy="347472"/>
-          </a:xfrm>
-          <a:prstGeom prst="rect">
-            <a:avLst/>
-          </a:prstGeom>
-          <a:noFill/>
-          <a:ln/>
-        </p:spPr>
-        <p:txBody>
-          <a:bodyPr wrap="square" lIns="0" tIns="0" rIns="0" bIns="0" rtlCol="0" anchor="ctr"/>
-          <a:lstStyle/>
-          <a:p>
-            <a:pPr algn="l" indent="0" marL="0">
-              <a:lnSpc>
-                <a:spcPct val="100000"/>
-              </a:lnSpc>
-              <a:buNone/>
-            </a:pPr>
-            <a:r>
-              <a:rPr lang="en-US" sz="1050" dirty="0">
-                <a:solidFill>
-                  <a:srgbClr val="1D1D1F"/>
-                </a:solidFill>
-                <a:latin typeface="Pretendard Medium" pitchFamily="34" charset="0"/>
-                <a:ea typeface="Pretendard Medium" pitchFamily="34" charset="-122"/>
-                <a:cs typeface="Pretendard Medium" pitchFamily="34" charset="-120"/>
-              </a:rPr>
-              <a:t>├─ .claude-plugin/marketplace.json</a:t>
+              <a:t>볼트별 가이드는 그 볼트를 켰을 때만. 통합 가이드는 어느 볼트·맨 바깥에서 켜도 전 CdBd 기능을 안다.</a:t>
             </a:r>
             <a:endParaRPr lang="en-US" sz="1050" dirty="0"/>
           </a:p>
@@ -11056,75 +11217,92 @@
       </p:sp>
       <p:sp>
         <p:nvSpPr>
-          <p:cNvPr id="27" name="Text 25"/>
-          <p:cNvSpPr/>
-          <p:nvPr/>
-        </p:nvSpPr>
-        <p:spPr>
-          <a:xfrm>
-            <a:off x="9418320" y="3383280"/>
-            <a:ext cx="1721815" cy="347472"/>
-          </a:xfrm>
-          <a:prstGeom prst="rect">
-            <a:avLst/>
-          </a:prstGeom>
-          <a:noFill/>
-          <a:ln/>
-        </p:spPr>
-        <p:txBody>
-          <a:bodyPr wrap="square" lIns="0" tIns="0" rIns="0" bIns="0" rtlCol="0" anchor="ctr"/>
-          <a:lstStyle/>
-          <a:p>
-            <a:pPr algn="l" indent="0" marL="0">
-              <a:lnSpc>
-                <a:spcPct val="100000"/>
-              </a:lnSpc>
-              <a:buNone/>
-            </a:pPr>
-            <a:r>
-              <a:rPr lang="en-US" sz="1000" dirty="0">
-                <a:solidFill>
-                  <a:srgbClr val="6C4CFF"/>
+          <p:cNvPr id="31" name="Shape 29"/>
+          <p:cNvSpPr/>
+          <p:nvPr/>
+        </p:nvSpPr>
+        <p:spPr>
+          <a:xfrm>
+            <a:off x="6263640" y="4041648"/>
+            <a:ext cx="365760" cy="365760"/>
+          </a:xfrm>
+          <a:prstGeom prst="ellipse">
+            <a:avLst/>
+          </a:prstGeom>
+          <a:solidFill>
+            <a:srgbClr val="6C4CFF"/>
+          </a:solidFill>
+          <a:ln/>
+        </p:spPr>
+      </p:sp>
+      <p:sp>
+        <p:nvSpPr>
+          <p:cNvPr id="32" name="Text 30"/>
+          <p:cNvSpPr/>
+          <p:nvPr/>
+        </p:nvSpPr>
+        <p:spPr>
+          <a:xfrm>
+            <a:off x="6263640" y="4041648"/>
+            <a:ext cx="365760" cy="365760"/>
+          </a:xfrm>
+          <a:prstGeom prst="rect">
+            <a:avLst/>
+          </a:prstGeom>
+          <a:noFill/>
+          <a:ln/>
+        </p:spPr>
+        <p:txBody>
+          <a:bodyPr wrap="square" lIns="0" tIns="0" rIns="0" bIns="0" rtlCol="0" anchor="ctr"/>
+          <a:lstStyle/>
+          <a:p>
+            <a:pPr algn="ctr" indent="0" marL="0">
+              <a:buNone/>
+            </a:pPr>
+            <a:r>
+              <a:rPr lang="en-US" sz="1300" b="1" dirty="0">
+                <a:solidFill>
+                  <a:srgbClr val="FFFFFF"/>
                 </a:solidFill>
                 <a:latin typeface="Pretendard" pitchFamily="34" charset="0"/>
                 <a:ea typeface="Pretendard" pitchFamily="34" charset="-122"/>
                 <a:cs typeface="Pretendard" pitchFamily="34" charset="-120"/>
               </a:rPr>
-              <a:t>마켓 정의</a:t>
-            </a:r>
-            <a:endParaRPr lang="en-US" sz="1000" dirty="0"/>
-          </a:p>
-        </p:txBody>
-      </p:sp>
-      <p:sp>
-        <p:nvSpPr>
-          <p:cNvPr id="28" name="Text 26"/>
-          <p:cNvSpPr/>
-          <p:nvPr/>
-        </p:nvSpPr>
-        <p:spPr>
-          <a:xfrm>
-            <a:off x="6263640" y="3730752"/>
-            <a:ext cx="3063240" cy="347472"/>
-          </a:xfrm>
-          <a:prstGeom prst="rect">
-            <a:avLst/>
-          </a:prstGeom>
-          <a:noFill/>
-          <a:ln/>
-        </p:spPr>
-        <p:txBody>
-          <a:bodyPr wrap="square" lIns="0" tIns="0" rIns="0" bIns="0" rtlCol="0" anchor="ctr"/>
-          <a:lstStyle/>
-          <a:p>
-            <a:pPr algn="l" indent="0" marL="0">
-              <a:lnSpc>
-                <a:spcPct val="100000"/>
-              </a:lnSpc>
-              <a:buNone/>
-            </a:pPr>
-            <a:r>
-              <a:rPr lang="en-US" sz="1050" dirty="0">
+              <a:t>2</a:t>
+            </a:r>
+            <a:endParaRPr lang="en-US" sz="1300" dirty="0"/>
+          </a:p>
+        </p:txBody>
+      </p:sp>
+      <p:sp>
+        <p:nvSpPr>
+          <p:cNvPr id="33" name="Text 31"/>
+          <p:cNvSpPr/>
+          <p:nvPr/>
+        </p:nvSpPr>
+        <p:spPr>
+          <a:xfrm>
+            <a:off x="6766560" y="4023360"/>
+            <a:ext cx="4419295" cy="274320"/>
+          </a:xfrm>
+          <a:prstGeom prst="rect">
+            <a:avLst/>
+          </a:prstGeom>
+          <a:noFill/>
+          <a:ln/>
+        </p:spPr>
+        <p:txBody>
+          <a:bodyPr wrap="square" lIns="0" tIns="0" rIns="0" bIns="0" rtlCol="0" anchor="t"/>
+          <a:lstStyle/>
+          <a:p>
+            <a:pPr algn="l" indent="0" marL="0">
+              <a:lnSpc>
+                <a:spcPct val="130000"/>
+              </a:lnSpc>
+              <a:buNone/>
+            </a:pPr>
+            <a:r>
+              <a:rPr lang="en-US" sz="1300" dirty="0">
                 <a:solidFill>
                   <a:srgbClr val="1D1D1F"/>
                 </a:solidFill>
@@ -11132,133 +11310,49 @@
                 <a:ea typeface="Pretendard SemiBold" pitchFamily="34" charset="-122"/>
                 <a:cs typeface="Pretendard SemiBold" pitchFamily="34" charset="-120"/>
               </a:rPr>
-              <a:t>└─ plugins/cdbd/</a:t>
-            </a:r>
-            <a:endParaRPr lang="en-US" sz="1050" dirty="0"/>
-          </a:p>
-        </p:txBody>
-      </p:sp>
-      <p:sp>
-        <p:nvSpPr>
-          <p:cNvPr id="29" name="Text 27"/>
-          <p:cNvSpPr/>
-          <p:nvPr/>
-        </p:nvSpPr>
-        <p:spPr>
-          <a:xfrm>
-            <a:off x="6263640" y="4078224"/>
-            <a:ext cx="3063240" cy="347472"/>
-          </a:xfrm>
-          <a:prstGeom prst="rect">
-            <a:avLst/>
-          </a:prstGeom>
-          <a:noFill/>
-          <a:ln/>
-        </p:spPr>
-        <p:txBody>
-          <a:bodyPr wrap="square" lIns="0" tIns="0" rIns="0" bIns="0" rtlCol="0" anchor="ctr"/>
-          <a:lstStyle/>
-          <a:p>
-            <a:pPr algn="l" indent="0" marL="0">
-              <a:lnSpc>
-                <a:spcPct val="100000"/>
+              <a:t>볼트를 넘는 라우팅</a:t>
+            </a:r>
+            <a:endParaRPr lang="en-US" sz="1300" dirty="0"/>
+          </a:p>
+        </p:txBody>
+      </p:sp>
+      <p:sp>
+        <p:nvSpPr>
+          <p:cNvPr id="34" name="Text 32"/>
+          <p:cNvSpPr/>
+          <p:nvPr/>
+        </p:nvSpPr>
+        <p:spPr>
+          <a:xfrm>
+            <a:off x="6766560" y="4325112"/>
+            <a:ext cx="4373575" cy="640080"/>
+          </a:xfrm>
+          <a:prstGeom prst="rect">
+            <a:avLst/>
+          </a:prstGeom>
+          <a:noFill/>
+          <a:ln/>
+        </p:spPr>
+        <p:txBody>
+          <a:bodyPr wrap="square" lIns="0" tIns="0" rIns="0" bIns="0" rtlCol="0" anchor="t"/>
+          <a:lstStyle/>
+          <a:p>
+            <a:pPr algn="l" indent="0" marL="0">
+              <a:lnSpc>
+                <a:spcPct val="135000"/>
               </a:lnSpc>
               <a:buNone/>
             </a:pPr>
             <a:r>
               <a:rPr lang="en-US" sz="1050" dirty="0">
                 <a:solidFill>
-                  <a:srgbClr val="1D1D1F"/>
-                </a:solidFill>
-                <a:latin typeface="Pretendard Medium" pitchFamily="34" charset="0"/>
-                <a:ea typeface="Pretendard Medium" pitchFamily="34" charset="-122"/>
-                <a:cs typeface="Pretendard Medium" pitchFamily="34" charset="-120"/>
-              </a:rPr>
-              <a:t>     ├─ 통합 기능 경로 가이드.md</a:t>
-            </a:r>
-            <a:endParaRPr lang="en-US" sz="1050" dirty="0"/>
-          </a:p>
-        </p:txBody>
-      </p:sp>
-      <p:sp>
-        <p:nvSpPr>
-          <p:cNvPr id="30" name="Text 28"/>
-          <p:cNvSpPr/>
-          <p:nvPr/>
-        </p:nvSpPr>
-        <p:spPr>
-          <a:xfrm>
-            <a:off x="9418320" y="4078224"/>
-            <a:ext cx="1721815" cy="347472"/>
-          </a:xfrm>
-          <a:prstGeom prst="rect">
-            <a:avLst/>
-          </a:prstGeom>
-          <a:noFill/>
-          <a:ln/>
-        </p:spPr>
-        <p:txBody>
-          <a:bodyPr wrap="square" lIns="0" tIns="0" rIns="0" bIns="0" rtlCol="0" anchor="ctr"/>
-          <a:lstStyle/>
-          <a:p>
-            <a:pPr algn="l" indent="0" marL="0">
-              <a:lnSpc>
-                <a:spcPct val="100000"/>
-              </a:lnSpc>
-              <a:buNone/>
-            </a:pPr>
-            <a:r>
-              <a:rPr lang="en-US" sz="1000" dirty="0">
-                <a:solidFill>
-                  <a:srgbClr val="6C4CFF"/>
+                  <a:srgbClr val="55555A"/>
                 </a:solidFill>
                 <a:latin typeface="Pretendard" pitchFamily="34" charset="0"/>
                 <a:ea typeface="Pretendard" pitchFamily="34" charset="-122"/>
                 <a:cs typeface="Pretendard" pitchFamily="34" charset="-120"/>
               </a:rPr>
-              <a:t>전 볼트 기능→파일</a:t>
-            </a:r>
-            <a:endParaRPr lang="en-US" sz="1000" dirty="0"/>
-          </a:p>
-        </p:txBody>
-      </p:sp>
-      <p:sp>
-        <p:nvSpPr>
-          <p:cNvPr id="31" name="Text 29"/>
-          <p:cNvSpPr/>
-          <p:nvPr/>
-        </p:nvSpPr>
-        <p:spPr>
-          <a:xfrm>
-            <a:off x="6263640" y="4425696"/>
-            <a:ext cx="3063240" cy="347472"/>
-          </a:xfrm>
-          <a:prstGeom prst="rect">
-            <a:avLst/>
-          </a:prstGeom>
-          <a:noFill/>
-          <a:ln/>
-        </p:spPr>
-        <p:txBody>
-          <a:bodyPr wrap="square" lIns="0" tIns="0" rIns="0" bIns="0" rtlCol="0" anchor="ctr"/>
-          <a:lstStyle/>
-          <a:p>
-            <a:pPr algn="l" indent="0" marL="0">
-              <a:lnSpc>
-                <a:spcPct val="100000"/>
-              </a:lnSpc>
-              <a:buNone/>
-            </a:pPr>
-            <a:r>
-              <a:rPr lang="en-US" sz="1050" dirty="0">
-                <a:solidFill>
-                  <a:srgbClr val="1D1D1F"/>
-                </a:solidFill>
-                <a:latin typeface="Pretendard Medium" pitchFamily="34" charset="0"/>
-                <a:ea typeface="Pretendard Medium" pitchFamily="34" charset="-122"/>
-                <a:cs typeface="Pretendard Medium" pitchFamily="34" charset="-120"/>
-              </a:rPr>
-              <a:t>     ├─ 브랜드 토큰.md</a:t>
+              <a:t>templates에서 “URL 게시해줘” → “그건 design-service 1-4에 있다”고 안내. 볼트 경계를 알아서 넘는다.</a:t>
             </a:r>
             <a:endParaRPr lang="en-US" sz="1050" dirty="0"/>
           </a:p>
@@ -11266,253 +11360,144 @@
       </p:sp>
       <p:sp>
         <p:nvSpPr>
-          <p:cNvPr id="32" name="Text 30"/>
-          <p:cNvSpPr/>
-          <p:nvPr/>
-        </p:nvSpPr>
-        <p:spPr>
-          <a:xfrm>
-            <a:off x="9418320" y="4425696"/>
-            <a:ext cx="1721815" cy="347472"/>
-          </a:xfrm>
-          <a:prstGeom prst="rect">
-            <a:avLst/>
-          </a:prstGeom>
-          <a:noFill/>
-          <a:ln/>
-        </p:spPr>
-        <p:txBody>
-          <a:bodyPr wrap="square" lIns="0" tIns="0" rIns="0" bIns="0" rtlCol="0" anchor="ctr"/>
-          <a:lstStyle/>
-          <a:p>
-            <a:pPr algn="l" indent="0" marL="0">
-              <a:lnSpc>
-                <a:spcPct val="100000"/>
-              </a:lnSpc>
-              <a:buNone/>
-            </a:pPr>
-            <a:r>
-              <a:rPr lang="en-US" sz="1000" dirty="0">
-                <a:solidFill>
-                  <a:srgbClr val="6C4CFF"/>
+          <p:cNvPr id="35" name="Shape 33"/>
+          <p:cNvSpPr/>
+          <p:nvPr/>
+        </p:nvSpPr>
+        <p:spPr>
+          <a:xfrm>
+            <a:off x="6263640" y="5001768"/>
+            <a:ext cx="365760" cy="365760"/>
+          </a:xfrm>
+          <a:prstGeom prst="ellipse">
+            <a:avLst/>
+          </a:prstGeom>
+          <a:solidFill>
+            <a:srgbClr val="6C4CFF"/>
+          </a:solidFill>
+          <a:ln/>
+        </p:spPr>
+      </p:sp>
+      <p:sp>
+        <p:nvSpPr>
+          <p:cNvPr id="36" name="Text 34"/>
+          <p:cNvSpPr/>
+          <p:nvPr/>
+        </p:nvSpPr>
+        <p:spPr>
+          <a:xfrm>
+            <a:off x="6263640" y="5001768"/>
+            <a:ext cx="365760" cy="365760"/>
+          </a:xfrm>
+          <a:prstGeom prst="rect">
+            <a:avLst/>
+          </a:prstGeom>
+          <a:noFill/>
+          <a:ln/>
+        </p:spPr>
+        <p:txBody>
+          <a:bodyPr wrap="square" lIns="0" tIns="0" rIns="0" bIns="0" rtlCol="0" anchor="ctr"/>
+          <a:lstStyle/>
+          <a:p>
+            <a:pPr algn="ctr" indent="0" marL="0">
+              <a:buNone/>
+            </a:pPr>
+            <a:r>
+              <a:rPr lang="en-US" sz="1300" b="1" dirty="0">
+                <a:solidFill>
+                  <a:srgbClr val="FFFFFF"/>
                 </a:solidFill>
                 <a:latin typeface="Pretendard" pitchFamily="34" charset="0"/>
                 <a:ea typeface="Pretendard" pitchFamily="34" charset="-122"/>
                 <a:cs typeface="Pretendard" pitchFamily="34" charset="-120"/>
               </a:rPr>
-              <a:t>컬러·폰트</a:t>
-            </a:r>
-            <a:endParaRPr lang="en-US" sz="1000" dirty="0"/>
-          </a:p>
-        </p:txBody>
-      </p:sp>
-      <p:sp>
-        <p:nvSpPr>
-          <p:cNvPr id="33" name="Text 31"/>
-          <p:cNvSpPr/>
-          <p:nvPr/>
-        </p:nvSpPr>
-        <p:spPr>
-          <a:xfrm>
-            <a:off x="6263640" y="4773168"/>
-            <a:ext cx="3063240" cy="347472"/>
-          </a:xfrm>
-          <a:prstGeom prst="rect">
-            <a:avLst/>
-          </a:prstGeom>
-          <a:noFill/>
-          <a:ln/>
-        </p:spPr>
-        <p:txBody>
-          <a:bodyPr wrap="square" lIns="0" tIns="0" rIns="0" bIns="0" rtlCol="0" anchor="ctr"/>
-          <a:lstStyle/>
-          <a:p>
-            <a:pPr algn="l" indent="0" marL="0">
-              <a:lnSpc>
-                <a:spcPct val="100000"/>
+              <a:t>3</a:t>
+            </a:r>
+            <a:endParaRPr lang="en-US" sz="1300" dirty="0"/>
+          </a:p>
+        </p:txBody>
+      </p:sp>
+      <p:sp>
+        <p:nvSpPr>
+          <p:cNvPr id="37" name="Text 35"/>
+          <p:cNvSpPr/>
+          <p:nvPr/>
+        </p:nvSpPr>
+        <p:spPr>
+          <a:xfrm>
+            <a:off x="6766560" y="4983480"/>
+            <a:ext cx="4419295" cy="274320"/>
+          </a:xfrm>
+          <a:prstGeom prst="rect">
+            <a:avLst/>
+          </a:prstGeom>
+          <a:noFill/>
+          <a:ln/>
+        </p:spPr>
+        <p:txBody>
+          <a:bodyPr wrap="square" lIns="0" tIns="0" rIns="0" bIns="0" rtlCol="0" anchor="t"/>
+          <a:lstStyle/>
+          <a:p>
+            <a:pPr algn="l" indent="0" marL="0">
+              <a:lnSpc>
+                <a:spcPct val="130000"/>
+              </a:lnSpc>
+              <a:buNone/>
+            </a:pPr>
+            <a:r>
+              <a:rPr lang="en-US" sz="1300" dirty="0">
+                <a:solidFill>
+                  <a:srgbClr val="1D1D1F"/>
+                </a:solidFill>
+                <a:latin typeface="Pretendard SemiBold" pitchFamily="34" charset="0"/>
+                <a:ea typeface="Pretendard SemiBold" pitchFamily="34" charset="-122"/>
+                <a:cs typeface="Pretendard SemiBold" pitchFamily="34" charset="-120"/>
+              </a:rPr>
+              <a:t>한 번 고치면 전원 최신</a:t>
+            </a:r>
+            <a:endParaRPr lang="en-US" sz="1300" dirty="0"/>
+          </a:p>
+        </p:txBody>
+      </p:sp>
+      <p:sp>
+        <p:nvSpPr>
+          <p:cNvPr id="38" name="Text 36"/>
+          <p:cNvSpPr/>
+          <p:nvPr/>
+        </p:nvSpPr>
+        <p:spPr>
+          <a:xfrm>
+            <a:off x="6766560" y="5285232"/>
+            <a:ext cx="4373575" cy="640080"/>
+          </a:xfrm>
+          <a:prstGeom prst="rect">
+            <a:avLst/>
+          </a:prstGeom>
+          <a:noFill/>
+          <a:ln/>
+        </p:spPr>
+        <p:txBody>
+          <a:bodyPr wrap="square" lIns="0" tIns="0" rIns="0" bIns="0" rtlCol="0" anchor="t"/>
+          <a:lstStyle/>
+          <a:p>
+            <a:pPr algn="l" indent="0" marL="0">
+              <a:lnSpc>
+                <a:spcPct val="135000"/>
               </a:lnSpc>
               <a:buNone/>
             </a:pPr>
             <a:r>
               <a:rPr lang="en-US" sz="1050" dirty="0">
                 <a:solidFill>
-                  <a:srgbClr val="1D1D1F"/>
-                </a:solidFill>
-                <a:latin typeface="Pretendard Medium" pitchFamily="34" charset="0"/>
-                <a:ea typeface="Pretendard Medium" pitchFamily="34" charset="-122"/>
-                <a:cs typeface="Pretendard Medium" pitchFamily="34" charset="-120"/>
-              </a:rPr>
-              <a:t>     ├─ .mcp.json</a:t>
-            </a:r>
-            <a:endParaRPr lang="en-US" sz="1050" dirty="0"/>
-          </a:p>
-        </p:txBody>
-      </p:sp>
-      <p:sp>
-        <p:nvSpPr>
-          <p:cNvPr id="34" name="Text 32"/>
-          <p:cNvSpPr/>
-          <p:nvPr/>
-        </p:nvSpPr>
-        <p:spPr>
-          <a:xfrm>
-            <a:off x="9418320" y="4773168"/>
-            <a:ext cx="1721815" cy="347472"/>
-          </a:xfrm>
-          <a:prstGeom prst="rect">
-            <a:avLst/>
-          </a:prstGeom>
-          <a:noFill/>
-          <a:ln/>
-        </p:spPr>
-        <p:txBody>
-          <a:bodyPr wrap="square" lIns="0" tIns="0" rIns="0" bIns="0" rtlCol="0" anchor="ctr"/>
-          <a:lstStyle/>
-          <a:p>
-            <a:pPr algn="l" indent="0" marL="0">
-              <a:lnSpc>
-                <a:spcPct val="100000"/>
-              </a:lnSpc>
-              <a:buNone/>
-            </a:pPr>
-            <a:r>
-              <a:rPr lang="en-US" sz="1000" dirty="0">
-                <a:solidFill>
-                  <a:srgbClr val="6C4CFF"/>
+                  <a:srgbClr val="55555A"/>
                 </a:solidFill>
                 <a:latin typeface="Pretendard" pitchFamily="34" charset="0"/>
                 <a:ea typeface="Pretendard" pitchFamily="34" charset="-122"/>
                 <a:cs typeface="Pretendard" pitchFamily="34" charset="-120"/>
               </a:rPr>
-              <a:t>Figma</a:t>
-            </a:r>
-            <a:endParaRPr lang="en-US" sz="1000" dirty="0"/>
-          </a:p>
-        </p:txBody>
-      </p:sp>
-      <p:sp>
-        <p:nvSpPr>
-          <p:cNvPr id="35" name="Text 33"/>
-          <p:cNvSpPr/>
-          <p:nvPr/>
-        </p:nvSpPr>
-        <p:spPr>
-          <a:xfrm>
-            <a:off x="6263640" y="5120640"/>
-            <a:ext cx="3063240" cy="347472"/>
-          </a:xfrm>
-          <a:prstGeom prst="rect">
-            <a:avLst/>
-          </a:prstGeom>
-          <a:noFill/>
-          <a:ln/>
-        </p:spPr>
-        <p:txBody>
-          <a:bodyPr wrap="square" lIns="0" tIns="0" rIns="0" bIns="0" rtlCol="0" anchor="ctr"/>
-          <a:lstStyle/>
-          <a:p>
-            <a:pPr algn="l" indent="0" marL="0">
-              <a:lnSpc>
-                <a:spcPct val="100000"/>
-              </a:lnSpc>
-              <a:buNone/>
-            </a:pPr>
-            <a:r>
-              <a:rPr lang="en-US" sz="1050" dirty="0">
-                <a:solidFill>
-                  <a:srgbClr val="1D1D1F"/>
-                </a:solidFill>
-                <a:latin typeface="Pretendard Medium" pitchFamily="34" charset="0"/>
-                <a:ea typeface="Pretendard Medium" pitchFamily="34" charset="-122"/>
-                <a:cs typeface="Pretendard Medium" pitchFamily="34" charset="-120"/>
-              </a:rPr>
-              <a:t>     └─ ONBOARDING.md</a:t>
+              <a:t>push하면 마켓플레이스로 팀 전원에 자동 반영. 볼트마다 손댈 필요 없다.</a:t>
             </a:r>
             <a:endParaRPr lang="en-US" sz="1050" dirty="0"/>
-          </a:p>
-        </p:txBody>
-      </p:sp>
-      <p:sp>
-        <p:nvSpPr>
-          <p:cNvPr id="36" name="Text 34"/>
-          <p:cNvSpPr/>
-          <p:nvPr/>
-        </p:nvSpPr>
-        <p:spPr>
-          <a:xfrm>
-            <a:off x="9418320" y="5120640"/>
-            <a:ext cx="1721815" cy="347472"/>
-          </a:xfrm>
-          <a:prstGeom prst="rect">
-            <a:avLst/>
-          </a:prstGeom>
-          <a:noFill/>
-          <a:ln/>
-        </p:spPr>
-        <p:txBody>
-          <a:bodyPr wrap="square" lIns="0" tIns="0" rIns="0" bIns="0" rtlCol="0" anchor="ctr"/>
-          <a:lstStyle/>
-          <a:p>
-            <a:pPr algn="l" indent="0" marL="0">
-              <a:lnSpc>
-                <a:spcPct val="100000"/>
-              </a:lnSpc>
-              <a:buNone/>
-            </a:pPr>
-            <a:r>
-              <a:rPr lang="en-US" sz="1000" dirty="0">
-                <a:solidFill>
-                  <a:srgbClr val="6C4CFF"/>
-                </a:solidFill>
-                <a:latin typeface="Pretendard" pitchFamily="34" charset="0"/>
-                <a:ea typeface="Pretendard" pitchFamily="34" charset="-122"/>
-                <a:cs typeface="Pretendard" pitchFamily="34" charset="-120"/>
-              </a:rPr>
-              <a:t>로그인·셋업</a:t>
-            </a:r>
-            <a:endParaRPr lang="en-US" sz="1000" dirty="0"/>
-          </a:p>
-        </p:txBody>
-      </p:sp>
-      <p:sp>
-        <p:nvSpPr>
-          <p:cNvPr id="37" name="Text 35"/>
-          <p:cNvSpPr/>
-          <p:nvPr/>
-        </p:nvSpPr>
-        <p:spPr>
-          <a:xfrm>
-            <a:off x="6263640" y="5623560"/>
-            <a:ext cx="4876495" cy="274320"/>
-          </a:xfrm>
-          <a:prstGeom prst="rect">
-            <a:avLst/>
-          </a:prstGeom>
-          <a:noFill/>
-          <a:ln/>
-        </p:spPr>
-        <p:txBody>
-          <a:bodyPr wrap="square" lIns="0" tIns="0" rIns="0" bIns="0" rtlCol="0" anchor="t"/>
-          <a:lstStyle/>
-          <a:p>
-            <a:pPr algn="l" indent="0" marL="0">
-              <a:lnSpc>
-                <a:spcPct val="130000"/>
-              </a:lnSpc>
-              <a:buNone/>
-            </a:pPr>
-            <a:r>
-              <a:rPr lang="en-US" sz="1100" dirty="0">
-                <a:solidFill>
-                  <a:srgbClr val="1D1D1F"/>
-                </a:solidFill>
-                <a:latin typeface="Pretendard SemiBold" pitchFamily="34" charset="0"/>
-                <a:ea typeface="Pretendard SemiBold" pitchFamily="34" charset="-122"/>
-                <a:cs typeface="Pretendard SemiBold" pitchFamily="34" charset="-120"/>
-              </a:rPr>
-              <a:t>design/ 및 5개 볼트 → 구조 그대로 (안 바뀜)</a:t>
-            </a:r>
-            <a:endParaRPr lang="en-US" sz="1100" dirty="0"/>
           </a:p>
         </p:txBody>
       </p:sp>

--- a/CdBd 기능 문서 구조 설계.pptx
+++ b/CdBd 기능 문서 구조 설계.pptx
@@ -22,9 +22,10 @@
     <p:sldId id="270" r:id="rId16"/>
     <p:sldId id="271" r:id="rId17"/>
     <p:sldId id="272" r:id="rId18"/>
+    <p:sldId id="273" r:id="rId19"/>
   </p:sldIdLst>
   <p:notesMasterIdLst>
-    <p:notesMasterId r:id="rId19"/>
+    <p:notesMasterId r:id="rId20"/>
   </p:notesMasterIdLst>
   <p:sldSz cx="12191695" cy="6858000"/>
   <p:notesSz cx="6858000" cy="12191695"/>
@@ -1246,6 +1247,94 @@
             <a:fld id="{F7021451-1387-4CA6-816F-3879F97B5CBC}" type="slidenum">
               <a:rPr lang="en-US"/>
               <a:t>17</a:t>
+            </a:fld>
+            <a:endParaRPr lang="en-US"/>
+          </a:p>
+        </p:txBody>
+      </p:sp>
+    </p:spTree>
+    <p:extLst>
+      <p:ext uri="{BB962C8B-B14F-4D97-AF65-F5344CB8AC3E}">
+        <p14:creationId xmlns:p14="http://schemas.microsoft.com/office/powerpoint/2010/main" val="1024086991"/>
+      </p:ext>
+    </p:extLst>
+  </p:cSld>
+  <p:clrMapOvr>
+    <a:masterClrMapping/>
+  </p:clrMapOvr>
+</p:notes>
+</file>
+
+<file path=ppt/notesSlides/notesSlide18.xml><?xml version="1.0" encoding="utf-8"?>
+<p:notes xmlns:a="http://schemas.openxmlformats.org/drawingml/2006/main" xmlns:r="http://schemas.openxmlformats.org/officeDocument/2006/relationships" xmlns:p="http://schemas.openxmlformats.org/presentationml/2006/main">
+  <p:cSld>
+    <p:spTree>
+      <p:nvGrpSpPr>
+        <p:cNvPr id="1" name=""/>
+        <p:cNvGrpSpPr/>
+        <p:nvPr/>
+      </p:nvGrpSpPr>
+      <p:grpSpPr>
+        <a:xfrm>
+          <a:off x="0" y="0"/>
+          <a:ext cx="0" cy="0"/>
+          <a:chOff x="0" y="0"/>
+          <a:chExt cx="0" cy="0"/>
+        </a:xfrm>
+      </p:grpSpPr>
+      <p:sp>
+        <p:nvSpPr>
+          <p:cNvPr id="2" name="Slide Image Placeholder 1"/>
+          <p:cNvSpPr>
+            <a:spLocks noGrp="1" noRot="1" noChangeAspect="1"/>
+          </p:cNvSpPr>
+          <p:nvPr>
+            <p:ph type="sldImg"/>
+          </p:nvPr>
+        </p:nvSpPr>
+        <p:spPr/>
+      </p:sp>
+      <p:sp>
+        <p:nvSpPr>
+          <p:cNvPr id="3" name="Notes Placeholder 2"/>
+          <p:cNvSpPr>
+            <a:spLocks noGrp="1"/>
+          </p:cNvSpPr>
+          <p:nvPr>
+            <p:ph type="body" idx="1"/>
+          </p:nvPr>
+        </p:nvSpPr>
+        <p:spPr/>
+        <p:txBody>
+          <a:bodyPr/>
+          <a:lstStyle/>
+          <a:p>
+            <a:r>
+              <a:rPr lang="en-US" dirty="0"/>
+              <a:t/>
+            </a:r>
+            <a:endParaRPr lang="en-US" dirty="0"/>
+          </a:p>
+        </p:txBody>
+      </p:sp>
+      <p:sp>
+        <p:nvSpPr>
+          <p:cNvPr id="4" name="Slide Number Placeholder 3"/>
+          <p:cNvSpPr>
+            <a:spLocks noGrp="1"/>
+          </p:cNvSpPr>
+          <p:nvPr>
+            <p:ph type="sldNum" sz="quarter" idx="10"/>
+          </p:nvPr>
+        </p:nvSpPr>
+        <p:spPr/>
+        <p:txBody>
+          <a:bodyPr/>
+          <a:lstStyle/>
+          <a:p>
+            <a:fld id="{F7021451-1387-4CA6-816F-3879F97B5CBC}" type="slidenum">
+              <a:rPr lang="en-US"/>
+              <a:t>18</a:t>
             </a:fld>
             <a:endParaRPr lang="en-US"/>
           </a:p>
@@ -3074,7 +3163,7 @@
                 <a:ea typeface="Pretendard" pitchFamily="34" charset="-122"/>
                 <a:cs typeface="Pretendard" pitchFamily="34" charset="-120"/>
               </a:rPr>
-              <a:t>고객이 쓰는 기준(8p 분류)으로 묶었습니다 — 대시보드 · 에디터 두 갈래. 어드민은 제외.</a:t>
+              <a:t>고객이 쓰는 기준(대시보드·에디터)으로 묶음. 상태는 ‘작동 방식’ 유무 기준입니다.</a:t>
             </a:r>
             <a:endParaRPr lang="en-US" sz="1500" dirty="0"/>
           </a:p>
@@ -3166,8 +3255,8 @@
         </p:nvSpPr>
         <p:spPr>
           <a:xfrm>
-            <a:off x="5379415" y="1847088"/>
-            <a:ext cx="6035040" cy="256032"/>
+            <a:off x="3276295" y="1847088"/>
+            <a:ext cx="8138160" cy="256032"/>
           </a:xfrm>
           <a:prstGeom prst="rect">
             <a:avLst/>
@@ -3186,7 +3275,7 @@
               <a:buNone/>
             </a:pPr>
             <a:r>
-              <a:rPr lang="en-US" sz="1050" dirty="0">
+              <a:rPr lang="en-US" sz="1000" dirty="0">
                 <a:solidFill>
                   <a:srgbClr val="6E6E73"/>
                 </a:solidFill>
@@ -3194,9 +3283,9 @@
                 <a:ea typeface="Pretendard Medium" pitchFamily="34" charset="-122"/>
                 <a:cs typeface="Pretendard Medium" pitchFamily="34" charset="-120"/>
               </a:rPr>
-              <a:t>● 있음  ◐ 부분  ○ 없음   ·   [T] templates  [SV] design-service</a:t>
-            </a:r>
-            <a:endParaRPr lang="en-US" sz="1050" dirty="0"/>
+              <a:t>● 작동 방식까지  ◐ 스펙만·작동 방식 추가 필요   ·   [T] templates  [SV] design-service  [DS] design-system</a:t>
+            </a:r>
+            <a:endParaRPr lang="en-US" sz="1000" dirty="0"/>
           </a:p>
         </p:txBody>
       </p:sp>
@@ -3385,7 +3474,7 @@
                 <a:ea typeface="Pretendard" pitchFamily="34" charset="-122"/>
                 <a:cs typeface="Pretendard" pitchFamily="34" charset="-120"/>
               </a:rPr>
-              <a:t>[T] 1-6-2</a:t>
+              <a:t>[DS] 4-3~17 · [T] 1-6-2</a:t>
             </a:r>
             <a:endParaRPr lang="en-US" sz="1000" dirty="0"/>
           </a:p>
@@ -3486,13 +3575,13 @@
             <a:r>
               <a:rPr lang="en-US" sz="1100" dirty="0">
                 <a:solidFill>
-                  <a:srgbClr val="6E6E73"/>
+                  <a:srgbClr val="6C4CFF"/>
                 </a:solidFill>
                 <a:latin typeface="Pretendard SemiBold" pitchFamily="34" charset="0"/>
                 <a:ea typeface="Pretendard SemiBold" pitchFamily="34" charset="-122"/>
                 <a:cs typeface="Pretendard SemiBold" pitchFamily="34" charset="-120"/>
               </a:rPr>
-              <a:t>◐</a:t>
+              <a:t>●</a:t>
             </a:r>
             <a:endParaRPr lang="en-US" sz="1100" dirty="0"/>
           </a:p>
@@ -3534,7 +3623,7 @@
                 <a:ea typeface="Pretendard" pitchFamily="34" charset="-122"/>
                 <a:cs typeface="Pretendard" pitchFamily="34" charset="-120"/>
               </a:rPr>
-              <a:t>[T] 1-6-2</a:t>
+              <a:t>[DS] 4-12·4-16</a:t>
             </a:r>
             <a:endParaRPr lang="en-US" sz="1000" dirty="0"/>
           </a:p>
@@ -3784,13 +3873,13 @@
             <a:r>
               <a:rPr lang="en-US" sz="1100" dirty="0">
                 <a:solidFill>
-                  <a:srgbClr val="6E6E73"/>
+                  <a:srgbClr val="6C4CFF"/>
                 </a:solidFill>
                 <a:latin typeface="Pretendard SemiBold" pitchFamily="34" charset="0"/>
                 <a:ea typeface="Pretendard SemiBold" pitchFamily="34" charset="-122"/>
                 <a:cs typeface="Pretendard SemiBold" pitchFamily="34" charset="-120"/>
               </a:rPr>
-              <a:t>◐</a:t>
+              <a:t>●</a:t>
             </a:r>
             <a:endParaRPr lang="en-US" sz="1100" dirty="0"/>
           </a:p>
@@ -3832,7 +3921,7 @@
                 <a:ea typeface="Pretendard" pitchFamily="34" charset="-122"/>
                 <a:cs typeface="Pretendard" pitchFamily="34" charset="-120"/>
               </a:rPr>
-              <a:t>[T] 1-6-1</a:t>
+              <a:t>[DS] 3-2-x · [T] 1-6-1</a:t>
             </a:r>
             <a:endParaRPr lang="en-US" sz="1000" dirty="0"/>
           </a:p>
@@ -4535,7 +4624,7 @@
                 <a:ea typeface="Pretendard SemiBold" pitchFamily="34" charset="-122"/>
                 <a:cs typeface="Pretendard SemiBold" pitchFamily="34" charset="-120"/>
               </a:rPr>
-              <a:t>○</a:t>
+              <a:t>◐</a:t>
             </a:r>
             <a:endParaRPr lang="en-US" sz="1100" dirty="0"/>
           </a:p>
@@ -4577,7 +4666,7 @@
                 <a:ea typeface="Pretendard" pitchFamily="34" charset="-122"/>
                 <a:cs typeface="Pretendard" pitchFamily="34" charset="-120"/>
               </a:rPr>
-              <a:t>— 없음</a:t>
+              <a:t>[DS] 3-10 데이터 관리</a:t>
             </a:r>
             <a:endParaRPr lang="en-US" sz="1000" dirty="0"/>
           </a:p>
@@ -4726,7 +4815,7 @@
                 <a:ea typeface="Pretendard SemiBold" pitchFamily="34" charset="-122"/>
                 <a:cs typeface="Pretendard SemiBold" pitchFamily="34" charset="-120"/>
               </a:rPr>
-              <a:t>○</a:t>
+              <a:t>◐</a:t>
             </a:r>
             <a:endParaRPr lang="en-US" sz="1100" dirty="0"/>
           </a:p>
@@ -4768,7 +4857,7 @@
                 <a:ea typeface="Pretendard" pitchFamily="34" charset="-122"/>
                 <a:cs typeface="Pretendard" pitchFamily="34" charset="-120"/>
               </a:rPr>
-              <a:t>— 없음</a:t>
+              <a:t>[DS] 3-6 가입·로그인</a:t>
             </a:r>
             <a:endParaRPr lang="en-US" sz="1000" dirty="0"/>
           </a:p>
@@ -4833,7 +4922,7 @@
                 <a:ea typeface="Pretendard Medium" pitchFamily="34" charset="-122"/>
                 <a:cs typeface="Pretendard Medium" pitchFamily="34" charset="-120"/>
               </a:rPr>
-              <a:t>템플릿 페이지 생성</a:t>
+              <a:t>홈 · 내 페이지</a:t>
             </a:r>
             <a:endParaRPr lang="en-US" sz="1100" dirty="0"/>
           </a:p>
@@ -4917,7 +5006,7 @@
                 <a:ea typeface="Pretendard" pitchFamily="34" charset="-122"/>
                 <a:cs typeface="Pretendard" pitchFamily="34" charset="-120"/>
               </a:rPr>
-              <a:t>[T] 1-1 워크플로우</a:t>
+              <a:t>[DS] 3-7 · 3-9</a:t>
             </a:r>
             <a:endParaRPr lang="en-US" sz="1000" dirty="0"/>
           </a:p>
@@ -4982,7 +5071,7 @@
                 <a:ea typeface="Pretendard Medium" pitchFamily="34" charset="-122"/>
                 <a:cs typeface="Pretendard Medium" pitchFamily="34" charset="-120"/>
               </a:rPr>
-              <a:t>홈 · 내 페이지</a:t>
+              <a:t>공유 복제</a:t>
             </a:r>
             <a:endParaRPr lang="en-US" sz="1100" dirty="0"/>
           </a:p>
@@ -5024,7 +5113,7 @@
                 <a:ea typeface="Pretendard SemiBold" pitchFamily="34" charset="-122"/>
                 <a:cs typeface="Pretendard SemiBold" pitchFamily="34" charset="-120"/>
               </a:rPr>
-              <a:t>○</a:t>
+              <a:t>◐</a:t>
             </a:r>
             <a:endParaRPr lang="en-US" sz="1100" dirty="0"/>
           </a:p>
@@ -5066,7 +5155,7 @@
                 <a:ea typeface="Pretendard" pitchFamily="34" charset="-122"/>
                 <a:cs typeface="Pretendard" pitchFamily="34" charset="-120"/>
               </a:rPr>
-              <a:t>— 없음</a:t>
+              <a:t>[DS] 3-9 내 페이지</a:t>
             </a:r>
             <a:endParaRPr lang="en-US" sz="1000" dirty="0"/>
           </a:p>
@@ -5131,7 +5220,7 @@
                 <a:ea typeface="Pretendard Medium" pitchFamily="34" charset="-122"/>
                 <a:cs typeface="Pretendard Medium" pitchFamily="34" charset="-120"/>
               </a:rPr>
-              <a:t>공유 복제</a:t>
+              <a:t>버전 기록</a:t>
             </a:r>
             <a:endParaRPr lang="en-US" sz="1100" dirty="0"/>
           </a:p>
@@ -5173,7 +5262,7 @@
                 <a:ea typeface="Pretendard SemiBold" pitchFamily="34" charset="-122"/>
                 <a:cs typeface="Pretendard SemiBold" pitchFamily="34" charset="-120"/>
               </a:rPr>
-              <a:t>○</a:t>
+              <a:t>◐</a:t>
             </a:r>
             <a:endParaRPr lang="en-US" sz="1100" dirty="0"/>
           </a:p>
@@ -5215,7 +5304,7 @@
                 <a:ea typeface="Pretendard" pitchFamily="34" charset="-122"/>
                 <a:cs typeface="Pretendard" pitchFamily="34" charset="-120"/>
               </a:rPr>
-              <a:t>— 없음</a:t>
+              <a:t>[DS] 3-15 버전 히스토리</a:t>
             </a:r>
             <a:endParaRPr lang="en-US" sz="1000" dirty="0"/>
           </a:p>
@@ -5280,7 +5369,7 @@
                 <a:ea typeface="Pretendard Medium" pitchFamily="34" charset="-122"/>
                 <a:cs typeface="Pretendard Medium" pitchFamily="34" charset="-120"/>
               </a:rPr>
-              <a:t>버전 기록</a:t>
+              <a:t>페이지 · URL 통계</a:t>
             </a:r>
             <a:endParaRPr lang="en-US" sz="1100" dirty="0"/>
           </a:p>
@@ -5322,7 +5411,7 @@
                 <a:ea typeface="Pretendard SemiBold" pitchFamily="34" charset="-122"/>
                 <a:cs typeface="Pretendard SemiBold" pitchFamily="34" charset="-120"/>
               </a:rPr>
-              <a:t>○</a:t>
+              <a:t>◐</a:t>
             </a:r>
             <a:endParaRPr lang="en-US" sz="1100" dirty="0"/>
           </a:p>
@@ -5364,7 +5453,7 @@
                 <a:ea typeface="Pretendard" pitchFamily="34" charset="-122"/>
                 <a:cs typeface="Pretendard" pitchFamily="34" charset="-120"/>
               </a:rPr>
-              <a:t>— 없음</a:t>
+              <a:t>[DS] 3-11 통계</a:t>
             </a:r>
             <a:endParaRPr lang="en-US" sz="1000" dirty="0"/>
           </a:p>
@@ -5429,7 +5518,7 @@
                 <a:ea typeface="Pretendard Medium" pitchFamily="34" charset="-122"/>
                 <a:cs typeface="Pretendard Medium" pitchFamily="34" charset="-120"/>
               </a:rPr>
-              <a:t>페이지 · URL 통계</a:t>
+              <a:t>계정 · 내 주소</a:t>
             </a:r>
             <a:endParaRPr lang="en-US" sz="1100" dirty="0"/>
           </a:p>
@@ -5471,7 +5560,7 @@
                 <a:ea typeface="Pretendard SemiBold" pitchFamily="34" charset="-122"/>
                 <a:cs typeface="Pretendard SemiBold" pitchFamily="34" charset="-120"/>
               </a:rPr>
-              <a:t>○</a:t>
+              <a:t>◐</a:t>
             </a:r>
             <a:endParaRPr lang="en-US" sz="1100" dirty="0"/>
           </a:p>
@@ -5513,7 +5602,7 @@
                 <a:ea typeface="Pretendard" pitchFamily="34" charset="-122"/>
                 <a:cs typeface="Pretendard" pitchFamily="34" charset="-120"/>
               </a:rPr>
-              <a:t>— 없음</a:t>
+              <a:t>[DS] 3-8 · 3-5</a:t>
             </a:r>
             <a:endParaRPr lang="en-US" sz="1000" dirty="0"/>
           </a:p>
@@ -5578,7 +5667,7 @@
                 <a:ea typeface="Pretendard Medium" pitchFamily="34" charset="-122"/>
                 <a:cs typeface="Pretendard Medium" pitchFamily="34" charset="-120"/>
               </a:rPr>
-              <a:t>계정 · 내 주소</a:t>
+              <a:t>권한</a:t>
             </a:r>
             <a:endParaRPr lang="en-US" sz="1100" dirty="0"/>
           </a:p>
@@ -5620,7 +5709,7 @@
                 <a:ea typeface="Pretendard SemiBold" pitchFamily="34" charset="-122"/>
                 <a:cs typeface="Pretendard SemiBold" pitchFamily="34" charset="-120"/>
               </a:rPr>
-              <a:t>○</a:t>
+              <a:t>◐</a:t>
             </a:r>
             <a:endParaRPr lang="en-US" sz="1100" dirty="0"/>
           </a:p>
@@ -5662,7 +5751,7 @@
                 <a:ea typeface="Pretendard" pitchFamily="34" charset="-122"/>
                 <a:cs typeface="Pretendard" pitchFamily="34" charset="-120"/>
               </a:rPr>
-              <a:t>— 없음</a:t>
+              <a:t>[DS] 3-13 권한 관리</a:t>
             </a:r>
             <a:endParaRPr lang="en-US" sz="1000" dirty="0"/>
           </a:p>
@@ -5727,7 +5816,7 @@
                 <a:ea typeface="Pretendard Medium" pitchFamily="34" charset="-122"/>
                 <a:cs typeface="Pretendard Medium" pitchFamily="34" charset="-120"/>
               </a:rPr>
-              <a:t>권한</a:t>
+              <a:t>요금 · 결제</a:t>
             </a:r>
             <a:endParaRPr lang="en-US" sz="1100" dirty="0"/>
           </a:p>
@@ -5769,7 +5858,7 @@
                 <a:ea typeface="Pretendard SemiBold" pitchFamily="34" charset="-122"/>
                 <a:cs typeface="Pretendard SemiBold" pitchFamily="34" charset="-120"/>
               </a:rPr>
-              <a:t>○</a:t>
+              <a:t>◐</a:t>
             </a:r>
             <a:endParaRPr lang="en-US" sz="1100" dirty="0"/>
           </a:p>
@@ -5811,7 +5900,7 @@
                 <a:ea typeface="Pretendard" pitchFamily="34" charset="-122"/>
                 <a:cs typeface="Pretendard" pitchFamily="34" charset="-120"/>
               </a:rPr>
-              <a:t>— 없음</a:t>
+              <a:t>[DS] 3-8 §크레딧</a:t>
             </a:r>
             <a:endParaRPr lang="en-US" sz="1000" dirty="0"/>
           </a:p>
@@ -5876,7 +5965,7 @@
                 <a:ea typeface="Pretendard Medium" pitchFamily="34" charset="-122"/>
                 <a:cs typeface="Pretendard Medium" pitchFamily="34" charset="-120"/>
               </a:rPr>
-              <a:t>요금 · 결제</a:t>
+              <a:t>템플릿 페이지 생성</a:t>
             </a:r>
             <a:endParaRPr lang="en-US" sz="1100" dirty="0"/>
           </a:p>
@@ -5960,7 +6049,7 @@
                 <a:ea typeface="Pretendard" pitchFamily="34" charset="-122"/>
                 <a:cs typeface="Pretendard" pitchFamily="34" charset="-120"/>
               </a:rPr>
-              <a:t>[SV] quota 실측</a:t>
+              <a:t>[DS] 3-14 · [T] 1-1</a:t>
             </a:r>
             <a:endParaRPr lang="en-US" sz="1000" dirty="0"/>
           </a:p>
@@ -11566,7 +11655,7 @@
                 <a:ea typeface="Pretendard SemiBold" pitchFamily="34" charset="-122"/>
                 <a:cs typeface="Pretendard SemiBold" pitchFamily="34" charset="-120"/>
               </a:rPr>
-              <a:t>일정</a:t>
+              <a:t>⑤ 플러그인</a:t>
             </a:r>
             <a:endParaRPr lang="en-US" sz="1200" dirty="0"/>
           </a:p>
@@ -11647,7 +11736,7 @@
                 <a:ea typeface="Pretendard" pitchFamily="34" charset="-122"/>
                 <a:cs typeface="Pretendard" pitchFamily="34" charset="-120"/>
               </a:rPr>
-              <a:t>얼마나 걸리나</a:t>
+              <a:t>통합 기능 경로 가이드 — 내용은 이렇게</a:t>
             </a:r>
             <a:endParaRPr lang="en-US" sz="2600" dirty="0"/>
           </a:p>
@@ -11686,7 +11775,7 @@
                 <a:ea typeface="Pretendard" pitchFamily="34" charset="-122"/>
                 <a:cs typeface="Pretendard" pitchFamily="34" charset="-120"/>
               </a:rPr>
-              <a:t>문서 구조만이면 약 1주, ○ 공백 기능을 영상으로 채우면 약 2주. (추정치)</a:t>
+              <a:t>5개 볼트 것을 합쳐 ‘이렇게 말하면 → 어느 볼트의 어느 파일’을 한 곳에.</a:t>
             </a:r>
             <a:endParaRPr lang="en-US" sz="1500" dirty="0"/>
           </a:p>
@@ -11778,12 +11867,12 @@
         </p:nvSpPr>
         <p:spPr>
           <a:xfrm>
-            <a:off x="777240" y="2487168"/>
-            <a:ext cx="5120640" cy="2788920"/>
+            <a:off x="777240" y="2331720"/>
+            <a:ext cx="10637215" cy="3456432"/>
           </a:xfrm>
           <a:prstGeom prst="roundRect">
             <a:avLst>
-              <a:gd name="adj" fmla="val 4590"/>
+              <a:gd name="adj" fmla="val 3175"/>
             </a:avLst>
           </a:prstGeom>
           <a:solidFill>
@@ -11805,8 +11894,8 @@
         </p:nvSpPr>
         <p:spPr>
           <a:xfrm>
-            <a:off x="1088136" y="2743200"/>
-            <a:ext cx="4498848" cy="320040"/>
+            <a:off x="1069848" y="2478024"/>
+            <a:ext cx="3840480" cy="274320"/>
           </a:xfrm>
           <a:prstGeom prst="rect">
             <a:avLst/>
@@ -11825,17 +11914,17 @@
               <a:buNone/>
             </a:pPr>
             <a:r>
-              <a:rPr lang="en-US" sz="1600" dirty="0">
-                <a:solidFill>
-                  <a:srgbClr val="1D1D1F"/>
+              <a:rPr lang="en-US" sz="1200" dirty="0">
+                <a:solidFill>
+                  <a:srgbClr val="6C4CFF"/>
                 </a:solidFill>
                 <a:latin typeface="Pretendard SemiBold" pitchFamily="34" charset="0"/>
                 <a:ea typeface="Pretendard SemiBold" pitchFamily="34" charset="-122"/>
                 <a:cs typeface="Pretendard SemiBold" pitchFamily="34" charset="-120"/>
               </a:rPr>
-              <a:t>문서 구조 구축</a:t>
-            </a:r>
-            <a:endParaRPr lang="en-US" sz="1600" dirty="0"/>
+              <a:t>이렇게 말하면</a:t>
+            </a:r>
+            <a:endParaRPr lang="en-US" sz="1200" dirty="0"/>
           </a:p>
         </p:txBody>
       </p:sp>
@@ -11847,8 +11936,8 @@
         </p:nvSpPr>
         <p:spPr>
           <a:xfrm>
-            <a:off x="1088136" y="3264408"/>
-            <a:ext cx="3291840" cy="320040"/>
+            <a:off x="4983480" y="2478024"/>
+            <a:ext cx="2468880" cy="274320"/>
           </a:xfrm>
           <a:prstGeom prst="rect">
             <a:avLst/>
@@ -11867,17 +11956,17 @@
               <a:buNone/>
             </a:pPr>
             <a:r>
-              <a:rPr lang="en-US" sz="1300" dirty="0">
-                <a:solidFill>
-                  <a:srgbClr val="55555A"/>
-                </a:solidFill>
-                <a:latin typeface="Pretendard" pitchFamily="34" charset="0"/>
-                <a:ea typeface="Pretendard" pitchFamily="34" charset="-122"/>
-                <a:cs typeface="Pretendard" pitchFamily="34" charset="-120"/>
-              </a:rPr>
-              <a:t>첫 볼트 경로 문서</a:t>
-            </a:r>
-            <a:endParaRPr lang="en-US" sz="1300" dirty="0"/>
+              <a:rPr lang="en-US" sz="1200" dirty="0">
+                <a:solidFill>
+                  <a:srgbClr val="6C4CFF"/>
+                </a:solidFill>
+                <a:latin typeface="Pretendard SemiBold" pitchFamily="34" charset="0"/>
+                <a:ea typeface="Pretendard SemiBold" pitchFamily="34" charset="-122"/>
+                <a:cs typeface="Pretendard SemiBold" pitchFamily="34" charset="-120"/>
+              </a:rPr>
+              <a:t>볼트</a:t>
+            </a:r>
+            <a:endParaRPr lang="en-US" sz="1200" dirty="0"/>
           </a:p>
         </p:txBody>
       </p:sp>
@@ -11889,8 +11978,8 @@
         </p:nvSpPr>
         <p:spPr>
           <a:xfrm>
-            <a:off x="4343400" y="3264408"/>
-            <a:ext cx="1280160" cy="320040"/>
+            <a:off x="7543800" y="2478024"/>
+            <a:ext cx="3578047" cy="274320"/>
           </a:xfrm>
           <a:prstGeom prst="rect">
             <a:avLst/>
@@ -11902,289 +11991,37 @@
           <a:bodyPr wrap="square" lIns="0" tIns="0" rIns="0" bIns="0" rtlCol="0" anchor="t"/>
           <a:lstStyle/>
           <a:p>
-            <a:pPr algn="r" indent="0" marL="0">
+            <a:pPr algn="l" indent="0" marL="0">
               <a:lnSpc>
                 <a:spcPct val="130000"/>
               </a:lnSpc>
               <a:buNone/>
             </a:pPr>
             <a:r>
-              <a:rPr lang="en-US" sz="1300" dirty="0">
-                <a:solidFill>
-                  <a:srgbClr val="1D1D1F"/>
-                </a:solidFill>
-                <a:latin typeface="Pretendard Medium" pitchFamily="34" charset="0"/>
-                <a:ea typeface="Pretendard Medium" pitchFamily="34" charset="-122"/>
-                <a:cs typeface="Pretendard Medium" pitchFamily="34" charset="-120"/>
-              </a:rPr>
-              <a:t>0.5~1일</a:t>
-            </a:r>
-            <a:endParaRPr lang="en-US" sz="1300" dirty="0"/>
-          </a:p>
-        </p:txBody>
-      </p:sp>
-      <p:sp>
-        <p:nvSpPr>
-          <p:cNvPr id="12" name="Text 10"/>
-          <p:cNvSpPr/>
-          <p:nvPr/>
-        </p:nvSpPr>
-        <p:spPr>
-          <a:xfrm>
-            <a:off x="1088136" y="3666744"/>
-            <a:ext cx="3291840" cy="320040"/>
-          </a:xfrm>
-          <a:prstGeom prst="rect">
-            <a:avLst/>
-          </a:prstGeom>
-          <a:noFill/>
-          <a:ln/>
-        </p:spPr>
-        <p:txBody>
-          <a:bodyPr wrap="square" lIns="0" tIns="0" rIns="0" bIns="0" rtlCol="0" anchor="t"/>
-          <a:lstStyle/>
-          <a:p>
-            <a:pPr algn="l" indent="0" marL="0">
-              <a:lnSpc>
-                <a:spcPct val="130000"/>
-              </a:lnSpc>
-              <a:buNone/>
-            </a:pPr>
-            <a:r>
-              <a:rPr lang="en-US" sz="1300" dirty="0">
-                <a:solidFill>
-                  <a:srgbClr val="55555A"/>
-                </a:solidFill>
-                <a:latin typeface="Pretendard" pitchFamily="34" charset="0"/>
-                <a:ea typeface="Pretendard" pitchFamily="34" charset="-122"/>
-                <a:cs typeface="Pretendard" pitchFamily="34" charset="-120"/>
-              </a:rPr>
-              <a:t>나머지 4볼트 확산</a:t>
-            </a:r>
-            <a:endParaRPr lang="en-US" sz="1300" dirty="0"/>
-          </a:p>
-        </p:txBody>
-      </p:sp>
-      <p:sp>
-        <p:nvSpPr>
-          <p:cNvPr id="13" name="Text 11"/>
-          <p:cNvSpPr/>
-          <p:nvPr/>
-        </p:nvSpPr>
-        <p:spPr>
-          <a:xfrm>
-            <a:off x="4343400" y="3666744"/>
-            <a:ext cx="1280160" cy="320040"/>
-          </a:xfrm>
-          <a:prstGeom prst="rect">
-            <a:avLst/>
-          </a:prstGeom>
-          <a:noFill/>
-          <a:ln/>
-        </p:spPr>
-        <p:txBody>
-          <a:bodyPr wrap="square" lIns="0" tIns="0" rIns="0" bIns="0" rtlCol="0" anchor="t"/>
-          <a:lstStyle/>
-          <a:p>
-            <a:pPr algn="r" indent="0" marL="0">
-              <a:lnSpc>
-                <a:spcPct val="130000"/>
-              </a:lnSpc>
-              <a:buNone/>
-            </a:pPr>
-            <a:r>
-              <a:rPr lang="en-US" sz="1300" dirty="0">
-                <a:solidFill>
-                  <a:srgbClr val="1D1D1F"/>
-                </a:solidFill>
-                <a:latin typeface="Pretendard Medium" pitchFamily="34" charset="0"/>
-                <a:ea typeface="Pretendard Medium" pitchFamily="34" charset="-122"/>
-                <a:cs typeface="Pretendard Medium" pitchFamily="34" charset="-120"/>
-              </a:rPr>
-              <a:t>2~3일</a:t>
-            </a:r>
-            <a:endParaRPr lang="en-US" sz="1300" dirty="0"/>
-          </a:p>
-        </p:txBody>
-      </p:sp>
-      <p:sp>
-        <p:nvSpPr>
-          <p:cNvPr id="14" name="Text 12"/>
-          <p:cNvSpPr/>
-          <p:nvPr/>
-        </p:nvSpPr>
-        <p:spPr>
-          <a:xfrm>
-            <a:off x="1088136" y="4069080"/>
-            <a:ext cx="3291840" cy="320040"/>
-          </a:xfrm>
-          <a:prstGeom prst="rect">
-            <a:avLst/>
-          </a:prstGeom>
-          <a:noFill/>
-          <a:ln/>
-        </p:spPr>
-        <p:txBody>
-          <a:bodyPr wrap="square" lIns="0" tIns="0" rIns="0" bIns="0" rtlCol="0" anchor="t"/>
-          <a:lstStyle/>
-          <a:p>
-            <a:pPr algn="l" indent="0" marL="0">
-              <a:lnSpc>
-                <a:spcPct val="130000"/>
-              </a:lnSpc>
-              <a:buNone/>
-            </a:pPr>
-            <a:r>
-              <a:rPr lang="en-US" sz="1300" dirty="0">
-                <a:solidFill>
-                  <a:srgbClr val="55555A"/>
-                </a:solidFill>
-                <a:latin typeface="Pretendard" pitchFamily="34" charset="0"/>
-                <a:ea typeface="Pretendard" pitchFamily="34" charset="-122"/>
-                <a:cs typeface="Pretendard" pitchFamily="34" charset="-120"/>
-              </a:rPr>
-              <a:t>연결 · 검증</a:t>
-            </a:r>
-            <a:endParaRPr lang="en-US" sz="1300" dirty="0"/>
-          </a:p>
-        </p:txBody>
-      </p:sp>
-      <p:sp>
-        <p:nvSpPr>
-          <p:cNvPr id="15" name="Text 13"/>
-          <p:cNvSpPr/>
-          <p:nvPr/>
-        </p:nvSpPr>
-        <p:spPr>
-          <a:xfrm>
-            <a:off x="4343400" y="4069080"/>
-            <a:ext cx="1280160" cy="320040"/>
-          </a:xfrm>
-          <a:prstGeom prst="rect">
-            <a:avLst/>
-          </a:prstGeom>
-          <a:noFill/>
-          <a:ln/>
-        </p:spPr>
-        <p:txBody>
-          <a:bodyPr wrap="square" lIns="0" tIns="0" rIns="0" bIns="0" rtlCol="0" anchor="t"/>
-          <a:lstStyle/>
-          <a:p>
-            <a:pPr algn="r" indent="0" marL="0">
-              <a:lnSpc>
-                <a:spcPct val="130000"/>
-              </a:lnSpc>
-              <a:buNone/>
-            </a:pPr>
-            <a:r>
-              <a:rPr lang="en-US" sz="1300" dirty="0">
-                <a:solidFill>
-                  <a:srgbClr val="1D1D1F"/>
-                </a:solidFill>
-                <a:latin typeface="Pretendard Medium" pitchFamily="34" charset="0"/>
-                <a:ea typeface="Pretendard Medium" pitchFamily="34" charset="-122"/>
-                <a:cs typeface="Pretendard Medium" pitchFamily="34" charset="-120"/>
-              </a:rPr>
-              <a:t>0.5일</a:t>
-            </a:r>
-            <a:endParaRPr lang="en-US" sz="1300" dirty="0"/>
-          </a:p>
-        </p:txBody>
-      </p:sp>
-      <p:sp>
-        <p:nvSpPr>
-          <p:cNvPr id="16" name="Text 14"/>
-          <p:cNvSpPr/>
-          <p:nvPr/>
-        </p:nvSpPr>
-        <p:spPr>
-          <a:xfrm>
-            <a:off x="1088136" y="4471416"/>
-            <a:ext cx="3291840" cy="320040"/>
-          </a:xfrm>
-          <a:prstGeom prst="rect">
-            <a:avLst/>
-          </a:prstGeom>
-          <a:noFill/>
-          <a:ln/>
-        </p:spPr>
-        <p:txBody>
-          <a:bodyPr wrap="square" lIns="0" tIns="0" rIns="0" bIns="0" rtlCol="0" anchor="t"/>
-          <a:lstStyle/>
-          <a:p>
-            <a:pPr algn="l" indent="0" marL="0">
-              <a:lnSpc>
-                <a:spcPct val="130000"/>
-              </a:lnSpc>
-              <a:buNone/>
-            </a:pPr>
-            <a:r>
-              <a:rPr lang="en-US" sz="1300" dirty="0">
-                <a:solidFill>
-                  <a:srgbClr val="55555A"/>
-                </a:solidFill>
-                <a:latin typeface="Pretendard" pitchFamily="34" charset="0"/>
-                <a:ea typeface="Pretendard" pitchFamily="34" charset="-122"/>
-                <a:cs typeface="Pretendard" pitchFamily="34" charset="-120"/>
-              </a:rPr>
-              <a:t>플러그인 배포</a:t>
-            </a:r>
-            <a:endParaRPr lang="en-US" sz="1300" dirty="0"/>
-          </a:p>
-        </p:txBody>
-      </p:sp>
-      <p:sp>
-        <p:nvSpPr>
-          <p:cNvPr id="17" name="Text 15"/>
-          <p:cNvSpPr/>
-          <p:nvPr/>
-        </p:nvSpPr>
-        <p:spPr>
-          <a:xfrm>
-            <a:off x="4343400" y="4471416"/>
-            <a:ext cx="1280160" cy="320040"/>
-          </a:xfrm>
-          <a:prstGeom prst="rect">
-            <a:avLst/>
-          </a:prstGeom>
-          <a:noFill/>
-          <a:ln/>
-        </p:spPr>
-        <p:txBody>
-          <a:bodyPr wrap="square" lIns="0" tIns="0" rIns="0" bIns="0" rtlCol="0" anchor="t"/>
-          <a:lstStyle/>
-          <a:p>
-            <a:pPr algn="r" indent="0" marL="0">
-              <a:lnSpc>
-                <a:spcPct val="130000"/>
-              </a:lnSpc>
-              <a:buNone/>
-            </a:pPr>
-            <a:r>
-              <a:rPr lang="en-US" sz="1300" dirty="0">
-                <a:solidFill>
-                  <a:srgbClr val="1D1D1F"/>
-                </a:solidFill>
-                <a:latin typeface="Pretendard Medium" pitchFamily="34" charset="0"/>
-                <a:ea typeface="Pretendard Medium" pitchFamily="34" charset="-122"/>
-                <a:cs typeface="Pretendard Medium" pitchFamily="34" charset="-120"/>
-              </a:rPr>
-              <a:t>0.5~1일</a:t>
-            </a:r>
-            <a:endParaRPr lang="en-US" sz="1300" dirty="0"/>
-          </a:p>
-        </p:txBody>
-      </p:sp>
-      <p:sp>
-        <p:nvSpPr>
-          <p:cNvPr id="18" name="Shape 16"/>
-          <p:cNvSpPr/>
-          <p:nvPr/>
-        </p:nvSpPr>
-        <p:spPr>
-          <a:xfrm>
-            <a:off x="1088136" y="4818888"/>
-            <a:ext cx="4498848" cy="0"/>
+              <a:rPr lang="en-US" sz="1200" dirty="0">
+                <a:solidFill>
+                  <a:srgbClr val="6C4CFF"/>
+                </a:solidFill>
+                <a:latin typeface="Pretendard SemiBold" pitchFamily="34" charset="0"/>
+                <a:ea typeface="Pretendard SemiBold" pitchFamily="34" charset="-122"/>
+                <a:cs typeface="Pretendard SemiBold" pitchFamily="34" charset="-120"/>
+              </a:rPr>
+              <a:t>파일</a:t>
+            </a:r>
+            <a:endParaRPr lang="en-US" sz="1200" dirty="0"/>
+          </a:p>
+        </p:txBody>
+      </p:sp>
+      <p:sp>
+        <p:nvSpPr>
+          <p:cNvPr id="12" name="Shape 10"/>
+          <p:cNvSpPr/>
+          <p:nvPr/>
+        </p:nvSpPr>
+        <p:spPr>
+          <a:xfrm>
+            <a:off x="1069848" y="2788920"/>
+            <a:ext cx="10051999" cy="0"/>
           </a:xfrm>
           <a:prstGeom prst="line">
             <a:avLst/>
@@ -12200,23 +12037,23 @@
       </p:sp>
       <p:sp>
         <p:nvSpPr>
-          <p:cNvPr id="19" name="Text 17"/>
-          <p:cNvSpPr/>
-          <p:nvPr/>
-        </p:nvSpPr>
-        <p:spPr>
-          <a:xfrm>
-            <a:off x="1088136" y="4910328"/>
-            <a:ext cx="1828800" cy="274320"/>
-          </a:xfrm>
-          <a:prstGeom prst="rect">
-            <a:avLst/>
-          </a:prstGeom>
-          <a:noFill/>
-          <a:ln/>
-        </p:spPr>
-        <p:txBody>
-          <a:bodyPr wrap="square" lIns="0" tIns="0" rIns="0" bIns="0" rtlCol="0" anchor="t"/>
+          <p:cNvPr id="13" name="Text 11"/>
+          <p:cNvSpPr/>
+          <p:nvPr/>
+        </p:nvSpPr>
+        <p:spPr>
+          <a:xfrm>
+            <a:off x="1069848" y="2862072"/>
+            <a:ext cx="3840480" cy="320040"/>
+          </a:xfrm>
+          <a:prstGeom prst="rect">
+            <a:avLst/>
+          </a:prstGeom>
+          <a:noFill/>
+          <a:ln/>
+        </p:spPr>
+        <p:txBody>
+          <a:bodyPr wrap="square" lIns="0" tIns="0" rIns="0" bIns="0" rtlCol="0" anchor="ctr"/>
           <a:lstStyle/>
           <a:p>
             <a:pPr algn="l" indent="0" marL="0">
@@ -12226,84 +12063,122 @@
               <a:buNone/>
             </a:pPr>
             <a:r>
-              <a:rPr lang="en-US" sz="1200" dirty="0">
-                <a:solidFill>
-                  <a:srgbClr val="6E6E73"/>
+              <a:rPr lang="en-US" sz="1150" dirty="0">
+                <a:solidFill>
+                  <a:srgbClr val="1D1D1F"/>
                 </a:solidFill>
                 <a:latin typeface="Pretendard Medium" pitchFamily="34" charset="0"/>
                 <a:ea typeface="Pretendard Medium" pitchFamily="34" charset="-122"/>
                 <a:cs typeface="Pretendard Medium" pitchFamily="34" charset="-120"/>
               </a:rPr>
-              <a:t>합계</a:t>
-            </a:r>
-            <a:endParaRPr lang="en-US" sz="1200" dirty="0"/>
-          </a:p>
-        </p:txBody>
-      </p:sp>
-      <p:sp>
-        <p:nvSpPr>
-          <p:cNvPr id="20" name="Text 18"/>
-          <p:cNvSpPr/>
-          <p:nvPr/>
-        </p:nvSpPr>
-        <p:spPr>
-          <a:xfrm>
-            <a:off x="3703320" y="4846320"/>
-            <a:ext cx="1920240" cy="365760"/>
-          </a:xfrm>
-          <a:prstGeom prst="rect">
-            <a:avLst/>
-          </a:prstGeom>
-          <a:noFill/>
-          <a:ln/>
-        </p:spPr>
-        <p:txBody>
-          <a:bodyPr wrap="square" lIns="0" tIns="0" rIns="0" bIns="0" rtlCol="0" anchor="t"/>
-          <a:lstStyle/>
-          <a:p>
-            <a:pPr algn="r" indent="0" marL="0">
+              <a:t>“상품 카드 넣어줘”</a:t>
+            </a:r>
+            <a:endParaRPr lang="en-US" sz="1150" dirty="0"/>
+          </a:p>
+        </p:txBody>
+      </p:sp>
+      <p:sp>
+        <p:nvSpPr>
+          <p:cNvPr id="14" name="Text 12"/>
+          <p:cNvSpPr/>
+          <p:nvPr/>
+        </p:nvSpPr>
+        <p:spPr>
+          <a:xfrm>
+            <a:off x="4983480" y="2862072"/>
+            <a:ext cx="2468880" cy="320040"/>
+          </a:xfrm>
+          <a:prstGeom prst="rect">
+            <a:avLst/>
+          </a:prstGeom>
+          <a:noFill/>
+          <a:ln/>
+        </p:spPr>
+        <p:txBody>
+          <a:bodyPr wrap="square" lIns="0" tIns="0" rIns="0" bIns="0" rtlCol="0" anchor="ctr"/>
+          <a:lstStyle/>
+          <a:p>
+            <a:pPr algn="l" indent="0" marL="0">
               <a:lnSpc>
                 <a:spcPct val="130000"/>
               </a:lnSpc>
               <a:buNone/>
             </a:pPr>
             <a:r>
-              <a:rPr lang="en-US" sz="2000" b="1" spc="-40" kern="0" dirty="0">
+              <a:rPr lang="en-US" sz="1100" dirty="0">
                 <a:solidFill>
                   <a:srgbClr val="6C4CFF"/>
+                </a:solidFill>
+                <a:latin typeface="Pretendard SemiBold" pitchFamily="34" charset="0"/>
+                <a:ea typeface="Pretendard SemiBold" pitchFamily="34" charset="-122"/>
+                <a:cs typeface="Pretendard SemiBold" pitchFamily="34" charset="-120"/>
+              </a:rPr>
+              <a:t>templates</a:t>
+            </a:r>
+            <a:endParaRPr lang="en-US" sz="1100" dirty="0"/>
+          </a:p>
+        </p:txBody>
+      </p:sp>
+      <p:sp>
+        <p:nvSpPr>
+          <p:cNvPr id="15" name="Text 13"/>
+          <p:cNvSpPr/>
+          <p:nvPr/>
+        </p:nvSpPr>
+        <p:spPr>
+          <a:xfrm>
+            <a:off x="7543800" y="2862072"/>
+            <a:ext cx="3578047" cy="320040"/>
+          </a:xfrm>
+          <a:prstGeom prst="rect">
+            <a:avLst/>
+          </a:prstGeom>
+          <a:noFill/>
+          <a:ln/>
+        </p:spPr>
+        <p:txBody>
+          <a:bodyPr wrap="square" lIns="0" tIns="0" rIns="0" bIns="0" rtlCol="0" anchor="ctr"/>
+          <a:lstStyle/>
+          <a:p>
+            <a:pPr algn="l" indent="0" marL="0">
+              <a:lnSpc>
+                <a:spcPct val="130000"/>
+              </a:lnSpc>
+              <a:buNone/>
+            </a:pPr>
+            <a:r>
+              <a:rPr lang="en-US" sz="1100" dirty="0">
+                <a:solidFill>
+                  <a:srgbClr val="55555A"/>
                 </a:solidFill>
                 <a:latin typeface="Pretendard" pitchFamily="34" charset="0"/>
                 <a:ea typeface="Pretendard" pitchFamily="34" charset="-122"/>
                 <a:cs typeface="Pretendard" pitchFamily="34" charset="-120"/>
               </a:rPr>
-              <a:t>≈ 1주</a:t>
-            </a:r>
-            <a:endParaRPr lang="en-US" sz="2000" dirty="0"/>
-          </a:p>
-        </p:txBody>
-      </p:sp>
-      <p:sp>
-        <p:nvSpPr>
-          <p:cNvPr id="21" name="Shape 19"/>
-          <p:cNvSpPr/>
-          <p:nvPr/>
-        </p:nvSpPr>
-        <p:spPr>
-          <a:xfrm>
-            <a:off x="6309360" y="2487168"/>
-            <a:ext cx="5120640" cy="2788920"/>
-          </a:xfrm>
-          <a:prstGeom prst="roundRect">
-            <a:avLst>
-              <a:gd name="adj" fmla="val 4590"/>
-            </a:avLst>
-          </a:prstGeom>
-          <a:solidFill>
-            <a:srgbClr val="EEEAFB"/>
-          </a:solidFill>
-          <a:ln w="19050">
+              <a:t>1-6-2. CdBd 카드 기능</a:t>
+            </a:r>
+            <a:endParaRPr lang="en-US" sz="1100" dirty="0"/>
+          </a:p>
+        </p:txBody>
+      </p:sp>
+      <p:sp>
+        <p:nvSpPr>
+          <p:cNvPr id="16" name="Shape 14"/>
+          <p:cNvSpPr/>
+          <p:nvPr/>
+        </p:nvSpPr>
+        <p:spPr>
+          <a:xfrm>
+            <a:off x="1069848" y="3209544"/>
+            <a:ext cx="10051999" cy="0"/>
+          </a:xfrm>
+          <a:prstGeom prst="line">
+            <a:avLst/>
+          </a:prstGeom>
+          <a:noFill/>
+          <a:ln w="6350">
             <a:solidFill>
-              <a:srgbClr val="6C4CFF"/>
+              <a:srgbClr val="F0F0F0"/>
             </a:solidFill>
             <a:prstDash val="solid"/>
           </a:ln>
@@ -12311,23 +12186,23 @@
       </p:sp>
       <p:sp>
         <p:nvSpPr>
-          <p:cNvPr id="22" name="Text 20"/>
-          <p:cNvSpPr/>
-          <p:nvPr/>
-        </p:nvSpPr>
-        <p:spPr>
-          <a:xfrm>
-            <a:off x="6620256" y="2743200"/>
-            <a:ext cx="4498848" cy="320040"/>
-          </a:xfrm>
-          <a:prstGeom prst="rect">
-            <a:avLst/>
-          </a:prstGeom>
-          <a:noFill/>
-          <a:ln/>
-        </p:spPr>
-        <p:txBody>
-          <a:bodyPr wrap="square" lIns="0" tIns="0" rIns="0" bIns="0" rtlCol="0" anchor="t"/>
+          <p:cNvPr id="17" name="Text 15"/>
+          <p:cNvSpPr/>
+          <p:nvPr/>
+        </p:nvSpPr>
+        <p:spPr>
+          <a:xfrm>
+            <a:off x="1069848" y="3227832"/>
+            <a:ext cx="3840480" cy="320040"/>
+          </a:xfrm>
+          <a:prstGeom prst="rect">
+            <a:avLst/>
+          </a:prstGeom>
+          <a:noFill/>
+          <a:ln/>
+        </p:spPr>
+        <p:txBody>
+          <a:bodyPr wrap="square" lIns="0" tIns="0" rIns="0" bIns="0" rtlCol="0" anchor="ctr"/>
           <a:lstStyle/>
           <a:p>
             <a:pPr algn="l" indent="0" marL="0">
@@ -12337,17 +12212,208 @@
               <a:buNone/>
             </a:pPr>
             <a:r>
-              <a:rPr lang="en-US" sz="1600" b="1" dirty="0">
+              <a:rPr lang="en-US" sz="1150" dirty="0">
+                <a:solidFill>
+                  <a:srgbClr val="1D1D1F"/>
+                </a:solidFill>
+                <a:latin typeface="Pretendard Medium" pitchFamily="34" charset="0"/>
+                <a:ea typeface="Pretendard Medium" pitchFamily="34" charset="-122"/>
+                <a:cs typeface="Pretendard Medium" pitchFamily="34" charset="-120"/>
+              </a:rPr>
+              <a:t>“통계 화면 만들어줘”</a:t>
+            </a:r>
+            <a:endParaRPr lang="en-US" sz="1150" dirty="0"/>
+          </a:p>
+        </p:txBody>
+      </p:sp>
+      <p:sp>
+        <p:nvSpPr>
+          <p:cNvPr id="18" name="Text 16"/>
+          <p:cNvSpPr/>
+          <p:nvPr/>
+        </p:nvSpPr>
+        <p:spPr>
+          <a:xfrm>
+            <a:off x="4983480" y="3227832"/>
+            <a:ext cx="2468880" cy="320040"/>
+          </a:xfrm>
+          <a:prstGeom prst="rect">
+            <a:avLst/>
+          </a:prstGeom>
+          <a:noFill/>
+          <a:ln/>
+        </p:spPr>
+        <p:txBody>
+          <a:bodyPr wrap="square" lIns="0" tIns="0" rIns="0" bIns="0" rtlCol="0" anchor="ctr"/>
+          <a:lstStyle/>
+          <a:p>
+            <a:pPr algn="l" indent="0" marL="0">
+              <a:lnSpc>
+                <a:spcPct val="130000"/>
+              </a:lnSpc>
+              <a:buNone/>
+            </a:pPr>
+            <a:r>
+              <a:rPr lang="en-US" sz="1100" dirty="0">
                 <a:solidFill>
                   <a:srgbClr val="6C4CFF"/>
+                </a:solidFill>
+                <a:latin typeface="Pretendard SemiBold" pitchFamily="34" charset="0"/>
+                <a:ea typeface="Pretendard SemiBold" pitchFamily="34" charset="-122"/>
+                <a:cs typeface="Pretendard SemiBold" pitchFamily="34" charset="-120"/>
+              </a:rPr>
+              <a:t>design-system</a:t>
+            </a:r>
+            <a:endParaRPr lang="en-US" sz="1100" dirty="0"/>
+          </a:p>
+        </p:txBody>
+      </p:sp>
+      <p:sp>
+        <p:nvSpPr>
+          <p:cNvPr id="19" name="Text 17"/>
+          <p:cNvSpPr/>
+          <p:nvPr/>
+        </p:nvSpPr>
+        <p:spPr>
+          <a:xfrm>
+            <a:off x="7543800" y="3227832"/>
+            <a:ext cx="3578047" cy="320040"/>
+          </a:xfrm>
+          <a:prstGeom prst="rect">
+            <a:avLst/>
+          </a:prstGeom>
+          <a:noFill/>
+          <a:ln/>
+        </p:spPr>
+        <p:txBody>
+          <a:bodyPr wrap="square" lIns="0" tIns="0" rIns="0" bIns="0" rtlCol="0" anchor="ctr"/>
+          <a:lstStyle/>
+          <a:p>
+            <a:pPr algn="l" indent="0" marL="0">
+              <a:lnSpc>
+                <a:spcPct val="130000"/>
+              </a:lnSpc>
+              <a:buNone/>
+            </a:pPr>
+            <a:r>
+              <a:rPr lang="en-US" sz="1100" dirty="0">
+                <a:solidFill>
+                  <a:srgbClr val="55555A"/>
                 </a:solidFill>
                 <a:latin typeface="Pretendard" pitchFamily="34" charset="0"/>
                 <a:ea typeface="Pretendard" pitchFamily="34" charset="-122"/>
                 <a:cs typeface="Pretendard" pitchFamily="34" charset="-120"/>
               </a:rPr>
-              <a:t>영상까지 문서화</a:t>
-            </a:r>
-            <a:endParaRPr lang="en-US" sz="1600" dirty="0"/>
+              <a:t>3-11. 통계</a:t>
+            </a:r>
+            <a:endParaRPr lang="en-US" sz="1100" dirty="0"/>
+          </a:p>
+        </p:txBody>
+      </p:sp>
+      <p:sp>
+        <p:nvSpPr>
+          <p:cNvPr id="20" name="Shape 18"/>
+          <p:cNvSpPr/>
+          <p:nvPr/>
+        </p:nvSpPr>
+        <p:spPr>
+          <a:xfrm>
+            <a:off x="1069848" y="3575304"/>
+            <a:ext cx="10051999" cy="0"/>
+          </a:xfrm>
+          <a:prstGeom prst="line">
+            <a:avLst/>
+          </a:prstGeom>
+          <a:noFill/>
+          <a:ln w="6350">
+            <a:solidFill>
+              <a:srgbClr val="F0F0F0"/>
+            </a:solidFill>
+            <a:prstDash val="solid"/>
+          </a:ln>
+        </p:spPr>
+      </p:sp>
+      <p:sp>
+        <p:nvSpPr>
+          <p:cNvPr id="21" name="Text 19"/>
+          <p:cNvSpPr/>
+          <p:nvPr/>
+        </p:nvSpPr>
+        <p:spPr>
+          <a:xfrm>
+            <a:off x="1069848" y="3593592"/>
+            <a:ext cx="3840480" cy="320040"/>
+          </a:xfrm>
+          <a:prstGeom prst="rect">
+            <a:avLst/>
+          </a:prstGeom>
+          <a:noFill/>
+          <a:ln/>
+        </p:spPr>
+        <p:txBody>
+          <a:bodyPr wrap="square" lIns="0" tIns="0" rIns="0" bIns="0" rtlCol="0" anchor="ctr"/>
+          <a:lstStyle/>
+          <a:p>
+            <a:pPr algn="l" indent="0" marL="0">
+              <a:lnSpc>
+                <a:spcPct val="130000"/>
+              </a:lnSpc>
+              <a:buNone/>
+            </a:pPr>
+            <a:r>
+              <a:rPr lang="en-US" sz="1150" dirty="0">
+                <a:solidFill>
+                  <a:srgbClr val="1D1D1F"/>
+                </a:solidFill>
+                <a:latin typeface="Pretendard Medium" pitchFamily="34" charset="0"/>
+                <a:ea typeface="Pretendard Medium" pitchFamily="34" charset="-122"/>
+                <a:cs typeface="Pretendard Medium" pitchFamily="34" charset="-120"/>
+              </a:rPr>
+              <a:t>“에디터 카드보드 수정”</a:t>
+            </a:r>
+            <a:endParaRPr lang="en-US" sz="1150" dirty="0"/>
+          </a:p>
+        </p:txBody>
+      </p:sp>
+      <p:sp>
+        <p:nvSpPr>
+          <p:cNvPr id="22" name="Text 20"/>
+          <p:cNvSpPr/>
+          <p:nvPr/>
+        </p:nvSpPr>
+        <p:spPr>
+          <a:xfrm>
+            <a:off x="4983480" y="3593592"/>
+            <a:ext cx="2468880" cy="320040"/>
+          </a:xfrm>
+          <a:prstGeom prst="rect">
+            <a:avLst/>
+          </a:prstGeom>
+          <a:noFill/>
+          <a:ln/>
+        </p:spPr>
+        <p:txBody>
+          <a:bodyPr wrap="square" lIns="0" tIns="0" rIns="0" bIns="0" rtlCol="0" anchor="ctr"/>
+          <a:lstStyle/>
+          <a:p>
+            <a:pPr algn="l" indent="0" marL="0">
+              <a:lnSpc>
+                <a:spcPct val="130000"/>
+              </a:lnSpc>
+              <a:buNone/>
+            </a:pPr>
+            <a:r>
+              <a:rPr lang="en-US" sz="1100" dirty="0">
+                <a:solidFill>
+                  <a:srgbClr val="6C4CFF"/>
+                </a:solidFill>
+                <a:latin typeface="Pretendard SemiBold" pitchFamily="34" charset="0"/>
+                <a:ea typeface="Pretendard SemiBold" pitchFamily="34" charset="-122"/>
+                <a:cs typeface="Pretendard SemiBold" pitchFamily="34" charset="-120"/>
+              </a:rPr>
+              <a:t>design-system</a:t>
+            </a:r>
+            <a:endParaRPr lang="en-US" sz="1100" dirty="0"/>
           </a:p>
         </p:txBody>
       </p:sp>
@@ -12359,17 +12425,17 @@
         </p:nvSpPr>
         <p:spPr>
           <a:xfrm>
-            <a:off x="6620256" y="3264408"/>
-            <a:ext cx="3657600" cy="320040"/>
-          </a:xfrm>
-          <a:prstGeom prst="rect">
-            <a:avLst/>
-          </a:prstGeom>
-          <a:noFill/>
-          <a:ln/>
-        </p:spPr>
-        <p:txBody>
-          <a:bodyPr wrap="square" lIns="0" tIns="0" rIns="0" bIns="0" rtlCol="0" anchor="t"/>
+            <a:off x="7543800" y="3593592"/>
+            <a:ext cx="3578047" cy="320040"/>
+          </a:xfrm>
+          <a:prstGeom prst="rect">
+            <a:avLst/>
+          </a:prstGeom>
+          <a:noFill/>
+          <a:ln/>
+        </p:spPr>
+        <p:txBody>
+          <a:bodyPr wrap="square" lIns="0" tIns="0" rIns="0" bIns="0" rtlCol="0" anchor="ctr"/>
           <a:lstStyle/>
           <a:p>
             <a:pPr algn="l" indent="0" marL="0">
@@ -12379,39 +12445,62 @@
               <a:buNone/>
             </a:pPr>
             <a:r>
-              <a:rPr lang="en-US" sz="1250" dirty="0">
-                <a:solidFill>
-                  <a:srgbClr val="1D1D1F"/>
+              <a:rPr lang="en-US" sz="1100" dirty="0">
+                <a:solidFill>
+                  <a:srgbClr val="55555A"/>
                 </a:solidFill>
                 <a:latin typeface="Pretendard" pitchFamily="34" charset="0"/>
                 <a:ea typeface="Pretendard" pitchFamily="34" charset="-122"/>
                 <a:cs typeface="Pretendard" pitchFamily="34" charset="-120"/>
               </a:rPr>
-              <a:t>○ 공백 기능 12개 (통계·계정·요금)</a:t>
-            </a:r>
-            <a:endParaRPr lang="en-US" sz="1250" dirty="0"/>
-          </a:p>
-        </p:txBody>
-      </p:sp>
-      <p:sp>
-        <p:nvSpPr>
-          <p:cNvPr id="24" name="Text 22"/>
-          <p:cNvSpPr/>
-          <p:nvPr/>
-        </p:nvSpPr>
-        <p:spPr>
-          <a:xfrm>
-            <a:off x="6620256" y="3666744"/>
-            <a:ext cx="3657600" cy="320040"/>
-          </a:xfrm>
-          <a:prstGeom prst="rect">
-            <a:avLst/>
-          </a:prstGeom>
-          <a:noFill/>
-          <a:ln/>
-        </p:spPr>
-        <p:txBody>
-          <a:bodyPr wrap="square" lIns="0" tIns="0" rIns="0" bIns="0" rtlCol="0" anchor="t"/>
+              <a:t>3-2-3. 카드 보드</a:t>
+            </a:r>
+            <a:endParaRPr lang="en-US" sz="1100" dirty="0"/>
+          </a:p>
+        </p:txBody>
+      </p:sp>
+      <p:sp>
+        <p:nvSpPr>
+          <p:cNvPr id="24" name="Shape 22"/>
+          <p:cNvSpPr/>
+          <p:nvPr/>
+        </p:nvSpPr>
+        <p:spPr>
+          <a:xfrm>
+            <a:off x="1069848" y="3941064"/>
+            <a:ext cx="10051999" cy="0"/>
+          </a:xfrm>
+          <a:prstGeom prst="line">
+            <a:avLst/>
+          </a:prstGeom>
+          <a:noFill/>
+          <a:ln w="6350">
+            <a:solidFill>
+              <a:srgbClr val="F0F0F0"/>
+            </a:solidFill>
+            <a:prstDash val="solid"/>
+          </a:ln>
+        </p:spPr>
+      </p:sp>
+      <p:sp>
+        <p:nvSpPr>
+          <p:cNvPr id="25" name="Text 23"/>
+          <p:cNvSpPr/>
+          <p:nvPr/>
+        </p:nvSpPr>
+        <p:spPr>
+          <a:xfrm>
+            <a:off x="1069848" y="3959352"/>
+            <a:ext cx="3840480" cy="320040"/>
+          </a:xfrm>
+          <a:prstGeom prst="rect">
+            <a:avLst/>
+          </a:prstGeom>
+          <a:noFill/>
+          <a:ln/>
+        </p:spPr>
+        <p:txBody>
+          <a:bodyPr wrap="square" lIns="0" tIns="0" rIns="0" bIns="0" rtlCol="0" anchor="ctr"/>
           <a:lstStyle/>
           <a:p>
             <a:pPr algn="l" indent="0" marL="0">
@@ -12421,39 +12510,146 @@
               <a:buNone/>
             </a:pPr>
             <a:r>
-              <a:rPr lang="en-US" sz="1250" dirty="0">
+              <a:rPr lang="en-US" sz="1150" dirty="0">
                 <a:solidFill>
                   <a:srgbClr val="1D1D1F"/>
+                </a:solidFill>
+                <a:latin typeface="Pretendard Medium" pitchFamily="34" charset="0"/>
+                <a:ea typeface="Pretendard Medium" pitchFamily="34" charset="-122"/>
+                <a:cs typeface="Pretendard Medium" pitchFamily="34" charset="-120"/>
+              </a:rPr>
+              <a:t>“URL 게시해줘”</a:t>
+            </a:r>
+            <a:endParaRPr lang="en-US" sz="1150" dirty="0"/>
+          </a:p>
+        </p:txBody>
+      </p:sp>
+      <p:sp>
+        <p:nvSpPr>
+          <p:cNvPr id="26" name="Text 24"/>
+          <p:cNvSpPr/>
+          <p:nvPr/>
+        </p:nvSpPr>
+        <p:spPr>
+          <a:xfrm>
+            <a:off x="4983480" y="3959352"/>
+            <a:ext cx="2468880" cy="320040"/>
+          </a:xfrm>
+          <a:prstGeom prst="rect">
+            <a:avLst/>
+          </a:prstGeom>
+          <a:noFill/>
+          <a:ln/>
+        </p:spPr>
+        <p:txBody>
+          <a:bodyPr wrap="square" lIns="0" tIns="0" rIns="0" bIns="0" rtlCol="0" anchor="ctr"/>
+          <a:lstStyle/>
+          <a:p>
+            <a:pPr algn="l" indent="0" marL="0">
+              <a:lnSpc>
+                <a:spcPct val="130000"/>
+              </a:lnSpc>
+              <a:buNone/>
+            </a:pPr>
+            <a:r>
+              <a:rPr lang="en-US" sz="1100" dirty="0">
+                <a:solidFill>
+                  <a:srgbClr val="6C4CFF"/>
+                </a:solidFill>
+                <a:latin typeface="Pretendard SemiBold" pitchFamily="34" charset="0"/>
+                <a:ea typeface="Pretendard SemiBold" pitchFamily="34" charset="-122"/>
+                <a:cs typeface="Pretendard SemiBold" pitchFamily="34" charset="-120"/>
+              </a:rPr>
+              <a:t>design-service</a:t>
+            </a:r>
+            <a:endParaRPr lang="en-US" sz="1100" dirty="0"/>
+          </a:p>
+        </p:txBody>
+      </p:sp>
+      <p:sp>
+        <p:nvSpPr>
+          <p:cNvPr id="27" name="Text 25"/>
+          <p:cNvSpPr/>
+          <p:nvPr/>
+        </p:nvSpPr>
+        <p:spPr>
+          <a:xfrm>
+            <a:off x="7543800" y="3959352"/>
+            <a:ext cx="3578047" cy="320040"/>
+          </a:xfrm>
+          <a:prstGeom prst="rect">
+            <a:avLst/>
+          </a:prstGeom>
+          <a:noFill/>
+          <a:ln/>
+        </p:spPr>
+        <p:txBody>
+          <a:bodyPr wrap="square" lIns="0" tIns="0" rIns="0" bIns="0" rtlCol="0" anchor="ctr"/>
+          <a:lstStyle/>
+          <a:p>
+            <a:pPr algn="l" indent="0" marL="0">
+              <a:lnSpc>
+                <a:spcPct val="130000"/>
+              </a:lnSpc>
+              <a:buNone/>
+            </a:pPr>
+            <a:r>
+              <a:rPr lang="en-US" sz="1100" dirty="0">
+                <a:solidFill>
+                  <a:srgbClr val="55555A"/>
                 </a:solidFill>
                 <a:latin typeface="Pretendard" pitchFamily="34" charset="0"/>
                 <a:ea typeface="Pretendard" pitchFamily="34" charset="-122"/>
                 <a:cs typeface="Pretendard" pitchFamily="34" charset="-120"/>
               </a:rPr>
-              <a:t>◐ 부분 기능 9개 보강</a:t>
-            </a:r>
-            <a:endParaRPr lang="en-US" sz="1250" dirty="0"/>
-          </a:p>
-        </p:txBody>
-      </p:sp>
-      <p:sp>
-        <p:nvSpPr>
-          <p:cNvPr id="25" name="Text 23"/>
-          <p:cNvSpPr/>
-          <p:nvPr/>
-        </p:nvSpPr>
-        <p:spPr>
-          <a:xfrm>
-            <a:off x="6620256" y="4069080"/>
-            <a:ext cx="3657600" cy="320040"/>
-          </a:xfrm>
-          <a:prstGeom prst="rect">
-            <a:avLst/>
-          </a:prstGeom>
-          <a:noFill/>
-          <a:ln/>
-        </p:spPr>
-        <p:txBody>
-          <a:bodyPr wrap="square" lIns="0" tIns="0" rIns="0" bIns="0" rtlCol="0" anchor="t"/>
+              <a:t>1-4. CdBd 콘텐츠 §게시</a:t>
+            </a:r>
+            <a:endParaRPr lang="en-US" sz="1100" dirty="0"/>
+          </a:p>
+        </p:txBody>
+      </p:sp>
+      <p:sp>
+        <p:nvSpPr>
+          <p:cNvPr id="28" name="Shape 26"/>
+          <p:cNvSpPr/>
+          <p:nvPr/>
+        </p:nvSpPr>
+        <p:spPr>
+          <a:xfrm>
+            <a:off x="1069848" y="4306824"/>
+            <a:ext cx="10051999" cy="0"/>
+          </a:xfrm>
+          <a:prstGeom prst="line">
+            <a:avLst/>
+          </a:prstGeom>
+          <a:noFill/>
+          <a:ln w="6350">
+            <a:solidFill>
+              <a:srgbClr val="F0F0F0"/>
+            </a:solidFill>
+            <a:prstDash val="solid"/>
+          </a:ln>
+        </p:spPr>
+      </p:sp>
+      <p:sp>
+        <p:nvSpPr>
+          <p:cNvPr id="29" name="Text 27"/>
+          <p:cNvSpPr/>
+          <p:nvPr/>
+        </p:nvSpPr>
+        <p:spPr>
+          <a:xfrm>
+            <a:off x="1069848" y="4325112"/>
+            <a:ext cx="3840480" cy="320040"/>
+          </a:xfrm>
+          <a:prstGeom prst="rect">
+            <a:avLst/>
+          </a:prstGeom>
+          <a:noFill/>
+          <a:ln/>
+        </p:spPr>
+        <p:txBody>
+          <a:bodyPr wrap="square" lIns="0" tIns="0" rIns="0" bIns="0" rtlCol="0" anchor="ctr"/>
           <a:lstStyle/>
           <a:p>
             <a:pPr algn="l" indent="0" marL="0">
@@ -12463,49 +12659,156 @@
               <a:buNone/>
             </a:pPr>
             <a:r>
-              <a:rPr lang="en-US" sz="1250" dirty="0">
+              <a:rPr lang="en-US" sz="1150" dirty="0">
                 <a:solidFill>
                   <a:srgbClr val="1D1D1F"/>
+                </a:solidFill>
+                <a:latin typeface="Pretendard Medium" pitchFamily="34" charset="0"/>
+                <a:ea typeface="Pretendard Medium" pitchFamily="34" charset="-122"/>
+                <a:cs typeface="Pretendard Medium" pitchFamily="34" charset="-120"/>
+              </a:rPr>
+              <a:t>“룩북 시안 만들어줘”</a:t>
+            </a:r>
+            <a:endParaRPr lang="en-US" sz="1150" dirty="0"/>
+          </a:p>
+        </p:txBody>
+      </p:sp>
+      <p:sp>
+        <p:nvSpPr>
+          <p:cNvPr id="30" name="Text 28"/>
+          <p:cNvSpPr/>
+          <p:nvPr/>
+        </p:nvSpPr>
+        <p:spPr>
+          <a:xfrm>
+            <a:off x="4983480" y="4325112"/>
+            <a:ext cx="2468880" cy="320040"/>
+          </a:xfrm>
+          <a:prstGeom prst="rect">
+            <a:avLst/>
+          </a:prstGeom>
+          <a:noFill/>
+          <a:ln/>
+        </p:spPr>
+        <p:txBody>
+          <a:bodyPr wrap="square" lIns="0" tIns="0" rIns="0" bIns="0" rtlCol="0" anchor="ctr"/>
+          <a:lstStyle/>
+          <a:p>
+            <a:pPr algn="l" indent="0" marL="0">
+              <a:lnSpc>
+                <a:spcPct val="130000"/>
+              </a:lnSpc>
+              <a:buNone/>
+            </a:pPr>
+            <a:r>
+              <a:rPr lang="en-US" sz="1100" dirty="0">
+                <a:solidFill>
+                  <a:srgbClr val="6C4CFF"/>
+                </a:solidFill>
+                <a:latin typeface="Pretendard SemiBold" pitchFamily="34" charset="0"/>
+                <a:ea typeface="Pretendard SemiBold" pitchFamily="34" charset="-122"/>
+                <a:cs typeface="Pretendard SemiBold" pitchFamily="34" charset="-120"/>
+              </a:rPr>
+              <a:t>design-service</a:t>
+            </a:r>
+            <a:endParaRPr lang="en-US" sz="1100" dirty="0"/>
+          </a:p>
+        </p:txBody>
+      </p:sp>
+      <p:sp>
+        <p:nvSpPr>
+          <p:cNvPr id="31" name="Text 29"/>
+          <p:cNvSpPr/>
+          <p:nvPr/>
+        </p:nvSpPr>
+        <p:spPr>
+          <a:xfrm>
+            <a:off x="7543800" y="4325112"/>
+            <a:ext cx="3578047" cy="320040"/>
+          </a:xfrm>
+          <a:prstGeom prst="rect">
+            <a:avLst/>
+          </a:prstGeom>
+          <a:noFill/>
+          <a:ln/>
+        </p:spPr>
+        <p:txBody>
+          <a:bodyPr wrap="square" lIns="0" tIns="0" rIns="0" bIns="0" rtlCol="0" anchor="ctr"/>
+          <a:lstStyle/>
+          <a:p>
+            <a:pPr algn="l" indent="0" marL="0">
+              <a:lnSpc>
+                <a:spcPct val="130000"/>
+              </a:lnSpc>
+              <a:buNone/>
+            </a:pPr>
+            <a:r>
+              <a:rPr lang="en-US" sz="1100" dirty="0">
+                <a:solidFill>
+                  <a:srgbClr val="55555A"/>
                 </a:solidFill>
                 <a:latin typeface="Pretendard" pitchFamily="34" charset="0"/>
                 <a:ea typeface="Pretendard" pitchFamily="34" charset="-122"/>
                 <a:cs typeface="Pretendard" pitchFamily="34" charset="-120"/>
               </a:rPr>
-              <a:t>영상 수령 → 프레임 추출·작성</a:t>
-            </a:r>
-            <a:endParaRPr lang="en-US" sz="1250" dirty="0"/>
-          </a:p>
-        </p:txBody>
-      </p:sp>
-      <p:sp>
-        <p:nvSpPr>
-          <p:cNvPr id="26" name="Text 24"/>
-          <p:cNvSpPr/>
-          <p:nvPr/>
-        </p:nvSpPr>
-        <p:spPr>
-          <a:xfrm>
-            <a:off x="10058400" y="4069080"/>
-            <a:ext cx="1097280" cy="320040"/>
-          </a:xfrm>
-          <a:prstGeom prst="rect">
-            <a:avLst/>
-          </a:prstGeom>
-          <a:noFill/>
-          <a:ln/>
-        </p:spPr>
-        <p:txBody>
-          <a:bodyPr wrap="square" lIns="0" tIns="0" rIns="0" bIns="0" rtlCol="0" anchor="t"/>
-          <a:lstStyle/>
-          <a:p>
-            <a:pPr algn="r" indent="0" marL="0">
+              <a:t>룩북/1-2. 시안</a:t>
+            </a:r>
+            <a:endParaRPr lang="en-US" sz="1100" dirty="0"/>
+          </a:p>
+        </p:txBody>
+      </p:sp>
+      <p:sp>
+        <p:nvSpPr>
+          <p:cNvPr id="32" name="Shape 30"/>
+          <p:cNvSpPr/>
+          <p:nvPr/>
+        </p:nvSpPr>
+        <p:spPr>
+          <a:xfrm>
+            <a:off x="1069848" y="4672584"/>
+            <a:ext cx="10051999" cy="0"/>
+          </a:xfrm>
+          <a:prstGeom prst="line">
+            <a:avLst/>
+          </a:prstGeom>
+          <a:noFill/>
+          <a:ln w="6350">
+            <a:solidFill>
+              <a:srgbClr val="F0F0F0"/>
+            </a:solidFill>
+            <a:prstDash val="solid"/>
+          </a:ln>
+        </p:spPr>
+      </p:sp>
+      <p:sp>
+        <p:nvSpPr>
+          <p:cNvPr id="33" name="Text 31"/>
+          <p:cNvSpPr/>
+          <p:nvPr/>
+        </p:nvSpPr>
+        <p:spPr>
+          <a:xfrm>
+            <a:off x="1069848" y="4690872"/>
+            <a:ext cx="3840480" cy="320040"/>
+          </a:xfrm>
+          <a:prstGeom prst="rect">
+            <a:avLst/>
+          </a:prstGeom>
+          <a:noFill/>
+          <a:ln/>
+        </p:spPr>
+        <p:txBody>
+          <a:bodyPr wrap="square" lIns="0" tIns="0" rIns="0" bIns="0" rtlCol="0" anchor="ctr"/>
+          <a:lstStyle/>
+          <a:p>
+            <a:pPr algn="l" indent="0" marL="0">
               <a:lnSpc>
                 <a:spcPct val="130000"/>
               </a:lnSpc>
               <a:buNone/>
             </a:pPr>
             <a:r>
-              <a:rPr lang="en-US" sz="1300" dirty="0">
+              <a:rPr lang="en-US" sz="1150" dirty="0">
                 <a:solidFill>
                   <a:srgbClr val="1D1D1F"/>
                 </a:solidFill>
@@ -12513,30 +12816,114 @@
                 <a:ea typeface="Pretendard Medium" pitchFamily="34" charset="-122"/>
                 <a:cs typeface="Pretendard Medium" pitchFamily="34" charset="-120"/>
               </a:rPr>
-              <a:t>+3~5일</a:t>
-            </a:r>
-            <a:endParaRPr lang="en-US" sz="1300" dirty="0"/>
-          </a:p>
-        </p:txBody>
-      </p:sp>
-      <p:sp>
-        <p:nvSpPr>
-          <p:cNvPr id="27" name="Shape 25"/>
-          <p:cNvSpPr/>
-          <p:nvPr/>
-        </p:nvSpPr>
-        <p:spPr>
-          <a:xfrm>
-            <a:off x="6620256" y="4818888"/>
-            <a:ext cx="4498848" cy="0"/>
+              <a:t>“QR 이벤트 만들어줘”</a:t>
+            </a:r>
+            <a:endParaRPr lang="en-US" sz="1150" dirty="0"/>
+          </a:p>
+        </p:txBody>
+      </p:sp>
+      <p:sp>
+        <p:nvSpPr>
+          <p:cNvPr id="34" name="Text 32"/>
+          <p:cNvSpPr/>
+          <p:nvPr/>
+        </p:nvSpPr>
+        <p:spPr>
+          <a:xfrm>
+            <a:off x="4983480" y="4690872"/>
+            <a:ext cx="2468880" cy="320040"/>
+          </a:xfrm>
+          <a:prstGeom prst="rect">
+            <a:avLst/>
+          </a:prstGeom>
+          <a:noFill/>
+          <a:ln/>
+        </p:spPr>
+        <p:txBody>
+          <a:bodyPr wrap="square" lIns="0" tIns="0" rIns="0" bIns="0" rtlCol="0" anchor="ctr"/>
+          <a:lstStyle/>
+          <a:p>
+            <a:pPr algn="l" indent="0" marL="0">
+              <a:lnSpc>
+                <a:spcPct val="130000"/>
+              </a:lnSpc>
+              <a:buNone/>
+            </a:pPr>
+            <a:r>
+              <a:rPr lang="en-US" sz="1100" dirty="0">
+                <a:solidFill>
+                  <a:srgbClr val="6C4CFF"/>
+                </a:solidFill>
+                <a:latin typeface="Pretendard SemiBold" pitchFamily="34" charset="0"/>
+                <a:ea typeface="Pretendard SemiBold" pitchFamily="34" charset="-122"/>
+                <a:cs typeface="Pretendard SemiBold" pitchFamily="34" charset="-120"/>
+              </a:rPr>
+              <a:t>makevu-qrstp</a:t>
+            </a:r>
+            <a:endParaRPr lang="en-US" sz="1100" dirty="0"/>
+          </a:p>
+        </p:txBody>
+      </p:sp>
+      <p:sp>
+        <p:nvSpPr>
+          <p:cNvPr id="35" name="Text 33"/>
+          <p:cNvSpPr/>
+          <p:nvPr/>
+        </p:nvSpPr>
+        <p:spPr>
+          <a:xfrm>
+            <a:off x="7543800" y="4690872"/>
+            <a:ext cx="3578047" cy="320040"/>
+          </a:xfrm>
+          <a:prstGeom prst="rect">
+            <a:avLst/>
+          </a:prstGeom>
+          <a:noFill/>
+          <a:ln/>
+        </p:spPr>
+        <p:txBody>
+          <a:bodyPr wrap="square" lIns="0" tIns="0" rIns="0" bIns="0" rtlCol="0" anchor="ctr"/>
+          <a:lstStyle/>
+          <a:p>
+            <a:pPr algn="l" indent="0" marL="0">
+              <a:lnSpc>
+                <a:spcPct val="130000"/>
+              </a:lnSpc>
+              <a:buNone/>
+            </a:pPr>
+            <a:r>
+              <a:rPr lang="en-US" sz="1100" dirty="0">
+                <a:solidFill>
+                  <a:srgbClr val="55555A"/>
+                </a:solidFill>
+                <a:latin typeface="Pretendard" pitchFamily="34" charset="0"/>
+                <a:ea typeface="Pretendard" pitchFamily="34" charset="-122"/>
+                <a:cs typeface="Pretendard" pitchFamily="34" charset="-120"/>
+              </a:rPr>
+              <a:t>3. 워크플로우</a:t>
+            </a:r>
+            <a:endParaRPr lang="en-US" sz="1100" dirty="0"/>
+          </a:p>
+        </p:txBody>
+      </p:sp>
+      <p:sp>
+        <p:nvSpPr>
+          <p:cNvPr id="36" name="Shape 34"/>
+          <p:cNvSpPr/>
+          <p:nvPr/>
+        </p:nvSpPr>
+        <p:spPr>
+          <a:xfrm>
+            <a:off x="1069848" y="5038344"/>
+            <a:ext cx="10051999" cy="0"/>
           </a:xfrm>
           <a:prstGeom prst="line">
             <a:avLst/>
           </a:prstGeom>
           <a:noFill/>
-          <a:ln w="9525">
+          <a:ln w="6350">
             <a:solidFill>
-              <a:srgbClr val="E5E7EB"/>
+              <a:srgbClr val="F0F0F0"/>
             </a:solidFill>
             <a:prstDash val="solid"/>
           </a:ln>
@@ -12544,23 +12931,23 @@
       </p:sp>
       <p:sp>
         <p:nvSpPr>
-          <p:cNvPr id="28" name="Text 26"/>
-          <p:cNvSpPr/>
-          <p:nvPr/>
-        </p:nvSpPr>
-        <p:spPr>
-          <a:xfrm>
-            <a:off x="6620256" y="4910328"/>
-            <a:ext cx="2743200" cy="274320"/>
-          </a:xfrm>
-          <a:prstGeom prst="rect">
-            <a:avLst/>
-          </a:prstGeom>
-          <a:noFill/>
-          <a:ln/>
-        </p:spPr>
-        <p:txBody>
-          <a:bodyPr wrap="square" lIns="0" tIns="0" rIns="0" bIns="0" rtlCol="0" anchor="t"/>
+          <p:cNvPr id="37" name="Text 35"/>
+          <p:cNvSpPr/>
+          <p:nvPr/>
+        </p:nvSpPr>
+        <p:spPr>
+          <a:xfrm>
+            <a:off x="1069848" y="5056632"/>
+            <a:ext cx="3840480" cy="320040"/>
+          </a:xfrm>
+          <a:prstGeom prst="rect">
+            <a:avLst/>
+          </a:prstGeom>
+          <a:noFill/>
+          <a:ln/>
+        </p:spPr>
+        <p:txBody>
+          <a:bodyPr wrap="square" lIns="0" tIns="0" rIns="0" bIns="0" rtlCol="0" anchor="ctr"/>
           <a:lstStyle/>
           <a:p>
             <a:pPr algn="l" indent="0" marL="0">
@@ -12570,81 +12957,146 @@
               <a:buNone/>
             </a:pPr>
             <a:r>
-              <a:rPr lang="en-US" sz="1200" dirty="0">
-                <a:solidFill>
-                  <a:srgbClr val="6E6E73"/>
+              <a:rPr lang="en-US" sz="1150" dirty="0">
+                <a:solidFill>
+                  <a:srgbClr val="1D1D1F"/>
                 </a:solidFill>
                 <a:latin typeface="Pretendard Medium" pitchFamily="34" charset="0"/>
                 <a:ea typeface="Pretendard Medium" pitchFamily="34" charset="-122"/>
                 <a:cs typeface="Pretendard Medium" pitchFamily="34" charset="-120"/>
               </a:rPr>
-              <a:t>문서 구조 + 영상</a:t>
-            </a:r>
-            <a:endParaRPr lang="en-US" sz="1200" dirty="0"/>
-          </a:p>
-        </p:txBody>
-      </p:sp>
-      <p:sp>
-        <p:nvSpPr>
-          <p:cNvPr id="29" name="Text 27"/>
-          <p:cNvSpPr/>
-          <p:nvPr/>
-        </p:nvSpPr>
-        <p:spPr>
-          <a:xfrm>
-            <a:off x="9235440" y="4846320"/>
-            <a:ext cx="1920240" cy="365760"/>
-          </a:xfrm>
-          <a:prstGeom prst="rect">
-            <a:avLst/>
-          </a:prstGeom>
-          <a:noFill/>
-          <a:ln/>
-        </p:spPr>
-        <p:txBody>
-          <a:bodyPr wrap="square" lIns="0" tIns="0" rIns="0" bIns="0" rtlCol="0" anchor="t"/>
-          <a:lstStyle/>
-          <a:p>
-            <a:pPr algn="r" indent="0" marL="0">
+              <a:t>“블로그 썸네일 만들어줘”</a:t>
+            </a:r>
+            <a:endParaRPr lang="en-US" sz="1150" dirty="0"/>
+          </a:p>
+        </p:txBody>
+      </p:sp>
+      <p:sp>
+        <p:nvSpPr>
+          <p:cNvPr id="38" name="Text 36"/>
+          <p:cNvSpPr/>
+          <p:nvPr/>
+        </p:nvSpPr>
+        <p:spPr>
+          <a:xfrm>
+            <a:off x="4983480" y="5056632"/>
+            <a:ext cx="2468880" cy="320040"/>
+          </a:xfrm>
+          <a:prstGeom prst="rect">
+            <a:avLst/>
+          </a:prstGeom>
+          <a:noFill/>
+          <a:ln/>
+        </p:spPr>
+        <p:txBody>
+          <a:bodyPr wrap="square" lIns="0" tIns="0" rIns="0" bIns="0" rtlCol="0" anchor="ctr"/>
+          <a:lstStyle/>
+          <a:p>
+            <a:pPr algn="l" indent="0" marL="0">
               <a:lnSpc>
                 <a:spcPct val="130000"/>
               </a:lnSpc>
               <a:buNone/>
             </a:pPr>
             <a:r>
-              <a:rPr lang="en-US" sz="2000" b="1" spc="-40" kern="0" dirty="0">
+              <a:rPr lang="en-US" sz="1100" dirty="0">
                 <a:solidFill>
                   <a:srgbClr val="6C4CFF"/>
+                </a:solidFill>
+                <a:latin typeface="Pretendard SemiBold" pitchFamily="34" charset="0"/>
+                <a:ea typeface="Pretendard SemiBold" pitchFamily="34" charset="-122"/>
+                <a:cs typeface="Pretendard SemiBold" pitchFamily="34" charset="-120"/>
+              </a:rPr>
+              <a:t>marketing</a:t>
+            </a:r>
+            <a:endParaRPr lang="en-US" sz="1100" dirty="0"/>
+          </a:p>
+        </p:txBody>
+      </p:sp>
+      <p:sp>
+        <p:nvSpPr>
+          <p:cNvPr id="39" name="Text 37"/>
+          <p:cNvSpPr/>
+          <p:nvPr/>
+        </p:nvSpPr>
+        <p:spPr>
+          <a:xfrm>
+            <a:off x="7543800" y="5056632"/>
+            <a:ext cx="3578047" cy="320040"/>
+          </a:xfrm>
+          <a:prstGeom prst="rect">
+            <a:avLst/>
+          </a:prstGeom>
+          <a:noFill/>
+          <a:ln/>
+        </p:spPr>
+        <p:txBody>
+          <a:bodyPr wrap="square" lIns="0" tIns="0" rIns="0" bIns="0" rtlCol="0" anchor="ctr"/>
+          <a:lstStyle/>
+          <a:p>
+            <a:pPr algn="l" indent="0" marL="0">
+              <a:lnSpc>
+                <a:spcPct val="130000"/>
+              </a:lnSpc>
+              <a:buNone/>
+            </a:pPr>
+            <a:r>
+              <a:rPr lang="en-US" sz="1100" dirty="0">
+                <a:solidFill>
+                  <a:srgbClr val="55555A"/>
                 </a:solidFill>
                 <a:latin typeface="Pretendard" pitchFamily="34" charset="0"/>
                 <a:ea typeface="Pretendard" pitchFamily="34" charset="-122"/>
                 <a:cs typeface="Pretendard" pitchFamily="34" charset="-120"/>
               </a:rPr>
-              <a:t>≈ 2주</a:t>
-            </a:r>
-            <a:endParaRPr lang="en-US" sz="2000" dirty="0"/>
-          </a:p>
-        </p:txBody>
-      </p:sp>
-      <p:sp>
-        <p:nvSpPr>
-          <p:cNvPr id="30" name="Text 28"/>
-          <p:cNvSpPr/>
-          <p:nvPr/>
-        </p:nvSpPr>
-        <p:spPr>
-          <a:xfrm>
-            <a:off x="777240" y="5532120"/>
-            <a:ext cx="10637215" cy="365760"/>
-          </a:xfrm>
-          <a:prstGeom prst="rect">
-            <a:avLst/>
-          </a:prstGeom>
-          <a:noFill/>
-          <a:ln/>
-        </p:spPr>
-        <p:txBody>
-          <a:bodyPr wrap="square" lIns="0" tIns="0" rIns="0" bIns="0" rtlCol="0" anchor="t"/>
+              <a:t>1-1. 썸네일</a:t>
+            </a:r>
+            <a:endParaRPr lang="en-US" sz="1100" dirty="0"/>
+          </a:p>
+        </p:txBody>
+      </p:sp>
+      <p:sp>
+        <p:nvSpPr>
+          <p:cNvPr id="40" name="Shape 38"/>
+          <p:cNvSpPr/>
+          <p:nvPr/>
+        </p:nvSpPr>
+        <p:spPr>
+          <a:xfrm>
+            <a:off x="1069848" y="5404104"/>
+            <a:ext cx="10051999" cy="0"/>
+          </a:xfrm>
+          <a:prstGeom prst="line">
+            <a:avLst/>
+          </a:prstGeom>
+          <a:noFill/>
+          <a:ln w="6350">
+            <a:solidFill>
+              <a:srgbClr val="F0F0F0"/>
+            </a:solidFill>
+            <a:prstDash val="solid"/>
+          </a:ln>
+        </p:spPr>
+      </p:sp>
+      <p:sp>
+        <p:nvSpPr>
+          <p:cNvPr id="41" name="Text 39"/>
+          <p:cNvSpPr/>
+          <p:nvPr/>
+        </p:nvSpPr>
+        <p:spPr>
+          <a:xfrm>
+            <a:off x="1069848" y="5422392"/>
+            <a:ext cx="3840480" cy="320040"/>
+          </a:xfrm>
+          <a:prstGeom prst="rect">
+            <a:avLst/>
+          </a:prstGeom>
+          <a:noFill/>
+          <a:ln/>
+        </p:spPr>
+        <p:txBody>
+          <a:bodyPr wrap="square" lIns="0" tIns="0" rIns="0" bIns="0" rtlCol="0" anchor="ctr"/>
           <a:lstStyle/>
           <a:p>
             <a:pPr algn="l" indent="0" marL="0">
@@ -12656,15 +13108,141 @@
             <a:r>
               <a:rPr lang="en-US" sz="1150" dirty="0">
                 <a:solidFill>
-                  <a:srgbClr val="6E6E73"/>
+                  <a:srgbClr val="1D1D1F"/>
                 </a:solidFill>
                 <a:latin typeface="Pretendard Medium" pitchFamily="34" charset="0"/>
                 <a:ea typeface="Pretendard Medium" pitchFamily="34" charset="-122"/>
                 <a:cs typeface="Pretendard Medium" pitchFamily="34" charset="-120"/>
               </a:rPr>
-              <a:t>※ 숫자는 추정치(예시)입니다. 다음 장에서 ‘어떤 기능에 영상이 필요한가’를 봅니다.</a:t>
+              <a:t>“아이콘 바꿔줘”</a:t>
             </a:r>
             <a:endParaRPr lang="en-US" sz="1150" dirty="0"/>
+          </a:p>
+        </p:txBody>
+      </p:sp>
+      <p:sp>
+        <p:nvSpPr>
+          <p:cNvPr id="42" name="Text 40"/>
+          <p:cNvSpPr/>
+          <p:nvPr/>
+        </p:nvSpPr>
+        <p:spPr>
+          <a:xfrm>
+            <a:off x="4983480" y="5422392"/>
+            <a:ext cx="2468880" cy="320040"/>
+          </a:xfrm>
+          <a:prstGeom prst="rect">
+            <a:avLst/>
+          </a:prstGeom>
+          <a:noFill/>
+          <a:ln/>
+        </p:spPr>
+        <p:txBody>
+          <a:bodyPr wrap="square" lIns="0" tIns="0" rIns="0" bIns="0" rtlCol="0" anchor="ctr"/>
+          <a:lstStyle/>
+          <a:p>
+            <a:pPr algn="l" indent="0" marL="0">
+              <a:lnSpc>
+                <a:spcPct val="130000"/>
+              </a:lnSpc>
+              <a:buNone/>
+            </a:pPr>
+            <a:r>
+              <a:rPr lang="en-US" sz="1100" dirty="0">
+                <a:solidFill>
+                  <a:srgbClr val="6C4CFF"/>
+                </a:solidFill>
+                <a:latin typeface="Pretendard SemiBold" pitchFamily="34" charset="0"/>
+                <a:ea typeface="Pretendard SemiBold" pitchFamily="34" charset="-122"/>
+                <a:cs typeface="Pretendard SemiBold" pitchFamily="34" charset="-120"/>
+              </a:rPr>
+              <a:t>design-system</a:t>
+            </a:r>
+            <a:endParaRPr lang="en-US" sz="1100" dirty="0"/>
+          </a:p>
+        </p:txBody>
+      </p:sp>
+      <p:sp>
+        <p:nvSpPr>
+          <p:cNvPr id="43" name="Text 41"/>
+          <p:cNvSpPr/>
+          <p:nvPr/>
+        </p:nvSpPr>
+        <p:spPr>
+          <a:xfrm>
+            <a:off x="7543800" y="5422392"/>
+            <a:ext cx="3578047" cy="320040"/>
+          </a:xfrm>
+          <a:prstGeom prst="rect">
+            <a:avLst/>
+          </a:prstGeom>
+          <a:noFill/>
+          <a:ln/>
+        </p:spPr>
+        <p:txBody>
+          <a:bodyPr wrap="square" lIns="0" tIns="0" rIns="0" bIns="0" rtlCol="0" anchor="ctr"/>
+          <a:lstStyle/>
+          <a:p>
+            <a:pPr algn="l" indent="0" marL="0">
+              <a:lnSpc>
+                <a:spcPct val="130000"/>
+              </a:lnSpc>
+              <a:buNone/>
+            </a:pPr>
+            <a:r>
+              <a:rPr lang="en-US" sz="1100" dirty="0">
+                <a:solidFill>
+                  <a:srgbClr val="55555A"/>
+                </a:solidFill>
+                <a:latin typeface="Pretendard" pitchFamily="34" charset="0"/>
+                <a:ea typeface="Pretendard" pitchFamily="34" charset="-122"/>
+                <a:cs typeface="Pretendard" pitchFamily="34" charset="-120"/>
+              </a:rPr>
+              <a:t>skills/cdbd-icon-use</a:t>
+            </a:r>
+            <a:endParaRPr lang="en-US" sz="1100" dirty="0"/>
+          </a:p>
+        </p:txBody>
+      </p:sp>
+      <p:sp>
+        <p:nvSpPr>
+          <p:cNvPr id="44" name="Text 42"/>
+          <p:cNvSpPr/>
+          <p:nvPr/>
+        </p:nvSpPr>
+        <p:spPr>
+          <a:xfrm>
+            <a:off x="777240" y="5907024"/>
+            <a:ext cx="10637215" cy="274320"/>
+          </a:xfrm>
+          <a:prstGeom prst="rect">
+            <a:avLst/>
+          </a:prstGeom>
+          <a:noFill/>
+          <a:ln/>
+        </p:spPr>
+        <p:txBody>
+          <a:bodyPr wrap="square" lIns="0" tIns="0" rIns="0" bIns="0" rtlCol="0" anchor="t"/>
+          <a:lstStyle/>
+          <a:p>
+            <a:pPr algn="l" indent="0" marL="0">
+              <a:lnSpc>
+                <a:spcPct val="130000"/>
+              </a:lnSpc>
+              <a:buNone/>
+            </a:pPr>
+            <a:r>
+              <a:rPr lang="en-US" sz="1100" dirty="0">
+                <a:solidFill>
+                  <a:srgbClr val="6E6E73"/>
+                </a:solidFill>
+                <a:latin typeface="Pretendard Medium" pitchFamily="34" charset="0"/>
+                <a:ea typeface="Pretendard Medium" pitchFamily="34" charset="-122"/>
+                <a:cs typeface="Pretendard Medium" pitchFamily="34" charset="-120"/>
+              </a:rPr>
+              <a:t>핵심 — 각 줄이 ‘볼트 + 파일’을 가리켜, 어느 볼트 것이든 이 한 파일에서 라우팅됩니다.</a:t>
+            </a:r>
+            <a:endParaRPr lang="en-US" sz="1100" dirty="0"/>
           </a:p>
         </p:txBody>
       </p:sp>
@@ -12733,7 +13311,7 @@
                 <a:ea typeface="Pretendard SemiBold" pitchFamily="34" charset="-122"/>
                 <a:cs typeface="Pretendard SemiBold" pitchFamily="34" charset="-120"/>
               </a:rPr>
-              <a:t>④ 영상</a:t>
+              <a:t>일정</a:t>
             </a:r>
             <a:endParaRPr lang="en-US" sz="1200" dirty="0"/>
           </a:p>
@@ -12814,7 +13392,7 @@
                 <a:ea typeface="Pretendard" pitchFamily="34" charset="-122"/>
                 <a:cs typeface="Pretendard" pitchFamily="34" charset="-120"/>
               </a:rPr>
-              <a:t>영상은 ‘일부’ 기능만 필요하다</a:t>
+              <a:t>얼마나 걸리나</a:t>
             </a:r>
             <a:endParaRPr lang="en-US" sz="2600" dirty="0"/>
           </a:p>
@@ -12853,7 +13431,7 @@
                 <a:ea typeface="Pretendard" pitchFamily="34" charset="-122"/>
                 <a:cs typeface="Pretendard" pitchFamily="34" charset="-120"/>
               </a:rPr>
-              <a:t>이미 문서화된 기능엔 불필요. 로그인 뒤 화면 흐름인 기능만 영상이 도움이 됩니다.</a:t>
+              <a:t>문서 구조만이면 약 1주, 작동 방식을 영상으로 채우면 약 2주. (추정치)</a:t>
             </a:r>
             <a:endParaRPr lang="en-US" sz="1500" dirty="0"/>
           </a:p>
@@ -12945,12 +13523,12 @@
         </p:nvSpPr>
         <p:spPr>
           <a:xfrm>
-            <a:off x="777240" y="2450592"/>
-            <a:ext cx="5120640" cy="1965960"/>
+            <a:off x="777240" y="2487168"/>
+            <a:ext cx="5120640" cy="2788920"/>
           </a:xfrm>
           <a:prstGeom prst="roundRect">
             <a:avLst>
-              <a:gd name="adj" fmla="val 6512"/>
+              <a:gd name="adj" fmla="val 4590"/>
             </a:avLst>
           </a:prstGeom>
           <a:solidFill>
@@ -12972,8 +13550,8 @@
         </p:nvSpPr>
         <p:spPr>
           <a:xfrm>
-            <a:off x="1069848" y="2670048"/>
-            <a:ext cx="4572000" cy="274320"/>
+            <a:off x="1088136" y="2743200"/>
+            <a:ext cx="4498848" cy="320040"/>
           </a:xfrm>
           <a:prstGeom prst="rect">
             <a:avLst/>
@@ -12992,17 +13570,17 @@
               <a:buNone/>
             </a:pPr>
             <a:r>
-              <a:rPr lang="en-US" sz="1500" dirty="0">
-                <a:solidFill>
-                  <a:srgbClr val="6E6E73"/>
+              <a:rPr lang="en-US" sz="1600" dirty="0">
+                <a:solidFill>
+                  <a:srgbClr val="1D1D1F"/>
                 </a:solidFill>
                 <a:latin typeface="Pretendard SemiBold" pitchFamily="34" charset="0"/>
                 <a:ea typeface="Pretendard SemiBold" pitchFamily="34" charset="-122"/>
                 <a:cs typeface="Pretendard SemiBold" pitchFamily="34" charset="-120"/>
               </a:rPr>
-              <a:t>영상 불필요</a:t>
-            </a:r>
-            <a:endParaRPr lang="en-US" sz="1500" dirty="0"/>
+              <a:t>문서 구조 구축</a:t>
+            </a:r>
+            <a:endParaRPr lang="en-US" sz="1600" dirty="0"/>
           </a:p>
         </p:txBody>
       </p:sp>
@@ -13014,8 +13592,8 @@
         </p:nvSpPr>
         <p:spPr>
           <a:xfrm>
-            <a:off x="1069848" y="3090672"/>
-            <a:ext cx="4572000" cy="274320"/>
+            <a:off x="1088136" y="3264408"/>
+            <a:ext cx="3291840" cy="320040"/>
           </a:xfrm>
           <a:prstGeom prst="rect">
             <a:avLst/>
@@ -13034,49 +13612,7 @@
               <a:buNone/>
             </a:pPr>
             <a:r>
-              <a:rPr lang="en-US" sz="1250" dirty="0">
-                <a:solidFill>
-                  <a:srgbClr val="1D1D1F"/>
-                </a:solidFill>
-                <a:latin typeface="Pretendard SemiBold" pitchFamily="34" charset="0"/>
-                <a:ea typeface="Pretendard SemiBold" pitchFamily="34" charset="-122"/>
-                <a:cs typeface="Pretendard SemiBold" pitchFamily="34" charset="-120"/>
-              </a:rPr>
-              <a:t>이미 텍스트로 정리된 ● 기능</a:t>
-            </a:r>
-            <a:endParaRPr lang="en-US" sz="1250" dirty="0"/>
-          </a:p>
-        </p:txBody>
-      </p:sp>
-      <p:sp>
-        <p:nvSpPr>
-          <p:cNvPr id="11" name="Text 9"/>
-          <p:cNvSpPr/>
-          <p:nvPr/>
-        </p:nvSpPr>
-        <p:spPr>
-          <a:xfrm>
-            <a:off x="1069848" y="3419856"/>
-            <a:ext cx="4535424" cy="822960"/>
-          </a:xfrm>
-          <a:prstGeom prst="rect">
-            <a:avLst/>
-          </a:prstGeom>
-          <a:noFill/>
-          <a:ln/>
-        </p:spPr>
-        <p:txBody>
-          <a:bodyPr wrap="square" lIns="0" tIns="0" rIns="0" bIns="0" rtlCol="0" anchor="t"/>
-          <a:lstStyle/>
-          <a:p>
-            <a:pPr algn="l" indent="0" marL="0">
-              <a:lnSpc>
-                <a:spcPct val="140000"/>
-              </a:lnSpc>
-              <a:buNone/>
-            </a:pPr>
-            <a:r>
-              <a:rPr lang="en-US" sz="1200" dirty="0">
+              <a:rPr lang="en-US" sz="1300" dirty="0">
                 <a:solidFill>
                   <a:srgbClr val="55555A"/>
                 </a:solidFill>
@@ -13084,7 +13620,366 @@
                 <a:ea typeface="Pretendard" pitchFamily="34" charset="-122"/>
                 <a:cs typeface="Pretendard" pitchFamily="34" charset="-120"/>
               </a:rPr>
-              <a:t>카드 15종 · 카드 자동화 · URL 게시 · 이미지 라이브러리 — 스킬·문서가 이미 있어 화면 녹화가 새로 알려줄 게 없습니다.</a:t>
+              <a:t>첫 볼트 경로 문서</a:t>
+            </a:r>
+            <a:endParaRPr lang="en-US" sz="1300" dirty="0"/>
+          </a:p>
+        </p:txBody>
+      </p:sp>
+      <p:sp>
+        <p:nvSpPr>
+          <p:cNvPr id="11" name="Text 9"/>
+          <p:cNvSpPr/>
+          <p:nvPr/>
+        </p:nvSpPr>
+        <p:spPr>
+          <a:xfrm>
+            <a:off x="4343400" y="3264408"/>
+            <a:ext cx="1280160" cy="320040"/>
+          </a:xfrm>
+          <a:prstGeom prst="rect">
+            <a:avLst/>
+          </a:prstGeom>
+          <a:noFill/>
+          <a:ln/>
+        </p:spPr>
+        <p:txBody>
+          <a:bodyPr wrap="square" lIns="0" tIns="0" rIns="0" bIns="0" rtlCol="0" anchor="t"/>
+          <a:lstStyle/>
+          <a:p>
+            <a:pPr algn="r" indent="0" marL="0">
+              <a:lnSpc>
+                <a:spcPct val="130000"/>
+              </a:lnSpc>
+              <a:buNone/>
+            </a:pPr>
+            <a:r>
+              <a:rPr lang="en-US" sz="1300" dirty="0">
+                <a:solidFill>
+                  <a:srgbClr val="1D1D1F"/>
+                </a:solidFill>
+                <a:latin typeface="Pretendard Medium" pitchFamily="34" charset="0"/>
+                <a:ea typeface="Pretendard Medium" pitchFamily="34" charset="-122"/>
+                <a:cs typeface="Pretendard Medium" pitchFamily="34" charset="-120"/>
+              </a:rPr>
+              <a:t>0.5~1일</a:t>
+            </a:r>
+            <a:endParaRPr lang="en-US" sz="1300" dirty="0"/>
+          </a:p>
+        </p:txBody>
+      </p:sp>
+      <p:sp>
+        <p:nvSpPr>
+          <p:cNvPr id="12" name="Text 10"/>
+          <p:cNvSpPr/>
+          <p:nvPr/>
+        </p:nvSpPr>
+        <p:spPr>
+          <a:xfrm>
+            <a:off x="1088136" y="3666744"/>
+            <a:ext cx="3291840" cy="320040"/>
+          </a:xfrm>
+          <a:prstGeom prst="rect">
+            <a:avLst/>
+          </a:prstGeom>
+          <a:noFill/>
+          <a:ln/>
+        </p:spPr>
+        <p:txBody>
+          <a:bodyPr wrap="square" lIns="0" tIns="0" rIns="0" bIns="0" rtlCol="0" anchor="t"/>
+          <a:lstStyle/>
+          <a:p>
+            <a:pPr algn="l" indent="0" marL="0">
+              <a:lnSpc>
+                <a:spcPct val="130000"/>
+              </a:lnSpc>
+              <a:buNone/>
+            </a:pPr>
+            <a:r>
+              <a:rPr lang="en-US" sz="1300" dirty="0">
+                <a:solidFill>
+                  <a:srgbClr val="55555A"/>
+                </a:solidFill>
+                <a:latin typeface="Pretendard" pitchFamily="34" charset="0"/>
+                <a:ea typeface="Pretendard" pitchFamily="34" charset="-122"/>
+                <a:cs typeface="Pretendard" pitchFamily="34" charset="-120"/>
+              </a:rPr>
+              <a:t>나머지 4볼트 확산</a:t>
+            </a:r>
+            <a:endParaRPr lang="en-US" sz="1300" dirty="0"/>
+          </a:p>
+        </p:txBody>
+      </p:sp>
+      <p:sp>
+        <p:nvSpPr>
+          <p:cNvPr id="13" name="Text 11"/>
+          <p:cNvSpPr/>
+          <p:nvPr/>
+        </p:nvSpPr>
+        <p:spPr>
+          <a:xfrm>
+            <a:off x="4343400" y="3666744"/>
+            <a:ext cx="1280160" cy="320040"/>
+          </a:xfrm>
+          <a:prstGeom prst="rect">
+            <a:avLst/>
+          </a:prstGeom>
+          <a:noFill/>
+          <a:ln/>
+        </p:spPr>
+        <p:txBody>
+          <a:bodyPr wrap="square" lIns="0" tIns="0" rIns="0" bIns="0" rtlCol="0" anchor="t"/>
+          <a:lstStyle/>
+          <a:p>
+            <a:pPr algn="r" indent="0" marL="0">
+              <a:lnSpc>
+                <a:spcPct val="130000"/>
+              </a:lnSpc>
+              <a:buNone/>
+            </a:pPr>
+            <a:r>
+              <a:rPr lang="en-US" sz="1300" dirty="0">
+                <a:solidFill>
+                  <a:srgbClr val="1D1D1F"/>
+                </a:solidFill>
+                <a:latin typeface="Pretendard Medium" pitchFamily="34" charset="0"/>
+                <a:ea typeface="Pretendard Medium" pitchFamily="34" charset="-122"/>
+                <a:cs typeface="Pretendard Medium" pitchFamily="34" charset="-120"/>
+              </a:rPr>
+              <a:t>2~3일</a:t>
+            </a:r>
+            <a:endParaRPr lang="en-US" sz="1300" dirty="0"/>
+          </a:p>
+        </p:txBody>
+      </p:sp>
+      <p:sp>
+        <p:nvSpPr>
+          <p:cNvPr id="14" name="Text 12"/>
+          <p:cNvSpPr/>
+          <p:nvPr/>
+        </p:nvSpPr>
+        <p:spPr>
+          <a:xfrm>
+            <a:off x="1088136" y="4069080"/>
+            <a:ext cx="3291840" cy="320040"/>
+          </a:xfrm>
+          <a:prstGeom prst="rect">
+            <a:avLst/>
+          </a:prstGeom>
+          <a:noFill/>
+          <a:ln/>
+        </p:spPr>
+        <p:txBody>
+          <a:bodyPr wrap="square" lIns="0" tIns="0" rIns="0" bIns="0" rtlCol="0" anchor="t"/>
+          <a:lstStyle/>
+          <a:p>
+            <a:pPr algn="l" indent="0" marL="0">
+              <a:lnSpc>
+                <a:spcPct val="130000"/>
+              </a:lnSpc>
+              <a:buNone/>
+            </a:pPr>
+            <a:r>
+              <a:rPr lang="en-US" sz="1300" dirty="0">
+                <a:solidFill>
+                  <a:srgbClr val="55555A"/>
+                </a:solidFill>
+                <a:latin typeface="Pretendard" pitchFamily="34" charset="0"/>
+                <a:ea typeface="Pretendard" pitchFamily="34" charset="-122"/>
+                <a:cs typeface="Pretendard" pitchFamily="34" charset="-120"/>
+              </a:rPr>
+              <a:t>연결 · 검증</a:t>
+            </a:r>
+            <a:endParaRPr lang="en-US" sz="1300" dirty="0"/>
+          </a:p>
+        </p:txBody>
+      </p:sp>
+      <p:sp>
+        <p:nvSpPr>
+          <p:cNvPr id="15" name="Text 13"/>
+          <p:cNvSpPr/>
+          <p:nvPr/>
+        </p:nvSpPr>
+        <p:spPr>
+          <a:xfrm>
+            <a:off x="4343400" y="4069080"/>
+            <a:ext cx="1280160" cy="320040"/>
+          </a:xfrm>
+          <a:prstGeom prst="rect">
+            <a:avLst/>
+          </a:prstGeom>
+          <a:noFill/>
+          <a:ln/>
+        </p:spPr>
+        <p:txBody>
+          <a:bodyPr wrap="square" lIns="0" tIns="0" rIns="0" bIns="0" rtlCol="0" anchor="t"/>
+          <a:lstStyle/>
+          <a:p>
+            <a:pPr algn="r" indent="0" marL="0">
+              <a:lnSpc>
+                <a:spcPct val="130000"/>
+              </a:lnSpc>
+              <a:buNone/>
+            </a:pPr>
+            <a:r>
+              <a:rPr lang="en-US" sz="1300" dirty="0">
+                <a:solidFill>
+                  <a:srgbClr val="1D1D1F"/>
+                </a:solidFill>
+                <a:latin typeface="Pretendard Medium" pitchFamily="34" charset="0"/>
+                <a:ea typeface="Pretendard Medium" pitchFamily="34" charset="-122"/>
+                <a:cs typeface="Pretendard Medium" pitchFamily="34" charset="-120"/>
+              </a:rPr>
+              <a:t>0.5일</a:t>
+            </a:r>
+            <a:endParaRPr lang="en-US" sz="1300" dirty="0"/>
+          </a:p>
+        </p:txBody>
+      </p:sp>
+      <p:sp>
+        <p:nvSpPr>
+          <p:cNvPr id="16" name="Text 14"/>
+          <p:cNvSpPr/>
+          <p:nvPr/>
+        </p:nvSpPr>
+        <p:spPr>
+          <a:xfrm>
+            <a:off x="1088136" y="4471416"/>
+            <a:ext cx="3291840" cy="320040"/>
+          </a:xfrm>
+          <a:prstGeom prst="rect">
+            <a:avLst/>
+          </a:prstGeom>
+          <a:noFill/>
+          <a:ln/>
+        </p:spPr>
+        <p:txBody>
+          <a:bodyPr wrap="square" lIns="0" tIns="0" rIns="0" bIns="0" rtlCol="0" anchor="t"/>
+          <a:lstStyle/>
+          <a:p>
+            <a:pPr algn="l" indent="0" marL="0">
+              <a:lnSpc>
+                <a:spcPct val="130000"/>
+              </a:lnSpc>
+              <a:buNone/>
+            </a:pPr>
+            <a:r>
+              <a:rPr lang="en-US" sz="1300" dirty="0">
+                <a:solidFill>
+                  <a:srgbClr val="55555A"/>
+                </a:solidFill>
+                <a:latin typeface="Pretendard" pitchFamily="34" charset="0"/>
+                <a:ea typeface="Pretendard" pitchFamily="34" charset="-122"/>
+                <a:cs typeface="Pretendard" pitchFamily="34" charset="-120"/>
+              </a:rPr>
+              <a:t>플러그인 배포</a:t>
+            </a:r>
+            <a:endParaRPr lang="en-US" sz="1300" dirty="0"/>
+          </a:p>
+        </p:txBody>
+      </p:sp>
+      <p:sp>
+        <p:nvSpPr>
+          <p:cNvPr id="17" name="Text 15"/>
+          <p:cNvSpPr/>
+          <p:nvPr/>
+        </p:nvSpPr>
+        <p:spPr>
+          <a:xfrm>
+            <a:off x="4343400" y="4471416"/>
+            <a:ext cx="1280160" cy="320040"/>
+          </a:xfrm>
+          <a:prstGeom prst="rect">
+            <a:avLst/>
+          </a:prstGeom>
+          <a:noFill/>
+          <a:ln/>
+        </p:spPr>
+        <p:txBody>
+          <a:bodyPr wrap="square" lIns="0" tIns="0" rIns="0" bIns="0" rtlCol="0" anchor="t"/>
+          <a:lstStyle/>
+          <a:p>
+            <a:pPr algn="r" indent="0" marL="0">
+              <a:lnSpc>
+                <a:spcPct val="130000"/>
+              </a:lnSpc>
+              <a:buNone/>
+            </a:pPr>
+            <a:r>
+              <a:rPr lang="en-US" sz="1300" dirty="0">
+                <a:solidFill>
+                  <a:srgbClr val="1D1D1F"/>
+                </a:solidFill>
+                <a:latin typeface="Pretendard Medium" pitchFamily="34" charset="0"/>
+                <a:ea typeface="Pretendard Medium" pitchFamily="34" charset="-122"/>
+                <a:cs typeface="Pretendard Medium" pitchFamily="34" charset="-120"/>
+              </a:rPr>
+              <a:t>0.5~1일</a:t>
+            </a:r>
+            <a:endParaRPr lang="en-US" sz="1300" dirty="0"/>
+          </a:p>
+        </p:txBody>
+      </p:sp>
+      <p:sp>
+        <p:nvSpPr>
+          <p:cNvPr id="18" name="Shape 16"/>
+          <p:cNvSpPr/>
+          <p:nvPr/>
+        </p:nvSpPr>
+        <p:spPr>
+          <a:xfrm>
+            <a:off x="1088136" y="4818888"/>
+            <a:ext cx="4498848" cy="0"/>
+          </a:xfrm>
+          <a:prstGeom prst="line">
+            <a:avLst/>
+          </a:prstGeom>
+          <a:noFill/>
+          <a:ln w="9525">
+            <a:solidFill>
+              <a:srgbClr val="E5E7EB"/>
+            </a:solidFill>
+            <a:prstDash val="solid"/>
+          </a:ln>
+        </p:spPr>
+      </p:sp>
+      <p:sp>
+        <p:nvSpPr>
+          <p:cNvPr id="19" name="Text 17"/>
+          <p:cNvSpPr/>
+          <p:nvPr/>
+        </p:nvSpPr>
+        <p:spPr>
+          <a:xfrm>
+            <a:off x="1088136" y="4910328"/>
+            <a:ext cx="1828800" cy="274320"/>
+          </a:xfrm>
+          <a:prstGeom prst="rect">
+            <a:avLst/>
+          </a:prstGeom>
+          <a:noFill/>
+          <a:ln/>
+        </p:spPr>
+        <p:txBody>
+          <a:bodyPr wrap="square" lIns="0" tIns="0" rIns="0" bIns="0" rtlCol="0" anchor="t"/>
+          <a:lstStyle/>
+          <a:p>
+            <a:pPr algn="l" indent="0" marL="0">
+              <a:lnSpc>
+                <a:spcPct val="130000"/>
+              </a:lnSpc>
+              <a:buNone/>
+            </a:pPr>
+            <a:r>
+              <a:rPr lang="en-US" sz="1200" dirty="0">
+                <a:solidFill>
+                  <a:srgbClr val="6E6E73"/>
+                </a:solidFill>
+                <a:latin typeface="Pretendard Medium" pitchFamily="34" charset="0"/>
+                <a:ea typeface="Pretendard Medium" pitchFamily="34" charset="-122"/>
+                <a:cs typeface="Pretendard Medium" pitchFamily="34" charset="-120"/>
+              </a:rPr>
+              <a:t>합계</a:t>
             </a:r>
             <a:endParaRPr lang="en-US" sz="1200" dirty="0"/>
           </a:p>
@@ -13092,18 +13987,60 @@
       </p:sp>
       <p:sp>
         <p:nvSpPr>
-          <p:cNvPr id="12" name="Shape 10"/>
-          <p:cNvSpPr/>
-          <p:nvPr/>
-        </p:nvSpPr>
-        <p:spPr>
-          <a:xfrm>
-            <a:off x="6309360" y="2450592"/>
-            <a:ext cx="5120640" cy="1965960"/>
+          <p:cNvPr id="20" name="Text 18"/>
+          <p:cNvSpPr/>
+          <p:nvPr/>
+        </p:nvSpPr>
+        <p:spPr>
+          <a:xfrm>
+            <a:off x="3703320" y="4846320"/>
+            <a:ext cx="1920240" cy="365760"/>
+          </a:xfrm>
+          <a:prstGeom prst="rect">
+            <a:avLst/>
+          </a:prstGeom>
+          <a:noFill/>
+          <a:ln/>
+        </p:spPr>
+        <p:txBody>
+          <a:bodyPr wrap="square" lIns="0" tIns="0" rIns="0" bIns="0" rtlCol="0" anchor="t"/>
+          <a:lstStyle/>
+          <a:p>
+            <a:pPr algn="r" indent="0" marL="0">
+              <a:lnSpc>
+                <a:spcPct val="130000"/>
+              </a:lnSpc>
+              <a:buNone/>
+            </a:pPr>
+            <a:r>
+              <a:rPr lang="en-US" sz="2000" b="1" spc="-40" kern="0" dirty="0">
+                <a:solidFill>
+                  <a:srgbClr val="6C4CFF"/>
+                </a:solidFill>
+                <a:latin typeface="Pretendard" pitchFamily="34" charset="0"/>
+                <a:ea typeface="Pretendard" pitchFamily="34" charset="-122"/>
+                <a:cs typeface="Pretendard" pitchFamily="34" charset="-120"/>
+              </a:rPr>
+              <a:t>≈ 1주</a:t>
+            </a:r>
+            <a:endParaRPr lang="en-US" sz="2000" dirty="0"/>
+          </a:p>
+        </p:txBody>
+      </p:sp>
+      <p:sp>
+        <p:nvSpPr>
+          <p:cNvPr id="21" name="Shape 19"/>
+          <p:cNvSpPr/>
+          <p:nvPr/>
+        </p:nvSpPr>
+        <p:spPr>
+          <a:xfrm>
+            <a:off x="6309360" y="2487168"/>
+            <a:ext cx="5120640" cy="2788920"/>
           </a:xfrm>
           <a:prstGeom prst="roundRect">
             <a:avLst>
-              <a:gd name="adj" fmla="val 6512"/>
+              <a:gd name="adj" fmla="val 4590"/>
             </a:avLst>
           </a:prstGeom>
           <a:solidFill>
@@ -13119,14 +14056,14 @@
       </p:sp>
       <p:sp>
         <p:nvSpPr>
-          <p:cNvPr id="13" name="Text 11"/>
-          <p:cNvSpPr/>
-          <p:nvPr/>
-        </p:nvSpPr>
-        <p:spPr>
-          <a:xfrm>
-            <a:off x="6601968" y="2670048"/>
-            <a:ext cx="4572000" cy="274320"/>
+          <p:cNvPr id="22" name="Text 20"/>
+          <p:cNvSpPr/>
+          <p:nvPr/>
+        </p:nvSpPr>
+        <p:spPr>
+          <a:xfrm>
+            <a:off x="6620256" y="2743200"/>
+            <a:ext cx="4498848" cy="320040"/>
           </a:xfrm>
           <a:prstGeom prst="rect">
             <a:avLst/>
@@ -13145,7 +14082,7 @@
               <a:buNone/>
             </a:pPr>
             <a:r>
-              <a:rPr lang="en-US" sz="1500" b="1" dirty="0">
+              <a:rPr lang="en-US" sz="1600" b="1" dirty="0">
                 <a:solidFill>
                   <a:srgbClr val="6C4CFF"/>
                 </a:solidFill>
@@ -13153,22 +14090,22 @@
                 <a:ea typeface="Pretendard" pitchFamily="34" charset="-122"/>
                 <a:cs typeface="Pretendard" pitchFamily="34" charset="-120"/>
               </a:rPr>
-              <a:t>영상 필요</a:t>
-            </a:r>
-            <a:endParaRPr lang="en-US" sz="1500" dirty="0"/>
-          </a:p>
-        </p:txBody>
-      </p:sp>
-      <p:sp>
-        <p:nvSpPr>
-          <p:cNvPr id="14" name="Text 12"/>
-          <p:cNvSpPr/>
-          <p:nvPr/>
-        </p:nvSpPr>
-        <p:spPr>
-          <a:xfrm>
-            <a:off x="6601968" y="3090672"/>
-            <a:ext cx="4572000" cy="274320"/>
+              <a:t>영상까지 문서화</a:t>
+            </a:r>
+            <a:endParaRPr lang="en-US" sz="1600" dirty="0"/>
+          </a:p>
+        </p:txBody>
+      </p:sp>
+      <p:sp>
+        <p:nvSpPr>
+          <p:cNvPr id="23" name="Text 21"/>
+          <p:cNvSpPr/>
+          <p:nvPr/>
+        </p:nvSpPr>
+        <p:spPr>
+          <a:xfrm>
+            <a:off x="6620256" y="3264408"/>
+            <a:ext cx="3657600" cy="320040"/>
           </a:xfrm>
           <a:prstGeom prst="rect">
             <a:avLst/>
@@ -13188,48 +14125,6 @@
             </a:pPr>
             <a:r>
               <a:rPr lang="en-US" sz="1250" dirty="0">
-                <a:solidFill>
-                  <a:srgbClr val="1D1D1F"/>
-                </a:solidFill>
-                <a:latin typeface="Pretendard SemiBold" pitchFamily="34" charset="0"/>
-                <a:ea typeface="Pretendard SemiBold" pitchFamily="34" charset="-122"/>
-                <a:cs typeface="Pretendard SemiBold" pitchFamily="34" charset="-120"/>
-              </a:rPr>
-              <a:t>로그인 뒤에서만 보이는 ○ 공백 기능</a:t>
-            </a:r>
-            <a:endParaRPr lang="en-US" sz="1250" dirty="0"/>
-          </a:p>
-        </p:txBody>
-      </p:sp>
-      <p:sp>
-        <p:nvSpPr>
-          <p:cNvPr id="15" name="Text 13"/>
-          <p:cNvSpPr/>
-          <p:nvPr/>
-        </p:nvSpPr>
-        <p:spPr>
-          <a:xfrm>
-            <a:off x="6601968" y="3419856"/>
-            <a:ext cx="4535424" cy="822960"/>
-          </a:xfrm>
-          <a:prstGeom prst="rect">
-            <a:avLst/>
-          </a:prstGeom>
-          <a:noFill/>
-          <a:ln/>
-        </p:spPr>
-        <p:txBody>
-          <a:bodyPr wrap="square" lIns="0" tIns="0" rIns="0" bIns="0" rtlCol="0" anchor="t"/>
-          <a:lstStyle/>
-          <a:p>
-            <a:pPr algn="l" indent="0" marL="0">
-              <a:lnSpc>
-                <a:spcPct val="140000"/>
-              </a:lnSpc>
-              <a:buNone/>
-            </a:pPr>
-            <a:r>
-              <a:rPr lang="en-US" sz="1200" dirty="0">
                 <a:solidFill>
                   <a:srgbClr val="1D1D1F"/>
                 </a:solidFill>
@@ -13237,22 +14132,22 @@
                 <a:ea typeface="Pretendard" pitchFamily="34" charset="-122"/>
                 <a:cs typeface="Pretendard" pitchFamily="34" charset="-120"/>
               </a:rPr>
-              <a:t>통계 · 계정 · 요금 · 버전 · 공유 복제 · 데이터 연결 — UI 흐름이라 텍스트로 유추 불가, 화면이 정확한 문서화에 도움.</a:t>
-            </a:r>
-            <a:endParaRPr lang="en-US" sz="1200" dirty="0"/>
-          </a:p>
-        </p:txBody>
-      </p:sp>
-      <p:sp>
-        <p:nvSpPr>
-          <p:cNvPr id="16" name="Text 14"/>
-          <p:cNvSpPr/>
-          <p:nvPr/>
-        </p:nvSpPr>
-        <p:spPr>
-          <a:xfrm>
-            <a:off x="777240" y="4617720"/>
-            <a:ext cx="10637215" cy="274320"/>
+              <a:t>○ 공백 기능 12개 (통계·계정·요금)</a:t>
+            </a:r>
+            <a:endParaRPr lang="en-US" sz="1250" dirty="0"/>
+          </a:p>
+        </p:txBody>
+      </p:sp>
+      <p:sp>
+        <p:nvSpPr>
+          <p:cNvPr id="24" name="Text 22"/>
+          <p:cNvSpPr/>
+          <p:nvPr/>
+        </p:nvSpPr>
+        <p:spPr>
+          <a:xfrm>
+            <a:off x="6620256" y="3666744"/>
+            <a:ext cx="3657600" cy="320040"/>
           </a:xfrm>
           <a:prstGeom prst="rect">
             <a:avLst/>
@@ -13271,15 +14166,99 @@
               <a:buNone/>
             </a:pPr>
             <a:r>
+              <a:rPr lang="en-US" sz="1250" dirty="0">
+                <a:solidFill>
+                  <a:srgbClr val="1D1D1F"/>
+                </a:solidFill>
+                <a:latin typeface="Pretendard" pitchFamily="34" charset="0"/>
+                <a:ea typeface="Pretendard" pitchFamily="34" charset="-122"/>
+                <a:cs typeface="Pretendard" pitchFamily="34" charset="-120"/>
+              </a:rPr>
+              <a:t>◐ 부분 기능 9개 보강</a:t>
+            </a:r>
+            <a:endParaRPr lang="en-US" sz="1250" dirty="0"/>
+          </a:p>
+        </p:txBody>
+      </p:sp>
+      <p:sp>
+        <p:nvSpPr>
+          <p:cNvPr id="25" name="Text 23"/>
+          <p:cNvSpPr/>
+          <p:nvPr/>
+        </p:nvSpPr>
+        <p:spPr>
+          <a:xfrm>
+            <a:off x="6620256" y="4069080"/>
+            <a:ext cx="3657600" cy="320040"/>
+          </a:xfrm>
+          <a:prstGeom prst="rect">
+            <a:avLst/>
+          </a:prstGeom>
+          <a:noFill/>
+          <a:ln/>
+        </p:spPr>
+        <p:txBody>
+          <a:bodyPr wrap="square" lIns="0" tIns="0" rIns="0" bIns="0" rtlCol="0" anchor="t"/>
+          <a:lstStyle/>
+          <a:p>
+            <a:pPr algn="l" indent="0" marL="0">
+              <a:lnSpc>
+                <a:spcPct val="130000"/>
+              </a:lnSpc>
+              <a:buNone/>
+            </a:pPr>
+            <a:r>
+              <a:rPr lang="en-US" sz="1250" dirty="0">
+                <a:solidFill>
+                  <a:srgbClr val="1D1D1F"/>
+                </a:solidFill>
+                <a:latin typeface="Pretendard" pitchFamily="34" charset="0"/>
+                <a:ea typeface="Pretendard" pitchFamily="34" charset="-122"/>
+                <a:cs typeface="Pretendard" pitchFamily="34" charset="-120"/>
+              </a:rPr>
+              <a:t>영상 수령 → 프레임 추출·작성</a:t>
+            </a:r>
+            <a:endParaRPr lang="en-US" sz="1250" dirty="0"/>
+          </a:p>
+        </p:txBody>
+      </p:sp>
+      <p:sp>
+        <p:nvSpPr>
+          <p:cNvPr id="26" name="Text 24"/>
+          <p:cNvSpPr/>
+          <p:nvPr/>
+        </p:nvSpPr>
+        <p:spPr>
+          <a:xfrm>
+            <a:off x="10058400" y="4069080"/>
+            <a:ext cx="1097280" cy="320040"/>
+          </a:xfrm>
+          <a:prstGeom prst="rect">
+            <a:avLst/>
+          </a:prstGeom>
+          <a:noFill/>
+          <a:ln/>
+        </p:spPr>
+        <p:txBody>
+          <a:bodyPr wrap="square" lIns="0" tIns="0" rIns="0" bIns="0" rtlCol="0" anchor="t"/>
+          <a:lstStyle/>
+          <a:p>
+            <a:pPr algn="r" indent="0" marL="0">
+              <a:lnSpc>
+                <a:spcPct val="130000"/>
+              </a:lnSpc>
+              <a:buNone/>
+            </a:pPr>
+            <a:r>
               <a:rPr lang="en-US" sz="1300" dirty="0">
                 <a:solidFill>
-                  <a:srgbClr val="6C4CFF"/>
-                </a:solidFill>
-                <a:latin typeface="Pretendard SemiBold" pitchFamily="34" charset="0"/>
-                <a:ea typeface="Pretendard SemiBold" pitchFamily="34" charset="-122"/>
-                <a:cs typeface="Pretendard SemiBold" pitchFamily="34" charset="-120"/>
-              </a:rPr>
-              <a:t>원본 영상은 남겨야 하나? — 정본은 텍스트, 원본은 필요할 때만 클라우드에</a:t>
+                  <a:srgbClr val="1D1D1F"/>
+                </a:solidFill>
+                <a:latin typeface="Pretendard Medium" pitchFamily="34" charset="0"/>
+                <a:ea typeface="Pretendard Medium" pitchFamily="34" charset="-122"/>
+                <a:cs typeface="Pretendard Medium" pitchFamily="34" charset="-120"/>
+              </a:rPr>
+              <a:t>+3~5일</a:t>
             </a:r>
             <a:endParaRPr lang="en-US" sz="1300" dirty="0"/>
           </a:p>
@@ -13287,24 +14266,20 @@
       </p:sp>
       <p:sp>
         <p:nvSpPr>
-          <p:cNvPr id="17" name="Shape 15"/>
-          <p:cNvSpPr/>
-          <p:nvPr/>
-        </p:nvSpPr>
-        <p:spPr>
-          <a:xfrm>
-            <a:off x="777240" y="4956048"/>
-            <a:ext cx="3362858" cy="1051560"/>
-          </a:xfrm>
-          <a:prstGeom prst="roundRect">
-            <a:avLst>
-              <a:gd name="adj" fmla="val 8696"/>
-            </a:avLst>
-          </a:prstGeom>
-          <a:solidFill>
-            <a:srgbClr val="FFFFFF"/>
-          </a:solidFill>
-          <a:ln w="12700">
+          <p:cNvPr id="27" name="Shape 25"/>
+          <p:cNvSpPr/>
+          <p:nvPr/>
+        </p:nvSpPr>
+        <p:spPr>
+          <a:xfrm>
+            <a:off x="6620256" y="4818888"/>
+            <a:ext cx="4498848" cy="0"/>
+          </a:xfrm>
+          <a:prstGeom prst="line">
+            <a:avLst/>
+          </a:prstGeom>
+          <a:noFill/>
+          <a:ln w="9525">
             <a:solidFill>
               <a:srgbClr val="E5E7EB"/>
             </a:solidFill>
@@ -13314,14 +14289,14 @@
       </p:sp>
       <p:sp>
         <p:nvSpPr>
-          <p:cNvPr id="18" name="Text 16"/>
-          <p:cNvSpPr/>
-          <p:nvPr/>
-        </p:nvSpPr>
-        <p:spPr>
-          <a:xfrm>
-            <a:off x="996696" y="5102352"/>
-            <a:ext cx="2923946" cy="274320"/>
+          <p:cNvPr id="28" name="Text 26"/>
+          <p:cNvSpPr/>
+          <p:nvPr/>
+        </p:nvSpPr>
+        <p:spPr>
+          <a:xfrm>
+            <a:off x="6620256" y="4910328"/>
+            <a:ext cx="2743200" cy="274320"/>
           </a:xfrm>
           <a:prstGeom prst="rect">
             <a:avLst/>
@@ -13340,141 +14315,72 @@
               <a:buNone/>
             </a:pPr>
             <a:r>
-              <a:rPr lang="en-US" sz="1250" dirty="0">
+              <a:rPr lang="en-US" sz="1200" dirty="0">
+                <a:solidFill>
+                  <a:srgbClr val="6E6E73"/>
+                </a:solidFill>
+                <a:latin typeface="Pretendard Medium" pitchFamily="34" charset="0"/>
+                <a:ea typeface="Pretendard Medium" pitchFamily="34" charset="-122"/>
+                <a:cs typeface="Pretendard Medium" pitchFamily="34" charset="-120"/>
+              </a:rPr>
+              <a:t>문서 구조 + 영상</a:t>
+            </a:r>
+            <a:endParaRPr lang="en-US" sz="1200" dirty="0"/>
+          </a:p>
+        </p:txBody>
+      </p:sp>
+      <p:sp>
+        <p:nvSpPr>
+          <p:cNvPr id="29" name="Text 27"/>
+          <p:cNvSpPr/>
+          <p:nvPr/>
+        </p:nvSpPr>
+        <p:spPr>
+          <a:xfrm>
+            <a:off x="9235440" y="4846320"/>
+            <a:ext cx="1920240" cy="365760"/>
+          </a:xfrm>
+          <a:prstGeom prst="rect">
+            <a:avLst/>
+          </a:prstGeom>
+          <a:noFill/>
+          <a:ln/>
+        </p:spPr>
+        <p:txBody>
+          <a:bodyPr wrap="square" lIns="0" tIns="0" rIns="0" bIns="0" rtlCol="0" anchor="t"/>
+          <a:lstStyle/>
+          <a:p>
+            <a:pPr algn="r" indent="0" marL="0">
+              <a:lnSpc>
+                <a:spcPct val="130000"/>
+              </a:lnSpc>
+              <a:buNone/>
+            </a:pPr>
+            <a:r>
+              <a:rPr lang="en-US" sz="2000" b="1" spc="-40" kern="0" dirty="0">
                 <a:solidFill>
                   <a:srgbClr val="6C4CFF"/>
-                </a:solidFill>
-                <a:latin typeface="Pretendard SemiBold" pitchFamily="34" charset="0"/>
-                <a:ea typeface="Pretendard SemiBold" pitchFamily="34" charset="-122"/>
-                <a:cs typeface="Pretendard SemiBold" pitchFamily="34" charset="-120"/>
-              </a:rPr>
-              <a:t>정본 = 텍스트</a:t>
-            </a:r>
-            <a:endParaRPr lang="en-US" sz="1250" dirty="0"/>
-          </a:p>
-        </p:txBody>
-      </p:sp>
-      <p:sp>
-        <p:nvSpPr>
-          <p:cNvPr id="19" name="Text 17"/>
-          <p:cNvSpPr/>
-          <p:nvPr/>
-        </p:nvSpPr>
-        <p:spPr>
-          <a:xfrm>
-            <a:off x="996696" y="5394960"/>
-            <a:ext cx="2923946" cy="320040"/>
-          </a:xfrm>
-          <a:prstGeom prst="rect">
-            <a:avLst/>
-          </a:prstGeom>
-          <a:noFill/>
-          <a:ln/>
-        </p:spPr>
-        <p:txBody>
-          <a:bodyPr wrap="square" lIns="0" tIns="0" rIns="0" bIns="0" rtlCol="0" anchor="t"/>
-          <a:lstStyle/>
-          <a:p>
-            <a:pPr algn="l" indent="0" marL="0">
-              <a:lnSpc>
-                <a:spcPct val="120000"/>
-              </a:lnSpc>
-              <a:buNone/>
-            </a:pPr>
-            <a:r>
-              <a:rPr lang="en-US" sz="1100" dirty="0">
-                <a:solidFill>
-                  <a:srgbClr val="1D1D1F"/>
-                </a:solidFill>
-                <a:latin typeface="Pretendard SemiBold" pitchFamily="34" charset="0"/>
-                <a:ea typeface="Pretendard SemiBold" pitchFamily="34" charset="-122"/>
-                <a:cs typeface="Pretendard SemiBold" pitchFamily="34" charset="-120"/>
-              </a:rPr>
-              <a:t>‘영상에서 뽑은 문서’가 정본</a:t>
-            </a:r>
-            <a:endParaRPr lang="en-US" sz="1100" dirty="0"/>
-          </a:p>
-        </p:txBody>
-      </p:sp>
-      <p:sp>
-        <p:nvSpPr>
-          <p:cNvPr id="20" name="Text 18"/>
-          <p:cNvSpPr/>
-          <p:nvPr/>
-        </p:nvSpPr>
-        <p:spPr>
-          <a:xfrm>
-            <a:off x="996696" y="5669280"/>
-            <a:ext cx="2923946" cy="292608"/>
-          </a:xfrm>
-          <a:prstGeom prst="rect">
-            <a:avLst/>
-          </a:prstGeom>
-          <a:noFill/>
-          <a:ln/>
-        </p:spPr>
-        <p:txBody>
-          <a:bodyPr wrap="square" lIns="0" tIns="0" rIns="0" bIns="0" rtlCol="0" anchor="t"/>
-          <a:lstStyle/>
-          <a:p>
-            <a:pPr algn="l" indent="0" marL="0">
-              <a:lnSpc>
-                <a:spcPct val="120000"/>
-              </a:lnSpc>
-              <a:buNone/>
-            </a:pPr>
-            <a:r>
-              <a:rPr lang="en-US" sz="1000" dirty="0">
-                <a:solidFill>
-                  <a:srgbClr val="6E6E73"/>
                 </a:solidFill>
                 <a:latin typeface="Pretendard" pitchFamily="34" charset="0"/>
                 <a:ea typeface="Pretendard" pitchFamily="34" charset="-122"/>
                 <a:cs typeface="Pretendard" pitchFamily="34" charset="-120"/>
               </a:rPr>
-              <a:t>영상은 제작용 소스일 뿐 · 검색은 문서로</a:t>
-            </a:r>
-            <a:endParaRPr lang="en-US" sz="1000" dirty="0"/>
-          </a:p>
-        </p:txBody>
-      </p:sp>
-      <p:sp>
-        <p:nvSpPr>
-          <p:cNvPr id="21" name="Shape 19"/>
-          <p:cNvSpPr/>
-          <p:nvPr/>
-        </p:nvSpPr>
-        <p:spPr>
-          <a:xfrm>
-            <a:off x="4414418" y="4956048"/>
-            <a:ext cx="3362858" cy="1051560"/>
-          </a:xfrm>
-          <a:prstGeom prst="roundRect">
-            <a:avLst>
-              <a:gd name="adj" fmla="val 8696"/>
-            </a:avLst>
-          </a:prstGeom>
-          <a:solidFill>
-            <a:srgbClr val="FFFFFF"/>
-          </a:solidFill>
-          <a:ln w="12700">
-            <a:solidFill>
-              <a:srgbClr val="E5E7EB"/>
-            </a:solidFill>
-            <a:prstDash val="solid"/>
-          </a:ln>
-        </p:spPr>
-      </p:sp>
-      <p:sp>
-        <p:nvSpPr>
-          <p:cNvPr id="22" name="Text 20"/>
-          <p:cNvSpPr/>
-          <p:nvPr/>
-        </p:nvSpPr>
-        <p:spPr>
-          <a:xfrm>
-            <a:off x="4633874" y="5102352"/>
-            <a:ext cx="2923946" cy="274320"/>
+              <a:t>≈ 2주</a:t>
+            </a:r>
+            <a:endParaRPr lang="en-US" sz="2000" dirty="0"/>
+          </a:p>
+        </p:txBody>
+      </p:sp>
+      <p:sp>
+        <p:nvSpPr>
+          <p:cNvPr id="30" name="Text 28"/>
+          <p:cNvSpPr/>
+          <p:nvPr/>
+        </p:nvSpPr>
+        <p:spPr>
+          <a:xfrm>
+            <a:off x="777240" y="5532120"/>
+            <a:ext cx="10637215" cy="365760"/>
           </a:xfrm>
           <a:prstGeom prst="rect">
             <a:avLst/>
@@ -13493,254 +14399,17 @@
               <a:buNone/>
             </a:pPr>
             <a:r>
-              <a:rPr lang="en-US" sz="1250" dirty="0">
-                <a:solidFill>
-                  <a:srgbClr val="6C4CFF"/>
-                </a:solidFill>
-                <a:latin typeface="Pretendard SemiBold" pitchFamily="34" charset="0"/>
-                <a:ea typeface="Pretendard SemiBold" pitchFamily="34" charset="-122"/>
-                <a:cs typeface="Pretendard SemiBold" pitchFamily="34" charset="-120"/>
-              </a:rPr>
-              <a:t>원본 영상</a:t>
-            </a:r>
-            <a:endParaRPr lang="en-US" sz="1250" dirty="0"/>
-          </a:p>
-        </p:txBody>
-      </p:sp>
-      <p:sp>
-        <p:nvSpPr>
-          <p:cNvPr id="23" name="Text 21"/>
-          <p:cNvSpPr/>
-          <p:nvPr/>
-        </p:nvSpPr>
-        <p:spPr>
-          <a:xfrm>
-            <a:off x="4633874" y="5394960"/>
-            <a:ext cx="2923946" cy="320040"/>
-          </a:xfrm>
-          <a:prstGeom prst="rect">
-            <a:avLst/>
-          </a:prstGeom>
-          <a:noFill/>
-          <a:ln/>
-        </p:spPr>
-        <p:txBody>
-          <a:bodyPr wrap="square" lIns="0" tIns="0" rIns="0" bIns="0" rtlCol="0" anchor="t"/>
-          <a:lstStyle/>
-          <a:p>
-            <a:pPr algn="l" indent="0" marL="0">
-              <a:lnSpc>
-                <a:spcPct val="120000"/>
-              </a:lnSpc>
-              <a:buNone/>
-            </a:pPr>
-            <a:r>
-              <a:rPr lang="en-US" sz="1100" dirty="0">
-                <a:solidFill>
-                  <a:srgbClr val="1D1D1F"/>
-                </a:solidFill>
-                <a:latin typeface="Pretendard SemiBold" pitchFamily="34" charset="0"/>
-                <a:ea typeface="Pretendard SemiBold" pitchFamily="34" charset="-122"/>
-                <a:cs typeface="Pretendard SemiBold" pitchFamily="34" charset="-120"/>
-              </a:rPr>
-              <a:t>필요하면 git 밖 클라우드(구글 드라이브)</a:t>
-            </a:r>
-            <a:endParaRPr lang="en-US" sz="1100" dirty="0"/>
-          </a:p>
-        </p:txBody>
-      </p:sp>
-      <p:sp>
-        <p:nvSpPr>
-          <p:cNvPr id="24" name="Text 22"/>
-          <p:cNvSpPr/>
-          <p:nvPr/>
-        </p:nvSpPr>
-        <p:spPr>
-          <a:xfrm>
-            <a:off x="4633874" y="5669280"/>
-            <a:ext cx="2923946" cy="292608"/>
-          </a:xfrm>
-          <a:prstGeom prst="rect">
-            <a:avLst/>
-          </a:prstGeom>
-          <a:noFill/>
-          <a:ln/>
-        </p:spPr>
-        <p:txBody>
-          <a:bodyPr wrap="square" lIns="0" tIns="0" rIns="0" bIns="0" rtlCol="0" anchor="t"/>
-          <a:lstStyle/>
-          <a:p>
-            <a:pPr algn="l" indent="0" marL="0">
-              <a:lnSpc>
-                <a:spcPct val="120000"/>
-              </a:lnSpc>
-              <a:buNone/>
-            </a:pPr>
-            <a:r>
-              <a:rPr lang="en-US" sz="1000" dirty="0">
+              <a:rPr lang="en-US" sz="1150" dirty="0">
                 <a:solidFill>
                   <a:srgbClr val="6E6E73"/>
                 </a:solidFill>
-                <a:latin typeface="Pretendard" pitchFamily="34" charset="0"/>
-                <a:ea typeface="Pretendard" pitchFamily="34" charset="-122"/>
-                <a:cs typeface="Pretendard" pitchFamily="34" charset="-120"/>
-              </a:rPr>
-              <a:t>+ 문서에 링크 · 커밋 시 볼트 무거워짐(517MB 전례)</a:t>
-            </a:r>
-            <a:endParaRPr lang="en-US" sz="1000" dirty="0"/>
-          </a:p>
-        </p:txBody>
-      </p:sp>
-      <p:sp>
-        <p:nvSpPr>
-          <p:cNvPr id="25" name="Shape 23"/>
-          <p:cNvSpPr/>
-          <p:nvPr/>
-        </p:nvSpPr>
-        <p:spPr>
-          <a:xfrm>
-            <a:off x="8051597" y="4956048"/>
-            <a:ext cx="3362858" cy="1051560"/>
-          </a:xfrm>
-          <a:prstGeom prst="roundRect">
-            <a:avLst>
-              <a:gd name="adj" fmla="val 8696"/>
-            </a:avLst>
-          </a:prstGeom>
-          <a:solidFill>
-            <a:srgbClr val="FFFFFF"/>
-          </a:solidFill>
-          <a:ln w="12700">
-            <a:solidFill>
-              <a:srgbClr val="E5E7EB"/>
-            </a:solidFill>
-            <a:prstDash val="solid"/>
-          </a:ln>
-        </p:spPr>
-      </p:sp>
-      <p:sp>
-        <p:nvSpPr>
-          <p:cNvPr id="26" name="Text 24"/>
-          <p:cNvSpPr/>
-          <p:nvPr/>
-        </p:nvSpPr>
-        <p:spPr>
-          <a:xfrm>
-            <a:off x="8271053" y="5102352"/>
-            <a:ext cx="2923946" cy="274320"/>
-          </a:xfrm>
-          <a:prstGeom prst="rect">
-            <a:avLst/>
-          </a:prstGeom>
-          <a:noFill/>
-          <a:ln/>
-        </p:spPr>
-        <p:txBody>
-          <a:bodyPr wrap="square" lIns="0" tIns="0" rIns="0" bIns="0" rtlCol="0" anchor="t"/>
-          <a:lstStyle/>
-          <a:p>
-            <a:pPr algn="l" indent="0" marL="0">
-              <a:lnSpc>
-                <a:spcPct val="130000"/>
-              </a:lnSpc>
-              <a:buNone/>
-            </a:pPr>
-            <a:r>
-              <a:rPr lang="en-US" sz="1250" dirty="0">
-                <a:solidFill>
-                  <a:srgbClr val="6C4CFF"/>
-                </a:solidFill>
-                <a:latin typeface="Pretendard SemiBold" pitchFamily="34" charset="0"/>
-                <a:ea typeface="Pretendard SemiBold" pitchFamily="34" charset="-122"/>
-                <a:cs typeface="Pretendard SemiBold" pitchFamily="34" charset="-120"/>
-              </a:rPr>
-              <a:t>핵심 프레임</a:t>
-            </a:r>
-            <a:endParaRPr lang="en-US" sz="1250" dirty="0"/>
-          </a:p>
-        </p:txBody>
-      </p:sp>
-      <p:sp>
-        <p:nvSpPr>
-          <p:cNvPr id="27" name="Text 25"/>
-          <p:cNvSpPr/>
-          <p:nvPr/>
-        </p:nvSpPr>
-        <p:spPr>
-          <a:xfrm>
-            <a:off x="8271053" y="5394960"/>
-            <a:ext cx="2923946" cy="320040"/>
-          </a:xfrm>
-          <a:prstGeom prst="rect">
-            <a:avLst/>
-          </a:prstGeom>
-          <a:noFill/>
-          <a:ln/>
-        </p:spPr>
-        <p:txBody>
-          <a:bodyPr wrap="square" lIns="0" tIns="0" rIns="0" bIns="0" rtlCol="0" anchor="t"/>
-          <a:lstStyle/>
-          <a:p>
-            <a:pPr algn="l" indent="0" marL="0">
-              <a:lnSpc>
-                <a:spcPct val="120000"/>
-              </a:lnSpc>
-              <a:buNone/>
-            </a:pPr>
-            <a:r>
-              <a:rPr lang="en-US" sz="1100" dirty="0">
-                <a:solidFill>
-                  <a:srgbClr val="1D1D1F"/>
-                </a:solidFill>
-                <a:latin typeface="Pretendard SemiBold" pitchFamily="34" charset="0"/>
-                <a:ea typeface="Pretendard SemiBold" pitchFamily="34" charset="-122"/>
-                <a:cs typeface="Pretendard SemiBold" pitchFamily="34" charset="-120"/>
-              </a:rPr>
-              <a:t>정지컷 몇 장만 볼트 attachments/ 에</a:t>
-            </a:r>
-            <a:endParaRPr lang="en-US" sz="1100" dirty="0"/>
-          </a:p>
-        </p:txBody>
-      </p:sp>
-      <p:sp>
-        <p:nvSpPr>
-          <p:cNvPr id="28" name="Text 26"/>
-          <p:cNvSpPr/>
-          <p:nvPr/>
-        </p:nvSpPr>
-        <p:spPr>
-          <a:xfrm>
-            <a:off x="8271053" y="5669280"/>
-            <a:ext cx="2923946" cy="292608"/>
-          </a:xfrm>
-          <a:prstGeom prst="rect">
-            <a:avLst/>
-          </a:prstGeom>
-          <a:noFill/>
-          <a:ln/>
-        </p:spPr>
-        <p:txBody>
-          <a:bodyPr wrap="square" lIns="0" tIns="0" rIns="0" bIns="0" rtlCol="0" anchor="t"/>
-          <a:lstStyle/>
-          <a:p>
-            <a:pPr algn="l" indent="0" marL="0">
-              <a:lnSpc>
-                <a:spcPct val="120000"/>
-              </a:lnSpc>
-              <a:buNone/>
-            </a:pPr>
-            <a:r>
-              <a:rPr lang="en-US" sz="1000" dirty="0">
-                <a:solidFill>
-                  <a:srgbClr val="6E6E73"/>
-                </a:solidFill>
-                <a:latin typeface="Pretendard" pitchFamily="34" charset="0"/>
-                <a:ea typeface="Pretendard" pitchFamily="34" charset="-122"/>
-                <a:cs typeface="Pretendard" pitchFamily="34" charset="-120"/>
-              </a:rPr>
-              <a:t>문서에서 ![[…]] 로 바로 보이게</a:t>
-            </a:r>
-            <a:endParaRPr lang="en-US" sz="1000" dirty="0"/>
+                <a:latin typeface="Pretendard Medium" pitchFamily="34" charset="0"/>
+                <a:ea typeface="Pretendard Medium" pitchFamily="34" charset="-122"/>
+                <a:cs typeface="Pretendard Medium" pitchFamily="34" charset="-120"/>
+              </a:rPr>
+              <a:t>※ 숫자는 추정치(예시)입니다. 다음 장에서 ‘어떤 기능에 영상이 필요한가’를 봅니다.</a:t>
+            </a:r>
+            <a:endParaRPr lang="en-US" sz="1150" dirty="0"/>
           </a:p>
         </p:txBody>
       </p:sp>
@@ -13755,6 +14424,1082 @@
 <file path=ppt/slides/slide17.xml><?xml version="1.0" encoding="utf-8"?>
 <p:sld xmlns:a="http://schemas.openxmlformats.org/drawingml/2006/main" xmlns:r="http://schemas.openxmlformats.org/officeDocument/2006/relationships" xmlns:p="http://schemas.openxmlformats.org/presentationml/2006/main">
   <p:cSld name="Slide 17">
+    <p:bg>
+      <p:bgPr>
+        <a:solidFill>
+          <a:srgbClr val="FFFFFF"/>
+        </a:solidFill>
+      </p:bgPr>
+    </p:bg>
+    <p:spTree>
+      <p:nvGrpSpPr>
+        <p:cNvPr id="1" name=""/>
+        <p:cNvGrpSpPr/>
+        <p:nvPr/>
+      </p:nvGrpSpPr>
+      <p:grpSpPr>
+        <a:xfrm>
+          <a:off x="0" y="0"/>
+          <a:ext cx="0" cy="0"/>
+          <a:chOff x="0" y="0"/>
+          <a:chExt cx="0" cy="0"/>
+        </a:xfrm>
+      </p:grpSpPr>
+      <p:sp>
+        <p:nvSpPr>
+          <p:cNvPr id="2" name="Text 0"/>
+          <p:cNvSpPr/>
+          <p:nvPr/>
+        </p:nvSpPr>
+        <p:spPr>
+          <a:xfrm>
+            <a:off x="777240" y="566928"/>
+            <a:ext cx="5486400" cy="256032"/>
+          </a:xfrm>
+          <a:prstGeom prst="rect">
+            <a:avLst/>
+          </a:prstGeom>
+          <a:noFill/>
+          <a:ln/>
+        </p:spPr>
+        <p:txBody>
+          <a:bodyPr wrap="square" lIns="0" tIns="0" rIns="0" bIns="0" rtlCol="0" anchor="b"/>
+          <a:lstStyle/>
+          <a:p>
+            <a:pPr indent="0" marL="0">
+              <a:buNone/>
+            </a:pPr>
+            <a:r>
+              <a:rPr lang="en-US" sz="1200" dirty="0">
+                <a:solidFill>
+                  <a:srgbClr val="6C4CFF"/>
+                </a:solidFill>
+                <a:latin typeface="Pretendard SemiBold" pitchFamily="34" charset="0"/>
+                <a:ea typeface="Pretendard SemiBold" pitchFamily="34" charset="-122"/>
+                <a:cs typeface="Pretendard SemiBold" pitchFamily="34" charset="-120"/>
+              </a:rPr>
+              <a:t>④ 영상</a:t>
+            </a:r>
+            <a:endParaRPr lang="en-US" sz="1200" dirty="0"/>
+          </a:p>
+        </p:txBody>
+      </p:sp>
+      <p:sp>
+        <p:nvSpPr>
+          <p:cNvPr id="3" name="Text 1"/>
+          <p:cNvSpPr/>
+          <p:nvPr/>
+        </p:nvSpPr>
+        <p:spPr>
+          <a:xfrm>
+            <a:off x="6842455" y="566928"/>
+            <a:ext cx="4572000" cy="256032"/>
+          </a:xfrm>
+          <a:prstGeom prst="rect">
+            <a:avLst/>
+          </a:prstGeom>
+          <a:noFill/>
+          <a:ln/>
+        </p:spPr>
+        <p:txBody>
+          <a:bodyPr wrap="square" lIns="0" tIns="0" rIns="0" bIns="0" rtlCol="0" anchor="b"/>
+          <a:lstStyle/>
+          <a:p>
+            <a:pPr algn="r" indent="0" marL="0">
+              <a:buNone/>
+            </a:pPr>
+            <a:r>
+              <a:rPr lang="en-US" sz="1200" dirty="0">
+                <a:solidFill>
+                  <a:srgbClr val="9AA0A6"/>
+                </a:solidFill>
+                <a:latin typeface="Pretendard Medium" pitchFamily="34" charset="0"/>
+                <a:ea typeface="Pretendard Medium" pitchFamily="34" charset="-122"/>
+                <a:cs typeface="Pretendard Medium" pitchFamily="34" charset="-120"/>
+              </a:rPr>
+              <a:t>04  제작·일정</a:t>
+            </a:r>
+            <a:endParaRPr lang="en-US" sz="1200" dirty="0"/>
+          </a:p>
+        </p:txBody>
+      </p:sp>
+      <p:sp>
+        <p:nvSpPr>
+          <p:cNvPr id="4" name="Text 2"/>
+          <p:cNvSpPr/>
+          <p:nvPr/>
+        </p:nvSpPr>
+        <p:spPr>
+          <a:xfrm>
+            <a:off x="777240" y="896112"/>
+            <a:ext cx="10058400" cy="502920"/>
+          </a:xfrm>
+          <a:prstGeom prst="rect">
+            <a:avLst/>
+          </a:prstGeom>
+          <a:noFill/>
+          <a:ln/>
+        </p:spPr>
+        <p:txBody>
+          <a:bodyPr wrap="square" lIns="0" tIns="0" rIns="0" bIns="0" rtlCol="0" anchor="t"/>
+          <a:lstStyle/>
+          <a:p>
+            <a:pPr indent="0" marL="0">
+              <a:lnSpc>
+                <a:spcPct val="114000"/>
+              </a:lnSpc>
+              <a:buNone/>
+            </a:pPr>
+            <a:r>
+              <a:rPr lang="en-US" sz="2600" b="1" spc="-40" kern="0" dirty="0">
+                <a:solidFill>
+                  <a:srgbClr val="1D1D1F"/>
+                </a:solidFill>
+                <a:latin typeface="Pretendard" pitchFamily="34" charset="0"/>
+                <a:ea typeface="Pretendard" pitchFamily="34" charset="-122"/>
+                <a:cs typeface="Pretendard" pitchFamily="34" charset="-120"/>
+              </a:rPr>
+              <a:t>영상은 ‘작동 방식’을 채운다</a:t>
+            </a:r>
+            <a:endParaRPr lang="en-US" sz="2600" dirty="0"/>
+          </a:p>
+        </p:txBody>
+      </p:sp>
+      <p:sp>
+        <p:nvSpPr>
+          <p:cNvPr id="5" name="Text 3"/>
+          <p:cNvSpPr/>
+          <p:nvPr/>
+        </p:nvSpPr>
+        <p:spPr>
+          <a:xfrm>
+            <a:off x="777240" y="1463040"/>
+            <a:ext cx="10058400" cy="320040"/>
+          </a:xfrm>
+          <a:prstGeom prst="rect">
+            <a:avLst/>
+          </a:prstGeom>
+          <a:noFill/>
+          <a:ln/>
+        </p:spPr>
+        <p:txBody>
+          <a:bodyPr wrap="square" lIns="0" tIns="0" rIns="0" bIns="0" rtlCol="0" anchor="t"/>
+          <a:lstStyle/>
+          <a:p>
+            <a:pPr indent="0" marL="0">
+              <a:buNone/>
+            </a:pPr>
+            <a:r>
+              <a:rPr lang="en-US" sz="1500" dirty="0">
+                <a:solidFill>
+                  <a:srgbClr val="6E6E73"/>
+                </a:solidFill>
+                <a:latin typeface="Pretendard" pitchFamily="34" charset="0"/>
+                <a:ea typeface="Pretendard" pitchFamily="34" charset="-122"/>
+                <a:cs typeface="Pretendard" pitchFamily="34" charset="-120"/>
+              </a:rPr>
+              <a:t>생김새(화면 스펙)는 design-system에 있습니다. 영상은 ‘어떻게 작동하나’를 채웁니다.</a:t>
+            </a:r>
+            <a:endParaRPr lang="en-US" sz="1500" dirty="0"/>
+          </a:p>
+        </p:txBody>
+      </p:sp>
+      <p:sp>
+        <p:nvSpPr>
+          <p:cNvPr id="6" name="Text 4"/>
+          <p:cNvSpPr/>
+          <p:nvPr/>
+        </p:nvSpPr>
+        <p:spPr>
+          <a:xfrm>
+            <a:off x="777240" y="6382512"/>
+            <a:ext cx="5486400" cy="256032"/>
+          </a:xfrm>
+          <a:prstGeom prst="rect">
+            <a:avLst/>
+          </a:prstGeom>
+          <a:noFill/>
+          <a:ln/>
+        </p:spPr>
+        <p:txBody>
+          <a:bodyPr wrap="square" lIns="0" tIns="0" rIns="0" bIns="0" rtlCol="0" anchor="ctr"/>
+          <a:lstStyle/>
+          <a:p>
+            <a:pPr indent="0" marL="0">
+              <a:buNone/>
+            </a:pPr>
+            <a:r>
+              <a:rPr lang="en-US" sz="950" spc="50" kern="0" dirty="0">
+                <a:solidFill>
+                  <a:srgbClr val="9AA0A6"/>
+                </a:solidFill>
+                <a:latin typeface="Pretendard Medium" pitchFamily="34" charset="0"/>
+                <a:ea typeface="Pretendard Medium" pitchFamily="34" charset="-122"/>
+                <a:cs typeface="Pretendard Medium" pitchFamily="34" charset="-120"/>
+              </a:rPr>
+              <a:t>CDBD  ·  HOME.CDBD.IN</a:t>
+            </a:r>
+            <a:endParaRPr lang="en-US" sz="950" dirty="0"/>
+          </a:p>
+        </p:txBody>
+      </p:sp>
+      <p:sp>
+        <p:nvSpPr>
+          <p:cNvPr id="7" name="Text 5"/>
+          <p:cNvSpPr/>
+          <p:nvPr/>
+        </p:nvSpPr>
+        <p:spPr>
+          <a:xfrm>
+            <a:off x="10500055" y="6382512"/>
+            <a:ext cx="914400" cy="256032"/>
+          </a:xfrm>
+          <a:prstGeom prst="rect">
+            <a:avLst/>
+          </a:prstGeom>
+          <a:noFill/>
+          <a:ln/>
+        </p:spPr>
+        <p:txBody>
+          <a:bodyPr wrap="square" lIns="0" tIns="0" rIns="0" bIns="0" rtlCol="0" anchor="ctr"/>
+          <a:lstStyle/>
+          <a:p>
+            <a:pPr algn="r" indent="0" marL="0">
+              <a:buNone/>
+            </a:pPr>
+            <a:r>
+              <a:rPr lang="en-US" sz="1000" dirty="0">
+                <a:solidFill>
+                  <a:srgbClr val="9AA0A6"/>
+                </a:solidFill>
+                <a:latin typeface="Pretendard Medium" pitchFamily="34" charset="0"/>
+                <a:ea typeface="Pretendard Medium" pitchFamily="34" charset="-122"/>
+                <a:cs typeface="Pretendard Medium" pitchFamily="34" charset="-120"/>
+              </a:rPr>
+              <a:t>16</a:t>
+            </a:r>
+            <a:endParaRPr lang="en-US" sz="1000" dirty="0"/>
+          </a:p>
+        </p:txBody>
+      </p:sp>
+      <p:sp>
+        <p:nvSpPr>
+          <p:cNvPr id="8" name="Shape 6"/>
+          <p:cNvSpPr/>
+          <p:nvPr/>
+        </p:nvSpPr>
+        <p:spPr>
+          <a:xfrm>
+            <a:off x="777240" y="2450592"/>
+            <a:ext cx="5120640" cy="1965960"/>
+          </a:xfrm>
+          <a:prstGeom prst="roundRect">
+            <a:avLst>
+              <a:gd name="adj" fmla="val 6512"/>
+            </a:avLst>
+          </a:prstGeom>
+          <a:solidFill>
+            <a:srgbClr val="FFFFFF"/>
+          </a:solidFill>
+          <a:ln w="12700">
+            <a:solidFill>
+              <a:srgbClr val="E5E7EB"/>
+            </a:solidFill>
+            <a:prstDash val="solid"/>
+          </a:ln>
+        </p:spPr>
+      </p:sp>
+      <p:sp>
+        <p:nvSpPr>
+          <p:cNvPr id="9" name="Text 7"/>
+          <p:cNvSpPr/>
+          <p:nvPr/>
+        </p:nvSpPr>
+        <p:spPr>
+          <a:xfrm>
+            <a:off x="1069848" y="2670048"/>
+            <a:ext cx="4572000" cy="274320"/>
+          </a:xfrm>
+          <a:prstGeom prst="rect">
+            <a:avLst/>
+          </a:prstGeom>
+          <a:noFill/>
+          <a:ln/>
+        </p:spPr>
+        <p:txBody>
+          <a:bodyPr wrap="square" lIns="0" tIns="0" rIns="0" bIns="0" rtlCol="0" anchor="t"/>
+          <a:lstStyle/>
+          <a:p>
+            <a:pPr algn="l" indent="0" marL="0">
+              <a:lnSpc>
+                <a:spcPct val="130000"/>
+              </a:lnSpc>
+              <a:buNone/>
+            </a:pPr>
+            <a:r>
+              <a:rPr lang="en-US" sz="1500" dirty="0">
+                <a:solidFill>
+                  <a:srgbClr val="6E6E73"/>
+                </a:solidFill>
+                <a:latin typeface="Pretendard SemiBold" pitchFamily="34" charset="0"/>
+                <a:ea typeface="Pretendard SemiBold" pitchFamily="34" charset="-122"/>
+                <a:cs typeface="Pretendard SemiBold" pitchFamily="34" charset="-120"/>
+              </a:rPr>
+              <a:t>영상 불필요</a:t>
+            </a:r>
+            <a:endParaRPr lang="en-US" sz="1500" dirty="0"/>
+          </a:p>
+        </p:txBody>
+      </p:sp>
+      <p:sp>
+        <p:nvSpPr>
+          <p:cNvPr id="10" name="Text 8"/>
+          <p:cNvSpPr/>
+          <p:nvPr/>
+        </p:nvSpPr>
+        <p:spPr>
+          <a:xfrm>
+            <a:off x="1069848" y="3090672"/>
+            <a:ext cx="4572000" cy="274320"/>
+          </a:xfrm>
+          <a:prstGeom prst="rect">
+            <a:avLst/>
+          </a:prstGeom>
+          <a:noFill/>
+          <a:ln/>
+        </p:spPr>
+        <p:txBody>
+          <a:bodyPr wrap="square" lIns="0" tIns="0" rIns="0" bIns="0" rtlCol="0" anchor="t"/>
+          <a:lstStyle/>
+          <a:p>
+            <a:pPr algn="l" indent="0" marL="0">
+              <a:lnSpc>
+                <a:spcPct val="130000"/>
+              </a:lnSpc>
+              <a:buNone/>
+            </a:pPr>
+            <a:r>
+              <a:rPr lang="en-US" sz="1250" dirty="0">
+                <a:solidFill>
+                  <a:srgbClr val="1D1D1F"/>
+                </a:solidFill>
+                <a:latin typeface="Pretendard SemiBold" pitchFamily="34" charset="0"/>
+                <a:ea typeface="Pretendard SemiBold" pitchFamily="34" charset="-122"/>
+                <a:cs typeface="Pretendard SemiBold" pitchFamily="34" charset="-120"/>
+              </a:rPr>
+              <a:t>작동 방식까지 문서화된 기능 (●)</a:t>
+            </a:r>
+            <a:endParaRPr lang="en-US" sz="1250" dirty="0"/>
+          </a:p>
+        </p:txBody>
+      </p:sp>
+      <p:sp>
+        <p:nvSpPr>
+          <p:cNvPr id="11" name="Text 9"/>
+          <p:cNvSpPr/>
+          <p:nvPr/>
+        </p:nvSpPr>
+        <p:spPr>
+          <a:xfrm>
+            <a:off x="1069848" y="3419856"/>
+            <a:ext cx="4535424" cy="822960"/>
+          </a:xfrm>
+          <a:prstGeom prst="rect">
+            <a:avLst/>
+          </a:prstGeom>
+          <a:noFill/>
+          <a:ln/>
+        </p:spPr>
+        <p:txBody>
+          <a:bodyPr wrap="square" lIns="0" tIns="0" rIns="0" bIns="0" rtlCol="0" anchor="t"/>
+          <a:lstStyle/>
+          <a:p>
+            <a:pPr algn="l" indent="0" marL="0">
+              <a:lnSpc>
+                <a:spcPct val="140000"/>
+              </a:lnSpc>
+              <a:buNone/>
+            </a:pPr>
+            <a:r>
+              <a:rPr lang="en-US" sz="1200" dirty="0">
+                <a:solidFill>
+                  <a:srgbClr val="55555A"/>
+                </a:solidFill>
+                <a:latin typeface="Pretendard" pitchFamily="34" charset="0"/>
+                <a:ea typeface="Pretendard" pitchFamily="34" charset="-122"/>
+                <a:cs typeface="Pretendard" pitchFamily="34" charset="-120"/>
+              </a:rPr>
+              <a:t>카드 · 게시 · 이미지 등 에디터 기능 — 스킬·작업 문서에 작동 방식이 이미 있습니다.</a:t>
+            </a:r>
+            <a:endParaRPr lang="en-US" sz="1200" dirty="0"/>
+          </a:p>
+        </p:txBody>
+      </p:sp>
+      <p:sp>
+        <p:nvSpPr>
+          <p:cNvPr id="12" name="Shape 10"/>
+          <p:cNvSpPr/>
+          <p:nvPr/>
+        </p:nvSpPr>
+        <p:spPr>
+          <a:xfrm>
+            <a:off x="6309360" y="2450592"/>
+            <a:ext cx="5120640" cy="1965960"/>
+          </a:xfrm>
+          <a:prstGeom prst="roundRect">
+            <a:avLst>
+              <a:gd name="adj" fmla="val 6512"/>
+            </a:avLst>
+          </a:prstGeom>
+          <a:solidFill>
+            <a:srgbClr val="EEEAFB"/>
+          </a:solidFill>
+          <a:ln w="19050">
+            <a:solidFill>
+              <a:srgbClr val="6C4CFF"/>
+            </a:solidFill>
+            <a:prstDash val="solid"/>
+          </a:ln>
+        </p:spPr>
+      </p:sp>
+      <p:sp>
+        <p:nvSpPr>
+          <p:cNvPr id="13" name="Text 11"/>
+          <p:cNvSpPr/>
+          <p:nvPr/>
+        </p:nvSpPr>
+        <p:spPr>
+          <a:xfrm>
+            <a:off x="6601968" y="2670048"/>
+            <a:ext cx="4572000" cy="274320"/>
+          </a:xfrm>
+          <a:prstGeom prst="rect">
+            <a:avLst/>
+          </a:prstGeom>
+          <a:noFill/>
+          <a:ln/>
+        </p:spPr>
+        <p:txBody>
+          <a:bodyPr wrap="square" lIns="0" tIns="0" rIns="0" bIns="0" rtlCol="0" anchor="t"/>
+          <a:lstStyle/>
+          <a:p>
+            <a:pPr algn="l" indent="0" marL="0">
+              <a:lnSpc>
+                <a:spcPct val="130000"/>
+              </a:lnSpc>
+              <a:buNone/>
+            </a:pPr>
+            <a:r>
+              <a:rPr lang="en-US" sz="1500" b="1" dirty="0">
+                <a:solidFill>
+                  <a:srgbClr val="6C4CFF"/>
+                </a:solidFill>
+                <a:latin typeface="Pretendard" pitchFamily="34" charset="0"/>
+                <a:ea typeface="Pretendard" pitchFamily="34" charset="-122"/>
+                <a:cs typeface="Pretendard" pitchFamily="34" charset="-120"/>
+              </a:rPr>
+              <a:t>영상 필요</a:t>
+            </a:r>
+            <a:endParaRPr lang="en-US" sz="1500" dirty="0"/>
+          </a:p>
+        </p:txBody>
+      </p:sp>
+      <p:sp>
+        <p:nvSpPr>
+          <p:cNvPr id="14" name="Text 12"/>
+          <p:cNvSpPr/>
+          <p:nvPr/>
+        </p:nvSpPr>
+        <p:spPr>
+          <a:xfrm>
+            <a:off x="6601968" y="3090672"/>
+            <a:ext cx="4572000" cy="274320"/>
+          </a:xfrm>
+          <a:prstGeom prst="rect">
+            <a:avLst/>
+          </a:prstGeom>
+          <a:noFill/>
+          <a:ln/>
+        </p:spPr>
+        <p:txBody>
+          <a:bodyPr wrap="square" lIns="0" tIns="0" rIns="0" bIns="0" rtlCol="0" anchor="t"/>
+          <a:lstStyle/>
+          <a:p>
+            <a:pPr algn="l" indent="0" marL="0">
+              <a:lnSpc>
+                <a:spcPct val="130000"/>
+              </a:lnSpc>
+              <a:buNone/>
+            </a:pPr>
+            <a:r>
+              <a:rPr lang="en-US" sz="1250" dirty="0">
+                <a:solidFill>
+                  <a:srgbClr val="1D1D1F"/>
+                </a:solidFill>
+                <a:latin typeface="Pretendard SemiBold" pitchFamily="34" charset="0"/>
+                <a:ea typeface="Pretendard SemiBold" pitchFamily="34" charset="-122"/>
+                <a:cs typeface="Pretendard SemiBold" pitchFamily="34" charset="-120"/>
+              </a:rPr>
+              <a:t>스펙은 있으나 작동 방식이 없는 기능 (◐)</a:t>
+            </a:r>
+            <a:endParaRPr lang="en-US" sz="1250" dirty="0"/>
+          </a:p>
+        </p:txBody>
+      </p:sp>
+      <p:sp>
+        <p:nvSpPr>
+          <p:cNvPr id="15" name="Text 13"/>
+          <p:cNvSpPr/>
+          <p:nvPr/>
+        </p:nvSpPr>
+        <p:spPr>
+          <a:xfrm>
+            <a:off x="6601968" y="3419856"/>
+            <a:ext cx="4535424" cy="822960"/>
+          </a:xfrm>
+          <a:prstGeom prst="rect">
+            <a:avLst/>
+          </a:prstGeom>
+          <a:noFill/>
+          <a:ln/>
+        </p:spPr>
+        <p:txBody>
+          <a:bodyPr wrap="square" lIns="0" tIns="0" rIns="0" bIns="0" rtlCol="0" anchor="t"/>
+          <a:lstStyle/>
+          <a:p>
+            <a:pPr algn="l" indent="0" marL="0">
+              <a:lnSpc>
+                <a:spcPct val="140000"/>
+              </a:lnSpc>
+              <a:buNone/>
+            </a:pPr>
+            <a:r>
+              <a:rPr lang="en-US" sz="1200" dirty="0">
+                <a:solidFill>
+                  <a:srgbClr val="1D1D1F"/>
+                </a:solidFill>
+                <a:latin typeface="Pretendard" pitchFamily="34" charset="0"/>
+                <a:ea typeface="Pretendard" pitchFamily="34" charset="-122"/>
+                <a:cs typeface="Pretendard" pitchFamily="34" charset="-120"/>
+              </a:rPr>
+              <a:t>통계 · 계정 · 요금 · 버전 · 권한 등 대시보드 — design-system에 화면 스펙은 있지만 로그인 뒤 ‘어떻게 작동하나’가 없습니다.</a:t>
+            </a:r>
+            <a:endParaRPr lang="en-US" sz="1200" dirty="0"/>
+          </a:p>
+        </p:txBody>
+      </p:sp>
+      <p:sp>
+        <p:nvSpPr>
+          <p:cNvPr id="16" name="Text 14"/>
+          <p:cNvSpPr/>
+          <p:nvPr/>
+        </p:nvSpPr>
+        <p:spPr>
+          <a:xfrm>
+            <a:off x="777240" y="4617720"/>
+            <a:ext cx="10637215" cy="274320"/>
+          </a:xfrm>
+          <a:prstGeom prst="rect">
+            <a:avLst/>
+          </a:prstGeom>
+          <a:noFill/>
+          <a:ln/>
+        </p:spPr>
+        <p:txBody>
+          <a:bodyPr wrap="square" lIns="0" tIns="0" rIns="0" bIns="0" rtlCol="0" anchor="t"/>
+          <a:lstStyle/>
+          <a:p>
+            <a:pPr algn="l" indent="0" marL="0">
+              <a:lnSpc>
+                <a:spcPct val="130000"/>
+              </a:lnSpc>
+              <a:buNone/>
+            </a:pPr>
+            <a:r>
+              <a:rPr lang="en-US" sz="1300" dirty="0">
+                <a:solidFill>
+                  <a:srgbClr val="6C4CFF"/>
+                </a:solidFill>
+                <a:latin typeface="Pretendard SemiBold" pitchFamily="34" charset="0"/>
+                <a:ea typeface="Pretendard SemiBold" pitchFamily="34" charset="-122"/>
+                <a:cs typeface="Pretendard SemiBold" pitchFamily="34" charset="-120"/>
+              </a:rPr>
+              <a:t>원본 영상은 남겨야 하나? — 정본은 텍스트, 원본은 필요할 때만 클라우드에</a:t>
+            </a:r>
+            <a:endParaRPr lang="en-US" sz="1300" dirty="0"/>
+          </a:p>
+        </p:txBody>
+      </p:sp>
+      <p:sp>
+        <p:nvSpPr>
+          <p:cNvPr id="17" name="Shape 15"/>
+          <p:cNvSpPr/>
+          <p:nvPr/>
+        </p:nvSpPr>
+        <p:spPr>
+          <a:xfrm>
+            <a:off x="777240" y="4956048"/>
+            <a:ext cx="3362858" cy="1051560"/>
+          </a:xfrm>
+          <a:prstGeom prst="roundRect">
+            <a:avLst>
+              <a:gd name="adj" fmla="val 8696"/>
+            </a:avLst>
+          </a:prstGeom>
+          <a:solidFill>
+            <a:srgbClr val="FFFFFF"/>
+          </a:solidFill>
+          <a:ln w="12700">
+            <a:solidFill>
+              <a:srgbClr val="E5E7EB"/>
+            </a:solidFill>
+            <a:prstDash val="solid"/>
+          </a:ln>
+        </p:spPr>
+      </p:sp>
+      <p:sp>
+        <p:nvSpPr>
+          <p:cNvPr id="18" name="Text 16"/>
+          <p:cNvSpPr/>
+          <p:nvPr/>
+        </p:nvSpPr>
+        <p:spPr>
+          <a:xfrm>
+            <a:off x="996696" y="5102352"/>
+            <a:ext cx="2923946" cy="274320"/>
+          </a:xfrm>
+          <a:prstGeom prst="rect">
+            <a:avLst/>
+          </a:prstGeom>
+          <a:noFill/>
+          <a:ln/>
+        </p:spPr>
+        <p:txBody>
+          <a:bodyPr wrap="square" lIns="0" tIns="0" rIns="0" bIns="0" rtlCol="0" anchor="t"/>
+          <a:lstStyle/>
+          <a:p>
+            <a:pPr algn="l" indent="0" marL="0">
+              <a:lnSpc>
+                <a:spcPct val="130000"/>
+              </a:lnSpc>
+              <a:buNone/>
+            </a:pPr>
+            <a:r>
+              <a:rPr lang="en-US" sz="1250" dirty="0">
+                <a:solidFill>
+                  <a:srgbClr val="6C4CFF"/>
+                </a:solidFill>
+                <a:latin typeface="Pretendard SemiBold" pitchFamily="34" charset="0"/>
+                <a:ea typeface="Pretendard SemiBold" pitchFamily="34" charset="-122"/>
+                <a:cs typeface="Pretendard SemiBold" pitchFamily="34" charset="-120"/>
+              </a:rPr>
+              <a:t>정본 = 텍스트</a:t>
+            </a:r>
+            <a:endParaRPr lang="en-US" sz="1250" dirty="0"/>
+          </a:p>
+        </p:txBody>
+      </p:sp>
+      <p:sp>
+        <p:nvSpPr>
+          <p:cNvPr id="19" name="Text 17"/>
+          <p:cNvSpPr/>
+          <p:nvPr/>
+        </p:nvSpPr>
+        <p:spPr>
+          <a:xfrm>
+            <a:off x="996696" y="5394960"/>
+            <a:ext cx="2923946" cy="320040"/>
+          </a:xfrm>
+          <a:prstGeom prst="rect">
+            <a:avLst/>
+          </a:prstGeom>
+          <a:noFill/>
+          <a:ln/>
+        </p:spPr>
+        <p:txBody>
+          <a:bodyPr wrap="square" lIns="0" tIns="0" rIns="0" bIns="0" rtlCol="0" anchor="t"/>
+          <a:lstStyle/>
+          <a:p>
+            <a:pPr algn="l" indent="0" marL="0">
+              <a:lnSpc>
+                <a:spcPct val="120000"/>
+              </a:lnSpc>
+              <a:buNone/>
+            </a:pPr>
+            <a:r>
+              <a:rPr lang="en-US" sz="1100" dirty="0">
+                <a:solidFill>
+                  <a:srgbClr val="1D1D1F"/>
+                </a:solidFill>
+                <a:latin typeface="Pretendard SemiBold" pitchFamily="34" charset="0"/>
+                <a:ea typeface="Pretendard SemiBold" pitchFamily="34" charset="-122"/>
+                <a:cs typeface="Pretendard SemiBold" pitchFamily="34" charset="-120"/>
+              </a:rPr>
+              <a:t>‘영상에서 뽑은 문서’가 정본</a:t>
+            </a:r>
+            <a:endParaRPr lang="en-US" sz="1100" dirty="0"/>
+          </a:p>
+        </p:txBody>
+      </p:sp>
+      <p:sp>
+        <p:nvSpPr>
+          <p:cNvPr id="20" name="Text 18"/>
+          <p:cNvSpPr/>
+          <p:nvPr/>
+        </p:nvSpPr>
+        <p:spPr>
+          <a:xfrm>
+            <a:off x="996696" y="5669280"/>
+            <a:ext cx="2923946" cy="292608"/>
+          </a:xfrm>
+          <a:prstGeom prst="rect">
+            <a:avLst/>
+          </a:prstGeom>
+          <a:noFill/>
+          <a:ln/>
+        </p:spPr>
+        <p:txBody>
+          <a:bodyPr wrap="square" lIns="0" tIns="0" rIns="0" bIns="0" rtlCol="0" anchor="t"/>
+          <a:lstStyle/>
+          <a:p>
+            <a:pPr algn="l" indent="0" marL="0">
+              <a:lnSpc>
+                <a:spcPct val="120000"/>
+              </a:lnSpc>
+              <a:buNone/>
+            </a:pPr>
+            <a:r>
+              <a:rPr lang="en-US" sz="1000" dirty="0">
+                <a:solidFill>
+                  <a:srgbClr val="6E6E73"/>
+                </a:solidFill>
+                <a:latin typeface="Pretendard" pitchFamily="34" charset="0"/>
+                <a:ea typeface="Pretendard" pitchFamily="34" charset="-122"/>
+                <a:cs typeface="Pretendard" pitchFamily="34" charset="-120"/>
+              </a:rPr>
+              <a:t>영상은 제작용 소스일 뿐 · 검색은 문서로</a:t>
+            </a:r>
+            <a:endParaRPr lang="en-US" sz="1000" dirty="0"/>
+          </a:p>
+        </p:txBody>
+      </p:sp>
+      <p:sp>
+        <p:nvSpPr>
+          <p:cNvPr id="21" name="Shape 19"/>
+          <p:cNvSpPr/>
+          <p:nvPr/>
+        </p:nvSpPr>
+        <p:spPr>
+          <a:xfrm>
+            <a:off x="4414418" y="4956048"/>
+            <a:ext cx="3362858" cy="1051560"/>
+          </a:xfrm>
+          <a:prstGeom prst="roundRect">
+            <a:avLst>
+              <a:gd name="adj" fmla="val 8696"/>
+            </a:avLst>
+          </a:prstGeom>
+          <a:solidFill>
+            <a:srgbClr val="FFFFFF"/>
+          </a:solidFill>
+          <a:ln w="12700">
+            <a:solidFill>
+              <a:srgbClr val="E5E7EB"/>
+            </a:solidFill>
+            <a:prstDash val="solid"/>
+          </a:ln>
+        </p:spPr>
+      </p:sp>
+      <p:sp>
+        <p:nvSpPr>
+          <p:cNvPr id="22" name="Text 20"/>
+          <p:cNvSpPr/>
+          <p:nvPr/>
+        </p:nvSpPr>
+        <p:spPr>
+          <a:xfrm>
+            <a:off x="4633874" y="5102352"/>
+            <a:ext cx="2923946" cy="274320"/>
+          </a:xfrm>
+          <a:prstGeom prst="rect">
+            <a:avLst/>
+          </a:prstGeom>
+          <a:noFill/>
+          <a:ln/>
+        </p:spPr>
+        <p:txBody>
+          <a:bodyPr wrap="square" lIns="0" tIns="0" rIns="0" bIns="0" rtlCol="0" anchor="t"/>
+          <a:lstStyle/>
+          <a:p>
+            <a:pPr algn="l" indent="0" marL="0">
+              <a:lnSpc>
+                <a:spcPct val="130000"/>
+              </a:lnSpc>
+              <a:buNone/>
+            </a:pPr>
+            <a:r>
+              <a:rPr lang="en-US" sz="1250" dirty="0">
+                <a:solidFill>
+                  <a:srgbClr val="6C4CFF"/>
+                </a:solidFill>
+                <a:latin typeface="Pretendard SemiBold" pitchFamily="34" charset="0"/>
+                <a:ea typeface="Pretendard SemiBold" pitchFamily="34" charset="-122"/>
+                <a:cs typeface="Pretendard SemiBold" pitchFamily="34" charset="-120"/>
+              </a:rPr>
+              <a:t>원본 영상</a:t>
+            </a:r>
+            <a:endParaRPr lang="en-US" sz="1250" dirty="0"/>
+          </a:p>
+        </p:txBody>
+      </p:sp>
+      <p:sp>
+        <p:nvSpPr>
+          <p:cNvPr id="23" name="Text 21"/>
+          <p:cNvSpPr/>
+          <p:nvPr/>
+        </p:nvSpPr>
+        <p:spPr>
+          <a:xfrm>
+            <a:off x="4633874" y="5394960"/>
+            <a:ext cx="2923946" cy="320040"/>
+          </a:xfrm>
+          <a:prstGeom prst="rect">
+            <a:avLst/>
+          </a:prstGeom>
+          <a:noFill/>
+          <a:ln/>
+        </p:spPr>
+        <p:txBody>
+          <a:bodyPr wrap="square" lIns="0" tIns="0" rIns="0" bIns="0" rtlCol="0" anchor="t"/>
+          <a:lstStyle/>
+          <a:p>
+            <a:pPr algn="l" indent="0" marL="0">
+              <a:lnSpc>
+                <a:spcPct val="120000"/>
+              </a:lnSpc>
+              <a:buNone/>
+            </a:pPr>
+            <a:r>
+              <a:rPr lang="en-US" sz="1100" dirty="0">
+                <a:solidFill>
+                  <a:srgbClr val="1D1D1F"/>
+                </a:solidFill>
+                <a:latin typeface="Pretendard SemiBold" pitchFamily="34" charset="0"/>
+                <a:ea typeface="Pretendard SemiBold" pitchFamily="34" charset="-122"/>
+                <a:cs typeface="Pretendard SemiBold" pitchFamily="34" charset="-120"/>
+              </a:rPr>
+              <a:t>필요하면 git 밖 클라우드(구글 드라이브)</a:t>
+            </a:r>
+            <a:endParaRPr lang="en-US" sz="1100" dirty="0"/>
+          </a:p>
+        </p:txBody>
+      </p:sp>
+      <p:sp>
+        <p:nvSpPr>
+          <p:cNvPr id="24" name="Text 22"/>
+          <p:cNvSpPr/>
+          <p:nvPr/>
+        </p:nvSpPr>
+        <p:spPr>
+          <a:xfrm>
+            <a:off x="4633874" y="5669280"/>
+            <a:ext cx="2923946" cy="292608"/>
+          </a:xfrm>
+          <a:prstGeom prst="rect">
+            <a:avLst/>
+          </a:prstGeom>
+          <a:noFill/>
+          <a:ln/>
+        </p:spPr>
+        <p:txBody>
+          <a:bodyPr wrap="square" lIns="0" tIns="0" rIns="0" bIns="0" rtlCol="0" anchor="t"/>
+          <a:lstStyle/>
+          <a:p>
+            <a:pPr algn="l" indent="0" marL="0">
+              <a:lnSpc>
+                <a:spcPct val="120000"/>
+              </a:lnSpc>
+              <a:buNone/>
+            </a:pPr>
+            <a:r>
+              <a:rPr lang="en-US" sz="1000" dirty="0">
+                <a:solidFill>
+                  <a:srgbClr val="6E6E73"/>
+                </a:solidFill>
+                <a:latin typeface="Pretendard" pitchFamily="34" charset="0"/>
+                <a:ea typeface="Pretendard" pitchFamily="34" charset="-122"/>
+                <a:cs typeface="Pretendard" pitchFamily="34" charset="-120"/>
+              </a:rPr>
+              <a:t>+ 문서에 링크 · 커밋 시 볼트 무거워짐(517MB 전례)</a:t>
+            </a:r>
+            <a:endParaRPr lang="en-US" sz="1000" dirty="0"/>
+          </a:p>
+        </p:txBody>
+      </p:sp>
+      <p:sp>
+        <p:nvSpPr>
+          <p:cNvPr id="25" name="Shape 23"/>
+          <p:cNvSpPr/>
+          <p:nvPr/>
+        </p:nvSpPr>
+        <p:spPr>
+          <a:xfrm>
+            <a:off x="8051597" y="4956048"/>
+            <a:ext cx="3362858" cy="1051560"/>
+          </a:xfrm>
+          <a:prstGeom prst="roundRect">
+            <a:avLst>
+              <a:gd name="adj" fmla="val 8696"/>
+            </a:avLst>
+          </a:prstGeom>
+          <a:solidFill>
+            <a:srgbClr val="FFFFFF"/>
+          </a:solidFill>
+          <a:ln w="12700">
+            <a:solidFill>
+              <a:srgbClr val="E5E7EB"/>
+            </a:solidFill>
+            <a:prstDash val="solid"/>
+          </a:ln>
+        </p:spPr>
+      </p:sp>
+      <p:sp>
+        <p:nvSpPr>
+          <p:cNvPr id="26" name="Text 24"/>
+          <p:cNvSpPr/>
+          <p:nvPr/>
+        </p:nvSpPr>
+        <p:spPr>
+          <a:xfrm>
+            <a:off x="8271053" y="5102352"/>
+            <a:ext cx="2923946" cy="274320"/>
+          </a:xfrm>
+          <a:prstGeom prst="rect">
+            <a:avLst/>
+          </a:prstGeom>
+          <a:noFill/>
+          <a:ln/>
+        </p:spPr>
+        <p:txBody>
+          <a:bodyPr wrap="square" lIns="0" tIns="0" rIns="0" bIns="0" rtlCol="0" anchor="t"/>
+          <a:lstStyle/>
+          <a:p>
+            <a:pPr algn="l" indent="0" marL="0">
+              <a:lnSpc>
+                <a:spcPct val="130000"/>
+              </a:lnSpc>
+              <a:buNone/>
+            </a:pPr>
+            <a:r>
+              <a:rPr lang="en-US" sz="1250" dirty="0">
+                <a:solidFill>
+                  <a:srgbClr val="6C4CFF"/>
+                </a:solidFill>
+                <a:latin typeface="Pretendard SemiBold" pitchFamily="34" charset="0"/>
+                <a:ea typeface="Pretendard SemiBold" pitchFamily="34" charset="-122"/>
+                <a:cs typeface="Pretendard SemiBold" pitchFamily="34" charset="-120"/>
+              </a:rPr>
+              <a:t>핵심 프레임</a:t>
+            </a:r>
+            <a:endParaRPr lang="en-US" sz="1250" dirty="0"/>
+          </a:p>
+        </p:txBody>
+      </p:sp>
+      <p:sp>
+        <p:nvSpPr>
+          <p:cNvPr id="27" name="Text 25"/>
+          <p:cNvSpPr/>
+          <p:nvPr/>
+        </p:nvSpPr>
+        <p:spPr>
+          <a:xfrm>
+            <a:off x="8271053" y="5394960"/>
+            <a:ext cx="2923946" cy="320040"/>
+          </a:xfrm>
+          <a:prstGeom prst="rect">
+            <a:avLst/>
+          </a:prstGeom>
+          <a:noFill/>
+          <a:ln/>
+        </p:spPr>
+        <p:txBody>
+          <a:bodyPr wrap="square" lIns="0" tIns="0" rIns="0" bIns="0" rtlCol="0" anchor="t"/>
+          <a:lstStyle/>
+          <a:p>
+            <a:pPr algn="l" indent="0" marL="0">
+              <a:lnSpc>
+                <a:spcPct val="120000"/>
+              </a:lnSpc>
+              <a:buNone/>
+            </a:pPr>
+            <a:r>
+              <a:rPr lang="en-US" sz="1100" dirty="0">
+                <a:solidFill>
+                  <a:srgbClr val="1D1D1F"/>
+                </a:solidFill>
+                <a:latin typeface="Pretendard SemiBold" pitchFamily="34" charset="0"/>
+                <a:ea typeface="Pretendard SemiBold" pitchFamily="34" charset="-122"/>
+                <a:cs typeface="Pretendard SemiBold" pitchFamily="34" charset="-120"/>
+              </a:rPr>
+              <a:t>정지컷 몇 장만 볼트 attachments/ 에</a:t>
+            </a:r>
+            <a:endParaRPr lang="en-US" sz="1100" dirty="0"/>
+          </a:p>
+        </p:txBody>
+      </p:sp>
+      <p:sp>
+        <p:nvSpPr>
+          <p:cNvPr id="28" name="Text 26"/>
+          <p:cNvSpPr/>
+          <p:nvPr/>
+        </p:nvSpPr>
+        <p:spPr>
+          <a:xfrm>
+            <a:off x="8271053" y="5669280"/>
+            <a:ext cx="2923946" cy="292608"/>
+          </a:xfrm>
+          <a:prstGeom prst="rect">
+            <a:avLst/>
+          </a:prstGeom>
+          <a:noFill/>
+          <a:ln/>
+        </p:spPr>
+        <p:txBody>
+          <a:bodyPr wrap="square" lIns="0" tIns="0" rIns="0" bIns="0" rtlCol="0" anchor="t"/>
+          <a:lstStyle/>
+          <a:p>
+            <a:pPr algn="l" indent="0" marL="0">
+              <a:lnSpc>
+                <a:spcPct val="120000"/>
+              </a:lnSpc>
+              <a:buNone/>
+            </a:pPr>
+            <a:r>
+              <a:rPr lang="en-US" sz="1000" dirty="0">
+                <a:solidFill>
+                  <a:srgbClr val="6E6E73"/>
+                </a:solidFill>
+                <a:latin typeface="Pretendard" pitchFamily="34" charset="0"/>
+                <a:ea typeface="Pretendard" pitchFamily="34" charset="-122"/>
+                <a:cs typeface="Pretendard" pitchFamily="34" charset="-120"/>
+              </a:rPr>
+              <a:t>문서에서 ![[…]] 로 바로 보이게</a:t>
+            </a:r>
+            <a:endParaRPr lang="en-US" sz="1000" dirty="0"/>
+          </a:p>
+        </p:txBody>
+      </p:sp>
+    </p:spTree>
+  </p:cSld>
+  <p:clrMapOvr>
+    <a:masterClrMapping/>
+  </p:clrMapOvr>
+</p:sld>
+</file>
+
+<file path=ppt/slides/slide18.xml><?xml version="1.0" encoding="utf-8"?>
+<p:sld xmlns:a="http://schemas.openxmlformats.org/drawingml/2006/main" xmlns:r="http://schemas.openxmlformats.org/officeDocument/2006/relationships" xmlns:p="http://schemas.openxmlformats.org/presentationml/2006/main">
+  <p:cSld name="Slide 18">
     <p:bg>
       <p:bgPr>
         <a:solidFill>
@@ -21675,7 +23420,7 @@
                 <a:ea typeface="Pretendard" pitchFamily="34" charset="-122"/>
                 <a:cs typeface="Pretendard" pitchFamily="34" charset="-120"/>
               </a:rPr>
-              <a:t>어드민 제외 · 고객이 쓰는 두 갈래(대시보드 · 에디터). ●◐○로 문서 유무 표시.</a:t>
+              <a:t>어드민 제외 · 고객이 쓰는 두 갈래(대시보드 · 에디터). 상태는 ‘작동 방식’ 유무 기준.</a:t>
             </a:r>
             <a:endParaRPr lang="en-US" sz="1500" dirty="0"/>
           </a:p>
@@ -21852,7 +23597,7 @@
         <p:spPr>
           <a:xfrm>
             <a:off x="1508760" y="1847088"/>
-            <a:ext cx="1280160" cy="256032"/>
+            <a:ext cx="2194560" cy="256032"/>
           </a:xfrm>
           <a:prstGeom prst="rect">
             <a:avLst/>
@@ -21879,7 +23624,7 @@
                 <a:ea typeface="Pretendard" pitchFamily="34" charset="-122"/>
                 <a:cs typeface="Pretendard" pitchFamily="34" charset="-120"/>
               </a:rPr>
-              <a:t>문서 있음</a:t>
+              <a:t>작동 방식까지 있음</a:t>
             </a:r>
             <a:endParaRPr lang="en-US" sz="1150" dirty="0"/>
           </a:p>
@@ -21893,7 +23638,7 @@
         </p:nvSpPr>
         <p:spPr>
           <a:xfrm>
-            <a:off x="2743200" y="1847088"/>
+            <a:off x="3886200" y="1847088"/>
             <a:ext cx="228600" cy="256032"/>
           </a:xfrm>
           <a:prstGeom prst="rect">
@@ -21935,8 +23680,8 @@
         </p:nvSpPr>
         <p:spPr>
           <a:xfrm>
-            <a:off x="2971800" y="1847088"/>
-            <a:ext cx="914400" cy="256032"/>
+            <a:off x="4114800" y="1847088"/>
+            <a:ext cx="5120640" cy="256032"/>
           </a:xfrm>
           <a:prstGeom prst="rect">
             <a:avLst/>
@@ -21963,7 +23708,7 @@
                 <a:ea typeface="Pretendard" pitchFamily="34" charset="-122"/>
                 <a:cs typeface="Pretendard" pitchFamily="34" charset="-120"/>
               </a:rPr>
-              <a:t>부분</a:t>
+              <a:t>스펙(생김새)은 있으나 작동 방식 추가 필요</a:t>
             </a:r>
             <a:endParaRPr lang="en-US" sz="1150" dirty="0"/>
           </a:p>
@@ -21971,91 +23716,7 @@
       </p:sp>
       <p:sp>
         <p:nvSpPr>
-          <p:cNvPr id="13" name="Text 11"/>
-          <p:cNvSpPr/>
-          <p:nvPr/>
-        </p:nvSpPr>
-        <p:spPr>
-          <a:xfrm>
-            <a:off x="3703320" y="1847088"/>
-            <a:ext cx="228600" cy="256032"/>
-          </a:xfrm>
-          <a:prstGeom prst="rect">
-            <a:avLst/>
-          </a:prstGeom>
-          <a:noFill/>
-          <a:ln/>
-        </p:spPr>
-        <p:txBody>
-          <a:bodyPr wrap="square" lIns="0" tIns="0" rIns="0" bIns="0" rtlCol="0" anchor="ctr"/>
-          <a:lstStyle/>
-          <a:p>
-            <a:pPr algn="l" indent="0" marL="0">
-              <a:lnSpc>
-                <a:spcPct val="130000"/>
-              </a:lnSpc>
-              <a:buNone/>
-            </a:pPr>
-            <a:r>
-              <a:rPr lang="en-US" sz="1150" dirty="0">
-                <a:solidFill>
-                  <a:srgbClr val="6E6E73"/>
-                </a:solidFill>
-                <a:latin typeface="Pretendard Medium" pitchFamily="34" charset="0"/>
-                <a:ea typeface="Pretendard Medium" pitchFamily="34" charset="-122"/>
-                <a:cs typeface="Pretendard Medium" pitchFamily="34" charset="-120"/>
-              </a:rPr>
-              <a:t>○</a:t>
-            </a:r>
-            <a:endParaRPr lang="en-US" sz="1150" dirty="0"/>
-          </a:p>
-        </p:txBody>
-      </p:sp>
-      <p:sp>
-        <p:nvSpPr>
-          <p:cNvPr id="14" name="Text 12"/>
-          <p:cNvSpPr/>
-          <p:nvPr/>
-        </p:nvSpPr>
-        <p:spPr>
-          <a:xfrm>
-            <a:off x="3931920" y="1847088"/>
-            <a:ext cx="4572000" cy="256032"/>
-          </a:xfrm>
-          <a:prstGeom prst="rect">
-            <a:avLst/>
-          </a:prstGeom>
-          <a:noFill/>
-          <a:ln/>
-        </p:spPr>
-        <p:txBody>
-          <a:bodyPr wrap="square" lIns="0" tIns="0" rIns="0" bIns="0" rtlCol="0" anchor="ctr"/>
-          <a:lstStyle/>
-          <a:p>
-            <a:pPr algn="l" indent="0" marL="0">
-              <a:lnSpc>
-                <a:spcPct val="130000"/>
-              </a:lnSpc>
-              <a:buNone/>
-            </a:pPr>
-            <a:r>
-              <a:rPr lang="en-US" sz="1150" dirty="0">
-                <a:solidFill>
-                  <a:srgbClr val="1D1D1F"/>
-                </a:solidFill>
-                <a:latin typeface="Pretendard" pitchFamily="34" charset="0"/>
-                <a:ea typeface="Pretendard" pitchFamily="34" charset="-122"/>
-                <a:cs typeface="Pretendard" pitchFamily="34" charset="-120"/>
-              </a:rPr>
-              <a:t>없음 → 문서 없어 영상으로 채울 대상</a:t>
-            </a:r>
-            <a:endParaRPr lang="en-US" sz="1150" dirty="0"/>
-          </a:p>
-        </p:txBody>
-      </p:sp>
-      <p:sp>
-        <p:nvSpPr>
-          <p:cNvPr id="15" name="Shape 13"/>
+          <p:cNvPr id="13" name="Shape 11"/>
           <p:cNvSpPr/>
           <p:nvPr/>
         </p:nvSpPr>
@@ -22082,7 +23743,7 @@
       </p:sp>
       <p:sp>
         <p:nvSpPr>
-          <p:cNvPr id="16" name="Text 14"/>
+          <p:cNvPr id="14" name="Text 12"/>
           <p:cNvSpPr/>
           <p:nvPr/>
         </p:nvSpPr>
@@ -22124,7 +23785,7 @@
       </p:sp>
       <p:sp>
         <p:nvSpPr>
-          <p:cNvPr id="17" name="Shape 15"/>
+          <p:cNvPr id="15" name="Shape 13"/>
           <p:cNvSpPr/>
           <p:nvPr/>
         </p:nvSpPr>
@@ -22147,7 +23808,7 @@
       </p:sp>
       <p:sp>
         <p:nvSpPr>
-          <p:cNvPr id="18" name="Shape 16"/>
+          <p:cNvPr id="16" name="Shape 14"/>
           <p:cNvSpPr/>
           <p:nvPr/>
         </p:nvSpPr>
@@ -22170,7 +23831,7 @@
       </p:sp>
       <p:sp>
         <p:nvSpPr>
-          <p:cNvPr id="19" name="Shape 17"/>
+          <p:cNvPr id="17" name="Shape 15"/>
           <p:cNvSpPr/>
           <p:nvPr/>
         </p:nvSpPr>
@@ -22193,7 +23854,7 @@
       </p:sp>
       <p:sp>
         <p:nvSpPr>
-          <p:cNvPr id="20" name="Shape 18"/>
+          <p:cNvPr id="18" name="Shape 16"/>
           <p:cNvSpPr/>
           <p:nvPr/>
         </p:nvSpPr>
@@ -22220,7 +23881,7 @@
       </p:sp>
       <p:sp>
         <p:nvSpPr>
-          <p:cNvPr id="21" name="Text 19"/>
+          <p:cNvPr id="19" name="Text 17"/>
           <p:cNvSpPr/>
           <p:nvPr/>
         </p:nvSpPr>
@@ -22262,7 +23923,7 @@
       </p:sp>
       <p:sp>
         <p:nvSpPr>
-          <p:cNvPr id="22" name="Text 20"/>
+          <p:cNvPr id="20" name="Text 18"/>
           <p:cNvSpPr/>
           <p:nvPr/>
         </p:nvSpPr>
@@ -22304,7 +23965,7 @@
       </p:sp>
       <p:sp>
         <p:nvSpPr>
-          <p:cNvPr id="23" name="Shape 21"/>
+          <p:cNvPr id="21" name="Shape 19"/>
           <p:cNvSpPr/>
           <p:nvPr/>
         </p:nvSpPr>
@@ -22327,7 +23988,7 @@
       </p:sp>
       <p:sp>
         <p:nvSpPr>
-          <p:cNvPr id="24" name="Text 22"/>
+          <p:cNvPr id="22" name="Text 20"/>
           <p:cNvSpPr/>
           <p:nvPr/>
         </p:nvSpPr>
@@ -22361,7 +24022,7 @@
                 <a:ea typeface="Pretendard Medium" pitchFamily="34" charset="-122"/>
                 <a:cs typeface="Pretendard Medium" pitchFamily="34" charset="-120"/>
               </a:rPr>
-              <a:t>○</a:t>
+              <a:t>◐</a:t>
             </a:r>
             <a:endParaRPr lang="en-US" sz="1150" dirty="0"/>
           </a:p>
@@ -22369,7 +24030,7 @@
       </p:sp>
       <p:sp>
         <p:nvSpPr>
-          <p:cNvPr id="25" name="Text 23"/>
+          <p:cNvPr id="23" name="Text 21"/>
           <p:cNvSpPr/>
           <p:nvPr/>
         </p:nvSpPr>
@@ -22411,7 +24072,7 @@
       </p:sp>
       <p:sp>
         <p:nvSpPr>
-          <p:cNvPr id="26" name="Text 24"/>
+          <p:cNvPr id="24" name="Text 22"/>
           <p:cNvSpPr/>
           <p:nvPr/>
         </p:nvSpPr>
@@ -22453,7 +24114,7 @@
       </p:sp>
       <p:sp>
         <p:nvSpPr>
-          <p:cNvPr id="27" name="Text 25"/>
+          <p:cNvPr id="25" name="Text 23"/>
           <p:cNvSpPr/>
           <p:nvPr/>
         </p:nvSpPr>
@@ -22487,7 +24148,7 @@
                 <a:ea typeface="Pretendard" pitchFamily="34" charset="-122"/>
                 <a:cs typeface="Pretendard" pitchFamily="34" charset="-120"/>
               </a:rPr>
-              <a:t>템플릿 선택 → 페이지 생성</a:t>
+              <a:t>홈 · 내 페이지 · 공유 · 버전</a:t>
             </a:r>
             <a:endParaRPr lang="en-US" sz="1200" dirty="0"/>
           </a:p>
@@ -22495,7 +24156,7 @@
       </p:sp>
       <p:sp>
         <p:nvSpPr>
-          <p:cNvPr id="28" name="Text 26"/>
+          <p:cNvPr id="26" name="Text 24"/>
           <p:cNvSpPr/>
           <p:nvPr/>
         </p:nvSpPr>
@@ -22529,7 +24190,7 @@
                 <a:ea typeface="Pretendard Medium" pitchFamily="34" charset="-122"/>
                 <a:cs typeface="Pretendard Medium" pitchFamily="34" charset="-120"/>
               </a:rPr>
-              <a:t>○</a:t>
+              <a:t>◐</a:t>
             </a:r>
             <a:endParaRPr lang="en-US" sz="1150" dirty="0"/>
           </a:p>
@@ -22537,7 +24198,7 @@
       </p:sp>
       <p:sp>
         <p:nvSpPr>
-          <p:cNvPr id="29" name="Text 27"/>
+          <p:cNvPr id="27" name="Text 25"/>
           <p:cNvSpPr/>
           <p:nvPr/>
         </p:nvSpPr>
@@ -22571,7 +24232,7 @@
                 <a:ea typeface="Pretendard" pitchFamily="34" charset="-122"/>
                 <a:cs typeface="Pretendard" pitchFamily="34" charset="-120"/>
               </a:rPr>
-              <a:t>홈 · 내 페이지 · 공유 · 버전</a:t>
+              <a:t>페이지 · URL 통계</a:t>
             </a:r>
             <a:endParaRPr lang="en-US" sz="1200" dirty="0"/>
           </a:p>
@@ -22579,7 +24240,7 @@
       </p:sp>
       <p:sp>
         <p:nvSpPr>
-          <p:cNvPr id="30" name="Text 28"/>
+          <p:cNvPr id="28" name="Text 26"/>
           <p:cNvSpPr/>
           <p:nvPr/>
         </p:nvSpPr>
@@ -22613,7 +24274,7 @@
                 <a:ea typeface="Pretendard Medium" pitchFamily="34" charset="-122"/>
                 <a:cs typeface="Pretendard Medium" pitchFamily="34" charset="-120"/>
               </a:rPr>
-              <a:t>○</a:t>
+              <a:t>◐</a:t>
             </a:r>
             <a:endParaRPr lang="en-US" sz="1150" dirty="0"/>
           </a:p>
@@ -22621,7 +24282,7 @@
       </p:sp>
       <p:sp>
         <p:nvSpPr>
-          <p:cNvPr id="31" name="Text 29"/>
+          <p:cNvPr id="29" name="Text 27"/>
           <p:cNvSpPr/>
           <p:nvPr/>
         </p:nvSpPr>
@@ -22655,7 +24316,7 @@
                 <a:ea typeface="Pretendard" pitchFamily="34" charset="-122"/>
                 <a:cs typeface="Pretendard" pitchFamily="34" charset="-120"/>
               </a:rPr>
-              <a:t>페이지 · URL 통계</a:t>
+              <a:t>계정 · 내 주소 · 권한</a:t>
             </a:r>
             <a:endParaRPr lang="en-US" sz="1200" dirty="0"/>
           </a:p>
@@ -22663,7 +24324,7 @@
       </p:sp>
       <p:sp>
         <p:nvSpPr>
-          <p:cNvPr id="32" name="Text 30"/>
+          <p:cNvPr id="30" name="Text 28"/>
           <p:cNvSpPr/>
           <p:nvPr/>
         </p:nvSpPr>
@@ -22697,7 +24358,7 @@
                 <a:ea typeface="Pretendard Medium" pitchFamily="34" charset="-122"/>
                 <a:cs typeface="Pretendard Medium" pitchFamily="34" charset="-120"/>
               </a:rPr>
-              <a:t>○</a:t>
+              <a:t>◐</a:t>
             </a:r>
             <a:endParaRPr lang="en-US" sz="1150" dirty="0"/>
           </a:p>
@@ -22705,7 +24366,7 @@
       </p:sp>
       <p:sp>
         <p:nvSpPr>
-          <p:cNvPr id="33" name="Text 31"/>
+          <p:cNvPr id="31" name="Text 29"/>
           <p:cNvSpPr/>
           <p:nvPr/>
         </p:nvSpPr>
@@ -22739,7 +24400,7 @@
                 <a:ea typeface="Pretendard" pitchFamily="34" charset="-122"/>
                 <a:cs typeface="Pretendard" pitchFamily="34" charset="-120"/>
               </a:rPr>
-              <a:t>계정 · 내 주소 · 권한</a:t>
+              <a:t>요금 · 결제</a:t>
             </a:r>
             <a:endParaRPr lang="en-US" sz="1200" dirty="0"/>
           </a:p>
@@ -22747,7 +24408,7 @@
       </p:sp>
       <p:sp>
         <p:nvSpPr>
-          <p:cNvPr id="34" name="Text 32"/>
+          <p:cNvPr id="32" name="Text 30"/>
           <p:cNvSpPr/>
           <p:nvPr/>
         </p:nvSpPr>
@@ -22789,7 +24450,7 @@
       </p:sp>
       <p:sp>
         <p:nvSpPr>
-          <p:cNvPr id="35" name="Text 33"/>
+          <p:cNvPr id="33" name="Text 31"/>
           <p:cNvSpPr/>
           <p:nvPr/>
         </p:nvSpPr>
@@ -22823,7 +24484,7 @@
                 <a:ea typeface="Pretendard" pitchFamily="34" charset="-122"/>
                 <a:cs typeface="Pretendard" pitchFamily="34" charset="-120"/>
               </a:rPr>
-              <a:t>요금 · 결제</a:t>
+              <a:t>템플릿 선택 → 페이지 생성</a:t>
             </a:r>
             <a:endParaRPr lang="en-US" sz="1200" dirty="0"/>
           </a:p>
@@ -22831,7 +24492,7 @@
       </p:sp>
       <p:sp>
         <p:nvSpPr>
-          <p:cNvPr id="36" name="Shape 34"/>
+          <p:cNvPr id="34" name="Shape 32"/>
           <p:cNvSpPr/>
           <p:nvPr/>
         </p:nvSpPr>
@@ -22854,7 +24515,7 @@
       </p:sp>
       <p:sp>
         <p:nvSpPr>
-          <p:cNvPr id="37" name="Shape 35"/>
+          <p:cNvPr id="35" name="Shape 33"/>
           <p:cNvSpPr/>
           <p:nvPr/>
         </p:nvSpPr>
@@ -22881,7 +24542,7 @@
       </p:sp>
       <p:sp>
         <p:nvSpPr>
-          <p:cNvPr id="38" name="Text 36"/>
+          <p:cNvPr id="36" name="Text 34"/>
           <p:cNvSpPr/>
           <p:nvPr/>
         </p:nvSpPr>
@@ -22923,7 +24584,7 @@
       </p:sp>
       <p:sp>
         <p:nvSpPr>
-          <p:cNvPr id="39" name="Text 37"/>
+          <p:cNvPr id="37" name="Text 35"/>
           <p:cNvSpPr/>
           <p:nvPr/>
         </p:nvSpPr>
@@ -22965,7 +24626,7 @@
       </p:sp>
       <p:sp>
         <p:nvSpPr>
-          <p:cNvPr id="40" name="Shape 38"/>
+          <p:cNvPr id="38" name="Shape 36"/>
           <p:cNvSpPr/>
           <p:nvPr/>
         </p:nvSpPr>
@@ -22988,7 +24649,7 @@
       </p:sp>
       <p:sp>
         <p:nvSpPr>
-          <p:cNvPr id="41" name="Text 39"/>
+          <p:cNvPr id="39" name="Text 37"/>
           <p:cNvSpPr/>
           <p:nvPr/>
         </p:nvSpPr>
@@ -23030,7 +24691,7 @@
       </p:sp>
       <p:sp>
         <p:nvSpPr>
-          <p:cNvPr id="42" name="Text 40"/>
+          <p:cNvPr id="40" name="Text 38"/>
           <p:cNvSpPr/>
           <p:nvPr/>
         </p:nvSpPr>
@@ -23072,7 +24733,7 @@
       </p:sp>
       <p:sp>
         <p:nvSpPr>
-          <p:cNvPr id="43" name="Text 41"/>
+          <p:cNvPr id="41" name="Text 39"/>
           <p:cNvSpPr/>
           <p:nvPr/>
         </p:nvSpPr>
@@ -23114,7 +24775,7 @@
       </p:sp>
       <p:sp>
         <p:nvSpPr>
-          <p:cNvPr id="44" name="Text 42"/>
+          <p:cNvPr id="42" name="Text 40"/>
           <p:cNvSpPr/>
           <p:nvPr/>
         </p:nvSpPr>
@@ -23156,7 +24817,7 @@
       </p:sp>
       <p:sp>
         <p:nvSpPr>
-          <p:cNvPr id="45" name="Text 43"/>
+          <p:cNvPr id="43" name="Text 41"/>
           <p:cNvSpPr/>
           <p:nvPr/>
         </p:nvSpPr>
@@ -23198,7 +24859,7 @@
       </p:sp>
       <p:sp>
         <p:nvSpPr>
-          <p:cNvPr id="46" name="Text 44"/>
+          <p:cNvPr id="44" name="Text 42"/>
           <p:cNvSpPr/>
           <p:nvPr/>
         </p:nvSpPr>
@@ -23240,7 +24901,7 @@
       </p:sp>
       <p:sp>
         <p:nvSpPr>
-          <p:cNvPr id="47" name="Text 45"/>
+          <p:cNvPr id="45" name="Text 43"/>
           <p:cNvSpPr/>
           <p:nvPr/>
         </p:nvSpPr>
@@ -23274,7 +24935,7 @@
                 <a:ea typeface="Pretendard Medium" pitchFamily="34" charset="-122"/>
                 <a:cs typeface="Pretendard Medium" pitchFamily="34" charset="-120"/>
               </a:rPr>
-              <a:t>○</a:t>
+              <a:t>◐</a:t>
             </a:r>
             <a:endParaRPr lang="en-US" sz="1150" dirty="0"/>
           </a:p>
@@ -23282,7 +24943,7 @@
       </p:sp>
       <p:sp>
         <p:nvSpPr>
-          <p:cNvPr id="48" name="Text 46"/>
+          <p:cNvPr id="46" name="Text 44"/>
           <p:cNvSpPr/>
           <p:nvPr/>
         </p:nvSpPr>
@@ -23324,7 +24985,7 @@
       </p:sp>
       <p:sp>
         <p:nvSpPr>
-          <p:cNvPr id="49" name="Shape 47"/>
+          <p:cNvPr id="47" name="Shape 45"/>
           <p:cNvSpPr/>
           <p:nvPr/>
         </p:nvSpPr>
@@ -23351,14 +25012,14 @@
       </p:sp>
       <p:sp>
         <p:nvSpPr>
-          <p:cNvPr id="50" name="Text 48"/>
+          <p:cNvPr id="48" name="Text 46"/>
           <p:cNvSpPr/>
           <p:nvPr/>
         </p:nvSpPr>
         <p:spPr>
           <a:xfrm>
             <a:off x="1033272" y="5669280"/>
-            <a:ext cx="1188720" cy="475488"/>
+            <a:ext cx="914400" cy="475488"/>
           </a:xfrm>
           <a:prstGeom prst="rect">
             <a:avLst/>
@@ -23385,7 +25046,7 @@
                 <a:ea typeface="Pretendard" pitchFamily="34" charset="-122"/>
                 <a:cs typeface="Pretendard" pitchFamily="34" charset="-120"/>
               </a:rPr>
-              <a:t>핵심 공백</a:t>
+              <a:t>핵심</a:t>
             </a:r>
             <a:endParaRPr lang="en-US" sz="1250" dirty="0"/>
           </a:p>
@@ -23393,14 +25054,14 @@
       </p:sp>
       <p:sp>
         <p:nvSpPr>
-          <p:cNvPr id="51" name="Text 49"/>
-          <p:cNvSpPr/>
-          <p:nvPr/>
-        </p:nvSpPr>
-        <p:spPr>
-          <a:xfrm>
-            <a:off x="2148840" y="5669280"/>
-            <a:ext cx="9082735" cy="475488"/>
+          <p:cNvPr id="49" name="Text 47"/>
+          <p:cNvSpPr/>
+          <p:nvPr/>
+        </p:nvSpPr>
+        <p:spPr>
+          <a:xfrm>
+            <a:off x="1874520" y="5669280"/>
+            <a:ext cx="9357055" cy="475488"/>
           </a:xfrm>
           <a:prstGeom prst="rect">
             <a:avLst/>
@@ -23427,7 +25088,7 @@
                 <a:ea typeface="Pretendard" pitchFamily="34" charset="-122"/>
                 <a:cs typeface="Pretendard" pitchFamily="34" charset="-120"/>
               </a:rPr>
-              <a:t>대시보드(계정)는 대부분 ○ — 로그인 뒤에서만 보여 문서가 없습니다. 여기가 영상으로 채울 1순위. (어드민은 제외 → 팀 운영)</a:t>
+              <a:t>대시보드는 design-system 3-x에 화면 스펙은 있지만, 로그인 뒤 ‘어떻게 작동하나(사용 흐름)’가 없습니다. 이게 영상으로 채울 대상. (어드민 제외)</a:t>
             </a:r>
             <a:endParaRPr lang="en-US" sz="1150" dirty="0"/>
           </a:p>

--- a/CdBd 기능 문서 구조 설계.pptx
+++ b/CdBd 기능 문서 구조 설계.pptx
@@ -11775,7 +11775,7 @@
                 <a:ea typeface="Pretendard" pitchFamily="34" charset="-122"/>
                 <a:cs typeface="Pretendard" pitchFamily="34" charset="-120"/>
               </a:rPr>
-              <a:t>5개 볼트 것을 합쳐 ‘이렇게 말하면 → 어느 볼트의 어느 파일’을 한 곳에.</a:t>
+              <a:t>10p 분류(에디터·대시보드) 그대로 + 다른 볼트 작업까지 합쳐, ‘어느 기능이 어느 파일에’.</a:t>
             </a:r>
             <a:endParaRPr lang="en-US" sz="1500" dirty="0"/>
           </a:p>
@@ -11861,30 +11861,45 @@
       </p:sp>
       <p:sp>
         <p:nvSpPr>
-          <p:cNvPr id="8" name="Shape 6"/>
-          <p:cNvSpPr/>
-          <p:nvPr/>
-        </p:nvSpPr>
-        <p:spPr>
-          <a:xfrm>
-            <a:off x="777240" y="2331720"/>
-            <a:ext cx="10637215" cy="3456432"/>
-          </a:xfrm>
-          <a:prstGeom prst="roundRect">
-            <a:avLst>
-              <a:gd name="adj" fmla="val 3175"/>
-            </a:avLst>
-          </a:prstGeom>
-          <a:solidFill>
-            <a:srgbClr val="FFFFFF"/>
-          </a:solidFill>
-          <a:ln w="12700">
-            <a:solidFill>
-              <a:srgbClr val="E5E7EB"/>
-            </a:solidFill>
-            <a:prstDash val="solid"/>
-          </a:ln>
-        </p:spPr>
+          <p:cNvPr id="8" name="Text 6"/>
+          <p:cNvSpPr/>
+          <p:nvPr/>
+        </p:nvSpPr>
+        <p:spPr>
+          <a:xfrm>
+            <a:off x="5470855" y="1847088"/>
+            <a:ext cx="5943600" cy="256032"/>
+          </a:xfrm>
+          <a:prstGeom prst="rect">
+            <a:avLst/>
+          </a:prstGeom>
+          <a:noFill/>
+          <a:ln/>
+        </p:spPr>
+        <p:txBody>
+          <a:bodyPr wrap="square" lIns="0" tIns="0" rIns="0" bIns="0" rtlCol="0" anchor="ctr"/>
+          <a:lstStyle/>
+          <a:p>
+            <a:pPr algn="r" indent="0" marL="0">
+              <a:lnSpc>
+                <a:spcPct val="130000"/>
+              </a:lnSpc>
+              <a:buNone/>
+            </a:pPr>
+            <a:r>
+              <a:rPr lang="en-US" sz="1000" dirty="0">
+                <a:solidFill>
+                  <a:srgbClr val="6E6E73"/>
+                </a:solidFill>
+                <a:latin typeface="Pretendard Medium" pitchFamily="34" charset="0"/>
+                <a:ea typeface="Pretendard Medium" pitchFamily="34" charset="-122"/>
+                <a:cs typeface="Pretendard Medium" pitchFamily="34" charset="-120"/>
+              </a:rPr>
+              <a:t>[T] templates  [SV] design-service  [DS] design-system</a:t>
+            </a:r>
+            <a:endParaRPr lang="en-US" sz="1000" dirty="0"/>
+          </a:p>
+        </p:txBody>
       </p:sp>
       <p:sp>
         <p:nvSpPr>
@@ -11894,8 +11909,8 @@
         </p:nvSpPr>
         <p:spPr>
           <a:xfrm>
-            <a:off x="1069848" y="2478024"/>
-            <a:ext cx="3840480" cy="274320"/>
+            <a:off x="777240" y="2286000"/>
+            <a:ext cx="5074920" cy="274320"/>
           </a:xfrm>
           <a:prstGeom prst="rect">
             <a:avLst/>
@@ -11914,7 +11929,7 @@
               <a:buNone/>
             </a:pPr>
             <a:r>
-              <a:rPr lang="en-US" sz="1200" dirty="0">
+              <a:rPr lang="en-US" sz="1250" dirty="0">
                 <a:solidFill>
                   <a:srgbClr val="6C4CFF"/>
                 </a:solidFill>
@@ -11922,106 +11937,22 @@
                 <a:ea typeface="Pretendard SemiBold" pitchFamily="34" charset="-122"/>
                 <a:cs typeface="Pretendard SemiBold" pitchFamily="34" charset="-120"/>
               </a:rPr>
-              <a:t>이렇게 말하면</a:t>
-            </a:r>
-            <a:endParaRPr lang="en-US" sz="1200" dirty="0"/>
-          </a:p>
-        </p:txBody>
-      </p:sp>
-      <p:sp>
-        <p:nvSpPr>
-          <p:cNvPr id="10" name="Text 8"/>
-          <p:cNvSpPr/>
-          <p:nvPr/>
-        </p:nvSpPr>
-        <p:spPr>
-          <a:xfrm>
-            <a:off x="4983480" y="2478024"/>
-            <a:ext cx="2468880" cy="274320"/>
-          </a:xfrm>
-          <a:prstGeom prst="rect">
-            <a:avLst/>
-          </a:prstGeom>
-          <a:noFill/>
-          <a:ln/>
-        </p:spPr>
-        <p:txBody>
-          <a:bodyPr wrap="square" lIns="0" tIns="0" rIns="0" bIns="0" rtlCol="0" anchor="t"/>
-          <a:lstStyle/>
-          <a:p>
-            <a:pPr algn="l" indent="0" marL="0">
-              <a:lnSpc>
-                <a:spcPct val="130000"/>
-              </a:lnSpc>
-              <a:buNone/>
-            </a:pPr>
-            <a:r>
-              <a:rPr lang="en-US" sz="1200" dirty="0">
-                <a:solidFill>
-                  <a:srgbClr val="6C4CFF"/>
-                </a:solidFill>
-                <a:latin typeface="Pretendard SemiBold" pitchFamily="34" charset="0"/>
-                <a:ea typeface="Pretendard SemiBold" pitchFamily="34" charset="-122"/>
-                <a:cs typeface="Pretendard SemiBold" pitchFamily="34" charset="-120"/>
-              </a:rPr>
-              <a:t>볼트</a:t>
-            </a:r>
-            <a:endParaRPr lang="en-US" sz="1200" dirty="0"/>
-          </a:p>
-        </p:txBody>
-      </p:sp>
-      <p:sp>
-        <p:nvSpPr>
-          <p:cNvPr id="11" name="Text 9"/>
-          <p:cNvSpPr/>
-          <p:nvPr/>
-        </p:nvSpPr>
-        <p:spPr>
-          <a:xfrm>
-            <a:off x="7543800" y="2478024"/>
-            <a:ext cx="3578047" cy="274320"/>
-          </a:xfrm>
-          <a:prstGeom prst="rect">
-            <a:avLst/>
-          </a:prstGeom>
-          <a:noFill/>
-          <a:ln/>
-        </p:spPr>
-        <p:txBody>
-          <a:bodyPr wrap="square" lIns="0" tIns="0" rIns="0" bIns="0" rtlCol="0" anchor="t"/>
-          <a:lstStyle/>
-          <a:p>
-            <a:pPr algn="l" indent="0" marL="0">
-              <a:lnSpc>
-                <a:spcPct val="130000"/>
-              </a:lnSpc>
-              <a:buNone/>
-            </a:pPr>
-            <a:r>
-              <a:rPr lang="en-US" sz="1200" dirty="0">
-                <a:solidFill>
-                  <a:srgbClr val="6C4CFF"/>
-                </a:solidFill>
-                <a:latin typeface="Pretendard SemiBold" pitchFamily="34" charset="0"/>
-                <a:ea typeface="Pretendard SemiBold" pitchFamily="34" charset="-122"/>
-                <a:cs typeface="Pretendard SemiBold" pitchFamily="34" charset="-120"/>
-              </a:rPr>
-              <a:t>파일</a:t>
-            </a:r>
-            <a:endParaRPr lang="en-US" sz="1200" dirty="0"/>
-          </a:p>
-        </p:txBody>
-      </p:sp>
-      <p:sp>
-        <p:nvSpPr>
-          <p:cNvPr id="12" name="Shape 10"/>
-          <p:cNvSpPr/>
-          <p:nvPr/>
-        </p:nvSpPr>
-        <p:spPr>
-          <a:xfrm>
-            <a:off x="1069848" y="2788920"/>
-            <a:ext cx="10051999" cy="0"/>
+              <a:t>CdBd 기능 (에디터 · 대시보드)</a:t>
+            </a:r>
+            <a:endParaRPr lang="en-US" sz="1250" dirty="0"/>
+          </a:p>
+        </p:txBody>
+      </p:sp>
+      <p:sp>
+        <p:nvSpPr>
+          <p:cNvPr id="10" name="Shape 8"/>
+          <p:cNvSpPr/>
+          <p:nvPr/>
+        </p:nvSpPr>
+        <p:spPr>
+          <a:xfrm>
+            <a:off x="777240" y="2615184"/>
+            <a:ext cx="5074920" cy="0"/>
           </a:xfrm>
           <a:prstGeom prst="line">
             <a:avLst/>
@@ -12037,14 +11968,14 @@
       </p:sp>
       <p:sp>
         <p:nvSpPr>
-          <p:cNvPr id="13" name="Text 11"/>
-          <p:cNvSpPr/>
-          <p:nvPr/>
-        </p:nvSpPr>
-        <p:spPr>
-          <a:xfrm>
-            <a:off x="1069848" y="2862072"/>
-            <a:ext cx="3840480" cy="320040"/>
+          <p:cNvPr id="11" name="Text 9"/>
+          <p:cNvSpPr/>
+          <p:nvPr/>
+        </p:nvSpPr>
+        <p:spPr>
+          <a:xfrm>
+            <a:off x="777240" y="2724912"/>
+            <a:ext cx="1874520" cy="365760"/>
           </a:xfrm>
           <a:prstGeom prst="rect">
             <a:avLst/>
@@ -12066,69 +11997,27 @@
               <a:rPr lang="en-US" sz="1150" dirty="0">
                 <a:solidFill>
                   <a:srgbClr val="1D1D1F"/>
-                </a:solidFill>
-                <a:latin typeface="Pretendard Medium" pitchFamily="34" charset="0"/>
-                <a:ea typeface="Pretendard Medium" pitchFamily="34" charset="-122"/>
-                <a:cs typeface="Pretendard Medium" pitchFamily="34" charset="-120"/>
-              </a:rPr>
-              <a:t>“상품 카드 넣어줘”</a:t>
-            </a:r>
-            <a:endParaRPr lang="en-US" sz="1150" dirty="0"/>
-          </a:p>
-        </p:txBody>
-      </p:sp>
-      <p:sp>
-        <p:nvSpPr>
-          <p:cNvPr id="14" name="Text 12"/>
-          <p:cNvSpPr/>
-          <p:nvPr/>
-        </p:nvSpPr>
-        <p:spPr>
-          <a:xfrm>
-            <a:off x="4983480" y="2862072"/>
-            <a:ext cx="2468880" cy="320040"/>
-          </a:xfrm>
-          <a:prstGeom prst="rect">
-            <a:avLst/>
-          </a:prstGeom>
-          <a:noFill/>
-          <a:ln/>
-        </p:spPr>
-        <p:txBody>
-          <a:bodyPr wrap="square" lIns="0" tIns="0" rIns="0" bIns="0" rtlCol="0" anchor="ctr"/>
-          <a:lstStyle/>
-          <a:p>
-            <a:pPr algn="l" indent="0" marL="0">
-              <a:lnSpc>
-                <a:spcPct val="130000"/>
-              </a:lnSpc>
-              <a:buNone/>
-            </a:pPr>
-            <a:r>
-              <a:rPr lang="en-US" sz="1100" dirty="0">
-                <a:solidFill>
-                  <a:srgbClr val="6C4CFF"/>
                 </a:solidFill>
                 <a:latin typeface="Pretendard SemiBold" pitchFamily="34" charset="0"/>
                 <a:ea typeface="Pretendard SemiBold" pitchFamily="34" charset="-122"/>
                 <a:cs typeface="Pretendard SemiBold" pitchFamily="34" charset="-120"/>
               </a:rPr>
-              <a:t>templates</a:t>
-            </a:r>
-            <a:endParaRPr lang="en-US" sz="1100" dirty="0"/>
-          </a:p>
-        </p:txBody>
-      </p:sp>
-      <p:sp>
-        <p:nvSpPr>
-          <p:cNvPr id="15" name="Text 13"/>
-          <p:cNvSpPr/>
-          <p:nvPr/>
-        </p:nvSpPr>
-        <p:spPr>
-          <a:xfrm>
-            <a:off x="7543800" y="2862072"/>
-            <a:ext cx="3578047" cy="320040"/>
+              <a:t>카드 15종</a:t>
+            </a:r>
+            <a:endParaRPr lang="en-US" sz="1150" dirty="0"/>
+          </a:p>
+        </p:txBody>
+      </p:sp>
+      <p:sp>
+        <p:nvSpPr>
+          <p:cNvPr id="12" name="Text 10"/>
+          <p:cNvSpPr/>
+          <p:nvPr/>
+        </p:nvSpPr>
+        <p:spPr>
+          <a:xfrm>
+            <a:off x="2697480" y="2724912"/>
+            <a:ext cx="3154680" cy="365760"/>
           </a:xfrm>
           <a:prstGeom prst="rect">
             <a:avLst/>
@@ -12147,7 +12036,7 @@
               <a:buNone/>
             </a:pPr>
             <a:r>
-              <a:rPr lang="en-US" sz="1100" dirty="0">
+              <a:rPr lang="en-US" sz="1050" dirty="0">
                 <a:solidFill>
                   <a:srgbClr val="55555A"/>
                 </a:solidFill>
@@ -12155,22 +12044,22 @@
                 <a:ea typeface="Pretendard" pitchFamily="34" charset="-122"/>
                 <a:cs typeface="Pretendard" pitchFamily="34" charset="-120"/>
               </a:rPr>
-              <a:t>1-6-2. CdBd 카드 기능</a:t>
-            </a:r>
-            <a:endParaRPr lang="en-US" sz="1100" dirty="0"/>
-          </a:p>
-        </p:txBody>
-      </p:sp>
-      <p:sp>
-        <p:nvSpPr>
-          <p:cNvPr id="16" name="Shape 14"/>
-          <p:cNvSpPr/>
-          <p:nvPr/>
-        </p:nvSpPr>
-        <p:spPr>
-          <a:xfrm>
-            <a:off x="1069848" y="3209544"/>
-            <a:ext cx="10051999" cy="0"/>
+              <a:t>→ [T] 1-6-2 · [DS] 4-x</a:t>
+            </a:r>
+            <a:endParaRPr lang="en-US" sz="1050" dirty="0"/>
+          </a:p>
+        </p:txBody>
+      </p:sp>
+      <p:sp>
+        <p:nvSpPr>
+          <p:cNvPr id="13" name="Shape 11"/>
+          <p:cNvSpPr/>
+          <p:nvPr/>
+        </p:nvSpPr>
+        <p:spPr>
+          <a:xfrm>
+            <a:off x="777240" y="3127248"/>
+            <a:ext cx="5074920" cy="0"/>
           </a:xfrm>
           <a:prstGeom prst="line">
             <a:avLst/>
@@ -12186,14 +12075,14 @@
       </p:sp>
       <p:sp>
         <p:nvSpPr>
-          <p:cNvPr id="17" name="Text 15"/>
-          <p:cNvSpPr/>
-          <p:nvPr/>
-        </p:nvSpPr>
-        <p:spPr>
-          <a:xfrm>
-            <a:off x="1069848" y="3227832"/>
-            <a:ext cx="3840480" cy="320040"/>
+          <p:cNvPr id="14" name="Text 12"/>
+          <p:cNvSpPr/>
+          <p:nvPr/>
+        </p:nvSpPr>
+        <p:spPr>
+          <a:xfrm>
+            <a:off x="777240" y="3182112"/>
+            <a:ext cx="1874520" cy="365760"/>
           </a:xfrm>
           <a:prstGeom prst="rect">
             <a:avLst/>
@@ -12215,69 +12104,27 @@
               <a:rPr lang="en-US" sz="1150" dirty="0">
                 <a:solidFill>
                   <a:srgbClr val="1D1D1F"/>
-                </a:solidFill>
-                <a:latin typeface="Pretendard Medium" pitchFamily="34" charset="0"/>
-                <a:ea typeface="Pretendard Medium" pitchFamily="34" charset="-122"/>
-                <a:cs typeface="Pretendard Medium" pitchFamily="34" charset="-120"/>
-              </a:rPr>
-              <a:t>“통계 화면 만들어줘”</a:t>
-            </a:r>
-            <a:endParaRPr lang="en-US" sz="1150" dirty="0"/>
-          </a:p>
-        </p:txBody>
-      </p:sp>
-      <p:sp>
-        <p:nvSpPr>
-          <p:cNvPr id="18" name="Text 16"/>
-          <p:cNvSpPr/>
-          <p:nvPr/>
-        </p:nvSpPr>
-        <p:spPr>
-          <a:xfrm>
-            <a:off x="4983480" y="3227832"/>
-            <a:ext cx="2468880" cy="320040"/>
-          </a:xfrm>
-          <a:prstGeom prst="rect">
-            <a:avLst/>
-          </a:prstGeom>
-          <a:noFill/>
-          <a:ln/>
-        </p:spPr>
-        <p:txBody>
-          <a:bodyPr wrap="square" lIns="0" tIns="0" rIns="0" bIns="0" rtlCol="0" anchor="ctr"/>
-          <a:lstStyle/>
-          <a:p>
-            <a:pPr algn="l" indent="0" marL="0">
-              <a:lnSpc>
-                <a:spcPct val="130000"/>
-              </a:lnSpc>
-              <a:buNone/>
-            </a:pPr>
-            <a:r>
-              <a:rPr lang="en-US" sz="1100" dirty="0">
-                <a:solidFill>
-                  <a:srgbClr val="6C4CFF"/>
                 </a:solidFill>
                 <a:latin typeface="Pretendard SemiBold" pitchFamily="34" charset="0"/>
                 <a:ea typeface="Pretendard SemiBold" pitchFamily="34" charset="-122"/>
                 <a:cs typeface="Pretendard SemiBold" pitchFamily="34" charset="-120"/>
               </a:rPr>
-              <a:t>design-system</a:t>
-            </a:r>
-            <a:endParaRPr lang="en-US" sz="1100" dirty="0"/>
-          </a:p>
-        </p:txBody>
-      </p:sp>
-      <p:sp>
-        <p:nvSpPr>
-          <p:cNvPr id="19" name="Text 17"/>
-          <p:cNvSpPr/>
-          <p:nvPr/>
-        </p:nvSpPr>
-        <p:spPr>
-          <a:xfrm>
-            <a:off x="7543800" y="3227832"/>
-            <a:ext cx="3578047" cy="320040"/>
+              <a:t>페이지 구성·꾸미기</a:t>
+            </a:r>
+            <a:endParaRPr lang="en-US" sz="1150" dirty="0"/>
+          </a:p>
+        </p:txBody>
+      </p:sp>
+      <p:sp>
+        <p:nvSpPr>
+          <p:cNvPr id="15" name="Text 13"/>
+          <p:cNvSpPr/>
+          <p:nvPr/>
+        </p:nvSpPr>
+        <p:spPr>
+          <a:xfrm>
+            <a:off x="2697480" y="3182112"/>
+            <a:ext cx="3154680" cy="365760"/>
           </a:xfrm>
           <a:prstGeom prst="rect">
             <a:avLst/>
@@ -12296,7 +12143,7 @@
               <a:buNone/>
             </a:pPr>
             <a:r>
-              <a:rPr lang="en-US" sz="1100" dirty="0">
+              <a:rPr lang="en-US" sz="1050" dirty="0">
                 <a:solidFill>
                   <a:srgbClr val="55555A"/>
                 </a:solidFill>
@@ -12304,22 +12151,22 @@
                 <a:ea typeface="Pretendard" pitchFamily="34" charset="-122"/>
                 <a:cs typeface="Pretendard" pitchFamily="34" charset="-120"/>
               </a:rPr>
-              <a:t>3-11. 통계</a:t>
-            </a:r>
-            <a:endParaRPr lang="en-US" sz="1100" dirty="0"/>
-          </a:p>
-        </p:txBody>
-      </p:sp>
-      <p:sp>
-        <p:nvSpPr>
-          <p:cNvPr id="20" name="Shape 18"/>
-          <p:cNvSpPr/>
-          <p:nvPr/>
-        </p:nvSpPr>
-        <p:spPr>
-          <a:xfrm>
-            <a:off x="1069848" y="3575304"/>
-            <a:ext cx="10051999" cy="0"/>
+              <a:t>→ [DS] 3-2-x · [T] 1-6-1</a:t>
+            </a:r>
+            <a:endParaRPr lang="en-US" sz="1050" dirty="0"/>
+          </a:p>
+        </p:txBody>
+      </p:sp>
+      <p:sp>
+        <p:nvSpPr>
+          <p:cNvPr id="16" name="Shape 14"/>
+          <p:cNvSpPr/>
+          <p:nvPr/>
+        </p:nvSpPr>
+        <p:spPr>
+          <a:xfrm>
+            <a:off x="777240" y="3584448"/>
+            <a:ext cx="5074920" cy="0"/>
           </a:xfrm>
           <a:prstGeom prst="line">
             <a:avLst/>
@@ -12335,14 +12182,14 @@
       </p:sp>
       <p:sp>
         <p:nvSpPr>
-          <p:cNvPr id="21" name="Text 19"/>
-          <p:cNvSpPr/>
-          <p:nvPr/>
-        </p:nvSpPr>
-        <p:spPr>
-          <a:xfrm>
-            <a:off x="1069848" y="3593592"/>
-            <a:ext cx="3840480" cy="320040"/>
+          <p:cNvPr id="17" name="Text 15"/>
+          <p:cNvSpPr/>
+          <p:nvPr/>
+        </p:nvSpPr>
+        <p:spPr>
+          <a:xfrm>
+            <a:off x="777240" y="3639312"/>
+            <a:ext cx="1874520" cy="365760"/>
           </a:xfrm>
           <a:prstGeom prst="rect">
             <a:avLst/>
@@ -12364,69 +12211,27 @@
               <a:rPr lang="en-US" sz="1150" dirty="0">
                 <a:solidFill>
                   <a:srgbClr val="1D1D1F"/>
-                </a:solidFill>
-                <a:latin typeface="Pretendard Medium" pitchFamily="34" charset="0"/>
-                <a:ea typeface="Pretendard Medium" pitchFamily="34" charset="-122"/>
-                <a:cs typeface="Pretendard Medium" pitchFamily="34" charset="-120"/>
-              </a:rPr>
-              <a:t>“에디터 카드보드 수정”</a:t>
-            </a:r>
-            <a:endParaRPr lang="en-US" sz="1150" dirty="0"/>
-          </a:p>
-        </p:txBody>
-      </p:sp>
-      <p:sp>
-        <p:nvSpPr>
-          <p:cNvPr id="22" name="Text 20"/>
-          <p:cNvSpPr/>
-          <p:nvPr/>
-        </p:nvSpPr>
-        <p:spPr>
-          <a:xfrm>
-            <a:off x="4983480" y="3593592"/>
-            <a:ext cx="2468880" cy="320040"/>
-          </a:xfrm>
-          <a:prstGeom prst="rect">
-            <a:avLst/>
-          </a:prstGeom>
-          <a:noFill/>
-          <a:ln/>
-        </p:spPr>
-        <p:txBody>
-          <a:bodyPr wrap="square" lIns="0" tIns="0" rIns="0" bIns="0" rtlCol="0" anchor="ctr"/>
-          <a:lstStyle/>
-          <a:p>
-            <a:pPr algn="l" indent="0" marL="0">
-              <a:lnSpc>
-                <a:spcPct val="130000"/>
-              </a:lnSpc>
-              <a:buNone/>
-            </a:pPr>
-            <a:r>
-              <a:rPr lang="en-US" sz="1100" dirty="0">
-                <a:solidFill>
-                  <a:srgbClr val="6C4CFF"/>
                 </a:solidFill>
                 <a:latin typeface="Pretendard SemiBold" pitchFamily="34" charset="0"/>
                 <a:ea typeface="Pretendard SemiBold" pitchFamily="34" charset="-122"/>
                 <a:cs typeface="Pretendard SemiBold" pitchFamily="34" charset="-120"/>
               </a:rPr>
-              <a:t>design-system</a:t>
-            </a:r>
-            <a:endParaRPr lang="en-US" sz="1100" dirty="0"/>
-          </a:p>
-        </p:txBody>
-      </p:sp>
-      <p:sp>
-        <p:nvSpPr>
-          <p:cNvPr id="23" name="Text 21"/>
-          <p:cNvSpPr/>
-          <p:nvPr/>
-        </p:nvSpPr>
-        <p:spPr>
-          <a:xfrm>
-            <a:off x="7543800" y="3593592"/>
-            <a:ext cx="3578047" cy="320040"/>
+              <a:t>게시 (URL · OG)</a:t>
+            </a:r>
+            <a:endParaRPr lang="en-US" sz="1150" dirty="0"/>
+          </a:p>
+        </p:txBody>
+      </p:sp>
+      <p:sp>
+        <p:nvSpPr>
+          <p:cNvPr id="18" name="Text 16"/>
+          <p:cNvSpPr/>
+          <p:nvPr/>
+        </p:nvSpPr>
+        <p:spPr>
+          <a:xfrm>
+            <a:off x="2697480" y="3639312"/>
+            <a:ext cx="3154680" cy="365760"/>
           </a:xfrm>
           <a:prstGeom prst="rect">
             <a:avLst/>
@@ -12445,7 +12250,7 @@
               <a:buNone/>
             </a:pPr>
             <a:r>
-              <a:rPr lang="en-US" sz="1100" dirty="0">
+              <a:rPr lang="en-US" sz="1050" dirty="0">
                 <a:solidFill>
                   <a:srgbClr val="55555A"/>
                 </a:solidFill>
@@ -12453,22 +12258,22 @@
                 <a:ea typeface="Pretendard" pitchFamily="34" charset="-122"/>
                 <a:cs typeface="Pretendard" pitchFamily="34" charset="-120"/>
               </a:rPr>
-              <a:t>3-2-3. 카드 보드</a:t>
-            </a:r>
-            <a:endParaRPr lang="en-US" sz="1100" dirty="0"/>
-          </a:p>
-        </p:txBody>
-      </p:sp>
-      <p:sp>
-        <p:nvSpPr>
-          <p:cNvPr id="24" name="Shape 22"/>
-          <p:cNvSpPr/>
-          <p:nvPr/>
-        </p:nvSpPr>
-        <p:spPr>
-          <a:xfrm>
-            <a:off x="1069848" y="3941064"/>
-            <a:ext cx="10051999" cy="0"/>
+              <a:t>→ [SV] 1-4 §게시</a:t>
+            </a:r>
+            <a:endParaRPr lang="en-US" sz="1050" dirty="0"/>
+          </a:p>
+        </p:txBody>
+      </p:sp>
+      <p:sp>
+        <p:nvSpPr>
+          <p:cNvPr id="19" name="Shape 17"/>
+          <p:cNvSpPr/>
+          <p:nvPr/>
+        </p:nvSpPr>
+        <p:spPr>
+          <a:xfrm>
+            <a:off x="777240" y="4041648"/>
+            <a:ext cx="5074920" cy="0"/>
           </a:xfrm>
           <a:prstGeom prst="line">
             <a:avLst/>
@@ -12484,14 +12289,14 @@
       </p:sp>
       <p:sp>
         <p:nvSpPr>
-          <p:cNvPr id="25" name="Text 23"/>
-          <p:cNvSpPr/>
-          <p:nvPr/>
-        </p:nvSpPr>
-        <p:spPr>
-          <a:xfrm>
-            <a:off x="1069848" y="3959352"/>
-            <a:ext cx="3840480" cy="320040"/>
+          <p:cNvPr id="20" name="Text 18"/>
+          <p:cNvSpPr/>
+          <p:nvPr/>
+        </p:nvSpPr>
+        <p:spPr>
+          <a:xfrm>
+            <a:off x="777240" y="4096512"/>
+            <a:ext cx="1874520" cy="365760"/>
           </a:xfrm>
           <a:prstGeom prst="rect">
             <a:avLst/>
@@ -12513,69 +12318,27 @@
               <a:rPr lang="en-US" sz="1150" dirty="0">
                 <a:solidFill>
                   <a:srgbClr val="1D1D1F"/>
-                </a:solidFill>
-                <a:latin typeface="Pretendard Medium" pitchFamily="34" charset="0"/>
-                <a:ea typeface="Pretendard Medium" pitchFamily="34" charset="-122"/>
-                <a:cs typeface="Pretendard Medium" pitchFamily="34" charset="-120"/>
-              </a:rPr>
-              <a:t>“URL 게시해줘”</a:t>
-            </a:r>
-            <a:endParaRPr lang="en-US" sz="1150" dirty="0"/>
-          </a:p>
-        </p:txBody>
-      </p:sp>
-      <p:sp>
-        <p:nvSpPr>
-          <p:cNvPr id="26" name="Text 24"/>
-          <p:cNvSpPr/>
-          <p:nvPr/>
-        </p:nvSpPr>
-        <p:spPr>
-          <a:xfrm>
-            <a:off x="4983480" y="3959352"/>
-            <a:ext cx="2468880" cy="320040"/>
-          </a:xfrm>
-          <a:prstGeom prst="rect">
-            <a:avLst/>
-          </a:prstGeom>
-          <a:noFill/>
-          <a:ln/>
-        </p:spPr>
-        <p:txBody>
-          <a:bodyPr wrap="square" lIns="0" tIns="0" rIns="0" bIns="0" rtlCol="0" anchor="ctr"/>
-          <a:lstStyle/>
-          <a:p>
-            <a:pPr algn="l" indent="0" marL="0">
-              <a:lnSpc>
-                <a:spcPct val="130000"/>
-              </a:lnSpc>
-              <a:buNone/>
-            </a:pPr>
-            <a:r>
-              <a:rPr lang="en-US" sz="1100" dirty="0">
-                <a:solidFill>
-                  <a:srgbClr val="6C4CFF"/>
                 </a:solidFill>
                 <a:latin typeface="Pretendard SemiBold" pitchFamily="34" charset="0"/>
                 <a:ea typeface="Pretendard SemiBold" pitchFamily="34" charset="-122"/>
                 <a:cs typeface="Pretendard SemiBold" pitchFamily="34" charset="-120"/>
               </a:rPr>
-              <a:t>design-service</a:t>
-            </a:r>
-            <a:endParaRPr lang="en-US" sz="1100" dirty="0"/>
-          </a:p>
-        </p:txBody>
-      </p:sp>
-      <p:sp>
-        <p:nvSpPr>
-          <p:cNvPr id="27" name="Text 25"/>
-          <p:cNvSpPr/>
-          <p:nvPr/>
-        </p:nvSpPr>
-        <p:spPr>
-          <a:xfrm>
-            <a:off x="7543800" y="3959352"/>
-            <a:ext cx="3578047" cy="320040"/>
+              <a:t>페이지 · URL 통계</a:t>
+            </a:r>
+            <a:endParaRPr lang="en-US" sz="1150" dirty="0"/>
+          </a:p>
+        </p:txBody>
+      </p:sp>
+      <p:sp>
+        <p:nvSpPr>
+          <p:cNvPr id="21" name="Text 19"/>
+          <p:cNvSpPr/>
+          <p:nvPr/>
+        </p:nvSpPr>
+        <p:spPr>
+          <a:xfrm>
+            <a:off x="2697480" y="4096512"/>
+            <a:ext cx="3154680" cy="365760"/>
           </a:xfrm>
           <a:prstGeom prst="rect">
             <a:avLst/>
@@ -12594,7 +12357,7 @@
               <a:buNone/>
             </a:pPr>
             <a:r>
-              <a:rPr lang="en-US" sz="1100" dirty="0">
+              <a:rPr lang="en-US" sz="1050" dirty="0">
                 <a:solidFill>
                   <a:srgbClr val="55555A"/>
                 </a:solidFill>
@@ -12602,22 +12365,22 @@
                 <a:ea typeface="Pretendard" pitchFamily="34" charset="-122"/>
                 <a:cs typeface="Pretendard" pitchFamily="34" charset="-120"/>
               </a:rPr>
-              <a:t>1-4. CdBd 콘텐츠 §게시</a:t>
-            </a:r>
-            <a:endParaRPr lang="en-US" sz="1100" dirty="0"/>
-          </a:p>
-        </p:txBody>
-      </p:sp>
-      <p:sp>
-        <p:nvSpPr>
-          <p:cNvPr id="28" name="Shape 26"/>
-          <p:cNvSpPr/>
-          <p:nvPr/>
-        </p:nvSpPr>
-        <p:spPr>
-          <a:xfrm>
-            <a:off x="1069848" y="4306824"/>
-            <a:ext cx="10051999" cy="0"/>
+              <a:t>→ [DS] 3-11 통계</a:t>
+            </a:r>
+            <a:endParaRPr lang="en-US" sz="1050" dirty="0"/>
+          </a:p>
+        </p:txBody>
+      </p:sp>
+      <p:sp>
+        <p:nvSpPr>
+          <p:cNvPr id="22" name="Shape 20"/>
+          <p:cNvSpPr/>
+          <p:nvPr/>
+        </p:nvSpPr>
+        <p:spPr>
+          <a:xfrm>
+            <a:off x="777240" y="4498848"/>
+            <a:ext cx="5074920" cy="0"/>
           </a:xfrm>
           <a:prstGeom prst="line">
             <a:avLst/>
@@ -12633,14 +12396,14 @@
       </p:sp>
       <p:sp>
         <p:nvSpPr>
-          <p:cNvPr id="29" name="Text 27"/>
-          <p:cNvSpPr/>
-          <p:nvPr/>
-        </p:nvSpPr>
-        <p:spPr>
-          <a:xfrm>
-            <a:off x="1069848" y="4325112"/>
-            <a:ext cx="3840480" cy="320040"/>
+          <p:cNvPr id="23" name="Text 21"/>
+          <p:cNvSpPr/>
+          <p:nvPr/>
+        </p:nvSpPr>
+        <p:spPr>
+          <a:xfrm>
+            <a:off x="777240" y="4553712"/>
+            <a:ext cx="1874520" cy="365760"/>
           </a:xfrm>
           <a:prstGeom prst="rect">
             <a:avLst/>
@@ -12662,69 +12425,27 @@
               <a:rPr lang="en-US" sz="1150" dirty="0">
                 <a:solidFill>
                   <a:srgbClr val="1D1D1F"/>
-                </a:solidFill>
-                <a:latin typeface="Pretendard Medium" pitchFamily="34" charset="0"/>
-                <a:ea typeface="Pretendard Medium" pitchFamily="34" charset="-122"/>
-                <a:cs typeface="Pretendard Medium" pitchFamily="34" charset="-120"/>
-              </a:rPr>
-              <a:t>“룩북 시안 만들어줘”</a:t>
-            </a:r>
-            <a:endParaRPr lang="en-US" sz="1150" dirty="0"/>
-          </a:p>
-        </p:txBody>
-      </p:sp>
-      <p:sp>
-        <p:nvSpPr>
-          <p:cNvPr id="30" name="Text 28"/>
-          <p:cNvSpPr/>
-          <p:nvPr/>
-        </p:nvSpPr>
-        <p:spPr>
-          <a:xfrm>
-            <a:off x="4983480" y="4325112"/>
-            <a:ext cx="2468880" cy="320040"/>
-          </a:xfrm>
-          <a:prstGeom prst="rect">
-            <a:avLst/>
-          </a:prstGeom>
-          <a:noFill/>
-          <a:ln/>
-        </p:spPr>
-        <p:txBody>
-          <a:bodyPr wrap="square" lIns="0" tIns="0" rIns="0" bIns="0" rtlCol="0" anchor="ctr"/>
-          <a:lstStyle/>
-          <a:p>
-            <a:pPr algn="l" indent="0" marL="0">
-              <a:lnSpc>
-                <a:spcPct val="130000"/>
-              </a:lnSpc>
-              <a:buNone/>
-            </a:pPr>
-            <a:r>
-              <a:rPr lang="en-US" sz="1100" dirty="0">
-                <a:solidFill>
-                  <a:srgbClr val="6C4CFF"/>
                 </a:solidFill>
                 <a:latin typeface="Pretendard SemiBold" pitchFamily="34" charset="0"/>
                 <a:ea typeface="Pretendard SemiBold" pitchFamily="34" charset="-122"/>
                 <a:cs typeface="Pretendard SemiBold" pitchFamily="34" charset="-120"/>
               </a:rPr>
-              <a:t>design-service</a:t>
-            </a:r>
-            <a:endParaRPr lang="en-US" sz="1100" dirty="0"/>
-          </a:p>
-        </p:txBody>
-      </p:sp>
-      <p:sp>
-        <p:nvSpPr>
-          <p:cNvPr id="31" name="Text 29"/>
-          <p:cNvSpPr/>
-          <p:nvPr/>
-        </p:nvSpPr>
-        <p:spPr>
-          <a:xfrm>
-            <a:off x="7543800" y="4325112"/>
-            <a:ext cx="3578047" cy="320040"/>
+              <a:t>계정 · 주소 · 요금</a:t>
+            </a:r>
+            <a:endParaRPr lang="en-US" sz="1150" dirty="0"/>
+          </a:p>
+        </p:txBody>
+      </p:sp>
+      <p:sp>
+        <p:nvSpPr>
+          <p:cNvPr id="24" name="Text 22"/>
+          <p:cNvSpPr/>
+          <p:nvPr/>
+        </p:nvSpPr>
+        <p:spPr>
+          <a:xfrm>
+            <a:off x="2697480" y="4553712"/>
+            <a:ext cx="3154680" cy="365760"/>
           </a:xfrm>
           <a:prstGeom prst="rect">
             <a:avLst/>
@@ -12743,7 +12464,7 @@
               <a:buNone/>
             </a:pPr>
             <a:r>
-              <a:rPr lang="en-US" sz="1100" dirty="0">
+              <a:rPr lang="en-US" sz="1050" dirty="0">
                 <a:solidFill>
                   <a:srgbClr val="55555A"/>
                 </a:solidFill>
@@ -12751,22 +12472,22 @@
                 <a:ea typeface="Pretendard" pitchFamily="34" charset="-122"/>
                 <a:cs typeface="Pretendard" pitchFamily="34" charset="-120"/>
               </a:rPr>
-              <a:t>룩북/1-2. 시안</a:t>
-            </a:r>
-            <a:endParaRPr lang="en-US" sz="1100" dirty="0"/>
-          </a:p>
-        </p:txBody>
-      </p:sp>
-      <p:sp>
-        <p:nvSpPr>
-          <p:cNvPr id="32" name="Shape 30"/>
-          <p:cNvSpPr/>
-          <p:nvPr/>
-        </p:nvSpPr>
-        <p:spPr>
-          <a:xfrm>
-            <a:off x="1069848" y="4672584"/>
-            <a:ext cx="10051999" cy="0"/>
+              <a:t>→ [DS] 3-8 · 3-5</a:t>
+            </a:r>
+            <a:endParaRPr lang="en-US" sz="1050" dirty="0"/>
+          </a:p>
+        </p:txBody>
+      </p:sp>
+      <p:sp>
+        <p:nvSpPr>
+          <p:cNvPr id="25" name="Shape 23"/>
+          <p:cNvSpPr/>
+          <p:nvPr/>
+        </p:nvSpPr>
+        <p:spPr>
+          <a:xfrm>
+            <a:off x="777240" y="4956048"/>
+            <a:ext cx="5074920" cy="0"/>
           </a:xfrm>
           <a:prstGeom prst="line">
             <a:avLst/>
@@ -12782,14 +12503,14 @@
       </p:sp>
       <p:sp>
         <p:nvSpPr>
-          <p:cNvPr id="33" name="Text 31"/>
-          <p:cNvSpPr/>
-          <p:nvPr/>
-        </p:nvSpPr>
-        <p:spPr>
-          <a:xfrm>
-            <a:off x="1069848" y="4690872"/>
-            <a:ext cx="3840480" cy="320040"/>
+          <p:cNvPr id="26" name="Text 24"/>
+          <p:cNvSpPr/>
+          <p:nvPr/>
+        </p:nvSpPr>
+        <p:spPr>
+          <a:xfrm>
+            <a:off x="777240" y="5010912"/>
+            <a:ext cx="1874520" cy="365760"/>
           </a:xfrm>
           <a:prstGeom prst="rect">
             <a:avLst/>
@@ -12811,69 +12532,27 @@
               <a:rPr lang="en-US" sz="1150" dirty="0">
                 <a:solidFill>
                   <a:srgbClr val="1D1D1F"/>
-                </a:solidFill>
-                <a:latin typeface="Pretendard Medium" pitchFamily="34" charset="0"/>
-                <a:ea typeface="Pretendard Medium" pitchFamily="34" charset="-122"/>
-                <a:cs typeface="Pretendard Medium" pitchFamily="34" charset="-120"/>
-              </a:rPr>
-              <a:t>“QR 이벤트 만들어줘”</a:t>
-            </a:r>
-            <a:endParaRPr lang="en-US" sz="1150" dirty="0"/>
-          </a:p>
-        </p:txBody>
-      </p:sp>
-      <p:sp>
-        <p:nvSpPr>
-          <p:cNvPr id="34" name="Text 32"/>
-          <p:cNvSpPr/>
-          <p:nvPr/>
-        </p:nvSpPr>
-        <p:spPr>
-          <a:xfrm>
-            <a:off x="4983480" y="4690872"/>
-            <a:ext cx="2468880" cy="320040"/>
-          </a:xfrm>
-          <a:prstGeom prst="rect">
-            <a:avLst/>
-          </a:prstGeom>
-          <a:noFill/>
-          <a:ln/>
-        </p:spPr>
-        <p:txBody>
-          <a:bodyPr wrap="square" lIns="0" tIns="0" rIns="0" bIns="0" rtlCol="0" anchor="ctr"/>
-          <a:lstStyle/>
-          <a:p>
-            <a:pPr algn="l" indent="0" marL="0">
-              <a:lnSpc>
-                <a:spcPct val="130000"/>
-              </a:lnSpc>
-              <a:buNone/>
-            </a:pPr>
-            <a:r>
-              <a:rPr lang="en-US" sz="1100" dirty="0">
-                <a:solidFill>
-                  <a:srgbClr val="6C4CFF"/>
                 </a:solidFill>
                 <a:latin typeface="Pretendard SemiBold" pitchFamily="34" charset="0"/>
                 <a:ea typeface="Pretendard SemiBold" pitchFamily="34" charset="-122"/>
                 <a:cs typeface="Pretendard SemiBold" pitchFamily="34" charset="-120"/>
               </a:rPr>
-              <a:t>makevu-qrstp</a:t>
-            </a:r>
-            <a:endParaRPr lang="en-US" sz="1100" dirty="0"/>
-          </a:p>
-        </p:txBody>
-      </p:sp>
-      <p:sp>
-        <p:nvSpPr>
-          <p:cNvPr id="35" name="Text 33"/>
-          <p:cNvSpPr/>
-          <p:nvPr/>
-        </p:nvSpPr>
-        <p:spPr>
-          <a:xfrm>
-            <a:off x="7543800" y="4690872"/>
-            <a:ext cx="3578047" cy="320040"/>
+              <a:t>버전 · 권한</a:t>
+            </a:r>
+            <a:endParaRPr lang="en-US" sz="1150" dirty="0"/>
+          </a:p>
+        </p:txBody>
+      </p:sp>
+      <p:sp>
+        <p:nvSpPr>
+          <p:cNvPr id="27" name="Text 25"/>
+          <p:cNvSpPr/>
+          <p:nvPr/>
+        </p:nvSpPr>
+        <p:spPr>
+          <a:xfrm>
+            <a:off x="2697480" y="5010912"/>
+            <a:ext cx="3154680" cy="365760"/>
           </a:xfrm>
           <a:prstGeom prst="rect">
             <a:avLst/>
@@ -12892,7 +12571,7 @@
               <a:buNone/>
             </a:pPr>
             <a:r>
-              <a:rPr lang="en-US" sz="1100" dirty="0">
+              <a:rPr lang="en-US" sz="1050" dirty="0">
                 <a:solidFill>
                   <a:srgbClr val="55555A"/>
                 </a:solidFill>
@@ -12900,22 +12579,171 @@
                 <a:ea typeface="Pretendard" pitchFamily="34" charset="-122"/>
                 <a:cs typeface="Pretendard" pitchFamily="34" charset="-120"/>
               </a:rPr>
-              <a:t>3. 워크플로우</a:t>
-            </a:r>
-            <a:endParaRPr lang="en-US" sz="1100" dirty="0"/>
-          </a:p>
-        </p:txBody>
-      </p:sp>
-      <p:sp>
-        <p:nvSpPr>
-          <p:cNvPr id="36" name="Shape 34"/>
-          <p:cNvSpPr/>
-          <p:nvPr/>
-        </p:nvSpPr>
-        <p:spPr>
-          <a:xfrm>
-            <a:off x="1069848" y="5038344"/>
-            <a:ext cx="10051999" cy="0"/>
+              <a:t>→ [DS] 3-15 · 3-13</a:t>
+            </a:r>
+            <a:endParaRPr lang="en-US" sz="1050" dirty="0"/>
+          </a:p>
+        </p:txBody>
+      </p:sp>
+      <p:sp>
+        <p:nvSpPr>
+          <p:cNvPr id="28" name="Text 26"/>
+          <p:cNvSpPr/>
+          <p:nvPr/>
+        </p:nvSpPr>
+        <p:spPr>
+          <a:xfrm>
+            <a:off x="6336792" y="2286000"/>
+            <a:ext cx="5074920" cy="274320"/>
+          </a:xfrm>
+          <a:prstGeom prst="rect">
+            <a:avLst/>
+          </a:prstGeom>
+          <a:noFill/>
+          <a:ln/>
+        </p:spPr>
+        <p:txBody>
+          <a:bodyPr wrap="square" lIns="0" tIns="0" rIns="0" bIns="0" rtlCol="0" anchor="t"/>
+          <a:lstStyle/>
+          <a:p>
+            <a:pPr algn="l" indent="0" marL="0">
+              <a:lnSpc>
+                <a:spcPct val="130000"/>
+              </a:lnSpc>
+              <a:buNone/>
+            </a:pPr>
+            <a:r>
+              <a:rPr lang="en-US" sz="1250" dirty="0">
+                <a:solidFill>
+                  <a:srgbClr val="6C4CFF"/>
+                </a:solidFill>
+                <a:latin typeface="Pretendard SemiBold" pitchFamily="34" charset="0"/>
+                <a:ea typeface="Pretendard SemiBold" pitchFamily="34" charset="-122"/>
+                <a:cs typeface="Pretendard SemiBold" pitchFamily="34" charset="-120"/>
+              </a:rPr>
+              <a:t>다른 볼트 — 제작 작업</a:t>
+            </a:r>
+            <a:endParaRPr lang="en-US" sz="1250" dirty="0"/>
+          </a:p>
+        </p:txBody>
+      </p:sp>
+      <p:sp>
+        <p:nvSpPr>
+          <p:cNvPr id="29" name="Shape 27"/>
+          <p:cNvSpPr/>
+          <p:nvPr/>
+        </p:nvSpPr>
+        <p:spPr>
+          <a:xfrm>
+            <a:off x="6336792" y="2615184"/>
+            <a:ext cx="5074920" cy="0"/>
+          </a:xfrm>
+          <a:prstGeom prst="line">
+            <a:avLst/>
+          </a:prstGeom>
+          <a:noFill/>
+          <a:ln w="9525">
+            <a:solidFill>
+              <a:srgbClr val="E5E7EB"/>
+            </a:solidFill>
+            <a:prstDash val="solid"/>
+          </a:ln>
+        </p:spPr>
+      </p:sp>
+      <p:sp>
+        <p:nvSpPr>
+          <p:cNvPr id="30" name="Text 28"/>
+          <p:cNvSpPr/>
+          <p:nvPr/>
+        </p:nvSpPr>
+        <p:spPr>
+          <a:xfrm>
+            <a:off x="6336792" y="2724912"/>
+            <a:ext cx="1874520" cy="365760"/>
+          </a:xfrm>
+          <a:prstGeom prst="rect">
+            <a:avLst/>
+          </a:prstGeom>
+          <a:noFill/>
+          <a:ln/>
+        </p:spPr>
+        <p:txBody>
+          <a:bodyPr wrap="square" lIns="0" tIns="0" rIns="0" bIns="0" rtlCol="0" anchor="ctr"/>
+          <a:lstStyle/>
+          <a:p>
+            <a:pPr algn="l" indent="0" marL="0">
+              <a:lnSpc>
+                <a:spcPct val="130000"/>
+              </a:lnSpc>
+              <a:buNone/>
+            </a:pPr>
+            <a:r>
+              <a:rPr lang="en-US" sz="1150" dirty="0">
+                <a:solidFill>
+                  <a:srgbClr val="1D1D1F"/>
+                </a:solidFill>
+                <a:latin typeface="Pretendard SemiBold" pitchFamily="34" charset="0"/>
+                <a:ea typeface="Pretendard SemiBold" pitchFamily="34" charset="-122"/>
+                <a:cs typeface="Pretendard SemiBold" pitchFamily="34" charset="-120"/>
+              </a:rPr>
+              <a:t>룩북 시안</a:t>
+            </a:r>
+            <a:endParaRPr lang="en-US" sz="1150" dirty="0"/>
+          </a:p>
+        </p:txBody>
+      </p:sp>
+      <p:sp>
+        <p:nvSpPr>
+          <p:cNvPr id="31" name="Text 29"/>
+          <p:cNvSpPr/>
+          <p:nvPr/>
+        </p:nvSpPr>
+        <p:spPr>
+          <a:xfrm>
+            <a:off x="8257032" y="2724912"/>
+            <a:ext cx="3154680" cy="365760"/>
+          </a:xfrm>
+          <a:prstGeom prst="rect">
+            <a:avLst/>
+          </a:prstGeom>
+          <a:noFill/>
+          <a:ln/>
+        </p:spPr>
+        <p:txBody>
+          <a:bodyPr wrap="square" lIns="0" tIns="0" rIns="0" bIns="0" rtlCol="0" anchor="ctr"/>
+          <a:lstStyle/>
+          <a:p>
+            <a:pPr algn="l" indent="0" marL="0">
+              <a:lnSpc>
+                <a:spcPct val="130000"/>
+              </a:lnSpc>
+              <a:buNone/>
+            </a:pPr>
+            <a:r>
+              <a:rPr lang="en-US" sz="1050" dirty="0">
+                <a:solidFill>
+                  <a:srgbClr val="55555A"/>
+                </a:solidFill>
+                <a:latin typeface="Pretendard" pitchFamily="34" charset="0"/>
+                <a:ea typeface="Pretendard" pitchFamily="34" charset="-122"/>
+                <a:cs typeface="Pretendard" pitchFamily="34" charset="-120"/>
+              </a:rPr>
+              <a:t>→ [SV] 룩북/1-2. 시안</a:t>
+            </a:r>
+            <a:endParaRPr lang="en-US" sz="1050" dirty="0"/>
+          </a:p>
+        </p:txBody>
+      </p:sp>
+      <p:sp>
+        <p:nvSpPr>
+          <p:cNvPr id="32" name="Shape 30"/>
+          <p:cNvSpPr/>
+          <p:nvPr/>
+        </p:nvSpPr>
+        <p:spPr>
+          <a:xfrm>
+            <a:off x="6336792" y="3127248"/>
+            <a:ext cx="5074920" cy="0"/>
           </a:xfrm>
           <a:prstGeom prst="line">
             <a:avLst/>
@@ -12931,14 +12759,14 @@
       </p:sp>
       <p:sp>
         <p:nvSpPr>
-          <p:cNvPr id="37" name="Text 35"/>
-          <p:cNvSpPr/>
-          <p:nvPr/>
-        </p:nvSpPr>
-        <p:spPr>
-          <a:xfrm>
-            <a:off x="1069848" y="5056632"/>
-            <a:ext cx="3840480" cy="320040"/>
+          <p:cNvPr id="33" name="Text 31"/>
+          <p:cNvSpPr/>
+          <p:nvPr/>
+        </p:nvSpPr>
+        <p:spPr>
+          <a:xfrm>
+            <a:off x="6336792" y="3182112"/>
+            <a:ext cx="1874520" cy="365760"/>
           </a:xfrm>
           <a:prstGeom prst="rect">
             <a:avLst/>
@@ -12960,69 +12788,27 @@
               <a:rPr lang="en-US" sz="1150" dirty="0">
                 <a:solidFill>
                   <a:srgbClr val="1D1D1F"/>
-                </a:solidFill>
-                <a:latin typeface="Pretendard Medium" pitchFamily="34" charset="0"/>
-                <a:ea typeface="Pretendard Medium" pitchFamily="34" charset="-122"/>
-                <a:cs typeface="Pretendard Medium" pitchFamily="34" charset="-120"/>
-              </a:rPr>
-              <a:t>“블로그 썸네일 만들어줘”</a:t>
-            </a:r>
-            <a:endParaRPr lang="en-US" sz="1150" dirty="0"/>
-          </a:p>
-        </p:txBody>
-      </p:sp>
-      <p:sp>
-        <p:nvSpPr>
-          <p:cNvPr id="38" name="Text 36"/>
-          <p:cNvSpPr/>
-          <p:nvPr/>
-        </p:nvSpPr>
-        <p:spPr>
-          <a:xfrm>
-            <a:off x="4983480" y="5056632"/>
-            <a:ext cx="2468880" cy="320040"/>
-          </a:xfrm>
-          <a:prstGeom prst="rect">
-            <a:avLst/>
-          </a:prstGeom>
-          <a:noFill/>
-          <a:ln/>
-        </p:spPr>
-        <p:txBody>
-          <a:bodyPr wrap="square" lIns="0" tIns="0" rIns="0" bIns="0" rtlCol="0" anchor="ctr"/>
-          <a:lstStyle/>
-          <a:p>
-            <a:pPr algn="l" indent="0" marL="0">
-              <a:lnSpc>
-                <a:spcPct val="130000"/>
-              </a:lnSpc>
-              <a:buNone/>
-            </a:pPr>
-            <a:r>
-              <a:rPr lang="en-US" sz="1100" dirty="0">
-                <a:solidFill>
-                  <a:srgbClr val="6C4CFF"/>
                 </a:solidFill>
                 <a:latin typeface="Pretendard SemiBold" pitchFamily="34" charset="0"/>
                 <a:ea typeface="Pretendard SemiBold" pitchFamily="34" charset="-122"/>
                 <a:cs typeface="Pretendard SemiBold" pitchFamily="34" charset="-120"/>
               </a:rPr>
-              <a:t>marketing</a:t>
-            </a:r>
-            <a:endParaRPr lang="en-US" sz="1100" dirty="0"/>
-          </a:p>
-        </p:txBody>
-      </p:sp>
-      <p:sp>
-        <p:nvSpPr>
-          <p:cNvPr id="39" name="Text 37"/>
-          <p:cNvSpPr/>
-          <p:nvPr/>
-        </p:nvSpPr>
-        <p:spPr>
-          <a:xfrm>
-            <a:off x="7543800" y="5056632"/>
-            <a:ext cx="3578047" cy="320040"/>
+              <a:t>소식지</a:t>
+            </a:r>
+            <a:endParaRPr lang="en-US" sz="1150" dirty="0"/>
+          </a:p>
+        </p:txBody>
+      </p:sp>
+      <p:sp>
+        <p:nvSpPr>
+          <p:cNvPr id="34" name="Text 32"/>
+          <p:cNvSpPr/>
+          <p:nvPr/>
+        </p:nvSpPr>
+        <p:spPr>
+          <a:xfrm>
+            <a:off x="8257032" y="3182112"/>
+            <a:ext cx="3154680" cy="365760"/>
           </a:xfrm>
           <a:prstGeom prst="rect">
             <a:avLst/>
@@ -13041,7 +12827,7 @@
               <a:buNone/>
             </a:pPr>
             <a:r>
-              <a:rPr lang="en-US" sz="1100" dirty="0">
+              <a:rPr lang="en-US" sz="1050" dirty="0">
                 <a:solidFill>
                   <a:srgbClr val="55555A"/>
                 </a:solidFill>
@@ -13049,22 +12835,22 @@
                 <a:ea typeface="Pretendard" pitchFamily="34" charset="-122"/>
                 <a:cs typeface="Pretendard" pitchFamily="34" charset="-120"/>
               </a:rPr>
-              <a:t>1-1. 썸네일</a:t>
-            </a:r>
-            <a:endParaRPr lang="en-US" sz="1100" dirty="0"/>
-          </a:p>
-        </p:txBody>
-      </p:sp>
-      <p:sp>
-        <p:nvSpPr>
-          <p:cNvPr id="40" name="Shape 38"/>
-          <p:cNvSpPr/>
-          <p:nvPr/>
-        </p:nvSpPr>
-        <p:spPr>
-          <a:xfrm>
-            <a:off x="1069848" y="5404104"/>
-            <a:ext cx="10051999" cy="0"/>
+              <a:t>→ [SV] 소식지/1. 제작</a:t>
+            </a:r>
+            <a:endParaRPr lang="en-US" sz="1050" dirty="0"/>
+          </a:p>
+        </p:txBody>
+      </p:sp>
+      <p:sp>
+        <p:nvSpPr>
+          <p:cNvPr id="35" name="Shape 33"/>
+          <p:cNvSpPr/>
+          <p:nvPr/>
+        </p:nvSpPr>
+        <p:spPr>
+          <a:xfrm>
+            <a:off x="6336792" y="3584448"/>
+            <a:ext cx="5074920" cy="0"/>
           </a:xfrm>
           <a:prstGeom prst="line">
             <a:avLst/>
@@ -13080,14 +12866,14 @@
       </p:sp>
       <p:sp>
         <p:nvSpPr>
-          <p:cNvPr id="41" name="Text 39"/>
-          <p:cNvSpPr/>
-          <p:nvPr/>
-        </p:nvSpPr>
-        <p:spPr>
-          <a:xfrm>
-            <a:off x="1069848" y="5422392"/>
-            <a:ext cx="3840480" cy="320040"/>
+          <p:cNvPr id="36" name="Text 34"/>
+          <p:cNvSpPr/>
+          <p:nvPr/>
+        </p:nvSpPr>
+        <p:spPr>
+          <a:xfrm>
+            <a:off x="6336792" y="3639312"/>
+            <a:ext cx="1874520" cy="365760"/>
           </a:xfrm>
           <a:prstGeom prst="rect">
             <a:avLst/>
@@ -13109,138 +12895,310 @@
               <a:rPr lang="en-US" sz="1150" dirty="0">
                 <a:solidFill>
                   <a:srgbClr val="1D1D1F"/>
+                </a:solidFill>
+                <a:latin typeface="Pretendard SemiBold" pitchFamily="34" charset="0"/>
+                <a:ea typeface="Pretendard SemiBold" pitchFamily="34" charset="-122"/>
+                <a:cs typeface="Pretendard SemiBold" pitchFamily="34" charset="-120"/>
+              </a:rPr>
+              <a:t>QR 이벤트</a:t>
+            </a:r>
+            <a:endParaRPr lang="en-US" sz="1150" dirty="0"/>
+          </a:p>
+        </p:txBody>
+      </p:sp>
+      <p:sp>
+        <p:nvSpPr>
+          <p:cNvPr id="37" name="Text 35"/>
+          <p:cNvSpPr/>
+          <p:nvPr/>
+        </p:nvSpPr>
+        <p:spPr>
+          <a:xfrm>
+            <a:off x="8257032" y="3639312"/>
+            <a:ext cx="3154680" cy="365760"/>
+          </a:xfrm>
+          <a:prstGeom prst="rect">
+            <a:avLst/>
+          </a:prstGeom>
+          <a:noFill/>
+          <a:ln/>
+        </p:spPr>
+        <p:txBody>
+          <a:bodyPr wrap="square" lIns="0" tIns="0" rIns="0" bIns="0" rtlCol="0" anchor="ctr"/>
+          <a:lstStyle/>
+          <a:p>
+            <a:pPr algn="l" indent="0" marL="0">
+              <a:lnSpc>
+                <a:spcPct val="130000"/>
+              </a:lnSpc>
+              <a:buNone/>
+            </a:pPr>
+            <a:r>
+              <a:rPr lang="en-US" sz="1050" dirty="0">
+                <a:solidFill>
+                  <a:srgbClr val="55555A"/>
+                </a:solidFill>
+                <a:latin typeface="Pretendard" pitchFamily="34" charset="0"/>
+                <a:ea typeface="Pretendard" pitchFamily="34" charset="-122"/>
+                <a:cs typeface="Pretendard" pitchFamily="34" charset="-120"/>
+              </a:rPr>
+              <a:t>→ makevu 3. 워크플로우</a:t>
+            </a:r>
+            <a:endParaRPr lang="en-US" sz="1050" dirty="0"/>
+          </a:p>
+        </p:txBody>
+      </p:sp>
+      <p:sp>
+        <p:nvSpPr>
+          <p:cNvPr id="38" name="Shape 36"/>
+          <p:cNvSpPr/>
+          <p:nvPr/>
+        </p:nvSpPr>
+        <p:spPr>
+          <a:xfrm>
+            <a:off x="6336792" y="4041648"/>
+            <a:ext cx="5074920" cy="0"/>
+          </a:xfrm>
+          <a:prstGeom prst="line">
+            <a:avLst/>
+          </a:prstGeom>
+          <a:noFill/>
+          <a:ln w="6350">
+            <a:solidFill>
+              <a:srgbClr val="F0F0F0"/>
+            </a:solidFill>
+            <a:prstDash val="solid"/>
+          </a:ln>
+        </p:spPr>
+      </p:sp>
+      <p:sp>
+        <p:nvSpPr>
+          <p:cNvPr id="39" name="Text 37"/>
+          <p:cNvSpPr/>
+          <p:nvPr/>
+        </p:nvSpPr>
+        <p:spPr>
+          <a:xfrm>
+            <a:off x="6336792" y="4096512"/>
+            <a:ext cx="1874520" cy="365760"/>
+          </a:xfrm>
+          <a:prstGeom prst="rect">
+            <a:avLst/>
+          </a:prstGeom>
+          <a:noFill/>
+          <a:ln/>
+        </p:spPr>
+        <p:txBody>
+          <a:bodyPr wrap="square" lIns="0" tIns="0" rIns="0" bIns="0" rtlCol="0" anchor="ctr"/>
+          <a:lstStyle/>
+          <a:p>
+            <a:pPr algn="l" indent="0" marL="0">
+              <a:lnSpc>
+                <a:spcPct val="130000"/>
+              </a:lnSpc>
+              <a:buNone/>
+            </a:pPr>
+            <a:r>
+              <a:rPr lang="en-US" sz="1150" dirty="0">
+                <a:solidFill>
+                  <a:srgbClr val="1D1D1F"/>
+                </a:solidFill>
+                <a:latin typeface="Pretendard SemiBold" pitchFamily="34" charset="0"/>
+                <a:ea typeface="Pretendard SemiBold" pitchFamily="34" charset="-122"/>
+                <a:cs typeface="Pretendard SemiBold" pitchFamily="34" charset="-120"/>
+              </a:rPr>
+              <a:t>블로그 썸네일</a:t>
+            </a:r>
+            <a:endParaRPr lang="en-US" sz="1150" dirty="0"/>
+          </a:p>
+        </p:txBody>
+      </p:sp>
+      <p:sp>
+        <p:nvSpPr>
+          <p:cNvPr id="40" name="Text 38"/>
+          <p:cNvSpPr/>
+          <p:nvPr/>
+        </p:nvSpPr>
+        <p:spPr>
+          <a:xfrm>
+            <a:off x="8257032" y="4096512"/>
+            <a:ext cx="3154680" cy="365760"/>
+          </a:xfrm>
+          <a:prstGeom prst="rect">
+            <a:avLst/>
+          </a:prstGeom>
+          <a:noFill/>
+          <a:ln/>
+        </p:spPr>
+        <p:txBody>
+          <a:bodyPr wrap="square" lIns="0" tIns="0" rIns="0" bIns="0" rtlCol="0" anchor="ctr"/>
+          <a:lstStyle/>
+          <a:p>
+            <a:pPr algn="l" indent="0" marL="0">
+              <a:lnSpc>
+                <a:spcPct val="130000"/>
+              </a:lnSpc>
+              <a:buNone/>
+            </a:pPr>
+            <a:r>
+              <a:rPr lang="en-US" sz="1050" dirty="0">
+                <a:solidFill>
+                  <a:srgbClr val="55555A"/>
+                </a:solidFill>
+                <a:latin typeface="Pretendard" pitchFamily="34" charset="0"/>
+                <a:ea typeface="Pretendard" pitchFamily="34" charset="-122"/>
+                <a:cs typeface="Pretendard" pitchFamily="34" charset="-120"/>
+              </a:rPr>
+              <a:t>→ marketing 1-1. 썸네일</a:t>
+            </a:r>
+            <a:endParaRPr lang="en-US" sz="1050" dirty="0"/>
+          </a:p>
+        </p:txBody>
+      </p:sp>
+      <p:sp>
+        <p:nvSpPr>
+          <p:cNvPr id="41" name="Shape 39"/>
+          <p:cNvSpPr/>
+          <p:nvPr/>
+        </p:nvSpPr>
+        <p:spPr>
+          <a:xfrm>
+            <a:off x="6336792" y="4498848"/>
+            <a:ext cx="5074920" cy="0"/>
+          </a:xfrm>
+          <a:prstGeom prst="line">
+            <a:avLst/>
+          </a:prstGeom>
+          <a:noFill/>
+          <a:ln w="6350">
+            <a:solidFill>
+              <a:srgbClr val="F0F0F0"/>
+            </a:solidFill>
+            <a:prstDash val="solid"/>
+          </a:ln>
+        </p:spPr>
+      </p:sp>
+      <p:sp>
+        <p:nvSpPr>
+          <p:cNvPr id="42" name="Text 40"/>
+          <p:cNvSpPr/>
+          <p:nvPr/>
+        </p:nvSpPr>
+        <p:spPr>
+          <a:xfrm>
+            <a:off x="6336792" y="4553712"/>
+            <a:ext cx="1874520" cy="365760"/>
+          </a:xfrm>
+          <a:prstGeom prst="rect">
+            <a:avLst/>
+          </a:prstGeom>
+          <a:noFill/>
+          <a:ln/>
+        </p:spPr>
+        <p:txBody>
+          <a:bodyPr wrap="square" lIns="0" tIns="0" rIns="0" bIns="0" rtlCol="0" anchor="ctr"/>
+          <a:lstStyle/>
+          <a:p>
+            <a:pPr algn="l" indent="0" marL="0">
+              <a:lnSpc>
+                <a:spcPct val="130000"/>
+              </a:lnSpc>
+              <a:buNone/>
+            </a:pPr>
+            <a:r>
+              <a:rPr lang="en-US" sz="1150" dirty="0">
+                <a:solidFill>
+                  <a:srgbClr val="1D1D1F"/>
+                </a:solidFill>
+                <a:latin typeface="Pretendard SemiBold" pitchFamily="34" charset="0"/>
+                <a:ea typeface="Pretendard SemiBold" pitchFamily="34" charset="-122"/>
+                <a:cs typeface="Pretendard SemiBold" pitchFamily="34" charset="-120"/>
+              </a:rPr>
+              <a:t>아이콘 제작</a:t>
+            </a:r>
+            <a:endParaRPr lang="en-US" sz="1150" dirty="0"/>
+          </a:p>
+        </p:txBody>
+      </p:sp>
+      <p:sp>
+        <p:nvSpPr>
+          <p:cNvPr id="43" name="Text 41"/>
+          <p:cNvSpPr/>
+          <p:nvPr/>
+        </p:nvSpPr>
+        <p:spPr>
+          <a:xfrm>
+            <a:off x="8257032" y="4553712"/>
+            <a:ext cx="3154680" cy="365760"/>
+          </a:xfrm>
+          <a:prstGeom prst="rect">
+            <a:avLst/>
+          </a:prstGeom>
+          <a:noFill/>
+          <a:ln/>
+        </p:spPr>
+        <p:txBody>
+          <a:bodyPr wrap="square" lIns="0" tIns="0" rIns="0" bIns="0" rtlCol="0" anchor="ctr"/>
+          <a:lstStyle/>
+          <a:p>
+            <a:pPr algn="l" indent="0" marL="0">
+              <a:lnSpc>
+                <a:spcPct val="130000"/>
+              </a:lnSpc>
+              <a:buNone/>
+            </a:pPr>
+            <a:r>
+              <a:rPr lang="en-US" sz="1050" dirty="0">
+                <a:solidFill>
+                  <a:srgbClr val="55555A"/>
+                </a:solidFill>
+                <a:latin typeface="Pretendard" pitchFamily="34" charset="0"/>
+                <a:ea typeface="Pretendard" pitchFamily="34" charset="-122"/>
+                <a:cs typeface="Pretendard" pitchFamily="34" charset="-120"/>
+              </a:rPr>
+              <a:t>→ [DS] skills/icon-use</a:t>
+            </a:r>
+            <a:endParaRPr lang="en-US" sz="1050" dirty="0"/>
+          </a:p>
+        </p:txBody>
+      </p:sp>
+      <p:sp>
+        <p:nvSpPr>
+          <p:cNvPr id="44" name="Text 42"/>
+          <p:cNvSpPr/>
+          <p:nvPr/>
+        </p:nvSpPr>
+        <p:spPr>
+          <a:xfrm>
+            <a:off x="777240" y="5806440"/>
+            <a:ext cx="10637215" cy="274320"/>
+          </a:xfrm>
+          <a:prstGeom prst="rect">
+            <a:avLst/>
+          </a:prstGeom>
+          <a:noFill/>
+          <a:ln/>
+        </p:spPr>
+        <p:txBody>
+          <a:bodyPr wrap="square" lIns="0" tIns="0" rIns="0" bIns="0" rtlCol="0" anchor="t"/>
+          <a:lstStyle/>
+          <a:p>
+            <a:pPr algn="l" indent="0" marL="0">
+              <a:lnSpc>
+                <a:spcPct val="130000"/>
+              </a:lnSpc>
+              <a:buNone/>
+            </a:pPr>
+            <a:r>
+              <a:rPr lang="en-US" sz="1100" dirty="0">
+                <a:solidFill>
+                  <a:srgbClr val="6E6E73"/>
                 </a:solidFill>
                 <a:latin typeface="Pretendard Medium" pitchFamily="34" charset="0"/>
                 <a:ea typeface="Pretendard Medium" pitchFamily="34" charset="-122"/>
                 <a:cs typeface="Pretendard Medium" pitchFamily="34" charset="-120"/>
               </a:rPr>
-              <a:t>“아이콘 바꿔줘”</a:t>
-            </a:r>
-            <a:endParaRPr lang="en-US" sz="1150" dirty="0"/>
-          </a:p>
-        </p:txBody>
-      </p:sp>
-      <p:sp>
-        <p:nvSpPr>
-          <p:cNvPr id="42" name="Text 40"/>
-          <p:cNvSpPr/>
-          <p:nvPr/>
-        </p:nvSpPr>
-        <p:spPr>
-          <a:xfrm>
-            <a:off x="4983480" y="5422392"/>
-            <a:ext cx="2468880" cy="320040"/>
-          </a:xfrm>
-          <a:prstGeom prst="rect">
-            <a:avLst/>
-          </a:prstGeom>
-          <a:noFill/>
-          <a:ln/>
-        </p:spPr>
-        <p:txBody>
-          <a:bodyPr wrap="square" lIns="0" tIns="0" rIns="0" bIns="0" rtlCol="0" anchor="ctr"/>
-          <a:lstStyle/>
-          <a:p>
-            <a:pPr algn="l" indent="0" marL="0">
-              <a:lnSpc>
-                <a:spcPct val="130000"/>
-              </a:lnSpc>
-              <a:buNone/>
-            </a:pPr>
-            <a:r>
-              <a:rPr lang="en-US" sz="1100" dirty="0">
-                <a:solidFill>
-                  <a:srgbClr val="6C4CFF"/>
-                </a:solidFill>
-                <a:latin typeface="Pretendard SemiBold" pitchFamily="34" charset="0"/>
-                <a:ea typeface="Pretendard SemiBold" pitchFamily="34" charset="-122"/>
-                <a:cs typeface="Pretendard SemiBold" pitchFamily="34" charset="-120"/>
-              </a:rPr>
-              <a:t>design-system</a:t>
-            </a:r>
-            <a:endParaRPr lang="en-US" sz="1100" dirty="0"/>
-          </a:p>
-        </p:txBody>
-      </p:sp>
-      <p:sp>
-        <p:nvSpPr>
-          <p:cNvPr id="43" name="Text 41"/>
-          <p:cNvSpPr/>
-          <p:nvPr/>
-        </p:nvSpPr>
-        <p:spPr>
-          <a:xfrm>
-            <a:off x="7543800" y="5422392"/>
-            <a:ext cx="3578047" cy="320040"/>
-          </a:xfrm>
-          <a:prstGeom prst="rect">
-            <a:avLst/>
-          </a:prstGeom>
-          <a:noFill/>
-          <a:ln/>
-        </p:spPr>
-        <p:txBody>
-          <a:bodyPr wrap="square" lIns="0" tIns="0" rIns="0" bIns="0" rtlCol="0" anchor="ctr"/>
-          <a:lstStyle/>
-          <a:p>
-            <a:pPr algn="l" indent="0" marL="0">
-              <a:lnSpc>
-                <a:spcPct val="130000"/>
-              </a:lnSpc>
-              <a:buNone/>
-            </a:pPr>
-            <a:r>
-              <a:rPr lang="en-US" sz="1100" dirty="0">
-                <a:solidFill>
-                  <a:srgbClr val="55555A"/>
-                </a:solidFill>
-                <a:latin typeface="Pretendard" pitchFamily="34" charset="0"/>
-                <a:ea typeface="Pretendard" pitchFamily="34" charset="-122"/>
-                <a:cs typeface="Pretendard" pitchFamily="34" charset="-120"/>
-              </a:rPr>
-              <a:t>skills/cdbd-icon-use</a:t>
-            </a:r>
-            <a:endParaRPr lang="en-US" sz="1100" dirty="0"/>
-          </a:p>
-        </p:txBody>
-      </p:sp>
-      <p:sp>
-        <p:nvSpPr>
-          <p:cNvPr id="44" name="Text 42"/>
-          <p:cNvSpPr/>
-          <p:nvPr/>
-        </p:nvSpPr>
-        <p:spPr>
-          <a:xfrm>
-            <a:off x="777240" y="5907024"/>
-            <a:ext cx="10637215" cy="274320"/>
-          </a:xfrm>
-          <a:prstGeom prst="rect">
-            <a:avLst/>
-          </a:prstGeom>
-          <a:noFill/>
-          <a:ln/>
-        </p:spPr>
-        <p:txBody>
-          <a:bodyPr wrap="square" lIns="0" tIns="0" rIns="0" bIns="0" rtlCol="0" anchor="t"/>
-          <a:lstStyle/>
-          <a:p>
-            <a:pPr algn="l" indent="0" marL="0">
-              <a:lnSpc>
-                <a:spcPct val="130000"/>
-              </a:lnSpc>
-              <a:buNone/>
-            </a:pPr>
-            <a:r>
-              <a:rPr lang="en-US" sz="1100" dirty="0">
-                <a:solidFill>
-                  <a:srgbClr val="6E6E73"/>
-                </a:solidFill>
-                <a:latin typeface="Pretendard Medium" pitchFamily="34" charset="0"/>
-                <a:ea typeface="Pretendard Medium" pitchFamily="34" charset="-122"/>
-                <a:cs typeface="Pretendard Medium" pitchFamily="34" charset="-120"/>
-              </a:rPr>
-              <a:t>핵심 — 각 줄이 ‘볼트 + 파일’을 가리켜, 어느 볼트 것이든 이 한 파일에서 라우팅됩니다.</a:t>
+              <a:t>핵심 — CdBd 기능뿐 아니라 룩북·QR·마케팅 작업까지 전부. 어느 볼트에서 켜도 이 한 파일로 다 압니다.</a:t>
             </a:r>
             <a:endParaRPr lang="en-US" sz="1100" dirty="0"/>
           </a:p>

--- a/CdBd 기능 문서 구조 설계.pptx
+++ b/CdBd 기능 문서 구조 설계.pptx
@@ -11775,7 +11775,7 @@
                 <a:ea typeface="Pretendard" pitchFamily="34" charset="-122"/>
                 <a:cs typeface="Pretendard" pitchFamily="34" charset="-120"/>
               </a:rPr>
-              <a:t>10p 분류(에디터·대시보드) 그대로 + 다른 볼트 작업까지 합쳐, ‘어느 기능이 어느 파일에’.</a:t>
+              <a:t>10p 분류 그대로 · CdBd 기능만. 3개 볼트(T·SV·DS)에 흩어진 걸 한 파일에 모읍니다.</a:t>
             </a:r>
             <a:endParaRPr lang="en-US" sz="1500" dirty="0"/>
           </a:p>
@@ -11937,7 +11937,7 @@
                 <a:ea typeface="Pretendard SemiBold" pitchFamily="34" charset="-122"/>
                 <a:cs typeface="Pretendard SemiBold" pitchFamily="34" charset="-120"/>
               </a:rPr>
-              <a:t>CdBd 기능 (에디터 · 대시보드)</a:t>
+              <a:t>Ⓑ 에디터</a:t>
             </a:r>
             <a:endParaRPr lang="en-US" sz="1250" dirty="0"/>
           </a:p>
@@ -11974,8 +11974,8 @@
         </p:nvSpPr>
         <p:spPr>
           <a:xfrm>
-            <a:off x="777240" y="2724912"/>
-            <a:ext cx="1874520" cy="365760"/>
+            <a:off x="777240" y="2706624"/>
+            <a:ext cx="1965960" cy="347472"/>
           </a:xfrm>
           <a:prstGeom prst="rect">
             <a:avLst/>
@@ -11994,7 +11994,7 @@
               <a:buNone/>
             </a:pPr>
             <a:r>
-              <a:rPr lang="en-US" sz="1150" dirty="0">
+              <a:rPr lang="en-US" sz="1100" dirty="0">
                 <a:solidFill>
                   <a:srgbClr val="1D1D1F"/>
                 </a:solidFill>
@@ -12004,7 +12004,7 @@
               </a:rPr>
               <a:t>카드 15종</a:t>
             </a:r>
-            <a:endParaRPr lang="en-US" sz="1150" dirty="0"/>
+            <a:endParaRPr lang="en-US" sz="1100" dirty="0"/>
           </a:p>
         </p:txBody>
       </p:sp>
@@ -12016,8 +12016,8 @@
         </p:nvSpPr>
         <p:spPr>
           <a:xfrm>
-            <a:off x="2697480" y="2724912"/>
-            <a:ext cx="3154680" cy="365760"/>
+            <a:off x="2788920" y="2706624"/>
+            <a:ext cx="3063240" cy="347472"/>
           </a:xfrm>
           <a:prstGeom prst="rect">
             <a:avLst/>
@@ -12036,7 +12036,7 @@
               <a:buNone/>
             </a:pPr>
             <a:r>
-              <a:rPr lang="en-US" sz="1050" dirty="0">
+              <a:rPr lang="en-US" sz="1000" dirty="0">
                 <a:solidFill>
                   <a:srgbClr val="55555A"/>
                 </a:solidFill>
@@ -12046,7 +12046,7 @@
               </a:rPr>
               <a:t>→ [T] 1-6-2 · [DS] 4-x</a:t>
             </a:r>
-            <a:endParaRPr lang="en-US" sz="1050" dirty="0"/>
+            <a:endParaRPr lang="en-US" sz="1000" dirty="0"/>
           </a:p>
         </p:txBody>
       </p:sp>
@@ -12058,7 +12058,7 @@
         </p:nvSpPr>
         <p:spPr>
           <a:xfrm>
-            <a:off x="777240" y="3127248"/>
+            <a:off x="777240" y="3063240"/>
             <a:ext cx="5074920" cy="0"/>
           </a:xfrm>
           <a:prstGeom prst="line">
@@ -12081,8 +12081,8 @@
         </p:nvSpPr>
         <p:spPr>
           <a:xfrm>
-            <a:off x="777240" y="3182112"/>
-            <a:ext cx="1874520" cy="365760"/>
+            <a:off x="777240" y="3108960"/>
+            <a:ext cx="1965960" cy="347472"/>
           </a:xfrm>
           <a:prstGeom prst="rect">
             <a:avLst/>
@@ -12101,7 +12101,7 @@
               <a:buNone/>
             </a:pPr>
             <a:r>
-              <a:rPr lang="en-US" sz="1150" dirty="0">
+              <a:rPr lang="en-US" sz="1100" dirty="0">
                 <a:solidFill>
                   <a:srgbClr val="1D1D1F"/>
                 </a:solidFill>
@@ -12109,9 +12109,9 @@
                 <a:ea typeface="Pretendard SemiBold" pitchFamily="34" charset="-122"/>
                 <a:cs typeface="Pretendard SemiBold" pitchFamily="34" charset="-120"/>
               </a:rPr>
-              <a:t>페이지 구성·꾸미기</a:t>
-            </a:r>
-            <a:endParaRPr lang="en-US" sz="1150" dirty="0"/>
+              <a:t>카드 자동화</a:t>
+            </a:r>
+            <a:endParaRPr lang="en-US" sz="1100" dirty="0"/>
           </a:p>
         </p:txBody>
       </p:sp>
@@ -12123,8 +12123,8 @@
         </p:nvSpPr>
         <p:spPr>
           <a:xfrm>
-            <a:off x="2697480" y="3182112"/>
-            <a:ext cx="3154680" cy="365760"/>
+            <a:off x="2788920" y="3108960"/>
+            <a:ext cx="3063240" cy="347472"/>
           </a:xfrm>
           <a:prstGeom prst="rect">
             <a:avLst/>
@@ -12143,7 +12143,7 @@
               <a:buNone/>
             </a:pPr>
             <a:r>
-              <a:rPr lang="en-US" sz="1050" dirty="0">
+              <a:rPr lang="en-US" sz="1000" dirty="0">
                 <a:solidFill>
                   <a:srgbClr val="55555A"/>
                 </a:solidFill>
@@ -12151,9 +12151,9 @@
                 <a:ea typeface="Pretendard" pitchFamily="34" charset="-122"/>
                 <a:cs typeface="Pretendard" pitchFamily="34" charset="-120"/>
               </a:rPr>
-              <a:t>→ [DS] 3-2-x · [T] 1-6-1</a:t>
-            </a:r>
-            <a:endParaRPr lang="en-US" sz="1050" dirty="0"/>
+              <a:t>→ [T] skills/card-automation</a:t>
+            </a:r>
+            <a:endParaRPr lang="en-US" sz="1000" dirty="0"/>
           </a:p>
         </p:txBody>
       </p:sp>
@@ -12165,7 +12165,7 @@
         </p:nvSpPr>
         <p:spPr>
           <a:xfrm>
-            <a:off x="777240" y="3584448"/>
+            <a:off x="777240" y="3465576"/>
             <a:ext cx="5074920" cy="0"/>
           </a:xfrm>
           <a:prstGeom prst="line">
@@ -12188,8 +12188,8 @@
         </p:nvSpPr>
         <p:spPr>
           <a:xfrm>
-            <a:off x="777240" y="3639312"/>
-            <a:ext cx="1874520" cy="365760"/>
+            <a:off x="777240" y="3511296"/>
+            <a:ext cx="1965960" cy="347472"/>
           </a:xfrm>
           <a:prstGeom prst="rect">
             <a:avLst/>
@@ -12208,7 +12208,7 @@
               <a:buNone/>
             </a:pPr>
             <a:r>
-              <a:rPr lang="en-US" sz="1150" dirty="0">
+              <a:rPr lang="en-US" sz="1100" dirty="0">
                 <a:solidFill>
                   <a:srgbClr val="1D1D1F"/>
                 </a:solidFill>
@@ -12216,9 +12216,9 @@
                 <a:ea typeface="Pretendard SemiBold" pitchFamily="34" charset="-122"/>
                 <a:cs typeface="Pretendard SemiBold" pitchFamily="34" charset="-120"/>
               </a:rPr>
-              <a:t>게시 (URL · OG)</a:t>
-            </a:r>
-            <a:endParaRPr lang="en-US" sz="1150" dirty="0"/>
+              <a:t>페이지 구성·꾸미기</a:t>
+            </a:r>
+            <a:endParaRPr lang="en-US" sz="1100" dirty="0"/>
           </a:p>
         </p:txBody>
       </p:sp>
@@ -12230,8 +12230,8 @@
         </p:nvSpPr>
         <p:spPr>
           <a:xfrm>
-            <a:off x="2697480" y="3639312"/>
-            <a:ext cx="3154680" cy="365760"/>
+            <a:off x="2788920" y="3511296"/>
+            <a:ext cx="3063240" cy="347472"/>
           </a:xfrm>
           <a:prstGeom prst="rect">
             <a:avLst/>
@@ -12250,7 +12250,7 @@
               <a:buNone/>
             </a:pPr>
             <a:r>
-              <a:rPr lang="en-US" sz="1050" dirty="0">
+              <a:rPr lang="en-US" sz="1000" dirty="0">
                 <a:solidFill>
                   <a:srgbClr val="55555A"/>
                 </a:solidFill>
@@ -12258,9 +12258,9 @@
                 <a:ea typeface="Pretendard" pitchFamily="34" charset="-122"/>
                 <a:cs typeface="Pretendard" pitchFamily="34" charset="-120"/>
               </a:rPr>
-              <a:t>→ [SV] 1-4 §게시</a:t>
-            </a:r>
-            <a:endParaRPr lang="en-US" sz="1050" dirty="0"/>
+              <a:t>→ [DS] 3-2-x · [T] 1-6-1</a:t>
+            </a:r>
+            <a:endParaRPr lang="en-US" sz="1000" dirty="0"/>
           </a:p>
         </p:txBody>
       </p:sp>
@@ -12272,7 +12272,7 @@
         </p:nvSpPr>
         <p:spPr>
           <a:xfrm>
-            <a:off x="777240" y="4041648"/>
+            <a:off x="777240" y="3867912"/>
             <a:ext cx="5074920" cy="0"/>
           </a:xfrm>
           <a:prstGeom prst="line">
@@ -12295,8 +12295,8 @@
         </p:nvSpPr>
         <p:spPr>
           <a:xfrm>
-            <a:off x="777240" y="4096512"/>
-            <a:ext cx="1874520" cy="365760"/>
+            <a:off x="777240" y="3913632"/>
+            <a:ext cx="1965960" cy="347472"/>
           </a:xfrm>
           <a:prstGeom prst="rect">
             <a:avLst/>
@@ -12315,7 +12315,7 @@
               <a:buNone/>
             </a:pPr>
             <a:r>
-              <a:rPr lang="en-US" sz="1150" dirty="0">
+              <a:rPr lang="en-US" sz="1100" dirty="0">
                 <a:solidFill>
                   <a:srgbClr val="1D1D1F"/>
                 </a:solidFill>
@@ -12323,9 +12323,9 @@
                 <a:ea typeface="Pretendard SemiBold" pitchFamily="34" charset="-122"/>
                 <a:cs typeface="Pretendard SemiBold" pitchFamily="34" charset="-120"/>
               </a:rPr>
-              <a:t>페이지 · URL 통계</a:t>
-            </a:r>
-            <a:endParaRPr lang="en-US" sz="1150" dirty="0"/>
+              <a:t>이미지 라이브러리</a:t>
+            </a:r>
+            <a:endParaRPr lang="en-US" sz="1100" dirty="0"/>
           </a:p>
         </p:txBody>
       </p:sp>
@@ -12337,8 +12337,8 @@
         </p:nvSpPr>
         <p:spPr>
           <a:xfrm>
-            <a:off x="2697480" y="4096512"/>
-            <a:ext cx="3154680" cy="365760"/>
+            <a:off x="2788920" y="3913632"/>
+            <a:ext cx="3063240" cy="347472"/>
           </a:xfrm>
           <a:prstGeom prst="rect">
             <a:avLst/>
@@ -12357,7 +12357,7 @@
               <a:buNone/>
             </a:pPr>
             <a:r>
-              <a:rPr lang="en-US" sz="1050" dirty="0">
+              <a:rPr lang="en-US" sz="1000" dirty="0">
                 <a:solidFill>
                   <a:srgbClr val="55555A"/>
                 </a:solidFill>
@@ -12365,9 +12365,9 @@
                 <a:ea typeface="Pretendard" pitchFamily="34" charset="-122"/>
                 <a:cs typeface="Pretendard" pitchFamily="34" charset="-120"/>
               </a:rPr>
-              <a:t>→ [DS] 3-11 통계</a:t>
-            </a:r>
-            <a:endParaRPr lang="en-US" sz="1050" dirty="0"/>
+              <a:t>→ [SV] CLAUDE §이미지</a:t>
+            </a:r>
+            <a:endParaRPr lang="en-US" sz="1000" dirty="0"/>
           </a:p>
         </p:txBody>
       </p:sp>
@@ -12379,7 +12379,7 @@
         </p:nvSpPr>
         <p:spPr>
           <a:xfrm>
-            <a:off x="777240" y="4498848"/>
+            <a:off x="777240" y="4270248"/>
             <a:ext cx="5074920" cy="0"/>
           </a:xfrm>
           <a:prstGeom prst="line">
@@ -12402,8 +12402,8 @@
         </p:nvSpPr>
         <p:spPr>
           <a:xfrm>
-            <a:off x="777240" y="4553712"/>
-            <a:ext cx="1874520" cy="365760"/>
+            <a:off x="777240" y="4315968"/>
+            <a:ext cx="1965960" cy="347472"/>
           </a:xfrm>
           <a:prstGeom prst="rect">
             <a:avLst/>
@@ -12422,7 +12422,7 @@
               <a:buNone/>
             </a:pPr>
             <a:r>
-              <a:rPr lang="en-US" sz="1150" dirty="0">
+              <a:rPr lang="en-US" sz="1100" dirty="0">
                 <a:solidFill>
                   <a:srgbClr val="1D1D1F"/>
                 </a:solidFill>
@@ -12430,9 +12430,9 @@
                 <a:ea typeface="Pretendard SemiBold" pitchFamily="34" charset="-122"/>
                 <a:cs typeface="Pretendard SemiBold" pitchFamily="34" charset="-120"/>
               </a:rPr>
-              <a:t>계정 · 주소 · 요금</a:t>
-            </a:r>
-            <a:endParaRPr lang="en-US" sz="1150" dirty="0"/>
+              <a:t>게시 (URL · OG)</a:t>
+            </a:r>
+            <a:endParaRPr lang="en-US" sz="1100" dirty="0"/>
           </a:p>
         </p:txBody>
       </p:sp>
@@ -12444,8 +12444,8 @@
         </p:nvSpPr>
         <p:spPr>
           <a:xfrm>
-            <a:off x="2697480" y="4553712"/>
-            <a:ext cx="3154680" cy="365760"/>
+            <a:off x="2788920" y="4315968"/>
+            <a:ext cx="3063240" cy="347472"/>
           </a:xfrm>
           <a:prstGeom prst="rect">
             <a:avLst/>
@@ -12464,7 +12464,7 @@
               <a:buNone/>
             </a:pPr>
             <a:r>
-              <a:rPr lang="en-US" sz="1050" dirty="0">
+              <a:rPr lang="en-US" sz="1000" dirty="0">
                 <a:solidFill>
                   <a:srgbClr val="55555A"/>
                 </a:solidFill>
@@ -12472,9 +12472,9 @@
                 <a:ea typeface="Pretendard" pitchFamily="34" charset="-122"/>
                 <a:cs typeface="Pretendard" pitchFamily="34" charset="-120"/>
               </a:rPr>
-              <a:t>→ [DS] 3-8 · 3-5</a:t>
-            </a:r>
-            <a:endParaRPr lang="en-US" sz="1050" dirty="0"/>
+              <a:t>→ [SV] 1-4 §게시</a:t>
+            </a:r>
+            <a:endParaRPr lang="en-US" sz="1000" dirty="0"/>
           </a:p>
         </p:txBody>
       </p:sp>
@@ -12486,7 +12486,7 @@
         </p:nvSpPr>
         <p:spPr>
           <a:xfrm>
-            <a:off x="777240" y="4956048"/>
+            <a:off x="777240" y="4672584"/>
             <a:ext cx="5074920" cy="0"/>
           </a:xfrm>
           <a:prstGeom prst="line">
@@ -12509,8 +12509,8 @@
         </p:nvSpPr>
         <p:spPr>
           <a:xfrm>
-            <a:off x="777240" y="5010912"/>
-            <a:ext cx="1874520" cy="365760"/>
+            <a:off x="777240" y="4718304"/>
+            <a:ext cx="1965960" cy="347472"/>
           </a:xfrm>
           <a:prstGeom prst="rect">
             <a:avLst/>
@@ -12529,7 +12529,7 @@
               <a:buNone/>
             </a:pPr>
             <a:r>
-              <a:rPr lang="en-US" sz="1150" dirty="0">
+              <a:rPr lang="en-US" sz="1100" dirty="0">
                 <a:solidFill>
                   <a:srgbClr val="1D1D1F"/>
                 </a:solidFill>
@@ -12537,9 +12537,9 @@
                 <a:ea typeface="Pretendard SemiBold" pitchFamily="34" charset="-122"/>
                 <a:cs typeface="Pretendard SemiBold" pitchFamily="34" charset="-120"/>
               </a:rPr>
-              <a:t>버전 · 권한</a:t>
-            </a:r>
-            <a:endParaRPr lang="en-US" sz="1150" dirty="0"/>
+              <a:t>페이지 비밀번호</a:t>
+            </a:r>
+            <a:endParaRPr lang="en-US" sz="1100" dirty="0"/>
           </a:p>
         </p:txBody>
       </p:sp>
@@ -12551,8 +12551,8 @@
         </p:nvSpPr>
         <p:spPr>
           <a:xfrm>
-            <a:off x="2697480" y="5010912"/>
-            <a:ext cx="3154680" cy="365760"/>
+            <a:off x="2788920" y="4718304"/>
+            <a:ext cx="3063240" cy="347472"/>
           </a:xfrm>
           <a:prstGeom prst="rect">
             <a:avLst/>
@@ -12571,7 +12571,7 @@
               <a:buNone/>
             </a:pPr>
             <a:r>
-              <a:rPr lang="en-US" sz="1050" dirty="0">
+              <a:rPr lang="en-US" sz="1000" dirty="0">
                 <a:solidFill>
                   <a:srgbClr val="55555A"/>
                 </a:solidFill>
@@ -12579,31 +12579,54 @@
                 <a:ea typeface="Pretendard" pitchFamily="34" charset="-122"/>
                 <a:cs typeface="Pretendard" pitchFamily="34" charset="-120"/>
               </a:rPr>
-              <a:t>→ [DS] 3-15 · 3-13</a:t>
-            </a:r>
-            <a:endParaRPr lang="en-US" sz="1050" dirty="0"/>
-          </a:p>
-        </p:txBody>
-      </p:sp>
-      <p:sp>
-        <p:nvSpPr>
-          <p:cNvPr id="28" name="Text 26"/>
-          <p:cNvSpPr/>
-          <p:nvPr/>
-        </p:nvSpPr>
-        <p:spPr>
-          <a:xfrm>
-            <a:off x="6336792" y="2286000"/>
-            <a:ext cx="5074920" cy="274320"/>
-          </a:xfrm>
-          <a:prstGeom prst="rect">
-            <a:avLst/>
-          </a:prstGeom>
-          <a:noFill/>
-          <a:ln/>
-        </p:spPr>
-        <p:txBody>
-          <a:bodyPr wrap="square" lIns="0" tIns="0" rIns="0" bIns="0" rtlCol="0" anchor="t"/>
+              <a:t>→ [SV] 1-4 모달</a:t>
+            </a:r>
+            <a:endParaRPr lang="en-US" sz="1000" dirty="0"/>
+          </a:p>
+        </p:txBody>
+      </p:sp>
+      <p:sp>
+        <p:nvSpPr>
+          <p:cNvPr id="28" name="Shape 26"/>
+          <p:cNvSpPr/>
+          <p:nvPr/>
+        </p:nvSpPr>
+        <p:spPr>
+          <a:xfrm>
+            <a:off x="777240" y="5074920"/>
+            <a:ext cx="5074920" cy="0"/>
+          </a:xfrm>
+          <a:prstGeom prst="line">
+            <a:avLst/>
+          </a:prstGeom>
+          <a:noFill/>
+          <a:ln w="6350">
+            <a:solidFill>
+              <a:srgbClr val="F0F0F0"/>
+            </a:solidFill>
+            <a:prstDash val="solid"/>
+          </a:ln>
+        </p:spPr>
+      </p:sp>
+      <p:sp>
+        <p:nvSpPr>
+          <p:cNvPr id="29" name="Text 27"/>
+          <p:cNvSpPr/>
+          <p:nvPr/>
+        </p:nvSpPr>
+        <p:spPr>
+          <a:xfrm>
+            <a:off x="777240" y="5120640"/>
+            <a:ext cx="1965960" cy="347472"/>
+          </a:xfrm>
+          <a:prstGeom prst="rect">
+            <a:avLst/>
+          </a:prstGeom>
+          <a:noFill/>
+          <a:ln/>
+        </p:spPr>
+        <p:txBody>
+          <a:bodyPr wrap="square" lIns="0" tIns="0" rIns="0" bIns="0" rtlCol="0" anchor="ctr"/>
           <a:lstStyle/>
           <a:p>
             <a:pPr algn="l" indent="0" marL="0">
@@ -12613,15 +12636,99 @@
               <a:buNone/>
             </a:pPr>
             <a:r>
-              <a:rPr lang="en-US" sz="1250" dirty="0">
-                <a:solidFill>
-                  <a:srgbClr val="6C4CFF"/>
+              <a:rPr lang="en-US" sz="1100" dirty="0">
+                <a:solidFill>
+                  <a:srgbClr val="1D1D1F"/>
                 </a:solidFill>
                 <a:latin typeface="Pretendard SemiBold" pitchFamily="34" charset="0"/>
                 <a:ea typeface="Pretendard SemiBold" pitchFamily="34" charset="-122"/>
                 <a:cs typeface="Pretendard SemiBold" pitchFamily="34" charset="-120"/>
               </a:rPr>
-              <a:t>다른 볼트 — 제작 작업</a:t>
+              <a:t>데이터 연결</a:t>
+            </a:r>
+            <a:endParaRPr lang="en-US" sz="1100" dirty="0"/>
+          </a:p>
+        </p:txBody>
+      </p:sp>
+      <p:sp>
+        <p:nvSpPr>
+          <p:cNvPr id="30" name="Text 28"/>
+          <p:cNvSpPr/>
+          <p:nvPr/>
+        </p:nvSpPr>
+        <p:spPr>
+          <a:xfrm>
+            <a:off x="2788920" y="5120640"/>
+            <a:ext cx="3063240" cy="347472"/>
+          </a:xfrm>
+          <a:prstGeom prst="rect">
+            <a:avLst/>
+          </a:prstGeom>
+          <a:noFill/>
+          <a:ln/>
+        </p:spPr>
+        <p:txBody>
+          <a:bodyPr wrap="square" lIns="0" tIns="0" rIns="0" bIns="0" rtlCol="0" anchor="ctr"/>
+          <a:lstStyle/>
+          <a:p>
+            <a:pPr algn="l" indent="0" marL="0">
+              <a:lnSpc>
+                <a:spcPct val="130000"/>
+              </a:lnSpc>
+              <a:buNone/>
+            </a:pPr>
+            <a:r>
+              <a:rPr lang="en-US" sz="1000" dirty="0">
+                <a:solidFill>
+                  <a:srgbClr val="55555A"/>
+                </a:solidFill>
+                <a:latin typeface="Pretendard" pitchFamily="34" charset="0"/>
+                <a:ea typeface="Pretendard" pitchFamily="34" charset="-122"/>
+                <a:cs typeface="Pretendard" pitchFamily="34" charset="-120"/>
+              </a:rPr>
+              <a:t>→ [DS] 3-10 데이터 관리</a:t>
+            </a:r>
+            <a:endParaRPr lang="en-US" sz="1000" dirty="0"/>
+          </a:p>
+        </p:txBody>
+      </p:sp>
+      <p:sp>
+        <p:nvSpPr>
+          <p:cNvPr id="31" name="Text 29"/>
+          <p:cNvSpPr/>
+          <p:nvPr/>
+        </p:nvSpPr>
+        <p:spPr>
+          <a:xfrm>
+            <a:off x="6336792" y="2286000"/>
+            <a:ext cx="5074920" cy="274320"/>
+          </a:xfrm>
+          <a:prstGeom prst="rect">
+            <a:avLst/>
+          </a:prstGeom>
+          <a:noFill/>
+          <a:ln/>
+        </p:spPr>
+        <p:txBody>
+          <a:bodyPr wrap="square" lIns="0" tIns="0" rIns="0" bIns="0" rtlCol="0" anchor="t"/>
+          <a:lstStyle/>
+          <a:p>
+            <a:pPr algn="l" indent="0" marL="0">
+              <a:lnSpc>
+                <a:spcPct val="130000"/>
+              </a:lnSpc>
+              <a:buNone/>
+            </a:pPr>
+            <a:r>
+              <a:rPr lang="en-US" sz="1250" dirty="0">
+                <a:solidFill>
+                  <a:srgbClr val="6C4CFF"/>
+                </a:solidFill>
+                <a:latin typeface="Pretendard SemiBold" pitchFamily="34" charset="0"/>
+                <a:ea typeface="Pretendard SemiBold" pitchFamily="34" charset="-122"/>
+                <a:cs typeface="Pretendard SemiBold" pitchFamily="34" charset="-120"/>
+              </a:rPr>
+              <a:t>Ⓐ 대시보드 (계정)</a:t>
             </a:r>
             <a:endParaRPr lang="en-US" sz="1250" dirty="0"/>
           </a:p>
@@ -12629,7 +12736,7 @@
       </p:sp>
       <p:sp>
         <p:nvSpPr>
-          <p:cNvPr id="29" name="Shape 27"/>
+          <p:cNvPr id="32" name="Shape 30"/>
           <p:cNvSpPr/>
           <p:nvPr/>
         </p:nvSpPr>
@@ -12652,14 +12759,14 @@
       </p:sp>
       <p:sp>
         <p:nvSpPr>
-          <p:cNvPr id="30" name="Text 28"/>
-          <p:cNvSpPr/>
-          <p:nvPr/>
-        </p:nvSpPr>
-        <p:spPr>
-          <a:xfrm>
-            <a:off x="6336792" y="2724912"/>
-            <a:ext cx="1874520" cy="365760"/>
+          <p:cNvPr id="33" name="Text 31"/>
+          <p:cNvSpPr/>
+          <p:nvPr/>
+        </p:nvSpPr>
+        <p:spPr>
+          <a:xfrm>
+            <a:off x="6336792" y="2706624"/>
+            <a:ext cx="1965960" cy="347472"/>
           </a:xfrm>
           <a:prstGeom prst="rect">
             <a:avLst/>
@@ -12678,7 +12785,7 @@
               <a:buNone/>
             </a:pPr>
             <a:r>
-              <a:rPr lang="en-US" sz="1150" dirty="0">
+              <a:rPr lang="en-US" sz="1100" dirty="0">
                 <a:solidFill>
                   <a:srgbClr val="1D1D1F"/>
                 </a:solidFill>
@@ -12686,22 +12793,22 @@
                 <a:ea typeface="Pretendard SemiBold" pitchFamily="34" charset="-122"/>
                 <a:cs typeface="Pretendard SemiBold" pitchFamily="34" charset="-120"/>
               </a:rPr>
-              <a:t>룩북 시안</a:t>
-            </a:r>
-            <a:endParaRPr lang="en-US" sz="1150" dirty="0"/>
-          </a:p>
-        </p:txBody>
-      </p:sp>
-      <p:sp>
-        <p:nvSpPr>
-          <p:cNvPr id="31" name="Text 29"/>
-          <p:cNvSpPr/>
-          <p:nvPr/>
-        </p:nvSpPr>
-        <p:spPr>
-          <a:xfrm>
-            <a:off x="8257032" y="2724912"/>
-            <a:ext cx="3154680" cy="365760"/>
+              <a:t>회원가입 · 로그인</a:t>
+            </a:r>
+            <a:endParaRPr lang="en-US" sz="1100" dirty="0"/>
+          </a:p>
+        </p:txBody>
+      </p:sp>
+      <p:sp>
+        <p:nvSpPr>
+          <p:cNvPr id="34" name="Text 32"/>
+          <p:cNvSpPr/>
+          <p:nvPr/>
+        </p:nvSpPr>
+        <p:spPr>
+          <a:xfrm>
+            <a:off x="8348472" y="2706624"/>
+            <a:ext cx="3063240" cy="347472"/>
           </a:xfrm>
           <a:prstGeom prst="rect">
             <a:avLst/>
@@ -12720,7 +12827,7 @@
               <a:buNone/>
             </a:pPr>
             <a:r>
-              <a:rPr lang="en-US" sz="1050" dirty="0">
+              <a:rPr lang="en-US" sz="1000" dirty="0">
                 <a:solidFill>
                   <a:srgbClr val="55555A"/>
                 </a:solidFill>
@@ -12728,21 +12835,21 @@
                 <a:ea typeface="Pretendard" pitchFamily="34" charset="-122"/>
                 <a:cs typeface="Pretendard" pitchFamily="34" charset="-120"/>
               </a:rPr>
-              <a:t>→ [SV] 룩북/1-2. 시안</a:t>
-            </a:r>
-            <a:endParaRPr lang="en-US" sz="1050" dirty="0"/>
-          </a:p>
-        </p:txBody>
-      </p:sp>
-      <p:sp>
-        <p:nvSpPr>
-          <p:cNvPr id="32" name="Shape 30"/>
-          <p:cNvSpPr/>
-          <p:nvPr/>
-        </p:nvSpPr>
-        <p:spPr>
-          <a:xfrm>
-            <a:off x="6336792" y="3127248"/>
+              <a:t>→ [DS] 3-6</a:t>
+            </a:r>
+            <a:endParaRPr lang="en-US" sz="1000" dirty="0"/>
+          </a:p>
+        </p:txBody>
+      </p:sp>
+      <p:sp>
+        <p:nvSpPr>
+          <p:cNvPr id="35" name="Shape 33"/>
+          <p:cNvSpPr/>
+          <p:nvPr/>
+        </p:nvSpPr>
+        <p:spPr>
+          <a:xfrm>
+            <a:off x="6336792" y="3063240"/>
             <a:ext cx="5074920" cy="0"/>
           </a:xfrm>
           <a:prstGeom prst="line">
@@ -12759,14 +12866,14 @@
       </p:sp>
       <p:sp>
         <p:nvSpPr>
-          <p:cNvPr id="33" name="Text 31"/>
-          <p:cNvSpPr/>
-          <p:nvPr/>
-        </p:nvSpPr>
-        <p:spPr>
-          <a:xfrm>
-            <a:off x="6336792" y="3182112"/>
-            <a:ext cx="1874520" cy="365760"/>
+          <p:cNvPr id="36" name="Text 34"/>
+          <p:cNvSpPr/>
+          <p:nvPr/>
+        </p:nvSpPr>
+        <p:spPr>
+          <a:xfrm>
+            <a:off x="6336792" y="3108960"/>
+            <a:ext cx="1965960" cy="347472"/>
           </a:xfrm>
           <a:prstGeom prst="rect">
             <a:avLst/>
@@ -12785,7 +12892,7 @@
               <a:buNone/>
             </a:pPr>
             <a:r>
-              <a:rPr lang="en-US" sz="1150" dirty="0">
+              <a:rPr lang="en-US" sz="1100" dirty="0">
                 <a:solidFill>
                   <a:srgbClr val="1D1D1F"/>
                 </a:solidFill>
@@ -12793,22 +12900,22 @@
                 <a:ea typeface="Pretendard SemiBold" pitchFamily="34" charset="-122"/>
                 <a:cs typeface="Pretendard SemiBold" pitchFamily="34" charset="-120"/>
               </a:rPr>
-              <a:t>소식지</a:t>
-            </a:r>
-            <a:endParaRPr lang="en-US" sz="1150" dirty="0"/>
-          </a:p>
-        </p:txBody>
-      </p:sp>
-      <p:sp>
-        <p:nvSpPr>
-          <p:cNvPr id="34" name="Text 32"/>
-          <p:cNvSpPr/>
-          <p:nvPr/>
-        </p:nvSpPr>
-        <p:spPr>
-          <a:xfrm>
-            <a:off x="8257032" y="3182112"/>
-            <a:ext cx="3154680" cy="365760"/>
+              <a:t>홈 · 내 페이지 · 공유</a:t>
+            </a:r>
+            <a:endParaRPr lang="en-US" sz="1100" dirty="0"/>
+          </a:p>
+        </p:txBody>
+      </p:sp>
+      <p:sp>
+        <p:nvSpPr>
+          <p:cNvPr id="37" name="Text 35"/>
+          <p:cNvSpPr/>
+          <p:nvPr/>
+        </p:nvSpPr>
+        <p:spPr>
+          <a:xfrm>
+            <a:off x="8348472" y="3108960"/>
+            <a:ext cx="3063240" cy="347472"/>
           </a:xfrm>
           <a:prstGeom prst="rect">
             <a:avLst/>
@@ -12827,7 +12934,7 @@
               <a:buNone/>
             </a:pPr>
             <a:r>
-              <a:rPr lang="en-US" sz="1050" dirty="0">
+              <a:rPr lang="en-US" sz="1000" dirty="0">
                 <a:solidFill>
                   <a:srgbClr val="55555A"/>
                 </a:solidFill>
@@ -12835,21 +12942,21 @@
                 <a:ea typeface="Pretendard" pitchFamily="34" charset="-122"/>
                 <a:cs typeface="Pretendard" pitchFamily="34" charset="-120"/>
               </a:rPr>
-              <a:t>→ [SV] 소식지/1. 제작</a:t>
-            </a:r>
-            <a:endParaRPr lang="en-US" sz="1050" dirty="0"/>
-          </a:p>
-        </p:txBody>
-      </p:sp>
-      <p:sp>
-        <p:nvSpPr>
-          <p:cNvPr id="35" name="Shape 33"/>
-          <p:cNvSpPr/>
-          <p:nvPr/>
-        </p:nvSpPr>
-        <p:spPr>
-          <a:xfrm>
-            <a:off x="6336792" y="3584448"/>
+              <a:t>→ [DS] 3-7 · 3-9</a:t>
+            </a:r>
+            <a:endParaRPr lang="en-US" sz="1000" dirty="0"/>
+          </a:p>
+        </p:txBody>
+      </p:sp>
+      <p:sp>
+        <p:nvSpPr>
+          <p:cNvPr id="38" name="Shape 36"/>
+          <p:cNvSpPr/>
+          <p:nvPr/>
+        </p:nvSpPr>
+        <p:spPr>
+          <a:xfrm>
+            <a:off x="6336792" y="3465576"/>
             <a:ext cx="5074920" cy="0"/>
           </a:xfrm>
           <a:prstGeom prst="line">
@@ -12866,14 +12973,14 @@
       </p:sp>
       <p:sp>
         <p:nvSpPr>
-          <p:cNvPr id="36" name="Text 34"/>
-          <p:cNvSpPr/>
-          <p:nvPr/>
-        </p:nvSpPr>
-        <p:spPr>
-          <a:xfrm>
-            <a:off x="6336792" y="3639312"/>
-            <a:ext cx="1874520" cy="365760"/>
+          <p:cNvPr id="39" name="Text 37"/>
+          <p:cNvSpPr/>
+          <p:nvPr/>
+        </p:nvSpPr>
+        <p:spPr>
+          <a:xfrm>
+            <a:off x="6336792" y="3511296"/>
+            <a:ext cx="1965960" cy="347472"/>
           </a:xfrm>
           <a:prstGeom prst="rect">
             <a:avLst/>
@@ -12892,7 +12999,7 @@
               <a:buNone/>
             </a:pPr>
             <a:r>
-              <a:rPr lang="en-US" sz="1150" dirty="0">
+              <a:rPr lang="en-US" sz="1100" dirty="0">
                 <a:solidFill>
                   <a:srgbClr val="1D1D1F"/>
                 </a:solidFill>
@@ -12900,22 +13007,22 @@
                 <a:ea typeface="Pretendard SemiBold" pitchFamily="34" charset="-122"/>
                 <a:cs typeface="Pretendard SemiBold" pitchFamily="34" charset="-120"/>
               </a:rPr>
-              <a:t>QR 이벤트</a:t>
-            </a:r>
-            <a:endParaRPr lang="en-US" sz="1150" dirty="0"/>
-          </a:p>
-        </p:txBody>
-      </p:sp>
-      <p:sp>
-        <p:nvSpPr>
-          <p:cNvPr id="37" name="Text 35"/>
-          <p:cNvSpPr/>
-          <p:nvPr/>
-        </p:nvSpPr>
-        <p:spPr>
-          <a:xfrm>
-            <a:off x="8257032" y="3639312"/>
-            <a:ext cx="3154680" cy="365760"/>
+              <a:t>버전 기록</a:t>
+            </a:r>
+            <a:endParaRPr lang="en-US" sz="1100" dirty="0"/>
+          </a:p>
+        </p:txBody>
+      </p:sp>
+      <p:sp>
+        <p:nvSpPr>
+          <p:cNvPr id="40" name="Text 38"/>
+          <p:cNvSpPr/>
+          <p:nvPr/>
+        </p:nvSpPr>
+        <p:spPr>
+          <a:xfrm>
+            <a:off x="8348472" y="3511296"/>
+            <a:ext cx="3063240" cy="347472"/>
           </a:xfrm>
           <a:prstGeom prst="rect">
             <a:avLst/>
@@ -12934,7 +13041,7 @@
               <a:buNone/>
             </a:pPr>
             <a:r>
-              <a:rPr lang="en-US" sz="1050" dirty="0">
+              <a:rPr lang="en-US" sz="1000" dirty="0">
                 <a:solidFill>
                   <a:srgbClr val="55555A"/>
                 </a:solidFill>
@@ -12942,21 +13049,21 @@
                 <a:ea typeface="Pretendard" pitchFamily="34" charset="-122"/>
                 <a:cs typeface="Pretendard" pitchFamily="34" charset="-120"/>
               </a:rPr>
-              <a:t>→ makevu 3. 워크플로우</a:t>
-            </a:r>
-            <a:endParaRPr lang="en-US" sz="1050" dirty="0"/>
-          </a:p>
-        </p:txBody>
-      </p:sp>
-      <p:sp>
-        <p:nvSpPr>
-          <p:cNvPr id="38" name="Shape 36"/>
-          <p:cNvSpPr/>
-          <p:nvPr/>
-        </p:nvSpPr>
-        <p:spPr>
-          <a:xfrm>
-            <a:off x="6336792" y="4041648"/>
+              <a:t>→ [DS] 3-15</a:t>
+            </a:r>
+            <a:endParaRPr lang="en-US" sz="1000" dirty="0"/>
+          </a:p>
+        </p:txBody>
+      </p:sp>
+      <p:sp>
+        <p:nvSpPr>
+          <p:cNvPr id="41" name="Shape 39"/>
+          <p:cNvSpPr/>
+          <p:nvPr/>
+        </p:nvSpPr>
+        <p:spPr>
+          <a:xfrm>
+            <a:off x="6336792" y="3867912"/>
             <a:ext cx="5074920" cy="0"/>
           </a:xfrm>
           <a:prstGeom prst="line">
@@ -12973,14 +13080,14 @@
       </p:sp>
       <p:sp>
         <p:nvSpPr>
-          <p:cNvPr id="39" name="Text 37"/>
-          <p:cNvSpPr/>
-          <p:nvPr/>
-        </p:nvSpPr>
-        <p:spPr>
-          <a:xfrm>
-            <a:off x="6336792" y="4096512"/>
-            <a:ext cx="1874520" cy="365760"/>
+          <p:cNvPr id="42" name="Text 40"/>
+          <p:cNvSpPr/>
+          <p:nvPr/>
+        </p:nvSpPr>
+        <p:spPr>
+          <a:xfrm>
+            <a:off x="6336792" y="3913632"/>
+            <a:ext cx="1965960" cy="347472"/>
           </a:xfrm>
           <a:prstGeom prst="rect">
             <a:avLst/>
@@ -12999,7 +13106,7 @@
               <a:buNone/>
             </a:pPr>
             <a:r>
-              <a:rPr lang="en-US" sz="1150" dirty="0">
+              <a:rPr lang="en-US" sz="1100" dirty="0">
                 <a:solidFill>
                   <a:srgbClr val="1D1D1F"/>
                 </a:solidFill>
@@ -13007,22 +13114,22 @@
                 <a:ea typeface="Pretendard SemiBold" pitchFamily="34" charset="-122"/>
                 <a:cs typeface="Pretendard SemiBold" pitchFamily="34" charset="-120"/>
               </a:rPr>
-              <a:t>블로그 썸네일</a:t>
-            </a:r>
-            <a:endParaRPr lang="en-US" sz="1150" dirty="0"/>
-          </a:p>
-        </p:txBody>
-      </p:sp>
-      <p:sp>
-        <p:nvSpPr>
-          <p:cNvPr id="40" name="Text 38"/>
-          <p:cNvSpPr/>
-          <p:nvPr/>
-        </p:nvSpPr>
-        <p:spPr>
-          <a:xfrm>
-            <a:off x="8257032" y="4096512"/>
-            <a:ext cx="3154680" cy="365760"/>
+              <a:t>페이지 · URL 통계</a:t>
+            </a:r>
+            <a:endParaRPr lang="en-US" sz="1100" dirty="0"/>
+          </a:p>
+        </p:txBody>
+      </p:sp>
+      <p:sp>
+        <p:nvSpPr>
+          <p:cNvPr id="43" name="Text 41"/>
+          <p:cNvSpPr/>
+          <p:nvPr/>
+        </p:nvSpPr>
+        <p:spPr>
+          <a:xfrm>
+            <a:off x="8348472" y="3913632"/>
+            <a:ext cx="3063240" cy="347472"/>
           </a:xfrm>
           <a:prstGeom prst="rect">
             <a:avLst/>
@@ -13041,7 +13148,7 @@
               <a:buNone/>
             </a:pPr>
             <a:r>
-              <a:rPr lang="en-US" sz="1050" dirty="0">
+              <a:rPr lang="en-US" sz="1000" dirty="0">
                 <a:solidFill>
                   <a:srgbClr val="55555A"/>
                 </a:solidFill>
@@ -13049,21 +13156,21 @@
                 <a:ea typeface="Pretendard" pitchFamily="34" charset="-122"/>
                 <a:cs typeface="Pretendard" pitchFamily="34" charset="-120"/>
               </a:rPr>
-              <a:t>→ marketing 1-1. 썸네일</a:t>
-            </a:r>
-            <a:endParaRPr lang="en-US" sz="1050" dirty="0"/>
-          </a:p>
-        </p:txBody>
-      </p:sp>
-      <p:sp>
-        <p:nvSpPr>
-          <p:cNvPr id="41" name="Shape 39"/>
-          <p:cNvSpPr/>
-          <p:nvPr/>
-        </p:nvSpPr>
-        <p:spPr>
-          <a:xfrm>
-            <a:off x="6336792" y="4498848"/>
+              <a:t>→ [DS] 3-11</a:t>
+            </a:r>
+            <a:endParaRPr lang="en-US" sz="1000" dirty="0"/>
+          </a:p>
+        </p:txBody>
+      </p:sp>
+      <p:sp>
+        <p:nvSpPr>
+          <p:cNvPr id="44" name="Shape 42"/>
+          <p:cNvSpPr/>
+          <p:nvPr/>
+        </p:nvSpPr>
+        <p:spPr>
+          <a:xfrm>
+            <a:off x="6336792" y="4270248"/>
             <a:ext cx="5074920" cy="0"/>
           </a:xfrm>
           <a:prstGeom prst="line">
@@ -13080,14 +13187,14 @@
       </p:sp>
       <p:sp>
         <p:nvSpPr>
-          <p:cNvPr id="42" name="Text 40"/>
-          <p:cNvSpPr/>
-          <p:nvPr/>
-        </p:nvSpPr>
-        <p:spPr>
-          <a:xfrm>
-            <a:off x="6336792" y="4553712"/>
-            <a:ext cx="1874520" cy="365760"/>
+          <p:cNvPr id="45" name="Text 43"/>
+          <p:cNvSpPr/>
+          <p:nvPr/>
+        </p:nvSpPr>
+        <p:spPr>
+          <a:xfrm>
+            <a:off x="6336792" y="4315968"/>
+            <a:ext cx="1965960" cy="347472"/>
           </a:xfrm>
           <a:prstGeom prst="rect">
             <a:avLst/>
@@ -13106,7 +13213,7 @@
               <a:buNone/>
             </a:pPr>
             <a:r>
-              <a:rPr lang="en-US" sz="1150" dirty="0">
+              <a:rPr lang="en-US" sz="1100" dirty="0">
                 <a:solidFill>
                   <a:srgbClr val="1D1D1F"/>
                 </a:solidFill>
@@ -13114,22 +13221,22 @@
                 <a:ea typeface="Pretendard SemiBold" pitchFamily="34" charset="-122"/>
                 <a:cs typeface="Pretendard SemiBold" pitchFamily="34" charset="-120"/>
               </a:rPr>
-              <a:t>아이콘 제작</a:t>
-            </a:r>
-            <a:endParaRPr lang="en-US" sz="1150" dirty="0"/>
-          </a:p>
-        </p:txBody>
-      </p:sp>
-      <p:sp>
-        <p:nvSpPr>
-          <p:cNvPr id="43" name="Text 41"/>
-          <p:cNvSpPr/>
-          <p:nvPr/>
-        </p:nvSpPr>
-        <p:spPr>
-          <a:xfrm>
-            <a:off x="8257032" y="4553712"/>
-            <a:ext cx="3154680" cy="365760"/>
+              <a:t>계정 · 내 주소</a:t>
+            </a:r>
+            <a:endParaRPr lang="en-US" sz="1100" dirty="0"/>
+          </a:p>
+        </p:txBody>
+      </p:sp>
+      <p:sp>
+        <p:nvSpPr>
+          <p:cNvPr id="46" name="Text 44"/>
+          <p:cNvSpPr/>
+          <p:nvPr/>
+        </p:nvSpPr>
+        <p:spPr>
+          <a:xfrm>
+            <a:off x="8348472" y="4315968"/>
+            <a:ext cx="3063240" cy="347472"/>
           </a:xfrm>
           <a:prstGeom prst="rect">
             <a:avLst/>
@@ -13148,7 +13255,7 @@
               <a:buNone/>
             </a:pPr>
             <a:r>
-              <a:rPr lang="en-US" sz="1050" dirty="0">
+              <a:rPr lang="en-US" sz="1000" dirty="0">
                 <a:solidFill>
                   <a:srgbClr val="55555A"/>
                 </a:solidFill>
@@ -13156,21 +13263,342 @@
                 <a:ea typeface="Pretendard" pitchFamily="34" charset="-122"/>
                 <a:cs typeface="Pretendard" pitchFamily="34" charset="-120"/>
               </a:rPr>
-              <a:t>→ [DS] skills/icon-use</a:t>
-            </a:r>
-            <a:endParaRPr lang="en-US" sz="1050" dirty="0"/>
-          </a:p>
-        </p:txBody>
-      </p:sp>
-      <p:sp>
-        <p:nvSpPr>
-          <p:cNvPr id="44" name="Text 42"/>
-          <p:cNvSpPr/>
-          <p:nvPr/>
-        </p:nvSpPr>
-        <p:spPr>
-          <a:xfrm>
-            <a:off x="777240" y="5806440"/>
+              <a:t>→ [DS] 3-8 · 3-5</a:t>
+            </a:r>
+            <a:endParaRPr lang="en-US" sz="1000" dirty="0"/>
+          </a:p>
+        </p:txBody>
+      </p:sp>
+      <p:sp>
+        <p:nvSpPr>
+          <p:cNvPr id="47" name="Shape 45"/>
+          <p:cNvSpPr/>
+          <p:nvPr/>
+        </p:nvSpPr>
+        <p:spPr>
+          <a:xfrm>
+            <a:off x="6336792" y="4672584"/>
+            <a:ext cx="5074920" cy="0"/>
+          </a:xfrm>
+          <a:prstGeom prst="line">
+            <a:avLst/>
+          </a:prstGeom>
+          <a:noFill/>
+          <a:ln w="6350">
+            <a:solidFill>
+              <a:srgbClr val="F0F0F0"/>
+            </a:solidFill>
+            <a:prstDash val="solid"/>
+          </a:ln>
+        </p:spPr>
+      </p:sp>
+      <p:sp>
+        <p:nvSpPr>
+          <p:cNvPr id="48" name="Text 46"/>
+          <p:cNvSpPr/>
+          <p:nvPr/>
+        </p:nvSpPr>
+        <p:spPr>
+          <a:xfrm>
+            <a:off x="6336792" y="4718304"/>
+            <a:ext cx="1965960" cy="347472"/>
+          </a:xfrm>
+          <a:prstGeom prst="rect">
+            <a:avLst/>
+          </a:prstGeom>
+          <a:noFill/>
+          <a:ln/>
+        </p:spPr>
+        <p:txBody>
+          <a:bodyPr wrap="square" lIns="0" tIns="0" rIns="0" bIns="0" rtlCol="0" anchor="ctr"/>
+          <a:lstStyle/>
+          <a:p>
+            <a:pPr algn="l" indent="0" marL="0">
+              <a:lnSpc>
+                <a:spcPct val="130000"/>
+              </a:lnSpc>
+              <a:buNone/>
+            </a:pPr>
+            <a:r>
+              <a:rPr lang="en-US" sz="1100" dirty="0">
+                <a:solidFill>
+                  <a:srgbClr val="1D1D1F"/>
+                </a:solidFill>
+                <a:latin typeface="Pretendard SemiBold" pitchFamily="34" charset="0"/>
+                <a:ea typeface="Pretendard SemiBold" pitchFamily="34" charset="-122"/>
+                <a:cs typeface="Pretendard SemiBold" pitchFamily="34" charset="-120"/>
+              </a:rPr>
+              <a:t>권한</a:t>
+            </a:r>
+            <a:endParaRPr lang="en-US" sz="1100" dirty="0"/>
+          </a:p>
+        </p:txBody>
+      </p:sp>
+      <p:sp>
+        <p:nvSpPr>
+          <p:cNvPr id="49" name="Text 47"/>
+          <p:cNvSpPr/>
+          <p:nvPr/>
+        </p:nvSpPr>
+        <p:spPr>
+          <a:xfrm>
+            <a:off x="8348472" y="4718304"/>
+            <a:ext cx="3063240" cy="347472"/>
+          </a:xfrm>
+          <a:prstGeom prst="rect">
+            <a:avLst/>
+          </a:prstGeom>
+          <a:noFill/>
+          <a:ln/>
+        </p:spPr>
+        <p:txBody>
+          <a:bodyPr wrap="square" lIns="0" tIns="0" rIns="0" bIns="0" rtlCol="0" anchor="ctr"/>
+          <a:lstStyle/>
+          <a:p>
+            <a:pPr algn="l" indent="0" marL="0">
+              <a:lnSpc>
+                <a:spcPct val="130000"/>
+              </a:lnSpc>
+              <a:buNone/>
+            </a:pPr>
+            <a:r>
+              <a:rPr lang="en-US" sz="1000" dirty="0">
+                <a:solidFill>
+                  <a:srgbClr val="55555A"/>
+                </a:solidFill>
+                <a:latin typeface="Pretendard" pitchFamily="34" charset="0"/>
+                <a:ea typeface="Pretendard" pitchFamily="34" charset="-122"/>
+                <a:cs typeface="Pretendard" pitchFamily="34" charset="-120"/>
+              </a:rPr>
+              <a:t>→ [DS] 3-13</a:t>
+            </a:r>
+            <a:endParaRPr lang="en-US" sz="1000" dirty="0"/>
+          </a:p>
+        </p:txBody>
+      </p:sp>
+      <p:sp>
+        <p:nvSpPr>
+          <p:cNvPr id="50" name="Shape 48"/>
+          <p:cNvSpPr/>
+          <p:nvPr/>
+        </p:nvSpPr>
+        <p:spPr>
+          <a:xfrm>
+            <a:off x="6336792" y="5074920"/>
+            <a:ext cx="5074920" cy="0"/>
+          </a:xfrm>
+          <a:prstGeom prst="line">
+            <a:avLst/>
+          </a:prstGeom>
+          <a:noFill/>
+          <a:ln w="6350">
+            <a:solidFill>
+              <a:srgbClr val="F0F0F0"/>
+            </a:solidFill>
+            <a:prstDash val="solid"/>
+          </a:ln>
+        </p:spPr>
+      </p:sp>
+      <p:sp>
+        <p:nvSpPr>
+          <p:cNvPr id="51" name="Text 49"/>
+          <p:cNvSpPr/>
+          <p:nvPr/>
+        </p:nvSpPr>
+        <p:spPr>
+          <a:xfrm>
+            <a:off x="6336792" y="5120640"/>
+            <a:ext cx="1965960" cy="347472"/>
+          </a:xfrm>
+          <a:prstGeom prst="rect">
+            <a:avLst/>
+          </a:prstGeom>
+          <a:noFill/>
+          <a:ln/>
+        </p:spPr>
+        <p:txBody>
+          <a:bodyPr wrap="square" lIns="0" tIns="0" rIns="0" bIns="0" rtlCol="0" anchor="ctr"/>
+          <a:lstStyle/>
+          <a:p>
+            <a:pPr algn="l" indent="0" marL="0">
+              <a:lnSpc>
+                <a:spcPct val="130000"/>
+              </a:lnSpc>
+              <a:buNone/>
+            </a:pPr>
+            <a:r>
+              <a:rPr lang="en-US" sz="1100" dirty="0">
+                <a:solidFill>
+                  <a:srgbClr val="1D1D1F"/>
+                </a:solidFill>
+                <a:latin typeface="Pretendard SemiBold" pitchFamily="34" charset="0"/>
+                <a:ea typeface="Pretendard SemiBold" pitchFamily="34" charset="-122"/>
+                <a:cs typeface="Pretendard SemiBold" pitchFamily="34" charset="-120"/>
+              </a:rPr>
+              <a:t>요금 · 결제</a:t>
+            </a:r>
+            <a:endParaRPr lang="en-US" sz="1100" dirty="0"/>
+          </a:p>
+        </p:txBody>
+      </p:sp>
+      <p:sp>
+        <p:nvSpPr>
+          <p:cNvPr id="52" name="Text 50"/>
+          <p:cNvSpPr/>
+          <p:nvPr/>
+        </p:nvSpPr>
+        <p:spPr>
+          <a:xfrm>
+            <a:off x="8348472" y="5120640"/>
+            <a:ext cx="3063240" cy="347472"/>
+          </a:xfrm>
+          <a:prstGeom prst="rect">
+            <a:avLst/>
+          </a:prstGeom>
+          <a:noFill/>
+          <a:ln/>
+        </p:spPr>
+        <p:txBody>
+          <a:bodyPr wrap="square" lIns="0" tIns="0" rIns="0" bIns="0" rtlCol="0" anchor="ctr"/>
+          <a:lstStyle/>
+          <a:p>
+            <a:pPr algn="l" indent="0" marL="0">
+              <a:lnSpc>
+                <a:spcPct val="130000"/>
+              </a:lnSpc>
+              <a:buNone/>
+            </a:pPr>
+            <a:r>
+              <a:rPr lang="en-US" sz="1000" dirty="0">
+                <a:solidFill>
+                  <a:srgbClr val="55555A"/>
+                </a:solidFill>
+                <a:latin typeface="Pretendard" pitchFamily="34" charset="0"/>
+                <a:ea typeface="Pretendard" pitchFamily="34" charset="-122"/>
+                <a:cs typeface="Pretendard" pitchFamily="34" charset="-120"/>
+              </a:rPr>
+              <a:t>→ [DS] 3-8 §크레딧</a:t>
+            </a:r>
+            <a:endParaRPr lang="en-US" sz="1000" dirty="0"/>
+          </a:p>
+        </p:txBody>
+      </p:sp>
+      <p:sp>
+        <p:nvSpPr>
+          <p:cNvPr id="53" name="Shape 51"/>
+          <p:cNvSpPr/>
+          <p:nvPr/>
+        </p:nvSpPr>
+        <p:spPr>
+          <a:xfrm>
+            <a:off x="6336792" y="5477256"/>
+            <a:ext cx="5074920" cy="0"/>
+          </a:xfrm>
+          <a:prstGeom prst="line">
+            <a:avLst/>
+          </a:prstGeom>
+          <a:noFill/>
+          <a:ln w="6350">
+            <a:solidFill>
+              <a:srgbClr val="F0F0F0"/>
+            </a:solidFill>
+            <a:prstDash val="solid"/>
+          </a:ln>
+        </p:spPr>
+      </p:sp>
+      <p:sp>
+        <p:nvSpPr>
+          <p:cNvPr id="54" name="Text 52"/>
+          <p:cNvSpPr/>
+          <p:nvPr/>
+        </p:nvSpPr>
+        <p:spPr>
+          <a:xfrm>
+            <a:off x="6336792" y="5522976"/>
+            <a:ext cx="1965960" cy="347472"/>
+          </a:xfrm>
+          <a:prstGeom prst="rect">
+            <a:avLst/>
+          </a:prstGeom>
+          <a:noFill/>
+          <a:ln/>
+        </p:spPr>
+        <p:txBody>
+          <a:bodyPr wrap="square" lIns="0" tIns="0" rIns="0" bIns="0" rtlCol="0" anchor="ctr"/>
+          <a:lstStyle/>
+          <a:p>
+            <a:pPr algn="l" indent="0" marL="0">
+              <a:lnSpc>
+                <a:spcPct val="130000"/>
+              </a:lnSpc>
+              <a:buNone/>
+            </a:pPr>
+            <a:r>
+              <a:rPr lang="en-US" sz="1100" dirty="0">
+                <a:solidFill>
+                  <a:srgbClr val="1D1D1F"/>
+                </a:solidFill>
+                <a:latin typeface="Pretendard SemiBold" pitchFamily="34" charset="0"/>
+                <a:ea typeface="Pretendard SemiBold" pitchFamily="34" charset="-122"/>
+                <a:cs typeface="Pretendard SemiBold" pitchFamily="34" charset="-120"/>
+              </a:rPr>
+              <a:t>템플릿 페이지 생성</a:t>
+            </a:r>
+            <a:endParaRPr lang="en-US" sz="1100" dirty="0"/>
+          </a:p>
+        </p:txBody>
+      </p:sp>
+      <p:sp>
+        <p:nvSpPr>
+          <p:cNvPr id="55" name="Text 53"/>
+          <p:cNvSpPr/>
+          <p:nvPr/>
+        </p:nvSpPr>
+        <p:spPr>
+          <a:xfrm>
+            <a:off x="8348472" y="5522976"/>
+            <a:ext cx="3063240" cy="347472"/>
+          </a:xfrm>
+          <a:prstGeom prst="rect">
+            <a:avLst/>
+          </a:prstGeom>
+          <a:noFill/>
+          <a:ln/>
+        </p:spPr>
+        <p:txBody>
+          <a:bodyPr wrap="square" lIns="0" tIns="0" rIns="0" bIns="0" rtlCol="0" anchor="ctr"/>
+          <a:lstStyle/>
+          <a:p>
+            <a:pPr algn="l" indent="0" marL="0">
+              <a:lnSpc>
+                <a:spcPct val="130000"/>
+              </a:lnSpc>
+              <a:buNone/>
+            </a:pPr>
+            <a:r>
+              <a:rPr lang="en-US" sz="1000" dirty="0">
+                <a:solidFill>
+                  <a:srgbClr val="55555A"/>
+                </a:solidFill>
+                <a:latin typeface="Pretendard" pitchFamily="34" charset="0"/>
+                <a:ea typeface="Pretendard" pitchFamily="34" charset="-122"/>
+                <a:cs typeface="Pretendard" pitchFamily="34" charset="-120"/>
+              </a:rPr>
+              <a:t>→ [DS] 3-14 · [T] 1-1</a:t>
+            </a:r>
+            <a:endParaRPr lang="en-US" sz="1000" dirty="0"/>
+          </a:p>
+        </p:txBody>
+      </p:sp>
+      <p:sp>
+        <p:nvSpPr>
+          <p:cNvPr id="56" name="Text 54"/>
+          <p:cNvSpPr/>
+          <p:nvPr/>
+        </p:nvSpPr>
+        <p:spPr>
+          <a:xfrm>
+            <a:off x="777240" y="5870448"/>
             <a:ext cx="10637215" cy="274320"/>
           </a:xfrm>
           <a:prstGeom prst="rect">
@@ -13198,7 +13626,7 @@
                 <a:ea typeface="Pretendard Medium" pitchFamily="34" charset="-122"/>
                 <a:cs typeface="Pretendard Medium" pitchFamily="34" charset="-120"/>
               </a:rPr>
-              <a:t>핵심 — CdBd 기능뿐 아니라 룩북·QR·마케팅 작업까지 전부. 어느 볼트에서 켜도 이 한 파일로 다 압니다.</a:t>
+              <a:t>핵심 — CdBd 기능만 통합합니다. 룩북·소식지·QR·블로그 같은 제작 작업은 넣지 않습니다.</a:t>
             </a:r>
             <a:endParaRPr lang="en-US" sz="1100" dirty="0"/>
           </a:p>
